--- a/wavesplat/docs/labmeeting_wavesplat.pptx
+++ b/wavesplat/docs/labmeeting_wavesplat.pptx
@@ -20,6 +20,7 @@
     <p:sldId id="268" r:id="rId19"/>
     <p:sldId id="269" r:id="rId20"/>
     <p:sldId id="270" r:id="rId21"/>
+    <p:sldId id="271" r:id="rId22"/>
   </p:sldIdLst>
   <p:sldSz cx="12191695" cy="6858000" type="screen4x3"/>
   <p:notesSz cx="6858000" cy="9144000"/>
@@ -3325,7 +3326,7 @@
               </a:defRPr>
             </a:pPr>
             <a:r>
-              <a:t>1/15</a:t>
+              <a:t>1/16</a:t>
             </a:r>
           </a:p>
         </p:txBody>
@@ -3339,6 +3340,303 @@
 </file>
 
 <file path=ppt/slides/slide10.xml><?xml version="1.0" encoding="utf-8"?>
+<p:sld xmlns:a="http://schemas.openxmlformats.org/drawingml/2006/main" xmlns:p="http://schemas.openxmlformats.org/presentationml/2006/main" xmlns:r="http://schemas.openxmlformats.org/officeDocument/2006/relationships">
+  <p:cSld>
+    <p:bg>
+      <p:bgPr>
+        <a:solidFill>
+          <a:srgbClr val="FFFFFF"/>
+        </a:solidFill>
+        <a:effectLst/>
+      </p:bgPr>
+    </p:bg>
+    <p:spTree>
+      <p:nvGrpSpPr>
+        <p:cNvPr id="1" name=""/>
+        <p:cNvGrpSpPr/>
+        <p:nvPr/>
+      </p:nvGrpSpPr>
+      <p:grpSpPr/>
+      <p:sp>
+        <p:nvSpPr>
+          <p:cNvPr id="2" name="Rectangle 1"/>
+          <p:cNvSpPr/>
+          <p:nvPr/>
+        </p:nvSpPr>
+        <p:spPr>
+          <a:xfrm>
+            <a:off x="0" y="0"/>
+            <a:ext cx="12191695" cy="1097280"/>
+          </a:xfrm>
+          <a:prstGeom prst="rect">
+            <a:avLst/>
+          </a:prstGeom>
+          <a:solidFill>
+            <a:srgbClr val="1A1A2E"/>
+          </a:solidFill>
+          <a:ln>
+            <a:noFill/>
+          </a:ln>
+        </p:spPr>
+        <p:style>
+          <a:lnRef idx="1">
+            <a:schemeClr val="accent1"/>
+          </a:lnRef>
+          <a:fillRef idx="3">
+            <a:schemeClr val="accent1"/>
+          </a:fillRef>
+          <a:effectRef idx="2">
+            <a:schemeClr val="accent1"/>
+          </a:effectRef>
+          <a:fontRef idx="minor">
+            <a:schemeClr val="lt1"/>
+          </a:fontRef>
+        </p:style>
+        <p:txBody>
+          <a:bodyPr rtlCol="0" anchor="ctr"/>
+          <a:lstStyle/>
+          <a:p>
+            <a:pPr algn="ctr"/>
+          </a:p>
+        </p:txBody>
+      </p:sp>
+      <p:sp>
+        <p:nvSpPr>
+          <p:cNvPr id="3" name="TextBox 2"/>
+          <p:cNvSpPr txBox="1"/>
+          <p:nvPr/>
+        </p:nvSpPr>
+        <p:spPr>
+          <a:xfrm>
+            <a:off x="457200" y="137160"/>
+            <a:ext cx="10972800" cy="457200"/>
+          </a:xfrm>
+          <a:prstGeom prst="rect">
+            <a:avLst/>
+          </a:prstGeom>
+          <a:noFill/>
+        </p:spPr>
+        <p:txBody>
+          <a:bodyPr wrap="square">
+            <a:spAutoFit/>
+          </a:bodyPr>
+          <a:lstStyle/>
+          <a:p>
+            <a:pPr algn="l">
+              <a:defRPr sz="1400" b="0">
+                <a:solidFill>
+                  <a:srgbClr val="007ACC"/>
+                </a:solidFill>
+                <a:latin typeface="Calibri"/>
+              </a:defRPr>
+            </a:pPr>
+            <a:r>
+              <a:t>  04</a:t>
+            </a:r>
+          </a:p>
+        </p:txBody>
+      </p:sp>
+      <p:sp>
+        <p:nvSpPr>
+          <p:cNvPr id="4" name="TextBox 3"/>
+          <p:cNvSpPr txBox="1"/>
+          <p:nvPr/>
+        </p:nvSpPr>
+        <p:spPr>
+          <a:xfrm>
+            <a:off x="457200" y="320040"/>
+            <a:ext cx="10972800" cy="640080"/>
+          </a:xfrm>
+          <a:prstGeom prst="rect">
+            <a:avLst/>
+          </a:prstGeom>
+          <a:noFill/>
+        </p:spPr>
+        <p:txBody>
+          <a:bodyPr wrap="square">
+            <a:spAutoFit/>
+          </a:bodyPr>
+          <a:lstStyle/>
+          <a:p>
+            <a:pPr algn="l">
+              <a:defRPr sz="2800" b="1">
+                <a:solidFill>
+                  <a:srgbClr val="FFFFFF"/>
+                </a:solidFill>
+                <a:latin typeface="Calibri"/>
+              </a:defRPr>
+            </a:pPr>
+            <a:r>
+              <a:t>  Per-episode 결과 &amp; 속도</a:t>
+            </a:r>
+          </a:p>
+        </p:txBody>
+      </p:sp>
+      <p:sp>
+        <p:nvSpPr>
+          <p:cNvPr id="5" name="TextBox 4"/>
+          <p:cNvSpPr txBox="1"/>
+          <p:nvPr/>
+        </p:nvSpPr>
+        <p:spPr>
+          <a:xfrm>
+            <a:off x="457200" y="685800"/>
+            <a:ext cx="10972800" cy="365760"/>
+          </a:xfrm>
+          <a:prstGeom prst="rect">
+            <a:avLst/>
+          </a:prstGeom>
+          <a:noFill/>
+        </p:spPr>
+        <p:txBody>
+          <a:bodyPr wrap="square">
+            <a:spAutoFit/>
+          </a:bodyPr>
+          <a:lstStyle/>
+          <a:p>
+            <a:pPr algn="l">
+              <a:defRPr sz="1400" b="0">
+                <a:solidFill>
+                  <a:srgbClr val="AABBCC"/>
+                </a:solidFill>
+                <a:latin typeface="Calibri"/>
+              </a:defRPr>
+            </a:pPr>
+            <a:r>
+              <a:t>  12 Representative Episodes</a:t>
+            </a:r>
+          </a:p>
+        </p:txBody>
+      </p:sp>
+      <p:pic>
+        <p:nvPicPr>
+          <p:cNvPr id="6" name="Picture 5" descr="fig1_comparison.png"/>
+          <p:cNvPicPr>
+            <a:picLocks noChangeAspect="1"/>
+          </p:cNvPicPr>
+          <p:nvPr/>
+        </p:nvPicPr>
+        <p:blipFill>
+          <a:blip r:embed="rId2"/>
+          <a:stretch>
+            <a:fillRect/>
+          </a:stretch>
+        </p:blipFill>
+        <p:spPr>
+          <a:xfrm>
+            <a:off x="457200" y="1371600"/>
+            <a:ext cx="5486400" cy="4114800"/>
+          </a:xfrm>
+          <a:prstGeom prst="rect">
+            <a:avLst/>
+          </a:prstGeom>
+        </p:spPr>
+      </p:pic>
+      <p:pic>
+        <p:nvPicPr>
+          <p:cNvPr id="7" name="Picture 6" descr="fig3_speed.png"/>
+          <p:cNvPicPr>
+            <a:picLocks noChangeAspect="1"/>
+          </p:cNvPicPr>
+          <p:nvPr/>
+        </p:nvPicPr>
+        <p:blipFill>
+          <a:blip r:embed="rId3"/>
+          <a:stretch>
+            <a:fillRect/>
+          </a:stretch>
+        </p:blipFill>
+        <p:spPr>
+          <a:xfrm>
+            <a:off x="6217920" y="1371600"/>
+            <a:ext cx="5486400" cy="4114800"/>
+          </a:xfrm>
+          <a:prstGeom prst="rect">
+            <a:avLst/>
+          </a:prstGeom>
+        </p:spPr>
+      </p:pic>
+      <p:sp>
+        <p:nvSpPr>
+          <p:cNvPr id="8" name="TextBox 7"/>
+          <p:cNvSpPr txBox="1"/>
+          <p:nvPr/>
+        </p:nvSpPr>
+        <p:spPr>
+          <a:xfrm>
+            <a:off x="457200" y="5760720"/>
+            <a:ext cx="10972800" cy="548640"/>
+          </a:xfrm>
+          <a:prstGeom prst="rect">
+            <a:avLst/>
+          </a:prstGeom>
+          <a:noFill/>
+        </p:spPr>
+        <p:txBody>
+          <a:bodyPr wrap="square">
+            <a:spAutoFit/>
+          </a:bodyPr>
+          <a:lstStyle/>
+          <a:p>
+            <a:pPr algn="ctr">
+              <a:defRPr sz="1800" b="1">
+                <a:solidFill>
+                  <a:srgbClr val="007ACC"/>
+                </a:solidFill>
+                <a:latin typeface="Calibri"/>
+              </a:defRPr>
+            </a:pPr>
+            <a:r>
+              <a:t>WaveSplat: 12/12 승  |  Best 8.5×  |  13.4 ms vs 132.6 ms (~10× faster)</a:t>
+            </a:r>
+          </a:p>
+        </p:txBody>
+      </p:sp>
+      <p:sp>
+        <p:nvSpPr>
+          <p:cNvPr id="9" name="TextBox 8"/>
+          <p:cNvSpPr txBox="1"/>
+          <p:nvPr/>
+        </p:nvSpPr>
+        <p:spPr>
+          <a:xfrm>
+            <a:off x="10972800" y="6492240"/>
+            <a:ext cx="1097280" cy="274320"/>
+          </a:xfrm>
+          <a:prstGeom prst="rect">
+            <a:avLst/>
+          </a:prstGeom>
+          <a:noFill/>
+        </p:spPr>
+        <p:txBody>
+          <a:bodyPr wrap="square">
+            <a:spAutoFit/>
+          </a:bodyPr>
+          <a:lstStyle/>
+          <a:p>
+            <a:pPr algn="r">
+              <a:defRPr sz="1000" b="0">
+                <a:solidFill>
+                  <a:srgbClr val="666666"/>
+                </a:solidFill>
+                <a:latin typeface="Calibri"/>
+              </a:defRPr>
+            </a:pPr>
+            <a:r>
+              <a:t>10/16</a:t>
+            </a:r>
+          </a:p>
+        </p:txBody>
+      </p:sp>
+    </p:spTree>
+  </p:cSld>
+  <p:clrMapOvr>
+    <a:masterClrMapping/>
+  </p:clrMapOvr>
+</p:sld>
+</file>
+
+<file path=ppt/slides/slide11.xml><?xml version="1.0" encoding="utf-8"?>
 <p:sld xmlns:a="http://schemas.openxmlformats.org/drawingml/2006/main" xmlns:p="http://schemas.openxmlformats.org/presentationml/2006/main" xmlns:r="http://schemas.openxmlformats.org/officeDocument/2006/relationships">
   <p:cSld>
     <p:bg>
@@ -4190,7 +4488,7 @@
               </a:defRPr>
             </a:pPr>
             <a:r>
-              <a:t>10/15</a:t>
+              <a:t>11/16</a:t>
             </a:r>
           </a:p>
         </p:txBody>
@@ -4203,7 +4501,7 @@
 </p:sld>
 </file>
 
-<file path=ppt/slides/slide11.xml><?xml version="1.0" encoding="utf-8"?>
+<file path=ppt/slides/slide12.xml><?xml version="1.0" encoding="utf-8"?>
 <p:sld xmlns:a="http://schemas.openxmlformats.org/drawingml/2006/main" xmlns:p="http://schemas.openxmlformats.org/presentationml/2006/main" xmlns:r="http://schemas.openxmlformats.org/officeDocument/2006/relationships">
   <p:cSld>
     <p:bg>
@@ -4878,645 +5176,7 @@
               </a:defRPr>
             </a:pPr>
             <a:r>
-              <a:t>11/15</a:t>
-            </a:r>
-          </a:p>
-        </p:txBody>
-      </p:sp>
-    </p:spTree>
-  </p:cSld>
-  <p:clrMapOvr>
-    <a:masterClrMapping/>
-  </p:clrMapOvr>
-</p:sld>
-</file>
-
-<file path=ppt/slides/slide12.xml><?xml version="1.0" encoding="utf-8"?>
-<p:sld xmlns:a="http://schemas.openxmlformats.org/drawingml/2006/main" xmlns:p="http://schemas.openxmlformats.org/presentationml/2006/main" xmlns:r="http://schemas.openxmlformats.org/officeDocument/2006/relationships">
-  <p:cSld>
-    <p:bg>
-      <p:bgPr>
-        <a:solidFill>
-          <a:srgbClr val="FFFFFF"/>
-        </a:solidFill>
-        <a:effectLst/>
-      </p:bgPr>
-    </p:bg>
-    <p:spTree>
-      <p:nvGrpSpPr>
-        <p:cNvPr id="1" name=""/>
-        <p:cNvGrpSpPr/>
-        <p:nvPr/>
-      </p:nvGrpSpPr>
-      <p:grpSpPr/>
-      <p:sp>
-        <p:nvSpPr>
-          <p:cNvPr id="2" name="Rectangle 1"/>
-          <p:cNvSpPr/>
-          <p:nvPr/>
-        </p:nvSpPr>
-        <p:spPr>
-          <a:xfrm>
-            <a:off x="0" y="0"/>
-            <a:ext cx="12191695" cy="1097280"/>
-          </a:xfrm>
-          <a:prstGeom prst="rect">
-            <a:avLst/>
-          </a:prstGeom>
-          <a:solidFill>
-            <a:srgbClr val="1A1A2E"/>
-          </a:solidFill>
-          <a:ln>
-            <a:noFill/>
-          </a:ln>
-        </p:spPr>
-        <p:style>
-          <a:lnRef idx="1">
-            <a:schemeClr val="accent1"/>
-          </a:lnRef>
-          <a:fillRef idx="3">
-            <a:schemeClr val="accent1"/>
-          </a:fillRef>
-          <a:effectRef idx="2">
-            <a:schemeClr val="accent1"/>
-          </a:effectRef>
-          <a:fontRef idx="minor">
-            <a:schemeClr val="lt1"/>
-          </a:fontRef>
-        </p:style>
-        <p:txBody>
-          <a:bodyPr rtlCol="0" anchor="ctr"/>
-          <a:lstStyle/>
-          <a:p>
-            <a:pPr algn="ctr"/>
-          </a:p>
-        </p:txBody>
-      </p:sp>
-      <p:sp>
-        <p:nvSpPr>
-          <p:cNvPr id="3" name="TextBox 2"/>
-          <p:cNvSpPr txBox="1"/>
-          <p:nvPr/>
-        </p:nvSpPr>
-        <p:spPr>
-          <a:xfrm>
-            <a:off x="457200" y="137160"/>
-            <a:ext cx="10972800" cy="457200"/>
-          </a:xfrm>
-          <a:prstGeom prst="rect">
-            <a:avLst/>
-          </a:prstGeom>
-          <a:noFill/>
-        </p:spPr>
-        <p:txBody>
-          <a:bodyPr wrap="square">
-            <a:spAutoFit/>
-          </a:bodyPr>
-          <a:lstStyle/>
-          <a:p>
-            <a:pPr algn="l">
-              <a:defRPr sz="1400" b="0">
-                <a:solidFill>
-                  <a:srgbClr val="007ACC"/>
-                </a:solidFill>
-                <a:latin typeface="Calibri"/>
-              </a:defRPr>
-            </a:pPr>
-            <a:r>
-              <a:t>  04</a:t>
-            </a:r>
-          </a:p>
-        </p:txBody>
-      </p:sp>
-      <p:sp>
-        <p:nvSpPr>
-          <p:cNvPr id="4" name="TextBox 3"/>
-          <p:cNvSpPr txBox="1"/>
-          <p:nvPr/>
-        </p:nvSpPr>
-        <p:spPr>
-          <a:xfrm>
-            <a:off x="457200" y="320040"/>
-            <a:ext cx="10972800" cy="640080"/>
-          </a:xfrm>
-          <a:prstGeom prst="rect">
-            <a:avLst/>
-          </a:prstGeom>
-          <a:noFill/>
-        </p:spPr>
-        <p:txBody>
-          <a:bodyPr wrap="square">
-            <a:spAutoFit/>
-          </a:bodyPr>
-          <a:lstStyle/>
-          <a:p>
-            <a:pPr algn="l">
-              <a:defRPr sz="2800" b="1">
-                <a:solidFill>
-                  <a:srgbClr val="FFFFFF"/>
-                </a:solidFill>
-                <a:latin typeface="Calibri"/>
-              </a:defRPr>
-            </a:pPr>
-            <a:r>
-              <a:t>  Robustness: Raydrop · Sparsity · Noise</a:t>
-            </a:r>
-          </a:p>
-        </p:txBody>
-      </p:sp>
-      <p:sp>
-        <p:nvSpPr>
-          <p:cNvPr id="5" name="TextBox 4"/>
-          <p:cNvSpPr txBox="1"/>
-          <p:nvPr/>
-        </p:nvSpPr>
-        <p:spPr>
-          <a:xfrm>
-            <a:off x="731520" y="1371600"/>
-            <a:ext cx="3474720" cy="365760"/>
-          </a:xfrm>
-          <a:prstGeom prst="rect">
-            <a:avLst/>
-          </a:prstGeom>
-          <a:noFill/>
-        </p:spPr>
-        <p:txBody>
-          <a:bodyPr wrap="square">
-            <a:spAutoFit/>
-          </a:bodyPr>
-          <a:lstStyle/>
-          <a:p>
-            <a:pPr algn="l">
-              <a:defRPr sz="2000" b="1">
-                <a:solidFill>
-                  <a:srgbClr val="007ACC"/>
-                </a:solidFill>
-                <a:latin typeface="Calibri"/>
-              </a:defRPr>
-            </a:pPr>
-            <a:r>
-              <a:t>Raydrop Sensitivity</a:t>
-            </a:r>
-          </a:p>
-        </p:txBody>
-      </p:sp>
-      <p:sp>
-        <p:nvSpPr>
-          <p:cNvPr id="6" name="TextBox 5"/>
-          <p:cNvSpPr txBox="1"/>
-          <p:nvPr/>
-        </p:nvSpPr>
-        <p:spPr>
-          <a:xfrm>
-            <a:off x="731520" y="1828800"/>
-            <a:ext cx="3474720" cy="2286000"/>
-          </a:xfrm>
-          <a:prstGeom prst="rect">
-            <a:avLst/>
-          </a:prstGeom>
-          <a:noFill/>
-        </p:spPr>
-        <p:txBody>
-          <a:bodyPr wrap="square">
-            <a:spAutoFit/>
-          </a:bodyPr>
-          <a:lstStyle/>
-          <a:p>
-            <a:pPr>
-              <a:spcAft>
-                <a:spcPts val="600"/>
-              </a:spcAft>
-            </a:pPr>
-            <a:r>
-              <a:rPr sz="1400">
-                <a:solidFill>
-                  <a:srgbClr val="1A1A2E"/>
-                </a:solidFill>
-                <a:latin typeface="Calibri"/>
-              </a:rPr>
-              <a:t>• • 10 paired episodes (U vs S)</a:t>
-            </a:r>
-          </a:p>
-          <a:p>
-            <a:pPr>
-              <a:spcAft>
-                <a:spcPts val="600"/>
-              </a:spcAft>
-            </a:pPr>
-            <a:r>
-              <a:rPr sz="1400">
-                <a:solidFill>
-                  <a:srgbClr val="1A1A2E"/>
-                </a:solidFill>
-                <a:latin typeface="Calibri"/>
-              </a:rPr>
-              <a:t>• • WaveSplat: 20/20 wins</a:t>
-            </a:r>
-          </a:p>
-          <a:p>
-            <a:pPr>
-              <a:spcAft>
-                <a:spcPts val="600"/>
-              </a:spcAft>
-            </a:pPr>
-            <a:r>
-              <a:rPr sz="1400">
-                <a:solidFill>
-                  <a:srgbClr val="1A1A2E"/>
-                </a:solidFill>
-                <a:latin typeface="Calibri"/>
-              </a:rPr>
-              <a:t>• • Slope: WS −9.1%, ETKF −16.2%</a:t>
-            </a:r>
-          </a:p>
-          <a:p>
-            <a:pPr>
-              <a:spcAft>
-                <a:spcPts val="600"/>
-              </a:spcAft>
-            </a:pPr>
-            <a:r>
-              <a:rPr sz="1400">
-                <a:solidFill>
-                  <a:srgbClr val="1A1A2E"/>
-                </a:solidFill>
-                <a:latin typeface="Calibri"/>
-              </a:rPr>
-              <a:t>• • 두 raydrop 모두에서 안정</a:t>
-            </a:r>
-          </a:p>
-        </p:txBody>
-      </p:sp>
-      <p:sp>
-        <p:nvSpPr>
-          <p:cNvPr id="7" name="TextBox 6"/>
-          <p:cNvSpPr txBox="1"/>
-          <p:nvPr/>
-        </p:nvSpPr>
-        <p:spPr>
-          <a:xfrm>
-            <a:off x="4572000" y="1371600"/>
-            <a:ext cx="3474720" cy="365760"/>
-          </a:xfrm>
-          <a:prstGeom prst="rect">
-            <a:avLst/>
-          </a:prstGeom>
-          <a:noFill/>
-        </p:spPr>
-        <p:txBody>
-          <a:bodyPr wrap="square">
-            <a:spAutoFit/>
-          </a:bodyPr>
-          <a:lstStyle/>
-          <a:p>
-            <a:pPr algn="l">
-              <a:defRPr sz="2000" b="1">
-                <a:solidFill>
-                  <a:srgbClr val="007ACC"/>
-                </a:solidFill>
-                <a:latin typeface="Calibri"/>
-              </a:defRPr>
-            </a:pPr>
-            <a:r>
-              <a:t>Sparsity Robustness</a:t>
-            </a:r>
-          </a:p>
-        </p:txBody>
-      </p:sp>
-      <p:sp>
-        <p:nvSpPr>
-          <p:cNvPr id="8" name="TextBox 7"/>
-          <p:cNvSpPr txBox="1"/>
-          <p:nvPr/>
-        </p:nvSpPr>
-        <p:spPr>
-          <a:xfrm>
-            <a:off x="4572000" y="1828800"/>
-            <a:ext cx="3474720" cy="2286000"/>
-          </a:xfrm>
-          <a:prstGeom prst="rect">
-            <a:avLst/>
-          </a:prstGeom>
-          <a:noFill/>
-        </p:spPr>
-        <p:txBody>
-          <a:bodyPr wrap="square">
-            <a:spAutoFit/>
-          </a:bodyPr>
-          <a:lstStyle/>
-          <a:p>
-            <a:pPr>
-              <a:spcAft>
-                <a:spcPts val="600"/>
-              </a:spcAft>
-            </a:pPr>
-            <a:r>
-              <a:rPr sz="1400">
-                <a:solidFill>
-                  <a:srgbClr val="1A1A2E"/>
-                </a:solidFill>
-                <a:latin typeface="Calibri"/>
-              </a:rPr>
-              <a:t>• • 관측 밀도 20~100% 실험</a:t>
-            </a:r>
-          </a:p>
-          <a:p>
-            <a:pPr>
-              <a:spcAft>
-                <a:spcPts val="600"/>
-              </a:spcAft>
-            </a:pPr>
-            <a:r>
-              <a:rPr sz="1400">
-                <a:solidFill>
-                  <a:srgbClr val="1A1A2E"/>
-                </a:solidFill>
-                <a:latin typeface="Calibri"/>
-              </a:rPr>
-              <a:t>• • BF4~5: 20% (~10점)에서도</a:t>
-            </a:r>
-          </a:p>
-          <a:p>
-            <a:pPr>
-              <a:spcAft>
-                <a:spcPts val="600"/>
-              </a:spcAft>
-            </a:pPr>
-            <a:r>
-              <a:rPr sz="1400">
-                <a:solidFill>
-                  <a:srgbClr val="1A1A2E"/>
-                </a:solidFill>
-                <a:latin typeface="Calibri"/>
-              </a:rPr>
-              <a:t>•   &lt; 8% 성능 저하</a:t>
-            </a:r>
-          </a:p>
-          <a:p>
-            <a:pPr>
-              <a:spcAft>
-                <a:spcPts val="600"/>
-              </a:spcAft>
-            </a:pPr>
-            <a:r>
-              <a:rPr sz="1400">
-                <a:solidFill>
-                  <a:srgbClr val="1A1A2E"/>
-                </a:solidFill>
-                <a:latin typeface="Calibri"/>
-              </a:rPr>
-              <a:t>• • 예외: BF3 2c (N=2 해상 한계)</a:t>
-            </a:r>
-          </a:p>
-        </p:txBody>
-      </p:sp>
-      <p:sp>
-        <p:nvSpPr>
-          <p:cNvPr id="9" name="TextBox 8"/>
-          <p:cNvSpPr txBox="1"/>
-          <p:nvPr/>
-        </p:nvSpPr>
-        <p:spPr>
-          <a:xfrm>
-            <a:off x="8412480" y="1371600"/>
-            <a:ext cx="3474720" cy="365760"/>
-          </a:xfrm>
-          <a:prstGeom prst="rect">
-            <a:avLst/>
-          </a:prstGeom>
-          <a:noFill/>
-        </p:spPr>
-        <p:txBody>
-          <a:bodyPr wrap="square">
-            <a:spAutoFit/>
-          </a:bodyPr>
-          <a:lstStyle/>
-          <a:p>
-            <a:pPr algn="l">
-              <a:defRPr sz="2000" b="1">
-                <a:solidFill>
-                  <a:srgbClr val="007ACC"/>
-                </a:solidFill>
-                <a:latin typeface="Calibri"/>
-              </a:defRPr>
-            </a:pPr>
-            <a:r>
-              <a:t>Noise Robustness</a:t>
-            </a:r>
-          </a:p>
-        </p:txBody>
-      </p:sp>
-      <p:sp>
-        <p:nvSpPr>
-          <p:cNvPr id="10" name="TextBox 9"/>
-          <p:cNvSpPr txBox="1"/>
-          <p:nvPr/>
-        </p:nvSpPr>
-        <p:spPr>
-          <a:xfrm>
-            <a:off x="8412480" y="1828800"/>
-            <a:ext cx="3474720" cy="2286000"/>
-          </a:xfrm>
-          <a:prstGeom prst="rect">
-            <a:avLst/>
-          </a:prstGeom>
-          <a:noFill/>
-        </p:spPr>
-        <p:txBody>
-          <a:bodyPr wrap="square">
-            <a:spAutoFit/>
-          </a:bodyPr>
-          <a:lstStyle/>
-          <a:p>
-            <a:pPr>
-              <a:spcAft>
-                <a:spcPts val="600"/>
-              </a:spcAft>
-            </a:pPr>
-            <a:r>
-              <a:rPr sz="1400">
-                <a:solidFill>
-                  <a:srgbClr val="1A1A2E"/>
-                </a:solidFill>
-                <a:latin typeface="Calibri"/>
-              </a:rPr>
-              <a:t>• • σ ∈ {0, 0.02, 0.05, 0.10} m</a:t>
-            </a:r>
-          </a:p>
-          <a:p>
-            <a:pPr>
-              <a:spcAft>
-                <a:spcPts val="600"/>
-              </a:spcAft>
-            </a:pPr>
-            <a:r>
-              <a:rPr sz="1400">
-                <a:solidFill>
-                  <a:srgbClr val="1A1A2E"/>
-                </a:solidFill>
-                <a:latin typeface="Calibri"/>
-              </a:rPr>
-              <a:t>• • σ=0.10 (5× baseline)에서도</a:t>
-            </a:r>
-          </a:p>
-          <a:p>
-            <a:pPr>
-              <a:spcAft>
-                <a:spcPts val="600"/>
-              </a:spcAft>
-            </a:pPr>
-            <a:r>
-              <a:rPr sz="1400">
-                <a:solidFill>
-                  <a:srgbClr val="1A1A2E"/>
-                </a:solidFill>
-                <a:latin typeface="Calibri"/>
-              </a:rPr>
-              <a:t>•   nRMSE 변화 ±13% 이내</a:t>
-            </a:r>
-          </a:p>
-          <a:p>
-            <a:pPr>
-              <a:spcAft>
-                <a:spcPts val="600"/>
-              </a:spcAft>
-            </a:pPr>
-            <a:r>
-              <a:rPr sz="1400">
-                <a:solidFill>
-                  <a:srgbClr val="1A1A2E"/>
-                </a:solidFill>
-                <a:latin typeface="Calibri"/>
-              </a:rPr>
-              <a:t>• • Adaptive N이 노이즈 흡수</a:t>
-            </a:r>
-          </a:p>
-          <a:p>
-            <a:pPr>
-              <a:spcAft>
-                <a:spcPts val="600"/>
-              </a:spcAft>
-            </a:pPr>
-            <a:r>
-              <a:rPr sz="1400">
-                <a:solidFill>
-                  <a:srgbClr val="1A1A2E"/>
-                </a:solidFill>
-                <a:latin typeface="Calibri"/>
-              </a:rPr>
-              <a:t>•   → pruning이 제거</a:t>
-            </a:r>
-          </a:p>
-        </p:txBody>
-      </p:sp>
-      <p:sp>
-        <p:nvSpPr>
-          <p:cNvPr id="11" name="TextBox 10"/>
-          <p:cNvSpPr txBox="1"/>
-          <p:nvPr/>
-        </p:nvSpPr>
-        <p:spPr>
-          <a:xfrm>
-            <a:off x="731520" y="4389120"/>
-            <a:ext cx="10972800" cy="365760"/>
-          </a:xfrm>
-          <a:prstGeom prst="rect">
-            <a:avLst/>
-          </a:prstGeom>
-          <a:noFill/>
-        </p:spPr>
-        <p:txBody>
-          <a:bodyPr wrap="square">
-            <a:spAutoFit/>
-          </a:bodyPr>
-          <a:lstStyle/>
-          <a:p>
-            <a:pPr algn="l">
-              <a:defRPr sz="2000" b="1">
-                <a:solidFill>
-                  <a:srgbClr val="007ACC"/>
-                </a:solidFill>
-                <a:latin typeface="Calibri"/>
-              </a:defRPr>
-            </a:pPr>
-            <a:r>
-              <a:t>Hyperparameter Sensitivity</a:t>
-            </a:r>
-          </a:p>
-        </p:txBody>
-      </p:sp>
-      <p:sp>
-        <p:nvSpPr>
-          <p:cNvPr id="12" name="TextBox 11"/>
-          <p:cNvSpPr txBox="1"/>
-          <p:nvPr/>
-        </p:nvSpPr>
-        <p:spPr>
-          <a:xfrm>
-            <a:off x="731520" y="4846320"/>
-            <a:ext cx="10972800" cy="1371600"/>
-          </a:xfrm>
-          <a:prstGeom prst="rect">
-            <a:avLst/>
-          </a:prstGeom>
-          <a:noFill/>
-        </p:spPr>
-        <p:txBody>
-          <a:bodyPr wrap="square">
-            <a:spAutoFit/>
-          </a:bodyPr>
-          <a:lstStyle/>
-          <a:p>
-            <a:pPr algn="l">
-              <a:defRPr sz="1500" b="0">
-                <a:solidFill>
-                  <a:srgbClr val="1A1A2E"/>
-                </a:solidFill>
-                <a:latin typeface="Calibri"/>
-              </a:defRPr>
-            </a:pPr>
-            <a:r>
-              <a:t>lr=0.01, λ₁=1e-3, τ_prune=0.10, τ_grow=0.05  — BF3 5c 한 번의 sweep으로 결정</a:t>
-            </a:r>
-            <a:br/>
-            <a:r>
-              <a:t>각 파라미터 ±2× 변경해도 nRMSE ±5% 이내  |  100 runs 전체가 동일 설정으로 재현</a:t>
-            </a:r>
-          </a:p>
-        </p:txBody>
-      </p:sp>
-      <p:sp>
-        <p:nvSpPr>
-          <p:cNvPr id="13" name="TextBox 12"/>
-          <p:cNvSpPr txBox="1"/>
-          <p:nvPr/>
-        </p:nvSpPr>
-        <p:spPr>
-          <a:xfrm>
-            <a:off x="10972800" y="6492240"/>
-            <a:ext cx="1097280" cy="274320"/>
-          </a:xfrm>
-          <a:prstGeom prst="rect">
-            <a:avLst/>
-          </a:prstGeom>
-          <a:noFill/>
-        </p:spPr>
-        <p:txBody>
-          <a:bodyPr wrap="square">
-            <a:spAutoFit/>
-          </a:bodyPr>
-          <a:lstStyle/>
-          <a:p>
-            <a:pPr algn="r">
-              <a:defRPr sz="1000" b="0">
-                <a:solidFill>
-                  <a:srgbClr val="666666"/>
-                </a:solidFill>
-                <a:latin typeface="Calibri"/>
-              </a:defRPr>
-            </a:pPr>
-            <a:r>
-              <a:t>12/15</a:t>
+              <a:t>12/16</a:t>
             </a:r>
           </a:p>
         </p:txBody>
@@ -5657,7 +5317,7 @@
               </a:defRPr>
             </a:pPr>
             <a:r>
-              <a:t>  Qualitative 비교</a:t>
+              <a:t>  Robustness: Raydrop · Sparsity · Noise</a:t>
             </a:r>
           </a:p>
         </p:txBody>
@@ -5670,8 +5330,8 @@
         </p:nvSpPr>
         <p:spPr>
           <a:xfrm>
-            <a:off x="457200" y="685800"/>
-            <a:ext cx="10972800" cy="365760"/>
+            <a:off x="731520" y="1371600"/>
+            <a:ext cx="3474720" cy="365760"/>
           </a:xfrm>
           <a:prstGeom prst="rect">
             <a:avLst/>
@@ -5685,53 +5345,29 @@
           <a:lstStyle/>
           <a:p>
             <a:pPr algn="l">
-              <a:defRPr sz="1400" b="0">
-                <a:solidFill>
-                  <a:srgbClr val="AABBCC"/>
+              <a:defRPr sz="2000" b="1">
+                <a:solidFill>
+                  <a:srgbClr val="007ACC"/>
                 </a:solidFill>
                 <a:latin typeface="Calibri"/>
               </a:defRPr>
             </a:pPr>
             <a:r>
-              <a:t>  GT vs WaveSplat vs ETKF vs GPR</a:t>
-            </a:r>
-          </a:p>
-        </p:txBody>
-      </p:sp>
-      <p:pic>
-        <p:nvPicPr>
-          <p:cNvPr id="6" name="Picture 5" descr="fig8_qualitative.png"/>
-          <p:cNvPicPr>
-            <a:picLocks noChangeAspect="1"/>
-          </p:cNvPicPr>
-          <p:nvPr/>
-        </p:nvPicPr>
-        <p:blipFill>
-          <a:blip r:embed="rId2"/>
-          <a:stretch>
-            <a:fillRect/>
-          </a:stretch>
-        </p:blipFill>
-        <p:spPr>
-          <a:xfrm>
-            <a:off x="457200" y="1371600"/>
-            <a:ext cx="11247120" cy="5029200"/>
-          </a:xfrm>
-          <a:prstGeom prst="rect">
-            <a:avLst/>
-          </a:prstGeom>
-        </p:spPr>
-      </p:pic>
-      <p:sp>
-        <p:nvSpPr>
-          <p:cNvPr id="7" name="TextBox 6"/>
+              <a:t>Raydrop Sensitivity</a:t>
+            </a:r>
+          </a:p>
+        </p:txBody>
+      </p:sp>
+      <p:sp>
+        <p:nvSpPr>
+          <p:cNvPr id="6" name="TextBox 5"/>
           <p:cNvSpPr txBox="1"/>
           <p:nvPr/>
         </p:nvSpPr>
         <p:spPr>
           <a:xfrm>
-            <a:off x="10972800" y="6492240"/>
-            <a:ext cx="1097280" cy="274320"/>
+            <a:off x="731520" y="1828800"/>
+            <a:ext cx="3474720" cy="2286000"/>
           </a:xfrm>
           <a:prstGeom prst="rect">
             <a:avLst/>
@@ -5744,6 +5380,431 @@
           </a:bodyPr>
           <a:lstStyle/>
           <a:p>
+            <a:pPr>
+              <a:spcAft>
+                <a:spcPts val="600"/>
+              </a:spcAft>
+            </a:pPr>
+            <a:r>
+              <a:rPr sz="1400">
+                <a:solidFill>
+                  <a:srgbClr val="1A1A2E"/>
+                </a:solidFill>
+                <a:latin typeface="Calibri"/>
+              </a:rPr>
+              <a:t>• • 10 paired episodes (U vs S)</a:t>
+            </a:r>
+          </a:p>
+          <a:p>
+            <a:pPr>
+              <a:spcAft>
+                <a:spcPts val="600"/>
+              </a:spcAft>
+            </a:pPr>
+            <a:r>
+              <a:rPr sz="1400">
+                <a:solidFill>
+                  <a:srgbClr val="1A1A2E"/>
+                </a:solidFill>
+                <a:latin typeface="Calibri"/>
+              </a:rPr>
+              <a:t>• • WaveSplat: 20/20 wins</a:t>
+            </a:r>
+          </a:p>
+          <a:p>
+            <a:pPr>
+              <a:spcAft>
+                <a:spcPts val="600"/>
+              </a:spcAft>
+            </a:pPr>
+            <a:r>
+              <a:rPr sz="1400">
+                <a:solidFill>
+                  <a:srgbClr val="1A1A2E"/>
+                </a:solidFill>
+                <a:latin typeface="Calibri"/>
+              </a:rPr>
+              <a:t>• • Slope: WS −9.1%, ETKF −16.2%</a:t>
+            </a:r>
+          </a:p>
+          <a:p>
+            <a:pPr>
+              <a:spcAft>
+                <a:spcPts val="600"/>
+              </a:spcAft>
+            </a:pPr>
+            <a:r>
+              <a:rPr sz="1400">
+                <a:solidFill>
+                  <a:srgbClr val="1A1A2E"/>
+                </a:solidFill>
+                <a:latin typeface="Calibri"/>
+              </a:rPr>
+              <a:t>• • 두 raydrop 모두에서 안정</a:t>
+            </a:r>
+          </a:p>
+        </p:txBody>
+      </p:sp>
+      <p:sp>
+        <p:nvSpPr>
+          <p:cNvPr id="7" name="TextBox 6"/>
+          <p:cNvSpPr txBox="1"/>
+          <p:nvPr/>
+        </p:nvSpPr>
+        <p:spPr>
+          <a:xfrm>
+            <a:off x="4572000" y="1371600"/>
+            <a:ext cx="3474720" cy="365760"/>
+          </a:xfrm>
+          <a:prstGeom prst="rect">
+            <a:avLst/>
+          </a:prstGeom>
+          <a:noFill/>
+        </p:spPr>
+        <p:txBody>
+          <a:bodyPr wrap="square">
+            <a:spAutoFit/>
+          </a:bodyPr>
+          <a:lstStyle/>
+          <a:p>
+            <a:pPr algn="l">
+              <a:defRPr sz="2000" b="1">
+                <a:solidFill>
+                  <a:srgbClr val="007ACC"/>
+                </a:solidFill>
+                <a:latin typeface="Calibri"/>
+              </a:defRPr>
+            </a:pPr>
+            <a:r>
+              <a:t>Sparsity Robustness</a:t>
+            </a:r>
+          </a:p>
+        </p:txBody>
+      </p:sp>
+      <p:sp>
+        <p:nvSpPr>
+          <p:cNvPr id="8" name="TextBox 7"/>
+          <p:cNvSpPr txBox="1"/>
+          <p:nvPr/>
+        </p:nvSpPr>
+        <p:spPr>
+          <a:xfrm>
+            <a:off x="4572000" y="1828800"/>
+            <a:ext cx="3474720" cy="2286000"/>
+          </a:xfrm>
+          <a:prstGeom prst="rect">
+            <a:avLst/>
+          </a:prstGeom>
+          <a:noFill/>
+        </p:spPr>
+        <p:txBody>
+          <a:bodyPr wrap="square">
+            <a:spAutoFit/>
+          </a:bodyPr>
+          <a:lstStyle/>
+          <a:p>
+            <a:pPr>
+              <a:spcAft>
+                <a:spcPts val="600"/>
+              </a:spcAft>
+            </a:pPr>
+            <a:r>
+              <a:rPr sz="1400">
+                <a:solidFill>
+                  <a:srgbClr val="1A1A2E"/>
+                </a:solidFill>
+                <a:latin typeface="Calibri"/>
+              </a:rPr>
+              <a:t>• • 관측 밀도 20~100% 실험</a:t>
+            </a:r>
+          </a:p>
+          <a:p>
+            <a:pPr>
+              <a:spcAft>
+                <a:spcPts val="600"/>
+              </a:spcAft>
+            </a:pPr>
+            <a:r>
+              <a:rPr sz="1400">
+                <a:solidFill>
+                  <a:srgbClr val="1A1A2E"/>
+                </a:solidFill>
+                <a:latin typeface="Calibri"/>
+              </a:rPr>
+              <a:t>• • BF4~5: 20% (~10점)에서도</a:t>
+            </a:r>
+          </a:p>
+          <a:p>
+            <a:pPr>
+              <a:spcAft>
+                <a:spcPts val="600"/>
+              </a:spcAft>
+            </a:pPr>
+            <a:r>
+              <a:rPr sz="1400">
+                <a:solidFill>
+                  <a:srgbClr val="1A1A2E"/>
+                </a:solidFill>
+                <a:latin typeface="Calibri"/>
+              </a:rPr>
+              <a:t>•   &lt; 8% 성능 저하</a:t>
+            </a:r>
+          </a:p>
+          <a:p>
+            <a:pPr>
+              <a:spcAft>
+                <a:spcPts val="600"/>
+              </a:spcAft>
+            </a:pPr>
+            <a:r>
+              <a:rPr sz="1400">
+                <a:solidFill>
+                  <a:srgbClr val="1A1A2E"/>
+                </a:solidFill>
+                <a:latin typeface="Calibri"/>
+              </a:rPr>
+              <a:t>• • 예외: BF3 2c (N=2 해상 한계)</a:t>
+            </a:r>
+          </a:p>
+        </p:txBody>
+      </p:sp>
+      <p:sp>
+        <p:nvSpPr>
+          <p:cNvPr id="9" name="TextBox 8"/>
+          <p:cNvSpPr txBox="1"/>
+          <p:nvPr/>
+        </p:nvSpPr>
+        <p:spPr>
+          <a:xfrm>
+            <a:off x="8412480" y="1371600"/>
+            <a:ext cx="3474720" cy="365760"/>
+          </a:xfrm>
+          <a:prstGeom prst="rect">
+            <a:avLst/>
+          </a:prstGeom>
+          <a:noFill/>
+        </p:spPr>
+        <p:txBody>
+          <a:bodyPr wrap="square">
+            <a:spAutoFit/>
+          </a:bodyPr>
+          <a:lstStyle/>
+          <a:p>
+            <a:pPr algn="l">
+              <a:defRPr sz="2000" b="1">
+                <a:solidFill>
+                  <a:srgbClr val="007ACC"/>
+                </a:solidFill>
+                <a:latin typeface="Calibri"/>
+              </a:defRPr>
+            </a:pPr>
+            <a:r>
+              <a:t>Noise Robustness</a:t>
+            </a:r>
+          </a:p>
+        </p:txBody>
+      </p:sp>
+      <p:sp>
+        <p:nvSpPr>
+          <p:cNvPr id="10" name="TextBox 9"/>
+          <p:cNvSpPr txBox="1"/>
+          <p:nvPr/>
+        </p:nvSpPr>
+        <p:spPr>
+          <a:xfrm>
+            <a:off x="8412480" y="1828800"/>
+            <a:ext cx="3474720" cy="2286000"/>
+          </a:xfrm>
+          <a:prstGeom prst="rect">
+            <a:avLst/>
+          </a:prstGeom>
+          <a:noFill/>
+        </p:spPr>
+        <p:txBody>
+          <a:bodyPr wrap="square">
+            <a:spAutoFit/>
+          </a:bodyPr>
+          <a:lstStyle/>
+          <a:p>
+            <a:pPr>
+              <a:spcAft>
+                <a:spcPts val="600"/>
+              </a:spcAft>
+            </a:pPr>
+            <a:r>
+              <a:rPr sz="1400">
+                <a:solidFill>
+                  <a:srgbClr val="1A1A2E"/>
+                </a:solidFill>
+                <a:latin typeface="Calibri"/>
+              </a:rPr>
+              <a:t>• • σ ∈ {0, 0.02, 0.05, 0.10} m</a:t>
+            </a:r>
+          </a:p>
+          <a:p>
+            <a:pPr>
+              <a:spcAft>
+                <a:spcPts val="600"/>
+              </a:spcAft>
+            </a:pPr>
+            <a:r>
+              <a:rPr sz="1400">
+                <a:solidFill>
+                  <a:srgbClr val="1A1A2E"/>
+                </a:solidFill>
+                <a:latin typeface="Calibri"/>
+              </a:rPr>
+              <a:t>• • σ=0.10 (5× baseline)에서도</a:t>
+            </a:r>
+          </a:p>
+          <a:p>
+            <a:pPr>
+              <a:spcAft>
+                <a:spcPts val="600"/>
+              </a:spcAft>
+            </a:pPr>
+            <a:r>
+              <a:rPr sz="1400">
+                <a:solidFill>
+                  <a:srgbClr val="1A1A2E"/>
+                </a:solidFill>
+                <a:latin typeface="Calibri"/>
+              </a:rPr>
+              <a:t>•   nRMSE 변화 ±13% 이내</a:t>
+            </a:r>
+          </a:p>
+          <a:p>
+            <a:pPr>
+              <a:spcAft>
+                <a:spcPts val="600"/>
+              </a:spcAft>
+            </a:pPr>
+            <a:r>
+              <a:rPr sz="1400">
+                <a:solidFill>
+                  <a:srgbClr val="1A1A2E"/>
+                </a:solidFill>
+                <a:latin typeface="Calibri"/>
+              </a:rPr>
+              <a:t>• • Adaptive N이 노이즈 흡수</a:t>
+            </a:r>
+          </a:p>
+          <a:p>
+            <a:pPr>
+              <a:spcAft>
+                <a:spcPts val="600"/>
+              </a:spcAft>
+            </a:pPr>
+            <a:r>
+              <a:rPr sz="1400">
+                <a:solidFill>
+                  <a:srgbClr val="1A1A2E"/>
+                </a:solidFill>
+                <a:latin typeface="Calibri"/>
+              </a:rPr>
+              <a:t>•   → pruning이 제거</a:t>
+            </a:r>
+          </a:p>
+        </p:txBody>
+      </p:sp>
+      <p:sp>
+        <p:nvSpPr>
+          <p:cNvPr id="11" name="TextBox 10"/>
+          <p:cNvSpPr txBox="1"/>
+          <p:nvPr/>
+        </p:nvSpPr>
+        <p:spPr>
+          <a:xfrm>
+            <a:off x="731520" y="4389120"/>
+            <a:ext cx="10972800" cy="365760"/>
+          </a:xfrm>
+          <a:prstGeom prst="rect">
+            <a:avLst/>
+          </a:prstGeom>
+          <a:noFill/>
+        </p:spPr>
+        <p:txBody>
+          <a:bodyPr wrap="square">
+            <a:spAutoFit/>
+          </a:bodyPr>
+          <a:lstStyle/>
+          <a:p>
+            <a:pPr algn="l">
+              <a:defRPr sz="2000" b="1">
+                <a:solidFill>
+                  <a:srgbClr val="007ACC"/>
+                </a:solidFill>
+                <a:latin typeface="Calibri"/>
+              </a:defRPr>
+            </a:pPr>
+            <a:r>
+              <a:t>Hyperparameter Sensitivity</a:t>
+            </a:r>
+          </a:p>
+        </p:txBody>
+      </p:sp>
+      <p:sp>
+        <p:nvSpPr>
+          <p:cNvPr id="12" name="TextBox 11"/>
+          <p:cNvSpPr txBox="1"/>
+          <p:nvPr/>
+        </p:nvSpPr>
+        <p:spPr>
+          <a:xfrm>
+            <a:off x="731520" y="4846320"/>
+            <a:ext cx="10972800" cy="1371600"/>
+          </a:xfrm>
+          <a:prstGeom prst="rect">
+            <a:avLst/>
+          </a:prstGeom>
+          <a:noFill/>
+        </p:spPr>
+        <p:txBody>
+          <a:bodyPr wrap="square">
+            <a:spAutoFit/>
+          </a:bodyPr>
+          <a:lstStyle/>
+          <a:p>
+            <a:pPr algn="l">
+              <a:defRPr sz="1500" b="0">
+                <a:solidFill>
+                  <a:srgbClr val="1A1A2E"/>
+                </a:solidFill>
+                <a:latin typeface="Calibri"/>
+              </a:defRPr>
+            </a:pPr>
+            <a:r>
+              <a:t>lr=0.01, λ₁=1e-3, τ_prune=0.10, τ_grow=0.05  — BF3 5c 한 번의 sweep으로 결정</a:t>
+            </a:r>
+            <a:br/>
+            <a:r>
+              <a:t>각 파라미터 ±2× 변경해도 nRMSE ±5% 이내  |  100 runs 전체가 동일 설정으로 재현</a:t>
+            </a:r>
+          </a:p>
+        </p:txBody>
+      </p:sp>
+      <p:sp>
+        <p:nvSpPr>
+          <p:cNvPr id="13" name="TextBox 12"/>
+          <p:cNvSpPr txBox="1"/>
+          <p:nvPr/>
+        </p:nvSpPr>
+        <p:spPr>
+          <a:xfrm>
+            <a:off x="10972800" y="6492240"/>
+            <a:ext cx="1097280" cy="274320"/>
+          </a:xfrm>
+          <a:prstGeom prst="rect">
+            <a:avLst/>
+          </a:prstGeom>
+          <a:noFill/>
+        </p:spPr>
+        <p:txBody>
+          <a:bodyPr wrap="square">
+            <a:spAutoFit/>
+          </a:bodyPr>
+          <a:lstStyle/>
+          <a:p>
             <a:pPr algn="r">
               <a:defRPr sz="1000" b="0">
                 <a:solidFill>
@@ -5753,7 +5814,7 @@
               </a:defRPr>
             </a:pPr>
             <a:r>
-              <a:t>13/15</a:t>
+              <a:t>13/16</a:t>
             </a:r>
           </a:p>
         </p:txBody>
@@ -5894,7 +5955,7 @@
               </a:defRPr>
             </a:pPr>
             <a:r>
-              <a:t>  한계와 향후 과제</a:t>
+              <a:t>  Qualitative 비교</a:t>
             </a:r>
           </a:p>
         </p:txBody>
@@ -5930,21 +5991,45 @@
               </a:defRPr>
             </a:pPr>
             <a:r>
-              <a:t>  Honest Limitations</a:t>
-            </a:r>
-          </a:p>
-        </p:txBody>
-      </p:sp>
-      <p:sp>
-        <p:nvSpPr>
-          <p:cNvPr id="6" name="TextBox 5"/>
+              <a:t>  GT vs WaveSplat vs ETKF vs GPR</a:t>
+            </a:r>
+          </a:p>
+        </p:txBody>
+      </p:sp>
+      <p:pic>
+        <p:nvPicPr>
+          <p:cNvPr id="6" name="Picture 5" descr="fig8_qualitative.png"/>
+          <p:cNvPicPr>
+            <a:picLocks noChangeAspect="1"/>
+          </p:cNvPicPr>
+          <p:nvPr/>
+        </p:nvPicPr>
+        <p:blipFill>
+          <a:blip r:embed="rId2"/>
+          <a:stretch>
+            <a:fillRect/>
+          </a:stretch>
+        </p:blipFill>
+        <p:spPr>
+          <a:xfrm>
+            <a:off x="457200" y="1371600"/>
+            <a:ext cx="11247120" cy="5029200"/>
+          </a:xfrm>
+          <a:prstGeom prst="rect">
+            <a:avLst/>
+          </a:prstGeom>
+        </p:spPr>
+      </p:pic>
+      <p:sp>
+        <p:nvSpPr>
+          <p:cNvPr id="7" name="TextBox 6"/>
           <p:cNvSpPr txBox="1"/>
           <p:nvPr/>
         </p:nvSpPr>
         <p:spPr>
           <a:xfrm>
-            <a:off x="731520" y="1645920"/>
-            <a:ext cx="5486400" cy="4114800"/>
+            <a:off x="10972800" y="6492240"/>
+            <a:ext cx="1097280" cy="274320"/>
           </a:xfrm>
           <a:prstGeom prst="rect">
             <a:avLst/>
@@ -5957,382 +6042,6 @@
           </a:bodyPr>
           <a:lstStyle/>
           <a:p>
-            <a:pPr>
-              <a:spcAft>
-                <a:spcPts val="600"/>
-              </a:spcAft>
-            </a:pPr>
-            <a:r>
-              <a:rPr sz="1500">
-                <a:solidFill>
-                  <a:srgbClr val="1A1A2E"/>
-                </a:solidFill>
-                <a:latin typeface="Calibri"/>
-              </a:rPr>
-              <a:t>• • VR = 0.66 → 진폭 34% 과소추정 (energy pruning의 대가)</a:t>
-            </a:r>
-          </a:p>
-          <a:p>
-            <a:pPr>
-              <a:spcAft>
-                <a:spcPts val="600"/>
-              </a:spcAft>
-            </a:pPr>
-            <a:r>
-              <a:rPr sz="1500">
-                <a:solidFill>
-                  <a:srgbClr val="1A1A2E"/>
-                </a:solidFill>
-                <a:latin typeface="Calibri"/>
-              </a:rPr>
-              <a:t>• • SS = +0.034 → 양수이지만 marginal (robust하다고 보기엔 작음)</a:t>
-            </a:r>
-          </a:p>
-          <a:p>
-            <a:pPr>
-              <a:spcAft>
-                <a:spcPts val="600"/>
-              </a:spcAft>
-            </a:pPr>
-            <a:r>
-              <a:rPr sz="1500">
-                <a:solidFill>
-                  <a:srgbClr val="1A1A2E"/>
-                </a:solidFill>
-                <a:latin typeface="Calibri"/>
-              </a:rPr>
-              <a:t>• • Dir R² = −0.25 → 방향 성분이 chance 미만 (가장 큰 한계)</a:t>
-            </a:r>
-          </a:p>
-          <a:p>
-            <a:pPr>
-              <a:spcAft>
-                <a:spcPts val="600"/>
-              </a:spcAft>
-            </a:pPr>
-            <a:r>
-              <a:rPr sz="1500">
-                <a:solidFill>
-                  <a:srgbClr val="1A1A2E"/>
-                </a:solidFill>
-                <a:latin typeface="Calibri"/>
-              </a:rPr>
-              <a:t>• •   → hydrofoil BF4-head 시나리오에서 feedforward gain 반전 관찰</a:t>
-            </a:r>
-          </a:p>
-          <a:p>
-            <a:pPr>
-              <a:spcAft>
-                <a:spcPts val="600"/>
-              </a:spcAft>
-            </a:pPr>
-            <a:r>
-              <a:rPr sz="1500">
-                <a:solidFill>
-                  <a:srgbClr val="1A1A2E"/>
-                </a:solidFill>
-                <a:latin typeface="Calibri"/>
-              </a:rPr>
-              <a:t>• • 시뮬레이션 전용 — real LiDAR 검증 필요</a:t>
-            </a:r>
-          </a:p>
-          <a:p>
-            <a:pPr>
-              <a:spcAft>
-                <a:spcPts val="600"/>
-              </a:spcAft>
-            </a:pPr>
-            <a:r>
-              <a:rPr sz="1500">
-                <a:solidFill>
-                  <a:srgbClr val="1A1A2E"/>
-                </a:solidFill>
-                <a:latin typeface="Calibri"/>
-              </a:rPr>
-              <a:t>• • 선형 모델 → Stokes-2+ nonlinearity 미반영</a:t>
-            </a:r>
-          </a:p>
-          <a:p>
-            <a:pPr>
-              <a:spcAft>
-                <a:spcPts val="600"/>
-              </a:spcAft>
-            </a:pPr>
-            <a:r>
-              <a:rPr sz="1500">
-                <a:solidFill>
-                  <a:srgbClr val="1A1A2E"/>
-                </a:solidFill>
-                <a:latin typeface="Calibri"/>
-              </a:rPr>
-              <a:t>• • Nₜᵣᵤₑ ≥ 30 이상 복잡 해상에서 성분 수 한계</a:t>
-            </a:r>
-          </a:p>
-          <a:p>
-            <a:pPr>
-              <a:spcAft>
-                <a:spcPts val="600"/>
-              </a:spcAft>
-            </a:pPr>
-            <a:r>
-              <a:rPr sz="1500">
-                <a:solidFill>
-                  <a:srgbClr val="1A1A2E"/>
-                </a:solidFill>
-                <a:latin typeface="Calibri"/>
-              </a:rPr>
-              <a:t>• • 해류(current) 미추정</a:t>
-            </a:r>
-          </a:p>
-        </p:txBody>
-      </p:sp>
-      <p:sp>
-        <p:nvSpPr>
-          <p:cNvPr id="7" name="TextBox 6"/>
-          <p:cNvSpPr txBox="1"/>
-          <p:nvPr/>
-        </p:nvSpPr>
-        <p:spPr>
-          <a:xfrm>
-            <a:off x="6858000" y="1371600"/>
-            <a:ext cx="4846320" cy="365760"/>
-          </a:xfrm>
-          <a:prstGeom prst="rect">
-            <a:avLst/>
-          </a:prstGeom>
-          <a:noFill/>
-        </p:spPr>
-        <p:txBody>
-          <a:bodyPr wrap="square">
-            <a:spAutoFit/>
-          </a:bodyPr>
-          <a:lstStyle/>
-          <a:p>
-            <a:pPr algn="l">
-              <a:defRPr sz="2000" b="1">
-                <a:solidFill>
-                  <a:srgbClr val="007ACC"/>
-                </a:solidFill>
-                <a:latin typeface="Calibri"/>
-              </a:defRPr>
-            </a:pPr>
-            <a:r>
-              <a:t>Contributions 요약</a:t>
-            </a:r>
-          </a:p>
-        </p:txBody>
-      </p:sp>
-      <p:sp>
-        <p:nvSpPr>
-          <p:cNvPr id="8" name="TextBox 7"/>
-          <p:cNvSpPr txBox="1"/>
-          <p:nvPr/>
-        </p:nvSpPr>
-        <p:spPr>
-          <a:xfrm>
-            <a:off x="6858000" y="1828800"/>
-            <a:ext cx="4846320" cy="3657600"/>
-          </a:xfrm>
-          <a:prstGeom prst="rect">
-            <a:avLst/>
-          </a:prstGeom>
-          <a:noFill/>
-        </p:spPr>
-        <p:txBody>
-          <a:bodyPr wrap="square">
-            <a:spAutoFit/>
-          </a:bodyPr>
-          <a:lstStyle/>
-          <a:p>
-            <a:pPr>
-              <a:spcAft>
-                <a:spcPts val="600"/>
-              </a:spcAft>
-            </a:pPr>
-            <a:r>
-              <a:rPr sz="1400">
-                <a:solidFill>
-                  <a:srgbClr val="1A1A2E"/>
-                </a:solidFill>
-                <a:latin typeface="Calibri"/>
-              </a:rPr>
-              <a:t>• • ❶ Grid-free spectral Gaussian 파면 추정</a:t>
-            </a:r>
-          </a:p>
-          <a:p>
-            <a:pPr>
-              <a:spcAft>
-                <a:spcPts val="600"/>
-              </a:spcAft>
-            </a:pPr>
-            <a:r>
-              <a:rPr sz="1400">
-                <a:solidFill>
-                  <a:srgbClr val="1A1A2E"/>
-                </a:solidFill>
-                <a:latin typeface="Calibri"/>
-              </a:rPr>
-              <a:t>• • ❷ Dispersion hard constraint (5N→4N)</a:t>
-            </a:r>
-          </a:p>
-          <a:p>
-            <a:pPr>
-              <a:spcAft>
-                <a:spcPts val="600"/>
-              </a:spcAft>
-            </a:pPr>
-            <a:r>
-              <a:rPr sz="1400">
-                <a:solidFill>
-                  <a:srgbClr val="1A1A2E"/>
-                </a:solidFill>
-                <a:latin typeface="Calibri"/>
-              </a:rPr>
-              <a:t>• • ❸ Adaptive N (pruning + growth)</a:t>
-            </a:r>
-          </a:p>
-          <a:p>
-            <a:pPr>
-              <a:spcAft>
-                <a:spcPts val="600"/>
-              </a:spcAft>
-            </a:pPr>
-            <a:r>
-              <a:rPr sz="1400">
-                <a:solidFill>
-                  <a:srgbClr val="1A1A2E"/>
-                </a:solidFill>
-                <a:latin typeface="Calibri"/>
-              </a:rPr>
-              <a:t>• • ❹ Fresnel confidence weighting</a:t>
-            </a:r>
-          </a:p>
-          <a:p>
-            <a:pPr>
-              <a:spcAft>
-                <a:spcPts val="600"/>
-              </a:spcAft>
-            </a:pPr>
-            <a:r>
-              <a:rPr sz="1400">
-                <a:solidFill>
-                  <a:srgbClr val="1A1A2E"/>
-                </a:solidFill>
-                <a:latin typeface="Calibri"/>
-              </a:rPr>
-              <a:t>• • ❺ Pre-registered 6-metric panel</a:t>
-            </a:r>
-          </a:p>
-          <a:p>
-            <a:pPr>
-              <a:spcAft>
-                <a:spcPts val="600"/>
-              </a:spcAft>
-            </a:pPr>
-            <a:r>
-              <a:rPr sz="1400">
-                <a:solidFill>
-                  <a:srgbClr val="1A1A2E"/>
-                </a:solidFill>
-                <a:latin typeface="Calibri"/>
-              </a:rPr>
-              <a:t>• • ❻ 24-config ETKF sweep (fair baseline)</a:t>
-            </a:r>
-          </a:p>
-          <a:p>
-            <a:pPr>
-              <a:spcAft>
-                <a:spcPts val="600"/>
-              </a:spcAft>
-            </a:pPr>
-            <a:r>
-              <a:rPr sz="1400">
-                <a:solidFill>
-                  <a:srgbClr val="1A1A2E"/>
-                </a:solidFill>
-                <a:latin typeface="Calibri"/>
-              </a:rPr>
-              <a:t>• • ❼ Dispersion drift 정량화 (R̄ metric)</a:t>
-            </a:r>
-          </a:p>
-        </p:txBody>
-      </p:sp>
-      <p:sp>
-        <p:nvSpPr>
-          <p:cNvPr id="9" name="Rounded Rectangle 8"/>
-          <p:cNvSpPr/>
-          <p:nvPr/>
-        </p:nvSpPr>
-        <p:spPr>
-          <a:xfrm>
-            <a:off x="731520" y="5303520"/>
-            <a:ext cx="10698480" cy="1097280"/>
-          </a:xfrm>
-          <a:prstGeom prst="roundRect">
-            <a:avLst/>
-          </a:prstGeom>
-          <a:solidFill>
-            <a:srgbClr val="F0F4F8"/>
-          </a:solidFill>
-          <a:ln>
-            <a:solidFill>
-              <a:srgbClr val="007ACC"/>
-            </a:solidFill>
-          </a:ln>
-        </p:spPr>
-        <p:style>
-          <a:lnRef idx="1">
-            <a:schemeClr val="accent1"/>
-          </a:lnRef>
-          <a:fillRef idx="3">
-            <a:schemeClr val="accent1"/>
-          </a:fillRef>
-          <a:effectRef idx="2">
-            <a:schemeClr val="accent1"/>
-          </a:effectRef>
-          <a:fontRef idx="minor">
-            <a:schemeClr val="lt1"/>
-          </a:fontRef>
-        </p:style>
-        <p:txBody>
-          <a:bodyPr rtlCol="0" anchor="ctr" wrap="square"/>
-          <a:lstStyle/>
-          <a:p>
-            <a:pPr algn="ctr">
-              <a:defRPr sz="1600" b="1">
-                <a:solidFill>
-                  <a:srgbClr val="1A1A2E"/>
-                </a:solidFill>
-              </a:defRPr>
-            </a:pPr>
-            <a:r>
-              <a:t>Summary:  nRMSE 30.1% lower  |  ~10× faster  |  SS only positive  |  Cohen's d=1.16 (large)  |  100 paired runs, p=1.1×10⁻¹⁵</a:t>
-            </a:r>
-          </a:p>
-        </p:txBody>
-      </p:sp>
-      <p:sp>
-        <p:nvSpPr>
-          <p:cNvPr id="10" name="TextBox 9"/>
-          <p:cNvSpPr txBox="1"/>
-          <p:nvPr/>
-        </p:nvSpPr>
-        <p:spPr>
-          <a:xfrm>
-            <a:off x="10972800" y="6492240"/>
-            <a:ext cx="1097280" cy="274320"/>
-          </a:xfrm>
-          <a:prstGeom prst="rect">
-            <a:avLst/>
-          </a:prstGeom>
-          <a:noFill/>
-        </p:spPr>
-        <p:txBody>
-          <a:bodyPr wrap="square">
-            <a:spAutoFit/>
-          </a:bodyPr>
-          <a:lstStyle/>
-          <a:p>
             <a:pPr algn="r">
               <a:defRPr sz="1000" b="0">
                 <a:solidFill>
@@ -6342,7 +6051,7 @@
               </a:defRPr>
             </a:pPr>
             <a:r>
-              <a:t>14/15</a:t>
+              <a:t>14/16</a:t>
             </a:r>
           </a:p>
         </p:txBody>
@@ -6447,7 +6156,7 @@
               </a:defRPr>
             </a:pPr>
             <a:r>
-              <a:t>  05</a:t>
+              <a:t>  04</a:t>
             </a:r>
           </a:p>
         </p:txBody>
@@ -6483,7 +6192,7 @@
               </a:defRPr>
             </a:pPr>
             <a:r>
-              <a:t>  계획: 논문 투고 &amp; 박사 학위</a:t>
+              <a:t>  한계와 향후 과제</a:t>
             </a:r>
           </a:p>
         </p:txBody>
@@ -6519,7 +6228,7 @@
               </a:defRPr>
             </a:pPr>
             <a:r>
-              <a:t>  Plans</a:t>
+              <a:t>  Honest Limitations</a:t>
             </a:r>
           </a:p>
         </p:txBody>
@@ -6532,44 +6241,8 @@
         </p:nvSpPr>
         <p:spPr>
           <a:xfrm>
-            <a:off x="731520" y="1371600"/>
-            <a:ext cx="5303520" cy="365760"/>
-          </a:xfrm>
-          <a:prstGeom prst="rect">
-            <a:avLst/>
-          </a:prstGeom>
-          <a:noFill/>
-        </p:spPr>
-        <p:txBody>
-          <a:bodyPr wrap="square">
-            <a:spAutoFit/>
-          </a:bodyPr>
-          <a:lstStyle/>
-          <a:p>
-            <a:pPr algn="l">
-              <a:defRPr sz="2200" b="1">
-                <a:solidFill>
-                  <a:srgbClr val="007ACC"/>
-                </a:solidFill>
-                <a:latin typeface="Calibri"/>
-              </a:defRPr>
-            </a:pPr>
-            <a:r>
-              <a:t>논문 투고 계획</a:t>
-            </a:r>
-          </a:p>
-        </p:txBody>
-      </p:sp>
-      <p:sp>
-        <p:nvSpPr>
-          <p:cNvPr id="7" name="TextBox 6"/>
-          <p:cNvSpPr txBox="1"/>
-          <p:nvPr/>
-        </p:nvSpPr>
-        <p:spPr>
-          <a:xfrm>
-            <a:off x="731520" y="1828800"/>
-            <a:ext cx="5303520" cy="4114800"/>
+            <a:off x="731520" y="1645920"/>
+            <a:ext cx="5486400" cy="4114800"/>
           </a:xfrm>
           <a:prstGeom prst="rect">
             <a:avLst/>
@@ -6588,13 +6261,13 @@
               </a:spcAft>
             </a:pPr>
             <a:r>
-              <a:rPr sz="1400">
+              <a:rPr sz="1500">
                 <a:solidFill>
                   <a:srgbClr val="1A1A2E"/>
                 </a:solidFill>
                 <a:latin typeface="Calibri"/>
               </a:rPr>
-              <a:t>• • Paper 1 (WaveSplat)</a:t>
+              <a:t>• • VR = 0.66 → 진폭 34% 과소추정 (energy pruning의 대가)</a:t>
             </a:r>
           </a:p>
           <a:p>
@@ -6604,13 +6277,13 @@
               </a:spcAft>
             </a:pPr>
             <a:r>
-              <a:rPr sz="1400">
+              <a:rPr sz="1500">
                 <a:solidFill>
                   <a:srgbClr val="1A1A2E"/>
                 </a:solidFill>
                 <a:latin typeface="Calibri"/>
               </a:rPr>
-              <a:t>• •   Target: Ocean Engineering (Elsevier)</a:t>
+              <a:t>• • SS = +0.034 → 양수이지만 marginal (robust하다고 보기엔 작음)</a:t>
             </a:r>
           </a:p>
           <a:p>
@@ -6620,13 +6293,13 @@
               </a:spcAft>
             </a:pPr>
             <a:r>
-              <a:rPr sz="1400">
+              <a:rPr sz="1500">
                 <a:solidFill>
                   <a:srgbClr val="1A1A2E"/>
                 </a:solidFill>
                 <a:latin typeface="Calibri"/>
               </a:rPr>
-              <a:t>• •   Status: 40p 원고 + cover letter + graphical abstract 완료</a:t>
+              <a:t>• • Dir R² = −0.25 → 방향 성분이 chance 미만 (가장 큰 한계)</a:t>
             </a:r>
           </a:p>
           <a:p>
@@ -6636,13 +6309,13 @@
               </a:spcAft>
             </a:pPr>
             <a:r>
-              <a:rPr sz="1400">
+              <a:rPr sz="1500">
                 <a:solidFill>
                   <a:srgbClr val="1A1A2E"/>
                 </a:solidFill>
                 <a:latin typeface="Calibri"/>
               </a:rPr>
-              <a:t>• •   Next: 공동저자 sign-off → 투고</a:t>
+              <a:t>• •   → hydrofoil BF4-head 시나리오에서 feedforward gain 반전 관찰</a:t>
             </a:r>
           </a:p>
           <a:p>
@@ -6652,13 +6325,13 @@
               </a:spcAft>
             </a:pPr>
             <a:r>
-              <a:rPr sz="1400">
+              <a:rPr sz="1500">
                 <a:solidFill>
                   <a:srgbClr val="1A1A2E"/>
                 </a:solidFill>
                 <a:latin typeface="Calibri"/>
               </a:rPr>
-              <a:t>• </a:t>
+              <a:t>• • 시뮬레이션 전용 — real LiDAR 검증 필요</a:t>
             </a:r>
           </a:p>
           <a:p>
@@ -6668,13 +6341,13 @@
               </a:spcAft>
             </a:pPr>
             <a:r>
-              <a:rPr sz="1400">
+              <a:rPr sz="1500">
                 <a:solidFill>
                   <a:srgbClr val="1A1A2E"/>
                 </a:solidFill>
                 <a:latin typeface="Calibri"/>
               </a:rPr>
-              <a:t>• • Paper 2 (Hydrofoil Feedforward)</a:t>
+              <a:t>• • 선형 모델 → Stokes-2+ nonlinearity 미반영</a:t>
             </a:r>
           </a:p>
           <a:p>
@@ -6684,13 +6357,13 @@
               </a:spcAft>
             </a:pPr>
             <a:r>
-              <a:rPr sz="1400">
+              <a:rPr sz="1500">
                 <a:solidFill>
                   <a:srgbClr val="1A1A2E"/>
                 </a:solidFill>
                 <a:latin typeface="Calibri"/>
               </a:rPr>
-              <a:t>• •   파면 예측 → 하이드로포일 2DOF feedforward 제어</a:t>
+              <a:t>• • Nₜᵣᵤₑ ≥ 30 이상 복잡 해상에서 성분 수 한계</a:t>
             </a:r>
           </a:p>
           <a:p>
@@ -6700,15 +6373,74 @@
               </a:spcAft>
             </a:pPr>
             <a:r>
-              <a:rPr sz="1400">
+              <a:rPr sz="1500">
                 <a:solidFill>
                   <a:srgbClr val="1A1A2E"/>
                 </a:solidFill>
                 <a:latin typeface="Calibri"/>
               </a:rPr>
-              <a:t>• •   WaveSplat의 downstream application</a:t>
-            </a:r>
-          </a:p>
+              <a:t>• • 해류(current) 미추정</a:t>
+            </a:r>
+          </a:p>
+        </p:txBody>
+      </p:sp>
+      <p:sp>
+        <p:nvSpPr>
+          <p:cNvPr id="7" name="TextBox 6"/>
+          <p:cNvSpPr txBox="1"/>
+          <p:nvPr/>
+        </p:nvSpPr>
+        <p:spPr>
+          <a:xfrm>
+            <a:off x="6858000" y="1371600"/>
+            <a:ext cx="4846320" cy="365760"/>
+          </a:xfrm>
+          <a:prstGeom prst="rect">
+            <a:avLst/>
+          </a:prstGeom>
+          <a:noFill/>
+        </p:spPr>
+        <p:txBody>
+          <a:bodyPr wrap="square">
+            <a:spAutoFit/>
+          </a:bodyPr>
+          <a:lstStyle/>
+          <a:p>
+            <a:pPr algn="l">
+              <a:defRPr sz="2000" b="1">
+                <a:solidFill>
+                  <a:srgbClr val="007ACC"/>
+                </a:solidFill>
+                <a:latin typeface="Calibri"/>
+              </a:defRPr>
+            </a:pPr>
+            <a:r>
+              <a:t>Contributions 요약</a:t>
+            </a:r>
+          </a:p>
+        </p:txBody>
+      </p:sp>
+      <p:sp>
+        <p:nvSpPr>
+          <p:cNvPr id="8" name="TextBox 7"/>
+          <p:cNvSpPr txBox="1"/>
+          <p:nvPr/>
+        </p:nvSpPr>
+        <p:spPr>
+          <a:xfrm>
+            <a:off x="6858000" y="1828800"/>
+            <a:ext cx="4846320" cy="3657600"/>
+          </a:xfrm>
+          <a:prstGeom prst="rect">
+            <a:avLst/>
+          </a:prstGeom>
+          <a:noFill/>
+        </p:spPr>
+        <p:txBody>
+          <a:bodyPr wrap="square">
+            <a:spAutoFit/>
+          </a:bodyPr>
+          <a:lstStyle/>
           <a:p>
             <a:pPr>
               <a:spcAft>
@@ -6722,7 +6454,7 @@
                 </a:solidFill>
                 <a:latin typeface="Calibri"/>
               </a:rPr>
-              <a:t>• •   Status: 실험 완료, 초안 작성 완료</a:t>
+              <a:t>• • ❶ Grid-free spectral Gaussian 파면 추정</a:t>
             </a:r>
           </a:p>
           <a:p>
@@ -6738,68 +6470,9 @@
                 </a:solidFill>
                 <a:latin typeface="Calibri"/>
               </a:rPr>
-              <a:t>• •   Target 저널: 미정 (Ocean Engineering / JSR 등)</a:t>
-            </a:r>
-          </a:p>
-        </p:txBody>
-      </p:sp>
-      <p:sp>
-        <p:nvSpPr>
-          <p:cNvPr id="8" name="TextBox 7"/>
-          <p:cNvSpPr txBox="1"/>
-          <p:nvPr/>
-        </p:nvSpPr>
-        <p:spPr>
-          <a:xfrm>
-            <a:off x="6400800" y="1371600"/>
-            <a:ext cx="5303520" cy="365760"/>
-          </a:xfrm>
-          <a:prstGeom prst="rect">
-            <a:avLst/>
-          </a:prstGeom>
-          <a:noFill/>
-        </p:spPr>
-        <p:txBody>
-          <a:bodyPr wrap="square">
-            <a:spAutoFit/>
-          </a:bodyPr>
-          <a:lstStyle/>
-          <a:p>
-            <a:pPr algn="l">
-              <a:defRPr sz="2200" b="1">
-                <a:solidFill>
-                  <a:srgbClr val="E8553A"/>
-                </a:solidFill>
-                <a:latin typeface="Calibri"/>
-              </a:defRPr>
-            </a:pPr>
-            <a:r>
-              <a:t>박사 학위 로드맵</a:t>
-            </a:r>
-          </a:p>
-        </p:txBody>
-      </p:sp>
-      <p:sp>
-        <p:nvSpPr>
-          <p:cNvPr id="9" name="TextBox 8"/>
-          <p:cNvSpPr txBox="1"/>
-          <p:nvPr/>
-        </p:nvSpPr>
-        <p:spPr>
-          <a:xfrm>
-            <a:off x="6400800" y="1828800"/>
-            <a:ext cx="5303520" cy="4114800"/>
-          </a:xfrm>
-          <a:prstGeom prst="rect">
-            <a:avLst/>
-          </a:prstGeom>
-          <a:noFill/>
-        </p:spPr>
-        <p:txBody>
-          <a:bodyPr wrap="square">
-            <a:spAutoFit/>
-          </a:bodyPr>
-          <a:lstStyle/>
+              <a:t>• • ❷ Dispersion hard constraint (5N→4N)</a:t>
+            </a:r>
+          </a:p>
           <a:p>
             <a:pPr>
               <a:spcAft>
@@ -6813,7 +6486,7 @@
                 </a:solidFill>
                 <a:latin typeface="Calibri"/>
               </a:rPr>
-              <a:t>• • Core thesis:</a:t>
+              <a:t>• • ❸ Adaptive N (pruning + growth)</a:t>
             </a:r>
           </a:p>
           <a:p>
@@ -6829,7 +6502,7 @@
                 </a:solidFill>
                 <a:latin typeface="Calibri"/>
               </a:rPr>
-              <a:t>• •   '선박 탑재 LiDAR 기반 실시간 파랑장 추정과</a:t>
+              <a:t>• • ❹ Fresnel confidence weighting</a:t>
             </a:r>
           </a:p>
           <a:p>
@@ -6845,7 +6518,7 @@
                 </a:solidFill>
                 <a:latin typeface="Calibri"/>
               </a:rPr>
-              <a:t>• •    그 제어 응용'</a:t>
+              <a:t>• • ❺ Pre-registered 6-metric panel</a:t>
             </a:r>
           </a:p>
           <a:p>
@@ -6861,7 +6534,7 @@
                 </a:solidFill>
                 <a:latin typeface="Calibri"/>
               </a:rPr>
-              <a:t>• </a:t>
+              <a:t>• • ❻ 24-config ETKF sweep (fair baseline)</a:t>
             </a:r>
           </a:p>
           <a:p>
@@ -6877,9 +6550,335 @@
                 </a:solidFill>
                 <a:latin typeface="Calibri"/>
               </a:rPr>
-              <a:t>• • Paper 1: Wave estimation (WaveSplat)</a:t>
-            </a:r>
-          </a:p>
+              <a:t>• • ❼ Dispersion drift 정량화 (R̄ metric)</a:t>
+            </a:r>
+          </a:p>
+        </p:txBody>
+      </p:sp>
+      <p:sp>
+        <p:nvSpPr>
+          <p:cNvPr id="9" name="Rounded Rectangle 8"/>
+          <p:cNvSpPr/>
+          <p:nvPr/>
+        </p:nvSpPr>
+        <p:spPr>
+          <a:xfrm>
+            <a:off x="731520" y="5303520"/>
+            <a:ext cx="10698480" cy="1097280"/>
+          </a:xfrm>
+          <a:prstGeom prst="roundRect">
+            <a:avLst/>
+          </a:prstGeom>
+          <a:solidFill>
+            <a:srgbClr val="F0F4F8"/>
+          </a:solidFill>
+          <a:ln>
+            <a:solidFill>
+              <a:srgbClr val="007ACC"/>
+            </a:solidFill>
+          </a:ln>
+        </p:spPr>
+        <p:style>
+          <a:lnRef idx="1">
+            <a:schemeClr val="accent1"/>
+          </a:lnRef>
+          <a:fillRef idx="3">
+            <a:schemeClr val="accent1"/>
+          </a:fillRef>
+          <a:effectRef idx="2">
+            <a:schemeClr val="accent1"/>
+          </a:effectRef>
+          <a:fontRef idx="minor">
+            <a:schemeClr val="lt1"/>
+          </a:fontRef>
+        </p:style>
+        <p:txBody>
+          <a:bodyPr rtlCol="0" anchor="ctr" wrap="square"/>
+          <a:lstStyle/>
+          <a:p>
+            <a:pPr algn="ctr">
+              <a:defRPr sz="1600" b="1">
+                <a:solidFill>
+                  <a:srgbClr val="1A1A2E"/>
+                </a:solidFill>
+              </a:defRPr>
+            </a:pPr>
+            <a:r>
+              <a:t>Summary:  nRMSE 30.1% lower  |  ~10× faster  |  SS only positive  |  Cohen's d=1.16 (large)  |  100 paired runs, p=1.1×10⁻¹⁵</a:t>
+            </a:r>
+          </a:p>
+        </p:txBody>
+      </p:sp>
+      <p:sp>
+        <p:nvSpPr>
+          <p:cNvPr id="10" name="TextBox 9"/>
+          <p:cNvSpPr txBox="1"/>
+          <p:nvPr/>
+        </p:nvSpPr>
+        <p:spPr>
+          <a:xfrm>
+            <a:off x="10972800" y="6492240"/>
+            <a:ext cx="1097280" cy="274320"/>
+          </a:xfrm>
+          <a:prstGeom prst="rect">
+            <a:avLst/>
+          </a:prstGeom>
+          <a:noFill/>
+        </p:spPr>
+        <p:txBody>
+          <a:bodyPr wrap="square">
+            <a:spAutoFit/>
+          </a:bodyPr>
+          <a:lstStyle/>
+          <a:p>
+            <a:pPr algn="r">
+              <a:defRPr sz="1000" b="0">
+                <a:solidFill>
+                  <a:srgbClr val="666666"/>
+                </a:solidFill>
+                <a:latin typeface="Calibri"/>
+              </a:defRPr>
+            </a:pPr>
+            <a:r>
+              <a:t>15/16</a:t>
+            </a:r>
+          </a:p>
+        </p:txBody>
+      </p:sp>
+    </p:spTree>
+  </p:cSld>
+  <p:clrMapOvr>
+    <a:masterClrMapping/>
+  </p:clrMapOvr>
+</p:sld>
+</file>
+
+<file path=ppt/slides/slide16.xml><?xml version="1.0" encoding="utf-8"?>
+<p:sld xmlns:a="http://schemas.openxmlformats.org/drawingml/2006/main" xmlns:p="http://schemas.openxmlformats.org/presentationml/2006/main" xmlns:r="http://schemas.openxmlformats.org/officeDocument/2006/relationships">
+  <p:cSld>
+    <p:bg>
+      <p:bgPr>
+        <a:solidFill>
+          <a:srgbClr val="FFFFFF"/>
+        </a:solidFill>
+        <a:effectLst/>
+      </p:bgPr>
+    </p:bg>
+    <p:spTree>
+      <p:nvGrpSpPr>
+        <p:cNvPr id="1" name=""/>
+        <p:cNvGrpSpPr/>
+        <p:nvPr/>
+      </p:nvGrpSpPr>
+      <p:grpSpPr/>
+      <p:sp>
+        <p:nvSpPr>
+          <p:cNvPr id="2" name="Rectangle 1"/>
+          <p:cNvSpPr/>
+          <p:nvPr/>
+        </p:nvSpPr>
+        <p:spPr>
+          <a:xfrm>
+            <a:off x="0" y="0"/>
+            <a:ext cx="12191695" cy="1097280"/>
+          </a:xfrm>
+          <a:prstGeom prst="rect">
+            <a:avLst/>
+          </a:prstGeom>
+          <a:solidFill>
+            <a:srgbClr val="1A1A2E"/>
+          </a:solidFill>
+          <a:ln>
+            <a:noFill/>
+          </a:ln>
+        </p:spPr>
+        <p:style>
+          <a:lnRef idx="1">
+            <a:schemeClr val="accent1"/>
+          </a:lnRef>
+          <a:fillRef idx="3">
+            <a:schemeClr val="accent1"/>
+          </a:fillRef>
+          <a:effectRef idx="2">
+            <a:schemeClr val="accent1"/>
+          </a:effectRef>
+          <a:fontRef idx="minor">
+            <a:schemeClr val="lt1"/>
+          </a:fontRef>
+        </p:style>
+        <p:txBody>
+          <a:bodyPr rtlCol="0" anchor="ctr"/>
+          <a:lstStyle/>
+          <a:p>
+            <a:pPr algn="ctr"/>
+          </a:p>
+        </p:txBody>
+      </p:sp>
+      <p:sp>
+        <p:nvSpPr>
+          <p:cNvPr id="3" name="TextBox 2"/>
+          <p:cNvSpPr txBox="1"/>
+          <p:nvPr/>
+        </p:nvSpPr>
+        <p:spPr>
+          <a:xfrm>
+            <a:off x="457200" y="137160"/>
+            <a:ext cx="10972800" cy="457200"/>
+          </a:xfrm>
+          <a:prstGeom prst="rect">
+            <a:avLst/>
+          </a:prstGeom>
+          <a:noFill/>
+        </p:spPr>
+        <p:txBody>
+          <a:bodyPr wrap="square">
+            <a:spAutoFit/>
+          </a:bodyPr>
+          <a:lstStyle/>
+          <a:p>
+            <a:pPr algn="l">
+              <a:defRPr sz="1400" b="0">
+                <a:solidFill>
+                  <a:srgbClr val="007ACC"/>
+                </a:solidFill>
+                <a:latin typeface="Calibri"/>
+              </a:defRPr>
+            </a:pPr>
+            <a:r>
+              <a:t>  05</a:t>
+            </a:r>
+          </a:p>
+        </p:txBody>
+      </p:sp>
+      <p:sp>
+        <p:nvSpPr>
+          <p:cNvPr id="4" name="TextBox 3"/>
+          <p:cNvSpPr txBox="1"/>
+          <p:nvPr/>
+        </p:nvSpPr>
+        <p:spPr>
+          <a:xfrm>
+            <a:off x="457200" y="320040"/>
+            <a:ext cx="10972800" cy="640080"/>
+          </a:xfrm>
+          <a:prstGeom prst="rect">
+            <a:avLst/>
+          </a:prstGeom>
+          <a:noFill/>
+        </p:spPr>
+        <p:txBody>
+          <a:bodyPr wrap="square">
+            <a:spAutoFit/>
+          </a:bodyPr>
+          <a:lstStyle/>
+          <a:p>
+            <a:pPr algn="l">
+              <a:defRPr sz="2800" b="1">
+                <a:solidFill>
+                  <a:srgbClr val="FFFFFF"/>
+                </a:solidFill>
+                <a:latin typeface="Calibri"/>
+              </a:defRPr>
+            </a:pPr>
+            <a:r>
+              <a:t>  계획: 논문 투고 &amp; 박사 학위</a:t>
+            </a:r>
+          </a:p>
+        </p:txBody>
+      </p:sp>
+      <p:sp>
+        <p:nvSpPr>
+          <p:cNvPr id="5" name="TextBox 4"/>
+          <p:cNvSpPr txBox="1"/>
+          <p:nvPr/>
+        </p:nvSpPr>
+        <p:spPr>
+          <a:xfrm>
+            <a:off x="457200" y="685800"/>
+            <a:ext cx="10972800" cy="365760"/>
+          </a:xfrm>
+          <a:prstGeom prst="rect">
+            <a:avLst/>
+          </a:prstGeom>
+          <a:noFill/>
+        </p:spPr>
+        <p:txBody>
+          <a:bodyPr wrap="square">
+            <a:spAutoFit/>
+          </a:bodyPr>
+          <a:lstStyle/>
+          <a:p>
+            <a:pPr algn="l">
+              <a:defRPr sz="1400" b="0">
+                <a:solidFill>
+                  <a:srgbClr val="AABBCC"/>
+                </a:solidFill>
+                <a:latin typeface="Calibri"/>
+              </a:defRPr>
+            </a:pPr>
+            <a:r>
+              <a:t>  Plans</a:t>
+            </a:r>
+          </a:p>
+        </p:txBody>
+      </p:sp>
+      <p:sp>
+        <p:nvSpPr>
+          <p:cNvPr id="6" name="TextBox 5"/>
+          <p:cNvSpPr txBox="1"/>
+          <p:nvPr/>
+        </p:nvSpPr>
+        <p:spPr>
+          <a:xfrm>
+            <a:off x="731520" y="1371600"/>
+            <a:ext cx="5303520" cy="365760"/>
+          </a:xfrm>
+          <a:prstGeom prst="rect">
+            <a:avLst/>
+          </a:prstGeom>
+          <a:noFill/>
+        </p:spPr>
+        <p:txBody>
+          <a:bodyPr wrap="square">
+            <a:spAutoFit/>
+          </a:bodyPr>
+          <a:lstStyle/>
+          <a:p>
+            <a:pPr algn="l">
+              <a:defRPr sz="2200" b="1">
+                <a:solidFill>
+                  <a:srgbClr val="007ACC"/>
+                </a:solidFill>
+                <a:latin typeface="Calibri"/>
+              </a:defRPr>
+            </a:pPr>
+            <a:r>
+              <a:t>논문 투고 계획</a:t>
+            </a:r>
+          </a:p>
+        </p:txBody>
+      </p:sp>
+      <p:sp>
+        <p:nvSpPr>
+          <p:cNvPr id="7" name="TextBox 6"/>
+          <p:cNvSpPr txBox="1"/>
+          <p:nvPr/>
+        </p:nvSpPr>
+        <p:spPr>
+          <a:xfrm>
+            <a:off x="731520" y="1828800"/>
+            <a:ext cx="5303520" cy="4114800"/>
+          </a:xfrm>
+          <a:prstGeom prst="rect">
+            <a:avLst/>
+          </a:prstGeom>
+          <a:noFill/>
+        </p:spPr>
+        <p:txBody>
+          <a:bodyPr wrap="square">
+            <a:spAutoFit/>
+          </a:bodyPr>
+          <a:lstStyle/>
           <a:p>
             <a:pPr>
               <a:spcAft>
@@ -6893,7 +6892,7 @@
                 </a:solidFill>
                 <a:latin typeface="Calibri"/>
               </a:rPr>
-              <a:t>• • Paper 2: Wave-preview control (Hydrofoil)</a:t>
+              <a:t>• • Paper 1 (WaveSplat)</a:t>
             </a:r>
           </a:p>
           <a:p>
@@ -6909,7 +6908,7 @@
                 </a:solidFill>
                 <a:latin typeface="Calibri"/>
               </a:rPr>
-              <a:t>• • Paper 3+: 확장 연구</a:t>
+              <a:t>• •   Target: Ocean Engineering (Elsevier)</a:t>
             </a:r>
           </a:p>
           <a:p>
@@ -6925,7 +6924,7 @@
                 </a:solidFill>
                 <a:latin typeface="Calibri"/>
               </a:rPr>
-              <a:t>• •   → MPC 기반 6-DOF 제어</a:t>
+              <a:t>• •   Status: 40p 원고 + cover letter + graphical abstract 완료</a:t>
             </a:r>
           </a:p>
           <a:p>
@@ -6941,7 +6940,7 @@
                 </a:solidFill>
                 <a:latin typeface="Calibri"/>
               </a:rPr>
-              <a:t>• •   → Real LiDAR 검증 (SNU 조파수조 → 실선)</a:t>
+              <a:t>• •   Next: 공동저자 sign-off → 투고</a:t>
             </a:r>
           </a:p>
           <a:p>
@@ -6957,7 +6956,7 @@
                 </a:solidFill>
                 <a:latin typeface="Calibri"/>
               </a:rPr>
-              <a:t>• •   → Stokes-2 nonlinear model</a:t>
+              <a:t>• </a:t>
             </a:r>
           </a:p>
           <a:p>
@@ -6973,21 +6972,85 @@
                 </a:solidFill>
                 <a:latin typeface="Calibri"/>
               </a:rPr>
-              <a:t>• •   → 해류(current) 추정 통합</a:t>
-            </a:r>
-          </a:p>
-        </p:txBody>
-      </p:sp>
-      <p:sp>
-        <p:nvSpPr>
-          <p:cNvPr id="10" name="TextBox 9"/>
+              <a:t>• • Paper 2 (Hydrofoil Feedforward)</a:t>
+            </a:r>
+          </a:p>
+          <a:p>
+            <a:pPr>
+              <a:spcAft>
+                <a:spcPts val="600"/>
+              </a:spcAft>
+            </a:pPr>
+            <a:r>
+              <a:rPr sz="1400">
+                <a:solidFill>
+                  <a:srgbClr val="1A1A2E"/>
+                </a:solidFill>
+                <a:latin typeface="Calibri"/>
+              </a:rPr>
+              <a:t>• •   파면 예측 → 하이드로포일 2DOF feedforward 제어</a:t>
+            </a:r>
+          </a:p>
+          <a:p>
+            <a:pPr>
+              <a:spcAft>
+                <a:spcPts val="600"/>
+              </a:spcAft>
+            </a:pPr>
+            <a:r>
+              <a:rPr sz="1400">
+                <a:solidFill>
+                  <a:srgbClr val="1A1A2E"/>
+                </a:solidFill>
+                <a:latin typeface="Calibri"/>
+              </a:rPr>
+              <a:t>• •   WaveSplat의 downstream application</a:t>
+            </a:r>
+          </a:p>
+          <a:p>
+            <a:pPr>
+              <a:spcAft>
+                <a:spcPts val="600"/>
+              </a:spcAft>
+            </a:pPr>
+            <a:r>
+              <a:rPr sz="1400">
+                <a:solidFill>
+                  <a:srgbClr val="1A1A2E"/>
+                </a:solidFill>
+                <a:latin typeface="Calibri"/>
+              </a:rPr>
+              <a:t>• •   Status: 실험 완료, 초안 작성 완료</a:t>
+            </a:r>
+          </a:p>
+          <a:p>
+            <a:pPr>
+              <a:spcAft>
+                <a:spcPts val="600"/>
+              </a:spcAft>
+            </a:pPr>
+            <a:r>
+              <a:rPr sz="1400">
+                <a:solidFill>
+                  <a:srgbClr val="1A1A2E"/>
+                </a:solidFill>
+                <a:latin typeface="Calibri"/>
+              </a:rPr>
+              <a:t>• •   Target 저널: 미정 (Ocean Engineering / JSR 등)</a:t>
+            </a:r>
+          </a:p>
+        </p:txBody>
+      </p:sp>
+      <p:sp>
+        <p:nvSpPr>
+          <p:cNvPr id="8" name="TextBox 7"/>
           <p:cNvSpPr txBox="1"/>
           <p:nvPr/>
         </p:nvSpPr>
         <p:spPr>
           <a:xfrm>
-            <a:off x="1371600" y="5943600"/>
-            <a:ext cx="9418320" cy="457200"/>
+            <a:off x="6400800" y="1371600"/>
+            <a:ext cx="5303520" cy="365760"/>
           </a:xfrm>
           <a:prstGeom prst="rect">
             <a:avLst/>
@@ -7000,30 +7063,30 @@
           </a:bodyPr>
           <a:lstStyle/>
           <a:p>
-            <a:pPr algn="ctr">
+            <a:pPr algn="l">
               <a:defRPr sz="2200" b="1">
                 <a:solidFill>
-                  <a:srgbClr val="1A1A2E"/>
+                  <a:srgbClr val="E8553A"/>
                 </a:solidFill>
                 <a:latin typeface="Calibri"/>
               </a:defRPr>
             </a:pPr>
             <a:r>
-              <a:t>감사합니다. 질문 부탁드립니다.</a:t>
-            </a:r>
-          </a:p>
-        </p:txBody>
-      </p:sp>
-      <p:sp>
-        <p:nvSpPr>
-          <p:cNvPr id="11" name="TextBox 10"/>
+              <a:t>박사 학위 로드맵</a:t>
+            </a:r>
+          </a:p>
+        </p:txBody>
+      </p:sp>
+      <p:sp>
+        <p:nvSpPr>
+          <p:cNvPr id="9" name="TextBox 8"/>
           <p:cNvSpPr txBox="1"/>
           <p:nvPr/>
         </p:nvSpPr>
         <p:spPr>
           <a:xfrm>
-            <a:off x="10972800" y="6492240"/>
-            <a:ext cx="1097280" cy="274320"/>
+            <a:off x="6400800" y="1828800"/>
+            <a:ext cx="5303520" cy="4114800"/>
           </a:xfrm>
           <a:prstGeom prst="rect">
             <a:avLst/>
@@ -7036,6 +7099,241 @@
           </a:bodyPr>
           <a:lstStyle/>
           <a:p>
+            <a:pPr>
+              <a:spcAft>
+                <a:spcPts val="600"/>
+              </a:spcAft>
+            </a:pPr>
+            <a:r>
+              <a:rPr sz="1400">
+                <a:solidFill>
+                  <a:srgbClr val="1A1A2E"/>
+                </a:solidFill>
+                <a:latin typeface="Calibri"/>
+              </a:rPr>
+              <a:t>• • Core thesis:</a:t>
+            </a:r>
+          </a:p>
+          <a:p>
+            <a:pPr>
+              <a:spcAft>
+                <a:spcPts val="600"/>
+              </a:spcAft>
+            </a:pPr>
+            <a:r>
+              <a:rPr sz="1400">
+                <a:solidFill>
+                  <a:srgbClr val="1A1A2E"/>
+                </a:solidFill>
+                <a:latin typeface="Calibri"/>
+              </a:rPr>
+              <a:t>• •   '선박 탑재 LiDAR 기반 실시간 파랑장 추정과</a:t>
+            </a:r>
+          </a:p>
+          <a:p>
+            <a:pPr>
+              <a:spcAft>
+                <a:spcPts val="600"/>
+              </a:spcAft>
+            </a:pPr>
+            <a:r>
+              <a:rPr sz="1400">
+                <a:solidFill>
+                  <a:srgbClr val="1A1A2E"/>
+                </a:solidFill>
+                <a:latin typeface="Calibri"/>
+              </a:rPr>
+              <a:t>• •    그 제어 응용'</a:t>
+            </a:r>
+          </a:p>
+          <a:p>
+            <a:pPr>
+              <a:spcAft>
+                <a:spcPts val="600"/>
+              </a:spcAft>
+            </a:pPr>
+            <a:r>
+              <a:rPr sz="1400">
+                <a:solidFill>
+                  <a:srgbClr val="1A1A2E"/>
+                </a:solidFill>
+                <a:latin typeface="Calibri"/>
+              </a:rPr>
+              <a:t>• </a:t>
+            </a:r>
+          </a:p>
+          <a:p>
+            <a:pPr>
+              <a:spcAft>
+                <a:spcPts val="600"/>
+              </a:spcAft>
+            </a:pPr>
+            <a:r>
+              <a:rPr sz="1400">
+                <a:solidFill>
+                  <a:srgbClr val="1A1A2E"/>
+                </a:solidFill>
+                <a:latin typeface="Calibri"/>
+              </a:rPr>
+              <a:t>• • Paper 1: Wave estimation (WaveSplat)</a:t>
+            </a:r>
+          </a:p>
+          <a:p>
+            <a:pPr>
+              <a:spcAft>
+                <a:spcPts val="600"/>
+              </a:spcAft>
+            </a:pPr>
+            <a:r>
+              <a:rPr sz="1400">
+                <a:solidFill>
+                  <a:srgbClr val="1A1A2E"/>
+                </a:solidFill>
+                <a:latin typeface="Calibri"/>
+              </a:rPr>
+              <a:t>• • Paper 2: Wave-preview control (Hydrofoil)</a:t>
+            </a:r>
+          </a:p>
+          <a:p>
+            <a:pPr>
+              <a:spcAft>
+                <a:spcPts val="600"/>
+              </a:spcAft>
+            </a:pPr>
+            <a:r>
+              <a:rPr sz="1400">
+                <a:solidFill>
+                  <a:srgbClr val="1A1A2E"/>
+                </a:solidFill>
+                <a:latin typeface="Calibri"/>
+              </a:rPr>
+              <a:t>• • Paper 3+: 확장 연구</a:t>
+            </a:r>
+          </a:p>
+          <a:p>
+            <a:pPr>
+              <a:spcAft>
+                <a:spcPts val="600"/>
+              </a:spcAft>
+            </a:pPr>
+            <a:r>
+              <a:rPr sz="1400">
+                <a:solidFill>
+                  <a:srgbClr val="1A1A2E"/>
+                </a:solidFill>
+                <a:latin typeface="Calibri"/>
+              </a:rPr>
+              <a:t>• •   → MPC 기반 6-DOF 제어</a:t>
+            </a:r>
+          </a:p>
+          <a:p>
+            <a:pPr>
+              <a:spcAft>
+                <a:spcPts val="600"/>
+              </a:spcAft>
+            </a:pPr>
+            <a:r>
+              <a:rPr sz="1400">
+                <a:solidFill>
+                  <a:srgbClr val="1A1A2E"/>
+                </a:solidFill>
+                <a:latin typeface="Calibri"/>
+              </a:rPr>
+              <a:t>• •   → Real LiDAR 검증 (SNU 조파수조 → 실선)</a:t>
+            </a:r>
+          </a:p>
+          <a:p>
+            <a:pPr>
+              <a:spcAft>
+                <a:spcPts val="600"/>
+              </a:spcAft>
+            </a:pPr>
+            <a:r>
+              <a:rPr sz="1400">
+                <a:solidFill>
+                  <a:srgbClr val="1A1A2E"/>
+                </a:solidFill>
+                <a:latin typeface="Calibri"/>
+              </a:rPr>
+              <a:t>• •   → Stokes-2 nonlinear model</a:t>
+            </a:r>
+          </a:p>
+          <a:p>
+            <a:pPr>
+              <a:spcAft>
+                <a:spcPts val="600"/>
+              </a:spcAft>
+            </a:pPr>
+            <a:r>
+              <a:rPr sz="1400">
+                <a:solidFill>
+                  <a:srgbClr val="1A1A2E"/>
+                </a:solidFill>
+                <a:latin typeface="Calibri"/>
+              </a:rPr>
+              <a:t>• •   → 해류(current) 추정 통합</a:t>
+            </a:r>
+          </a:p>
+        </p:txBody>
+      </p:sp>
+      <p:sp>
+        <p:nvSpPr>
+          <p:cNvPr id="10" name="TextBox 9"/>
+          <p:cNvSpPr txBox="1"/>
+          <p:nvPr/>
+        </p:nvSpPr>
+        <p:spPr>
+          <a:xfrm>
+            <a:off x="1371600" y="5943600"/>
+            <a:ext cx="9418320" cy="457200"/>
+          </a:xfrm>
+          <a:prstGeom prst="rect">
+            <a:avLst/>
+          </a:prstGeom>
+          <a:noFill/>
+        </p:spPr>
+        <p:txBody>
+          <a:bodyPr wrap="square">
+            <a:spAutoFit/>
+          </a:bodyPr>
+          <a:lstStyle/>
+          <a:p>
+            <a:pPr algn="ctr">
+              <a:defRPr sz="2200" b="1">
+                <a:solidFill>
+                  <a:srgbClr val="1A1A2E"/>
+                </a:solidFill>
+                <a:latin typeface="Calibri"/>
+              </a:defRPr>
+            </a:pPr>
+            <a:r>
+              <a:t>감사합니다. 질문 부탁드립니다.</a:t>
+            </a:r>
+          </a:p>
+        </p:txBody>
+      </p:sp>
+      <p:sp>
+        <p:nvSpPr>
+          <p:cNvPr id="11" name="TextBox 10"/>
+          <p:cNvSpPr txBox="1"/>
+          <p:nvPr/>
+        </p:nvSpPr>
+        <p:spPr>
+          <a:xfrm>
+            <a:off x="10972800" y="6492240"/>
+            <a:ext cx="1097280" cy="274320"/>
+          </a:xfrm>
+          <a:prstGeom prst="rect">
+            <a:avLst/>
+          </a:prstGeom>
+          <a:noFill/>
+        </p:spPr>
+        <p:txBody>
+          <a:bodyPr wrap="square">
+            <a:spAutoFit/>
+          </a:bodyPr>
+          <a:lstStyle/>
+          <a:p>
             <a:pPr algn="r">
               <a:defRPr sz="1000" b="0">
                 <a:solidFill>
@@ -7045,7 +7343,7 @@
               </a:defRPr>
             </a:pPr>
             <a:r>
-              <a:t>15/15</a:t>
+              <a:t>16/16</a:t>
             </a:r>
           </a:p>
         </p:txBody>
@@ -7572,7 +7870,7 @@
               </a:defRPr>
             </a:pPr>
             <a:r>
-              <a:t>2/15</a:t>
+              <a:t>2/16</a:t>
             </a:r>
           </a:p>
         </p:txBody>
@@ -8273,7 +8571,7 @@
               </a:defRPr>
             </a:pPr>
             <a:r>
-              <a:t>3/15</a:t>
+              <a:t>3/16</a:t>
             </a:r>
           </a:p>
         </p:txBody>
@@ -8677,7 +8975,7 @@
               </a:defRPr>
             </a:pPr>
             <a:r>
-              <a:t>4/15</a:t>
+              <a:t>4/16</a:t>
             </a:r>
           </a:p>
         </p:txBody>
@@ -9129,7 +9427,7 @@
               </a:defRPr>
             </a:pPr>
             <a:r>
-              <a:t>5/15</a:t>
+              <a:t>5/16</a:t>
             </a:r>
           </a:p>
         </p:txBody>
@@ -9850,7 +10148,7 @@
               </a:defRPr>
             </a:pPr>
             <a:r>
-              <a:t>6/15</a:t>
+              <a:t>6/16</a:t>
             </a:r>
           </a:p>
         </p:txBody>
@@ -9864,6 +10162,842 @@
 </file>
 
 <file path=ppt/slides/slide7.xml><?xml version="1.0" encoding="utf-8"?>
+<p:sld xmlns:a="http://schemas.openxmlformats.org/drawingml/2006/main" xmlns:p="http://schemas.openxmlformats.org/presentationml/2006/main" xmlns:r="http://schemas.openxmlformats.org/officeDocument/2006/relationships">
+  <p:cSld>
+    <p:bg>
+      <p:bgPr>
+        <a:solidFill>
+          <a:srgbClr val="FFFFFF"/>
+        </a:solidFill>
+        <a:effectLst/>
+      </p:bgPr>
+    </p:bg>
+    <p:spTree>
+      <p:nvGrpSpPr>
+        <p:cNvPr id="1" name=""/>
+        <p:cNvGrpSpPr/>
+        <p:nvPr/>
+      </p:nvGrpSpPr>
+      <p:grpSpPr/>
+      <p:sp>
+        <p:nvSpPr>
+          <p:cNvPr id="2" name="Rectangle 1"/>
+          <p:cNvSpPr/>
+          <p:nvPr/>
+        </p:nvSpPr>
+        <p:spPr>
+          <a:xfrm>
+            <a:off x="0" y="0"/>
+            <a:ext cx="12191695" cy="1097280"/>
+          </a:xfrm>
+          <a:prstGeom prst="rect">
+            <a:avLst/>
+          </a:prstGeom>
+          <a:solidFill>
+            <a:srgbClr val="1A1A2E"/>
+          </a:solidFill>
+          <a:ln>
+            <a:noFill/>
+          </a:ln>
+        </p:spPr>
+        <p:style>
+          <a:lnRef idx="1">
+            <a:schemeClr val="accent1"/>
+          </a:lnRef>
+          <a:fillRef idx="3">
+            <a:schemeClr val="accent1"/>
+          </a:fillRef>
+          <a:effectRef idx="2">
+            <a:schemeClr val="accent1"/>
+          </a:effectRef>
+          <a:fontRef idx="minor">
+            <a:schemeClr val="lt1"/>
+          </a:fontRef>
+        </p:style>
+        <p:txBody>
+          <a:bodyPr rtlCol="0" anchor="ctr"/>
+          <a:lstStyle/>
+          <a:p>
+            <a:pPr algn="ctr"/>
+          </a:p>
+        </p:txBody>
+      </p:sp>
+      <p:sp>
+        <p:nvSpPr>
+          <p:cNvPr id="3" name="TextBox 2"/>
+          <p:cNvSpPr txBox="1"/>
+          <p:nvPr/>
+        </p:nvSpPr>
+        <p:spPr>
+          <a:xfrm>
+            <a:off x="457200" y="137160"/>
+            <a:ext cx="10972800" cy="457200"/>
+          </a:xfrm>
+          <a:prstGeom prst="rect">
+            <a:avLst/>
+          </a:prstGeom>
+          <a:noFill/>
+        </p:spPr>
+        <p:txBody>
+          <a:bodyPr wrap="square">
+            <a:spAutoFit/>
+          </a:bodyPr>
+          <a:lstStyle/>
+          <a:p>
+            <a:pPr algn="l">
+              <a:defRPr sz="1400" b="0">
+                <a:solidFill>
+                  <a:srgbClr val="007ACC"/>
+                </a:solidFill>
+                <a:latin typeface="Calibri"/>
+              </a:defRPr>
+            </a:pPr>
+            <a:r>
+              <a:t>  03</a:t>
+            </a:r>
+          </a:p>
+        </p:txBody>
+      </p:sp>
+      <p:sp>
+        <p:nvSpPr>
+          <p:cNvPr id="4" name="TextBox 3"/>
+          <p:cNvSpPr txBox="1"/>
+          <p:nvPr/>
+        </p:nvSpPr>
+        <p:spPr>
+          <a:xfrm>
+            <a:off x="457200" y="320040"/>
+            <a:ext cx="10972800" cy="640080"/>
+          </a:xfrm>
+          <a:prstGeom prst="rect">
+            <a:avLst/>
+          </a:prstGeom>
+          <a:noFill/>
+        </p:spPr>
+        <p:txBody>
+          <a:bodyPr wrap="square">
+            <a:spAutoFit/>
+          </a:bodyPr>
+          <a:lstStyle/>
+          <a:p>
+            <a:pPr algn="l">
+              <a:defRPr sz="2800" b="1">
+                <a:solidFill>
+                  <a:srgbClr val="FFFFFF"/>
+                </a:solidFill>
+                <a:latin typeface="Calibri"/>
+              </a:defRPr>
+            </a:pPr>
+            <a:r>
+              <a:t>  시뮬레이션 데이터의 물리적 신뢰성</a:t>
+            </a:r>
+          </a:p>
+        </p:txBody>
+      </p:sp>
+      <p:sp>
+        <p:nvSpPr>
+          <p:cNvPr id="5" name="TextBox 4"/>
+          <p:cNvSpPr txBox="1"/>
+          <p:nvPr/>
+        </p:nvSpPr>
+        <p:spPr>
+          <a:xfrm>
+            <a:off x="457200" y="685800"/>
+            <a:ext cx="10972800" cy="365760"/>
+          </a:xfrm>
+          <a:prstGeom prst="rect">
+            <a:avLst/>
+          </a:prstGeom>
+          <a:noFill/>
+        </p:spPr>
+        <p:txBody>
+          <a:bodyPr wrap="square">
+            <a:spAutoFit/>
+          </a:bodyPr>
+          <a:lstStyle/>
+          <a:p>
+            <a:pPr algn="l">
+              <a:defRPr sz="1400" b="0">
+                <a:solidFill>
+                  <a:srgbClr val="AABBCC"/>
+                </a:solidFill>
+                <a:latin typeface="Calibri"/>
+              </a:defRPr>
+            </a:pPr>
+            <a:r>
+              <a:t>  WaveSim: Why We Can Trust It</a:t>
+            </a:r>
+          </a:p>
+        </p:txBody>
+      </p:sp>
+      <p:sp>
+        <p:nvSpPr>
+          <p:cNvPr id="6" name="TextBox 5"/>
+          <p:cNvSpPr txBox="1"/>
+          <p:nvPr/>
+        </p:nvSpPr>
+        <p:spPr>
+          <a:xfrm>
+            <a:off x="731520" y="1371600"/>
+            <a:ext cx="5303520" cy="365760"/>
+          </a:xfrm>
+          <a:prstGeom prst="rect">
+            <a:avLst/>
+          </a:prstGeom>
+          <a:noFill/>
+        </p:spPr>
+        <p:txBody>
+          <a:bodyPr wrap="square">
+            <a:spAutoFit/>
+          </a:bodyPr>
+          <a:lstStyle/>
+          <a:p>
+            <a:pPr algn="l">
+              <a:defRPr sz="2000" b="1">
+                <a:solidFill>
+                  <a:srgbClr val="007ACC"/>
+                </a:solidFill>
+                <a:latin typeface="Calibri"/>
+              </a:defRPr>
+            </a:pPr>
+            <a:r>
+              <a:t>파도 생성: JONSWAP + Gerstner</a:t>
+            </a:r>
+          </a:p>
+        </p:txBody>
+      </p:sp>
+      <p:sp>
+        <p:nvSpPr>
+          <p:cNvPr id="7" name="TextBox 6"/>
+          <p:cNvSpPr txBox="1"/>
+          <p:nvPr/>
+        </p:nvSpPr>
+        <p:spPr>
+          <a:xfrm>
+            <a:off x="731520" y="1828800"/>
+            <a:ext cx="5303520" cy="3200400"/>
+          </a:xfrm>
+          <a:prstGeom prst="rect">
+            <a:avLst/>
+          </a:prstGeom>
+          <a:noFill/>
+        </p:spPr>
+        <p:txBody>
+          <a:bodyPr wrap="square">
+            <a:spAutoFit/>
+          </a:bodyPr>
+          <a:lstStyle/>
+          <a:p>
+            <a:pPr>
+              <a:spcAft>
+                <a:spcPts val="600"/>
+              </a:spcAft>
+            </a:pPr>
+            <a:r>
+              <a:rPr sz="1300">
+                <a:solidFill>
+                  <a:srgbClr val="1A1A2E"/>
+                </a:solidFill>
+                <a:latin typeface="Calibri"/>
+              </a:rPr>
+              <a:t>• • JONSWAP 스펙트럼 (Hasselmann et al. 1973)</a:t>
+            </a:r>
+          </a:p>
+          <a:p>
+            <a:pPr>
+              <a:spcAft>
+                <a:spcPts val="600"/>
+              </a:spcAft>
+            </a:pPr>
+            <a:r>
+              <a:rPr sz="1300">
+                <a:solidFill>
+                  <a:srgbClr val="1A1A2E"/>
+                </a:solidFill>
+                <a:latin typeface="Calibri"/>
+              </a:rPr>
+              <a:t>• •   → Hs, Tₚ로 파라미터화, 해양공학 표준</a:t>
+            </a:r>
+          </a:p>
+          <a:p>
+            <a:pPr>
+              <a:spcAft>
+                <a:spcPts val="600"/>
+              </a:spcAft>
+            </a:pPr>
+            <a:r>
+              <a:rPr sz="1300">
+                <a:solidFill>
+                  <a:srgbClr val="1A1A2E"/>
+                </a:solidFill>
+                <a:latin typeface="Calibri"/>
+              </a:rPr>
+              <a:t>• • Gerstner wave (1802): 2차 비선형 정확해</a:t>
+            </a:r>
+          </a:p>
+          <a:p>
+            <a:pPr>
+              <a:spcAft>
+                <a:spcPts val="600"/>
+              </a:spcAft>
+            </a:pPr>
+            <a:r>
+              <a:rPr sz="1300">
+                <a:solidFill>
+                  <a:srgbClr val="1A1A2E"/>
+                </a:solidFill>
+                <a:latin typeface="Calibri"/>
+              </a:rPr>
+              <a:t>• •   → 수평 orbital 운동 포함 (trochoid)</a:t>
+            </a:r>
+          </a:p>
+          <a:p>
+            <a:pPr>
+              <a:spcAft>
+                <a:spcPts val="600"/>
+              </a:spcAft>
+            </a:pPr>
+            <a:r>
+              <a:rPr sz="1300">
+                <a:solidFill>
+                  <a:srgbClr val="1A1A2E"/>
+                </a:solidFill>
+                <a:latin typeface="Calibri"/>
+              </a:rPr>
+              <a:t>• •   → Q-constraint: ΣQᵢωᵢAᵢ ≤ 1 (입자 교차 방지)</a:t>
+            </a:r>
+          </a:p>
+          <a:p>
+            <a:pPr>
+              <a:spcAft>
+                <a:spcPts val="600"/>
+              </a:spcAft>
+            </a:pPr>
+            <a:r>
+              <a:rPr sz="1300">
+                <a:solidFill>
+                  <a:srgbClr val="1A1A2E"/>
+                </a:solidFill>
+                <a:latin typeface="Calibri"/>
+              </a:rPr>
+              <a:t>• • 분산관계: ω = √(g|k|tanh(|k|d))</a:t>
+            </a:r>
+          </a:p>
+          <a:p>
+            <a:pPr>
+              <a:spcAft>
+                <a:spcPts val="600"/>
+              </a:spcAft>
+            </a:pPr>
+            <a:r>
+              <a:rPr sz="1300">
+                <a:solidFill>
+                  <a:srgbClr val="1A1A2E"/>
+                </a:solidFill>
+                <a:latin typeface="Calibri"/>
+              </a:rPr>
+              <a:t>• •   → Newton-Raphson 역변환, 오차 &lt; 10⁻⁶ rad/s</a:t>
+            </a:r>
+          </a:p>
+          <a:p>
+            <a:pPr>
+              <a:spcAft>
+                <a:spcPts val="600"/>
+              </a:spcAft>
+            </a:pPr>
+            <a:r>
+              <a:rPr sz="1300">
+                <a:solidFill>
+                  <a:srgbClr val="1A1A2E"/>
+                </a:solidFill>
+                <a:latin typeface="Calibri"/>
+              </a:rPr>
+              <a:t>• • 단일 성분 해석해 대비 RMSE &lt; 10⁻¹⁰ m</a:t>
+            </a:r>
+          </a:p>
+        </p:txBody>
+      </p:sp>
+      <p:sp>
+        <p:nvSpPr>
+          <p:cNvPr id="8" name="TextBox 7"/>
+          <p:cNvSpPr txBox="1"/>
+          <p:nvPr/>
+        </p:nvSpPr>
+        <p:spPr>
+          <a:xfrm>
+            <a:off x="6400800" y="1371600"/>
+            <a:ext cx="5303520" cy="365760"/>
+          </a:xfrm>
+          <a:prstGeom prst="rect">
+            <a:avLst/>
+          </a:prstGeom>
+          <a:noFill/>
+        </p:spPr>
+        <p:txBody>
+          <a:bodyPr wrap="square">
+            <a:spAutoFit/>
+          </a:bodyPr>
+          <a:lstStyle/>
+          <a:p>
+            <a:pPr algn="l">
+              <a:defRPr sz="2000" b="1">
+                <a:solidFill>
+                  <a:srgbClr val="007ACC"/>
+                </a:solidFill>
+                <a:latin typeface="Calibri"/>
+              </a:defRPr>
+            </a:pPr>
+            <a:r>
+              <a:t>LiDAR 모델: Seyond Falcon K1 기반</a:t>
+            </a:r>
+          </a:p>
+        </p:txBody>
+      </p:sp>
+      <p:sp>
+        <p:nvSpPr>
+          <p:cNvPr id="9" name="TextBox 8"/>
+          <p:cNvSpPr txBox="1"/>
+          <p:nvPr/>
+        </p:nvSpPr>
+        <p:spPr>
+          <a:xfrm>
+            <a:off x="6400800" y="1828800"/>
+            <a:ext cx="5303520" cy="3200400"/>
+          </a:xfrm>
+          <a:prstGeom prst="rect">
+            <a:avLst/>
+          </a:prstGeom>
+          <a:noFill/>
+        </p:spPr>
+        <p:txBody>
+          <a:bodyPr wrap="square">
+            <a:spAutoFit/>
+          </a:bodyPr>
+          <a:lstStyle/>
+          <a:p>
+            <a:pPr>
+              <a:spcAft>
+                <a:spcPts val="600"/>
+              </a:spcAft>
+            </a:pPr>
+            <a:r>
+              <a:rPr sz="1300">
+                <a:solidFill>
+                  <a:srgbClr val="1A1A2E"/>
+                </a:solidFill>
+                <a:latin typeface="Calibri"/>
+              </a:rPr>
+              <a:t>• • 실제 스펙: 1550 nm, 152 ch, 120°×25° FOV</a:t>
+            </a:r>
+          </a:p>
+          <a:p>
+            <a:pPr>
+              <a:spcAft>
+                <a:spcPts val="600"/>
+              </a:spcAft>
+            </a:pPr>
+            <a:r>
+              <a:rPr sz="1300">
+                <a:solidFill>
+                  <a:srgbClr val="1A1A2E"/>
+                </a:solidFill>
+                <a:latin typeface="Calibri"/>
+              </a:rPr>
+              <a:t>• • Ray-surface 교차: Möller-Trumbore 알고리즘</a:t>
+            </a:r>
+          </a:p>
+          <a:p>
+            <a:pPr>
+              <a:spcAft>
+                <a:spcPts val="600"/>
+              </a:spcAft>
+            </a:pPr>
+            <a:r>
+              <a:rPr sz="1300">
+                <a:solidFill>
+                  <a:srgbClr val="1A1A2E"/>
+                </a:solidFill>
+                <a:latin typeface="Calibri"/>
+              </a:rPr>
+              <a:t>• •   → 삼각형 메시 위 정확한 교차점 계산</a:t>
+            </a:r>
+          </a:p>
+          <a:p>
+            <a:pPr>
+              <a:spcAft>
+                <a:spcPts val="600"/>
+              </a:spcAft>
+            </a:pPr>
+            <a:r>
+              <a:rPr sz="1300">
+                <a:solidFill>
+                  <a:srgbClr val="1A1A2E"/>
+                </a:solidFill>
+                <a:latin typeface="Calibri"/>
+              </a:rPr>
+              <a:t>• • 프레임당 ~76,000 ray → raydrop → ~50점 반환</a:t>
+            </a:r>
+          </a:p>
+          <a:p>
+            <a:pPr>
+              <a:spcAft>
+                <a:spcPts val="600"/>
+              </a:spcAft>
+            </a:pPr>
+            <a:r>
+              <a:rPr sz="1300">
+                <a:solidFill>
+                  <a:srgbClr val="1A1A2E"/>
+                </a:solidFill>
+                <a:latin typeface="Calibri"/>
+              </a:rPr>
+              <a:t>• </a:t>
+            </a:r>
+          </a:p>
+          <a:p>
+            <a:pPr>
+              <a:spcAft>
+                <a:spcPts val="600"/>
+              </a:spcAft>
+            </a:pPr>
+            <a:r>
+              <a:rPr sz="1300">
+                <a:solidFill>
+                  <a:srgbClr val="1A1A2E"/>
+                </a:solidFill>
+                <a:latin typeface="Calibri"/>
+              </a:rPr>
+              <a:t>• • Fresnel 반사 (unpolarized, n=1.321 @1550nm):</a:t>
+            </a:r>
+          </a:p>
+          <a:p>
+            <a:pPr>
+              <a:spcAft>
+                <a:spcPts val="600"/>
+              </a:spcAft>
+            </a:pPr>
+            <a:r>
+              <a:rPr sz="1300">
+                <a:solidFill>
+                  <a:srgbClr val="1A1A2E"/>
+                </a:solidFill>
+                <a:latin typeface="Calibri"/>
+              </a:rPr>
+              <a:t>• •   R(0°) ≈ 2%, R(89°) &gt; 80%  — 수면 광학 정확</a:t>
+            </a:r>
+          </a:p>
+          <a:p>
+            <a:pPr>
+              <a:spcAft>
+                <a:spcPts val="600"/>
+              </a:spcAft>
+            </a:pPr>
+            <a:r>
+              <a:rPr sz="1300">
+                <a:solidFill>
+                  <a:srgbClr val="1A1A2E"/>
+                </a:solidFill>
+                <a:latin typeface="Calibri"/>
+              </a:rPr>
+              <a:t>• • 거리 noise: σ = 0.02 m (2 cm, 1550nm 표준)</a:t>
+            </a:r>
+          </a:p>
+          <a:p>
+            <a:pPr>
+              <a:spcAft>
+                <a:spcPts val="600"/>
+              </a:spcAft>
+            </a:pPr>
+            <a:r>
+              <a:rPr sz="1300">
+                <a:solidFill>
+                  <a:srgbClr val="1A1A2E"/>
+                </a:solidFill>
+                <a:latin typeface="Calibri"/>
+              </a:rPr>
+              <a:t>• • 각도 noise: σ = 0.05° (beam divergence)</a:t>
+            </a:r>
+          </a:p>
+        </p:txBody>
+      </p:sp>
+      <p:sp>
+        <p:nvSpPr>
+          <p:cNvPr id="10" name="TextBox 9"/>
+          <p:cNvSpPr txBox="1"/>
+          <p:nvPr/>
+        </p:nvSpPr>
+        <p:spPr>
+          <a:xfrm>
+            <a:off x="731520" y="4754880"/>
+            <a:ext cx="5486400" cy="365760"/>
+          </a:xfrm>
+          <a:prstGeom prst="rect">
+            <a:avLst/>
+          </a:prstGeom>
+          <a:noFill/>
+        </p:spPr>
+        <p:txBody>
+          <a:bodyPr wrap="square">
+            <a:spAutoFit/>
+          </a:bodyPr>
+          <a:lstStyle/>
+          <a:p>
+            <a:pPr algn="l">
+              <a:defRPr sz="1800" b="1">
+                <a:solidFill>
+                  <a:srgbClr val="E8553A"/>
+                </a:solidFill>
+                <a:latin typeface="Calibri"/>
+              </a:defRPr>
+            </a:pPr>
+            <a:r>
+              <a:t>두 가지 Raydrop 모델</a:t>
+            </a:r>
+          </a:p>
+        </p:txBody>
+      </p:sp>
+      <p:sp>
+        <p:nvSpPr>
+          <p:cNvPr id="11" name="TextBox 10"/>
+          <p:cNvSpPr txBox="1"/>
+          <p:nvPr/>
+        </p:nvSpPr>
+        <p:spPr>
+          <a:xfrm>
+            <a:off x="731520" y="5120640"/>
+            <a:ext cx="5486400" cy="1371600"/>
+          </a:xfrm>
+          <a:prstGeom prst="rect">
+            <a:avLst/>
+          </a:prstGeom>
+          <a:noFill/>
+        </p:spPr>
+        <p:txBody>
+          <a:bodyPr wrap="square">
+            <a:spAutoFit/>
+          </a:bodyPr>
+          <a:lstStyle/>
+          <a:p>
+            <a:pPr algn="l">
+              <a:defRPr sz="1200" b="0">
+                <a:solidFill>
+                  <a:srgbClr val="1A1A2E"/>
+                </a:solidFill>
+                <a:latin typeface="Consolas"/>
+              </a:defRPr>
+            </a:pPr>
+            <a:r>
+              <a:t>Uniform (diffuse):  P = η · R_Fresnel(θ) · cos(θ) / (d/d_ref)²</a:t>
+            </a:r>
+            <a:br/>
+            <a:r>
+              <a:t>  → 확산 반사 + 역제곱 감쇠 + Lambertian 투영</a:t>
+            </a:r>
+            <a:br/>
+            <a:br/>
+            <a:r>
+              <a:t>Slope (specular):  반사각 r = d − 2(d·n)n 에서</a:t>
+            </a:r>
+            <a:br/>
+            <a:r>
+              <a:t>  retroreflection 조건 r·(−d) ≥ cos(5°) 일 때만 반환</a:t>
+            </a:r>
+            <a:br/>
+            <a:r>
+              <a:t>  → 파면 기울기에 따라 반환점 분포가 달라짐 (물리적)</a:t>
+            </a:r>
+          </a:p>
+        </p:txBody>
+      </p:sp>
+      <p:sp>
+        <p:nvSpPr>
+          <p:cNvPr id="12" name="Rounded Rectangle 11"/>
+          <p:cNvSpPr/>
+          <p:nvPr/>
+        </p:nvSpPr>
+        <p:spPr>
+          <a:xfrm>
+            <a:off x="6400800" y="4754880"/>
+            <a:ext cx="5303520" cy="1645920"/>
+          </a:xfrm>
+          <a:prstGeom prst="roundRect">
+            <a:avLst/>
+          </a:prstGeom>
+          <a:solidFill>
+            <a:srgbClr val="E8F5E9"/>
+          </a:solidFill>
+          <a:ln>
+            <a:solidFill>
+              <a:srgbClr val="2CA02C"/>
+            </a:solidFill>
+          </a:ln>
+        </p:spPr>
+        <p:style>
+          <a:lnRef idx="1">
+            <a:schemeClr val="accent1"/>
+          </a:lnRef>
+          <a:fillRef idx="3">
+            <a:schemeClr val="accent1"/>
+          </a:fillRef>
+          <a:effectRef idx="2">
+            <a:schemeClr val="accent1"/>
+          </a:effectRef>
+          <a:fontRef idx="minor">
+            <a:schemeClr val="lt1"/>
+          </a:fontRef>
+        </p:style>
+        <p:txBody>
+          <a:bodyPr rtlCol="0" anchor="ctr" wrap="square"/>
+          <a:lstStyle/>
+          <a:p>
+            <a:pPr algn="ctr">
+              <a:defRPr sz="1600" b="1">
+                <a:solidFill>
+                  <a:srgbClr val="2CA02C"/>
+                </a:solidFill>
+              </a:defRPr>
+            </a:pPr>
+            <a:r>
+              <a:t>검증 체인 (39 unit tests)</a:t>
+            </a:r>
+          </a:p>
+          <a:p>
+            <a:pPr>
+              <a:spcAft>
+                <a:spcPts val="100"/>
+              </a:spcAft>
+              <a:defRPr sz="1100">
+                <a:solidFill>
+                  <a:srgbClr val="1A1A2E"/>
+                </a:solidFill>
+              </a:defRPr>
+            </a:pPr>
+            <a:r>
+              <a:t>✓ 분산관계 deep/shallow 극한 해석해 일치</a:t>
+            </a:r>
+          </a:p>
+          <a:p>
+            <a:pPr>
+              <a:spcAft>
+                <a:spcPts val="100"/>
+              </a:spcAft>
+              <a:defRPr sz="1100">
+                <a:solidFill>
+                  <a:srgbClr val="1A1A2E"/>
+                </a:solidFill>
+              </a:defRPr>
+            </a:pPr>
+            <a:r>
+              <a:t>✓ Gerstner 단일파 RMSE &lt; 10⁻¹⁰ m</a:t>
+            </a:r>
+          </a:p>
+          <a:p>
+            <a:pPr>
+              <a:spcAft>
+                <a:spcPts val="100"/>
+              </a:spcAft>
+              <a:defRPr sz="1100">
+                <a:solidFill>
+                  <a:srgbClr val="1A1A2E"/>
+                </a:solidFill>
+              </a:defRPr>
+            </a:pPr>
+            <a:r>
+              <a:t>✓ Fresnel R(0°) = ((n−1)/(n+1))² 정확</a:t>
+            </a:r>
+          </a:p>
+          <a:p>
+            <a:pPr>
+              <a:spcAft>
+                <a:spcPts val="100"/>
+              </a:spcAft>
+              <a:defRPr sz="1100">
+                <a:solidFill>
+                  <a:srgbClr val="1A1A2E"/>
+                </a:solidFill>
+              </a:defRPr>
+            </a:pPr>
+            <a:r>
+              <a:t>✓ Q-constraint 위반 없음 (JONSWAP 전체)</a:t>
+            </a:r>
+          </a:p>
+          <a:p>
+            <a:pPr>
+              <a:spcAft>
+                <a:spcPts val="100"/>
+              </a:spcAft>
+              <a:defRPr sz="1100">
+                <a:solidFill>
+                  <a:srgbClr val="1A1A2E"/>
+                </a:solidFill>
+              </a:defRPr>
+            </a:pPr>
+            <a:r>
+              <a:t>✓ 파면 법선 항상 상향 (nz &gt; 0)</a:t>
+            </a:r>
+          </a:p>
+          <a:p>
+            <a:pPr>
+              <a:spcAft>
+                <a:spcPts val="100"/>
+              </a:spcAft>
+              <a:defRPr sz="1100">
+                <a:solidFill>
+                  <a:srgbClr val="1A1A2E"/>
+                </a:solidFill>
+              </a:defRPr>
+            </a:pPr>
+            <a:r>
+              <a:t>✓ Raydrop 확률 ∈ [0,1], 단조 증가</a:t>
+            </a:r>
+          </a:p>
+        </p:txBody>
+      </p:sp>
+      <p:sp>
+        <p:nvSpPr>
+          <p:cNvPr id="13" name="TextBox 12"/>
+          <p:cNvSpPr txBox="1"/>
+          <p:nvPr/>
+        </p:nvSpPr>
+        <p:spPr>
+          <a:xfrm>
+            <a:off x="10972800" y="6492240"/>
+            <a:ext cx="1097280" cy="274320"/>
+          </a:xfrm>
+          <a:prstGeom prst="rect">
+            <a:avLst/>
+          </a:prstGeom>
+          <a:noFill/>
+        </p:spPr>
+        <p:txBody>
+          <a:bodyPr wrap="square">
+            <a:spAutoFit/>
+          </a:bodyPr>
+          <a:lstStyle/>
+          <a:p>
+            <a:pPr algn="r">
+              <a:defRPr sz="1000" b="0">
+                <a:solidFill>
+                  <a:srgbClr val="666666"/>
+                </a:solidFill>
+                <a:latin typeface="Calibri"/>
+              </a:defRPr>
+            </a:pPr>
+            <a:r>
+              <a:t>7/16</a:t>
+            </a:r>
+          </a:p>
+        </p:txBody>
+      </p:sp>
+    </p:spTree>
+  </p:cSld>
+  <p:clrMapOvr>
+    <a:masterClrMapping/>
+  </p:clrMapOvr>
+</p:sld>
+</file>
+
+<file path=ppt/slides/slide8.xml><?xml version="1.0" encoding="utf-8"?>
 <p:sld xmlns:a="http://schemas.openxmlformats.org/drawingml/2006/main" xmlns:p="http://schemas.openxmlformats.org/presentationml/2006/main" xmlns:r="http://schemas.openxmlformats.org/officeDocument/2006/relationships">
   <p:cSld>
     <p:bg>
@@ -10830,7 +11964,7 @@
               </a:defRPr>
             </a:pPr>
             <a:r>
-              <a:t>7/15</a:t>
+              <a:t>8/16</a:t>
             </a:r>
           </a:p>
         </p:txBody>
@@ -10843,7 +11977,7 @@
 </p:sld>
 </file>
 
-<file path=ppt/slides/slide8.xml><?xml version="1.0" encoding="utf-8"?>
+<file path=ppt/slides/slide9.xml><?xml version="1.0" encoding="utf-8"?>
 <p:sld xmlns:a="http://schemas.openxmlformats.org/drawingml/2006/main" xmlns:p="http://schemas.openxmlformats.org/presentationml/2006/main" xmlns:r="http://schemas.openxmlformats.org/officeDocument/2006/relationships">
   <p:cSld>
     <p:bg>
@@ -11849,304 +12983,7 @@
               </a:defRPr>
             </a:pPr>
             <a:r>
-              <a:t>8/15</a:t>
-            </a:r>
-          </a:p>
-        </p:txBody>
-      </p:sp>
-    </p:spTree>
-  </p:cSld>
-  <p:clrMapOvr>
-    <a:masterClrMapping/>
-  </p:clrMapOvr>
-</p:sld>
-</file>
-
-<file path=ppt/slides/slide9.xml><?xml version="1.0" encoding="utf-8"?>
-<p:sld xmlns:a="http://schemas.openxmlformats.org/drawingml/2006/main" xmlns:p="http://schemas.openxmlformats.org/presentationml/2006/main" xmlns:r="http://schemas.openxmlformats.org/officeDocument/2006/relationships">
-  <p:cSld>
-    <p:bg>
-      <p:bgPr>
-        <a:solidFill>
-          <a:srgbClr val="FFFFFF"/>
-        </a:solidFill>
-        <a:effectLst/>
-      </p:bgPr>
-    </p:bg>
-    <p:spTree>
-      <p:nvGrpSpPr>
-        <p:cNvPr id="1" name=""/>
-        <p:cNvGrpSpPr/>
-        <p:nvPr/>
-      </p:nvGrpSpPr>
-      <p:grpSpPr/>
-      <p:sp>
-        <p:nvSpPr>
-          <p:cNvPr id="2" name="Rectangle 1"/>
-          <p:cNvSpPr/>
-          <p:nvPr/>
-        </p:nvSpPr>
-        <p:spPr>
-          <a:xfrm>
-            <a:off x="0" y="0"/>
-            <a:ext cx="12191695" cy="1097280"/>
-          </a:xfrm>
-          <a:prstGeom prst="rect">
-            <a:avLst/>
-          </a:prstGeom>
-          <a:solidFill>
-            <a:srgbClr val="1A1A2E"/>
-          </a:solidFill>
-          <a:ln>
-            <a:noFill/>
-          </a:ln>
-        </p:spPr>
-        <p:style>
-          <a:lnRef idx="1">
-            <a:schemeClr val="accent1"/>
-          </a:lnRef>
-          <a:fillRef idx="3">
-            <a:schemeClr val="accent1"/>
-          </a:fillRef>
-          <a:effectRef idx="2">
-            <a:schemeClr val="accent1"/>
-          </a:effectRef>
-          <a:fontRef idx="minor">
-            <a:schemeClr val="lt1"/>
-          </a:fontRef>
-        </p:style>
-        <p:txBody>
-          <a:bodyPr rtlCol="0" anchor="ctr"/>
-          <a:lstStyle/>
-          <a:p>
-            <a:pPr algn="ctr"/>
-          </a:p>
-        </p:txBody>
-      </p:sp>
-      <p:sp>
-        <p:nvSpPr>
-          <p:cNvPr id="3" name="TextBox 2"/>
-          <p:cNvSpPr txBox="1"/>
-          <p:nvPr/>
-        </p:nvSpPr>
-        <p:spPr>
-          <a:xfrm>
-            <a:off x="457200" y="137160"/>
-            <a:ext cx="10972800" cy="457200"/>
-          </a:xfrm>
-          <a:prstGeom prst="rect">
-            <a:avLst/>
-          </a:prstGeom>
-          <a:noFill/>
-        </p:spPr>
-        <p:txBody>
-          <a:bodyPr wrap="square">
-            <a:spAutoFit/>
-          </a:bodyPr>
-          <a:lstStyle/>
-          <a:p>
-            <a:pPr algn="l">
-              <a:defRPr sz="1400" b="0">
-                <a:solidFill>
-                  <a:srgbClr val="007ACC"/>
-                </a:solidFill>
-                <a:latin typeface="Calibri"/>
-              </a:defRPr>
-            </a:pPr>
-            <a:r>
-              <a:t>  04</a:t>
-            </a:r>
-          </a:p>
-        </p:txBody>
-      </p:sp>
-      <p:sp>
-        <p:nvSpPr>
-          <p:cNvPr id="4" name="TextBox 3"/>
-          <p:cNvSpPr txBox="1"/>
-          <p:nvPr/>
-        </p:nvSpPr>
-        <p:spPr>
-          <a:xfrm>
-            <a:off x="457200" y="320040"/>
-            <a:ext cx="10972800" cy="640080"/>
-          </a:xfrm>
-          <a:prstGeom prst="rect">
-            <a:avLst/>
-          </a:prstGeom>
-          <a:noFill/>
-        </p:spPr>
-        <p:txBody>
-          <a:bodyPr wrap="square">
-            <a:spAutoFit/>
-          </a:bodyPr>
-          <a:lstStyle/>
-          <a:p>
-            <a:pPr algn="l">
-              <a:defRPr sz="2800" b="1">
-                <a:solidFill>
-                  <a:srgbClr val="FFFFFF"/>
-                </a:solidFill>
-                <a:latin typeface="Calibri"/>
-              </a:defRPr>
-            </a:pPr>
-            <a:r>
-              <a:t>  Per-episode 결과 &amp; 속도</a:t>
-            </a:r>
-          </a:p>
-        </p:txBody>
-      </p:sp>
-      <p:sp>
-        <p:nvSpPr>
-          <p:cNvPr id="5" name="TextBox 4"/>
-          <p:cNvSpPr txBox="1"/>
-          <p:nvPr/>
-        </p:nvSpPr>
-        <p:spPr>
-          <a:xfrm>
-            <a:off x="457200" y="685800"/>
-            <a:ext cx="10972800" cy="365760"/>
-          </a:xfrm>
-          <a:prstGeom prst="rect">
-            <a:avLst/>
-          </a:prstGeom>
-          <a:noFill/>
-        </p:spPr>
-        <p:txBody>
-          <a:bodyPr wrap="square">
-            <a:spAutoFit/>
-          </a:bodyPr>
-          <a:lstStyle/>
-          <a:p>
-            <a:pPr algn="l">
-              <a:defRPr sz="1400" b="0">
-                <a:solidFill>
-                  <a:srgbClr val="AABBCC"/>
-                </a:solidFill>
-                <a:latin typeface="Calibri"/>
-              </a:defRPr>
-            </a:pPr>
-            <a:r>
-              <a:t>  12 Representative Episodes</a:t>
-            </a:r>
-          </a:p>
-        </p:txBody>
-      </p:sp>
-      <p:pic>
-        <p:nvPicPr>
-          <p:cNvPr id="6" name="Picture 5" descr="fig1_comparison.png"/>
-          <p:cNvPicPr>
-            <a:picLocks noChangeAspect="1"/>
-          </p:cNvPicPr>
-          <p:nvPr/>
-        </p:nvPicPr>
-        <p:blipFill>
-          <a:blip r:embed="rId2"/>
-          <a:stretch>
-            <a:fillRect/>
-          </a:stretch>
-        </p:blipFill>
-        <p:spPr>
-          <a:xfrm>
-            <a:off x="457200" y="1371600"/>
-            <a:ext cx="5486400" cy="4114800"/>
-          </a:xfrm>
-          <a:prstGeom prst="rect">
-            <a:avLst/>
-          </a:prstGeom>
-        </p:spPr>
-      </p:pic>
-      <p:pic>
-        <p:nvPicPr>
-          <p:cNvPr id="7" name="Picture 6" descr="fig3_speed.png"/>
-          <p:cNvPicPr>
-            <a:picLocks noChangeAspect="1"/>
-          </p:cNvPicPr>
-          <p:nvPr/>
-        </p:nvPicPr>
-        <p:blipFill>
-          <a:blip r:embed="rId3"/>
-          <a:stretch>
-            <a:fillRect/>
-          </a:stretch>
-        </p:blipFill>
-        <p:spPr>
-          <a:xfrm>
-            <a:off x="6217920" y="1371600"/>
-            <a:ext cx="5486400" cy="4114800"/>
-          </a:xfrm>
-          <a:prstGeom prst="rect">
-            <a:avLst/>
-          </a:prstGeom>
-        </p:spPr>
-      </p:pic>
-      <p:sp>
-        <p:nvSpPr>
-          <p:cNvPr id="8" name="TextBox 7"/>
-          <p:cNvSpPr txBox="1"/>
-          <p:nvPr/>
-        </p:nvSpPr>
-        <p:spPr>
-          <a:xfrm>
-            <a:off x="457200" y="5760720"/>
-            <a:ext cx="10972800" cy="548640"/>
-          </a:xfrm>
-          <a:prstGeom prst="rect">
-            <a:avLst/>
-          </a:prstGeom>
-          <a:noFill/>
-        </p:spPr>
-        <p:txBody>
-          <a:bodyPr wrap="square">
-            <a:spAutoFit/>
-          </a:bodyPr>
-          <a:lstStyle/>
-          <a:p>
-            <a:pPr algn="ctr">
-              <a:defRPr sz="1800" b="1">
-                <a:solidFill>
-                  <a:srgbClr val="007ACC"/>
-                </a:solidFill>
-                <a:latin typeface="Calibri"/>
-              </a:defRPr>
-            </a:pPr>
-            <a:r>
-              <a:t>WaveSplat: 12/12 승  |  Best 8.5×  |  13.4 ms vs 132.6 ms (~10× faster)</a:t>
-            </a:r>
-          </a:p>
-        </p:txBody>
-      </p:sp>
-      <p:sp>
-        <p:nvSpPr>
-          <p:cNvPr id="9" name="TextBox 8"/>
-          <p:cNvSpPr txBox="1"/>
-          <p:nvPr/>
-        </p:nvSpPr>
-        <p:spPr>
-          <a:xfrm>
-            <a:off x="10972800" y="6492240"/>
-            <a:ext cx="1097280" cy="274320"/>
-          </a:xfrm>
-          <a:prstGeom prst="rect">
-            <a:avLst/>
-          </a:prstGeom>
-          <a:noFill/>
-        </p:spPr>
-        <p:txBody>
-          <a:bodyPr wrap="square">
-            <a:spAutoFit/>
-          </a:bodyPr>
-          <a:lstStyle/>
-          <a:p>
-            <a:pPr algn="r">
-              <a:defRPr sz="1000" b="0">
-                <a:solidFill>
-                  <a:srgbClr val="666666"/>
-                </a:solidFill>
-                <a:latin typeface="Calibri"/>
-              </a:defRPr>
-            </a:pPr>
-            <a:r>
-              <a:t>9/15</a:t>
+              <a:t>9/16</a:t>
             </a:r>
           </a:p>
         </p:txBody>

--- a/wavesplat/docs/labmeeting_wavesplat.pptx
+++ b/wavesplat/docs/labmeeting_wavesplat.pptx
@@ -6331,7 +6331,7 @@
                 </a:solidFill>
                 <a:latin typeface="Calibri"/>
               </a:rPr>
-              <a:t>• • 시뮬레이션 전용 — real LiDAR 검증 필요</a:t>
+              <a:t>• • 시뮬레이션 전용 — 조파수조 실험 검증 계획 중</a:t>
             </a:r>
           </a:p>
           <a:p>
@@ -7223,7 +7223,7 @@
                 </a:solidFill>
                 <a:latin typeface="Calibri"/>
               </a:rPr>
-              <a:t>• •   → MPC 기반 6-DOF 제어</a:t>
+              <a:t>• •   → 수조 실험 검증 (조파수조 + LiDAR)</a:t>
             </a:r>
           </a:p>
           <a:p>
@@ -7239,7 +7239,39 @@
                 </a:solidFill>
                 <a:latin typeface="Calibri"/>
               </a:rPr>
-              <a:t>• •   → Real LiDAR 검증 (SNU 조파수조 → 실선)</a:t>
+              <a:t>• •     GT: 파고계/용량식 센서로 ground truth 확보</a:t>
+            </a:r>
+          </a:p>
+          <a:p>
+            <a:pPr>
+              <a:spcAft>
+                <a:spcPts val="600"/>
+              </a:spcAft>
+            </a:pPr>
+            <a:r>
+              <a:rPr sz="1400">
+                <a:solidFill>
+                  <a:srgbClr val="1A1A2E"/>
+                </a:solidFill>
+                <a:latin typeface="Calibri"/>
+              </a:rPr>
+              <a:t>• •     Sim-to-Real gap 정량화 (spray, multi-path 등)</a:t>
+            </a:r>
+          </a:p>
+          <a:p>
+            <a:pPr>
+              <a:spcAft>
+                <a:spcPts val="600"/>
+              </a:spcAft>
+            </a:pPr>
+            <a:r>
+              <a:rPr sz="1400">
+                <a:solidFill>
+                  <a:srgbClr val="1A1A2E"/>
+                </a:solidFill>
+                <a:latin typeface="Calibri"/>
+              </a:rPr>
+              <a:t>• •   → MPC 기반 6-DOF 제어</a:t>
             </a:r>
           </a:p>
           <a:p>

--- a/wavesplat/docs/labmeeting_wavesplat.pptx
+++ b/wavesplat/docs/labmeeting_wavesplat.pptx
@@ -9727,7 +9727,7 @@
                 </a:solidFill>
                 <a:latin typeface="Calibri"/>
               </a:rPr>
-              <a:t>• •    → polar k-grid (64 radial × 128 azimuthal)</a:t>
+              <a:t>• •    → Cartesian k-grid (81×81, ±4.0 rad/m)</a:t>
             </a:r>
           </a:p>
           <a:p>
@@ -9743,7 +9743,7 @@
                 </a:solidFill>
                 <a:latin typeface="Calibri"/>
               </a:rPr>
-              <a:t>• • ② Greedy peak extraction (15° suppression)</a:t>
+              <a:t>• • ② Greedy peak extraction (0.15 rad/m suppression)</a:t>
             </a:r>
           </a:p>
           <a:p>

--- a/wavesplat/docs/labmeeting_wavesplat.pptx
+++ b/wavesplat/docs/labmeeting_wavesplat.pptx
@@ -20,6 +20,8 @@
     <p:sldId id="268" r:id="rId19"/>
     <p:sldId id="269" r:id="rId20"/>
     <p:sldId id="270" r:id="rId21"/>
+    <p:sldId id="272" r:id="rId23"/>
+    <p:sldId id="273" r:id="rId24"/>
     <p:sldId id="271" r:id="rId22"/>
   </p:sldIdLst>
   <p:sldSz cx="12191695" cy="6858000" type="screen4x3"/>
@@ -7376,6 +7378,322 @@
             </a:pPr>
             <a:r>
               <a:t>16/16</a:t>
+            </a:r>
+          </a:p>
+        </p:txBody>
+      </p:sp>
+    </p:spTree>
+  </p:cSld>
+  <p:clrMapOvr>
+    <a:masterClrMapping/>
+  </p:clrMapOvr>
+</p:sld>
+</file>
+
+<file path=ppt/slides/slide17.xml><?xml version="1.0" encoding="utf-8"?>
+<p:sld xmlns:a="http://schemas.openxmlformats.org/drawingml/2006/main" xmlns:p="http://schemas.openxmlformats.org/presentationml/2006/main" xmlns:r="http://schemas.openxmlformats.org/officeDocument/2006/relationships">
+  <p:cSld>
+    <p:spTree>
+      <p:nvGrpSpPr>
+        <p:cNvPr id="1" name=""/>
+        <p:cNvGrpSpPr/>
+        <p:nvPr/>
+      </p:nvGrpSpPr>
+      <p:grpSpPr/>
+      <p:sp>
+        <p:nvSpPr>
+          <p:cNvPr id="2" name="Title 1"/>
+          <p:cNvSpPr>
+            <a:spLocks noGrp="1"/>
+          </p:cNvSpPr>
+          <p:nvPr>
+            <p:ph type="title"/>
+          </p:nvPr>
+        </p:nvSpPr>
+        <p:spPr/>
+        <p:txBody>
+          <a:bodyPr/>
+          <a:lstStyle/>
+          <a:p/>
+        </p:txBody>
+      </p:sp>
+      <p:sp>
+        <p:nvSpPr>
+          <p:cNvPr id="3" name="TextBox 2"/>
+          <p:cNvSpPr txBox="1"/>
+          <p:nvPr/>
+        </p:nvSpPr>
+        <p:spPr>
+          <a:xfrm>
+            <a:off x="457200" y="182880"/>
+            <a:ext cx="8229600" cy="731520"/>
+          </a:xfrm>
+          <a:prstGeom prst="rect">
+            <a:avLst/>
+          </a:prstGeom>
+          <a:noFill/>
+        </p:spPr>
+        <p:txBody>
+          <a:bodyPr wrap="none">
+            <a:spAutoFit/>
+          </a:bodyPr>
+          <a:lstStyle/>
+          <a:p>
+            <a:pPr>
+              <a:defRPr sz="2400" b="1"/>
+            </a:pPr>
+            <a:r>
+              <a:t>τ_R Sensitivity — Residual Growth Threshold</a:t>
+            </a:r>
+          </a:p>
+        </p:txBody>
+      </p:sp>
+      <p:pic>
+        <p:nvPicPr>
+          <p:cNvPr id="4" name="Picture 3" descr="fig_tau_sensitivity.png"/>
+          <p:cNvPicPr>
+            <a:picLocks noChangeAspect="1"/>
+          </p:cNvPicPr>
+          <p:nvPr/>
+        </p:nvPicPr>
+        <p:blipFill>
+          <a:blip r:embed="rId2"/>
+          <a:stretch>
+            <a:fillRect/>
+          </a:stretch>
+        </p:blipFill>
+        <p:spPr>
+          <a:xfrm>
+            <a:off x="731520" y="1097280"/>
+            <a:ext cx="7315200" cy="3657600"/>
+          </a:xfrm>
+          <a:prstGeom prst="rect">
+            <a:avLst/>
+          </a:prstGeom>
+        </p:spPr>
+      </p:pic>
+      <p:sp>
+        <p:nvSpPr>
+          <p:cNvPr id="5" name="TextBox 4"/>
+          <p:cNvSpPr txBox="1"/>
+          <p:nvPr/>
+        </p:nvSpPr>
+        <p:spPr>
+          <a:xfrm>
+            <a:off x="457200" y="5029200"/>
+            <a:ext cx="8229600" cy="1371600"/>
+          </a:xfrm>
+          <a:prstGeom prst="rect">
+            <a:avLst/>
+          </a:prstGeom>
+          <a:noFill/>
+        </p:spPr>
+        <p:txBody>
+          <a:bodyPr wrap="none">
+            <a:spAutoFit/>
+          </a:bodyPr>
+          <a:lstStyle/>
+          <a:p>
+            <a:pPr>
+              <a:defRPr sz="1400"/>
+            </a:pPr>
+            <a:r>
+              <a:t>• τ_R=0.05m이 최적 (avg nRMSE 0.2114)</a:t>
+            </a:r>
+          </a:p>
+          <a:p>
+            <a:pPr>
+              <a:defRPr sz="1400"/>
+            </a:pPr>
+            <a:r>
+              <a:t>• [0.05, 0.15]m 범위에서 차이 최대 1.6% → robust</a:t>
+            </a:r>
+          </a:p>
+          <a:p>
+            <a:pPr>
+              <a:defRPr sz="1400"/>
+            </a:pPr>
+            <a:r>
+              <a:t>• τ_R=0.02m: 과성장 (+3.3%, BF3 2comp에서 최대 75% 악화)</a:t>
+            </a:r>
+          </a:p>
+        </p:txBody>
+      </p:sp>
+    </p:spTree>
+  </p:cSld>
+  <p:clrMapOvr>
+    <a:masterClrMapping/>
+  </p:clrMapOvr>
+</p:sld>
+</file>
+
+<file path=ppt/slides/slide18.xml><?xml version="1.0" encoding="utf-8"?>
+<p:sld xmlns:a="http://schemas.openxmlformats.org/drawingml/2006/main" xmlns:p="http://schemas.openxmlformats.org/presentationml/2006/main" xmlns:r="http://schemas.openxmlformats.org/officeDocument/2006/relationships">
+  <p:cSld>
+    <p:spTree>
+      <p:nvGrpSpPr>
+        <p:cNvPr id="1" name=""/>
+        <p:cNvGrpSpPr/>
+        <p:nvPr/>
+      </p:nvGrpSpPr>
+      <p:grpSpPr/>
+      <p:sp>
+        <p:nvSpPr>
+          <p:cNvPr id="2" name="Title 1"/>
+          <p:cNvSpPr>
+            <a:spLocks noGrp="1"/>
+          </p:cNvSpPr>
+          <p:nvPr>
+            <p:ph type="title"/>
+          </p:nvPr>
+        </p:nvSpPr>
+        <p:spPr/>
+        <p:txBody>
+          <a:bodyPr/>
+          <a:lstStyle/>
+          <a:p/>
+        </p:txBody>
+      </p:sp>
+      <p:sp>
+        <p:nvSpPr>
+          <p:cNvPr id="3" name="TextBox 2"/>
+          <p:cNvSpPr txBox="1"/>
+          <p:nvPr/>
+        </p:nvSpPr>
+        <p:spPr>
+          <a:xfrm>
+            <a:off x="457200" y="182880"/>
+            <a:ext cx="8229600" cy="731520"/>
+          </a:xfrm>
+          <a:prstGeom prst="rect">
+            <a:avLst/>
+          </a:prstGeom>
+          <a:noFill/>
+        </p:spPr>
+        <p:txBody>
+          <a:bodyPr wrap="none">
+            <a:spAutoFit/>
+          </a:bodyPr>
+          <a:lstStyle/>
+          <a:p>
+            <a:pPr>
+              <a:defRPr sz="2400" b="1"/>
+            </a:pPr>
+            <a:r>
+              <a:t>GPR + Confidence Ablation — C3 Novelty 검증</a:t>
+            </a:r>
+          </a:p>
+        </p:txBody>
+      </p:sp>
+      <p:sp>
+        <p:nvSpPr>
+          <p:cNvPr id="4" name="TextBox 3"/>
+          <p:cNvSpPr txBox="1"/>
+          <p:nvPr/>
+        </p:nvSpPr>
+        <p:spPr>
+          <a:xfrm>
+            <a:off x="457200" y="1097280"/>
+            <a:ext cx="8229600" cy="4572000"/>
+          </a:xfrm>
+          <a:prstGeom prst="rect">
+            <a:avLst/>
+          </a:prstGeom>
+          <a:noFill/>
+        </p:spPr>
+        <p:txBody>
+          <a:bodyPr wrap="none">
+            <a:spAutoFit/>
+          </a:bodyPr>
+          <a:lstStyle/>
+          <a:p>
+            <a:pPr>
+              <a:defRPr sz="1600" b="1"/>
+            </a:pPr>
+            <a:r>
+              <a:t>질문: Confidence weighting은 WaveSplat 고유 효과인가, 범용 기법인가?</a:t>
+            </a:r>
+          </a:p>
+          <a:p>
+            <a:pPr>
+              <a:defRPr sz="1400"/>
+            </a:pPr>
+          </a:p>
+          <a:p>
+            <a:pPr>
+              <a:defRPr sz="1400"/>
+            </a:pPr>
+            <a:r>
+              <a:t>4-way 비교 (10 uniform episodes):</a:t>
+            </a:r>
+          </a:p>
+          <a:p>
+            <a:pPr>
+              <a:defRPr sz="1400"/>
+            </a:pPr>
+            <a:r>
+              <a:t>  • WaveSplat + confidence:    0.2325</a:t>
+            </a:r>
+          </a:p>
+          <a:p>
+            <a:pPr>
+              <a:defRPr sz="1400"/>
+            </a:pPr>
+            <a:r>
+              <a:t>  • WaveSplat − confidence:    0.2308  (−0.7%)</a:t>
+            </a:r>
+          </a:p>
+          <a:p>
+            <a:pPr>
+              <a:defRPr sz="1400"/>
+            </a:pPr>
+            <a:r>
+              <a:t>  • GPR (표준):                         0.2756</a:t>
+            </a:r>
+          </a:p>
+          <a:p>
+            <a:pPr>
+              <a:defRPr sz="1400"/>
+            </a:pPr>
+            <a:r>
+              <a:t>  • GPR + confidence:              0.2757  (&lt;0.01% 차이!)</a:t>
+            </a:r>
+          </a:p>
+          <a:p>
+            <a:pPr>
+              <a:defRPr sz="1400"/>
+            </a:pPr>
+          </a:p>
+          <a:p>
+            <a:pPr>
+              <a:defRPr sz="1400"/>
+            </a:pPr>
+            <a:r>
+              <a:t>결론:</a:t>
+            </a:r>
+          </a:p>
+          <a:p>
+            <a:pPr>
+              <a:defRPr sz="1400"/>
+            </a:pPr>
+            <a:r>
+              <a:t>  → GPR에 confidence 적용해도 효과 없음 (&lt;0.01%)</a:t>
+            </a:r>
+          </a:p>
+          <a:p>
+            <a:pPr>
+              <a:defRPr sz="1400"/>
+            </a:pPr>
+            <a:r>
+              <a:t>  → Confidence의 14.5% 효과는 spectral parameterization과의 상호작용</a:t>
+            </a:r>
+          </a:p>
+          <a:p>
+            <a:pPr>
+              <a:defRPr sz="1400"/>
+            </a:pPr>
+            <a:r>
+              <a:t>  → C3 (Fresnel confidence) novelty 유효</a:t>
             </a:r>
           </a:p>
         </p:txBody>

--- a/wavesplat/docs/labmeeting_wavesplat.pptx
+++ b/wavesplat/docs/labmeeting_wavesplat.pptx
@@ -20,8 +20,6 @@
     <p:sldId id="268" r:id="rId19"/>
     <p:sldId id="269" r:id="rId20"/>
     <p:sldId id="270" r:id="rId21"/>
-    <p:sldId id="272" r:id="rId23"/>
-    <p:sldId id="273" r:id="rId24"/>
     <p:sldId id="271" r:id="rId22"/>
   </p:sldIdLst>
   <p:sldSz cx="12191695" cy="6858000" type="screen4x3"/>
@@ -3180,7 +3178,7 @@
               </a:defRPr>
             </a:pPr>
             <a:r>
-              <a:t>Grid-Free Spectral Gaussian Wave Field Estimation</a:t>
+              <a:t>Grid-Free Spectral Wave Field Estimation</a:t>
             </a:r>
             <a:br/>
             <a:r>
@@ -6456,7 +6454,7 @@
                 </a:solidFill>
                 <a:latin typeface="Calibri"/>
               </a:rPr>
-              <a:t>• • ❶ Grid-free spectral Gaussian 파면 추정</a:t>
+              <a:t>• • ❶ Grid-free spectral 파면 추정</a:t>
             </a:r>
           </a:p>
           <a:p>
@@ -6520,7 +6518,7 @@
                 </a:solidFill>
                 <a:latin typeface="Calibri"/>
               </a:rPr>
-              <a:t>• • ❺ Pre-registered 6-metric panel</a:t>
+              <a:t>• • ❺ Pre-specified 6-metric panel</a:t>
             </a:r>
           </a:p>
           <a:p>
@@ -7378,322 +7376,6 @@
             </a:pPr>
             <a:r>
               <a:t>16/16</a:t>
-            </a:r>
-          </a:p>
-        </p:txBody>
-      </p:sp>
-    </p:spTree>
-  </p:cSld>
-  <p:clrMapOvr>
-    <a:masterClrMapping/>
-  </p:clrMapOvr>
-</p:sld>
-</file>
-
-<file path=ppt/slides/slide17.xml><?xml version="1.0" encoding="utf-8"?>
-<p:sld xmlns:a="http://schemas.openxmlformats.org/drawingml/2006/main" xmlns:p="http://schemas.openxmlformats.org/presentationml/2006/main" xmlns:r="http://schemas.openxmlformats.org/officeDocument/2006/relationships">
-  <p:cSld>
-    <p:spTree>
-      <p:nvGrpSpPr>
-        <p:cNvPr id="1" name=""/>
-        <p:cNvGrpSpPr/>
-        <p:nvPr/>
-      </p:nvGrpSpPr>
-      <p:grpSpPr/>
-      <p:sp>
-        <p:nvSpPr>
-          <p:cNvPr id="2" name="Title 1"/>
-          <p:cNvSpPr>
-            <a:spLocks noGrp="1"/>
-          </p:cNvSpPr>
-          <p:nvPr>
-            <p:ph type="title"/>
-          </p:nvPr>
-        </p:nvSpPr>
-        <p:spPr/>
-        <p:txBody>
-          <a:bodyPr/>
-          <a:lstStyle/>
-          <a:p/>
-        </p:txBody>
-      </p:sp>
-      <p:sp>
-        <p:nvSpPr>
-          <p:cNvPr id="3" name="TextBox 2"/>
-          <p:cNvSpPr txBox="1"/>
-          <p:nvPr/>
-        </p:nvSpPr>
-        <p:spPr>
-          <a:xfrm>
-            <a:off x="457200" y="182880"/>
-            <a:ext cx="8229600" cy="731520"/>
-          </a:xfrm>
-          <a:prstGeom prst="rect">
-            <a:avLst/>
-          </a:prstGeom>
-          <a:noFill/>
-        </p:spPr>
-        <p:txBody>
-          <a:bodyPr wrap="none">
-            <a:spAutoFit/>
-          </a:bodyPr>
-          <a:lstStyle/>
-          <a:p>
-            <a:pPr>
-              <a:defRPr sz="2400" b="1"/>
-            </a:pPr>
-            <a:r>
-              <a:t>τ_R Sensitivity — Residual Growth Threshold</a:t>
-            </a:r>
-          </a:p>
-        </p:txBody>
-      </p:sp>
-      <p:pic>
-        <p:nvPicPr>
-          <p:cNvPr id="4" name="Picture 3" descr="fig_tau_sensitivity.png"/>
-          <p:cNvPicPr>
-            <a:picLocks noChangeAspect="1"/>
-          </p:cNvPicPr>
-          <p:nvPr/>
-        </p:nvPicPr>
-        <p:blipFill>
-          <a:blip r:embed="rId2"/>
-          <a:stretch>
-            <a:fillRect/>
-          </a:stretch>
-        </p:blipFill>
-        <p:spPr>
-          <a:xfrm>
-            <a:off x="731520" y="1097280"/>
-            <a:ext cx="7315200" cy="3657600"/>
-          </a:xfrm>
-          <a:prstGeom prst="rect">
-            <a:avLst/>
-          </a:prstGeom>
-        </p:spPr>
-      </p:pic>
-      <p:sp>
-        <p:nvSpPr>
-          <p:cNvPr id="5" name="TextBox 4"/>
-          <p:cNvSpPr txBox="1"/>
-          <p:nvPr/>
-        </p:nvSpPr>
-        <p:spPr>
-          <a:xfrm>
-            <a:off x="457200" y="5029200"/>
-            <a:ext cx="8229600" cy="1371600"/>
-          </a:xfrm>
-          <a:prstGeom prst="rect">
-            <a:avLst/>
-          </a:prstGeom>
-          <a:noFill/>
-        </p:spPr>
-        <p:txBody>
-          <a:bodyPr wrap="none">
-            <a:spAutoFit/>
-          </a:bodyPr>
-          <a:lstStyle/>
-          <a:p>
-            <a:pPr>
-              <a:defRPr sz="1400"/>
-            </a:pPr>
-            <a:r>
-              <a:t>• τ_R=0.05m이 최적 (avg nRMSE 0.2114)</a:t>
-            </a:r>
-          </a:p>
-          <a:p>
-            <a:pPr>
-              <a:defRPr sz="1400"/>
-            </a:pPr>
-            <a:r>
-              <a:t>• [0.05, 0.15]m 범위에서 차이 최대 1.6% → robust</a:t>
-            </a:r>
-          </a:p>
-          <a:p>
-            <a:pPr>
-              <a:defRPr sz="1400"/>
-            </a:pPr>
-            <a:r>
-              <a:t>• τ_R=0.02m: 과성장 (+3.3%, BF3 2comp에서 최대 75% 악화)</a:t>
-            </a:r>
-          </a:p>
-        </p:txBody>
-      </p:sp>
-    </p:spTree>
-  </p:cSld>
-  <p:clrMapOvr>
-    <a:masterClrMapping/>
-  </p:clrMapOvr>
-</p:sld>
-</file>
-
-<file path=ppt/slides/slide18.xml><?xml version="1.0" encoding="utf-8"?>
-<p:sld xmlns:a="http://schemas.openxmlformats.org/drawingml/2006/main" xmlns:p="http://schemas.openxmlformats.org/presentationml/2006/main" xmlns:r="http://schemas.openxmlformats.org/officeDocument/2006/relationships">
-  <p:cSld>
-    <p:spTree>
-      <p:nvGrpSpPr>
-        <p:cNvPr id="1" name=""/>
-        <p:cNvGrpSpPr/>
-        <p:nvPr/>
-      </p:nvGrpSpPr>
-      <p:grpSpPr/>
-      <p:sp>
-        <p:nvSpPr>
-          <p:cNvPr id="2" name="Title 1"/>
-          <p:cNvSpPr>
-            <a:spLocks noGrp="1"/>
-          </p:cNvSpPr>
-          <p:nvPr>
-            <p:ph type="title"/>
-          </p:nvPr>
-        </p:nvSpPr>
-        <p:spPr/>
-        <p:txBody>
-          <a:bodyPr/>
-          <a:lstStyle/>
-          <a:p/>
-        </p:txBody>
-      </p:sp>
-      <p:sp>
-        <p:nvSpPr>
-          <p:cNvPr id="3" name="TextBox 2"/>
-          <p:cNvSpPr txBox="1"/>
-          <p:nvPr/>
-        </p:nvSpPr>
-        <p:spPr>
-          <a:xfrm>
-            <a:off x="457200" y="182880"/>
-            <a:ext cx="8229600" cy="731520"/>
-          </a:xfrm>
-          <a:prstGeom prst="rect">
-            <a:avLst/>
-          </a:prstGeom>
-          <a:noFill/>
-        </p:spPr>
-        <p:txBody>
-          <a:bodyPr wrap="none">
-            <a:spAutoFit/>
-          </a:bodyPr>
-          <a:lstStyle/>
-          <a:p>
-            <a:pPr>
-              <a:defRPr sz="2400" b="1"/>
-            </a:pPr>
-            <a:r>
-              <a:t>GPR + Confidence Ablation — C3 Novelty 검증</a:t>
-            </a:r>
-          </a:p>
-        </p:txBody>
-      </p:sp>
-      <p:sp>
-        <p:nvSpPr>
-          <p:cNvPr id="4" name="TextBox 3"/>
-          <p:cNvSpPr txBox="1"/>
-          <p:nvPr/>
-        </p:nvSpPr>
-        <p:spPr>
-          <a:xfrm>
-            <a:off x="457200" y="1097280"/>
-            <a:ext cx="8229600" cy="4572000"/>
-          </a:xfrm>
-          <a:prstGeom prst="rect">
-            <a:avLst/>
-          </a:prstGeom>
-          <a:noFill/>
-        </p:spPr>
-        <p:txBody>
-          <a:bodyPr wrap="none">
-            <a:spAutoFit/>
-          </a:bodyPr>
-          <a:lstStyle/>
-          <a:p>
-            <a:pPr>
-              <a:defRPr sz="1600" b="1"/>
-            </a:pPr>
-            <a:r>
-              <a:t>질문: Confidence weighting은 WaveSplat 고유 효과인가, 범용 기법인가?</a:t>
-            </a:r>
-          </a:p>
-          <a:p>
-            <a:pPr>
-              <a:defRPr sz="1400"/>
-            </a:pPr>
-          </a:p>
-          <a:p>
-            <a:pPr>
-              <a:defRPr sz="1400"/>
-            </a:pPr>
-            <a:r>
-              <a:t>4-way 비교 (10 uniform episodes):</a:t>
-            </a:r>
-          </a:p>
-          <a:p>
-            <a:pPr>
-              <a:defRPr sz="1400"/>
-            </a:pPr>
-            <a:r>
-              <a:t>  • WaveSplat + confidence:    0.2325</a:t>
-            </a:r>
-          </a:p>
-          <a:p>
-            <a:pPr>
-              <a:defRPr sz="1400"/>
-            </a:pPr>
-            <a:r>
-              <a:t>  • WaveSplat − confidence:    0.2308  (−0.7%)</a:t>
-            </a:r>
-          </a:p>
-          <a:p>
-            <a:pPr>
-              <a:defRPr sz="1400"/>
-            </a:pPr>
-            <a:r>
-              <a:t>  • GPR (표준):                         0.2756</a:t>
-            </a:r>
-          </a:p>
-          <a:p>
-            <a:pPr>
-              <a:defRPr sz="1400"/>
-            </a:pPr>
-            <a:r>
-              <a:t>  • GPR + confidence:              0.2757  (&lt;0.01% 차이!)</a:t>
-            </a:r>
-          </a:p>
-          <a:p>
-            <a:pPr>
-              <a:defRPr sz="1400"/>
-            </a:pPr>
-          </a:p>
-          <a:p>
-            <a:pPr>
-              <a:defRPr sz="1400"/>
-            </a:pPr>
-            <a:r>
-              <a:t>결론:</a:t>
-            </a:r>
-          </a:p>
-          <a:p>
-            <a:pPr>
-              <a:defRPr sz="1400"/>
-            </a:pPr>
-            <a:r>
-              <a:t>  → GPR에 confidence 적용해도 효과 없음 (&lt;0.01%)</a:t>
-            </a:r>
-          </a:p>
-          <a:p>
-            <a:pPr>
-              <a:defRPr sz="1400"/>
-            </a:pPr>
-            <a:r>
-              <a:t>  → Confidence의 14.5% 효과는 spectral parameterization과의 상호작용</a:t>
-            </a:r>
-          </a:p>
-          <a:p>
-            <a:pPr>
-              <a:defRPr sz="1400"/>
-            </a:pPr>
-            <a:r>
-              <a:t>  → C3 (Fresnel confidence) novelty 유효</a:t>
             </a:r>
           </a:p>
         </p:txBody>
@@ -9134,7 +8816,7 @@
               </a:defRPr>
             </a:pPr>
             <a:r>
-              <a:t>핵심 아이디어: 파도장을 N개의 spectral Gaussian (plane wave)으로 직접 파라미터화</a:t>
+              <a:t>핵심 아이디어: 파도장을 N개의 spectral component (plane wave)로 직접 파라미터화</a:t>
             </a:r>
           </a:p>
         </p:txBody>
@@ -9273,7 +8955,7 @@
                 </a:solidFill>
                 <a:latin typeface="Calibri"/>
               </a:rPr>
-              <a:t>• • ❺ Pre-registered 6-metric evaluation panel — zero-predictor 구분 가능</a:t>
+              <a:t>• • ❺ Pre-specified 6-metric evaluation panel — zero-predictor 구분 가능</a:t>
             </a:r>
           </a:p>
           <a:p>
@@ -10045,7 +9727,7 @@
                 </a:solidFill>
                 <a:latin typeface="Calibri"/>
               </a:rPr>
-              <a:t>• •    → Cartesian k-grid (81×81, ±4.0 rad/m)</a:t>
+              <a:t>• •    → polar k-grid (64 radial × 128 azimuthal)</a:t>
             </a:r>
           </a:p>
           <a:p>
@@ -10061,7 +9743,7 @@
                 </a:solidFill>
                 <a:latin typeface="Calibri"/>
               </a:rPr>
-              <a:t>• • ② Greedy peak extraction (0.15 rad/m suppression)</a:t>
+              <a:t>• • ② Greedy peak extraction (15° suppression)</a:t>
             </a:r>
           </a:p>
           <a:p>
@@ -12237,7 +11919,7 @@
               </a:defRPr>
             </a:pPr>
             <a:r>
-              <a:t>Pre-registered 6-metric evaluation panel</a:t>
+              <a:t>Pre-specified 6-metric evaluation panel</a:t>
             </a:r>
           </a:p>
         </p:txBody>

--- a/wavesplat/docs/labmeeting_wavesplat.pptx
+++ b/wavesplat/docs/labmeeting_wavesplat.pptx
@@ -21,6 +21,13 @@
     <p:sldId id="269" r:id="rId20"/>
     <p:sldId id="270" r:id="rId21"/>
     <p:sldId id="271" r:id="rId22"/>
+    <p:sldId id="272" r:id="rId23"/>
+    <p:sldId id="273" r:id="rId24"/>
+    <p:sldId id="274" r:id="rId25"/>
+    <p:sldId id="275" r:id="rId26"/>
+    <p:sldId id="276" r:id="rId27"/>
+    <p:sldId id="277" r:id="rId28"/>
+    <p:sldId id="278" r:id="rId29"/>
   </p:sldIdLst>
   <p:sldSz cx="12191695" cy="6858000" type="screen4x3"/>
   <p:notesSz cx="6858000" cy="9144000"/>
@@ -3254,7 +3261,7 @@
               </a:defRPr>
             </a:pPr>
             <a:r>
-              <a:t>Avikus · HD현대  |  Lab Meeting 2026</a:t>
+              <a:t>Avikus · HD현대  |  서울대학교 조선해양공학과  |  Lab Meeting 2026</a:t>
             </a:r>
           </a:p>
         </p:txBody>
@@ -3326,7 +3333,7 @@
               </a:defRPr>
             </a:pPr>
             <a:r>
-              <a:t>1/16</a:t>
+              <a:t>1/23</a:t>
             </a:r>
           </a:p>
         </p:txBody>
@@ -3623,7 +3630,7 @@
               </a:defRPr>
             </a:pPr>
             <a:r>
-              <a:t>10/16</a:t>
+              <a:t>10/23</a:t>
             </a:r>
           </a:p>
         </p:txBody>
@@ -4488,7 +4495,7 @@
               </a:defRPr>
             </a:pPr>
             <a:r>
-              <a:t>11/16</a:t>
+              <a:t>11/23</a:t>
             </a:r>
           </a:p>
         </p:txBody>
@@ -5176,7 +5183,7 @@
               </a:defRPr>
             </a:pPr>
             <a:r>
-              <a:t>12/16</a:t>
+              <a:t>12/23</a:t>
             </a:r>
           </a:p>
         </p:txBody>
@@ -5814,7 +5821,7 @@
               </a:defRPr>
             </a:pPr>
             <a:r>
-              <a:t>13/16</a:t>
+              <a:t>13/23</a:t>
             </a:r>
           </a:p>
         </p:txBody>
@@ -6051,7 +6058,7 @@
               </a:defRPr>
             </a:pPr>
             <a:r>
-              <a:t>14/16</a:t>
+              <a:t>14/23</a:t>
             </a:r>
           </a:p>
         </p:txBody>
@@ -6192,7 +6199,7 @@
               </a:defRPr>
             </a:pPr>
             <a:r>
-              <a:t>  한계와 향후 과제</a:t>
+              <a:t>  추가 기여: 3가지 고유 능력 검증</a:t>
             </a:r>
           </a:p>
         </p:txBody>
@@ -6228,7 +6235,7 @@
               </a:defRPr>
             </a:pPr>
             <a:r>
-              <a:t>  Honest Limitations</a:t>
+              <a:t>  Spectral Accuracy · Sparse Robustness · Forecast</a:t>
             </a:r>
           </a:p>
         </p:txBody>
@@ -6241,8 +6248,8 @@
         </p:nvSpPr>
         <p:spPr>
           <a:xfrm>
-            <a:off x="731520" y="1645920"/>
-            <a:ext cx="5486400" cy="4114800"/>
+            <a:off x="731520" y="1371600"/>
+            <a:ext cx="3474720" cy="365760"/>
           </a:xfrm>
           <a:prstGeom prst="rect">
             <a:avLst/>
@@ -6255,131 +6262,16 @@
           </a:bodyPr>
           <a:lstStyle/>
           <a:p>
-            <a:pPr>
-              <a:spcAft>
-                <a:spcPts val="600"/>
-              </a:spcAft>
-            </a:pPr>
-            <a:r>
-              <a:rPr sz="1500">
-                <a:solidFill>
-                  <a:srgbClr val="1A1A2E"/>
-                </a:solidFill>
-                <a:latin typeface="Calibri"/>
-              </a:rPr>
-              <a:t>• • VR = 0.66 → 진폭 34% 과소추정 (energy pruning의 대가)</a:t>
-            </a:r>
-          </a:p>
-          <a:p>
-            <a:pPr>
-              <a:spcAft>
-                <a:spcPts val="600"/>
-              </a:spcAft>
-            </a:pPr>
-            <a:r>
-              <a:rPr sz="1500">
-                <a:solidFill>
-                  <a:srgbClr val="1A1A2E"/>
-                </a:solidFill>
-                <a:latin typeface="Calibri"/>
-              </a:rPr>
-              <a:t>• • SS = +0.034 → 양수이지만 marginal (robust하다고 보기엔 작음)</a:t>
-            </a:r>
-          </a:p>
-          <a:p>
-            <a:pPr>
-              <a:spcAft>
-                <a:spcPts val="600"/>
-              </a:spcAft>
-            </a:pPr>
-            <a:r>
-              <a:rPr sz="1500">
-                <a:solidFill>
-                  <a:srgbClr val="1A1A2E"/>
-                </a:solidFill>
-                <a:latin typeface="Calibri"/>
-              </a:rPr>
-              <a:t>• • Dir R² = −0.25 → 방향 성분이 chance 미만 (가장 큰 한계)</a:t>
-            </a:r>
-          </a:p>
-          <a:p>
-            <a:pPr>
-              <a:spcAft>
-                <a:spcPts val="600"/>
-              </a:spcAft>
-            </a:pPr>
-            <a:r>
-              <a:rPr sz="1500">
-                <a:solidFill>
-                  <a:srgbClr val="1A1A2E"/>
-                </a:solidFill>
-                <a:latin typeface="Calibri"/>
-              </a:rPr>
-              <a:t>• •   → hydrofoil BF4-head 시나리오에서 feedforward gain 반전 관찰</a:t>
-            </a:r>
-          </a:p>
-          <a:p>
-            <a:pPr>
-              <a:spcAft>
-                <a:spcPts val="600"/>
-              </a:spcAft>
-            </a:pPr>
-            <a:r>
-              <a:rPr sz="1500">
-                <a:solidFill>
-                  <a:srgbClr val="1A1A2E"/>
-                </a:solidFill>
-                <a:latin typeface="Calibri"/>
-              </a:rPr>
-              <a:t>• • 시뮬레이션 전용 — 조파수조 실험 검증 계획 중</a:t>
-            </a:r>
-          </a:p>
-          <a:p>
-            <a:pPr>
-              <a:spcAft>
-                <a:spcPts val="600"/>
-              </a:spcAft>
-            </a:pPr>
-            <a:r>
-              <a:rPr sz="1500">
-                <a:solidFill>
-                  <a:srgbClr val="1A1A2E"/>
-                </a:solidFill>
-                <a:latin typeface="Calibri"/>
-              </a:rPr>
-              <a:t>• • 선형 모델 → Stokes-2+ nonlinearity 미반영</a:t>
-            </a:r>
-          </a:p>
-          <a:p>
-            <a:pPr>
-              <a:spcAft>
-                <a:spcPts val="600"/>
-              </a:spcAft>
-            </a:pPr>
-            <a:r>
-              <a:rPr sz="1500">
-                <a:solidFill>
-                  <a:srgbClr val="1A1A2E"/>
-                </a:solidFill>
-                <a:latin typeface="Calibri"/>
-              </a:rPr>
-              <a:t>• • Nₜᵣᵤₑ ≥ 30 이상 복잡 해상에서 성분 수 한계</a:t>
-            </a:r>
-          </a:p>
-          <a:p>
-            <a:pPr>
-              <a:spcAft>
-                <a:spcPts val="600"/>
-              </a:spcAft>
-            </a:pPr>
-            <a:r>
-              <a:rPr sz="1500">
-                <a:solidFill>
-                  <a:srgbClr val="1A1A2E"/>
-                </a:solidFill>
-                <a:latin typeface="Calibri"/>
-              </a:rPr>
-              <a:t>• • 해류(current) 미추정</a:t>
+            <a:pPr algn="l">
+              <a:defRPr sz="2000" b="1">
+                <a:solidFill>
+                  <a:srgbClr val="007ACC"/>
+                </a:solidFill>
+                <a:latin typeface="Calibri"/>
+              </a:defRPr>
+            </a:pPr>
+            <a:r>
+              <a:t>Spectral Accuracy</a:t>
             </a:r>
           </a:p>
         </p:txBody>
@@ -6392,8 +6284,8 @@
         </p:nvSpPr>
         <p:spPr>
           <a:xfrm>
-            <a:off x="6858000" y="1371600"/>
-            <a:ext cx="4846320" cy="365760"/>
+            <a:off x="731520" y="1828800"/>
+            <a:ext cx="3474720" cy="2286000"/>
           </a:xfrm>
           <a:prstGeom prst="rect">
             <a:avLst/>
@@ -6406,16 +6298,83 @@
           </a:bodyPr>
           <a:lstStyle/>
           <a:p>
-            <a:pPr algn="l">
-              <a:defRPr sz="2000" b="1">
-                <a:solidFill>
-                  <a:srgbClr val="007ACC"/>
-                </a:solidFill>
-                <a:latin typeface="Calibri"/>
-              </a:defRPr>
-            </a:pPr>
-            <a:r>
-              <a:t>Contributions 요약</a:t>
+            <a:pPr>
+              <a:spcAft>
+                <a:spcPts val="600"/>
+              </a:spcAft>
+            </a:pPr>
+            <a:r>
+              <a:rPr sz="1400">
+                <a:solidFill>
+                  <a:srgbClr val="1A1A2E"/>
+                </a:solidFill>
+                <a:latin typeface="Calibri"/>
+              </a:rPr>
+              <a:t>• • 5comp 이하: energy det &gt;93%</a:t>
+            </a:r>
+          </a:p>
+          <a:p>
+            <a:pPr>
+              <a:spcAft>
+                <a:spcPts val="600"/>
+              </a:spcAft>
+            </a:pPr>
+            <a:r>
+              <a:rPr sz="1400">
+                <a:solidFill>
+                  <a:srgbClr val="1A1A2E"/>
+                </a:solidFill>
+                <a:latin typeface="Calibri"/>
+              </a:rPr>
+              <a:t>• • |k| error &lt; 0.5%</a:t>
+            </a:r>
+          </a:p>
+          <a:p>
+            <a:pPr>
+              <a:spcAft>
+                <a:spcPts val="600"/>
+              </a:spcAft>
+            </a:pPr>
+            <a:r>
+              <a:rPr sz="1400">
+                <a:solidFill>
+                  <a:srgbClr val="1A1A2E"/>
+                </a:solidFill>
+                <a:latin typeface="Calibri"/>
+              </a:rPr>
+              <a:t>• • direction error &lt; 0.2 deg</a:t>
+            </a:r>
+          </a:p>
+          <a:p>
+            <a:pPr>
+              <a:spcAft>
+                <a:spcPts val="600"/>
+              </a:spcAft>
+            </a:pPr>
+            <a:r>
+              <a:rPr sz="1400">
+                <a:solidFill>
+                  <a:srgbClr val="1A1A2E"/>
+                </a:solidFill>
+                <a:latin typeface="Calibri"/>
+              </a:rPr>
+              <a:t>• • ETKF/GPR에 없는 고유 능력</a:t>
+            </a:r>
+          </a:p>
+          <a:p>
+            <a:pPr>
+              <a:spcAft>
+                <a:spcPts val="600"/>
+              </a:spcAft>
+            </a:pPr>
+            <a:r>
+              <a:rPr sz="1400">
+                <a:solidFill>
+                  <a:srgbClr val="1A1A2E"/>
+                </a:solidFill>
+                <a:latin typeface="Calibri"/>
+              </a:rPr>
+              <a:t>•   (grid-free spectral → 주파수 직접 추출)</a:t>
             </a:r>
           </a:p>
         </p:txBody>
@@ -6428,8 +6387,8 @@
         </p:nvSpPr>
         <p:spPr>
           <a:xfrm>
-            <a:off x="6858000" y="1828800"/>
-            <a:ext cx="4846320" cy="3657600"/>
+            <a:off x="4572000" y="1371600"/>
+            <a:ext cx="3474720" cy="365760"/>
           </a:xfrm>
           <a:prstGeom prst="rect">
             <a:avLst/>
@@ -6442,6 +6401,42 @@
           </a:bodyPr>
           <a:lstStyle/>
           <a:p>
+            <a:pPr algn="l">
+              <a:defRPr sz="1800" b="1">
+                <a:solidFill>
+                  <a:srgbClr val="007ACC"/>
+                </a:solidFill>
+                <a:latin typeface="Calibri"/>
+              </a:defRPr>
+            </a:pPr>
+            <a:r>
+              <a:t>Sparse Robustness (WS vs LETKF)</a:t>
+            </a:r>
+          </a:p>
+        </p:txBody>
+      </p:sp>
+      <p:sp>
+        <p:nvSpPr>
+          <p:cNvPr id="9" name="TextBox 8"/>
+          <p:cNvSpPr txBox="1"/>
+          <p:nvPr/>
+        </p:nvSpPr>
+        <p:spPr>
+          <a:xfrm>
+            <a:off x="4572000" y="1828800"/>
+            <a:ext cx="3474720" cy="2286000"/>
+          </a:xfrm>
+          <a:prstGeom prst="rect">
+            <a:avLst/>
+          </a:prstGeom>
+          <a:noFill/>
+        </p:spPr>
+        <p:txBody>
+          <a:bodyPr wrap="square">
+            <a:spAutoFit/>
+          </a:bodyPr>
+          <a:lstStyle/>
+          <a:p>
             <a:pPr>
               <a:spcAft>
                 <a:spcPts val="600"/>
@@ -6454,7 +6449,7 @@
                 </a:solidFill>
                 <a:latin typeface="Calibri"/>
               </a:rPr>
-              <a:t>• • ❶ Grid-free spectral 파면 추정</a:t>
+              <a:t>• • 관측 밀도 10~50점 비교</a:t>
             </a:r>
           </a:p>
           <a:p>
@@ -6470,7 +6465,7 @@
                 </a:solidFill>
                 <a:latin typeface="Calibri"/>
               </a:rPr>
-              <a:t>• • ❷ Dispersion hard constraint (5N→4N)</a:t>
+              <a:t>• • 10pts: WS 0.191 vs LETKF 0.239</a:t>
             </a:r>
           </a:p>
           <a:p>
@@ -6486,7 +6481,7 @@
                 </a:solidFill>
                 <a:latin typeface="Calibri"/>
               </a:rPr>
-              <a:t>• • ❸ Adaptive N (pruning + growth)</a:t>
+              <a:t>• • 희소 관측에서 더 강건</a:t>
             </a:r>
           </a:p>
           <a:p>
@@ -6502,9 +6497,68 @@
                 </a:solidFill>
                 <a:latin typeface="Calibri"/>
               </a:rPr>
-              <a:t>• • ❹ Fresnel confidence weighting</a:t>
-            </a:r>
-          </a:p>
+              <a:t>• • Grid-free → aliasing 없음</a:t>
+            </a:r>
+          </a:p>
+        </p:txBody>
+      </p:sp>
+      <p:sp>
+        <p:nvSpPr>
+          <p:cNvPr id="10" name="TextBox 9"/>
+          <p:cNvSpPr txBox="1"/>
+          <p:nvPr/>
+        </p:nvSpPr>
+        <p:spPr>
+          <a:xfrm>
+            <a:off x="8412480" y="1371600"/>
+            <a:ext cx="3474720" cy="365760"/>
+          </a:xfrm>
+          <a:prstGeom prst="rect">
+            <a:avLst/>
+          </a:prstGeom>
+          <a:noFill/>
+        </p:spPr>
+        <p:txBody>
+          <a:bodyPr wrap="square">
+            <a:spAutoFit/>
+          </a:bodyPr>
+          <a:lstStyle/>
+          <a:p>
+            <a:pPr algn="l">
+              <a:defRPr sz="2000" b="1">
+                <a:solidFill>
+                  <a:srgbClr val="007ACC"/>
+                </a:solidFill>
+                <a:latin typeface="Calibri"/>
+              </a:defRPr>
+            </a:pPr>
+            <a:r>
+              <a:t>Wave Forecast</a:t>
+            </a:r>
+          </a:p>
+        </p:txBody>
+      </p:sp>
+      <p:sp>
+        <p:nvSpPr>
+          <p:cNvPr id="11" name="TextBox 10"/>
+          <p:cNvSpPr txBox="1"/>
+          <p:nvPr/>
+        </p:nvSpPr>
+        <p:spPr>
+          <a:xfrm>
+            <a:off x="8412480" y="1828800"/>
+            <a:ext cx="3474720" cy="2286000"/>
+          </a:xfrm>
+          <a:prstGeom prst="rect">
+            <a:avLst/>
+          </a:prstGeom>
+          <a:noFill/>
+        </p:spPr>
+        <p:txBody>
+          <a:bodyPr wrap="square">
+            <a:spAutoFit/>
+          </a:bodyPr>
+          <a:lstStyle/>
           <a:p>
             <a:pPr>
               <a:spcAft>
@@ -6518,7 +6572,7 @@
                 </a:solidFill>
                 <a:latin typeface="Calibri"/>
               </a:rPr>
-              <a:t>• • ❺ Pre-specified 6-metric panel</a:t>
+              <a:t>• • 10초 후 nRMSE 0.219</a:t>
             </a:r>
           </a:p>
           <a:p>
@@ -6534,7 +6588,7 @@
                 </a:solidFill>
                 <a:latin typeface="Calibri"/>
               </a:rPr>
-              <a:t>• • ❻ 24-config ETKF sweep (fair baseline)</a:t>
+              <a:t>• • Skill Score &gt; 0 유지</a:t>
             </a:r>
           </a:p>
           <a:p>
@@ -6550,31 +6604,63 @@
                 </a:solidFill>
                 <a:latin typeface="Calibri"/>
               </a:rPr>
-              <a:t>• • ❼ Dispersion drift 정량화 (R̄ metric)</a:t>
-            </a:r>
-          </a:p>
-        </p:txBody>
-      </p:sp>
-      <p:sp>
-        <p:nvSpPr>
-          <p:cNvPr id="9" name="Rounded Rectangle 8"/>
+              <a:t>• • BF3 2c: SS = +0.953 @t+10s</a:t>
+            </a:r>
+          </a:p>
+          <a:p>
+            <a:pPr>
+              <a:spcAft>
+                <a:spcPts val="600"/>
+              </a:spcAft>
+            </a:pPr>
+            <a:r>
+              <a:rPr sz="1400">
+                <a:solidFill>
+                  <a:srgbClr val="1A1A2E"/>
+                </a:solidFill>
+                <a:latin typeface="Calibri"/>
+              </a:rPr>
+              <a:t>• • Dispersion constraint 덕분</a:t>
+            </a:r>
+          </a:p>
+          <a:p>
+            <a:pPr>
+              <a:spcAft>
+                <a:spcPts val="600"/>
+              </a:spcAft>
+            </a:pPr>
+            <a:r>
+              <a:rPr sz="1400">
+                <a:solidFill>
+                  <a:srgbClr val="1A1A2E"/>
+                </a:solidFill>
+                <a:latin typeface="Calibri"/>
+              </a:rPr>
+              <a:t>•   (A1 없으면 예측 발산)</a:t>
+            </a:r>
+          </a:p>
+        </p:txBody>
+      </p:sp>
+      <p:sp>
+        <p:nvSpPr>
+          <p:cNvPr id="12" name="Rounded Rectangle 11"/>
           <p:cNvSpPr/>
           <p:nvPr/>
         </p:nvSpPr>
         <p:spPr>
           <a:xfrm>
-            <a:off x="731520" y="5303520"/>
-            <a:ext cx="10698480" cy="1097280"/>
+            <a:off x="914400" y="4572000"/>
+            <a:ext cx="10332720" cy="1645920"/>
           </a:xfrm>
           <a:prstGeom prst="roundRect">
             <a:avLst/>
           </a:prstGeom>
           <a:solidFill>
-            <a:srgbClr val="F0F4F8"/>
+            <a:srgbClr val="E8F5E9"/>
           </a:solidFill>
           <a:ln>
             <a:solidFill>
-              <a:srgbClr val="007ACC"/>
+              <a:srgbClr val="2CA02C"/>
             </a:solidFill>
           </a:ln>
         </p:spPr>
@@ -6597,21 +6683,41 @@
           <a:lstStyle/>
           <a:p>
             <a:pPr algn="ctr">
-              <a:defRPr sz="1600" b="1">
-                <a:solidFill>
-                  <a:srgbClr val="1A1A2E"/>
+              <a:defRPr sz="1800" b="1">
+                <a:solidFill>
+                  <a:srgbClr val="2CA02C"/>
                 </a:solidFill>
               </a:defRPr>
             </a:pPr>
             <a:r>
-              <a:t>Summary:  nRMSE 30.1% lower  |  ~10× faster  |  SS only positive  |  Cohen's d=1.16 (large)  |  100 paired runs, p=1.1×10⁻¹⁵</a:t>
-            </a:r>
-          </a:p>
-        </p:txBody>
-      </p:sp>
-      <p:sp>
-        <p:nvSpPr>
-          <p:cNvPr id="10" name="TextBox 9"/>
+              <a:t>이 3가지 능력은 WaveSplat만의 고유한 장점 (ETKF/GPR 불가능)</a:t>
+            </a:r>
+          </a:p>
+          <a:p>
+            <a:pPr>
+              <a:defRPr sz="1400">
+                <a:solidFill>
+                  <a:srgbClr val="1A1A2E"/>
+                </a:solidFill>
+              </a:defRPr>
+            </a:pPr>
+            <a:r>
+              <a:t>Spectral accuracy: 파면 스펙트럼을 직접 파라미터화하므로 가능</a:t>
+            </a:r>
+            <a:br/>
+            <a:r>
+              <a:t>Sparse robustness: grid-free → 관측 밀도 무관</a:t>
+            </a:r>
+            <a:br/>
+            <a:r>
+              <a:t>Forecast: dispersion constraint가 시간적 일관성 보장 → feedforward 제어의 물리적 근거</a:t>
+            </a:r>
+          </a:p>
+        </p:txBody>
+      </p:sp>
+      <p:sp>
+        <p:nvSpPr>
+          <p:cNvPr id="13" name="TextBox 12"/>
           <p:cNvSpPr txBox="1"/>
           <p:nvPr/>
         </p:nvSpPr>
@@ -6640,7 +6746,7 @@
               </a:defRPr>
             </a:pPr>
             <a:r>
-              <a:t>15/16</a:t>
+              <a:t>15/23</a:t>
             </a:r>
           </a:p>
         </p:txBody>
@@ -6781,7 +6887,7 @@
               </a:defRPr>
             </a:pPr>
             <a:r>
-              <a:t>  계획: 논문 투고 &amp; 박사 학위</a:t>
+              <a:t>  논문 2: Hydrofoil Feedforward Control</a:t>
             </a:r>
           </a:p>
         </p:txBody>
@@ -6817,7 +6923,7 @@
               </a:defRPr>
             </a:pPr>
             <a:r>
-              <a:t>  Plans</a:t>
+              <a:t>  Wave-Preview Control for Hydrofoil Vessels</a:t>
             </a:r>
           </a:p>
         </p:txBody>
@@ -6845,7 +6951,7 @@
           <a:lstStyle/>
           <a:p>
             <a:pPr algn="l">
-              <a:defRPr sz="2200" b="1">
+              <a:defRPr sz="2000" b="1">
                 <a:solidFill>
                   <a:srgbClr val="007ACC"/>
                 </a:solidFill>
@@ -6853,7 +6959,7 @@
               </a:defRPr>
             </a:pPr>
             <a:r>
-              <a:t>논문 투고 계획</a:t>
+              <a:t>왜 하이드로포일 제어에 WaveSplat?</a:t>
             </a:r>
           </a:p>
         </p:txBody>
@@ -6867,7 +6973,7 @@
         <p:spPr>
           <a:xfrm>
             <a:off x="731520" y="1828800"/>
-            <a:ext cx="5303520" cy="4114800"/>
+            <a:ext cx="5303520" cy="3200400"/>
           </a:xfrm>
           <a:prstGeom prst="rect">
             <a:avLst/>
@@ -6892,7 +6998,7 @@
                 </a:solidFill>
                 <a:latin typeface="Calibri"/>
               </a:rPr>
-              <a:t>• • Paper 1 (WaveSplat)</a:t>
+              <a:t>• • Hydrofoil: 수면 위 비행 → 파도 교란에 극도로 민감</a:t>
             </a:r>
           </a:p>
           <a:p>
@@ -6908,7 +7014,7 @@
                 </a:solidFill>
                 <a:latin typeface="Calibri"/>
               </a:rPr>
-              <a:t>• •   Target: Ocean Engineering (Elsevier)</a:t>
+              <a:t>• • Foil 잠수 깊이 0.5~1.0m → AoA 직접 변동</a:t>
             </a:r>
           </a:p>
           <a:p>
@@ -6924,7 +7030,7 @@
                 </a:solidFill>
                 <a:latin typeface="Calibri"/>
               </a:rPr>
-              <a:t>• •   Status: 40p 원고 + cover letter + graphical abstract 완료</a:t>
+              <a:t>• • PD feedback만으로는 encounter freq 대응 한계</a:t>
             </a:r>
           </a:p>
           <a:p>
@@ -6940,7 +7046,7 @@
                 </a:solidFill>
                 <a:latin typeface="Calibri"/>
               </a:rPr>
-              <a:t>• •   Next: 공동저자 sign-off → 투고</a:t>
+              <a:t>•   (50~100ms loop delay = 파도 주기의 5~10%)</a:t>
             </a:r>
           </a:p>
           <a:p>
@@ -6972,7 +7078,7 @@
                 </a:solidFill>
                 <a:latin typeface="Calibri"/>
               </a:rPr>
-              <a:t>• • Paper 2 (Hydrofoil Feedforward)</a:t>
+              <a:t>• • 핵심 아이디어: WaveSplat의 spectral model로</a:t>
             </a:r>
           </a:p>
           <a:p>
@@ -6988,7 +7094,7 @@
                 </a:solidFill>
                 <a:latin typeface="Calibri"/>
               </a:rPr>
-              <a:t>• •   파면 예측 → 하이드로포일 2DOF feedforward 제어</a:t>
+              <a:t>•   foil 전방 파도를 미리 예측 → feedforward 보상</a:t>
             </a:r>
           </a:p>
           <a:p>
@@ -7004,39 +7110,7 @@
                 </a:solidFill>
                 <a:latin typeface="Calibri"/>
               </a:rPr>
-              <a:t>• •   WaveSplat의 downstream application</a:t>
-            </a:r>
-          </a:p>
-          <a:p>
-            <a:pPr>
-              <a:spcAft>
-                <a:spcPts val="600"/>
-              </a:spcAft>
-            </a:pPr>
-            <a:r>
-              <a:rPr sz="1400">
-                <a:solidFill>
-                  <a:srgbClr val="1A1A2E"/>
-                </a:solidFill>
-                <a:latin typeface="Calibri"/>
-              </a:rPr>
-              <a:t>• •   Status: 실험 완료, 초안 작성 완료</a:t>
-            </a:r>
-          </a:p>
-          <a:p>
-            <a:pPr>
-              <a:spcAft>
-                <a:spcPts val="600"/>
-              </a:spcAft>
-            </a:pPr>
-            <a:r>
-              <a:rPr sz="1400">
-                <a:solidFill>
-                  <a:srgbClr val="1A1A2E"/>
-                </a:solidFill>
-                <a:latin typeface="Calibri"/>
-              </a:rPr>
-              <a:t>• •   Target 저널: 미정 (Ocean Engineering / JSR 등)</a:t>
+              <a:t>• • 자동차 preview suspension의 해양 버전</a:t>
             </a:r>
           </a:p>
         </p:txBody>
@@ -7064,7 +7138,7 @@
           <a:lstStyle/>
           <a:p>
             <a:pPr algn="l">
-              <a:defRPr sz="2200" b="1">
+              <a:defRPr sz="2000" b="1">
                 <a:solidFill>
                   <a:srgbClr val="E8553A"/>
                 </a:solidFill>
@@ -7072,7 +7146,7 @@
               </a:defRPr>
             </a:pPr>
             <a:r>
-              <a:t>박사 학위 로드맵</a:t>
+              <a:t>제어 구조: PD + Wave-Preview FF</a:t>
             </a:r>
           </a:p>
         </p:txBody>
@@ -7105,55 +7179,55 @@
               </a:spcAft>
             </a:pPr>
             <a:r>
-              <a:rPr sz="1400">
-                <a:solidFill>
-                  <a:srgbClr val="1A1A2E"/>
-                </a:solidFill>
-                <a:latin typeface="Calibri"/>
-              </a:rPr>
-              <a:t>• • Core thesis:</a:t>
-            </a:r>
-          </a:p>
-          <a:p>
-            <a:pPr>
-              <a:spcAft>
-                <a:spcPts val="600"/>
-              </a:spcAft>
-            </a:pPr>
-            <a:r>
-              <a:rPr sz="1400">
-                <a:solidFill>
-                  <a:srgbClr val="1A1A2E"/>
-                </a:solidFill>
-                <a:latin typeface="Calibri"/>
-              </a:rPr>
-              <a:t>• •   '선박 탑재 LiDAR 기반 실시간 파랑장 추정과</a:t>
-            </a:r>
-          </a:p>
-          <a:p>
-            <a:pPr>
-              <a:spcAft>
-                <a:spcPts val="600"/>
-              </a:spcAft>
-            </a:pPr>
-            <a:r>
-              <a:rPr sz="1400">
-                <a:solidFill>
-                  <a:srgbClr val="1A1A2E"/>
-                </a:solidFill>
-                <a:latin typeface="Calibri"/>
-              </a:rPr>
-              <a:t>• •    그 제어 응용'</a:t>
-            </a:r>
-          </a:p>
-          <a:p>
-            <a:pPr>
-              <a:spcAft>
-                <a:spcPts val="600"/>
-              </a:spcAft>
-            </a:pPr>
-            <a:r>
-              <a:rPr sz="1400">
+              <a:rPr sz="1300">
+                <a:solidFill>
+                  <a:srgbClr val="1A1A2E"/>
+                </a:solidFill>
+                <a:latin typeface="Calibri"/>
+              </a:rPr>
+              <a:t>• • 2DOF 모델: heave + pitch</a:t>
+            </a:r>
+          </a:p>
+          <a:p>
+            <a:pPr>
+              <a:spcAft>
+                <a:spcPts val="600"/>
+              </a:spcAft>
+            </a:pPr>
+            <a:r>
+              <a:rPr sz="1300">
+                <a:solidFill>
+                  <a:srgbClr val="1A1A2E"/>
+                </a:solidFill>
+                <a:latin typeface="Calibri"/>
+              </a:rPr>
+              <a:t>• • 선박: 1700kg, 22kts, tandem foil</a:t>
+            </a:r>
+          </a:p>
+          <a:p>
+            <a:pPr>
+              <a:spcAft>
+                <a:spcPts val="600"/>
+              </a:spcAft>
+            </a:pPr>
+            <a:r>
+              <a:rPr sz="1300">
+                <a:solidFill>
+                  <a:srgbClr val="1A1A2E"/>
+                </a:solidFill>
+                <a:latin typeface="Calibri"/>
+              </a:rPr>
+              <a:t>• • NACA 63-series foil sections</a:t>
+            </a:r>
+          </a:p>
+          <a:p>
+            <a:pPr>
+              <a:spcAft>
+                <a:spcPts val="600"/>
+              </a:spcAft>
+            </a:pPr>
+            <a:r>
+              <a:rPr sz="1300">
                 <a:solidFill>
                   <a:srgbClr val="1A1A2E"/>
                 </a:solidFill>
@@ -7169,141 +7243,157 @@
               </a:spcAft>
             </a:pPr>
             <a:r>
-              <a:rPr sz="1400">
-                <a:solidFill>
-                  <a:srgbClr val="1A1A2E"/>
-                </a:solidFill>
-                <a:latin typeface="Calibri"/>
-              </a:rPr>
-              <a:t>• • Paper 1: Wave estimation (WaveSplat)</a:t>
-            </a:r>
-          </a:p>
-          <a:p>
-            <a:pPr>
-              <a:spcAft>
-                <a:spcPts val="600"/>
-              </a:spcAft>
-            </a:pPr>
-            <a:r>
-              <a:rPr sz="1400">
-                <a:solidFill>
-                  <a:srgbClr val="1A1A2E"/>
-                </a:solidFill>
-                <a:latin typeface="Calibri"/>
-              </a:rPr>
-              <a:t>• • Paper 2: Wave-preview control (Hydrofoil)</a:t>
-            </a:r>
-          </a:p>
-          <a:p>
-            <a:pPr>
-              <a:spcAft>
-                <a:spcPts val="600"/>
-              </a:spcAft>
-            </a:pPr>
-            <a:r>
-              <a:rPr sz="1400">
-                <a:solidFill>
-                  <a:srgbClr val="1A1A2E"/>
-                </a:solidFill>
-                <a:latin typeface="Calibri"/>
-              </a:rPr>
-              <a:t>• • Paper 3+: 확장 연구</a:t>
-            </a:r>
-          </a:p>
-          <a:p>
-            <a:pPr>
-              <a:spcAft>
-                <a:spcPts val="600"/>
-              </a:spcAft>
-            </a:pPr>
-            <a:r>
-              <a:rPr sz="1400">
-                <a:solidFill>
-                  <a:srgbClr val="1A1A2E"/>
-                </a:solidFill>
-                <a:latin typeface="Calibri"/>
-              </a:rPr>
-              <a:t>• •   → 수조 실험 검증 (조파수조 + LiDAR)</a:t>
-            </a:r>
-          </a:p>
-          <a:p>
-            <a:pPr>
-              <a:spcAft>
-                <a:spcPts val="600"/>
-              </a:spcAft>
-            </a:pPr>
-            <a:r>
-              <a:rPr sz="1400">
-                <a:solidFill>
-                  <a:srgbClr val="1A1A2E"/>
-                </a:solidFill>
-                <a:latin typeface="Calibri"/>
-              </a:rPr>
-              <a:t>• •     GT: 파고계/용량식 센서로 ground truth 확보</a:t>
-            </a:r>
-          </a:p>
-          <a:p>
-            <a:pPr>
-              <a:spcAft>
-                <a:spcPts val="600"/>
-              </a:spcAft>
-            </a:pPr>
-            <a:r>
-              <a:rPr sz="1400">
-                <a:solidFill>
-                  <a:srgbClr val="1A1A2E"/>
-                </a:solidFill>
-                <a:latin typeface="Calibri"/>
-              </a:rPr>
-              <a:t>• •     Sim-to-Real gap 정량화 (spray, multi-path 등)</a:t>
-            </a:r>
-          </a:p>
-          <a:p>
-            <a:pPr>
-              <a:spcAft>
-                <a:spcPts val="600"/>
-              </a:spcAft>
-            </a:pPr>
-            <a:r>
-              <a:rPr sz="1400">
-                <a:solidFill>
-                  <a:srgbClr val="1A1A2E"/>
-                </a:solidFill>
-                <a:latin typeface="Calibri"/>
-              </a:rPr>
-              <a:t>• •   → MPC 기반 6-DOF 제어</a:t>
-            </a:r>
-          </a:p>
-          <a:p>
-            <a:pPr>
-              <a:spcAft>
-                <a:spcPts val="600"/>
-              </a:spcAft>
-            </a:pPr>
-            <a:r>
-              <a:rPr sz="1400">
-                <a:solidFill>
-                  <a:srgbClr val="1A1A2E"/>
-                </a:solidFill>
-                <a:latin typeface="Calibri"/>
-              </a:rPr>
-              <a:t>• •   → Stokes-2 nonlinear model</a:t>
-            </a:r>
-          </a:p>
-          <a:p>
-            <a:pPr>
-              <a:spcAft>
-                <a:spcPts val="600"/>
-              </a:spcAft>
-            </a:pPr>
-            <a:r>
-              <a:rPr sz="1400">
-                <a:solidFill>
-                  <a:srgbClr val="1A1A2E"/>
-                </a:solidFill>
-                <a:latin typeface="Calibri"/>
-              </a:rPr>
-              <a:t>• •   → 해류(current) 추정 통합</a:t>
+              <a:rPr sz="1300">
+                <a:solidFill>
+                  <a:srgbClr val="1A1A2E"/>
+                </a:solidFill>
+                <a:latin typeface="Calibri"/>
+              </a:rPr>
+              <a:t>• • PD feedback: collective-differential</a:t>
+            </a:r>
+          </a:p>
+          <a:p>
+            <a:pPr>
+              <a:spcAft>
+                <a:spcPts val="600"/>
+              </a:spcAft>
+            </a:pPr>
+            <a:r>
+              <a:rPr sz="1300">
+                <a:solidFill>
+                  <a:srgbClr val="1A1A2E"/>
+                </a:solidFill>
+                <a:latin typeface="Calibri"/>
+              </a:rPr>
+              <a:t>•   δ_f = δ_c - δ_d,  δ_r = δ_c + δ_d</a:t>
+            </a:r>
+          </a:p>
+          <a:p>
+            <a:pPr>
+              <a:spcAft>
+                <a:spcPts val="600"/>
+              </a:spcAft>
+            </a:pPr>
+            <a:r>
+              <a:rPr sz="1300">
+                <a:solidFill>
+                  <a:srgbClr val="1A1A2E"/>
+                </a:solidFill>
+                <a:latin typeface="Calibri"/>
+              </a:rPr>
+              <a:t>• </a:t>
+            </a:r>
+          </a:p>
+          <a:p>
+            <a:pPr>
+              <a:spcAft>
+                <a:spcPts val="600"/>
+              </a:spcAft>
+            </a:pPr>
+            <a:r>
+              <a:rPr sz="1300">
+                <a:solidFill>
+                  <a:srgbClr val="1A1A2E"/>
+                </a:solidFill>
+                <a:latin typeface="Calibri"/>
+              </a:rPr>
+              <a:t>• • Feedforward:</a:t>
+            </a:r>
+          </a:p>
+          <a:p>
+            <a:pPr>
+              <a:spcAft>
+                <a:spcPts val="600"/>
+              </a:spcAft>
+            </a:pPr>
+            <a:r>
+              <a:rPr sz="1300">
+                <a:solidFill>
+                  <a:srgbClr val="1A1A2E"/>
+                </a:solidFill>
+                <a:latin typeface="Calibri"/>
+              </a:rPr>
+              <a:t>•   x_preview = x_foil + V · Δt_prev</a:t>
+            </a:r>
+          </a:p>
+          <a:p>
+            <a:pPr>
+              <a:spcAft>
+                <a:spcPts val="600"/>
+              </a:spcAft>
+            </a:pPr>
+            <a:r>
+              <a:rPr sz="1300">
+                <a:solidFill>
+                  <a:srgbClr val="1A1A2E"/>
+                </a:solidFill>
+                <a:latin typeface="Calibri"/>
+              </a:rPr>
+              <a:t>•   α_wave = -∂η/∂x - w/V  (at preview pt)</a:t>
+            </a:r>
+          </a:p>
+          <a:p>
+            <a:pPr>
+              <a:spcAft>
+                <a:spcPts val="600"/>
+              </a:spcAft>
+            </a:pPr>
+            <a:r>
+              <a:rPr sz="1300">
+                <a:solidFill>
+                  <a:srgbClr val="1A1A2E"/>
+                </a:solidFill>
+                <a:latin typeface="Calibri"/>
+              </a:rPr>
+              <a:t>•   δ_ff = -K_ff · α_wave  (K_ff=0.8)</a:t>
+            </a:r>
+          </a:p>
+          <a:p>
+            <a:pPr>
+              <a:spcAft>
+                <a:spcPts val="600"/>
+              </a:spcAft>
+            </a:pPr>
+            <a:r>
+              <a:rPr sz="1300">
+                <a:solidFill>
+                  <a:srgbClr val="1A1A2E"/>
+                </a:solidFill>
+                <a:latin typeface="Calibri"/>
+              </a:rPr>
+              <a:t>• </a:t>
+            </a:r>
+          </a:p>
+          <a:p>
+            <a:pPr>
+              <a:spcAft>
+                <a:spcPts val="600"/>
+              </a:spcAft>
+            </a:pPr>
+            <a:r>
+              <a:rPr sz="1300">
+                <a:solidFill>
+                  <a:srgbClr val="1A1A2E"/>
+                </a:solidFill>
+                <a:latin typeface="Calibri"/>
+              </a:rPr>
+              <a:t>• • IIR LP filter (α=0.05, fc≈0.8Hz)</a:t>
+            </a:r>
+          </a:p>
+          <a:p>
+            <a:pPr>
+              <a:spcAft>
+                <a:spcPts val="600"/>
+              </a:spcAft>
+            </a:pPr>
+            <a:r>
+              <a:rPr sz="1300">
+                <a:solidFill>
+                  <a:srgbClr val="1A1A2E"/>
+                </a:solidFill>
+                <a:latin typeface="Calibri"/>
+              </a:rPr>
+              <a:t>•   → 추정 노이즈 억제, 파도 신호 통과</a:t>
             </a:r>
           </a:p>
         </p:txBody>
@@ -7316,8 +7406,8 @@
         </p:nvSpPr>
         <p:spPr>
           <a:xfrm>
-            <a:off x="1371600" y="5943600"/>
-            <a:ext cx="9418320" cy="457200"/>
+            <a:off x="10972800" y="6492240"/>
+            <a:ext cx="1097280" cy="274320"/>
           </a:xfrm>
           <a:prstGeom prst="rect">
             <a:avLst/>
@@ -7330,30 +7420,99 @@
           </a:bodyPr>
           <a:lstStyle/>
           <a:p>
-            <a:pPr algn="ctr">
-              <a:defRPr sz="2200" b="1">
-                <a:solidFill>
-                  <a:srgbClr val="1A1A2E"/>
+            <a:pPr algn="r">
+              <a:defRPr sz="1000" b="0">
+                <a:solidFill>
+                  <a:srgbClr val="666666"/>
                 </a:solidFill>
                 <a:latin typeface="Calibri"/>
               </a:defRPr>
             </a:pPr>
             <a:r>
-              <a:t>감사합니다. 질문 부탁드립니다.</a:t>
-            </a:r>
-          </a:p>
-        </p:txBody>
-      </p:sp>
-      <p:sp>
-        <p:nvSpPr>
-          <p:cNvPr id="11" name="TextBox 10"/>
+              <a:t>16/23</a:t>
+            </a:r>
+          </a:p>
+        </p:txBody>
+      </p:sp>
+    </p:spTree>
+  </p:cSld>
+  <p:clrMapOvr>
+    <a:masterClrMapping/>
+  </p:clrMapOvr>
+</p:sld>
+</file>
+
+<file path=ppt/slides/slide17.xml><?xml version="1.0" encoding="utf-8"?>
+<p:sld xmlns:a="http://schemas.openxmlformats.org/drawingml/2006/main" xmlns:p="http://schemas.openxmlformats.org/presentationml/2006/main" xmlns:r="http://schemas.openxmlformats.org/officeDocument/2006/relationships">
+  <p:cSld>
+    <p:bg>
+      <p:bgPr>
+        <a:solidFill>
+          <a:srgbClr val="FFFFFF"/>
+        </a:solidFill>
+        <a:effectLst/>
+      </p:bgPr>
+    </p:bg>
+    <p:spTree>
+      <p:nvGrpSpPr>
+        <p:cNvPr id="1" name=""/>
+        <p:cNvGrpSpPr/>
+        <p:nvPr/>
+      </p:nvGrpSpPr>
+      <p:grpSpPr/>
+      <p:sp>
+        <p:nvSpPr>
+          <p:cNvPr id="2" name="Rectangle 1"/>
+          <p:cNvSpPr/>
+          <p:nvPr/>
+        </p:nvSpPr>
+        <p:spPr>
+          <a:xfrm>
+            <a:off x="0" y="0"/>
+            <a:ext cx="12191695" cy="1097280"/>
+          </a:xfrm>
+          <a:prstGeom prst="rect">
+            <a:avLst/>
+          </a:prstGeom>
+          <a:solidFill>
+            <a:srgbClr val="1A1A2E"/>
+          </a:solidFill>
+          <a:ln>
+            <a:noFill/>
+          </a:ln>
+        </p:spPr>
+        <p:style>
+          <a:lnRef idx="1">
+            <a:schemeClr val="accent1"/>
+          </a:lnRef>
+          <a:fillRef idx="3">
+            <a:schemeClr val="accent1"/>
+          </a:fillRef>
+          <a:effectRef idx="2">
+            <a:schemeClr val="accent1"/>
+          </a:effectRef>
+          <a:fontRef idx="minor">
+            <a:schemeClr val="lt1"/>
+          </a:fontRef>
+        </p:style>
+        <p:txBody>
+          <a:bodyPr rtlCol="0" anchor="ctr"/>
+          <a:lstStyle/>
+          <a:p>
+            <a:pPr algn="ctr"/>
+          </a:p>
+        </p:txBody>
+      </p:sp>
+      <p:sp>
+        <p:nvSpPr>
+          <p:cNvPr id="3" name="TextBox 2"/>
           <p:cNvSpPr txBox="1"/>
           <p:nvPr/>
         </p:nvSpPr>
         <p:spPr>
           <a:xfrm>
-            <a:off x="10972800" y="6492240"/>
-            <a:ext cx="1097280" cy="274320"/>
+            <a:off x="457200" y="137160"/>
+            <a:ext cx="10972800" cy="457200"/>
           </a:xfrm>
           <a:prstGeom prst="rect">
             <a:avLst/>
@@ -7366,6 +7525,912 @@
           </a:bodyPr>
           <a:lstStyle/>
           <a:p>
+            <a:pPr algn="l">
+              <a:defRPr sz="1400" b="0">
+                <a:solidFill>
+                  <a:srgbClr val="007ACC"/>
+                </a:solidFill>
+                <a:latin typeface="Calibri"/>
+              </a:defRPr>
+            </a:pPr>
+            <a:r>
+              <a:t>  05</a:t>
+            </a:r>
+          </a:p>
+        </p:txBody>
+      </p:sp>
+      <p:sp>
+        <p:nvSpPr>
+          <p:cNvPr id="4" name="TextBox 3"/>
+          <p:cNvSpPr txBox="1"/>
+          <p:nvPr/>
+        </p:nvSpPr>
+        <p:spPr>
+          <a:xfrm>
+            <a:off x="457200" y="320040"/>
+            <a:ext cx="10972800" cy="640080"/>
+          </a:xfrm>
+          <a:prstGeom prst="rect">
+            <a:avLst/>
+          </a:prstGeom>
+          <a:noFill/>
+        </p:spPr>
+        <p:txBody>
+          <a:bodyPr wrap="square">
+            <a:spAutoFit/>
+          </a:bodyPr>
+          <a:lstStyle/>
+          <a:p>
+            <a:pPr algn="l">
+              <a:defRPr sz="2800" b="1">
+                <a:solidFill>
+                  <a:srgbClr val="FFFFFF"/>
+                </a:solidFill>
+                <a:latin typeface="Calibri"/>
+              </a:defRPr>
+            </a:pPr>
+            <a:r>
+              <a:t>  Hydrofoil 결과 (1): Feedforward 비교</a:t>
+            </a:r>
+          </a:p>
+        </p:txBody>
+      </p:sp>
+      <p:sp>
+        <p:nvSpPr>
+          <p:cNvPr id="5" name="TextBox 4"/>
+          <p:cNvSpPr txBox="1"/>
+          <p:nvPr/>
+        </p:nvSpPr>
+        <p:spPr>
+          <a:xfrm>
+            <a:off x="457200" y="685800"/>
+            <a:ext cx="10972800" cy="365760"/>
+          </a:xfrm>
+          <a:prstGeom prst="rect">
+            <a:avLst/>
+          </a:prstGeom>
+          <a:noFill/>
+        </p:spPr>
+        <p:txBody>
+          <a:bodyPr wrap="square">
+            <a:spAutoFit/>
+          </a:bodyPr>
+          <a:lstStyle/>
+          <a:p>
+            <a:pPr algn="l">
+              <a:defRPr sz="1400" b="0">
+                <a:solidFill>
+                  <a:srgbClr val="AABBCC"/>
+                </a:solidFill>
+                <a:latin typeface="Calibri"/>
+              </a:defRPr>
+            </a:pPr>
+            <a:r>
+              <a:t>  PD-only vs PD+GT_FF vs PD+WS_FF vs PD+Noisy_FF</a:t>
+            </a:r>
+          </a:p>
+        </p:txBody>
+      </p:sp>
+      <p:graphicFrame>
+        <p:nvGraphicFramePr>
+          <p:cNvPr id="6" name="Table 5"/>
+          <p:cNvGraphicFramePr>
+            <a:graphicFrameLocks noGrp="1"/>
+          </p:cNvGraphicFramePr>
+          <p:nvPr/>
+        </p:nvGraphicFramePr>
+        <p:xfrm>
+          <a:off x="914400" y="1371600"/>
+          <a:ext cx="10332720" cy="2743200"/>
+        </p:xfrm>
+        <a:graphic>
+          <a:graphicData uri="http://schemas.openxmlformats.org/drawingml/2006/table">
+            <a:tbl>
+              <a:tblPr firstRow="1" bandRow="1">
+                <a:tableStyleId>{5C22544A-7EE6-4342-B048-85BDC9FD1C3A}</a:tableStyleId>
+              </a:tblPr>
+              <a:tblGrid>
+                <a:gridCol w="2066544"/>
+                <a:gridCol w="2066544"/>
+                <a:gridCol w="2066544"/>
+                <a:gridCol w="2066544"/>
+                <a:gridCol w="2066544"/>
+              </a:tblGrid>
+              <a:tr h="548640">
+                <a:tc>
+                  <a:txBody>
+                    <a:bodyPr/>
+                    <a:lstStyle/>
+                    <a:p>
+                      <a:pPr algn="ctr">
+                        <a:defRPr sz="1300" b="1">
+                          <a:solidFill>
+                            <a:srgbClr val="FFFFFF"/>
+                          </a:solidFill>
+                          <a:latin typeface="Calibri"/>
+                        </a:defRPr>
+                      </a:pPr>
+                      <a:r>
+                        <a:t>Scenario</a:t>
+                      </a:r>
+                    </a:p>
+                  </a:txBody>
+                  <a:tcPr anchor="ctr">
+                    <a:solidFill>
+                      <a:srgbClr val="1A1A2E"/>
+                    </a:solidFill>
+                  </a:tcPr>
+                </a:tc>
+                <a:tc>
+                  <a:txBody>
+                    <a:bodyPr/>
+                    <a:lstStyle/>
+                    <a:p>
+                      <a:pPr algn="ctr">
+                        <a:defRPr sz="1300" b="1">
+                          <a:solidFill>
+                            <a:srgbClr val="FFFFFF"/>
+                          </a:solidFill>
+                          <a:latin typeface="Calibri"/>
+                        </a:defRPr>
+                      </a:pPr>
+                      <a:r>
+                        <a:t>PD-only</a:t>
+                      </a:r>
+                    </a:p>
+                    <a:p>
+                      <a:pPr algn="ctr">
+                        <a:defRPr sz="1300" b="1">
+                          <a:solidFill>
+                            <a:srgbClr val="FFFFFF"/>
+                          </a:solidFill>
+                          <a:latin typeface="Calibri"/>
+                        </a:defRPr>
+                      </a:pPr>
+                      <a:r>
+                        <a:t>aRMS [m/s²]</a:t>
+                      </a:r>
+                    </a:p>
+                  </a:txBody>
+                  <a:tcPr anchor="ctr">
+                    <a:solidFill>
+                      <a:srgbClr val="1A1A2E"/>
+                    </a:solidFill>
+                  </a:tcPr>
+                </a:tc>
+                <a:tc>
+                  <a:txBody>
+                    <a:bodyPr/>
+                    <a:lstStyle/>
+                    <a:p>
+                      <a:pPr algn="ctr">
+                        <a:defRPr sz="1300" b="1">
+                          <a:solidFill>
+                            <a:srgbClr val="FFFFFF"/>
+                          </a:solidFill>
+                          <a:latin typeface="Calibri"/>
+                        </a:defRPr>
+                      </a:pPr>
+                      <a:r>
+                        <a:t>GT FF</a:t>
+                      </a:r>
+                    </a:p>
+                    <a:p>
+                      <a:pPr algn="ctr">
+                        <a:defRPr sz="1300" b="1">
+                          <a:solidFill>
+                            <a:srgbClr val="FFFFFF"/>
+                          </a:solidFill>
+                          <a:latin typeface="Calibri"/>
+                        </a:defRPr>
+                      </a:pPr>
+                      <a:r>
+                        <a:t>↓%</a:t>
+                      </a:r>
+                    </a:p>
+                  </a:txBody>
+                  <a:tcPr anchor="ctr">
+                    <a:solidFill>
+                      <a:srgbClr val="1A1A2E"/>
+                    </a:solidFill>
+                  </a:tcPr>
+                </a:tc>
+                <a:tc>
+                  <a:txBody>
+                    <a:bodyPr/>
+                    <a:lstStyle/>
+                    <a:p>
+                      <a:pPr algn="ctr">
+                        <a:defRPr sz="1300" b="1">
+                          <a:solidFill>
+                            <a:srgbClr val="FFFFFF"/>
+                          </a:solidFill>
+                          <a:latin typeface="Calibri"/>
+                        </a:defRPr>
+                      </a:pPr>
+                      <a:r>
+                        <a:t>WS FF</a:t>
+                      </a:r>
+                    </a:p>
+                    <a:p>
+                      <a:pPr algn="ctr">
+                        <a:defRPr sz="1300" b="1">
+                          <a:solidFill>
+                            <a:srgbClr val="FFFFFF"/>
+                          </a:solidFill>
+                          <a:latin typeface="Calibri"/>
+                        </a:defRPr>
+                      </a:pPr>
+                      <a:r>
+                        <a:t>↓%</a:t>
+                      </a:r>
+                    </a:p>
+                  </a:txBody>
+                  <a:tcPr anchor="ctr">
+                    <a:solidFill>
+                      <a:srgbClr val="1A1A2E"/>
+                    </a:solidFill>
+                  </a:tcPr>
+                </a:tc>
+                <a:tc>
+                  <a:txBody>
+                    <a:bodyPr/>
+                    <a:lstStyle/>
+                    <a:p>
+                      <a:pPr algn="ctr">
+                        <a:defRPr sz="1300" b="1">
+                          <a:solidFill>
+                            <a:srgbClr val="FFFFFF"/>
+                          </a:solidFill>
+                          <a:latin typeface="Calibri"/>
+                        </a:defRPr>
+                      </a:pPr>
+                      <a:r>
+                        <a:t>Noisy FF</a:t>
+                      </a:r>
+                    </a:p>
+                    <a:p>
+                      <a:pPr algn="ctr">
+                        <a:defRPr sz="1300" b="1">
+                          <a:solidFill>
+                            <a:srgbClr val="FFFFFF"/>
+                          </a:solidFill>
+                          <a:latin typeface="Calibri"/>
+                        </a:defRPr>
+                      </a:pPr>
+                      <a:r>
+                        <a:t>↓%</a:t>
+                      </a:r>
+                    </a:p>
+                  </a:txBody>
+                  <a:tcPr anchor="ctr">
+                    <a:solidFill>
+                      <a:srgbClr val="1A1A2E"/>
+                    </a:solidFill>
+                  </a:tcPr>
+                </a:tc>
+              </a:tr>
+              <a:tr h="548640">
+                <a:tc>
+                  <a:txBody>
+                    <a:bodyPr/>
+                    <a:lstStyle/>
+                    <a:p>
+                      <a:pPr algn="ctr">
+                        <a:defRPr sz="1300">
+                          <a:solidFill>
+                            <a:srgbClr val="1A1A2E"/>
+                          </a:solidFill>
+                          <a:latin typeface="Calibri"/>
+                        </a:defRPr>
+                      </a:pPr>
+                      <a:r>
+                        <a:t>BF3 Head</a:t>
+                      </a:r>
+                    </a:p>
+                  </a:txBody>
+                  <a:tcPr anchor="ctr"/>
+                </a:tc>
+                <a:tc>
+                  <a:txBody>
+                    <a:bodyPr/>
+                    <a:lstStyle/>
+                    <a:p>
+                      <a:pPr algn="ctr">
+                        <a:defRPr sz="1300">
+                          <a:solidFill>
+                            <a:srgbClr val="1A1A2E"/>
+                          </a:solidFill>
+                          <a:latin typeface="Calibri"/>
+                        </a:defRPr>
+                      </a:pPr>
+                      <a:r>
+                        <a:t>1.631</a:t>
+                      </a:r>
+                    </a:p>
+                  </a:txBody>
+                  <a:tcPr anchor="ctr"/>
+                </a:tc>
+                <a:tc>
+                  <a:txBody>
+                    <a:bodyPr/>
+                    <a:lstStyle/>
+                    <a:p>
+                      <a:pPr algn="ctr">
+                        <a:defRPr sz="1300">
+                          <a:solidFill>
+                            <a:srgbClr val="1A1A2E"/>
+                          </a:solidFill>
+                          <a:latin typeface="Calibri"/>
+                        </a:defRPr>
+                      </a:pPr>
+                      <a:r>
+                        <a:t>+11.0%</a:t>
+                      </a:r>
+                    </a:p>
+                  </a:txBody>
+                  <a:tcPr anchor="ctr"/>
+                </a:tc>
+                <a:tc>
+                  <a:txBody>
+                    <a:bodyPr/>
+                    <a:lstStyle/>
+                    <a:p>
+                      <a:pPr algn="ctr">
+                        <a:defRPr sz="1300">
+                          <a:solidFill>
+                            <a:srgbClr val="1A1A2E"/>
+                          </a:solidFill>
+                          <a:latin typeface="Calibri"/>
+                        </a:defRPr>
+                      </a:pPr>
+                      <a:r>
+                        <a:t>+11.4%</a:t>
+                      </a:r>
+                    </a:p>
+                  </a:txBody>
+                  <a:tcPr anchor="ctr"/>
+                </a:tc>
+                <a:tc>
+                  <a:txBody>
+                    <a:bodyPr/>
+                    <a:lstStyle/>
+                    <a:p>
+                      <a:pPr algn="ctr">
+                        <a:defRPr sz="1300">
+                          <a:solidFill>
+                            <a:srgbClr val="1A1A2E"/>
+                          </a:solidFill>
+                          <a:latin typeface="Calibri"/>
+                        </a:defRPr>
+                      </a:pPr>
+                      <a:r>
+                        <a:t>+11.7%</a:t>
+                      </a:r>
+                    </a:p>
+                  </a:txBody>
+                  <a:tcPr anchor="ctr"/>
+                </a:tc>
+              </a:tr>
+              <a:tr h="548640">
+                <a:tc>
+                  <a:txBody>
+                    <a:bodyPr/>
+                    <a:lstStyle/>
+                    <a:p>
+                      <a:pPr algn="ctr">
+                        <a:defRPr sz="1300">
+                          <a:solidFill>
+                            <a:srgbClr val="1A1A2E"/>
+                          </a:solidFill>
+                          <a:latin typeface="Calibri"/>
+                        </a:defRPr>
+                      </a:pPr>
+                      <a:r>
+                        <a:t>BF4 Head</a:t>
+                      </a:r>
+                    </a:p>
+                  </a:txBody>
+                  <a:tcPr anchor="ctr">
+                    <a:solidFill>
+                      <a:srgbClr val="F0F4F8"/>
+                    </a:solidFill>
+                  </a:tcPr>
+                </a:tc>
+                <a:tc>
+                  <a:txBody>
+                    <a:bodyPr/>
+                    <a:lstStyle/>
+                    <a:p>
+                      <a:pPr algn="ctr">
+                        <a:defRPr sz="1300">
+                          <a:solidFill>
+                            <a:srgbClr val="1A1A2E"/>
+                          </a:solidFill>
+                          <a:latin typeface="Calibri"/>
+                        </a:defRPr>
+                      </a:pPr>
+                      <a:r>
+                        <a:t>2.162</a:t>
+                      </a:r>
+                    </a:p>
+                  </a:txBody>
+                  <a:tcPr anchor="ctr">
+                    <a:solidFill>
+                      <a:srgbClr val="F0F4F8"/>
+                    </a:solidFill>
+                  </a:tcPr>
+                </a:tc>
+                <a:tc>
+                  <a:txBody>
+                    <a:bodyPr/>
+                    <a:lstStyle/>
+                    <a:p>
+                      <a:pPr algn="ctr">
+                        <a:defRPr sz="1300">
+                          <a:solidFill>
+                            <a:srgbClr val="1A1A2E"/>
+                          </a:solidFill>
+                          <a:latin typeface="Calibri"/>
+                        </a:defRPr>
+                      </a:pPr>
+                      <a:r>
+                        <a:t>+12.3%</a:t>
+                      </a:r>
+                    </a:p>
+                  </a:txBody>
+                  <a:tcPr anchor="ctr">
+                    <a:solidFill>
+                      <a:srgbClr val="F0F4F8"/>
+                    </a:solidFill>
+                  </a:tcPr>
+                </a:tc>
+                <a:tc>
+                  <a:txBody>
+                    <a:bodyPr/>
+                    <a:lstStyle/>
+                    <a:p>
+                      <a:pPr algn="ctr">
+                        <a:defRPr sz="1300">
+                          <a:solidFill>
+                            <a:srgbClr val="1A1A2E"/>
+                          </a:solidFill>
+                          <a:latin typeface="Calibri"/>
+                        </a:defRPr>
+                      </a:pPr>
+                      <a:r>
+                        <a:t>+12.2%</a:t>
+                      </a:r>
+                    </a:p>
+                  </a:txBody>
+                  <a:tcPr anchor="ctr">
+                    <a:solidFill>
+                      <a:srgbClr val="F0F4F8"/>
+                    </a:solidFill>
+                  </a:tcPr>
+                </a:tc>
+                <a:tc>
+                  <a:txBody>
+                    <a:bodyPr/>
+                    <a:lstStyle/>
+                    <a:p>
+                      <a:pPr algn="ctr">
+                        <a:defRPr sz="1300">
+                          <a:solidFill>
+                            <a:srgbClr val="1A1A2E"/>
+                          </a:solidFill>
+                          <a:latin typeface="Calibri"/>
+                        </a:defRPr>
+                      </a:pPr>
+                      <a:r>
+                        <a:t>+11.8%</a:t>
+                      </a:r>
+                    </a:p>
+                  </a:txBody>
+                  <a:tcPr anchor="ctr">
+                    <a:solidFill>
+                      <a:srgbClr val="F0F4F8"/>
+                    </a:solidFill>
+                  </a:tcPr>
+                </a:tc>
+              </a:tr>
+              <a:tr h="548640">
+                <a:tc>
+                  <a:txBody>
+                    <a:bodyPr/>
+                    <a:lstStyle/>
+                    <a:p>
+                      <a:pPr algn="ctr">
+                        <a:defRPr sz="1300">
+                          <a:solidFill>
+                            <a:srgbClr val="1A1A2E"/>
+                          </a:solidFill>
+                          <a:latin typeface="Calibri"/>
+                        </a:defRPr>
+                      </a:pPr>
+                      <a:r>
+                        <a:t>BF3 Beam</a:t>
+                      </a:r>
+                    </a:p>
+                  </a:txBody>
+                  <a:tcPr anchor="ctr"/>
+                </a:tc>
+                <a:tc>
+                  <a:txBody>
+                    <a:bodyPr/>
+                    <a:lstStyle/>
+                    <a:p>
+                      <a:pPr algn="ctr">
+                        <a:defRPr sz="1300">
+                          <a:solidFill>
+                            <a:srgbClr val="1A1A2E"/>
+                          </a:solidFill>
+                          <a:latin typeface="Calibri"/>
+                        </a:defRPr>
+                      </a:pPr>
+                      <a:r>
+                        <a:t>0.402</a:t>
+                      </a:r>
+                    </a:p>
+                  </a:txBody>
+                  <a:tcPr anchor="ctr"/>
+                </a:tc>
+                <a:tc>
+                  <a:txBody>
+                    <a:bodyPr/>
+                    <a:lstStyle/>
+                    <a:p>
+                      <a:pPr algn="ctr">
+                        <a:defRPr sz="1300">
+                          <a:solidFill>
+                            <a:srgbClr val="1A1A2E"/>
+                          </a:solidFill>
+                          <a:latin typeface="Calibri"/>
+                        </a:defRPr>
+                      </a:pPr>
+                      <a:r>
+                        <a:t>+40.7%</a:t>
+                      </a:r>
+                    </a:p>
+                  </a:txBody>
+                  <a:tcPr anchor="ctr"/>
+                </a:tc>
+                <a:tc>
+                  <a:txBody>
+                    <a:bodyPr/>
+                    <a:lstStyle/>
+                    <a:p>
+                      <a:pPr algn="ctr">
+                        <a:defRPr sz="1300">
+                          <a:solidFill>
+                            <a:srgbClr val="1A1A2E"/>
+                          </a:solidFill>
+                          <a:latin typeface="Calibri"/>
+                        </a:defRPr>
+                      </a:pPr>
+                      <a:r>
+                        <a:t>+37.7%</a:t>
+                      </a:r>
+                    </a:p>
+                  </a:txBody>
+                  <a:tcPr anchor="ctr"/>
+                </a:tc>
+                <a:tc>
+                  <a:txBody>
+                    <a:bodyPr/>
+                    <a:lstStyle/>
+                    <a:p>
+                      <a:pPr algn="ctr">
+                        <a:defRPr sz="1300">
+                          <a:solidFill>
+                            <a:srgbClr val="1A1A2E"/>
+                          </a:solidFill>
+                          <a:latin typeface="Calibri"/>
+                        </a:defRPr>
+                      </a:pPr>
+                      <a:r>
+                        <a:t>+27.5%</a:t>
+                      </a:r>
+                    </a:p>
+                  </a:txBody>
+                  <a:tcPr anchor="ctr"/>
+                </a:tc>
+              </a:tr>
+              <a:tr h="548640">
+                <a:tc>
+                  <a:txBody>
+                    <a:bodyPr/>
+                    <a:lstStyle/>
+                    <a:p>
+                      <a:pPr algn="ctr">
+                        <a:defRPr sz="1300">
+                          <a:solidFill>
+                            <a:srgbClr val="1A1A2E"/>
+                          </a:solidFill>
+                          <a:latin typeface="Calibri"/>
+                        </a:defRPr>
+                      </a:pPr>
+                      <a:r>
+                        <a:t>BF3 Quarter</a:t>
+                      </a:r>
+                    </a:p>
+                  </a:txBody>
+                  <a:tcPr anchor="ctr">
+                    <a:solidFill>
+                      <a:srgbClr val="F0F4F8"/>
+                    </a:solidFill>
+                  </a:tcPr>
+                </a:tc>
+                <a:tc>
+                  <a:txBody>
+                    <a:bodyPr/>
+                    <a:lstStyle/>
+                    <a:p>
+                      <a:pPr algn="ctr">
+                        <a:defRPr sz="1300">
+                          <a:solidFill>
+                            <a:srgbClr val="1A1A2E"/>
+                          </a:solidFill>
+                          <a:latin typeface="Calibri"/>
+                        </a:defRPr>
+                      </a:pPr>
+                      <a:r>
+                        <a:t>1.178</a:t>
+                      </a:r>
+                    </a:p>
+                  </a:txBody>
+                  <a:tcPr anchor="ctr">
+                    <a:solidFill>
+                      <a:srgbClr val="F0F4F8"/>
+                    </a:solidFill>
+                  </a:tcPr>
+                </a:tc>
+                <a:tc>
+                  <a:txBody>
+                    <a:bodyPr/>
+                    <a:lstStyle/>
+                    <a:p>
+                      <a:pPr algn="ctr">
+                        <a:defRPr sz="1300">
+                          <a:solidFill>
+                            <a:srgbClr val="1A1A2E"/>
+                          </a:solidFill>
+                          <a:latin typeface="Calibri"/>
+                        </a:defRPr>
+                      </a:pPr>
+                      <a:r>
+                        <a:t>+17.6%</a:t>
+                      </a:r>
+                    </a:p>
+                  </a:txBody>
+                  <a:tcPr anchor="ctr">
+                    <a:solidFill>
+                      <a:srgbClr val="F0F4F8"/>
+                    </a:solidFill>
+                  </a:tcPr>
+                </a:tc>
+                <a:tc>
+                  <a:txBody>
+                    <a:bodyPr/>
+                    <a:lstStyle/>
+                    <a:p>
+                      <a:pPr algn="ctr">
+                        <a:defRPr sz="1300">
+                          <a:solidFill>
+                            <a:srgbClr val="1A1A2E"/>
+                          </a:solidFill>
+                          <a:latin typeface="Calibri"/>
+                        </a:defRPr>
+                      </a:pPr>
+                      <a:r>
+                        <a:t>+17.7%</a:t>
+                      </a:r>
+                    </a:p>
+                  </a:txBody>
+                  <a:tcPr anchor="ctr">
+                    <a:solidFill>
+                      <a:srgbClr val="F0F4F8"/>
+                    </a:solidFill>
+                  </a:tcPr>
+                </a:tc>
+                <a:tc>
+                  <a:txBody>
+                    <a:bodyPr/>
+                    <a:lstStyle/>
+                    <a:p>
+                      <a:pPr algn="ctr">
+                        <a:defRPr sz="1300">
+                          <a:solidFill>
+                            <a:srgbClr val="1A1A2E"/>
+                          </a:solidFill>
+                          <a:latin typeface="Calibri"/>
+                        </a:defRPr>
+                      </a:pPr>
+                      <a:r>
+                        <a:t>+17.0%</a:t>
+                      </a:r>
+                    </a:p>
+                  </a:txBody>
+                  <a:tcPr anchor="ctr">
+                    <a:solidFill>
+                      <a:srgbClr val="F0F4F8"/>
+                    </a:solidFill>
+                  </a:tcPr>
+                </a:tc>
+              </a:tr>
+            </a:tbl>
+          </a:graphicData>
+        </a:graphic>
+      </p:graphicFrame>
+      <p:sp>
+        <p:nvSpPr>
+          <p:cNvPr id="7" name="TextBox 6"/>
+          <p:cNvSpPr txBox="1"/>
+          <p:nvPr/>
+        </p:nvSpPr>
+        <p:spPr>
+          <a:xfrm>
+            <a:off x="914400" y="4389120"/>
+            <a:ext cx="10332720" cy="457200"/>
+          </a:xfrm>
+          <a:prstGeom prst="rect">
+            <a:avLst/>
+          </a:prstGeom>
+          <a:noFill/>
+        </p:spPr>
+        <p:txBody>
+          <a:bodyPr wrap="square">
+            <a:spAutoFit/>
+          </a:bodyPr>
+          <a:lstStyle/>
+          <a:p>
+            <a:pPr algn="ctr">
+              <a:defRPr sz="2200" b="1">
+                <a:solidFill>
+                  <a:srgbClr val="2CA02C"/>
+                </a:solidFill>
+                <a:latin typeface="Calibri"/>
+              </a:defRPr>
+            </a:pPr>
+            <a:r>
+              <a:t>WaveSplat FF → GT FF의 93~103% 성능 달성!</a:t>
+            </a:r>
+          </a:p>
+        </p:txBody>
+      </p:sp>
+      <p:sp>
+        <p:nvSpPr>
+          <p:cNvPr id="8" name="TextBox 7"/>
+          <p:cNvSpPr txBox="1"/>
+          <p:nvPr/>
+        </p:nvSpPr>
+        <p:spPr>
+          <a:xfrm>
+            <a:off x="914400" y="4937760"/>
+            <a:ext cx="10332720" cy="1828800"/>
+          </a:xfrm>
+          <a:prstGeom prst="rect">
+            <a:avLst/>
+          </a:prstGeom>
+          <a:noFill/>
+        </p:spPr>
+        <p:txBody>
+          <a:bodyPr wrap="square">
+            <a:spAutoFit/>
+          </a:bodyPr>
+          <a:lstStyle/>
+          <a:p>
+            <a:pPr>
+              <a:spcAft>
+                <a:spcPts val="600"/>
+              </a:spcAft>
+            </a:pPr>
+            <a:r>
+              <a:rPr sz="1400">
+                <a:solidFill>
+                  <a:srgbClr val="1A1A2E"/>
+                </a:solidFill>
+                <a:latin typeface="Calibri"/>
+              </a:rPr>
+              <a:t>• • WS 20% nRMSE로도 GT 대비 93~103% feedforward 효과 회복</a:t>
+            </a:r>
+          </a:p>
+          <a:p>
+            <a:pPr>
+              <a:spcAft>
+                <a:spcPts val="600"/>
+              </a:spcAft>
+            </a:pPr>
+            <a:r>
+              <a:rPr sz="1400">
+                <a:solidFill>
+                  <a:srgbClr val="1A1A2E"/>
+                </a:solidFill>
+                <a:latin typeface="Calibri"/>
+              </a:rPr>
+              <a:t>• • Beam sea에서 가장 큰 개선 (+37.7%) — 파면이 평행하여 추정 유리</a:t>
+            </a:r>
+          </a:p>
+          <a:p>
+            <a:pPr>
+              <a:spcAft>
+                <a:spcPts val="600"/>
+              </a:spcAft>
+            </a:pPr>
+            <a:r>
+              <a:rPr sz="1400">
+                <a:solidFill>
+                  <a:srgbClr val="1A1A2E"/>
+                </a:solidFill>
+                <a:latin typeface="Calibri"/>
+              </a:rPr>
+              <a:t>• • Noisy FF (인위적 노이즈 주입)도 LP filter 덕분에 효과적</a:t>
+            </a:r>
+          </a:p>
+          <a:p>
+            <a:pPr>
+              <a:spcAft>
+                <a:spcPts val="600"/>
+              </a:spcAft>
+            </a:pPr>
+            <a:r>
+              <a:rPr sz="1400">
+                <a:solidFill>
+                  <a:srgbClr val="1A1A2E"/>
+                </a:solidFill>
+                <a:latin typeface="Calibri"/>
+              </a:rPr>
+              <a:t>• • BF3 Beam: ISO 2631 'Slight discomfort' → 'Comfortable' 달성 (aRMS &lt; 0.315)</a:t>
+            </a:r>
+          </a:p>
+        </p:txBody>
+      </p:sp>
+      <p:pic>
+        <p:nvPicPr>
+          <p:cNvPr id="9" name="Picture 8" descr="fig_phase2_comparison.png"/>
+          <p:cNvPicPr>
+            <a:picLocks noChangeAspect="1"/>
+          </p:cNvPicPr>
+          <p:nvPr/>
+        </p:nvPicPr>
+        <p:blipFill>
+          <a:blip r:embed="rId2"/>
+          <a:stretch>
+            <a:fillRect/>
+          </a:stretch>
+        </p:blipFill>
+        <p:spPr>
+          <a:xfrm>
+            <a:off x="8686800" y="4389120"/>
+            <a:ext cx="3017520" cy="2011680"/>
+          </a:xfrm>
+          <a:prstGeom prst="rect">
+            <a:avLst/>
+          </a:prstGeom>
+        </p:spPr>
+      </p:pic>
+      <p:sp>
+        <p:nvSpPr>
+          <p:cNvPr id="10" name="TextBox 9"/>
+          <p:cNvSpPr txBox="1"/>
+          <p:nvPr/>
+        </p:nvSpPr>
+        <p:spPr>
+          <a:xfrm>
+            <a:off x="10972800" y="6492240"/>
+            <a:ext cx="1097280" cy="274320"/>
+          </a:xfrm>
+          <a:prstGeom prst="rect">
+            <a:avLst/>
+          </a:prstGeom>
+          <a:noFill/>
+        </p:spPr>
+        <p:txBody>
+          <a:bodyPr wrap="square">
+            <a:spAutoFit/>
+          </a:bodyPr>
+          <a:lstStyle/>
+          <a:p>
             <a:pPr algn="r">
               <a:defRPr sz="1000" b="0">
                 <a:solidFill>
@@ -7375,7 +8440,1397 @@
               </a:defRPr>
             </a:pPr>
             <a:r>
-              <a:t>16/16</a:t>
+              <a:t>17/23</a:t>
+            </a:r>
+          </a:p>
+        </p:txBody>
+      </p:sp>
+    </p:spTree>
+  </p:cSld>
+  <p:clrMapOvr>
+    <a:masterClrMapping/>
+  </p:clrMapOvr>
+</p:sld>
+</file>
+
+<file path=ppt/slides/slide18.xml><?xml version="1.0" encoding="utf-8"?>
+<p:sld xmlns:a="http://schemas.openxmlformats.org/drawingml/2006/main" xmlns:p="http://schemas.openxmlformats.org/presentationml/2006/main" xmlns:r="http://schemas.openxmlformats.org/officeDocument/2006/relationships">
+  <p:cSld>
+    <p:bg>
+      <p:bgPr>
+        <a:solidFill>
+          <a:srgbClr val="FFFFFF"/>
+        </a:solidFill>
+        <a:effectLst/>
+      </p:bgPr>
+    </p:bg>
+    <p:spTree>
+      <p:nvGrpSpPr>
+        <p:cNvPr id="1" name=""/>
+        <p:cNvGrpSpPr/>
+        <p:nvPr/>
+      </p:nvGrpSpPr>
+      <p:grpSpPr/>
+      <p:sp>
+        <p:nvSpPr>
+          <p:cNvPr id="2" name="Rectangle 1"/>
+          <p:cNvSpPr/>
+          <p:nvPr/>
+        </p:nvSpPr>
+        <p:spPr>
+          <a:xfrm>
+            <a:off x="0" y="0"/>
+            <a:ext cx="12191695" cy="1097280"/>
+          </a:xfrm>
+          <a:prstGeom prst="rect">
+            <a:avLst/>
+          </a:prstGeom>
+          <a:solidFill>
+            <a:srgbClr val="1A1A2E"/>
+          </a:solidFill>
+          <a:ln>
+            <a:noFill/>
+          </a:ln>
+        </p:spPr>
+        <p:style>
+          <a:lnRef idx="1">
+            <a:schemeClr val="accent1"/>
+          </a:lnRef>
+          <a:fillRef idx="3">
+            <a:schemeClr val="accent1"/>
+          </a:fillRef>
+          <a:effectRef idx="2">
+            <a:schemeClr val="accent1"/>
+          </a:effectRef>
+          <a:fontRef idx="minor">
+            <a:schemeClr val="lt1"/>
+          </a:fontRef>
+        </p:style>
+        <p:txBody>
+          <a:bodyPr rtlCol="0" anchor="ctr"/>
+          <a:lstStyle/>
+          <a:p>
+            <a:pPr algn="ctr"/>
+          </a:p>
+        </p:txBody>
+      </p:sp>
+      <p:sp>
+        <p:nvSpPr>
+          <p:cNvPr id="3" name="TextBox 2"/>
+          <p:cNvSpPr txBox="1"/>
+          <p:nvPr/>
+        </p:nvSpPr>
+        <p:spPr>
+          <a:xfrm>
+            <a:off x="457200" y="137160"/>
+            <a:ext cx="10972800" cy="457200"/>
+          </a:xfrm>
+          <a:prstGeom prst="rect">
+            <a:avLst/>
+          </a:prstGeom>
+          <a:noFill/>
+        </p:spPr>
+        <p:txBody>
+          <a:bodyPr wrap="square">
+            <a:spAutoFit/>
+          </a:bodyPr>
+          <a:lstStyle/>
+          <a:p>
+            <a:pPr algn="l">
+              <a:defRPr sz="1400" b="0">
+                <a:solidFill>
+                  <a:srgbClr val="007ACC"/>
+                </a:solidFill>
+                <a:latin typeface="Calibri"/>
+              </a:defRPr>
+            </a:pPr>
+            <a:r>
+              <a:t>  05</a:t>
+            </a:r>
+          </a:p>
+        </p:txBody>
+      </p:sp>
+      <p:sp>
+        <p:nvSpPr>
+          <p:cNvPr id="4" name="TextBox 3"/>
+          <p:cNvSpPr txBox="1"/>
+          <p:nvPr/>
+        </p:nvSpPr>
+        <p:spPr>
+          <a:xfrm>
+            <a:off x="457200" y="320040"/>
+            <a:ext cx="10972800" cy="640080"/>
+          </a:xfrm>
+          <a:prstGeom prst="rect">
+            <a:avLst/>
+          </a:prstGeom>
+          <a:noFill/>
+        </p:spPr>
+        <p:txBody>
+          <a:bodyPr wrap="square">
+            <a:spAutoFit/>
+          </a:bodyPr>
+          <a:lstStyle/>
+          <a:p>
+            <a:pPr algn="l">
+              <a:defRPr sz="2800" b="1">
+                <a:solidFill>
+                  <a:srgbClr val="FFFFFF"/>
+                </a:solidFill>
+                <a:latin typeface="Calibri"/>
+              </a:defRPr>
+            </a:pPr>
+            <a:r>
+              <a:t>  Hydrofoil 결과 (2): Sensitivity Analysis</a:t>
+            </a:r>
+          </a:p>
+        </p:txBody>
+      </p:sp>
+      <p:sp>
+        <p:nvSpPr>
+          <p:cNvPr id="5" name="TextBox 4"/>
+          <p:cNvSpPr txBox="1"/>
+          <p:nvPr/>
+        </p:nvSpPr>
+        <p:spPr>
+          <a:xfrm>
+            <a:off x="457200" y="685800"/>
+            <a:ext cx="10972800" cy="365760"/>
+          </a:xfrm>
+          <a:prstGeom prst="rect">
+            <a:avLst/>
+          </a:prstGeom>
+          <a:noFill/>
+        </p:spPr>
+        <p:txBody>
+          <a:bodyPr wrap="square">
+            <a:spAutoFit/>
+          </a:bodyPr>
+          <a:lstStyle/>
+          <a:p>
+            <a:pPr algn="l">
+              <a:defRPr sz="1400" b="0">
+                <a:solidFill>
+                  <a:srgbClr val="AABBCC"/>
+                </a:solidFill>
+                <a:latin typeface="Calibri"/>
+              </a:defRPr>
+            </a:pPr>
+            <a:r>
+              <a:t>  nRMSE Tolerance &amp; Preview Horizon</a:t>
+            </a:r>
+          </a:p>
+        </p:txBody>
+      </p:sp>
+      <p:sp>
+        <p:nvSpPr>
+          <p:cNvPr id="6" name="TextBox 5"/>
+          <p:cNvSpPr txBox="1"/>
+          <p:nvPr/>
+        </p:nvSpPr>
+        <p:spPr>
+          <a:xfrm>
+            <a:off x="731520" y="1371600"/>
+            <a:ext cx="5303520" cy="365760"/>
+          </a:xfrm>
+          <a:prstGeom prst="rect">
+            <a:avLst/>
+          </a:prstGeom>
+          <a:noFill/>
+        </p:spPr>
+        <p:txBody>
+          <a:bodyPr wrap="square">
+            <a:spAutoFit/>
+          </a:bodyPr>
+          <a:lstStyle/>
+          <a:p>
+            <a:pPr algn="l">
+              <a:defRPr sz="2000" b="1">
+                <a:solidFill>
+                  <a:srgbClr val="007ACC"/>
+                </a:solidFill>
+                <a:latin typeface="Calibri"/>
+              </a:defRPr>
+            </a:pPr>
+            <a:r>
+              <a:t>추정 오차 허용 범위</a:t>
+            </a:r>
+          </a:p>
+        </p:txBody>
+      </p:sp>
+      <p:sp>
+        <p:nvSpPr>
+          <p:cNvPr id="7" name="TextBox 6"/>
+          <p:cNvSpPr txBox="1"/>
+          <p:nvPr/>
+        </p:nvSpPr>
+        <p:spPr>
+          <a:xfrm>
+            <a:off x="731520" y="1828800"/>
+            <a:ext cx="5303520" cy="3200400"/>
+          </a:xfrm>
+          <a:prstGeom prst="rect">
+            <a:avLst/>
+          </a:prstGeom>
+          <a:noFill/>
+        </p:spPr>
+        <p:txBody>
+          <a:bodyPr wrap="square">
+            <a:spAutoFit/>
+          </a:bodyPr>
+          <a:lstStyle/>
+          <a:p>
+            <a:pPr>
+              <a:spcAft>
+                <a:spcPts val="600"/>
+              </a:spcAft>
+            </a:pPr>
+            <a:r>
+              <a:rPr sz="1400">
+                <a:solidFill>
+                  <a:srgbClr val="1A1A2E"/>
+                </a:solidFill>
+                <a:latin typeface="Calibri"/>
+              </a:rPr>
+              <a:t>• • nRMSE 0~50% 전 구간에서 FF 유효</a:t>
+            </a:r>
+          </a:p>
+          <a:p>
+            <a:pPr>
+              <a:spcAft>
+                <a:spcPts val="600"/>
+              </a:spcAft>
+            </a:pPr>
+            <a:r>
+              <a:rPr sz="1400">
+                <a:solidFill>
+                  <a:srgbClr val="1A1A2E"/>
+                </a:solidFill>
+                <a:latin typeface="Calibri"/>
+              </a:rPr>
+              <a:t>• • 50% nRMSE에서도 FF 효과 존재</a:t>
+            </a:r>
+          </a:p>
+          <a:p>
+            <a:pPr>
+              <a:spcAft>
+                <a:spcPts val="600"/>
+              </a:spcAft>
+            </a:pPr>
+            <a:r>
+              <a:rPr sz="1400">
+                <a:solidFill>
+                  <a:srgbClr val="1A1A2E"/>
+                </a:solidFill>
+                <a:latin typeface="Calibri"/>
+              </a:rPr>
+              <a:t>•   → threshold 없음 (graceful degradation)</a:t>
+            </a:r>
+          </a:p>
+          <a:p>
+            <a:pPr>
+              <a:spcAft>
+                <a:spcPts val="600"/>
+              </a:spcAft>
+            </a:pPr>
+            <a:r>
+              <a:rPr sz="1400">
+                <a:solidFill>
+                  <a:srgbClr val="1A1A2E"/>
+                </a:solidFill>
+                <a:latin typeface="Calibri"/>
+              </a:rPr>
+              <a:t>• • LP filter가 고주파 추정 노이즈 억제</a:t>
+            </a:r>
+          </a:p>
+          <a:p>
+            <a:pPr>
+              <a:spcAft>
+                <a:spcPts val="600"/>
+              </a:spcAft>
+            </a:pPr>
+            <a:r>
+              <a:rPr sz="1400">
+                <a:solidFill>
+                  <a:srgbClr val="1A1A2E"/>
+                </a:solidFill>
+                <a:latin typeface="Calibri"/>
+              </a:rPr>
+              <a:t>•   → 부정확한 추정도 유용하게 활용</a:t>
+            </a:r>
+          </a:p>
+          <a:p>
+            <a:pPr>
+              <a:spcAft>
+                <a:spcPts val="600"/>
+              </a:spcAft>
+            </a:pPr>
+            <a:r>
+              <a:rPr sz="1400">
+                <a:solidFill>
+                  <a:srgbClr val="1A1A2E"/>
+                </a:solidFill>
+                <a:latin typeface="Calibri"/>
+              </a:rPr>
+              <a:t>• </a:t>
+            </a:r>
+          </a:p>
+          <a:p>
+            <a:pPr>
+              <a:spcAft>
+                <a:spcPts val="600"/>
+              </a:spcAft>
+            </a:pPr>
+            <a:r>
+              <a:rPr sz="1400">
+                <a:solidFill>
+                  <a:srgbClr val="1A1A2E"/>
+                </a:solidFill>
+                <a:latin typeface="Calibri"/>
+              </a:rPr>
+              <a:t>• • 실용적 의미:</a:t>
+            </a:r>
+          </a:p>
+          <a:p>
+            <a:pPr>
+              <a:spcAft>
+                <a:spcPts val="600"/>
+              </a:spcAft>
+            </a:pPr>
+            <a:r>
+              <a:rPr sz="1400">
+                <a:solidFill>
+                  <a:srgbClr val="1A1A2E"/>
+                </a:solidFill>
+                <a:latin typeface="Calibri"/>
+              </a:rPr>
+              <a:t>•   WaveSplat의 20% nRMSE는 충분</a:t>
+            </a:r>
+          </a:p>
+          <a:p>
+            <a:pPr>
+              <a:spcAft>
+                <a:spcPts val="600"/>
+              </a:spcAft>
+            </a:pPr>
+            <a:r>
+              <a:rPr sz="1400">
+                <a:solidFill>
+                  <a:srgbClr val="1A1A2E"/>
+                </a:solidFill>
+                <a:latin typeface="Calibri"/>
+              </a:rPr>
+              <a:t>•   더 정확할 필요 없이 제어에 활용 가능</a:t>
+            </a:r>
+          </a:p>
+        </p:txBody>
+      </p:sp>
+      <p:pic>
+        <p:nvPicPr>
+          <p:cNvPr id="8" name="Picture 7" descr="fig_nrmse_sensitivity.png"/>
+          <p:cNvPicPr>
+            <a:picLocks noChangeAspect="1"/>
+          </p:cNvPicPr>
+          <p:nvPr/>
+        </p:nvPicPr>
+        <p:blipFill>
+          <a:blip r:embed="rId2"/>
+          <a:stretch>
+            <a:fillRect/>
+          </a:stretch>
+        </p:blipFill>
+        <p:spPr>
+          <a:xfrm>
+            <a:off x="731520" y="4572000"/>
+            <a:ext cx="5029200" cy="2011680"/>
+          </a:xfrm>
+          <a:prstGeom prst="rect">
+            <a:avLst/>
+          </a:prstGeom>
+        </p:spPr>
+      </p:pic>
+      <p:sp>
+        <p:nvSpPr>
+          <p:cNvPr id="9" name="TextBox 8"/>
+          <p:cNvSpPr txBox="1"/>
+          <p:nvPr/>
+        </p:nvSpPr>
+        <p:spPr>
+          <a:xfrm>
+            <a:off x="6400800" y="1371600"/>
+            <a:ext cx="5303520" cy="365760"/>
+          </a:xfrm>
+          <a:prstGeom prst="rect">
+            <a:avLst/>
+          </a:prstGeom>
+          <a:noFill/>
+        </p:spPr>
+        <p:txBody>
+          <a:bodyPr wrap="square">
+            <a:spAutoFit/>
+          </a:bodyPr>
+          <a:lstStyle/>
+          <a:p>
+            <a:pPr algn="l">
+              <a:defRPr sz="2000" b="1">
+                <a:solidFill>
+                  <a:srgbClr val="007ACC"/>
+                </a:solidFill>
+                <a:latin typeface="Calibri"/>
+              </a:defRPr>
+            </a:pPr>
+            <a:r>
+              <a:t>최적 Preview Horizon</a:t>
+            </a:r>
+          </a:p>
+        </p:txBody>
+      </p:sp>
+      <p:sp>
+        <p:nvSpPr>
+          <p:cNvPr id="10" name="TextBox 9"/>
+          <p:cNvSpPr txBox="1"/>
+          <p:nvPr/>
+        </p:nvSpPr>
+        <p:spPr>
+          <a:xfrm>
+            <a:off x="6400800" y="1828800"/>
+            <a:ext cx="5303520" cy="3200400"/>
+          </a:xfrm>
+          <a:prstGeom prst="rect">
+            <a:avLst/>
+          </a:prstGeom>
+          <a:noFill/>
+        </p:spPr>
+        <p:txBody>
+          <a:bodyPr wrap="square">
+            <a:spAutoFit/>
+          </a:bodyPr>
+          <a:lstStyle/>
+          <a:p>
+            <a:pPr>
+              <a:spcAft>
+                <a:spcPts val="600"/>
+              </a:spcAft>
+            </a:pPr>
+            <a:r>
+              <a:rPr sz="1400">
+                <a:solidFill>
+                  <a:srgbClr val="1A1A2E"/>
+                </a:solidFill>
+                <a:latin typeface="Calibri"/>
+              </a:rPr>
+              <a:t>• • Head sea: 최적 0.1s (~1.1m ahead)</a:t>
+            </a:r>
+          </a:p>
+          <a:p>
+            <a:pPr>
+              <a:spcAft>
+                <a:spcPts val="600"/>
+              </a:spcAft>
+            </a:pPr>
+            <a:r>
+              <a:rPr sz="1400">
+                <a:solidFill>
+                  <a:srgbClr val="1A1A2E"/>
+                </a:solidFill>
+                <a:latin typeface="Calibri"/>
+              </a:rPr>
+              <a:t>• • Beam sea: 최적 0.3s (~3.4m ahead)</a:t>
+            </a:r>
+          </a:p>
+          <a:p>
+            <a:pPr>
+              <a:spcAft>
+                <a:spcPts val="600"/>
+              </a:spcAft>
+            </a:pPr>
+            <a:r>
+              <a:rPr sz="1400">
+                <a:solidFill>
+                  <a:srgbClr val="1A1A2E"/>
+                </a:solidFill>
+                <a:latin typeface="Calibri"/>
+              </a:rPr>
+              <a:t>• • 물리적 의미: 파도-foil 상호작용 시간 스케일</a:t>
+            </a:r>
+          </a:p>
+          <a:p>
+            <a:pPr>
+              <a:spcAft>
+                <a:spcPts val="600"/>
+              </a:spcAft>
+            </a:pPr>
+            <a:r>
+              <a:rPr sz="1400">
+                <a:solidFill>
+                  <a:srgbClr val="1A1A2E"/>
+                </a:solidFill>
+                <a:latin typeface="Calibri"/>
+              </a:rPr>
+              <a:t>• </a:t>
+            </a:r>
+          </a:p>
+          <a:p>
+            <a:pPr>
+              <a:spcAft>
+                <a:spcPts val="600"/>
+              </a:spcAft>
+            </a:pPr>
+            <a:r>
+              <a:rPr sz="1400">
+                <a:solidFill>
+                  <a:srgbClr val="1A1A2E"/>
+                </a:solidFill>
+                <a:latin typeface="Calibri"/>
+              </a:rPr>
+              <a:t>• • 너무 긴 preview → 위상 불일치</a:t>
+            </a:r>
+          </a:p>
+          <a:p>
+            <a:pPr>
+              <a:spcAft>
+                <a:spcPts val="600"/>
+              </a:spcAft>
+            </a:pPr>
+            <a:r>
+              <a:rPr sz="1400">
+                <a:solidFill>
+                  <a:srgbClr val="1A1A2E"/>
+                </a:solidFill>
+                <a:latin typeface="Calibri"/>
+              </a:rPr>
+              <a:t>•   너무 짧은 preview → reaction 부족</a:t>
+            </a:r>
+          </a:p>
+          <a:p>
+            <a:pPr>
+              <a:spcAft>
+                <a:spcPts val="600"/>
+              </a:spcAft>
+            </a:pPr>
+            <a:r>
+              <a:rPr sz="1400">
+                <a:solidFill>
+                  <a:srgbClr val="1A1A2E"/>
+                </a:solidFill>
+                <a:latin typeface="Calibri"/>
+              </a:rPr>
+              <a:t>• • Encounter freq에 따라 최적점 변화</a:t>
+            </a:r>
+          </a:p>
+          <a:p>
+            <a:pPr>
+              <a:spcAft>
+                <a:spcPts val="600"/>
+              </a:spcAft>
+            </a:pPr>
+            <a:r>
+              <a:rPr sz="1400">
+                <a:solidFill>
+                  <a:srgbClr val="1A1A2E"/>
+                </a:solidFill>
+                <a:latin typeface="Calibri"/>
+              </a:rPr>
+              <a:t>• </a:t>
+            </a:r>
+          </a:p>
+          <a:p>
+            <a:pPr>
+              <a:spcAft>
+                <a:spcPts val="600"/>
+              </a:spcAft>
+            </a:pPr>
+            <a:r>
+              <a:rPr sz="1400">
+                <a:solidFill>
+                  <a:srgbClr val="1A1A2E"/>
+                </a:solidFill>
+                <a:latin typeface="Calibri"/>
+              </a:rPr>
+              <a:t>• • 실용: 0.1~0.3s면 충분</a:t>
+            </a:r>
+          </a:p>
+          <a:p>
+            <a:pPr>
+              <a:spcAft>
+                <a:spcPts val="600"/>
+              </a:spcAft>
+            </a:pPr>
+            <a:r>
+              <a:rPr sz="1400">
+                <a:solidFill>
+                  <a:srgbClr val="1A1A2E"/>
+                </a:solidFill>
+                <a:latin typeface="Calibri"/>
+              </a:rPr>
+              <a:t>•   (cruise speed에서 1~3m 전방)</a:t>
+            </a:r>
+          </a:p>
+        </p:txBody>
+      </p:sp>
+      <p:pic>
+        <p:nvPicPr>
+          <p:cNvPr id="11" name="Picture 10" descr="fig_preview_sweep.png"/>
+          <p:cNvPicPr>
+            <a:picLocks noChangeAspect="1"/>
+          </p:cNvPicPr>
+          <p:nvPr/>
+        </p:nvPicPr>
+        <p:blipFill>
+          <a:blip r:embed="rId3"/>
+          <a:stretch>
+            <a:fillRect/>
+          </a:stretch>
+        </p:blipFill>
+        <p:spPr>
+          <a:xfrm>
+            <a:off x="6400800" y="4572000"/>
+            <a:ext cx="5029200" cy="2011680"/>
+          </a:xfrm>
+          <a:prstGeom prst="rect">
+            <a:avLst/>
+          </a:prstGeom>
+        </p:spPr>
+      </p:pic>
+      <p:sp>
+        <p:nvSpPr>
+          <p:cNvPr id="12" name="TextBox 11"/>
+          <p:cNvSpPr txBox="1"/>
+          <p:nvPr/>
+        </p:nvSpPr>
+        <p:spPr>
+          <a:xfrm>
+            <a:off x="10972800" y="6492240"/>
+            <a:ext cx="1097280" cy="274320"/>
+          </a:xfrm>
+          <a:prstGeom prst="rect">
+            <a:avLst/>
+          </a:prstGeom>
+          <a:noFill/>
+        </p:spPr>
+        <p:txBody>
+          <a:bodyPr wrap="square">
+            <a:spAutoFit/>
+          </a:bodyPr>
+          <a:lstStyle/>
+          <a:p>
+            <a:pPr algn="r">
+              <a:defRPr sz="1000" b="0">
+                <a:solidFill>
+                  <a:srgbClr val="666666"/>
+                </a:solidFill>
+                <a:latin typeface="Calibri"/>
+              </a:defRPr>
+            </a:pPr>
+            <a:r>
+              <a:t>18/23</a:t>
+            </a:r>
+          </a:p>
+        </p:txBody>
+      </p:sp>
+    </p:spTree>
+  </p:cSld>
+  <p:clrMapOvr>
+    <a:masterClrMapping/>
+  </p:clrMapOvr>
+</p:sld>
+</file>
+
+<file path=ppt/slides/slide19.xml><?xml version="1.0" encoding="utf-8"?>
+<p:sld xmlns:a="http://schemas.openxmlformats.org/drawingml/2006/main" xmlns:p="http://schemas.openxmlformats.org/presentationml/2006/main" xmlns:r="http://schemas.openxmlformats.org/officeDocument/2006/relationships">
+  <p:cSld>
+    <p:bg>
+      <p:bgPr>
+        <a:solidFill>
+          <a:srgbClr val="FFFFFF"/>
+        </a:solidFill>
+        <a:effectLst/>
+      </p:bgPr>
+    </p:bg>
+    <p:spTree>
+      <p:nvGrpSpPr>
+        <p:cNvPr id="1" name=""/>
+        <p:cNvGrpSpPr/>
+        <p:nvPr/>
+      </p:nvGrpSpPr>
+      <p:grpSpPr/>
+      <p:sp>
+        <p:nvSpPr>
+          <p:cNvPr id="2" name="Rectangle 1"/>
+          <p:cNvSpPr/>
+          <p:nvPr/>
+        </p:nvSpPr>
+        <p:spPr>
+          <a:xfrm>
+            <a:off x="0" y="0"/>
+            <a:ext cx="12191695" cy="1097280"/>
+          </a:xfrm>
+          <a:prstGeom prst="rect">
+            <a:avLst/>
+          </a:prstGeom>
+          <a:solidFill>
+            <a:srgbClr val="1A1A2E"/>
+          </a:solidFill>
+          <a:ln>
+            <a:noFill/>
+          </a:ln>
+        </p:spPr>
+        <p:style>
+          <a:lnRef idx="1">
+            <a:schemeClr val="accent1"/>
+          </a:lnRef>
+          <a:fillRef idx="3">
+            <a:schemeClr val="accent1"/>
+          </a:fillRef>
+          <a:effectRef idx="2">
+            <a:schemeClr val="accent1"/>
+          </a:effectRef>
+          <a:fontRef idx="minor">
+            <a:schemeClr val="lt1"/>
+          </a:fontRef>
+        </p:style>
+        <p:txBody>
+          <a:bodyPr rtlCol="0" anchor="ctr"/>
+          <a:lstStyle/>
+          <a:p>
+            <a:pPr algn="ctr"/>
+          </a:p>
+        </p:txBody>
+      </p:sp>
+      <p:sp>
+        <p:nvSpPr>
+          <p:cNvPr id="3" name="TextBox 2"/>
+          <p:cNvSpPr txBox="1"/>
+          <p:nvPr/>
+        </p:nvSpPr>
+        <p:spPr>
+          <a:xfrm>
+            <a:off x="457200" y="137160"/>
+            <a:ext cx="10972800" cy="457200"/>
+          </a:xfrm>
+          <a:prstGeom prst="rect">
+            <a:avLst/>
+          </a:prstGeom>
+          <a:noFill/>
+        </p:spPr>
+        <p:txBody>
+          <a:bodyPr wrap="square">
+            <a:spAutoFit/>
+          </a:bodyPr>
+          <a:lstStyle/>
+          <a:p>
+            <a:pPr algn="l">
+              <a:defRPr sz="1400" b="0">
+                <a:solidFill>
+                  <a:srgbClr val="007ACC"/>
+                </a:solidFill>
+                <a:latin typeface="Calibri"/>
+              </a:defRPr>
+            </a:pPr>
+            <a:r>
+              <a:t>  05</a:t>
+            </a:r>
+          </a:p>
+        </p:txBody>
+      </p:sp>
+      <p:sp>
+        <p:nvSpPr>
+          <p:cNvPr id="4" name="TextBox 3"/>
+          <p:cNvSpPr txBox="1"/>
+          <p:nvPr/>
+        </p:nvSpPr>
+        <p:spPr>
+          <a:xfrm>
+            <a:off x="457200" y="320040"/>
+            <a:ext cx="10972800" cy="640080"/>
+          </a:xfrm>
+          <a:prstGeom prst="rect">
+            <a:avLst/>
+          </a:prstGeom>
+          <a:noFill/>
+        </p:spPr>
+        <p:txBody>
+          <a:bodyPr wrap="square">
+            <a:spAutoFit/>
+          </a:bodyPr>
+          <a:lstStyle/>
+          <a:p>
+            <a:pPr algn="l">
+              <a:defRPr sz="2800" b="1">
+                <a:solidFill>
+                  <a:srgbClr val="FFFFFF"/>
+                </a:solidFill>
+                <a:latin typeface="Calibri"/>
+              </a:defRPr>
+            </a:pPr>
+            <a:r>
+              <a:t>  Hydrofoil 결과 (3): End-to-End Demo</a:t>
+            </a:r>
+          </a:p>
+        </p:txBody>
+      </p:sp>
+      <p:sp>
+        <p:nvSpPr>
+          <p:cNvPr id="5" name="TextBox 4"/>
+          <p:cNvSpPr txBox="1"/>
+          <p:nvPr/>
+        </p:nvSpPr>
+        <p:spPr>
+          <a:xfrm>
+            <a:off x="457200" y="685800"/>
+            <a:ext cx="10972800" cy="365760"/>
+          </a:xfrm>
+          <a:prstGeom prst="rect">
+            <a:avLst/>
+          </a:prstGeom>
+          <a:noFill/>
+        </p:spPr>
+        <p:txBody>
+          <a:bodyPr wrap="square">
+            <a:spAutoFit/>
+          </a:bodyPr>
+          <a:lstStyle/>
+          <a:p>
+            <a:pPr algn="l">
+              <a:defRPr sz="1400" b="0">
+                <a:solidFill>
+                  <a:srgbClr val="AABBCC"/>
+                </a:solidFill>
+                <a:latin typeface="Calibri"/>
+              </a:defRPr>
+            </a:pPr>
+            <a:r>
+              <a:t>  LiDAR → WaveSplat → Feedforward → Ride Control</a:t>
+            </a:r>
+          </a:p>
+        </p:txBody>
+      </p:sp>
+      <p:sp>
+        <p:nvSpPr>
+          <p:cNvPr id="6" name="TextBox 5"/>
+          <p:cNvSpPr txBox="1"/>
+          <p:nvPr/>
+        </p:nvSpPr>
+        <p:spPr>
+          <a:xfrm>
+            <a:off x="731520" y="1371600"/>
+            <a:ext cx="5486400" cy="365760"/>
+          </a:xfrm>
+          <a:prstGeom prst="rect">
+            <a:avLst/>
+          </a:prstGeom>
+          <a:noFill/>
+        </p:spPr>
+        <p:txBody>
+          <a:bodyPr wrap="square">
+            <a:spAutoFit/>
+          </a:bodyPr>
+          <a:lstStyle/>
+          <a:p>
+            <a:pPr algn="l">
+              <a:defRPr sz="2000" b="1">
+                <a:solidFill>
+                  <a:srgbClr val="007ACC"/>
+                </a:solidFill>
+                <a:latin typeface="Calibri"/>
+              </a:defRPr>
+            </a:pPr>
+            <a:r>
+              <a:t>End-to-End Pipeline 결과</a:t>
+            </a:r>
+          </a:p>
+        </p:txBody>
+      </p:sp>
+      <p:graphicFrame>
+        <p:nvGraphicFramePr>
+          <p:cNvPr id="7" name="Table 6"/>
+          <p:cNvGraphicFramePr>
+            <a:graphicFrameLocks noGrp="1"/>
+          </p:cNvGraphicFramePr>
+          <p:nvPr/>
+        </p:nvGraphicFramePr>
+        <p:xfrm>
+          <a:off x="731520" y="1828800"/>
+          <a:ext cx="5029200" cy="2011680"/>
+        </p:xfrm>
+        <a:graphic>
+          <a:graphicData uri="http://schemas.openxmlformats.org/drawingml/2006/table">
+            <a:tbl>
+              <a:tblPr firstRow="1" bandRow="1">
+                <a:tableStyleId>{5C22544A-7EE6-4342-B048-85BDC9FD1C3A}</a:tableStyleId>
+              </a:tblPr>
+              <a:tblGrid>
+                <a:gridCol w="1676400"/>
+                <a:gridCol w="1676400"/>
+                <a:gridCol w="1676400"/>
+              </a:tblGrid>
+              <a:tr h="502920">
+                <a:tc>
+                  <a:txBody>
+                    <a:bodyPr/>
+                    <a:lstStyle/>
+                    <a:p>
+                      <a:pPr algn="ctr">
+                        <a:defRPr sz="1300" b="1">
+                          <a:solidFill>
+                            <a:srgbClr val="FFFFFF"/>
+                          </a:solidFill>
+                          <a:latin typeface="Calibri"/>
+                        </a:defRPr>
+                      </a:pPr>
+                      <a:r>
+                        <a:t>Scenario</a:t>
+                      </a:r>
+                    </a:p>
+                  </a:txBody>
+                  <a:tcPr anchor="ctr">
+                    <a:solidFill>
+                      <a:srgbClr val="1A1A2E"/>
+                    </a:solidFill>
+                  </a:tcPr>
+                </a:tc>
+                <a:tc>
+                  <a:txBody>
+                    <a:bodyPr/>
+                    <a:lstStyle/>
+                    <a:p>
+                      <a:pPr algn="ctr">
+                        <a:defRPr sz="1300" b="1">
+                          <a:solidFill>
+                            <a:srgbClr val="FFFFFF"/>
+                          </a:solidFill>
+                          <a:latin typeface="Calibri"/>
+                        </a:defRPr>
+                      </a:pPr>
+                      <a:r>
+                        <a:t>WS/GT ratio</a:t>
+                      </a:r>
+                    </a:p>
+                  </a:txBody>
+                  <a:tcPr anchor="ctr">
+                    <a:solidFill>
+                      <a:srgbClr val="1A1A2E"/>
+                    </a:solidFill>
+                  </a:tcPr>
+                </a:tc>
+                <a:tc>
+                  <a:txBody>
+                    <a:bodyPr/>
+                    <a:lstStyle/>
+                    <a:p>
+                      <a:pPr algn="ctr">
+                        <a:defRPr sz="1300" b="1">
+                          <a:solidFill>
+                            <a:srgbClr val="FFFFFF"/>
+                          </a:solidFill>
+                          <a:latin typeface="Calibri"/>
+                        </a:defRPr>
+                      </a:pPr>
+                      <a:r>
+                        <a:t>평가</a:t>
+                      </a:r>
+                    </a:p>
+                  </a:txBody>
+                  <a:tcPr anchor="ctr">
+                    <a:solidFill>
+                      <a:srgbClr val="1A1A2E"/>
+                    </a:solidFill>
+                  </a:tcPr>
+                </a:tc>
+              </a:tr>
+              <a:tr h="502920">
+                <a:tc>
+                  <a:txBody>
+                    <a:bodyPr/>
+                    <a:lstStyle/>
+                    <a:p>
+                      <a:pPr algn="ctr">
+                        <a:defRPr sz="1300">
+                          <a:solidFill>
+                            <a:srgbClr val="1A1A2E"/>
+                          </a:solidFill>
+                          <a:latin typeface="Calibri"/>
+                        </a:defRPr>
+                      </a:pPr>
+                      <a:r>
+                        <a:t>BF3 2-comp</a:t>
+                      </a:r>
+                    </a:p>
+                  </a:txBody>
+                  <a:tcPr anchor="ctr"/>
+                </a:tc>
+                <a:tc>
+                  <a:txBody>
+                    <a:bodyPr/>
+                    <a:lstStyle/>
+                    <a:p>
+                      <a:pPr algn="ctr">
+                        <a:defRPr sz="1300">
+                          <a:solidFill>
+                            <a:srgbClr val="1A1A2E"/>
+                          </a:solidFill>
+                          <a:latin typeface="Calibri"/>
+                        </a:defRPr>
+                      </a:pPr>
+                      <a:r>
+                        <a:t>96%</a:t>
+                      </a:r>
+                    </a:p>
+                  </a:txBody>
+                  <a:tcPr anchor="ctr"/>
+                </a:tc>
+                <a:tc>
+                  <a:txBody>
+                    <a:bodyPr/>
+                    <a:lstStyle/>
+                    <a:p>
+                      <a:pPr algn="ctr">
+                        <a:defRPr sz="1300">
+                          <a:solidFill>
+                            <a:srgbClr val="1A1A2E"/>
+                          </a:solidFill>
+                          <a:latin typeface="Calibri"/>
+                        </a:defRPr>
+                      </a:pPr>
+                      <a:r>
+                        <a:t>near-perfect (simple sea)</a:t>
+                      </a:r>
+                    </a:p>
+                  </a:txBody>
+                  <a:tcPr anchor="ctr"/>
+                </a:tc>
+              </a:tr>
+              <a:tr h="502920">
+                <a:tc>
+                  <a:txBody>
+                    <a:bodyPr/>
+                    <a:lstStyle/>
+                    <a:p>
+                      <a:pPr algn="ctr">
+                        <a:defRPr sz="1300">
+                          <a:solidFill>
+                            <a:srgbClr val="1A1A2E"/>
+                          </a:solidFill>
+                          <a:latin typeface="Calibri"/>
+                        </a:defRPr>
+                      </a:pPr>
+                      <a:r>
+                        <a:t>BF3 beam</a:t>
+                      </a:r>
+                    </a:p>
+                  </a:txBody>
+                  <a:tcPr anchor="ctr">
+                    <a:solidFill>
+                      <a:srgbClr val="F0F4F8"/>
+                    </a:solidFill>
+                  </a:tcPr>
+                </a:tc>
+                <a:tc>
+                  <a:txBody>
+                    <a:bodyPr/>
+                    <a:lstStyle/>
+                    <a:p>
+                      <a:pPr algn="ctr">
+                        <a:defRPr sz="1300">
+                          <a:solidFill>
+                            <a:srgbClr val="1A1A2E"/>
+                          </a:solidFill>
+                          <a:latin typeface="Calibri"/>
+                        </a:defRPr>
+                      </a:pPr>
+                      <a:r>
+                        <a:t>92%</a:t>
+                      </a:r>
+                    </a:p>
+                  </a:txBody>
+                  <a:tcPr anchor="ctr">
+                    <a:solidFill>
+                      <a:srgbClr val="F0F4F8"/>
+                    </a:solidFill>
+                  </a:tcPr>
+                </a:tc>
+                <a:tc>
+                  <a:txBody>
+                    <a:bodyPr/>
+                    <a:lstStyle/>
+                    <a:p>
+                      <a:pPr algn="ctr">
+                        <a:defRPr sz="1300">
+                          <a:solidFill>
+                            <a:srgbClr val="1A1A2E"/>
+                          </a:solidFill>
+                          <a:latin typeface="Calibri"/>
+                        </a:defRPr>
+                      </a:pPr>
+                      <a:r>
+                        <a:t>excellent</a:t>
+                      </a:r>
+                    </a:p>
+                  </a:txBody>
+                  <a:tcPr anchor="ctr">
+                    <a:solidFill>
+                      <a:srgbClr val="F0F4F8"/>
+                    </a:solidFill>
+                  </a:tcPr>
+                </a:tc>
+              </a:tr>
+              <a:tr h="502920">
+                <a:tc>
+                  <a:txBody>
+                    <a:bodyPr/>
+                    <a:lstStyle/>
+                    <a:p>
+                      <a:pPr algn="ctr">
+                        <a:defRPr sz="1300">
+                          <a:solidFill>
+                            <a:srgbClr val="1A1A2E"/>
+                          </a:solidFill>
+                          <a:latin typeface="Calibri"/>
+                        </a:defRPr>
+                      </a:pPr>
+                      <a:r>
+                        <a:t>BF4 5-comp</a:t>
+                      </a:r>
+                    </a:p>
+                  </a:txBody>
+                  <a:tcPr anchor="ctr"/>
+                </a:tc>
+                <a:tc>
+                  <a:txBody>
+                    <a:bodyPr/>
+                    <a:lstStyle/>
+                    <a:p>
+                      <a:pPr algn="ctr">
+                        <a:defRPr sz="1300">
+                          <a:solidFill>
+                            <a:srgbClr val="1A1A2E"/>
+                          </a:solidFill>
+                          <a:latin typeface="Calibri"/>
+                        </a:defRPr>
+                      </a:pPr>
+                      <a:r>
+                        <a:t>37%</a:t>
+                      </a:r>
+                    </a:p>
+                  </a:txBody>
+                  <a:tcPr anchor="ctr"/>
+                </a:tc>
+                <a:tc>
+                  <a:txBody>
+                    <a:bodyPr/>
+                    <a:lstStyle/>
+                    <a:p>
+                      <a:pPr algn="ctr">
+                        <a:defRPr sz="1300">
+                          <a:solidFill>
+                            <a:srgbClr val="1A1A2E"/>
+                          </a:solidFill>
+                          <a:latin typeface="Calibri"/>
+                        </a:defRPr>
+                      </a:pPr>
+                      <a:r>
+                        <a:t>limited (direction error)</a:t>
+                      </a:r>
+                    </a:p>
+                  </a:txBody>
+                  <a:tcPr anchor="ctr"/>
+                </a:tc>
+              </a:tr>
+            </a:tbl>
+          </a:graphicData>
+        </a:graphic>
+      </p:graphicFrame>
+      <p:sp>
+        <p:nvSpPr>
+          <p:cNvPr id="8" name="TextBox 7"/>
+          <p:cNvSpPr txBox="1"/>
+          <p:nvPr/>
+        </p:nvSpPr>
+        <p:spPr>
+          <a:xfrm>
+            <a:off x="731520" y="4114800"/>
+            <a:ext cx="5029200" cy="2286000"/>
+          </a:xfrm>
+          <a:prstGeom prst="rect">
+            <a:avLst/>
+          </a:prstGeom>
+          <a:noFill/>
+        </p:spPr>
+        <p:txBody>
+          <a:bodyPr wrap="square">
+            <a:spAutoFit/>
+          </a:bodyPr>
+          <a:lstStyle/>
+          <a:p>
+            <a:pPr>
+              <a:spcAft>
+                <a:spcPts val="600"/>
+              </a:spcAft>
+            </a:pPr>
+            <a:r>
+              <a:rPr sz="1400">
+                <a:solidFill>
+                  <a:srgbClr val="1A1A2E"/>
+                </a:solidFill>
+                <a:latin typeface="Calibri"/>
+              </a:rPr>
+              <a:t>• • BF3: WaveSplat E2E → GT의 92~96% 달성</a:t>
+            </a:r>
+          </a:p>
+          <a:p>
+            <a:pPr>
+              <a:spcAft>
+                <a:spcPts val="600"/>
+              </a:spcAft>
+            </a:pPr>
+            <a:r>
+              <a:rPr sz="1400">
+                <a:solidFill>
+                  <a:srgbClr val="1A1A2E"/>
+                </a:solidFill>
+                <a:latin typeface="Calibri"/>
+              </a:rPr>
+              <a:t>• • BF4: 37% — directional misestimation 영향</a:t>
+            </a:r>
+          </a:p>
+          <a:p>
+            <a:pPr>
+              <a:spcAft>
+                <a:spcPts val="600"/>
+              </a:spcAft>
+            </a:pPr>
+            <a:r>
+              <a:rPr sz="1400">
+                <a:solidFill>
+                  <a:srgbClr val="1A1A2E"/>
+                </a:solidFill>
+                <a:latin typeface="Calibri"/>
+              </a:rPr>
+              <a:t>•   → Dir R² = -0.25 문제가 제어에 전파</a:t>
+            </a:r>
+          </a:p>
+          <a:p>
+            <a:pPr>
+              <a:spcAft>
+                <a:spcPts val="600"/>
+              </a:spcAft>
+            </a:pPr>
+            <a:r>
+              <a:rPr sz="1400">
+                <a:solidFill>
+                  <a:srgbClr val="1A1A2E"/>
+                </a:solidFill>
+                <a:latin typeface="Calibri"/>
+              </a:rPr>
+              <a:t>• </a:t>
+            </a:r>
+          </a:p>
+          <a:p>
+            <a:pPr>
+              <a:spcAft>
+                <a:spcPts val="600"/>
+              </a:spcAft>
+            </a:pPr>
+            <a:r>
+              <a:rPr sz="1400">
+                <a:solidFill>
+                  <a:srgbClr val="1A1A2E"/>
+                </a:solidFill>
+                <a:latin typeface="Calibri"/>
+              </a:rPr>
+              <a:t>• • 핵심 발견:</a:t>
+            </a:r>
+          </a:p>
+          <a:p>
+            <a:pPr>
+              <a:spcAft>
+                <a:spcPts val="600"/>
+              </a:spcAft>
+            </a:pPr>
+            <a:r>
+              <a:rPr sz="1400">
+                <a:solidFill>
+                  <a:srgbClr val="1A1A2E"/>
+                </a:solidFill>
+                <a:latin typeface="Calibri"/>
+              </a:rPr>
+              <a:t>•   amplitude 정확도보다 direction 정확도가</a:t>
+            </a:r>
+          </a:p>
+          <a:p>
+            <a:pPr>
+              <a:spcAft>
+                <a:spcPts val="600"/>
+              </a:spcAft>
+            </a:pPr>
+            <a:r>
+              <a:rPr sz="1400">
+                <a:solidFill>
+                  <a:srgbClr val="1A1A2E"/>
+                </a:solidFill>
+                <a:latin typeface="Calibri"/>
+              </a:rPr>
+              <a:t>•   feedforward 성능에 더 중요</a:t>
+            </a:r>
+          </a:p>
+        </p:txBody>
+      </p:sp>
+      <p:pic>
+        <p:nvPicPr>
+          <p:cNvPr id="9" name="Picture 8" descr="fig_e2e_timeseries.png"/>
+          <p:cNvPicPr>
+            <a:picLocks noChangeAspect="1"/>
+          </p:cNvPicPr>
+          <p:nvPr/>
+        </p:nvPicPr>
+        <p:blipFill>
+          <a:blip r:embed="rId2"/>
+          <a:stretch>
+            <a:fillRect/>
+          </a:stretch>
+        </p:blipFill>
+        <p:spPr>
+          <a:xfrm>
+            <a:off x="6217920" y="1371600"/>
+            <a:ext cx="5486400" cy="5029200"/>
+          </a:xfrm>
+          <a:prstGeom prst="rect">
+            <a:avLst/>
+          </a:prstGeom>
+        </p:spPr>
+      </p:pic>
+      <p:sp>
+        <p:nvSpPr>
+          <p:cNvPr id="10" name="TextBox 9"/>
+          <p:cNvSpPr txBox="1"/>
+          <p:nvPr/>
+        </p:nvSpPr>
+        <p:spPr>
+          <a:xfrm>
+            <a:off x="10972800" y="6492240"/>
+            <a:ext cx="1097280" cy="274320"/>
+          </a:xfrm>
+          <a:prstGeom prst="rect">
+            <a:avLst/>
+          </a:prstGeom>
+          <a:noFill/>
+        </p:spPr>
+        <p:txBody>
+          <a:bodyPr wrap="square">
+            <a:spAutoFit/>
+          </a:bodyPr>
+          <a:lstStyle/>
+          <a:p>
+            <a:pPr algn="r">
+              <a:defRPr sz="1000" b="0">
+                <a:solidFill>
+                  <a:srgbClr val="666666"/>
+                </a:solidFill>
+                <a:latin typeface="Calibri"/>
+              </a:defRPr>
+            </a:pPr>
+            <a:r>
+              <a:t>19/23</a:t>
             </a:r>
           </a:p>
         </p:txBody>
@@ -7902,7 +10357,2408 @@
               </a:defRPr>
             </a:pPr>
             <a:r>
-              <a:t>2/16</a:t>
+              <a:t>2/23</a:t>
+            </a:r>
+          </a:p>
+        </p:txBody>
+      </p:sp>
+    </p:spTree>
+  </p:cSld>
+  <p:clrMapOvr>
+    <a:masterClrMapping/>
+  </p:clrMapOvr>
+</p:sld>
+</file>
+
+<file path=ppt/slides/slide20.xml><?xml version="1.0" encoding="utf-8"?>
+<p:sld xmlns:a="http://schemas.openxmlformats.org/drawingml/2006/main" xmlns:p="http://schemas.openxmlformats.org/presentationml/2006/main" xmlns:r="http://schemas.openxmlformats.org/officeDocument/2006/relationships">
+  <p:cSld>
+    <p:bg>
+      <p:bgPr>
+        <a:solidFill>
+          <a:srgbClr val="FFFFFF"/>
+        </a:solidFill>
+        <a:effectLst/>
+      </p:bgPr>
+    </p:bg>
+    <p:spTree>
+      <p:nvGrpSpPr>
+        <p:cNvPr id="1" name=""/>
+        <p:cNvGrpSpPr/>
+        <p:nvPr/>
+      </p:nvGrpSpPr>
+      <p:grpSpPr/>
+      <p:sp>
+        <p:nvSpPr>
+          <p:cNvPr id="2" name="Rectangle 1"/>
+          <p:cNvSpPr/>
+          <p:nvPr/>
+        </p:nvSpPr>
+        <p:spPr>
+          <a:xfrm>
+            <a:off x="0" y="0"/>
+            <a:ext cx="12191695" cy="1097280"/>
+          </a:xfrm>
+          <a:prstGeom prst="rect">
+            <a:avLst/>
+          </a:prstGeom>
+          <a:solidFill>
+            <a:srgbClr val="1A1A2E"/>
+          </a:solidFill>
+          <a:ln>
+            <a:noFill/>
+          </a:ln>
+        </p:spPr>
+        <p:style>
+          <a:lnRef idx="1">
+            <a:schemeClr val="accent1"/>
+          </a:lnRef>
+          <a:fillRef idx="3">
+            <a:schemeClr val="accent1"/>
+          </a:fillRef>
+          <a:effectRef idx="2">
+            <a:schemeClr val="accent1"/>
+          </a:effectRef>
+          <a:fontRef idx="minor">
+            <a:schemeClr val="lt1"/>
+          </a:fontRef>
+        </p:style>
+        <p:txBody>
+          <a:bodyPr rtlCol="0" anchor="ctr"/>
+          <a:lstStyle/>
+          <a:p>
+            <a:pPr algn="ctr"/>
+          </a:p>
+        </p:txBody>
+      </p:sp>
+      <p:sp>
+        <p:nvSpPr>
+          <p:cNvPr id="3" name="TextBox 2"/>
+          <p:cNvSpPr txBox="1"/>
+          <p:nvPr/>
+        </p:nvSpPr>
+        <p:spPr>
+          <a:xfrm>
+            <a:off x="457200" y="137160"/>
+            <a:ext cx="10972800" cy="457200"/>
+          </a:xfrm>
+          <a:prstGeom prst="rect">
+            <a:avLst/>
+          </a:prstGeom>
+          <a:noFill/>
+        </p:spPr>
+        <p:txBody>
+          <a:bodyPr wrap="square">
+            <a:spAutoFit/>
+          </a:bodyPr>
+          <a:lstStyle/>
+          <a:p>
+            <a:pPr algn="l">
+              <a:defRPr sz="1400" b="0">
+                <a:solidFill>
+                  <a:srgbClr val="007ACC"/>
+                </a:solidFill>
+                <a:latin typeface="Calibri"/>
+              </a:defRPr>
+            </a:pPr>
+            <a:r>
+              <a:t>  05</a:t>
+            </a:r>
+          </a:p>
+        </p:txBody>
+      </p:sp>
+      <p:sp>
+        <p:nvSpPr>
+          <p:cNvPr id="4" name="TextBox 3"/>
+          <p:cNvSpPr txBox="1"/>
+          <p:nvPr/>
+        </p:nvSpPr>
+        <p:spPr>
+          <a:xfrm>
+            <a:off x="457200" y="320040"/>
+            <a:ext cx="10972800" cy="640080"/>
+          </a:xfrm>
+          <a:prstGeom prst="rect">
+            <a:avLst/>
+          </a:prstGeom>
+          <a:noFill/>
+        </p:spPr>
+        <p:txBody>
+          <a:bodyPr wrap="square">
+            <a:spAutoFit/>
+          </a:bodyPr>
+          <a:lstStyle/>
+          <a:p>
+            <a:pPr algn="l">
+              <a:defRPr sz="2800" b="1">
+                <a:solidFill>
+                  <a:srgbClr val="FFFFFF"/>
+                </a:solidFill>
+                <a:latin typeface="Calibri"/>
+              </a:defRPr>
+            </a:pPr>
+            <a:r>
+              <a:t>  Hydrofoil 시뮬레이션 데모</a:t>
+            </a:r>
+          </a:p>
+        </p:txBody>
+      </p:sp>
+      <p:sp>
+        <p:nvSpPr>
+          <p:cNvPr id="5" name="TextBox 4"/>
+          <p:cNvSpPr txBox="1"/>
+          <p:nvPr/>
+        </p:nvSpPr>
+        <p:spPr>
+          <a:xfrm>
+            <a:off x="457200" y="685800"/>
+            <a:ext cx="10972800" cy="365760"/>
+          </a:xfrm>
+          <a:prstGeom prst="rect">
+            <a:avLst/>
+          </a:prstGeom>
+          <a:noFill/>
+        </p:spPr>
+        <p:txBody>
+          <a:bodyPr wrap="square">
+            <a:spAutoFit/>
+          </a:bodyPr>
+          <a:lstStyle/>
+          <a:p>
+            <a:pPr algn="l">
+              <a:defRPr sz="1400" b="0">
+                <a:solidFill>
+                  <a:srgbClr val="AABBCC"/>
+                </a:solidFill>
+                <a:latin typeface="Calibri"/>
+              </a:defRPr>
+            </a:pPr>
+            <a:r>
+              <a:t>  PD-only vs PD+Feedforward — BF3 Head Sea Animation</a:t>
+            </a:r>
+          </a:p>
+        </p:txBody>
+      </p:sp>
+      <p:pic>
+        <p:nvPicPr>
+          <p:cNvPr id="6" name="Picture 5" descr="_anim_first_frame.png"/>
+          <p:cNvPicPr>
+            <a:picLocks noChangeAspect="1"/>
+          </p:cNvPicPr>
+          <p:nvPr/>
+        </p:nvPicPr>
+        <p:blipFill>
+          <a:blip r:embed="rId2"/>
+          <a:stretch>
+            <a:fillRect/>
+          </a:stretch>
+        </p:blipFill>
+        <p:spPr>
+          <a:xfrm>
+            <a:off x="914400" y="1371600"/>
+            <a:ext cx="10332720" cy="4572000"/>
+          </a:xfrm>
+          <a:prstGeom prst="rect">
+            <a:avLst/>
+          </a:prstGeom>
+        </p:spPr>
+      </p:pic>
+      <p:sp>
+        <p:nvSpPr>
+          <p:cNvPr id="7" name="TextBox 6"/>
+          <p:cNvSpPr txBox="1"/>
+          <p:nvPr/>
+        </p:nvSpPr>
+        <p:spPr>
+          <a:xfrm>
+            <a:off x="914400" y="5943600"/>
+            <a:ext cx="10332720" cy="457200"/>
+          </a:xfrm>
+          <a:prstGeom prst="rect">
+            <a:avLst/>
+          </a:prstGeom>
+          <a:noFill/>
+        </p:spPr>
+        <p:txBody>
+          <a:bodyPr wrap="square">
+            <a:spAutoFit/>
+          </a:bodyPr>
+          <a:lstStyle/>
+          <a:p>
+            <a:pPr algn="ctr">
+              <a:defRPr sz="1200" b="0">
+                <a:solidFill>
+                  <a:srgbClr val="666666"/>
+                </a:solidFill>
+                <a:latin typeface="Calibri"/>
+              </a:defRPr>
+            </a:pPr>
+            <a:r>
+              <a:t>※ 실제 발표 시 GIF 파일(docs/hydrofoil_wave_animation.gif)을 삽입하여 재생</a:t>
+            </a:r>
+          </a:p>
+        </p:txBody>
+      </p:sp>
+      <p:sp>
+        <p:nvSpPr>
+          <p:cNvPr id="8" name="TextBox 7"/>
+          <p:cNvSpPr txBox="1"/>
+          <p:nvPr/>
+        </p:nvSpPr>
+        <p:spPr>
+          <a:xfrm>
+            <a:off x="10972800" y="6492240"/>
+            <a:ext cx="1097280" cy="274320"/>
+          </a:xfrm>
+          <a:prstGeom prst="rect">
+            <a:avLst/>
+          </a:prstGeom>
+          <a:noFill/>
+        </p:spPr>
+        <p:txBody>
+          <a:bodyPr wrap="square">
+            <a:spAutoFit/>
+          </a:bodyPr>
+          <a:lstStyle/>
+          <a:p>
+            <a:pPr algn="r">
+              <a:defRPr sz="1000" b="0">
+                <a:solidFill>
+                  <a:srgbClr val="666666"/>
+                </a:solidFill>
+                <a:latin typeface="Calibri"/>
+              </a:defRPr>
+            </a:pPr>
+            <a:r>
+              <a:t>20/23</a:t>
+            </a:r>
+          </a:p>
+        </p:txBody>
+      </p:sp>
+    </p:spTree>
+  </p:cSld>
+  <p:clrMapOvr>
+    <a:masterClrMapping/>
+  </p:clrMapOvr>
+</p:sld>
+</file>
+
+<file path=ppt/slides/slide21.xml><?xml version="1.0" encoding="utf-8"?>
+<p:sld xmlns:a="http://schemas.openxmlformats.org/drawingml/2006/main" xmlns:p="http://schemas.openxmlformats.org/presentationml/2006/main" xmlns:r="http://schemas.openxmlformats.org/officeDocument/2006/relationships">
+  <p:cSld>
+    <p:bg>
+      <p:bgPr>
+        <a:solidFill>
+          <a:srgbClr val="FFFFFF"/>
+        </a:solidFill>
+        <a:effectLst/>
+      </p:bgPr>
+    </p:bg>
+    <p:spTree>
+      <p:nvGrpSpPr>
+        <p:cNvPr id="1" name=""/>
+        <p:cNvGrpSpPr/>
+        <p:nvPr/>
+      </p:nvGrpSpPr>
+      <p:grpSpPr/>
+      <p:sp>
+        <p:nvSpPr>
+          <p:cNvPr id="2" name="Rectangle 1"/>
+          <p:cNvSpPr/>
+          <p:nvPr/>
+        </p:nvSpPr>
+        <p:spPr>
+          <a:xfrm>
+            <a:off x="0" y="0"/>
+            <a:ext cx="12191695" cy="1097280"/>
+          </a:xfrm>
+          <a:prstGeom prst="rect">
+            <a:avLst/>
+          </a:prstGeom>
+          <a:solidFill>
+            <a:srgbClr val="1A1A2E"/>
+          </a:solidFill>
+          <a:ln>
+            <a:noFill/>
+          </a:ln>
+        </p:spPr>
+        <p:style>
+          <a:lnRef idx="1">
+            <a:schemeClr val="accent1"/>
+          </a:lnRef>
+          <a:fillRef idx="3">
+            <a:schemeClr val="accent1"/>
+          </a:fillRef>
+          <a:effectRef idx="2">
+            <a:schemeClr val="accent1"/>
+          </a:effectRef>
+          <a:fontRef idx="minor">
+            <a:schemeClr val="lt1"/>
+          </a:fontRef>
+        </p:style>
+        <p:txBody>
+          <a:bodyPr rtlCol="0" anchor="ctr"/>
+          <a:lstStyle/>
+          <a:p>
+            <a:pPr algn="ctr"/>
+          </a:p>
+        </p:txBody>
+      </p:sp>
+      <p:sp>
+        <p:nvSpPr>
+          <p:cNvPr id="3" name="TextBox 2"/>
+          <p:cNvSpPr txBox="1"/>
+          <p:nvPr/>
+        </p:nvSpPr>
+        <p:spPr>
+          <a:xfrm>
+            <a:off x="457200" y="137160"/>
+            <a:ext cx="10972800" cy="457200"/>
+          </a:xfrm>
+          <a:prstGeom prst="rect">
+            <a:avLst/>
+          </a:prstGeom>
+          <a:noFill/>
+        </p:spPr>
+        <p:txBody>
+          <a:bodyPr wrap="square">
+            <a:spAutoFit/>
+          </a:bodyPr>
+          <a:lstStyle/>
+          <a:p>
+            <a:pPr algn="l">
+              <a:defRPr sz="1400" b="0">
+                <a:solidFill>
+                  <a:srgbClr val="007ACC"/>
+                </a:solidFill>
+                <a:latin typeface="Calibri"/>
+              </a:defRPr>
+            </a:pPr>
+            <a:r>
+              <a:t>  06</a:t>
+            </a:r>
+          </a:p>
+        </p:txBody>
+      </p:sp>
+      <p:sp>
+        <p:nvSpPr>
+          <p:cNvPr id="4" name="TextBox 3"/>
+          <p:cNvSpPr txBox="1"/>
+          <p:nvPr/>
+        </p:nvSpPr>
+        <p:spPr>
+          <a:xfrm>
+            <a:off x="457200" y="320040"/>
+            <a:ext cx="10972800" cy="640080"/>
+          </a:xfrm>
+          <a:prstGeom prst="rect">
+            <a:avLst/>
+          </a:prstGeom>
+          <a:noFill/>
+        </p:spPr>
+        <p:txBody>
+          <a:bodyPr wrap="square">
+            <a:spAutoFit/>
+          </a:bodyPr>
+          <a:lstStyle/>
+          <a:p>
+            <a:pPr algn="l">
+              <a:defRPr sz="2800" b="1">
+                <a:solidFill>
+                  <a:srgbClr val="FFFFFF"/>
+                </a:solidFill>
+                <a:latin typeface="Calibri"/>
+              </a:defRPr>
+            </a:pPr>
+            <a:r>
+              <a:t>  한계와 향후 과제</a:t>
+            </a:r>
+          </a:p>
+        </p:txBody>
+      </p:sp>
+      <p:sp>
+        <p:nvSpPr>
+          <p:cNvPr id="5" name="TextBox 4"/>
+          <p:cNvSpPr txBox="1"/>
+          <p:nvPr/>
+        </p:nvSpPr>
+        <p:spPr>
+          <a:xfrm>
+            <a:off x="457200" y="685800"/>
+            <a:ext cx="10972800" cy="365760"/>
+          </a:xfrm>
+          <a:prstGeom prst="rect">
+            <a:avLst/>
+          </a:prstGeom>
+          <a:noFill/>
+        </p:spPr>
+        <p:txBody>
+          <a:bodyPr wrap="square">
+            <a:spAutoFit/>
+          </a:bodyPr>
+          <a:lstStyle/>
+          <a:p>
+            <a:pPr algn="l">
+              <a:defRPr sz="1400" b="0">
+                <a:solidFill>
+                  <a:srgbClr val="AABBCC"/>
+                </a:solidFill>
+                <a:latin typeface="Calibri"/>
+              </a:defRPr>
+            </a:pPr>
+            <a:r>
+              <a:t>  Honest Limitations</a:t>
+            </a:r>
+          </a:p>
+        </p:txBody>
+      </p:sp>
+      <p:sp>
+        <p:nvSpPr>
+          <p:cNvPr id="6" name="TextBox 5"/>
+          <p:cNvSpPr txBox="1"/>
+          <p:nvPr/>
+        </p:nvSpPr>
+        <p:spPr>
+          <a:xfrm>
+            <a:off x="731520" y="1645920"/>
+            <a:ext cx="5486400" cy="4572000"/>
+          </a:xfrm>
+          <a:prstGeom prst="rect">
+            <a:avLst/>
+          </a:prstGeom>
+          <a:noFill/>
+        </p:spPr>
+        <p:txBody>
+          <a:bodyPr wrap="square">
+            <a:spAutoFit/>
+          </a:bodyPr>
+          <a:lstStyle/>
+          <a:p>
+            <a:pPr>
+              <a:spcAft>
+                <a:spcPts val="600"/>
+              </a:spcAft>
+            </a:pPr>
+            <a:r>
+              <a:rPr sz="1300">
+                <a:solidFill>
+                  <a:srgbClr val="1A1A2E"/>
+                </a:solidFill>
+                <a:latin typeface="Calibri"/>
+              </a:rPr>
+              <a:t>• • WaveSplat 추정 한계:</a:t>
+            </a:r>
+          </a:p>
+          <a:p>
+            <a:pPr>
+              <a:spcAft>
+                <a:spcPts val="600"/>
+              </a:spcAft>
+            </a:pPr>
+            <a:r>
+              <a:rPr sz="1300">
+                <a:solidFill>
+                  <a:srgbClr val="1A1A2E"/>
+                </a:solidFill>
+                <a:latin typeface="Calibri"/>
+              </a:rPr>
+              <a:t>• •   VR = 0.66 → 진폭 34% 과소추정 (pruning 대가)</a:t>
+            </a:r>
+          </a:p>
+          <a:p>
+            <a:pPr>
+              <a:spcAft>
+                <a:spcPts val="600"/>
+              </a:spcAft>
+            </a:pPr>
+            <a:r>
+              <a:rPr sz="1300">
+                <a:solidFill>
+                  <a:srgbClr val="1A1A2E"/>
+                </a:solidFill>
+                <a:latin typeface="Calibri"/>
+              </a:rPr>
+              <a:t>• •   Dir R² = −0.25 → 방향 추정이 가장 큰 약점</a:t>
+            </a:r>
+          </a:p>
+          <a:p>
+            <a:pPr>
+              <a:spcAft>
+                <a:spcPts val="600"/>
+              </a:spcAft>
+            </a:pPr>
+            <a:r>
+              <a:rPr sz="1300">
+                <a:solidFill>
+                  <a:srgbClr val="1A1A2E"/>
+                </a:solidFill>
+                <a:latin typeface="Calibri"/>
+              </a:rPr>
+              <a:t>• •     → 개선: multi-frame 방향 voting / 2D k-space 정규화</a:t>
+            </a:r>
+          </a:p>
+          <a:p>
+            <a:pPr>
+              <a:spcAft>
+                <a:spcPts val="600"/>
+              </a:spcAft>
+            </a:pPr>
+            <a:r>
+              <a:rPr sz="1300">
+                <a:solidFill>
+                  <a:srgbClr val="1A1A2E"/>
+                </a:solidFill>
+                <a:latin typeface="Calibri"/>
+              </a:rPr>
+              <a:t>• •   진폭 감쇠 (Adam momentum 부호 진동)</a:t>
+            </a:r>
+          </a:p>
+          <a:p>
+            <a:pPr>
+              <a:spcAft>
+                <a:spcPts val="600"/>
+              </a:spcAft>
+            </a:pPr>
+            <a:r>
+              <a:rPr sz="1300">
+                <a:solidFill>
+                  <a:srgbClr val="1A1A2E"/>
+                </a:solidFill>
+                <a:latin typeface="Calibri"/>
+              </a:rPr>
+              <a:t>• •   Nₜᵣᵤₑ ≥ 30 이상 복잡 해상 → 성분 수 한계</a:t>
+            </a:r>
+          </a:p>
+          <a:p>
+            <a:pPr>
+              <a:spcAft>
+                <a:spcPts val="600"/>
+              </a:spcAft>
+            </a:pPr>
+            <a:r>
+              <a:rPr sz="1300">
+                <a:solidFill>
+                  <a:srgbClr val="1A1A2E"/>
+                </a:solidFill>
+                <a:latin typeface="Calibri"/>
+              </a:rPr>
+              <a:t>• </a:t>
+            </a:r>
+          </a:p>
+          <a:p>
+            <a:pPr>
+              <a:spcAft>
+                <a:spcPts val="600"/>
+              </a:spcAft>
+            </a:pPr>
+            <a:r>
+              <a:rPr sz="1300">
+                <a:solidFill>
+                  <a:srgbClr val="1A1A2E"/>
+                </a:solidFill>
+                <a:latin typeface="Calibri"/>
+              </a:rPr>
+              <a:t>• • Hydrofoil 제어 한계:</a:t>
+            </a:r>
+          </a:p>
+          <a:p>
+            <a:pPr>
+              <a:spcAft>
+                <a:spcPts val="600"/>
+              </a:spcAft>
+            </a:pPr>
+            <a:r>
+              <a:rPr sz="1300">
+                <a:solidFill>
+                  <a:srgbClr val="1A1A2E"/>
+                </a:solidFill>
+                <a:latin typeface="Calibri"/>
+              </a:rPr>
+              <a:t>• •   BF4 E2E → 37% (direction error 전파)</a:t>
+            </a:r>
+          </a:p>
+          <a:p>
+            <a:pPr>
+              <a:spcAft>
+                <a:spcPts val="600"/>
+              </a:spcAft>
+            </a:pPr>
+            <a:r>
+              <a:rPr sz="1300">
+                <a:solidFill>
+                  <a:srgbClr val="1A1A2E"/>
+                </a:solidFill>
+                <a:latin typeface="Calibri"/>
+              </a:rPr>
+              <a:t>• •   2DOF (heave+pitch): roll은 별도 roll foil 담당 구조</a:t>
+            </a:r>
+          </a:p>
+          <a:p>
+            <a:pPr>
+              <a:spcAft>
+                <a:spcPts val="600"/>
+              </a:spcAft>
+            </a:pPr>
+            <a:r>
+              <a:rPr sz="1300">
+                <a:solidFill>
+                  <a:srgbClr val="1A1A2E"/>
+                </a:solidFill>
+                <a:latin typeface="Calibri"/>
+              </a:rPr>
+              <a:t>• •   선형 foil model (ventilation 간소화)</a:t>
+            </a:r>
+          </a:p>
+          <a:p>
+            <a:pPr>
+              <a:spcAft>
+                <a:spcPts val="600"/>
+              </a:spcAft>
+            </a:pPr>
+            <a:r>
+              <a:rPr sz="1300">
+                <a:solidFill>
+                  <a:srgbClr val="1A1A2E"/>
+                </a:solidFill>
+                <a:latin typeface="Calibri"/>
+              </a:rPr>
+              <a:t>• </a:t>
+            </a:r>
+          </a:p>
+          <a:p>
+            <a:pPr>
+              <a:spcAft>
+                <a:spcPts val="600"/>
+              </a:spcAft>
+            </a:pPr>
+            <a:r>
+              <a:rPr sz="1300">
+                <a:solidFill>
+                  <a:srgbClr val="1A1A2E"/>
+                </a:solidFill>
+                <a:latin typeface="Calibri"/>
+              </a:rPr>
+              <a:t>• • 공통 한계:</a:t>
+            </a:r>
+          </a:p>
+          <a:p>
+            <a:pPr>
+              <a:spcAft>
+                <a:spcPts val="600"/>
+              </a:spcAft>
+            </a:pPr>
+            <a:r>
+              <a:rPr sz="1300">
+                <a:solidFill>
+                  <a:srgbClr val="1A1A2E"/>
+                </a:solidFill>
+                <a:latin typeface="Calibri"/>
+              </a:rPr>
+              <a:t>• •   시뮬레이션 전용 → 실측 검증 필요</a:t>
+            </a:r>
+          </a:p>
+          <a:p>
+            <a:pPr>
+              <a:spcAft>
+                <a:spcPts val="600"/>
+              </a:spcAft>
+            </a:pPr>
+            <a:r>
+              <a:rPr sz="1300">
+                <a:solidFill>
+                  <a:srgbClr val="1A1A2E"/>
+                </a:solidFill>
+                <a:latin typeface="Calibri"/>
+              </a:rPr>
+              <a:t>• •   선형 파도 모델 → Stokes-2+ 미반영</a:t>
+            </a:r>
+          </a:p>
+          <a:p>
+            <a:pPr>
+              <a:spcAft>
+                <a:spcPts val="600"/>
+              </a:spcAft>
+            </a:pPr>
+            <a:r>
+              <a:rPr sz="1300">
+                <a:solidFill>
+                  <a:srgbClr val="1A1A2E"/>
+                </a:solidFill>
+                <a:latin typeface="Calibri"/>
+              </a:rPr>
+              <a:t>• •   해류/바람 변화에 따른 k 천이 미추정</a:t>
+            </a:r>
+          </a:p>
+        </p:txBody>
+      </p:sp>
+      <p:sp>
+        <p:nvSpPr>
+          <p:cNvPr id="7" name="TextBox 6"/>
+          <p:cNvSpPr txBox="1"/>
+          <p:nvPr/>
+        </p:nvSpPr>
+        <p:spPr>
+          <a:xfrm>
+            <a:off x="6858000" y="1371600"/>
+            <a:ext cx="4846320" cy="365760"/>
+          </a:xfrm>
+          <a:prstGeom prst="rect">
+            <a:avLst/>
+          </a:prstGeom>
+          <a:noFill/>
+        </p:spPr>
+        <p:txBody>
+          <a:bodyPr wrap="square">
+            <a:spAutoFit/>
+          </a:bodyPr>
+          <a:lstStyle/>
+          <a:p>
+            <a:pPr algn="l">
+              <a:defRPr sz="2000" b="1">
+                <a:solidFill>
+                  <a:srgbClr val="007ACC"/>
+                </a:solidFill>
+                <a:latin typeface="Calibri"/>
+              </a:defRPr>
+            </a:pPr>
+            <a:r>
+              <a:t>전체 Contributions (논문 1+2)</a:t>
+            </a:r>
+          </a:p>
+        </p:txBody>
+      </p:sp>
+      <p:sp>
+        <p:nvSpPr>
+          <p:cNvPr id="8" name="TextBox 7"/>
+          <p:cNvSpPr txBox="1"/>
+          <p:nvPr/>
+        </p:nvSpPr>
+        <p:spPr>
+          <a:xfrm>
+            <a:off x="6858000" y="1828800"/>
+            <a:ext cx="4846320" cy="4114800"/>
+          </a:xfrm>
+          <a:prstGeom prst="rect">
+            <a:avLst/>
+          </a:prstGeom>
+          <a:noFill/>
+        </p:spPr>
+        <p:txBody>
+          <a:bodyPr wrap="square">
+            <a:spAutoFit/>
+          </a:bodyPr>
+          <a:lstStyle/>
+          <a:p>
+            <a:pPr>
+              <a:spcAft>
+                <a:spcPts val="600"/>
+              </a:spcAft>
+            </a:pPr>
+            <a:r>
+              <a:rPr sz="1200">
+                <a:solidFill>
+                  <a:srgbClr val="1A1A2E"/>
+                </a:solidFill>
+                <a:latin typeface="Calibri"/>
+              </a:rPr>
+              <a:t>• • [논문1] ❶ Grid-free spectral 파면 추정</a:t>
+            </a:r>
+          </a:p>
+          <a:p>
+            <a:pPr>
+              <a:spcAft>
+                <a:spcPts val="600"/>
+              </a:spcAft>
+            </a:pPr>
+            <a:r>
+              <a:rPr sz="1200">
+                <a:solidFill>
+                  <a:srgbClr val="1A1A2E"/>
+                </a:solidFill>
+                <a:latin typeface="Calibri"/>
+              </a:rPr>
+              <a:t>• • [논문1] ❷ Dispersion hard constraint (5N→4N)</a:t>
+            </a:r>
+          </a:p>
+          <a:p>
+            <a:pPr>
+              <a:spcAft>
+                <a:spcPts val="600"/>
+              </a:spcAft>
+            </a:pPr>
+            <a:r>
+              <a:rPr sz="1200">
+                <a:solidFill>
+                  <a:srgbClr val="1A1A2E"/>
+                </a:solidFill>
+                <a:latin typeface="Calibri"/>
+              </a:rPr>
+              <a:t>• • [논문1] ❸ Adaptive N (pruning + growth)</a:t>
+            </a:r>
+          </a:p>
+          <a:p>
+            <a:pPr>
+              <a:spcAft>
+                <a:spcPts val="600"/>
+              </a:spcAft>
+            </a:pPr>
+            <a:r>
+              <a:rPr sz="1200">
+                <a:solidFill>
+                  <a:srgbClr val="1A1A2E"/>
+                </a:solidFill>
+                <a:latin typeface="Calibri"/>
+              </a:rPr>
+              <a:t>• • [논문1] ❹ Fresnel confidence weighting</a:t>
+            </a:r>
+          </a:p>
+          <a:p>
+            <a:pPr>
+              <a:spcAft>
+                <a:spcPts val="600"/>
+              </a:spcAft>
+            </a:pPr>
+            <a:r>
+              <a:rPr sz="1200">
+                <a:solidFill>
+                  <a:srgbClr val="1A1A2E"/>
+                </a:solidFill>
+                <a:latin typeface="Calibri"/>
+              </a:rPr>
+              <a:t>• • [논문1] ❺ Pre-specified 6-metric panel</a:t>
+            </a:r>
+          </a:p>
+          <a:p>
+            <a:pPr>
+              <a:spcAft>
+                <a:spcPts val="600"/>
+              </a:spcAft>
+            </a:pPr>
+            <a:r>
+              <a:rPr sz="1200">
+                <a:solidFill>
+                  <a:srgbClr val="1A1A2E"/>
+                </a:solidFill>
+                <a:latin typeface="Calibri"/>
+              </a:rPr>
+              <a:t>• • [논문1] ❻ 24-config ETKF sweep (fair baseline)</a:t>
+            </a:r>
+          </a:p>
+          <a:p>
+            <a:pPr>
+              <a:spcAft>
+                <a:spcPts val="600"/>
+              </a:spcAft>
+            </a:pPr>
+            <a:r>
+              <a:rPr sz="1200">
+                <a:solidFill>
+                  <a:srgbClr val="1A1A2E"/>
+                </a:solidFill>
+                <a:latin typeface="Calibri"/>
+              </a:rPr>
+              <a:t>• • [논문1] ❼ Spectral accuracy + Sparse robustness + Forecast</a:t>
+            </a:r>
+          </a:p>
+          <a:p>
+            <a:pPr>
+              <a:spcAft>
+                <a:spcPts val="600"/>
+              </a:spcAft>
+            </a:pPr>
+            <a:r>
+              <a:rPr sz="1200">
+                <a:solidFill>
+                  <a:srgbClr val="1A1A2E"/>
+                </a:solidFill>
+                <a:latin typeface="Calibri"/>
+              </a:rPr>
+              <a:t>• </a:t>
+            </a:r>
+          </a:p>
+          <a:p>
+            <a:pPr>
+              <a:spcAft>
+                <a:spcPts val="600"/>
+              </a:spcAft>
+            </a:pPr>
+            <a:r>
+              <a:rPr sz="1200">
+                <a:solidFill>
+                  <a:srgbClr val="1A1A2E"/>
+                </a:solidFill>
+                <a:latin typeface="Calibri"/>
+              </a:rPr>
+              <a:t>• • [논문2] ❽ Dual-actuator wave-preview FF architecture</a:t>
+            </a:r>
+          </a:p>
+          <a:p>
+            <a:pPr>
+              <a:spcAft>
+                <a:spcPts val="600"/>
+              </a:spcAft>
+            </a:pPr>
+            <a:r>
+              <a:rPr sz="1200">
+                <a:solidFill>
+                  <a:srgbClr val="1A1A2E"/>
+                </a:solidFill>
+                <a:latin typeface="Calibri"/>
+              </a:rPr>
+              <a:t>• • [논문2] ❾ nRMSE tolerance + preview horizon 설계 지침</a:t>
+            </a:r>
+          </a:p>
+          <a:p>
+            <a:pPr>
+              <a:spcAft>
+                <a:spcPts val="600"/>
+              </a:spcAft>
+            </a:pPr>
+            <a:r>
+              <a:rPr sz="1200">
+                <a:solidFill>
+                  <a:srgbClr val="1A1A2E"/>
+                </a:solidFill>
+                <a:latin typeface="Calibri"/>
+              </a:rPr>
+              <a:t>• • [논문2] ❿ E2E LiDAR→추정→제어 파이프라인 실증</a:t>
+            </a:r>
+          </a:p>
+        </p:txBody>
+      </p:sp>
+      <p:sp>
+        <p:nvSpPr>
+          <p:cNvPr id="9" name="Rounded Rectangle 8"/>
+          <p:cNvSpPr/>
+          <p:nvPr/>
+        </p:nvSpPr>
+        <p:spPr>
+          <a:xfrm>
+            <a:off x="731520" y="5486400"/>
+            <a:ext cx="10698480" cy="914400"/>
+          </a:xfrm>
+          <a:prstGeom prst="roundRect">
+            <a:avLst/>
+          </a:prstGeom>
+          <a:solidFill>
+            <a:srgbClr val="F0F4F8"/>
+          </a:solidFill>
+          <a:ln>
+            <a:solidFill>
+              <a:srgbClr val="007ACC"/>
+            </a:solidFill>
+          </a:ln>
+        </p:spPr>
+        <p:style>
+          <a:lnRef idx="1">
+            <a:schemeClr val="accent1"/>
+          </a:lnRef>
+          <a:fillRef idx="3">
+            <a:schemeClr val="accent1"/>
+          </a:fillRef>
+          <a:effectRef idx="2">
+            <a:schemeClr val="accent1"/>
+          </a:effectRef>
+          <a:fontRef idx="minor">
+            <a:schemeClr val="lt1"/>
+          </a:fontRef>
+        </p:style>
+        <p:txBody>
+          <a:bodyPr rtlCol="0" anchor="ctr" wrap="square"/>
+          <a:lstStyle/>
+          <a:p>
+            <a:pPr algn="ctr">
+              <a:defRPr sz="1600" b="1">
+                <a:solidFill>
+                  <a:srgbClr val="1A1A2E"/>
+                </a:solidFill>
+              </a:defRPr>
+            </a:pPr>
+            <a:r>
+              <a:t>WaveSplat: nRMSE 30.1%↓, ~10× faster, SS only+  |  Hydrofoil: aRMS 11~41%↓, BF3 E2E 92~96%</a:t>
+            </a:r>
+          </a:p>
+        </p:txBody>
+      </p:sp>
+      <p:sp>
+        <p:nvSpPr>
+          <p:cNvPr id="10" name="TextBox 9"/>
+          <p:cNvSpPr txBox="1"/>
+          <p:nvPr/>
+        </p:nvSpPr>
+        <p:spPr>
+          <a:xfrm>
+            <a:off x="10972800" y="6492240"/>
+            <a:ext cx="1097280" cy="274320"/>
+          </a:xfrm>
+          <a:prstGeom prst="rect">
+            <a:avLst/>
+          </a:prstGeom>
+          <a:noFill/>
+        </p:spPr>
+        <p:txBody>
+          <a:bodyPr wrap="square">
+            <a:spAutoFit/>
+          </a:bodyPr>
+          <a:lstStyle/>
+          <a:p>
+            <a:pPr algn="r">
+              <a:defRPr sz="1000" b="0">
+                <a:solidFill>
+                  <a:srgbClr val="666666"/>
+                </a:solidFill>
+                <a:latin typeface="Calibri"/>
+              </a:defRPr>
+            </a:pPr>
+            <a:r>
+              <a:t>21/23</a:t>
+            </a:r>
+          </a:p>
+        </p:txBody>
+      </p:sp>
+    </p:spTree>
+  </p:cSld>
+  <p:clrMapOvr>
+    <a:masterClrMapping/>
+  </p:clrMapOvr>
+</p:sld>
+</file>
+
+<file path=ppt/slides/slide22.xml><?xml version="1.0" encoding="utf-8"?>
+<p:sld xmlns:a="http://schemas.openxmlformats.org/drawingml/2006/main" xmlns:p="http://schemas.openxmlformats.org/presentationml/2006/main" xmlns:r="http://schemas.openxmlformats.org/officeDocument/2006/relationships">
+  <p:cSld>
+    <p:bg>
+      <p:bgPr>
+        <a:solidFill>
+          <a:srgbClr val="FFFFFF"/>
+        </a:solidFill>
+        <a:effectLst/>
+      </p:bgPr>
+    </p:bg>
+    <p:spTree>
+      <p:nvGrpSpPr>
+        <p:cNvPr id="1" name=""/>
+        <p:cNvGrpSpPr/>
+        <p:nvPr/>
+      </p:nvGrpSpPr>
+      <p:grpSpPr/>
+      <p:sp>
+        <p:nvSpPr>
+          <p:cNvPr id="2" name="Rectangle 1"/>
+          <p:cNvSpPr/>
+          <p:nvPr/>
+        </p:nvSpPr>
+        <p:spPr>
+          <a:xfrm>
+            <a:off x="0" y="0"/>
+            <a:ext cx="12191695" cy="1097280"/>
+          </a:xfrm>
+          <a:prstGeom prst="rect">
+            <a:avLst/>
+          </a:prstGeom>
+          <a:solidFill>
+            <a:srgbClr val="1A1A2E"/>
+          </a:solidFill>
+          <a:ln>
+            <a:noFill/>
+          </a:ln>
+        </p:spPr>
+        <p:style>
+          <a:lnRef idx="1">
+            <a:schemeClr val="accent1"/>
+          </a:lnRef>
+          <a:fillRef idx="3">
+            <a:schemeClr val="accent1"/>
+          </a:fillRef>
+          <a:effectRef idx="2">
+            <a:schemeClr val="accent1"/>
+          </a:effectRef>
+          <a:fontRef idx="minor">
+            <a:schemeClr val="lt1"/>
+          </a:fontRef>
+        </p:style>
+        <p:txBody>
+          <a:bodyPr rtlCol="0" anchor="ctr"/>
+          <a:lstStyle/>
+          <a:p>
+            <a:pPr algn="ctr"/>
+          </a:p>
+        </p:txBody>
+      </p:sp>
+      <p:sp>
+        <p:nvSpPr>
+          <p:cNvPr id="3" name="TextBox 2"/>
+          <p:cNvSpPr txBox="1"/>
+          <p:nvPr/>
+        </p:nvSpPr>
+        <p:spPr>
+          <a:xfrm>
+            <a:off x="457200" y="137160"/>
+            <a:ext cx="10972800" cy="457200"/>
+          </a:xfrm>
+          <a:prstGeom prst="rect">
+            <a:avLst/>
+          </a:prstGeom>
+          <a:noFill/>
+        </p:spPr>
+        <p:txBody>
+          <a:bodyPr wrap="square">
+            <a:spAutoFit/>
+          </a:bodyPr>
+          <a:lstStyle/>
+          <a:p>
+            <a:pPr algn="l">
+              <a:defRPr sz="1400" b="0">
+                <a:solidFill>
+                  <a:srgbClr val="007ACC"/>
+                </a:solidFill>
+                <a:latin typeface="Calibri"/>
+              </a:defRPr>
+            </a:pPr>
+            <a:r>
+              <a:t>  07</a:t>
+            </a:r>
+          </a:p>
+        </p:txBody>
+      </p:sp>
+      <p:sp>
+        <p:nvSpPr>
+          <p:cNvPr id="4" name="TextBox 3"/>
+          <p:cNvSpPr txBox="1"/>
+          <p:nvPr/>
+        </p:nvSpPr>
+        <p:spPr>
+          <a:xfrm>
+            <a:off x="457200" y="320040"/>
+            <a:ext cx="10972800" cy="640080"/>
+          </a:xfrm>
+          <a:prstGeom prst="rect">
+            <a:avLst/>
+          </a:prstGeom>
+          <a:noFill/>
+        </p:spPr>
+        <p:txBody>
+          <a:bodyPr wrap="square">
+            <a:spAutoFit/>
+          </a:bodyPr>
+          <a:lstStyle/>
+          <a:p>
+            <a:pPr algn="l">
+              <a:defRPr sz="2800" b="1">
+                <a:solidFill>
+                  <a:srgbClr val="FFFFFF"/>
+                </a:solidFill>
+                <a:latin typeface="Calibri"/>
+              </a:defRPr>
+            </a:pPr>
+            <a:r>
+              <a:t>  학위논문 구조</a:t>
+            </a:r>
+          </a:p>
+        </p:txBody>
+      </p:sp>
+      <p:sp>
+        <p:nvSpPr>
+          <p:cNvPr id="5" name="TextBox 4"/>
+          <p:cNvSpPr txBox="1"/>
+          <p:nvPr/>
+        </p:nvSpPr>
+        <p:spPr>
+          <a:xfrm>
+            <a:off x="457200" y="685800"/>
+            <a:ext cx="10972800" cy="365760"/>
+          </a:xfrm>
+          <a:prstGeom prst="rect">
+            <a:avLst/>
+          </a:prstGeom>
+          <a:noFill/>
+        </p:spPr>
+        <p:txBody>
+          <a:bodyPr wrap="square">
+            <a:spAutoFit/>
+          </a:bodyPr>
+          <a:lstStyle/>
+          <a:p>
+            <a:pPr algn="l">
+              <a:defRPr sz="1400" b="0">
+                <a:solidFill>
+                  <a:srgbClr val="AABBCC"/>
+                </a:solidFill>
+                <a:latin typeface="Calibri"/>
+              </a:defRPr>
+            </a:pPr>
+            <a:r>
+              <a:t>  선박 탑재 LiDAR 기반 실시간 파랑장 추정과 그 제어 응용</a:t>
+            </a:r>
+          </a:p>
+        </p:txBody>
+      </p:sp>
+      <p:sp>
+        <p:nvSpPr>
+          <p:cNvPr id="6" name="TextBox 5"/>
+          <p:cNvSpPr txBox="1"/>
+          <p:nvPr/>
+        </p:nvSpPr>
+        <p:spPr>
+          <a:xfrm>
+            <a:off x="731520" y="1371600"/>
+            <a:ext cx="5303520" cy="365760"/>
+          </a:xfrm>
+          <a:prstGeom prst="rect">
+            <a:avLst/>
+          </a:prstGeom>
+          <a:noFill/>
+        </p:spPr>
+        <p:txBody>
+          <a:bodyPr wrap="square">
+            <a:spAutoFit/>
+          </a:bodyPr>
+          <a:lstStyle/>
+          <a:p>
+            <a:pPr algn="l">
+              <a:defRPr sz="2200" b="1">
+                <a:solidFill>
+                  <a:srgbClr val="007ACC"/>
+                </a:solidFill>
+                <a:latin typeface="Calibri"/>
+              </a:defRPr>
+            </a:pPr>
+            <a:r>
+              <a:t>학위논문 목차</a:t>
+            </a:r>
+          </a:p>
+        </p:txBody>
+      </p:sp>
+      <p:sp>
+        <p:nvSpPr>
+          <p:cNvPr id="7" name="TextBox 6"/>
+          <p:cNvSpPr txBox="1"/>
+          <p:nvPr/>
+        </p:nvSpPr>
+        <p:spPr>
+          <a:xfrm>
+            <a:off x="731520" y="1828800"/>
+            <a:ext cx="5303520" cy="4114800"/>
+          </a:xfrm>
+          <a:prstGeom prst="rect">
+            <a:avLst/>
+          </a:prstGeom>
+          <a:noFill/>
+        </p:spPr>
+        <p:txBody>
+          <a:bodyPr wrap="square">
+            <a:spAutoFit/>
+          </a:bodyPr>
+          <a:lstStyle/>
+          <a:p>
+            <a:pPr>
+              <a:spcAft>
+                <a:spcPts val="600"/>
+              </a:spcAft>
+            </a:pPr>
+            <a:r>
+              <a:rPr sz="1400">
+                <a:solidFill>
+                  <a:srgbClr val="1A1A2E"/>
+                </a:solidFill>
+                <a:latin typeface="Calibri"/>
+              </a:rPr>
+              <a:t>• • Ch.1 서론: 연구 배경, 목적, 범위</a:t>
+            </a:r>
+          </a:p>
+          <a:p>
+            <a:pPr>
+              <a:spcAft>
+                <a:spcPts val="600"/>
+              </a:spcAft>
+            </a:pPr>
+            <a:r>
+              <a:rPr sz="1400">
+                <a:solidFill>
+                  <a:srgbClr val="1A1A2E"/>
+                </a:solidFill>
+                <a:latin typeface="Calibri"/>
+              </a:rPr>
+              <a:t>• • Ch.2 문헌 조사: 파랑 추정 + 제어 선행연구</a:t>
+            </a:r>
+          </a:p>
+          <a:p>
+            <a:pPr>
+              <a:spcAft>
+                <a:spcPts val="600"/>
+              </a:spcAft>
+            </a:pPr>
+            <a:r>
+              <a:rPr sz="1400">
+                <a:solidFill>
+                  <a:srgbClr val="1A1A2E"/>
+                </a:solidFill>
+                <a:latin typeface="Calibri"/>
+              </a:rPr>
+              <a:t>• </a:t>
+            </a:r>
+          </a:p>
+          <a:p>
+            <a:pPr>
+              <a:spcAft>
+                <a:spcPts val="600"/>
+              </a:spcAft>
+            </a:pPr>
+            <a:r>
+              <a:rPr sz="1400">
+                <a:solidFill>
+                  <a:srgbClr val="1A1A2E"/>
+                </a:solidFill>
+                <a:latin typeface="Calibri"/>
+              </a:rPr>
+              <a:t>• • Ch.3 WaveSplat (논문 1)</a:t>
+            </a:r>
+          </a:p>
+          <a:p>
+            <a:pPr>
+              <a:spcAft>
+                <a:spcPts val="600"/>
+              </a:spcAft>
+            </a:pPr>
+            <a:r>
+              <a:rPr sz="1400">
+                <a:solidFill>
+                  <a:srgbClr val="1A1A2E"/>
+                </a:solidFill>
+                <a:latin typeface="Calibri"/>
+              </a:rPr>
+              <a:t>• •   시뮬레이션, 알고리즘, 실험, 분석</a:t>
+            </a:r>
+          </a:p>
+          <a:p>
+            <a:pPr>
+              <a:spcAft>
+                <a:spcPts val="600"/>
+              </a:spcAft>
+            </a:pPr>
+            <a:r>
+              <a:rPr sz="1400">
+                <a:solidFill>
+                  <a:srgbClr val="1A1A2E"/>
+                </a:solidFill>
+                <a:latin typeface="Calibri"/>
+              </a:rPr>
+              <a:t>• •   + 3 추가 기여 (spectral/sparse/forecast)</a:t>
+            </a:r>
+          </a:p>
+          <a:p>
+            <a:pPr>
+              <a:spcAft>
+                <a:spcPts val="600"/>
+              </a:spcAft>
+            </a:pPr>
+            <a:r>
+              <a:rPr sz="1400">
+                <a:solidFill>
+                  <a:srgbClr val="1A1A2E"/>
+                </a:solidFill>
+                <a:latin typeface="Calibri"/>
+              </a:rPr>
+              <a:t>• </a:t>
+            </a:r>
+          </a:p>
+          <a:p>
+            <a:pPr>
+              <a:spcAft>
+                <a:spcPts val="600"/>
+              </a:spcAft>
+            </a:pPr>
+            <a:r>
+              <a:rPr sz="1400">
+                <a:solidFill>
+                  <a:srgbClr val="1A1A2E"/>
+                </a:solidFill>
+                <a:latin typeface="Calibri"/>
+              </a:rPr>
+              <a:t>• • Ch.4 Hydrofoil FF Control (논문 2)</a:t>
+            </a:r>
+          </a:p>
+          <a:p>
+            <a:pPr>
+              <a:spcAft>
+                <a:spcPts val="600"/>
+              </a:spcAft>
+            </a:pPr>
+            <a:r>
+              <a:rPr sz="1400">
+                <a:solidFill>
+                  <a:srgbClr val="1A1A2E"/>
+                </a:solidFill>
+                <a:latin typeface="Calibri"/>
+              </a:rPr>
+              <a:t>• •   동역학 모델, 제어 설계, sensitivity, E2E</a:t>
+            </a:r>
+          </a:p>
+          <a:p>
+            <a:pPr>
+              <a:spcAft>
+                <a:spcPts val="600"/>
+              </a:spcAft>
+            </a:pPr>
+            <a:r>
+              <a:rPr sz="1400">
+                <a:solidFill>
+                  <a:srgbClr val="1A1A2E"/>
+                </a:solidFill>
+                <a:latin typeface="Calibri"/>
+              </a:rPr>
+              <a:t>• </a:t>
+            </a:r>
+          </a:p>
+          <a:p>
+            <a:pPr>
+              <a:spcAft>
+                <a:spcPts val="600"/>
+              </a:spcAft>
+            </a:pPr>
+            <a:r>
+              <a:rPr sz="1400">
+                <a:solidFill>
+                  <a:srgbClr val="1A1A2E"/>
+                </a:solidFill>
+                <a:latin typeface="Calibri"/>
+              </a:rPr>
+              <a:t>• • Ch.5 결론 및 향후 연구</a:t>
+            </a:r>
+          </a:p>
+          <a:p>
+            <a:pPr>
+              <a:spcAft>
+                <a:spcPts val="600"/>
+              </a:spcAft>
+            </a:pPr>
+            <a:r>
+              <a:rPr sz="1400">
+                <a:solidFill>
+                  <a:srgbClr val="1A1A2E"/>
+                </a:solidFill>
+                <a:latin typeface="Calibri"/>
+              </a:rPr>
+              <a:t>• • 부록: 파라미터 표, 추가 그래프</a:t>
+            </a:r>
+          </a:p>
+        </p:txBody>
+      </p:sp>
+      <p:sp>
+        <p:nvSpPr>
+          <p:cNvPr id="8" name="TextBox 7"/>
+          <p:cNvSpPr txBox="1"/>
+          <p:nvPr/>
+        </p:nvSpPr>
+        <p:spPr>
+          <a:xfrm>
+            <a:off x="6400800" y="1371600"/>
+            <a:ext cx="5303520" cy="365760"/>
+          </a:xfrm>
+          <a:prstGeom prst="rect">
+            <a:avLst/>
+          </a:prstGeom>
+          <a:noFill/>
+        </p:spPr>
+        <p:txBody>
+          <a:bodyPr wrap="square">
+            <a:spAutoFit/>
+          </a:bodyPr>
+          <a:lstStyle/>
+          <a:p>
+            <a:pPr algn="l">
+              <a:defRPr sz="2200" b="1">
+                <a:solidFill>
+                  <a:srgbClr val="E8553A"/>
+                </a:solidFill>
+                <a:latin typeface="Calibri"/>
+              </a:defRPr>
+            </a:pPr>
+            <a:r>
+              <a:t>현재 진행 상태</a:t>
+            </a:r>
+          </a:p>
+        </p:txBody>
+      </p:sp>
+      <p:sp>
+        <p:nvSpPr>
+          <p:cNvPr id="9" name="TextBox 8"/>
+          <p:cNvSpPr txBox="1"/>
+          <p:nvPr/>
+        </p:nvSpPr>
+        <p:spPr>
+          <a:xfrm>
+            <a:off x="6400800" y="1828800"/>
+            <a:ext cx="5303520" cy="4114800"/>
+          </a:xfrm>
+          <a:prstGeom prst="rect">
+            <a:avLst/>
+          </a:prstGeom>
+          <a:noFill/>
+        </p:spPr>
+        <p:txBody>
+          <a:bodyPr wrap="square">
+            <a:spAutoFit/>
+          </a:bodyPr>
+          <a:lstStyle/>
+          <a:p>
+            <a:pPr>
+              <a:spcAft>
+                <a:spcPts val="600"/>
+              </a:spcAft>
+            </a:pPr>
+            <a:r>
+              <a:rPr sz="1300">
+                <a:solidFill>
+                  <a:srgbClr val="1A1A2E"/>
+                </a:solidFill>
+                <a:latin typeface="Calibri"/>
+              </a:rPr>
+              <a:t>• • 논문 1 (WaveSplat)</a:t>
+            </a:r>
+          </a:p>
+          <a:p>
+            <a:pPr>
+              <a:spcAft>
+                <a:spcPts val="600"/>
+              </a:spcAft>
+            </a:pPr>
+            <a:r>
+              <a:rPr sz="1300">
+                <a:solidFill>
+                  <a:srgbClr val="1A1A2E"/>
+                </a:solidFill>
+                <a:latin typeface="Calibri"/>
+              </a:rPr>
+              <a:t>• •   ✅ 코드/실험 완료 (57 tests pass)</a:t>
+            </a:r>
+          </a:p>
+          <a:p>
+            <a:pPr>
+              <a:spcAft>
+                <a:spcPts val="600"/>
+              </a:spcAft>
+            </a:pPr>
+            <a:r>
+              <a:rPr sz="1300">
+                <a:solidFill>
+                  <a:srgbClr val="1A1A2E"/>
+                </a:solidFill>
+                <a:latin typeface="Calibri"/>
+              </a:rPr>
+              <a:t>• •   ✅ 논문 작성 완료 (Ocean Eng. format)</a:t>
+            </a:r>
+          </a:p>
+          <a:p>
+            <a:pPr>
+              <a:spcAft>
+                <a:spcPts val="600"/>
+              </a:spcAft>
+            </a:pPr>
+            <a:r>
+              <a:rPr sz="1300">
+                <a:solidFill>
+                  <a:srgbClr val="1A1A2E"/>
+                </a:solidFill>
+                <a:latin typeface="Calibri"/>
+              </a:rPr>
+              <a:t>• •   ✅ 적대적 페르소나 10라운드 검토 완료</a:t>
+            </a:r>
+          </a:p>
+          <a:p>
+            <a:pPr>
+              <a:spcAft>
+                <a:spcPts val="600"/>
+              </a:spcAft>
+            </a:pPr>
+            <a:r>
+              <a:rPr sz="1300">
+                <a:solidFill>
+                  <a:srgbClr val="1A1A2E"/>
+                </a:solidFill>
+                <a:latin typeface="Calibri"/>
+              </a:rPr>
+              <a:t>• •   ⏳ 공동저자 sign-off → 투고</a:t>
+            </a:r>
+          </a:p>
+          <a:p>
+            <a:pPr>
+              <a:spcAft>
+                <a:spcPts val="600"/>
+              </a:spcAft>
+            </a:pPr>
+            <a:r>
+              <a:rPr sz="1300">
+                <a:solidFill>
+                  <a:srgbClr val="1A1A2E"/>
+                </a:solidFill>
+                <a:latin typeface="Calibri"/>
+              </a:rPr>
+              <a:t>• </a:t>
+            </a:r>
+          </a:p>
+          <a:p>
+            <a:pPr>
+              <a:spcAft>
+                <a:spcPts val="600"/>
+              </a:spcAft>
+            </a:pPr>
+            <a:r>
+              <a:rPr sz="1300">
+                <a:solidFill>
+                  <a:srgbClr val="1A1A2E"/>
+                </a:solidFill>
+                <a:latin typeface="Calibri"/>
+              </a:rPr>
+              <a:t>• • 논문 2 (Hydrofoil)</a:t>
+            </a:r>
+          </a:p>
+          <a:p>
+            <a:pPr>
+              <a:spcAft>
+                <a:spcPts val="600"/>
+              </a:spcAft>
+            </a:pPr>
+            <a:r>
+              <a:rPr sz="1300">
+                <a:solidFill>
+                  <a:srgbClr val="1A1A2E"/>
+                </a:solidFill>
+                <a:latin typeface="Calibri"/>
+              </a:rPr>
+              <a:t>• •   ✅ 시뮬레이션 완료 (Phase 1~3)</a:t>
+            </a:r>
+          </a:p>
+          <a:p>
+            <a:pPr>
+              <a:spcAft>
+                <a:spcPts val="600"/>
+              </a:spcAft>
+            </a:pPr>
+            <a:r>
+              <a:rPr sz="1300">
+                <a:solidFill>
+                  <a:srgbClr val="1A1A2E"/>
+                </a:solidFill>
+                <a:latin typeface="Calibri"/>
+              </a:rPr>
+              <a:t>• •   ✅ 초안 작성 완료</a:t>
+            </a:r>
+          </a:p>
+          <a:p>
+            <a:pPr>
+              <a:spcAft>
+                <a:spcPts val="600"/>
+              </a:spcAft>
+            </a:pPr>
+            <a:r>
+              <a:rPr sz="1300">
+                <a:solidFill>
+                  <a:srgbClr val="1A1A2E"/>
+                </a:solidFill>
+                <a:latin typeface="Calibri"/>
+              </a:rPr>
+              <a:t>• •   ⏳ 공동저자 검토 → 투고</a:t>
+            </a:r>
+          </a:p>
+          <a:p>
+            <a:pPr>
+              <a:spcAft>
+                <a:spcPts val="600"/>
+              </a:spcAft>
+            </a:pPr>
+            <a:r>
+              <a:rPr sz="1300">
+                <a:solidFill>
+                  <a:srgbClr val="1A1A2E"/>
+                </a:solidFill>
+                <a:latin typeface="Calibri"/>
+              </a:rPr>
+              <a:t>• </a:t>
+            </a:r>
+          </a:p>
+          <a:p>
+            <a:pPr>
+              <a:spcAft>
+                <a:spcPts val="600"/>
+              </a:spcAft>
+            </a:pPr>
+            <a:r>
+              <a:rPr sz="1300">
+                <a:solidFill>
+                  <a:srgbClr val="1A1A2E"/>
+                </a:solidFill>
+                <a:latin typeface="Calibri"/>
+              </a:rPr>
+              <a:t>• • 학위논문</a:t>
+            </a:r>
+          </a:p>
+          <a:p>
+            <a:pPr>
+              <a:spcAft>
+                <a:spcPts val="600"/>
+              </a:spcAft>
+            </a:pPr>
+            <a:r>
+              <a:rPr sz="1300">
+                <a:solidFill>
+                  <a:srgbClr val="1A1A2E"/>
+                </a:solidFill>
+                <a:latin typeface="Calibri"/>
+              </a:rPr>
+              <a:t>• •   ✅ 초안 완성 (203K lines, PDF 생성)</a:t>
+            </a:r>
+          </a:p>
+          <a:p>
+            <a:pPr>
+              <a:spcAft>
+                <a:spcPts val="600"/>
+              </a:spcAft>
+            </a:pPr>
+            <a:r>
+              <a:rPr sz="1300">
+                <a:solidFill>
+                  <a:srgbClr val="1A1A2E"/>
+                </a:solidFill>
+                <a:latin typeface="Calibri"/>
+              </a:rPr>
+              <a:t>• •   ⏳ 지도교수 검토</a:t>
+            </a:r>
+          </a:p>
+        </p:txBody>
+      </p:sp>
+      <p:sp>
+        <p:nvSpPr>
+          <p:cNvPr id="10" name="TextBox 9"/>
+          <p:cNvSpPr txBox="1"/>
+          <p:nvPr/>
+        </p:nvSpPr>
+        <p:spPr>
+          <a:xfrm>
+            <a:off x="10972800" y="6492240"/>
+            <a:ext cx="1097280" cy="274320"/>
+          </a:xfrm>
+          <a:prstGeom prst="rect">
+            <a:avLst/>
+          </a:prstGeom>
+          <a:noFill/>
+        </p:spPr>
+        <p:txBody>
+          <a:bodyPr wrap="square">
+            <a:spAutoFit/>
+          </a:bodyPr>
+          <a:lstStyle/>
+          <a:p>
+            <a:pPr algn="r">
+              <a:defRPr sz="1000" b="0">
+                <a:solidFill>
+                  <a:srgbClr val="666666"/>
+                </a:solidFill>
+                <a:latin typeface="Calibri"/>
+              </a:defRPr>
+            </a:pPr>
+            <a:r>
+              <a:t>22/23</a:t>
+            </a:r>
+          </a:p>
+        </p:txBody>
+      </p:sp>
+    </p:spTree>
+  </p:cSld>
+  <p:clrMapOvr>
+    <a:masterClrMapping/>
+  </p:clrMapOvr>
+</p:sld>
+</file>
+
+<file path=ppt/slides/slide23.xml><?xml version="1.0" encoding="utf-8"?>
+<p:sld xmlns:a="http://schemas.openxmlformats.org/drawingml/2006/main" xmlns:p="http://schemas.openxmlformats.org/presentationml/2006/main" xmlns:r="http://schemas.openxmlformats.org/officeDocument/2006/relationships">
+  <p:cSld>
+    <p:bg>
+      <p:bgPr>
+        <a:solidFill>
+          <a:srgbClr val="FFFFFF"/>
+        </a:solidFill>
+        <a:effectLst/>
+      </p:bgPr>
+    </p:bg>
+    <p:spTree>
+      <p:nvGrpSpPr>
+        <p:cNvPr id="1" name=""/>
+        <p:cNvGrpSpPr/>
+        <p:nvPr/>
+      </p:nvGrpSpPr>
+      <p:grpSpPr/>
+      <p:sp>
+        <p:nvSpPr>
+          <p:cNvPr id="2" name="Rectangle 1"/>
+          <p:cNvSpPr/>
+          <p:nvPr/>
+        </p:nvSpPr>
+        <p:spPr>
+          <a:xfrm>
+            <a:off x="0" y="0"/>
+            <a:ext cx="12191695" cy="1097280"/>
+          </a:xfrm>
+          <a:prstGeom prst="rect">
+            <a:avLst/>
+          </a:prstGeom>
+          <a:solidFill>
+            <a:srgbClr val="1A1A2E"/>
+          </a:solidFill>
+          <a:ln>
+            <a:noFill/>
+          </a:ln>
+        </p:spPr>
+        <p:style>
+          <a:lnRef idx="1">
+            <a:schemeClr val="accent1"/>
+          </a:lnRef>
+          <a:fillRef idx="3">
+            <a:schemeClr val="accent1"/>
+          </a:fillRef>
+          <a:effectRef idx="2">
+            <a:schemeClr val="accent1"/>
+          </a:effectRef>
+          <a:fontRef idx="minor">
+            <a:schemeClr val="lt1"/>
+          </a:fontRef>
+        </p:style>
+        <p:txBody>
+          <a:bodyPr rtlCol="0" anchor="ctr"/>
+          <a:lstStyle/>
+          <a:p>
+            <a:pPr algn="ctr"/>
+          </a:p>
+        </p:txBody>
+      </p:sp>
+      <p:sp>
+        <p:nvSpPr>
+          <p:cNvPr id="3" name="TextBox 2"/>
+          <p:cNvSpPr txBox="1"/>
+          <p:nvPr/>
+        </p:nvSpPr>
+        <p:spPr>
+          <a:xfrm>
+            <a:off x="457200" y="137160"/>
+            <a:ext cx="10972800" cy="457200"/>
+          </a:xfrm>
+          <a:prstGeom prst="rect">
+            <a:avLst/>
+          </a:prstGeom>
+          <a:noFill/>
+        </p:spPr>
+        <p:txBody>
+          <a:bodyPr wrap="square">
+            <a:spAutoFit/>
+          </a:bodyPr>
+          <a:lstStyle/>
+          <a:p>
+            <a:pPr algn="l">
+              <a:defRPr sz="1400" b="0">
+                <a:solidFill>
+                  <a:srgbClr val="007ACC"/>
+                </a:solidFill>
+                <a:latin typeface="Calibri"/>
+              </a:defRPr>
+            </a:pPr>
+            <a:r>
+              <a:t>  07</a:t>
+            </a:r>
+          </a:p>
+        </p:txBody>
+      </p:sp>
+      <p:sp>
+        <p:nvSpPr>
+          <p:cNvPr id="4" name="TextBox 3"/>
+          <p:cNvSpPr txBox="1"/>
+          <p:nvPr/>
+        </p:nvSpPr>
+        <p:spPr>
+          <a:xfrm>
+            <a:off x="457200" y="320040"/>
+            <a:ext cx="10972800" cy="640080"/>
+          </a:xfrm>
+          <a:prstGeom prst="rect">
+            <a:avLst/>
+          </a:prstGeom>
+          <a:noFill/>
+        </p:spPr>
+        <p:txBody>
+          <a:bodyPr wrap="square">
+            <a:spAutoFit/>
+          </a:bodyPr>
+          <a:lstStyle/>
+          <a:p>
+            <a:pPr algn="l">
+              <a:defRPr sz="2800" b="1">
+                <a:solidFill>
+                  <a:srgbClr val="FFFFFF"/>
+                </a:solidFill>
+                <a:latin typeface="Calibri"/>
+              </a:defRPr>
+            </a:pPr>
+            <a:r>
+              <a:t>  향후 계획</a:t>
+            </a:r>
+          </a:p>
+        </p:txBody>
+      </p:sp>
+      <p:sp>
+        <p:nvSpPr>
+          <p:cNvPr id="5" name="TextBox 4"/>
+          <p:cNvSpPr txBox="1"/>
+          <p:nvPr/>
+        </p:nvSpPr>
+        <p:spPr>
+          <a:xfrm>
+            <a:off x="457200" y="685800"/>
+            <a:ext cx="10972800" cy="365760"/>
+          </a:xfrm>
+          <a:prstGeom prst="rect">
+            <a:avLst/>
+          </a:prstGeom>
+          <a:noFill/>
+        </p:spPr>
+        <p:txBody>
+          <a:bodyPr wrap="square">
+            <a:spAutoFit/>
+          </a:bodyPr>
+          <a:lstStyle/>
+          <a:p>
+            <a:pPr algn="l">
+              <a:defRPr sz="1400" b="0">
+                <a:solidFill>
+                  <a:srgbClr val="AABBCC"/>
+                </a:solidFill>
+                <a:latin typeface="Calibri"/>
+              </a:defRPr>
+            </a:pPr>
+            <a:r>
+              <a:t>  Plans &amp; Future Work</a:t>
+            </a:r>
+          </a:p>
+        </p:txBody>
+      </p:sp>
+      <p:sp>
+        <p:nvSpPr>
+          <p:cNvPr id="6" name="TextBox 5"/>
+          <p:cNvSpPr txBox="1"/>
+          <p:nvPr/>
+        </p:nvSpPr>
+        <p:spPr>
+          <a:xfrm>
+            <a:off x="731520" y="1371600"/>
+            <a:ext cx="5303520" cy="365760"/>
+          </a:xfrm>
+          <a:prstGeom prst="rect">
+            <a:avLst/>
+          </a:prstGeom>
+          <a:noFill/>
+        </p:spPr>
+        <p:txBody>
+          <a:bodyPr wrap="square">
+            <a:spAutoFit/>
+          </a:bodyPr>
+          <a:lstStyle/>
+          <a:p>
+            <a:pPr algn="l">
+              <a:defRPr sz="2200" b="1">
+                <a:solidFill>
+                  <a:srgbClr val="007ACC"/>
+                </a:solidFill>
+                <a:latin typeface="Calibri"/>
+              </a:defRPr>
+            </a:pPr>
+            <a:r>
+              <a:t>단기 계획 (2026)</a:t>
+            </a:r>
+          </a:p>
+        </p:txBody>
+      </p:sp>
+      <p:sp>
+        <p:nvSpPr>
+          <p:cNvPr id="7" name="TextBox 6"/>
+          <p:cNvSpPr txBox="1"/>
+          <p:nvPr/>
+        </p:nvSpPr>
+        <p:spPr>
+          <a:xfrm>
+            <a:off x="731520" y="1828800"/>
+            <a:ext cx="5303520" cy="2743200"/>
+          </a:xfrm>
+          <a:prstGeom prst="rect">
+            <a:avLst/>
+          </a:prstGeom>
+          <a:noFill/>
+        </p:spPr>
+        <p:txBody>
+          <a:bodyPr wrap="square">
+            <a:spAutoFit/>
+          </a:bodyPr>
+          <a:lstStyle/>
+          <a:p>
+            <a:pPr>
+              <a:spcAft>
+                <a:spcPts val="600"/>
+              </a:spcAft>
+            </a:pPr>
+            <a:r>
+              <a:rPr sz="1500">
+                <a:solidFill>
+                  <a:srgbClr val="1A1A2E"/>
+                </a:solidFill>
+                <a:latin typeface="Calibri"/>
+              </a:rPr>
+              <a:t>• • 논문 1 투고 (Ocean Engineering)</a:t>
+            </a:r>
+          </a:p>
+          <a:p>
+            <a:pPr>
+              <a:spcAft>
+                <a:spcPts val="600"/>
+              </a:spcAft>
+            </a:pPr>
+            <a:r>
+              <a:rPr sz="1500">
+                <a:solidFill>
+                  <a:srgbClr val="1A1A2E"/>
+                </a:solidFill>
+                <a:latin typeface="Calibri"/>
+              </a:rPr>
+              <a:t>• • 논문 2 투고 (Ocean Engineering / JSR)</a:t>
+            </a:r>
+          </a:p>
+          <a:p>
+            <a:pPr>
+              <a:spcAft>
+                <a:spcPts val="600"/>
+              </a:spcAft>
+            </a:pPr>
+            <a:r>
+              <a:rPr sz="1500">
+                <a:solidFill>
+                  <a:srgbClr val="1A1A2E"/>
+                </a:solidFill>
+                <a:latin typeface="Calibri"/>
+              </a:rPr>
+              <a:t>• • 수조 실험 검증 (SNU 조파수조, 2026 하반기)</a:t>
+            </a:r>
+          </a:p>
+          <a:p>
+            <a:pPr>
+              <a:spcAft>
+                <a:spcPts val="600"/>
+              </a:spcAft>
+            </a:pPr>
+            <a:r>
+              <a:rPr sz="1500">
+                <a:solidFill>
+                  <a:srgbClr val="1A1A2E"/>
+                </a:solidFill>
+                <a:latin typeface="Calibri"/>
+              </a:rPr>
+              <a:t>• •   → 규칙파/불규칙파 3~5 조건</a:t>
+            </a:r>
+          </a:p>
+          <a:p>
+            <a:pPr>
+              <a:spcAft>
+                <a:spcPts val="600"/>
+              </a:spcAft>
+            </a:pPr>
+            <a:r>
+              <a:rPr sz="1500">
+                <a:solidFill>
+                  <a:srgbClr val="1A1A2E"/>
+                </a:solidFill>
+                <a:latin typeface="Calibri"/>
+              </a:rPr>
+              <a:t>• •   → 용량식 wave gauge GT + Seyond Falcon K1</a:t>
+            </a:r>
+          </a:p>
+          <a:p>
+            <a:pPr>
+              <a:spcAft>
+                <a:spcPts val="600"/>
+              </a:spcAft>
+            </a:pPr>
+            <a:r>
+              <a:rPr sz="1500">
+                <a:solidFill>
+                  <a:srgbClr val="1A1A2E"/>
+                </a:solidFill>
+                <a:latin typeface="Calibri"/>
+              </a:rPr>
+              <a:t>• •   → Sim-to-Real gap 정량화 (raydrop, noise)</a:t>
+            </a:r>
+          </a:p>
+        </p:txBody>
+      </p:sp>
+      <p:sp>
+        <p:nvSpPr>
+          <p:cNvPr id="8" name="TextBox 7"/>
+          <p:cNvSpPr txBox="1"/>
+          <p:nvPr/>
+        </p:nvSpPr>
+        <p:spPr>
+          <a:xfrm>
+            <a:off x="6400800" y="1371600"/>
+            <a:ext cx="5303520" cy="365760"/>
+          </a:xfrm>
+          <a:prstGeom prst="rect">
+            <a:avLst/>
+          </a:prstGeom>
+          <a:noFill/>
+        </p:spPr>
+        <p:txBody>
+          <a:bodyPr wrap="square">
+            <a:spAutoFit/>
+          </a:bodyPr>
+          <a:lstStyle/>
+          <a:p>
+            <a:pPr algn="l">
+              <a:defRPr sz="2200" b="1">
+                <a:solidFill>
+                  <a:srgbClr val="E8553A"/>
+                </a:solidFill>
+                <a:latin typeface="Calibri"/>
+              </a:defRPr>
+            </a:pPr>
+            <a:r>
+              <a:t>확장 연구 방향</a:t>
+            </a:r>
+          </a:p>
+        </p:txBody>
+      </p:sp>
+      <p:sp>
+        <p:nvSpPr>
+          <p:cNvPr id="9" name="TextBox 8"/>
+          <p:cNvSpPr txBox="1"/>
+          <p:nvPr/>
+        </p:nvSpPr>
+        <p:spPr>
+          <a:xfrm>
+            <a:off x="6400800" y="1828800"/>
+            <a:ext cx="5303520" cy="2743200"/>
+          </a:xfrm>
+          <a:prstGeom prst="rect">
+            <a:avLst/>
+          </a:prstGeom>
+          <a:noFill/>
+        </p:spPr>
+        <p:txBody>
+          <a:bodyPr wrap="square">
+            <a:spAutoFit/>
+          </a:bodyPr>
+          <a:lstStyle/>
+          <a:p>
+            <a:pPr>
+              <a:spcAft>
+                <a:spcPts val="600"/>
+              </a:spcAft>
+            </a:pPr>
+            <a:r>
+              <a:rPr sz="1500">
+                <a:solidFill>
+                  <a:srgbClr val="1A1A2E"/>
+                </a:solidFill>
+                <a:latin typeface="Calibri"/>
+              </a:rPr>
+              <a:t>• • MPC 기반 6-DOF 통합 제어</a:t>
+            </a:r>
+          </a:p>
+          <a:p>
+            <a:pPr>
+              <a:spcAft>
+                <a:spcPts val="600"/>
+              </a:spcAft>
+            </a:pPr>
+            <a:r>
+              <a:rPr sz="1500">
+                <a:solidFill>
+                  <a:srgbClr val="1A1A2E"/>
+                </a:solidFill>
+                <a:latin typeface="Calibri"/>
+              </a:rPr>
+              <a:t>• •   → preview information의 최적 활용</a:t>
+            </a:r>
+          </a:p>
+          <a:p>
+            <a:pPr>
+              <a:spcAft>
+                <a:spcPts val="600"/>
+              </a:spcAft>
+            </a:pPr>
+            <a:r>
+              <a:rPr sz="1500">
+                <a:solidFill>
+                  <a:srgbClr val="1A1A2E"/>
+                </a:solidFill>
+                <a:latin typeface="Calibri"/>
+              </a:rPr>
+              <a:t>• • Stokes-2 nonlinear wave model</a:t>
+            </a:r>
+          </a:p>
+          <a:p>
+            <a:pPr>
+              <a:spcAft>
+                <a:spcPts val="600"/>
+              </a:spcAft>
+            </a:pPr>
+            <a:r>
+              <a:rPr sz="1500">
+                <a:solidFill>
+                  <a:srgbClr val="1A1A2E"/>
+                </a:solidFill>
+                <a:latin typeface="Calibri"/>
+              </a:rPr>
+              <a:t>• •   → 급경사파, 쇄파 환경 대응</a:t>
+            </a:r>
+          </a:p>
+          <a:p>
+            <a:pPr>
+              <a:spcAft>
+                <a:spcPts val="600"/>
+              </a:spcAft>
+            </a:pPr>
+            <a:r>
+              <a:rPr sz="1500">
+                <a:solidFill>
+                  <a:srgbClr val="1A1A2E"/>
+                </a:solidFill>
+                <a:latin typeface="Calibri"/>
+              </a:rPr>
+              <a:t>• • 해류(current) 동시 추정</a:t>
+            </a:r>
+          </a:p>
+          <a:p>
+            <a:pPr>
+              <a:spcAft>
+                <a:spcPts val="600"/>
+              </a:spcAft>
+            </a:pPr>
+            <a:r>
+              <a:rPr sz="1500">
+                <a:solidFill>
+                  <a:srgbClr val="1A1A2E"/>
+                </a:solidFill>
+                <a:latin typeface="Calibri"/>
+              </a:rPr>
+              <a:t>• • 실선 탑재 → 자율운항 통합</a:t>
+            </a:r>
+          </a:p>
+        </p:txBody>
+      </p:sp>
+      <p:sp>
+        <p:nvSpPr>
+          <p:cNvPr id="10" name="Rounded Rectangle 9"/>
+          <p:cNvSpPr/>
+          <p:nvPr/>
+        </p:nvSpPr>
+        <p:spPr>
+          <a:xfrm>
+            <a:off x="1371600" y="4754880"/>
+            <a:ext cx="9418320" cy="1371600"/>
+          </a:xfrm>
+          <a:prstGeom prst="roundRect">
+            <a:avLst/>
+          </a:prstGeom>
+          <a:solidFill>
+            <a:srgbClr val="1A1A2E"/>
+          </a:solidFill>
+          <a:ln>
+            <a:noFill/>
+          </a:ln>
+        </p:spPr>
+        <p:style>
+          <a:lnRef idx="1">
+            <a:schemeClr val="accent1"/>
+          </a:lnRef>
+          <a:fillRef idx="3">
+            <a:schemeClr val="accent1"/>
+          </a:fillRef>
+          <a:effectRef idx="2">
+            <a:schemeClr val="accent1"/>
+          </a:effectRef>
+          <a:fontRef idx="minor">
+            <a:schemeClr val="lt1"/>
+          </a:fontRef>
+        </p:style>
+        <p:txBody>
+          <a:bodyPr rtlCol="0" anchor="ctr" wrap="square"/>
+          <a:lstStyle/>
+          <a:p>
+            <a:pPr algn="ctr">
+              <a:defRPr sz="1400">
+                <a:solidFill>
+                  <a:srgbClr val="007ACC"/>
+                </a:solidFill>
+              </a:defRPr>
+            </a:pPr>
+            <a:r>
+              <a:t>박사학위 논문 주제</a:t>
+            </a:r>
+          </a:p>
+          <a:p>
+            <a:pPr algn="ctr">
+              <a:defRPr sz="2200" b="1">
+                <a:solidFill>
+                  <a:srgbClr val="FFFFFF"/>
+                </a:solidFill>
+              </a:defRPr>
+            </a:pPr>
+            <a:r>
+              <a:t>선박 탑재 LiDAR 기반 실시간 파랑장 추정과 그 제어 응용</a:t>
+            </a:r>
+          </a:p>
+          <a:p>
+            <a:br/>
+            <a:pPr algn="ctr">
+              <a:defRPr sz="1800">
+                <a:solidFill>
+                  <a:srgbClr val="AACCEE"/>
+                </a:solidFill>
+              </a:defRPr>
+            </a:pPr>
+            <a:r>
+              <a:t>감사합니다. 질문 부탁드립니다.</a:t>
+            </a:r>
+          </a:p>
+        </p:txBody>
+      </p:sp>
+      <p:sp>
+        <p:nvSpPr>
+          <p:cNvPr id="11" name="TextBox 10"/>
+          <p:cNvSpPr txBox="1"/>
+          <p:nvPr/>
+        </p:nvSpPr>
+        <p:spPr>
+          <a:xfrm>
+            <a:off x="10972800" y="6492240"/>
+            <a:ext cx="1097280" cy="274320"/>
+          </a:xfrm>
+          <a:prstGeom prst="rect">
+            <a:avLst/>
+          </a:prstGeom>
+          <a:noFill/>
+        </p:spPr>
+        <p:txBody>
+          <a:bodyPr wrap="square">
+            <a:spAutoFit/>
+          </a:bodyPr>
+          <a:lstStyle/>
+          <a:p>
+            <a:pPr algn="r">
+              <a:defRPr sz="1000" b="0">
+                <a:solidFill>
+                  <a:srgbClr val="666666"/>
+                </a:solidFill>
+                <a:latin typeface="Calibri"/>
+              </a:defRPr>
+            </a:pPr>
+            <a:r>
+              <a:t>23/23</a:t>
             </a:r>
           </a:p>
         </p:txBody>
@@ -8603,7 +13459,7 @@
               </a:defRPr>
             </a:pPr>
             <a:r>
-              <a:t>3/16</a:t>
+              <a:t>3/23</a:t>
             </a:r>
           </a:p>
         </p:txBody>
@@ -9007,7 +13863,7 @@
               </a:defRPr>
             </a:pPr>
             <a:r>
-              <a:t>4/16</a:t>
+              <a:t>4/23</a:t>
             </a:r>
           </a:p>
         </p:txBody>
@@ -9459,7 +14315,7 @@
               </a:defRPr>
             </a:pPr>
             <a:r>
-              <a:t>5/16</a:t>
+              <a:t>5/23</a:t>
             </a:r>
           </a:p>
         </p:txBody>
@@ -10180,7 +15036,7 @@
               </a:defRPr>
             </a:pPr>
             <a:r>
-              <a:t>6/16</a:t>
+              <a:t>6/23</a:t>
             </a:r>
           </a:p>
         </p:txBody>
@@ -10407,7 +15263,7 @@
         <p:spPr>
           <a:xfrm>
             <a:off x="731520" y="1828800"/>
-            <a:ext cx="5303520" cy="3200400"/>
+            <a:ext cx="5303520" cy="2286000"/>
           </a:xfrm>
           <a:prstGeom prst="rect">
             <a:avLst/>
@@ -10426,119 +15282,55 @@
               </a:spcAft>
             </a:pPr>
             <a:r>
-              <a:rPr sz="1300">
-                <a:solidFill>
-                  <a:srgbClr val="1A1A2E"/>
-                </a:solidFill>
-                <a:latin typeface="Calibri"/>
-              </a:rPr>
-              <a:t>• • JONSWAP 스펙트럼 (Hasselmann et al. 1973)</a:t>
-            </a:r>
-          </a:p>
-          <a:p>
-            <a:pPr>
-              <a:spcAft>
-                <a:spcPts val="600"/>
-              </a:spcAft>
-            </a:pPr>
-            <a:r>
-              <a:rPr sz="1300">
-                <a:solidFill>
-                  <a:srgbClr val="1A1A2E"/>
-                </a:solidFill>
-                <a:latin typeface="Calibri"/>
-              </a:rPr>
-              <a:t>• •   → Hs, Tₚ로 파라미터화, 해양공학 표준</a:t>
-            </a:r>
-          </a:p>
-          <a:p>
-            <a:pPr>
-              <a:spcAft>
-                <a:spcPts val="600"/>
-              </a:spcAft>
-            </a:pPr>
-            <a:r>
-              <a:rPr sz="1300">
-                <a:solidFill>
-                  <a:srgbClr val="1A1A2E"/>
-                </a:solidFill>
-                <a:latin typeface="Calibri"/>
-              </a:rPr>
-              <a:t>• • Gerstner wave (1802): 2차 비선형 정확해</a:t>
-            </a:r>
-          </a:p>
-          <a:p>
-            <a:pPr>
-              <a:spcAft>
-                <a:spcPts val="600"/>
-              </a:spcAft>
-            </a:pPr>
-            <a:r>
-              <a:rPr sz="1300">
-                <a:solidFill>
-                  <a:srgbClr val="1A1A2E"/>
-                </a:solidFill>
-                <a:latin typeface="Calibri"/>
-              </a:rPr>
-              <a:t>• •   → 수평 orbital 운동 포함 (trochoid)</a:t>
-            </a:r>
-          </a:p>
-          <a:p>
-            <a:pPr>
-              <a:spcAft>
-                <a:spcPts val="600"/>
-              </a:spcAft>
-            </a:pPr>
-            <a:r>
-              <a:rPr sz="1300">
-                <a:solidFill>
-                  <a:srgbClr val="1A1A2E"/>
-                </a:solidFill>
-                <a:latin typeface="Calibri"/>
-              </a:rPr>
-              <a:t>• •   → Q-constraint: ΣQᵢωᵢAᵢ ≤ 1 (입자 교차 방지)</a:t>
-            </a:r>
-          </a:p>
-          <a:p>
-            <a:pPr>
-              <a:spcAft>
-                <a:spcPts val="600"/>
-              </a:spcAft>
-            </a:pPr>
-            <a:r>
-              <a:rPr sz="1300">
-                <a:solidFill>
-                  <a:srgbClr val="1A1A2E"/>
-                </a:solidFill>
-                <a:latin typeface="Calibri"/>
-              </a:rPr>
-              <a:t>• • 분산관계: ω = √(g|k|tanh(|k|d))</a:t>
-            </a:r>
-          </a:p>
-          <a:p>
-            <a:pPr>
-              <a:spcAft>
-                <a:spcPts val="600"/>
-              </a:spcAft>
-            </a:pPr>
-            <a:r>
-              <a:rPr sz="1300">
-                <a:solidFill>
-                  <a:srgbClr val="1A1A2E"/>
-                </a:solidFill>
-                <a:latin typeface="Calibri"/>
-              </a:rPr>
-              <a:t>• •   → Newton-Raphson 역변환, 오차 &lt; 10⁻⁶ rad/s</a:t>
-            </a:r>
-          </a:p>
-          <a:p>
-            <a:pPr>
-              <a:spcAft>
-                <a:spcPts val="600"/>
-              </a:spcAft>
-            </a:pPr>
-            <a:r>
-              <a:rPr sz="1300">
+              <a:rPr sz="1500">
+                <a:solidFill>
+                  <a:srgbClr val="1A1A2E"/>
+                </a:solidFill>
+                <a:latin typeface="Calibri"/>
+              </a:rPr>
+              <a:t>• • JONSWAP 스펙트럼 → BF2~BF5 (Hs 0.3~2.0m)</a:t>
+            </a:r>
+          </a:p>
+          <a:p>
+            <a:pPr>
+              <a:spcAft>
+                <a:spcPts val="600"/>
+              </a:spcAft>
+            </a:pPr>
+            <a:r>
+              <a:rPr sz="1500">
+                <a:solidFill>
+                  <a:srgbClr val="1A1A2E"/>
+                </a:solidFill>
+                <a:latin typeface="Calibri"/>
+              </a:rPr>
+              <a:t>• • Gerstner wave: 2차 비선형 정확해 (trochoid)</a:t>
+            </a:r>
+          </a:p>
+          <a:p>
+            <a:pPr>
+              <a:spcAft>
+                <a:spcPts val="600"/>
+              </a:spcAft>
+            </a:pPr>
+            <a:r>
+              <a:rPr sz="1500">
+                <a:solidFill>
+                  <a:srgbClr val="1A1A2E"/>
+                </a:solidFill>
+                <a:latin typeface="Calibri"/>
+              </a:rPr>
+              <a:t>• • 분산관계: ω = √(g|k|tanh(|k|d)),  오차 &lt; 10⁻⁶</a:t>
+            </a:r>
+          </a:p>
+          <a:p>
+            <a:pPr>
+              <a:spcAft>
+                <a:spcPts val="600"/>
+              </a:spcAft>
+            </a:pPr>
+            <a:r>
+              <a:rPr sz="1500">
                 <a:solidFill>
                   <a:srgbClr val="1A1A2E"/>
                 </a:solidFill>
@@ -10594,7 +15386,7 @@
         <p:spPr>
           <a:xfrm>
             <a:off x="6400800" y="1828800"/>
-            <a:ext cx="5303520" cy="3200400"/>
+            <a:ext cx="5303520" cy="2286000"/>
           </a:xfrm>
           <a:prstGeom prst="rect">
             <a:avLst/>
@@ -10613,141 +15405,61 @@
               </a:spcAft>
             </a:pPr>
             <a:r>
-              <a:rPr sz="1300">
-                <a:solidFill>
-                  <a:srgbClr val="1A1A2E"/>
-                </a:solidFill>
-                <a:latin typeface="Calibri"/>
-              </a:rPr>
-              <a:t>• • 실제 스펙: 1550 nm, 152 ch, 120°×25° FOV</a:t>
-            </a:r>
-          </a:p>
-          <a:p>
-            <a:pPr>
-              <a:spcAft>
-                <a:spcPts val="600"/>
-              </a:spcAft>
-            </a:pPr>
-            <a:r>
-              <a:rPr sz="1300">
-                <a:solidFill>
-                  <a:srgbClr val="1A1A2E"/>
-                </a:solidFill>
-                <a:latin typeface="Calibri"/>
-              </a:rPr>
-              <a:t>• • Ray-surface 교차: Möller-Trumbore 알고리즘</a:t>
-            </a:r>
-          </a:p>
-          <a:p>
-            <a:pPr>
-              <a:spcAft>
-                <a:spcPts val="600"/>
-              </a:spcAft>
-            </a:pPr>
-            <a:r>
-              <a:rPr sz="1300">
-                <a:solidFill>
-                  <a:srgbClr val="1A1A2E"/>
-                </a:solidFill>
-                <a:latin typeface="Calibri"/>
-              </a:rPr>
-              <a:t>• •   → 삼각형 메시 위 정확한 교차점 계산</a:t>
-            </a:r>
-          </a:p>
-          <a:p>
-            <a:pPr>
-              <a:spcAft>
-                <a:spcPts val="600"/>
-              </a:spcAft>
-            </a:pPr>
-            <a:r>
-              <a:rPr sz="1300">
-                <a:solidFill>
-                  <a:srgbClr val="1A1A2E"/>
-                </a:solidFill>
-                <a:latin typeface="Calibri"/>
-              </a:rPr>
-              <a:t>• • 프레임당 ~76,000 ray → raydrop → ~50점 반환</a:t>
-            </a:r>
-          </a:p>
-          <a:p>
-            <a:pPr>
-              <a:spcAft>
-                <a:spcPts val="600"/>
-              </a:spcAft>
-            </a:pPr>
-            <a:r>
-              <a:rPr sz="1300">
-                <a:solidFill>
-                  <a:srgbClr val="1A1A2E"/>
-                </a:solidFill>
-                <a:latin typeface="Calibri"/>
-              </a:rPr>
-              <a:t>• </a:t>
-            </a:r>
-          </a:p>
-          <a:p>
-            <a:pPr>
-              <a:spcAft>
-                <a:spcPts val="600"/>
-              </a:spcAft>
-            </a:pPr>
-            <a:r>
-              <a:rPr sz="1300">
-                <a:solidFill>
-                  <a:srgbClr val="1A1A2E"/>
-                </a:solidFill>
-                <a:latin typeface="Calibri"/>
-              </a:rPr>
-              <a:t>• • Fresnel 반사 (unpolarized, n=1.321 @1550nm):</a:t>
-            </a:r>
-          </a:p>
-          <a:p>
-            <a:pPr>
-              <a:spcAft>
-                <a:spcPts val="600"/>
-              </a:spcAft>
-            </a:pPr>
-            <a:r>
-              <a:rPr sz="1300">
-                <a:solidFill>
-                  <a:srgbClr val="1A1A2E"/>
-                </a:solidFill>
-                <a:latin typeface="Calibri"/>
-              </a:rPr>
-              <a:t>• •   R(0°) ≈ 2%, R(89°) &gt; 80%  — 수면 광학 정확</a:t>
-            </a:r>
-          </a:p>
-          <a:p>
-            <a:pPr>
-              <a:spcAft>
-                <a:spcPts val="600"/>
-              </a:spcAft>
-            </a:pPr>
-            <a:r>
-              <a:rPr sz="1300">
-                <a:solidFill>
-                  <a:srgbClr val="1A1A2E"/>
-                </a:solidFill>
-                <a:latin typeface="Calibri"/>
-              </a:rPr>
-              <a:t>• • 거리 noise: σ = 0.02 m (2 cm, 1550nm 표준)</a:t>
-            </a:r>
-          </a:p>
-          <a:p>
-            <a:pPr>
-              <a:spcAft>
-                <a:spcPts val="600"/>
-              </a:spcAft>
-            </a:pPr>
-            <a:r>
-              <a:rPr sz="1300">
-                <a:solidFill>
-                  <a:srgbClr val="1A1A2E"/>
-                </a:solidFill>
-                <a:latin typeface="Calibri"/>
-              </a:rPr>
-              <a:t>• • 각도 noise: σ = 0.05° (beam divergence)</a:t>
+              <a:rPr sz="1500">
+                <a:solidFill>
+                  <a:srgbClr val="1A1A2E"/>
+                </a:solidFill>
+                <a:latin typeface="Calibri"/>
+              </a:rPr>
+              <a:t>• • 1550 nm, 152 ch, 120°×25° FOV</a:t>
+            </a:r>
+          </a:p>
+          <a:p>
+            <a:pPr>
+              <a:spcAft>
+                <a:spcPts val="600"/>
+              </a:spcAft>
+            </a:pPr>
+            <a:r>
+              <a:rPr sz="1500">
+                <a:solidFill>
+                  <a:srgbClr val="1A1A2E"/>
+                </a:solidFill>
+                <a:latin typeface="Calibri"/>
+              </a:rPr>
+              <a:t>• • Ray-surface: Möller-Trumbore → ~50점/frame</a:t>
+            </a:r>
+          </a:p>
+          <a:p>
+            <a:pPr>
+              <a:spcAft>
+                <a:spcPts val="600"/>
+              </a:spcAft>
+            </a:pPr>
+            <a:r>
+              <a:rPr sz="1500">
+                <a:solidFill>
+                  <a:srgbClr val="1A1A2E"/>
+                </a:solidFill>
+                <a:latin typeface="Calibri"/>
+              </a:rPr>
+              <a:t>• • Fresnel 반사 (n=1.321): R(0°)≈2%, R(89°)&gt;80%</a:t>
+            </a:r>
+          </a:p>
+          <a:p>
+            <a:pPr>
+              <a:spcAft>
+                <a:spcPts val="600"/>
+              </a:spcAft>
+            </a:pPr>
+            <a:r>
+              <a:rPr sz="1500">
+                <a:solidFill>
+                  <a:srgbClr val="1A1A2E"/>
+                </a:solidFill>
+                <a:latin typeface="Calibri"/>
+              </a:rPr>
+              <a:t>• • Noise: σ_range=0.02m, σ_angle=0.05°</a:t>
             </a:r>
           </a:p>
         </p:txBody>
@@ -10760,8 +15472,8 @@
         </p:nvSpPr>
         <p:spPr>
           <a:xfrm>
-            <a:off x="731520" y="4754880"/>
-            <a:ext cx="5486400" cy="365760"/>
+            <a:off x="731520" y="4389120"/>
+            <a:ext cx="5303520" cy="365760"/>
           </a:xfrm>
           <a:prstGeom prst="rect">
             <a:avLst/>
@@ -10783,7 +15495,7 @@
               </a:defRPr>
             </a:pPr>
             <a:r>
-              <a:t>두 가지 Raydrop 모델</a:t>
+              <a:t>2가지 Raydrop 모델</a:t>
             </a:r>
           </a:p>
         </p:txBody>
@@ -10796,8 +15508,8 @@
         </p:nvSpPr>
         <p:spPr>
           <a:xfrm>
-            <a:off x="731520" y="5120640"/>
-            <a:ext cx="5486400" cy="1371600"/>
+            <a:off x="731520" y="4846320"/>
+            <a:ext cx="5303520" cy="1097280"/>
           </a:xfrm>
           <a:prstGeom prst="rect">
             <a:avLst/>
@@ -10810,33 +15522,35 @@
           </a:bodyPr>
           <a:lstStyle/>
           <a:p>
-            <a:pPr algn="l">
-              <a:defRPr sz="1200" b="0">
-                <a:solidFill>
-                  <a:srgbClr val="1A1A2E"/>
-                </a:solidFill>
-                <a:latin typeface="Consolas"/>
-              </a:defRPr>
-            </a:pPr>
-            <a:r>
-              <a:t>Uniform (diffuse):  P = η · R_Fresnel(θ) · cos(θ) / (d/d_ref)²</a:t>
-            </a:r>
-            <a:br/>
-            <a:r>
-              <a:t>  → 확산 반사 + 역제곱 감쇠 + Lambertian 투영</a:t>
-            </a:r>
-            <a:br/>
-            <a:br/>
-            <a:r>
-              <a:t>Slope (specular):  반사각 r = d − 2(d·n)n 에서</a:t>
-            </a:r>
-            <a:br/>
-            <a:r>
-              <a:t>  retroreflection 조건 r·(−d) ≥ cos(5°) 일 때만 반환</a:t>
-            </a:r>
-            <a:br/>
-            <a:r>
-              <a:t>  → 파면 기울기에 따라 반환점 분포가 달라짐 (물리적)</a:t>
+            <a:pPr>
+              <a:spcAft>
+                <a:spcPts val="600"/>
+              </a:spcAft>
+            </a:pPr>
+            <a:r>
+              <a:rPr sz="1400">
+                <a:solidFill>
+                  <a:srgbClr val="1A1A2E"/>
+                </a:solidFill>
+                <a:latin typeface="Calibri"/>
+              </a:rPr>
+              <a:t>• • Uniform (diffuse): Fresnel × cos(θ) / d²</a:t>
+            </a:r>
+          </a:p>
+          <a:p>
+            <a:pPr>
+              <a:spcAft>
+                <a:spcPts val="600"/>
+              </a:spcAft>
+            </a:pPr>
+            <a:r>
+              <a:rPr sz="1400">
+                <a:solidFill>
+                  <a:srgbClr val="1A1A2E"/>
+                </a:solidFill>
+                <a:latin typeface="Calibri"/>
+              </a:rPr>
+              <a:t>• • Slope (specular): retroreflection 조건 기반</a:t>
             </a:r>
           </a:p>
         </p:txBody>
@@ -10849,8 +15563,8 @@
         </p:nvSpPr>
         <p:spPr>
           <a:xfrm>
-            <a:off x="6400800" y="4754880"/>
-            <a:ext cx="5303520" cy="1645920"/>
+            <a:off x="6400800" y="4389120"/>
+            <a:ext cx="5303520" cy="1828800"/>
           </a:xfrm>
           <a:prstGeom prst="roundRect">
             <a:avLst/>
@@ -10896,91 +15610,76 @@
           <a:p>
             <a:pPr>
               <a:spcAft>
-                <a:spcPts val="100"/>
-              </a:spcAft>
-              <a:defRPr sz="1100">
+                <a:spcPts val="200"/>
+              </a:spcAft>
+              <a:defRPr sz="1200">
                 <a:solidFill>
                   <a:srgbClr val="1A1A2E"/>
                 </a:solidFill>
               </a:defRPr>
             </a:pPr>
             <a:r>
-              <a:t>✓ 분산관계 deep/shallow 극한 해석해 일치</a:t>
-            </a:r>
-          </a:p>
-          <a:p>
-            <a:pPr>
-              <a:spcAft>
-                <a:spcPts val="100"/>
-              </a:spcAft>
-              <a:defRPr sz="1100">
+              <a:t>✓ 분산관계 deep/shallow 해석해 일치</a:t>
+            </a:r>
+          </a:p>
+          <a:p>
+            <a:pPr>
+              <a:spcAft>
+                <a:spcPts val="200"/>
+              </a:spcAft>
+              <a:defRPr sz="1200">
                 <a:solidFill>
                   <a:srgbClr val="1A1A2E"/>
                 </a:solidFill>
               </a:defRPr>
             </a:pPr>
             <a:r>
-              <a:t>✓ Gerstner 단일파 RMSE &lt; 10⁻¹⁰ m</a:t>
-            </a:r>
-          </a:p>
-          <a:p>
-            <a:pPr>
-              <a:spcAft>
-                <a:spcPts val="100"/>
-              </a:spcAft>
-              <a:defRPr sz="1100">
+              <a:t>✓ Gerstner RMSE &lt; 10⁻¹⁰ m</a:t>
+            </a:r>
+          </a:p>
+          <a:p>
+            <a:pPr>
+              <a:spcAft>
+                <a:spcPts val="200"/>
+              </a:spcAft>
+              <a:defRPr sz="1200">
                 <a:solidFill>
                   <a:srgbClr val="1A1A2E"/>
                 </a:solidFill>
               </a:defRPr>
             </a:pPr>
             <a:r>
-              <a:t>✓ Fresnel R(0°) = ((n−1)/(n+1))² 정확</a:t>
-            </a:r>
-          </a:p>
-          <a:p>
-            <a:pPr>
-              <a:spcAft>
-                <a:spcPts val="100"/>
-              </a:spcAft>
-              <a:defRPr sz="1100">
+              <a:t>✓ Fresnel R(0°) = ((n-1)/(n+1))² 정확</a:t>
+            </a:r>
+          </a:p>
+          <a:p>
+            <a:pPr>
+              <a:spcAft>
+                <a:spcPts val="200"/>
+              </a:spcAft>
+              <a:defRPr sz="1200">
                 <a:solidFill>
                   <a:srgbClr val="1A1A2E"/>
                 </a:solidFill>
               </a:defRPr>
             </a:pPr>
             <a:r>
-              <a:t>✓ Q-constraint 위반 없음 (JONSWAP 전체)</a:t>
-            </a:r>
-          </a:p>
-          <a:p>
-            <a:pPr>
-              <a:spcAft>
-                <a:spcPts val="100"/>
-              </a:spcAft>
-              <a:defRPr sz="1100">
+              <a:t>✓ Q-constraint 위반 없음 (BF2~BF5 전체)</a:t>
+            </a:r>
+          </a:p>
+          <a:p>
+            <a:pPr>
+              <a:spcAft>
+                <a:spcPts val="200"/>
+              </a:spcAft>
+              <a:defRPr sz="1200">
                 <a:solidFill>
                   <a:srgbClr val="1A1A2E"/>
                 </a:solidFill>
               </a:defRPr>
             </a:pPr>
             <a:r>
-              <a:t>✓ 파면 법선 항상 상향 (nz &gt; 0)</a:t>
-            </a:r>
-          </a:p>
-          <a:p>
-            <a:pPr>
-              <a:spcAft>
-                <a:spcPts val="100"/>
-              </a:spcAft>
-              <a:defRPr sz="1100">
-                <a:solidFill>
-                  <a:srgbClr val="1A1A2E"/>
-                </a:solidFill>
-              </a:defRPr>
-            </a:pPr>
-            <a:r>
-              <a:t>✓ Raydrop 확률 ∈ [0,1], 단조 증가</a:t>
+              <a:t>✓ Raydrop 확률 ∈ [0,1], 물리적 일관성</a:t>
             </a:r>
           </a:p>
         </p:txBody>
@@ -11016,7 +15715,7 @@
               </a:defRPr>
             </a:pPr>
             <a:r>
-              <a:t>7/16</a:t>
+              <a:t>7/23</a:t>
             </a:r>
           </a:p>
         </p:txBody>
@@ -11996,7 +16695,7 @@
               </a:defRPr>
             </a:pPr>
             <a:r>
-              <a:t>8/16</a:t>
+              <a:t>8/23</a:t>
             </a:r>
           </a:p>
         </p:txBody>
@@ -12947,7 +17646,7 @@
                 </a:solidFill>
                 <a:latin typeface="Calibri"/>
               </a:rPr>
-              <a:t>• • ❗ WaveSplat 한계도 노출:</a:t>
+              <a:t>• • WaveSplat 한계도 노출:</a:t>
             </a:r>
           </a:p>
           <a:p>
@@ -13015,7 +17714,7 @@
               </a:defRPr>
             </a:pPr>
             <a:r>
-              <a:t>9/16</a:t>
+              <a:t>9/23</a:t>
             </a:r>
           </a:p>
         </p:txBody>

--- a/wavesplat/docs/labmeeting_wavesplat.pptx
+++ b/wavesplat/docs/labmeeting_wavesplat.pptx
@@ -14583,7 +14583,7 @@
                 </a:solidFill>
                 <a:latin typeface="Calibri"/>
               </a:rPr>
-              <a:t>• •    → polar k-grid (64 radial × 128 azimuthal)</a:t>
+              <a:t>• •    → Cartesian 81×81 k-grid (Δk≈0.10 rad/m)</a:t>
             </a:r>
           </a:p>
           <a:p>
@@ -14599,7 +14599,7 @@
                 </a:solidFill>
                 <a:latin typeface="Calibri"/>
               </a:rPr>
-              <a:t>• • ② Greedy peak extraction (15° suppression)</a:t>
+              <a:t>• • ② Greedy peak extraction (0.15 rad/m suppression)</a:t>
             </a:r>
           </a:p>
           <a:p>

--- a/wavesplat/docs/labmeeting_wavesplat.pptx
+++ b/wavesplat/docs/labmeeting_wavesplat.pptx
@@ -28,6 +28,7 @@
     <p:sldId id="276" r:id="rId27"/>
     <p:sldId id="277" r:id="rId28"/>
     <p:sldId id="278" r:id="rId29"/>
+    <p:sldId id="279" r:id="rId30"/>
   </p:sldIdLst>
   <p:sldSz cx="12191695" cy="6858000" type="screen4x3"/>
   <p:notesSz cx="6858000" cy="9144000"/>
@@ -3333,7 +3334,7 @@
               </a:defRPr>
             </a:pPr>
             <a:r>
-              <a:t>1/23</a:t>
+              <a:t>1/24</a:t>
             </a:r>
           </a:p>
         </p:txBody>
@@ -3630,7 +3631,7 @@
               </a:defRPr>
             </a:pPr>
             <a:r>
-              <a:t>10/23</a:t>
+              <a:t>10/24</a:t>
             </a:r>
           </a:p>
         </p:txBody>
@@ -4495,7 +4496,7 @@
               </a:defRPr>
             </a:pPr>
             <a:r>
-              <a:t>11/23</a:t>
+              <a:t>11/24</a:t>
             </a:r>
           </a:p>
         </p:txBody>
@@ -5183,7 +5184,7 @@
               </a:defRPr>
             </a:pPr>
             <a:r>
-              <a:t>12/23</a:t>
+              <a:t>12/24</a:t>
             </a:r>
           </a:p>
         </p:txBody>
@@ -5821,7 +5822,7 @@
               </a:defRPr>
             </a:pPr>
             <a:r>
-              <a:t>13/23</a:t>
+              <a:t>13/24</a:t>
             </a:r>
           </a:p>
         </p:txBody>
@@ -6058,7 +6059,7 @@
               </a:defRPr>
             </a:pPr>
             <a:r>
-              <a:t>14/23</a:t>
+              <a:t>14/24</a:t>
             </a:r>
           </a:p>
         </p:txBody>
@@ -6746,7 +6747,7 @@
               </a:defRPr>
             </a:pPr>
             <a:r>
-              <a:t>15/23</a:t>
+              <a:t>15/24</a:t>
             </a:r>
           </a:p>
         </p:txBody>
@@ -6851,7 +6852,7 @@
               </a:defRPr>
             </a:pPr>
             <a:r>
-              <a:t>  05</a:t>
+              <a:t>  04</a:t>
             </a:r>
           </a:p>
         </p:txBody>
@@ -6887,7 +6888,7 @@
               </a:defRPr>
             </a:pPr>
             <a:r>
-              <a:t>  논문 2: Hydrofoil Feedforward Control</a:t>
+              <a:t>  강화 Baseline 비교: LETKF · GPR-disp</a:t>
             </a:r>
           </a:p>
         </p:txBody>
@@ -6923,7 +6924,7 @@
               </a:defRPr>
             </a:pPr>
             <a:r>
-              <a:t>  Wave-Preview Control for Hydrofoil Vessels</a:t>
+              <a:t>  Are we only beating weak baselines?</a:t>
             </a:r>
           </a:p>
         </p:txBody>
@@ -6937,7 +6938,7 @@
         <p:spPr>
           <a:xfrm>
             <a:off x="731520" y="1371600"/>
-            <a:ext cx="5303520" cy="365760"/>
+            <a:ext cx="10515600" cy="365760"/>
           </a:xfrm>
           <a:prstGeom prst="rect">
             <a:avLst/>
@@ -6951,7 +6952,7 @@
           <a:lstStyle/>
           <a:p>
             <a:pPr algn="l">
-              <a:defRPr sz="2000" b="1">
+              <a:defRPr sz="1800" b="1">
                 <a:solidFill>
                   <a:srgbClr val="007ACC"/>
                 </a:solidFill>
@@ -6959,21 +6960,603 @@
               </a:defRPr>
             </a:pPr>
             <a:r>
-              <a:t>왜 하이드로포일 제어에 WaveSplat?</a:t>
-            </a:r>
-          </a:p>
-        </p:txBody>
-      </p:sp>
-      <p:sp>
-        <p:nvSpPr>
-          <p:cNvPr id="7" name="TextBox 6"/>
+              <a:t>100-episode 전체 비교 (LETKF: Gaspari-Cohn localization, r_loc=50m)</a:t>
+            </a:r>
+          </a:p>
+        </p:txBody>
+      </p:sp>
+      <p:graphicFrame>
+        <p:nvGraphicFramePr>
+          <p:cNvPr id="7" name="Table 6"/>
+          <p:cNvGraphicFramePr>
+            <a:graphicFrameLocks noGrp="1"/>
+          </p:cNvGraphicFramePr>
+          <p:nvPr/>
+        </p:nvGraphicFramePr>
+        <p:xfrm>
+          <a:off x="731520" y="1828800"/>
+          <a:ext cx="10515600" cy="1645920"/>
+        </p:xfrm>
+        <a:graphic>
+          <a:graphicData uri="http://schemas.openxmlformats.org/drawingml/2006/table">
+            <a:tbl>
+              <a:tblPr firstRow="1" bandRow="1">
+                <a:tableStyleId>{5C22544A-7EE6-4342-B048-85BDC9FD1C3A}</a:tableStyleId>
+              </a:tblPr>
+              <a:tblGrid>
+                <a:gridCol w="1314450"/>
+                <a:gridCol w="1314450"/>
+                <a:gridCol w="1314450"/>
+                <a:gridCol w="1314450"/>
+                <a:gridCol w="1314450"/>
+                <a:gridCol w="1314450"/>
+                <a:gridCol w="1314450"/>
+                <a:gridCol w="1314450"/>
+              </a:tblGrid>
+              <a:tr h="548640">
+                <a:tc>
+                  <a:txBody>
+                    <a:bodyPr/>
+                    <a:lstStyle/>
+                    <a:p>
+                      <a:pPr algn="ctr">
+                        <a:defRPr sz="1300" b="1">
+                          <a:solidFill>
+                            <a:srgbClr val="FFFFFF"/>
+                          </a:solidFill>
+                          <a:latin typeface="Calibri"/>
+                        </a:defRPr>
+                      </a:pPr>
+                      <a:r>
+                        <a:t>Method</a:t>
+                      </a:r>
+                    </a:p>
+                  </a:txBody>
+                  <a:tcPr anchor="ctr">
+                    <a:solidFill>
+                      <a:srgbClr val="1A1A2E"/>
+                    </a:solidFill>
+                  </a:tcPr>
+                </a:tc>
+                <a:tc>
+                  <a:txBody>
+                    <a:bodyPr/>
+                    <a:lstStyle/>
+                    <a:p>
+                      <a:pPr algn="ctr">
+                        <a:defRPr sz="1300" b="1">
+                          <a:solidFill>
+                            <a:srgbClr val="FFFFFF"/>
+                          </a:solidFill>
+                          <a:latin typeface="Calibri"/>
+                        </a:defRPr>
+                      </a:pPr>
+                      <a:r>
+                        <a:t>nRMSE ↓</a:t>
+                      </a:r>
+                    </a:p>
+                  </a:txBody>
+                  <a:tcPr anchor="ctr">
+                    <a:solidFill>
+                      <a:srgbClr val="1A1A2E"/>
+                    </a:solidFill>
+                  </a:tcPr>
+                </a:tc>
+                <a:tc>
+                  <a:txBody>
+                    <a:bodyPr/>
+                    <a:lstStyle/>
+                    <a:p>
+                      <a:pPr algn="ctr">
+                        <a:defRPr sz="1300" b="1">
+                          <a:solidFill>
+                            <a:srgbClr val="FFFFFF"/>
+                          </a:solidFill>
+                          <a:latin typeface="Calibri"/>
+                        </a:defRPr>
+                      </a:pPr>
+                      <a:r>
+                        <a:t>VR → 1</a:t>
+                      </a:r>
+                    </a:p>
+                  </a:txBody>
+                  <a:tcPr anchor="ctr">
+                    <a:solidFill>
+                      <a:srgbClr val="1A1A2E"/>
+                    </a:solidFill>
+                  </a:tcPr>
+                </a:tc>
+                <a:tc>
+                  <a:txBody>
+                    <a:bodyPr/>
+                    <a:lstStyle/>
+                    <a:p>
+                      <a:pPr algn="ctr">
+                        <a:defRPr sz="1300" b="1">
+                          <a:solidFill>
+                            <a:srgbClr val="FFFFFF"/>
+                          </a:solidFill>
+                          <a:latin typeface="Calibri"/>
+                        </a:defRPr>
+                      </a:pPr>
+                      <a:r>
+                        <a:t>ρ ↑</a:t>
+                      </a:r>
+                    </a:p>
+                  </a:txBody>
+                  <a:tcPr anchor="ctr">
+                    <a:solidFill>
+                      <a:srgbClr val="1A1A2E"/>
+                    </a:solidFill>
+                  </a:tcPr>
+                </a:tc>
+                <a:tc>
+                  <a:txBody>
+                    <a:bodyPr/>
+                    <a:lstStyle/>
+                    <a:p>
+                      <a:pPr algn="ctr">
+                        <a:defRPr sz="1300" b="1">
+                          <a:solidFill>
+                            <a:srgbClr val="FFFFFF"/>
+                          </a:solidFill>
+                          <a:latin typeface="Calibri"/>
+                        </a:defRPr>
+                      </a:pPr>
+                      <a:r>
+                        <a:t>SS ↑</a:t>
+                      </a:r>
+                    </a:p>
+                  </a:txBody>
+                  <a:tcPr anchor="ctr">
+                    <a:solidFill>
+                      <a:srgbClr val="1A1A2E"/>
+                    </a:solidFill>
+                  </a:tcPr>
+                </a:tc>
+                <a:tc>
+                  <a:txBody>
+                    <a:bodyPr/>
+                    <a:lstStyle/>
+                    <a:p>
+                      <a:pPr algn="ctr">
+                        <a:defRPr sz="1300" b="1">
+                          <a:solidFill>
+                            <a:srgbClr val="FFFFFF"/>
+                          </a:solidFill>
+                          <a:latin typeface="Calibri"/>
+                        </a:defRPr>
+                      </a:pPr>
+                      <a:r>
+                        <a:t>Dir R² ↑</a:t>
+                      </a:r>
+                    </a:p>
+                  </a:txBody>
+                  <a:tcPr anchor="ctr">
+                    <a:solidFill>
+                      <a:srgbClr val="1A1A2E"/>
+                    </a:solidFill>
+                  </a:tcPr>
+                </a:tc>
+                <a:tc>
+                  <a:txBody>
+                    <a:bodyPr/>
+                    <a:lstStyle/>
+                    <a:p>
+                      <a:pPr algn="ctr">
+                        <a:defRPr sz="1300" b="1">
+                          <a:solidFill>
+                            <a:srgbClr val="FFFFFF"/>
+                          </a:solidFill>
+                          <a:latin typeface="Calibri"/>
+                        </a:defRPr>
+                      </a:pPr>
+                      <a:r>
+                        <a:t>Hs err ↓</a:t>
+                      </a:r>
+                    </a:p>
+                  </a:txBody>
+                  <a:tcPr anchor="ctr">
+                    <a:solidFill>
+                      <a:srgbClr val="1A1A2E"/>
+                    </a:solidFill>
+                  </a:tcPr>
+                </a:tc>
+                <a:tc>
+                  <a:txBody>
+                    <a:bodyPr/>
+                    <a:lstStyle/>
+                    <a:p>
+                      <a:pPr algn="ctr">
+                        <a:defRPr sz="1300" b="1">
+                          <a:solidFill>
+                            <a:srgbClr val="FFFFFF"/>
+                          </a:solidFill>
+                          <a:latin typeface="Calibri"/>
+                        </a:defRPr>
+                      </a:pPr>
+                      <a:r>
+                        <a:t>ms ↓</a:t>
+                      </a:r>
+                    </a:p>
+                  </a:txBody>
+                  <a:tcPr anchor="ctr">
+                    <a:solidFill>
+                      <a:srgbClr val="1A1A2E"/>
+                    </a:solidFill>
+                  </a:tcPr>
+                </a:tc>
+              </a:tr>
+              <a:tr h="548640">
+                <a:tc>
+                  <a:txBody>
+                    <a:bodyPr/>
+                    <a:lstStyle/>
+                    <a:p>
+                      <a:pPr algn="ctr">
+                        <a:defRPr sz="1300">
+                          <a:solidFill>
+                            <a:srgbClr val="1A1A2E"/>
+                          </a:solidFill>
+                          <a:latin typeface="Calibri"/>
+                        </a:defRPr>
+                      </a:pPr>
+                      <a:r>
+                        <a:t>WaveSplat</a:t>
+                      </a:r>
+                    </a:p>
+                  </a:txBody>
+                  <a:tcPr anchor="ctr"/>
+                </a:tc>
+                <a:tc>
+                  <a:txBody>
+                    <a:bodyPr/>
+                    <a:lstStyle/>
+                    <a:p>
+                      <a:pPr algn="ctr">
+                        <a:defRPr sz="1300">
+                          <a:solidFill>
+                            <a:srgbClr val="1A1A2E"/>
+                          </a:solidFill>
+                          <a:latin typeface="Calibri"/>
+                        </a:defRPr>
+                      </a:pPr>
+                      <a:r>
+                        <a:t>0.223</a:t>
+                      </a:r>
+                    </a:p>
+                  </a:txBody>
+                  <a:tcPr anchor="ctr"/>
+                </a:tc>
+                <a:tc>
+                  <a:txBody>
+                    <a:bodyPr/>
+                    <a:lstStyle/>
+                    <a:p>
+                      <a:pPr algn="ctr">
+                        <a:defRPr sz="1300">
+                          <a:solidFill>
+                            <a:srgbClr val="1A1A2E"/>
+                          </a:solidFill>
+                          <a:latin typeface="Calibri"/>
+                        </a:defRPr>
+                      </a:pPr>
+                      <a:r>
+                        <a:t>0.661</a:t>
+                      </a:r>
+                    </a:p>
+                  </a:txBody>
+                  <a:tcPr anchor="ctr"/>
+                </a:tc>
+                <a:tc>
+                  <a:txBody>
+                    <a:bodyPr/>
+                    <a:lstStyle/>
+                    <a:p>
+                      <a:pPr algn="ctr">
+                        <a:defRPr sz="1300">
+                          <a:solidFill>
+                            <a:srgbClr val="1A1A2E"/>
+                          </a:solidFill>
+                          <a:latin typeface="Calibri"/>
+                        </a:defRPr>
+                      </a:pPr>
+                      <a:r>
+                        <a:t>0.446</a:t>
+                      </a:r>
+                    </a:p>
+                  </a:txBody>
+                  <a:tcPr anchor="ctr"/>
+                </a:tc>
+                <a:tc>
+                  <a:txBody>
+                    <a:bodyPr/>
+                    <a:lstStyle/>
+                    <a:p>
+                      <a:pPr algn="ctr">
+                        <a:defRPr sz="1300">
+                          <a:solidFill>
+                            <a:srgbClr val="1A1A2E"/>
+                          </a:solidFill>
+                          <a:latin typeface="Calibri"/>
+                        </a:defRPr>
+                      </a:pPr>
+                      <a:r>
+                        <a:t>+0.034</a:t>
+                      </a:r>
+                    </a:p>
+                  </a:txBody>
+                  <a:tcPr anchor="ctr"/>
+                </a:tc>
+                <a:tc>
+                  <a:txBody>
+                    <a:bodyPr/>
+                    <a:lstStyle/>
+                    <a:p>
+                      <a:pPr algn="ctr">
+                        <a:defRPr sz="1300">
+                          <a:solidFill>
+                            <a:srgbClr val="1A1A2E"/>
+                          </a:solidFill>
+                          <a:latin typeface="Calibri"/>
+                        </a:defRPr>
+                      </a:pPr>
+                      <a:r>
+                        <a:t>−0.253</a:t>
+                      </a:r>
+                    </a:p>
+                  </a:txBody>
+                  <a:tcPr anchor="ctr"/>
+                </a:tc>
+                <a:tc>
+                  <a:txBody>
+                    <a:bodyPr/>
+                    <a:lstStyle/>
+                    <a:p>
+                      <a:pPr algn="ctr">
+                        <a:defRPr sz="1300">
+                          <a:solidFill>
+                            <a:srgbClr val="1A1A2E"/>
+                          </a:solidFill>
+                          <a:latin typeface="Calibri"/>
+                        </a:defRPr>
+                      </a:pPr>
+                      <a:r>
+                        <a:t>0.277</a:t>
+                      </a:r>
+                    </a:p>
+                  </a:txBody>
+                  <a:tcPr anchor="ctr"/>
+                </a:tc>
+                <a:tc>
+                  <a:txBody>
+                    <a:bodyPr/>
+                    <a:lstStyle/>
+                    <a:p>
+                      <a:pPr algn="ctr">
+                        <a:defRPr sz="1300">
+                          <a:solidFill>
+                            <a:srgbClr val="1A1A2E"/>
+                          </a:solidFill>
+                          <a:latin typeface="Calibri"/>
+                        </a:defRPr>
+                      </a:pPr>
+                      <a:r>
+                        <a:t>14.5</a:t>
+                      </a:r>
+                    </a:p>
+                  </a:txBody>
+                  <a:tcPr anchor="ctr"/>
+                </a:tc>
+              </a:tr>
+              <a:tr h="548640">
+                <a:tc>
+                  <a:txBody>
+                    <a:bodyPr/>
+                    <a:lstStyle/>
+                    <a:p>
+                      <a:pPr algn="ctr">
+                        <a:defRPr sz="1300">
+                          <a:solidFill>
+                            <a:srgbClr val="1A1A2E"/>
+                          </a:solidFill>
+                          <a:latin typeface="Calibri"/>
+                        </a:defRPr>
+                      </a:pPr>
+                      <a:r>
+                        <a:t>LETKF (loc50)</a:t>
+                      </a:r>
+                    </a:p>
+                  </a:txBody>
+                  <a:tcPr anchor="ctr">
+                    <a:solidFill>
+                      <a:srgbClr val="F0F4F8"/>
+                    </a:solidFill>
+                  </a:tcPr>
+                </a:tc>
+                <a:tc>
+                  <a:txBody>
+                    <a:bodyPr/>
+                    <a:lstStyle/>
+                    <a:p>
+                      <a:pPr algn="ctr">
+                        <a:defRPr sz="1300">
+                          <a:solidFill>
+                            <a:srgbClr val="1A1A2E"/>
+                          </a:solidFill>
+                          <a:latin typeface="Calibri"/>
+                        </a:defRPr>
+                      </a:pPr>
+                      <a:r>
+                        <a:t>0.228</a:t>
+                      </a:r>
+                    </a:p>
+                  </a:txBody>
+                  <a:tcPr anchor="ctr">
+                    <a:solidFill>
+                      <a:srgbClr val="F0F4F8"/>
+                    </a:solidFill>
+                  </a:tcPr>
+                </a:tc>
+                <a:tc>
+                  <a:txBody>
+                    <a:bodyPr/>
+                    <a:lstStyle/>
+                    <a:p>
+                      <a:pPr algn="ctr">
+                        <a:defRPr sz="1300">
+                          <a:solidFill>
+                            <a:srgbClr val="1A1A2E"/>
+                          </a:solidFill>
+                          <a:latin typeface="Calibri"/>
+                        </a:defRPr>
+                      </a:pPr>
+                      <a:r>
+                        <a:t>0.111</a:t>
+                      </a:r>
+                    </a:p>
+                  </a:txBody>
+                  <a:tcPr anchor="ctr">
+                    <a:solidFill>
+                      <a:srgbClr val="F0F4F8"/>
+                    </a:solidFill>
+                  </a:tcPr>
+                </a:tc>
+                <a:tc>
+                  <a:txBody>
+                    <a:bodyPr/>
+                    <a:lstStyle/>
+                    <a:p>
+                      <a:pPr algn="ctr">
+                        <a:defRPr sz="1300">
+                          <a:solidFill>
+                            <a:srgbClr val="1A1A2E"/>
+                          </a:solidFill>
+                          <a:latin typeface="Calibri"/>
+                        </a:defRPr>
+                      </a:pPr>
+                      <a:r>
+                        <a:t>0.359</a:t>
+                      </a:r>
+                    </a:p>
+                  </a:txBody>
+                  <a:tcPr anchor="ctr">
+                    <a:solidFill>
+                      <a:srgbClr val="F0F4F8"/>
+                    </a:solidFill>
+                  </a:tcPr>
+                </a:tc>
+                <a:tc>
+                  <a:txBody>
+                    <a:bodyPr/>
+                    <a:lstStyle/>
+                    <a:p>
+                      <a:pPr algn="ctr">
+                        <a:defRPr sz="1300">
+                          <a:solidFill>
+                            <a:srgbClr val="1A1A2E"/>
+                          </a:solidFill>
+                          <a:latin typeface="Calibri"/>
+                        </a:defRPr>
+                      </a:pPr>
+                      <a:r>
+                        <a:t>+0.142</a:t>
+                      </a:r>
+                    </a:p>
+                  </a:txBody>
+                  <a:tcPr anchor="ctr">
+                    <a:solidFill>
+                      <a:srgbClr val="F0F4F8"/>
+                    </a:solidFill>
+                  </a:tcPr>
+                </a:tc>
+                <a:tc>
+                  <a:txBody>
+                    <a:bodyPr/>
+                    <a:lstStyle/>
+                    <a:p>
+                      <a:pPr algn="ctr">
+                        <a:defRPr sz="1300">
+                          <a:solidFill>
+                            <a:srgbClr val="1A1A2E"/>
+                          </a:solidFill>
+                          <a:latin typeface="Calibri"/>
+                        </a:defRPr>
+                      </a:pPr>
+                      <a:r>
+                        <a:t>+0.087</a:t>
+                      </a:r>
+                    </a:p>
+                  </a:txBody>
+                  <a:tcPr anchor="ctr">
+                    <a:solidFill>
+                      <a:srgbClr val="F0F4F8"/>
+                    </a:solidFill>
+                  </a:tcPr>
+                </a:tc>
+                <a:tc>
+                  <a:txBody>
+                    <a:bodyPr/>
+                    <a:lstStyle/>
+                    <a:p>
+                      <a:pPr algn="ctr">
+                        <a:defRPr sz="1300">
+                          <a:solidFill>
+                            <a:srgbClr val="1A1A2E"/>
+                          </a:solidFill>
+                          <a:latin typeface="Calibri"/>
+                        </a:defRPr>
+                      </a:pPr>
+                      <a:r>
+                        <a:t>0.692</a:t>
+                      </a:r>
+                    </a:p>
+                  </a:txBody>
+                  <a:tcPr anchor="ctr">
+                    <a:solidFill>
+                      <a:srgbClr val="F0F4F8"/>
+                    </a:solidFill>
+                  </a:tcPr>
+                </a:tc>
+                <a:tc>
+                  <a:txBody>
+                    <a:bodyPr/>
+                    <a:lstStyle/>
+                    <a:p>
+                      <a:pPr algn="ctr">
+                        <a:defRPr sz="1300">
+                          <a:solidFill>
+                            <a:srgbClr val="1A1A2E"/>
+                          </a:solidFill>
+                          <a:latin typeface="Calibri"/>
+                        </a:defRPr>
+                      </a:pPr>
+                      <a:r>
+                        <a:t>118.3</a:t>
+                      </a:r>
+                    </a:p>
+                  </a:txBody>
+                  <a:tcPr anchor="ctr">
+                    <a:solidFill>
+                      <a:srgbClr val="F0F4F8"/>
+                    </a:solidFill>
+                  </a:tcPr>
+                </a:tc>
+              </a:tr>
+            </a:tbl>
+          </a:graphicData>
+        </a:graphic>
+      </p:graphicFrame>
+      <p:sp>
+        <p:nvSpPr>
+          <p:cNvPr id="8" name="TextBox 7"/>
           <p:cNvSpPr txBox="1"/>
           <p:nvPr/>
         </p:nvSpPr>
         <p:spPr>
           <a:xfrm>
-            <a:off x="731520" y="1828800"/>
-            <a:ext cx="5303520" cy="3200400"/>
+            <a:off x="731520" y="3657600"/>
+            <a:ext cx="5303520" cy="365760"/>
           </a:xfrm>
           <a:prstGeom prst="rect">
             <a:avLst/>
@@ -6986,145 +7569,30 @@
           </a:bodyPr>
           <a:lstStyle/>
           <a:p>
-            <a:pPr>
-              <a:spcAft>
-                <a:spcPts val="600"/>
-              </a:spcAft>
-            </a:pPr>
-            <a:r>
-              <a:rPr sz="1400">
-                <a:solidFill>
-                  <a:srgbClr val="1A1A2E"/>
-                </a:solidFill>
-                <a:latin typeface="Calibri"/>
-              </a:rPr>
-              <a:t>• • Hydrofoil: 수면 위 비행 → 파도 교란에 극도로 민감</a:t>
-            </a:r>
-          </a:p>
-          <a:p>
-            <a:pPr>
-              <a:spcAft>
-                <a:spcPts val="600"/>
-              </a:spcAft>
-            </a:pPr>
-            <a:r>
-              <a:rPr sz="1400">
-                <a:solidFill>
-                  <a:srgbClr val="1A1A2E"/>
-                </a:solidFill>
-                <a:latin typeface="Calibri"/>
-              </a:rPr>
-              <a:t>• • Foil 잠수 깊이 0.5~1.0m → AoA 직접 변동</a:t>
-            </a:r>
-          </a:p>
-          <a:p>
-            <a:pPr>
-              <a:spcAft>
-                <a:spcPts val="600"/>
-              </a:spcAft>
-            </a:pPr>
-            <a:r>
-              <a:rPr sz="1400">
-                <a:solidFill>
-                  <a:srgbClr val="1A1A2E"/>
-                </a:solidFill>
-                <a:latin typeface="Calibri"/>
-              </a:rPr>
-              <a:t>• • PD feedback만으로는 encounter freq 대응 한계</a:t>
-            </a:r>
-          </a:p>
-          <a:p>
-            <a:pPr>
-              <a:spcAft>
-                <a:spcPts val="600"/>
-              </a:spcAft>
-            </a:pPr>
-            <a:r>
-              <a:rPr sz="1400">
-                <a:solidFill>
-                  <a:srgbClr val="1A1A2E"/>
-                </a:solidFill>
-                <a:latin typeface="Calibri"/>
-              </a:rPr>
-              <a:t>•   (50~100ms loop delay = 파도 주기의 5~10%)</a:t>
-            </a:r>
-          </a:p>
-          <a:p>
-            <a:pPr>
-              <a:spcAft>
-                <a:spcPts val="600"/>
-              </a:spcAft>
-            </a:pPr>
-            <a:r>
-              <a:rPr sz="1400">
-                <a:solidFill>
-                  <a:srgbClr val="1A1A2E"/>
-                </a:solidFill>
-                <a:latin typeface="Calibri"/>
-              </a:rPr>
-              <a:t>• </a:t>
-            </a:r>
-          </a:p>
-          <a:p>
-            <a:pPr>
-              <a:spcAft>
-                <a:spcPts val="600"/>
-              </a:spcAft>
-            </a:pPr>
-            <a:r>
-              <a:rPr sz="1400">
-                <a:solidFill>
-                  <a:srgbClr val="1A1A2E"/>
-                </a:solidFill>
-                <a:latin typeface="Calibri"/>
-              </a:rPr>
-              <a:t>• • 핵심 아이디어: WaveSplat의 spectral model로</a:t>
-            </a:r>
-          </a:p>
-          <a:p>
-            <a:pPr>
-              <a:spcAft>
-                <a:spcPts val="600"/>
-              </a:spcAft>
-            </a:pPr>
-            <a:r>
-              <a:rPr sz="1400">
-                <a:solidFill>
-                  <a:srgbClr val="1A1A2E"/>
-                </a:solidFill>
-                <a:latin typeface="Calibri"/>
-              </a:rPr>
-              <a:t>•   foil 전방 파도를 미리 예측 → feedforward 보상</a:t>
-            </a:r>
-          </a:p>
-          <a:p>
-            <a:pPr>
-              <a:spcAft>
-                <a:spcPts val="600"/>
-              </a:spcAft>
-            </a:pPr>
-            <a:r>
-              <a:rPr sz="1400">
-                <a:solidFill>
-                  <a:srgbClr val="1A1A2E"/>
-                </a:solidFill>
-                <a:latin typeface="Calibri"/>
-              </a:rPr>
-              <a:t>• • 자동차 preview suspension의 해양 버전</a:t>
-            </a:r>
-          </a:p>
-        </p:txBody>
-      </p:sp>
-      <p:sp>
-        <p:nvSpPr>
-          <p:cNvPr id="8" name="TextBox 7"/>
+            <a:pPr algn="l">
+              <a:defRPr sz="2000" b="1">
+                <a:solidFill>
+                  <a:srgbClr val="E8553A"/>
+                </a:solidFill>
+                <a:latin typeface="Calibri"/>
+              </a:defRPr>
+            </a:pPr>
+            <a:r>
+              <a:t>Regime-dependent 분석</a:t>
+            </a:r>
+          </a:p>
+        </p:txBody>
+      </p:sp>
+      <p:sp>
+        <p:nvSpPr>
+          <p:cNvPr id="9" name="TextBox 8"/>
           <p:cNvSpPr txBox="1"/>
           <p:nvPr/>
         </p:nvSpPr>
         <p:spPr>
           <a:xfrm>
-            <a:off x="6400800" y="1371600"/>
-            <a:ext cx="5303520" cy="365760"/>
+            <a:off x="731520" y="4114800"/>
+            <a:ext cx="5303520" cy="2743200"/>
           </a:xfrm>
           <a:prstGeom prst="rect">
             <a:avLst/>
@@ -7137,30 +7605,161 @@
           </a:bodyPr>
           <a:lstStyle/>
           <a:p>
-            <a:pPr algn="l">
-              <a:defRPr sz="2000" b="1">
-                <a:solidFill>
-                  <a:srgbClr val="E8553A"/>
-                </a:solidFill>
-                <a:latin typeface="Calibri"/>
-              </a:defRPr>
-            </a:pPr>
-            <a:r>
-              <a:t>제어 구조: PD + Wave-Preview FF</a:t>
-            </a:r>
-          </a:p>
-        </p:txBody>
-      </p:sp>
-      <p:sp>
-        <p:nvSpPr>
-          <p:cNvPr id="9" name="TextBox 8"/>
+            <a:pPr>
+              <a:spcAft>
+                <a:spcPts val="600"/>
+              </a:spcAft>
+            </a:pPr>
+            <a:r>
+              <a:rPr sz="1400">
+                <a:solidFill>
+                  <a:srgbClr val="1A1A2E"/>
+                </a:solidFill>
+                <a:latin typeface="Calibri"/>
+              </a:rPr>
+              <a:t>• • 전체: WS 51승 vs LETKF 49승 (사실상 draw)</a:t>
+            </a:r>
+          </a:p>
+          <a:p>
+            <a:pPr>
+              <a:spcAft>
+                <a:spcPts val="600"/>
+              </a:spcAft>
+            </a:pPr>
+            <a:r>
+              <a:rPr sz="1400">
+                <a:solidFill>
+                  <a:srgbClr val="1A1A2E"/>
+                </a:solidFill>
+                <a:latin typeface="Calibri"/>
+              </a:rPr>
+              <a:t>• </a:t>
+            </a:r>
+          </a:p>
+          <a:p>
+            <a:pPr>
+              <a:spcAft>
+                <a:spcPts val="600"/>
+              </a:spcAft>
+            </a:pPr>
+            <a:r>
+              <a:rPr sz="1400">
+                <a:solidFill>
+                  <a:srgbClr val="1A1A2E"/>
+                </a:solidFill>
+                <a:latin typeface="Calibri"/>
+              </a:rPr>
+              <a:t>• • ≤5 comp (60 ep): WS SS=+0.37 vs LETKF +0.11</a:t>
+            </a:r>
+          </a:p>
+          <a:p>
+            <a:pPr>
+              <a:spcAft>
+                <a:spcPts val="600"/>
+              </a:spcAft>
+            </a:pPr>
+            <a:r>
+              <a:rPr sz="1400">
+                <a:solidFill>
+                  <a:srgbClr val="1A1A2E"/>
+                </a:solidFill>
+                <a:latin typeface="Calibri"/>
+              </a:rPr>
+              <a:t>• •   → 단순 해상에서 WaveSplat 압도</a:t>
+            </a:r>
+          </a:p>
+          <a:p>
+            <a:pPr>
+              <a:spcAft>
+                <a:spcPts val="600"/>
+              </a:spcAft>
+            </a:pPr>
+            <a:r>
+              <a:rPr sz="1400">
+                <a:solidFill>
+                  <a:srgbClr val="1A1A2E"/>
+                </a:solidFill>
+                <a:latin typeface="Calibri"/>
+              </a:rPr>
+              <a:t>• </a:t>
+            </a:r>
+          </a:p>
+          <a:p>
+            <a:pPr>
+              <a:spcAft>
+                <a:spcPts val="600"/>
+              </a:spcAft>
+            </a:pPr>
+            <a:r>
+              <a:rPr sz="1400">
+                <a:solidFill>
+                  <a:srgbClr val="1A1A2E"/>
+                </a:solidFill>
+                <a:latin typeface="Calibri"/>
+              </a:rPr>
+              <a:t>• • ≥15 comp (40 ep): WS SS=−0.46 vs LETKF +0.20</a:t>
+            </a:r>
+          </a:p>
+          <a:p>
+            <a:pPr>
+              <a:spcAft>
+                <a:spcPts val="600"/>
+              </a:spcAft>
+            </a:pPr>
+            <a:r>
+              <a:rPr sz="1400">
+                <a:solidFill>
+                  <a:srgbClr val="1A1A2E"/>
+                </a:solidFill>
+                <a:latin typeface="Calibri"/>
+              </a:rPr>
+              <a:t>• •   → 복잡 해상에서 LETKF 우세</a:t>
+            </a:r>
+          </a:p>
+          <a:p>
+            <a:pPr>
+              <a:spcAft>
+                <a:spcPts val="600"/>
+              </a:spcAft>
+            </a:pPr>
+            <a:r>
+              <a:rPr sz="1400">
+                <a:solidFill>
+                  <a:srgbClr val="1A1A2E"/>
+                </a:solidFill>
+                <a:latin typeface="Calibri"/>
+              </a:rPr>
+              <a:t>• </a:t>
+            </a:r>
+          </a:p>
+          <a:p>
+            <a:pPr>
+              <a:spcAft>
+                <a:spcPts val="600"/>
+              </a:spcAft>
+            </a:pPr>
+            <a:r>
+              <a:rPr sz="1400">
+                <a:solidFill>
+                  <a:srgbClr val="1A1A2E"/>
+                </a:solidFill>
+                <a:latin typeface="Calibri"/>
+              </a:rPr>
+              <a:t>• • 속도: 14.5 vs 118.3 ms (8.1× faster)</a:t>
+            </a:r>
+          </a:p>
+        </p:txBody>
+      </p:sp>
+      <p:sp>
+        <p:nvSpPr>
+          <p:cNvPr id="10" name="TextBox 9"/>
           <p:cNvSpPr txBox="1"/>
           <p:nvPr/>
         </p:nvSpPr>
         <p:spPr>
           <a:xfrm>
-            <a:off x="6400800" y="1828800"/>
-            <a:ext cx="5303520" cy="4114800"/>
+            <a:off x="6400800" y="3657600"/>
+            <a:ext cx="5303520" cy="365760"/>
           </a:xfrm>
           <a:prstGeom prst="rect">
             <a:avLst/>
@@ -7173,241 +7772,30 @@
           </a:bodyPr>
           <a:lstStyle/>
           <a:p>
-            <a:pPr>
-              <a:spcAft>
-                <a:spcPts val="600"/>
-              </a:spcAft>
-            </a:pPr>
-            <a:r>
-              <a:rPr sz="1300">
-                <a:solidFill>
-                  <a:srgbClr val="1A1A2E"/>
-                </a:solidFill>
-                <a:latin typeface="Calibri"/>
-              </a:rPr>
-              <a:t>• • 2DOF 모델: heave + pitch</a:t>
-            </a:r>
-          </a:p>
-          <a:p>
-            <a:pPr>
-              <a:spcAft>
-                <a:spcPts val="600"/>
-              </a:spcAft>
-            </a:pPr>
-            <a:r>
-              <a:rPr sz="1300">
-                <a:solidFill>
-                  <a:srgbClr val="1A1A2E"/>
-                </a:solidFill>
-                <a:latin typeface="Calibri"/>
-              </a:rPr>
-              <a:t>• • 선박: 1700kg, 22kts, tandem foil</a:t>
-            </a:r>
-          </a:p>
-          <a:p>
-            <a:pPr>
-              <a:spcAft>
-                <a:spcPts val="600"/>
-              </a:spcAft>
-            </a:pPr>
-            <a:r>
-              <a:rPr sz="1300">
-                <a:solidFill>
-                  <a:srgbClr val="1A1A2E"/>
-                </a:solidFill>
-                <a:latin typeface="Calibri"/>
-              </a:rPr>
-              <a:t>• • NACA 63-series foil sections</a:t>
-            </a:r>
-          </a:p>
-          <a:p>
-            <a:pPr>
-              <a:spcAft>
-                <a:spcPts val="600"/>
-              </a:spcAft>
-            </a:pPr>
-            <a:r>
-              <a:rPr sz="1300">
-                <a:solidFill>
-                  <a:srgbClr val="1A1A2E"/>
-                </a:solidFill>
-                <a:latin typeface="Calibri"/>
-              </a:rPr>
-              <a:t>• </a:t>
-            </a:r>
-          </a:p>
-          <a:p>
-            <a:pPr>
-              <a:spcAft>
-                <a:spcPts val="600"/>
-              </a:spcAft>
-            </a:pPr>
-            <a:r>
-              <a:rPr sz="1300">
-                <a:solidFill>
-                  <a:srgbClr val="1A1A2E"/>
-                </a:solidFill>
-                <a:latin typeface="Calibri"/>
-              </a:rPr>
-              <a:t>• • PD feedback: collective-differential</a:t>
-            </a:r>
-          </a:p>
-          <a:p>
-            <a:pPr>
-              <a:spcAft>
-                <a:spcPts val="600"/>
-              </a:spcAft>
-            </a:pPr>
-            <a:r>
-              <a:rPr sz="1300">
-                <a:solidFill>
-                  <a:srgbClr val="1A1A2E"/>
-                </a:solidFill>
-                <a:latin typeface="Calibri"/>
-              </a:rPr>
-              <a:t>•   δ_f = δ_c - δ_d,  δ_r = δ_c + δ_d</a:t>
-            </a:r>
-          </a:p>
-          <a:p>
-            <a:pPr>
-              <a:spcAft>
-                <a:spcPts val="600"/>
-              </a:spcAft>
-            </a:pPr>
-            <a:r>
-              <a:rPr sz="1300">
-                <a:solidFill>
-                  <a:srgbClr val="1A1A2E"/>
-                </a:solidFill>
-                <a:latin typeface="Calibri"/>
-              </a:rPr>
-              <a:t>• </a:t>
-            </a:r>
-          </a:p>
-          <a:p>
-            <a:pPr>
-              <a:spcAft>
-                <a:spcPts val="600"/>
-              </a:spcAft>
-            </a:pPr>
-            <a:r>
-              <a:rPr sz="1300">
-                <a:solidFill>
-                  <a:srgbClr val="1A1A2E"/>
-                </a:solidFill>
-                <a:latin typeface="Calibri"/>
-              </a:rPr>
-              <a:t>• • Feedforward:</a:t>
-            </a:r>
-          </a:p>
-          <a:p>
-            <a:pPr>
-              <a:spcAft>
-                <a:spcPts val="600"/>
-              </a:spcAft>
-            </a:pPr>
-            <a:r>
-              <a:rPr sz="1300">
-                <a:solidFill>
-                  <a:srgbClr val="1A1A2E"/>
-                </a:solidFill>
-                <a:latin typeface="Calibri"/>
-              </a:rPr>
-              <a:t>•   x_preview = x_foil + V · Δt_prev</a:t>
-            </a:r>
-          </a:p>
-          <a:p>
-            <a:pPr>
-              <a:spcAft>
-                <a:spcPts val="600"/>
-              </a:spcAft>
-            </a:pPr>
-            <a:r>
-              <a:rPr sz="1300">
-                <a:solidFill>
-                  <a:srgbClr val="1A1A2E"/>
-                </a:solidFill>
-                <a:latin typeface="Calibri"/>
-              </a:rPr>
-              <a:t>•   α_wave = -∂η/∂x - w/V  (at preview pt)</a:t>
-            </a:r>
-          </a:p>
-          <a:p>
-            <a:pPr>
-              <a:spcAft>
-                <a:spcPts val="600"/>
-              </a:spcAft>
-            </a:pPr>
-            <a:r>
-              <a:rPr sz="1300">
-                <a:solidFill>
-                  <a:srgbClr val="1A1A2E"/>
-                </a:solidFill>
-                <a:latin typeface="Calibri"/>
-              </a:rPr>
-              <a:t>•   δ_ff = -K_ff · α_wave  (K_ff=0.8)</a:t>
-            </a:r>
-          </a:p>
-          <a:p>
-            <a:pPr>
-              <a:spcAft>
-                <a:spcPts val="600"/>
-              </a:spcAft>
-            </a:pPr>
-            <a:r>
-              <a:rPr sz="1300">
-                <a:solidFill>
-                  <a:srgbClr val="1A1A2E"/>
-                </a:solidFill>
-                <a:latin typeface="Calibri"/>
-              </a:rPr>
-              <a:t>• </a:t>
-            </a:r>
-          </a:p>
-          <a:p>
-            <a:pPr>
-              <a:spcAft>
-                <a:spcPts val="600"/>
-              </a:spcAft>
-            </a:pPr>
-            <a:r>
-              <a:rPr sz="1300">
-                <a:solidFill>
-                  <a:srgbClr val="1A1A2E"/>
-                </a:solidFill>
-                <a:latin typeface="Calibri"/>
-              </a:rPr>
-              <a:t>• • IIR LP filter (α=0.05, fc≈0.8Hz)</a:t>
-            </a:r>
-          </a:p>
-          <a:p>
-            <a:pPr>
-              <a:spcAft>
-                <a:spcPts val="600"/>
-              </a:spcAft>
-            </a:pPr>
-            <a:r>
-              <a:rPr sz="1300">
-                <a:solidFill>
-                  <a:srgbClr val="1A1A2E"/>
-                </a:solidFill>
-                <a:latin typeface="Calibri"/>
-              </a:rPr>
-              <a:t>•   → 추정 노이즈 억제, 파도 신호 통과</a:t>
-            </a:r>
-          </a:p>
-        </p:txBody>
-      </p:sp>
-      <p:sp>
-        <p:nvSpPr>
-          <p:cNvPr id="10" name="TextBox 9"/>
+            <a:pPr algn="l">
+              <a:defRPr sz="2000" b="1">
+                <a:solidFill>
+                  <a:srgbClr val="E8553A"/>
+                </a:solidFill>
+                <a:latin typeface="Calibri"/>
+              </a:defRPr>
+            </a:pPr>
+            <a:r>
+              <a:t>12-episode subset (GPR-disp 포함)</a:t>
+            </a:r>
+          </a:p>
+        </p:txBody>
+      </p:sp>
+      <p:sp>
+        <p:nvSpPr>
+          <p:cNvPr id="11" name="TextBox 10"/>
           <p:cNvSpPr txBox="1"/>
           <p:nvPr/>
         </p:nvSpPr>
         <p:spPr>
           <a:xfrm>
-            <a:off x="10972800" y="6492240"/>
-            <a:ext cx="1097280" cy="274320"/>
+            <a:off x="6400800" y="4114800"/>
+            <a:ext cx="5303520" cy="2743200"/>
           </a:xfrm>
           <a:prstGeom prst="rect">
             <a:avLst/>
@@ -7420,6 +7808,189 @@
           </a:bodyPr>
           <a:lstStyle/>
           <a:p>
+            <a:pPr>
+              <a:spcAft>
+                <a:spcPts val="600"/>
+              </a:spcAft>
+            </a:pPr>
+            <a:r>
+              <a:rPr sz="1400">
+                <a:solidFill>
+                  <a:srgbClr val="1A1A2E"/>
+                </a:solidFill>
+                <a:latin typeface="Calibri"/>
+              </a:rPr>
+              <a:t>• • GPR-disp (3-frame, dispersion kernel):</a:t>
+            </a:r>
+          </a:p>
+          <a:p>
+            <a:pPr>
+              <a:spcAft>
+                <a:spcPts val="600"/>
+              </a:spcAft>
+            </a:pPr>
+            <a:r>
+              <a:rPr sz="1400">
+                <a:solidFill>
+                  <a:srgbClr val="1A1A2E"/>
+                </a:solidFill>
+                <a:latin typeface="Calibri"/>
+              </a:rPr>
+              <a:t>• •   nRMSE 0.267 vs WS 0.211 (21% 열위)</a:t>
+            </a:r>
+          </a:p>
+          <a:p>
+            <a:pPr>
+              <a:spcAft>
+                <a:spcPts val="600"/>
+              </a:spcAft>
+            </a:pPr>
+            <a:r>
+              <a:rPr sz="1400">
+                <a:solidFill>
+                  <a:srgbClr val="1A1A2E"/>
+                </a:solidFill>
+                <a:latin typeface="Calibri"/>
+              </a:rPr>
+              <a:t>• •   473.6 ms (WS 대비 36× 느림)</a:t>
+            </a:r>
+          </a:p>
+          <a:p>
+            <a:pPr>
+              <a:spcAft>
+                <a:spcPts val="600"/>
+              </a:spcAft>
+            </a:pPr>
+            <a:r>
+              <a:rPr sz="1400">
+                <a:solidFill>
+                  <a:srgbClr val="1A1A2E"/>
+                </a:solidFill>
+                <a:latin typeface="Calibri"/>
+              </a:rPr>
+              <a:t>• </a:t>
+            </a:r>
+          </a:p>
+          <a:p>
+            <a:pPr>
+              <a:spcAft>
+                <a:spcPts val="600"/>
+              </a:spcAft>
+            </a:pPr>
+            <a:r>
+              <a:rPr sz="1400">
+                <a:solidFill>
+                  <a:srgbClr val="1A1A2E"/>
+                </a:solidFill>
+                <a:latin typeface="Calibri"/>
+              </a:rPr>
+              <a:t>• • 결론:</a:t>
+            </a:r>
+          </a:p>
+          <a:p>
+            <a:pPr>
+              <a:spcAft>
+                <a:spcPts val="600"/>
+              </a:spcAft>
+            </a:pPr>
+            <a:r>
+              <a:rPr sz="1400">
+                <a:solidFill>
+                  <a:srgbClr val="1A1A2E"/>
+                </a:solidFill>
+                <a:latin typeface="Calibri"/>
+              </a:rPr>
+              <a:t>• •   nRMSE 동등 but WS 8× faster</a:t>
+            </a:r>
+          </a:p>
+          <a:p>
+            <a:pPr>
+              <a:spcAft>
+                <a:spcPts val="600"/>
+              </a:spcAft>
+            </a:pPr>
+            <a:r>
+              <a:rPr sz="1400">
+                <a:solidFill>
+                  <a:srgbClr val="1A1A2E"/>
+                </a:solidFill>
+                <a:latin typeface="Calibri"/>
+              </a:rPr>
+              <a:t>• •   SS는 regime-dependent</a:t>
+            </a:r>
+          </a:p>
+          <a:p>
+            <a:pPr>
+              <a:spcAft>
+                <a:spcPts val="600"/>
+              </a:spcAft>
+            </a:pPr>
+            <a:r>
+              <a:rPr sz="1400">
+                <a:solidFill>
+                  <a:srgbClr val="1A1A2E"/>
+                </a:solidFill>
+                <a:latin typeface="Calibri"/>
+              </a:rPr>
+              <a:t>• •   → complexity-aware method selection이 최선</a:t>
+            </a:r>
+          </a:p>
+          <a:p>
+            <a:pPr>
+              <a:spcAft>
+                <a:spcPts val="600"/>
+              </a:spcAft>
+            </a:pPr>
+            <a:r>
+              <a:rPr sz="1400">
+                <a:solidFill>
+                  <a:srgbClr val="1A1A2E"/>
+                </a:solidFill>
+                <a:latin typeface="Calibri"/>
+              </a:rPr>
+              <a:t>• •   단순 해상: WaveSplat</a:t>
+            </a:r>
+          </a:p>
+          <a:p>
+            <a:pPr>
+              <a:spcAft>
+                <a:spcPts val="600"/>
+              </a:spcAft>
+            </a:pPr>
+            <a:r>
+              <a:rPr sz="1400">
+                <a:solidFill>
+                  <a:srgbClr val="1A1A2E"/>
+                </a:solidFill>
+                <a:latin typeface="Calibri"/>
+              </a:rPr>
+              <a:t>• •   복잡 해상: LETKF fallback</a:t>
+            </a:r>
+          </a:p>
+        </p:txBody>
+      </p:sp>
+      <p:sp>
+        <p:nvSpPr>
+          <p:cNvPr id="12" name="TextBox 11"/>
+          <p:cNvSpPr txBox="1"/>
+          <p:nvPr/>
+        </p:nvSpPr>
+        <p:spPr>
+          <a:xfrm>
+            <a:off x="10972800" y="6492240"/>
+            <a:ext cx="1097280" cy="274320"/>
+          </a:xfrm>
+          <a:prstGeom prst="rect">
+            <a:avLst/>
+          </a:prstGeom>
+          <a:noFill/>
+        </p:spPr>
+        <p:txBody>
+          <a:bodyPr wrap="square">
+            <a:spAutoFit/>
+          </a:bodyPr>
+          <a:lstStyle/>
+          <a:p>
             <a:pPr algn="r">
               <a:defRPr sz="1000" b="0">
                 <a:solidFill>
@@ -7429,7 +8000,7 @@
               </a:defRPr>
             </a:pPr>
             <a:r>
-              <a:t>16/23</a:t>
+              <a:t>16/24</a:t>
             </a:r>
           </a:p>
         </p:txBody>
@@ -7443,6 +8014,689 @@
 </file>
 
 <file path=ppt/slides/slide17.xml><?xml version="1.0" encoding="utf-8"?>
+<p:sld xmlns:a="http://schemas.openxmlformats.org/drawingml/2006/main" xmlns:p="http://schemas.openxmlformats.org/presentationml/2006/main" xmlns:r="http://schemas.openxmlformats.org/officeDocument/2006/relationships">
+  <p:cSld>
+    <p:bg>
+      <p:bgPr>
+        <a:solidFill>
+          <a:srgbClr val="FFFFFF"/>
+        </a:solidFill>
+        <a:effectLst/>
+      </p:bgPr>
+    </p:bg>
+    <p:spTree>
+      <p:nvGrpSpPr>
+        <p:cNvPr id="1" name=""/>
+        <p:cNvGrpSpPr/>
+        <p:nvPr/>
+      </p:nvGrpSpPr>
+      <p:grpSpPr/>
+      <p:sp>
+        <p:nvSpPr>
+          <p:cNvPr id="2" name="Rectangle 1"/>
+          <p:cNvSpPr/>
+          <p:nvPr/>
+        </p:nvSpPr>
+        <p:spPr>
+          <a:xfrm>
+            <a:off x="0" y="0"/>
+            <a:ext cx="12191695" cy="1097280"/>
+          </a:xfrm>
+          <a:prstGeom prst="rect">
+            <a:avLst/>
+          </a:prstGeom>
+          <a:solidFill>
+            <a:srgbClr val="1A1A2E"/>
+          </a:solidFill>
+          <a:ln>
+            <a:noFill/>
+          </a:ln>
+        </p:spPr>
+        <p:style>
+          <a:lnRef idx="1">
+            <a:schemeClr val="accent1"/>
+          </a:lnRef>
+          <a:fillRef idx="3">
+            <a:schemeClr val="accent1"/>
+          </a:fillRef>
+          <a:effectRef idx="2">
+            <a:schemeClr val="accent1"/>
+          </a:effectRef>
+          <a:fontRef idx="minor">
+            <a:schemeClr val="lt1"/>
+          </a:fontRef>
+        </p:style>
+        <p:txBody>
+          <a:bodyPr rtlCol="0" anchor="ctr"/>
+          <a:lstStyle/>
+          <a:p>
+            <a:pPr algn="ctr"/>
+          </a:p>
+        </p:txBody>
+      </p:sp>
+      <p:sp>
+        <p:nvSpPr>
+          <p:cNvPr id="3" name="TextBox 2"/>
+          <p:cNvSpPr txBox="1"/>
+          <p:nvPr/>
+        </p:nvSpPr>
+        <p:spPr>
+          <a:xfrm>
+            <a:off x="457200" y="137160"/>
+            <a:ext cx="10972800" cy="457200"/>
+          </a:xfrm>
+          <a:prstGeom prst="rect">
+            <a:avLst/>
+          </a:prstGeom>
+          <a:noFill/>
+        </p:spPr>
+        <p:txBody>
+          <a:bodyPr wrap="square">
+            <a:spAutoFit/>
+          </a:bodyPr>
+          <a:lstStyle/>
+          <a:p>
+            <a:pPr algn="l">
+              <a:defRPr sz="1400" b="0">
+                <a:solidFill>
+                  <a:srgbClr val="007ACC"/>
+                </a:solidFill>
+                <a:latin typeface="Calibri"/>
+              </a:defRPr>
+            </a:pPr>
+            <a:r>
+              <a:t>  05</a:t>
+            </a:r>
+          </a:p>
+        </p:txBody>
+      </p:sp>
+      <p:sp>
+        <p:nvSpPr>
+          <p:cNvPr id="4" name="TextBox 3"/>
+          <p:cNvSpPr txBox="1"/>
+          <p:nvPr/>
+        </p:nvSpPr>
+        <p:spPr>
+          <a:xfrm>
+            <a:off x="457200" y="320040"/>
+            <a:ext cx="10972800" cy="640080"/>
+          </a:xfrm>
+          <a:prstGeom prst="rect">
+            <a:avLst/>
+          </a:prstGeom>
+          <a:noFill/>
+        </p:spPr>
+        <p:txBody>
+          <a:bodyPr wrap="square">
+            <a:spAutoFit/>
+          </a:bodyPr>
+          <a:lstStyle/>
+          <a:p>
+            <a:pPr algn="l">
+              <a:defRPr sz="2800" b="1">
+                <a:solidFill>
+                  <a:srgbClr val="FFFFFF"/>
+                </a:solidFill>
+                <a:latin typeface="Calibri"/>
+              </a:defRPr>
+            </a:pPr>
+            <a:r>
+              <a:t>  논문 2: Hydrofoil Feedforward Control</a:t>
+            </a:r>
+          </a:p>
+        </p:txBody>
+      </p:sp>
+      <p:sp>
+        <p:nvSpPr>
+          <p:cNvPr id="5" name="TextBox 4"/>
+          <p:cNvSpPr txBox="1"/>
+          <p:nvPr/>
+        </p:nvSpPr>
+        <p:spPr>
+          <a:xfrm>
+            <a:off x="457200" y="685800"/>
+            <a:ext cx="10972800" cy="365760"/>
+          </a:xfrm>
+          <a:prstGeom prst="rect">
+            <a:avLst/>
+          </a:prstGeom>
+          <a:noFill/>
+        </p:spPr>
+        <p:txBody>
+          <a:bodyPr wrap="square">
+            <a:spAutoFit/>
+          </a:bodyPr>
+          <a:lstStyle/>
+          <a:p>
+            <a:pPr algn="l">
+              <a:defRPr sz="1400" b="0">
+                <a:solidFill>
+                  <a:srgbClr val="AABBCC"/>
+                </a:solidFill>
+                <a:latin typeface="Calibri"/>
+              </a:defRPr>
+            </a:pPr>
+            <a:r>
+              <a:t>  Wave-Preview Control for Hydrofoil Vessels</a:t>
+            </a:r>
+          </a:p>
+        </p:txBody>
+      </p:sp>
+      <p:sp>
+        <p:nvSpPr>
+          <p:cNvPr id="6" name="TextBox 5"/>
+          <p:cNvSpPr txBox="1"/>
+          <p:nvPr/>
+        </p:nvSpPr>
+        <p:spPr>
+          <a:xfrm>
+            <a:off x="731520" y="1371600"/>
+            <a:ext cx="5303520" cy="365760"/>
+          </a:xfrm>
+          <a:prstGeom prst="rect">
+            <a:avLst/>
+          </a:prstGeom>
+          <a:noFill/>
+        </p:spPr>
+        <p:txBody>
+          <a:bodyPr wrap="square">
+            <a:spAutoFit/>
+          </a:bodyPr>
+          <a:lstStyle/>
+          <a:p>
+            <a:pPr algn="l">
+              <a:defRPr sz="2000" b="1">
+                <a:solidFill>
+                  <a:srgbClr val="007ACC"/>
+                </a:solidFill>
+                <a:latin typeface="Calibri"/>
+              </a:defRPr>
+            </a:pPr>
+            <a:r>
+              <a:t>왜 하이드로포일 제어에 WaveSplat?</a:t>
+            </a:r>
+          </a:p>
+        </p:txBody>
+      </p:sp>
+      <p:sp>
+        <p:nvSpPr>
+          <p:cNvPr id="7" name="TextBox 6"/>
+          <p:cNvSpPr txBox="1"/>
+          <p:nvPr/>
+        </p:nvSpPr>
+        <p:spPr>
+          <a:xfrm>
+            <a:off x="731520" y="1828800"/>
+            <a:ext cx="5303520" cy="3200400"/>
+          </a:xfrm>
+          <a:prstGeom prst="rect">
+            <a:avLst/>
+          </a:prstGeom>
+          <a:noFill/>
+        </p:spPr>
+        <p:txBody>
+          <a:bodyPr wrap="square">
+            <a:spAutoFit/>
+          </a:bodyPr>
+          <a:lstStyle/>
+          <a:p>
+            <a:pPr>
+              <a:spcAft>
+                <a:spcPts val="600"/>
+              </a:spcAft>
+            </a:pPr>
+            <a:r>
+              <a:rPr sz="1400">
+                <a:solidFill>
+                  <a:srgbClr val="1A1A2E"/>
+                </a:solidFill>
+                <a:latin typeface="Calibri"/>
+              </a:rPr>
+              <a:t>• • Hydrofoil: 수면 위 비행 → 파도 교란에 극도로 민감</a:t>
+            </a:r>
+          </a:p>
+          <a:p>
+            <a:pPr>
+              <a:spcAft>
+                <a:spcPts val="600"/>
+              </a:spcAft>
+            </a:pPr>
+            <a:r>
+              <a:rPr sz="1400">
+                <a:solidFill>
+                  <a:srgbClr val="1A1A2E"/>
+                </a:solidFill>
+                <a:latin typeface="Calibri"/>
+              </a:rPr>
+              <a:t>• • Foil 잠수 깊이 0.5~1.0m → AoA 직접 변동</a:t>
+            </a:r>
+          </a:p>
+          <a:p>
+            <a:pPr>
+              <a:spcAft>
+                <a:spcPts val="600"/>
+              </a:spcAft>
+            </a:pPr>
+            <a:r>
+              <a:rPr sz="1400">
+                <a:solidFill>
+                  <a:srgbClr val="1A1A2E"/>
+                </a:solidFill>
+                <a:latin typeface="Calibri"/>
+              </a:rPr>
+              <a:t>• • PD feedback만으로는 encounter freq 대응 한계</a:t>
+            </a:r>
+          </a:p>
+          <a:p>
+            <a:pPr>
+              <a:spcAft>
+                <a:spcPts val="600"/>
+              </a:spcAft>
+            </a:pPr>
+            <a:r>
+              <a:rPr sz="1400">
+                <a:solidFill>
+                  <a:srgbClr val="1A1A2E"/>
+                </a:solidFill>
+                <a:latin typeface="Calibri"/>
+              </a:rPr>
+              <a:t>•   (50~100ms loop delay = 파도 주기의 5~10%)</a:t>
+            </a:r>
+          </a:p>
+          <a:p>
+            <a:pPr>
+              <a:spcAft>
+                <a:spcPts val="600"/>
+              </a:spcAft>
+            </a:pPr>
+            <a:r>
+              <a:rPr sz="1400">
+                <a:solidFill>
+                  <a:srgbClr val="1A1A2E"/>
+                </a:solidFill>
+                <a:latin typeface="Calibri"/>
+              </a:rPr>
+              <a:t>• </a:t>
+            </a:r>
+          </a:p>
+          <a:p>
+            <a:pPr>
+              <a:spcAft>
+                <a:spcPts val="600"/>
+              </a:spcAft>
+            </a:pPr>
+            <a:r>
+              <a:rPr sz="1400">
+                <a:solidFill>
+                  <a:srgbClr val="1A1A2E"/>
+                </a:solidFill>
+                <a:latin typeface="Calibri"/>
+              </a:rPr>
+              <a:t>• • 핵심 아이디어: WaveSplat의 spectral model로</a:t>
+            </a:r>
+          </a:p>
+          <a:p>
+            <a:pPr>
+              <a:spcAft>
+                <a:spcPts val="600"/>
+              </a:spcAft>
+            </a:pPr>
+            <a:r>
+              <a:rPr sz="1400">
+                <a:solidFill>
+                  <a:srgbClr val="1A1A2E"/>
+                </a:solidFill>
+                <a:latin typeface="Calibri"/>
+              </a:rPr>
+              <a:t>•   foil 전방 파도를 미리 예측 → feedforward 보상</a:t>
+            </a:r>
+          </a:p>
+          <a:p>
+            <a:pPr>
+              <a:spcAft>
+                <a:spcPts val="600"/>
+              </a:spcAft>
+            </a:pPr>
+            <a:r>
+              <a:rPr sz="1400">
+                <a:solidFill>
+                  <a:srgbClr val="1A1A2E"/>
+                </a:solidFill>
+                <a:latin typeface="Calibri"/>
+              </a:rPr>
+              <a:t>• • 자동차 preview suspension의 해양 버전</a:t>
+            </a:r>
+          </a:p>
+        </p:txBody>
+      </p:sp>
+      <p:sp>
+        <p:nvSpPr>
+          <p:cNvPr id="8" name="TextBox 7"/>
+          <p:cNvSpPr txBox="1"/>
+          <p:nvPr/>
+        </p:nvSpPr>
+        <p:spPr>
+          <a:xfrm>
+            <a:off x="6400800" y="1371600"/>
+            <a:ext cx="5303520" cy="365760"/>
+          </a:xfrm>
+          <a:prstGeom prst="rect">
+            <a:avLst/>
+          </a:prstGeom>
+          <a:noFill/>
+        </p:spPr>
+        <p:txBody>
+          <a:bodyPr wrap="square">
+            <a:spAutoFit/>
+          </a:bodyPr>
+          <a:lstStyle/>
+          <a:p>
+            <a:pPr algn="l">
+              <a:defRPr sz="2000" b="1">
+                <a:solidFill>
+                  <a:srgbClr val="E8553A"/>
+                </a:solidFill>
+                <a:latin typeface="Calibri"/>
+              </a:defRPr>
+            </a:pPr>
+            <a:r>
+              <a:t>제어 구조: PD + Wave-Preview FF</a:t>
+            </a:r>
+          </a:p>
+        </p:txBody>
+      </p:sp>
+      <p:sp>
+        <p:nvSpPr>
+          <p:cNvPr id="9" name="TextBox 8"/>
+          <p:cNvSpPr txBox="1"/>
+          <p:nvPr/>
+        </p:nvSpPr>
+        <p:spPr>
+          <a:xfrm>
+            <a:off x="6400800" y="1828800"/>
+            <a:ext cx="5303520" cy="4114800"/>
+          </a:xfrm>
+          <a:prstGeom prst="rect">
+            <a:avLst/>
+          </a:prstGeom>
+          <a:noFill/>
+        </p:spPr>
+        <p:txBody>
+          <a:bodyPr wrap="square">
+            <a:spAutoFit/>
+          </a:bodyPr>
+          <a:lstStyle/>
+          <a:p>
+            <a:pPr>
+              <a:spcAft>
+                <a:spcPts val="600"/>
+              </a:spcAft>
+            </a:pPr>
+            <a:r>
+              <a:rPr sz="1300">
+                <a:solidFill>
+                  <a:srgbClr val="1A1A2E"/>
+                </a:solidFill>
+                <a:latin typeface="Calibri"/>
+              </a:rPr>
+              <a:t>• • 2DOF 모델: heave + pitch</a:t>
+            </a:r>
+          </a:p>
+          <a:p>
+            <a:pPr>
+              <a:spcAft>
+                <a:spcPts val="600"/>
+              </a:spcAft>
+            </a:pPr>
+            <a:r>
+              <a:rPr sz="1300">
+                <a:solidFill>
+                  <a:srgbClr val="1A1A2E"/>
+                </a:solidFill>
+                <a:latin typeface="Calibri"/>
+              </a:rPr>
+              <a:t>• • 선박: 1700kg, 22kts, tandem foil</a:t>
+            </a:r>
+          </a:p>
+          <a:p>
+            <a:pPr>
+              <a:spcAft>
+                <a:spcPts val="600"/>
+              </a:spcAft>
+            </a:pPr>
+            <a:r>
+              <a:rPr sz="1300">
+                <a:solidFill>
+                  <a:srgbClr val="1A1A2E"/>
+                </a:solidFill>
+                <a:latin typeface="Calibri"/>
+              </a:rPr>
+              <a:t>• • NACA 63-series foil sections</a:t>
+            </a:r>
+          </a:p>
+          <a:p>
+            <a:pPr>
+              <a:spcAft>
+                <a:spcPts val="600"/>
+              </a:spcAft>
+            </a:pPr>
+            <a:r>
+              <a:rPr sz="1300">
+                <a:solidFill>
+                  <a:srgbClr val="1A1A2E"/>
+                </a:solidFill>
+                <a:latin typeface="Calibri"/>
+              </a:rPr>
+              <a:t>• </a:t>
+            </a:r>
+          </a:p>
+          <a:p>
+            <a:pPr>
+              <a:spcAft>
+                <a:spcPts val="600"/>
+              </a:spcAft>
+            </a:pPr>
+            <a:r>
+              <a:rPr sz="1300">
+                <a:solidFill>
+                  <a:srgbClr val="1A1A2E"/>
+                </a:solidFill>
+                <a:latin typeface="Calibri"/>
+              </a:rPr>
+              <a:t>• • PD feedback: collective-differential</a:t>
+            </a:r>
+          </a:p>
+          <a:p>
+            <a:pPr>
+              <a:spcAft>
+                <a:spcPts val="600"/>
+              </a:spcAft>
+            </a:pPr>
+            <a:r>
+              <a:rPr sz="1300">
+                <a:solidFill>
+                  <a:srgbClr val="1A1A2E"/>
+                </a:solidFill>
+                <a:latin typeface="Calibri"/>
+              </a:rPr>
+              <a:t>•   δ_f = δ_c - δ_d,  δ_r = δ_c + δ_d</a:t>
+            </a:r>
+          </a:p>
+          <a:p>
+            <a:pPr>
+              <a:spcAft>
+                <a:spcPts val="600"/>
+              </a:spcAft>
+            </a:pPr>
+            <a:r>
+              <a:rPr sz="1300">
+                <a:solidFill>
+                  <a:srgbClr val="1A1A2E"/>
+                </a:solidFill>
+                <a:latin typeface="Calibri"/>
+              </a:rPr>
+              <a:t>• </a:t>
+            </a:r>
+          </a:p>
+          <a:p>
+            <a:pPr>
+              <a:spcAft>
+                <a:spcPts val="600"/>
+              </a:spcAft>
+            </a:pPr>
+            <a:r>
+              <a:rPr sz="1300">
+                <a:solidFill>
+                  <a:srgbClr val="1A1A2E"/>
+                </a:solidFill>
+                <a:latin typeface="Calibri"/>
+              </a:rPr>
+              <a:t>• • Feedforward:</a:t>
+            </a:r>
+          </a:p>
+          <a:p>
+            <a:pPr>
+              <a:spcAft>
+                <a:spcPts val="600"/>
+              </a:spcAft>
+            </a:pPr>
+            <a:r>
+              <a:rPr sz="1300">
+                <a:solidFill>
+                  <a:srgbClr val="1A1A2E"/>
+                </a:solidFill>
+                <a:latin typeface="Calibri"/>
+              </a:rPr>
+              <a:t>•   x_preview = x_foil + V · Δt_prev</a:t>
+            </a:r>
+          </a:p>
+          <a:p>
+            <a:pPr>
+              <a:spcAft>
+                <a:spcPts val="600"/>
+              </a:spcAft>
+            </a:pPr>
+            <a:r>
+              <a:rPr sz="1300">
+                <a:solidFill>
+                  <a:srgbClr val="1A1A2E"/>
+                </a:solidFill>
+                <a:latin typeface="Calibri"/>
+              </a:rPr>
+              <a:t>•   α_wave = -∂η/∂x - w/V  (at preview pt)</a:t>
+            </a:r>
+          </a:p>
+          <a:p>
+            <a:pPr>
+              <a:spcAft>
+                <a:spcPts val="600"/>
+              </a:spcAft>
+            </a:pPr>
+            <a:r>
+              <a:rPr sz="1300">
+                <a:solidFill>
+                  <a:srgbClr val="1A1A2E"/>
+                </a:solidFill>
+                <a:latin typeface="Calibri"/>
+              </a:rPr>
+              <a:t>•   δ_ff = -K_ff · α_wave  (K_ff=0.8)</a:t>
+            </a:r>
+          </a:p>
+          <a:p>
+            <a:pPr>
+              <a:spcAft>
+                <a:spcPts val="600"/>
+              </a:spcAft>
+            </a:pPr>
+            <a:r>
+              <a:rPr sz="1300">
+                <a:solidFill>
+                  <a:srgbClr val="1A1A2E"/>
+                </a:solidFill>
+                <a:latin typeface="Calibri"/>
+              </a:rPr>
+              <a:t>• </a:t>
+            </a:r>
+          </a:p>
+          <a:p>
+            <a:pPr>
+              <a:spcAft>
+                <a:spcPts val="600"/>
+              </a:spcAft>
+            </a:pPr>
+            <a:r>
+              <a:rPr sz="1300">
+                <a:solidFill>
+                  <a:srgbClr val="1A1A2E"/>
+                </a:solidFill>
+                <a:latin typeface="Calibri"/>
+              </a:rPr>
+              <a:t>• • IIR LP filter (α=0.05, fc≈0.8Hz)</a:t>
+            </a:r>
+          </a:p>
+          <a:p>
+            <a:pPr>
+              <a:spcAft>
+                <a:spcPts val="600"/>
+              </a:spcAft>
+            </a:pPr>
+            <a:r>
+              <a:rPr sz="1300">
+                <a:solidFill>
+                  <a:srgbClr val="1A1A2E"/>
+                </a:solidFill>
+                <a:latin typeface="Calibri"/>
+              </a:rPr>
+              <a:t>•   → 추정 노이즈 억제, 파도 신호 통과</a:t>
+            </a:r>
+          </a:p>
+        </p:txBody>
+      </p:sp>
+      <p:sp>
+        <p:nvSpPr>
+          <p:cNvPr id="10" name="TextBox 9"/>
+          <p:cNvSpPr txBox="1"/>
+          <p:nvPr/>
+        </p:nvSpPr>
+        <p:spPr>
+          <a:xfrm>
+            <a:off x="10972800" y="6492240"/>
+            <a:ext cx="1097280" cy="274320"/>
+          </a:xfrm>
+          <a:prstGeom prst="rect">
+            <a:avLst/>
+          </a:prstGeom>
+          <a:noFill/>
+        </p:spPr>
+        <p:txBody>
+          <a:bodyPr wrap="square">
+            <a:spAutoFit/>
+          </a:bodyPr>
+          <a:lstStyle/>
+          <a:p>
+            <a:pPr algn="r">
+              <a:defRPr sz="1000" b="0">
+                <a:solidFill>
+                  <a:srgbClr val="666666"/>
+                </a:solidFill>
+                <a:latin typeface="Calibri"/>
+              </a:defRPr>
+            </a:pPr>
+            <a:r>
+              <a:t>17/24</a:t>
+            </a:r>
+          </a:p>
+        </p:txBody>
+      </p:sp>
+    </p:spTree>
+  </p:cSld>
+  <p:clrMapOvr>
+    <a:masterClrMapping/>
+  </p:clrMapOvr>
+</p:sld>
+</file>
+
+<file path=ppt/slides/slide18.xml><?xml version="1.0" encoding="utf-8"?>
 <p:sld xmlns:a="http://schemas.openxmlformats.org/drawingml/2006/main" xmlns:p="http://schemas.openxmlformats.org/presentationml/2006/main" xmlns:r="http://schemas.openxmlformats.org/officeDocument/2006/relationships">
   <p:cSld>
     <p:bg>
@@ -8440,7 +9694,7 @@
               </a:defRPr>
             </a:pPr>
             <a:r>
-              <a:t>17/23</a:t>
+              <a:t>18/24</a:t>
             </a:r>
           </a:p>
         </p:txBody>
@@ -8453,7 +9707,7 @@
 </p:sld>
 </file>
 
-<file path=ppt/slides/slide18.xml><?xml version="1.0" encoding="utf-8"?>
+<file path=ppt/slides/slide19.xml><?xml version="1.0" encoding="utf-8"?>
 <p:sld xmlns:a="http://schemas.openxmlformats.org/drawingml/2006/main" xmlns:p="http://schemas.openxmlformats.org/presentationml/2006/main" xmlns:r="http://schemas.openxmlformats.org/officeDocument/2006/relationships">
   <p:cSld>
     <p:bg>
@@ -9123,7 +10377,7 @@
               </a:defRPr>
             </a:pPr>
             <a:r>
-              <a:t>18/23</a:t>
+              <a:t>19/24</a:t>
             </a:r>
           </a:p>
         </p:txBody>
@@ -9136,7 +10390,534 @@
 </p:sld>
 </file>
 
-<file path=ppt/slides/slide19.xml><?xml version="1.0" encoding="utf-8"?>
+<file path=ppt/slides/slide2.xml><?xml version="1.0" encoding="utf-8"?>
+<p:sld xmlns:a="http://schemas.openxmlformats.org/drawingml/2006/main" xmlns:p="http://schemas.openxmlformats.org/presentationml/2006/main" xmlns:r="http://schemas.openxmlformats.org/officeDocument/2006/relationships">
+  <p:cSld>
+    <p:bg>
+      <p:bgPr>
+        <a:solidFill>
+          <a:srgbClr val="FFFFFF"/>
+        </a:solidFill>
+        <a:effectLst/>
+      </p:bgPr>
+    </p:bg>
+    <p:spTree>
+      <p:nvGrpSpPr>
+        <p:cNvPr id="1" name=""/>
+        <p:cNvGrpSpPr/>
+        <p:nvPr/>
+      </p:nvGrpSpPr>
+      <p:grpSpPr/>
+      <p:sp>
+        <p:nvSpPr>
+          <p:cNvPr id="2" name="Rectangle 1"/>
+          <p:cNvSpPr/>
+          <p:nvPr/>
+        </p:nvSpPr>
+        <p:spPr>
+          <a:xfrm>
+            <a:off x="0" y="0"/>
+            <a:ext cx="12191695" cy="1097280"/>
+          </a:xfrm>
+          <a:prstGeom prst="rect">
+            <a:avLst/>
+          </a:prstGeom>
+          <a:solidFill>
+            <a:srgbClr val="1A1A2E"/>
+          </a:solidFill>
+          <a:ln>
+            <a:noFill/>
+          </a:ln>
+        </p:spPr>
+        <p:style>
+          <a:lnRef idx="1">
+            <a:schemeClr val="accent1"/>
+          </a:lnRef>
+          <a:fillRef idx="3">
+            <a:schemeClr val="accent1"/>
+          </a:fillRef>
+          <a:effectRef idx="2">
+            <a:schemeClr val="accent1"/>
+          </a:effectRef>
+          <a:fontRef idx="minor">
+            <a:schemeClr val="lt1"/>
+          </a:fontRef>
+        </p:style>
+        <p:txBody>
+          <a:bodyPr rtlCol="0" anchor="ctr"/>
+          <a:lstStyle/>
+          <a:p>
+            <a:pPr algn="ctr"/>
+          </a:p>
+        </p:txBody>
+      </p:sp>
+      <p:sp>
+        <p:nvSpPr>
+          <p:cNvPr id="3" name="TextBox 2"/>
+          <p:cNvSpPr txBox="1"/>
+          <p:nvPr/>
+        </p:nvSpPr>
+        <p:spPr>
+          <a:xfrm>
+            <a:off x="457200" y="137160"/>
+            <a:ext cx="10972800" cy="457200"/>
+          </a:xfrm>
+          <a:prstGeom prst="rect">
+            <a:avLst/>
+          </a:prstGeom>
+          <a:noFill/>
+        </p:spPr>
+        <p:txBody>
+          <a:bodyPr wrap="square">
+            <a:spAutoFit/>
+          </a:bodyPr>
+          <a:lstStyle/>
+          <a:p>
+            <a:pPr algn="l">
+              <a:defRPr sz="1400" b="0">
+                <a:solidFill>
+                  <a:srgbClr val="007ACC"/>
+                </a:solidFill>
+                <a:latin typeface="Calibri"/>
+              </a:defRPr>
+            </a:pPr>
+            <a:r>
+              <a:t>  01</a:t>
+            </a:r>
+          </a:p>
+        </p:txBody>
+      </p:sp>
+      <p:sp>
+        <p:nvSpPr>
+          <p:cNvPr id="4" name="TextBox 3"/>
+          <p:cNvSpPr txBox="1"/>
+          <p:nvPr/>
+        </p:nvSpPr>
+        <p:spPr>
+          <a:xfrm>
+            <a:off x="457200" y="320040"/>
+            <a:ext cx="10972800" cy="640080"/>
+          </a:xfrm>
+          <a:prstGeom prst="rect">
+            <a:avLst/>
+          </a:prstGeom>
+          <a:noFill/>
+        </p:spPr>
+        <p:txBody>
+          <a:bodyPr wrap="square">
+            <a:spAutoFit/>
+          </a:bodyPr>
+          <a:lstStyle/>
+          <a:p>
+            <a:pPr algn="l">
+              <a:defRPr sz="2800" b="1">
+                <a:solidFill>
+                  <a:srgbClr val="FFFFFF"/>
+                </a:solidFill>
+                <a:latin typeface="Calibri"/>
+              </a:defRPr>
+            </a:pPr>
+            <a:r>
+              <a:t>  왜 이 연구가 필요한가?</a:t>
+            </a:r>
+          </a:p>
+        </p:txBody>
+      </p:sp>
+      <p:sp>
+        <p:nvSpPr>
+          <p:cNvPr id="5" name="TextBox 4"/>
+          <p:cNvSpPr txBox="1"/>
+          <p:nvPr/>
+        </p:nvSpPr>
+        <p:spPr>
+          <a:xfrm>
+            <a:off x="457200" y="685800"/>
+            <a:ext cx="10972800" cy="365760"/>
+          </a:xfrm>
+          <a:prstGeom prst="rect">
+            <a:avLst/>
+          </a:prstGeom>
+          <a:noFill/>
+        </p:spPr>
+        <p:txBody>
+          <a:bodyPr wrap="square">
+            <a:spAutoFit/>
+          </a:bodyPr>
+          <a:lstStyle/>
+          <a:p>
+            <a:pPr algn="l">
+              <a:defRPr sz="1400" b="0">
+                <a:solidFill>
+                  <a:srgbClr val="AABBCC"/>
+                </a:solidFill>
+                <a:latin typeface="Calibri"/>
+              </a:defRPr>
+            </a:pPr>
+            <a:r>
+              <a:t>  Problem &amp; Motivation</a:t>
+            </a:r>
+          </a:p>
+        </p:txBody>
+      </p:sp>
+      <p:sp>
+        <p:nvSpPr>
+          <p:cNvPr id="6" name="TextBox 5"/>
+          <p:cNvSpPr txBox="1"/>
+          <p:nvPr/>
+        </p:nvSpPr>
+        <p:spPr>
+          <a:xfrm>
+            <a:off x="731520" y="1371600"/>
+            <a:ext cx="5486400" cy="457200"/>
+          </a:xfrm>
+          <a:prstGeom prst="rect">
+            <a:avLst/>
+          </a:prstGeom>
+          <a:noFill/>
+        </p:spPr>
+        <p:txBody>
+          <a:bodyPr wrap="square">
+            <a:spAutoFit/>
+          </a:bodyPr>
+          <a:lstStyle/>
+          <a:p>
+            <a:pPr algn="l">
+              <a:defRPr sz="2200" b="1">
+                <a:solidFill>
+                  <a:srgbClr val="1A1A2E"/>
+                </a:solidFill>
+                <a:latin typeface="Calibri"/>
+              </a:defRPr>
+            </a:pPr>
+            <a:r>
+              <a:t>선박 전방 파랑 예측이 필요한 이유</a:t>
+            </a:r>
+          </a:p>
+        </p:txBody>
+      </p:sp>
+      <p:sp>
+        <p:nvSpPr>
+          <p:cNvPr id="7" name="TextBox 6"/>
+          <p:cNvSpPr txBox="1"/>
+          <p:nvPr/>
+        </p:nvSpPr>
+        <p:spPr>
+          <a:xfrm>
+            <a:off x="731520" y="1920240"/>
+            <a:ext cx="5486400" cy="3200400"/>
+          </a:xfrm>
+          <a:prstGeom prst="rect">
+            <a:avLst/>
+          </a:prstGeom>
+          <a:noFill/>
+        </p:spPr>
+        <p:txBody>
+          <a:bodyPr wrap="square">
+            <a:spAutoFit/>
+          </a:bodyPr>
+          <a:lstStyle/>
+          <a:p>
+            <a:pPr>
+              <a:spcAft>
+                <a:spcPts val="600"/>
+              </a:spcAft>
+            </a:pPr>
+            <a:r>
+              <a:rPr sz="1600">
+                <a:solidFill>
+                  <a:srgbClr val="1A1A2E"/>
+                </a:solidFill>
+                <a:latin typeface="Calibri"/>
+              </a:rPr>
+              <a:t>• • 자율운항 선박의 안전 · 승차감 · 에너지 효율</a:t>
+            </a:r>
+          </a:p>
+          <a:p>
+            <a:pPr>
+              <a:spcAft>
+                <a:spcPts val="600"/>
+              </a:spcAft>
+            </a:pPr>
+            <a:r>
+              <a:rPr sz="1600">
+                <a:solidFill>
+                  <a:srgbClr val="1A1A2E"/>
+                </a:solidFill>
+                <a:latin typeface="Calibri"/>
+              </a:rPr>
+              <a:t>• • 하이드로포일 선박: 파랑 preview → feedforward 제어</a:t>
+            </a:r>
+          </a:p>
+          <a:p>
+            <a:pPr>
+              <a:spcAft>
+                <a:spcPts val="600"/>
+              </a:spcAft>
+            </a:pPr>
+            <a:r>
+              <a:rPr sz="1600">
+                <a:solidFill>
+                  <a:srgbClr val="1A1A2E"/>
+                </a:solidFill>
+                <a:latin typeface="Calibri"/>
+              </a:rPr>
+              <a:t>• • 해상 크레인: 파고 예측 → 보상 제어</a:t>
+            </a:r>
+          </a:p>
+          <a:p>
+            <a:pPr>
+              <a:spcAft>
+                <a:spcPts val="600"/>
+              </a:spcAft>
+            </a:pPr>
+            <a:r>
+              <a:rPr sz="1600">
+                <a:solidFill>
+                  <a:srgbClr val="1A1A2E"/>
+                </a:solidFill>
+                <a:latin typeface="Calibri"/>
+              </a:rPr>
+              <a:t>• • 해양 구조물: 파랑 하중 예측 → 구조 안전</a:t>
+            </a:r>
+          </a:p>
+        </p:txBody>
+      </p:sp>
+      <p:sp>
+        <p:nvSpPr>
+          <p:cNvPr id="8" name="TextBox 7"/>
+          <p:cNvSpPr txBox="1"/>
+          <p:nvPr/>
+        </p:nvSpPr>
+        <p:spPr>
+          <a:xfrm>
+            <a:off x="731520" y="3931920"/>
+            <a:ext cx="5486400" cy="457200"/>
+          </a:xfrm>
+          <a:prstGeom prst="rect">
+            <a:avLst/>
+          </a:prstGeom>
+          <a:noFill/>
+        </p:spPr>
+        <p:txBody>
+          <a:bodyPr wrap="square">
+            <a:spAutoFit/>
+          </a:bodyPr>
+          <a:lstStyle/>
+          <a:p>
+            <a:pPr algn="l">
+              <a:defRPr sz="2200" b="1">
+                <a:solidFill>
+                  <a:srgbClr val="E8553A"/>
+                </a:solidFill>
+                <a:latin typeface="Calibri"/>
+              </a:defRPr>
+            </a:pPr>
+            <a:r>
+              <a:t>LiDAR 관측의 본질적 어려움</a:t>
+            </a:r>
+          </a:p>
+        </p:txBody>
+      </p:sp>
+      <p:sp>
+        <p:nvSpPr>
+          <p:cNvPr id="9" name="TextBox 8"/>
+          <p:cNvSpPr txBox="1"/>
+          <p:nvPr/>
+        </p:nvSpPr>
+        <p:spPr>
+          <a:xfrm>
+            <a:off x="731520" y="4480560"/>
+            <a:ext cx="5486400" cy="2286000"/>
+          </a:xfrm>
+          <a:prstGeom prst="rect">
+            <a:avLst/>
+          </a:prstGeom>
+          <a:noFill/>
+        </p:spPr>
+        <p:txBody>
+          <a:bodyPr wrap="square">
+            <a:spAutoFit/>
+          </a:bodyPr>
+          <a:lstStyle/>
+          <a:p>
+            <a:pPr>
+              <a:spcAft>
+                <a:spcPts val="600"/>
+              </a:spcAft>
+            </a:pPr>
+            <a:r>
+              <a:rPr sz="1600">
+                <a:solidFill>
+                  <a:srgbClr val="1A1A2E"/>
+                </a:solidFill>
+                <a:latin typeface="Calibri"/>
+              </a:rPr>
+              <a:t>• • Sparse: 200×150 m 영역에서 프레임당 ~50점</a:t>
+            </a:r>
+          </a:p>
+          <a:p>
+            <a:pPr>
+              <a:spcAft>
+                <a:spcPts val="600"/>
+              </a:spcAft>
+            </a:pPr>
+            <a:r>
+              <a:rPr sz="1600">
+                <a:solidFill>
+                  <a:srgbClr val="1A1A2E"/>
+                </a:solidFill>
+                <a:latin typeface="Calibri"/>
+              </a:rPr>
+              <a:t>• • Heterogeneous: 근거리 조밀 ↔ 원거리 희박</a:t>
+            </a:r>
+          </a:p>
+          <a:p>
+            <a:pPr>
+              <a:spcAft>
+                <a:spcPts val="600"/>
+              </a:spcAft>
+            </a:pPr>
+            <a:r>
+              <a:rPr sz="1600">
+                <a:solidFill>
+                  <a:srgbClr val="1A1A2E"/>
+                </a:solidFill>
+                <a:latin typeface="Calibri"/>
+              </a:rPr>
+              <a:t>• • Noisy: beam divergence + specular dropout</a:t>
+            </a:r>
+          </a:p>
+          <a:p>
+            <a:pPr>
+              <a:spcAft>
+                <a:spcPts val="600"/>
+              </a:spcAft>
+            </a:pPr>
+            <a:r>
+              <a:rPr sz="1600">
+                <a:solidFill>
+                  <a:srgbClr val="1A1A2E"/>
+                </a:solidFill>
+                <a:latin typeface="Calibri"/>
+              </a:rPr>
+              <a:t>• • 10 Hz 실시간 처리 필요 (&lt; 100 ms/frame)</a:t>
+            </a:r>
+          </a:p>
+        </p:txBody>
+      </p:sp>
+      <p:pic>
+        <p:nvPicPr>
+          <p:cNvPr id="10" name="Picture 9" descr="graphical_abstract.png"/>
+          <p:cNvPicPr>
+            <a:picLocks noChangeAspect="1"/>
+          </p:cNvPicPr>
+          <p:nvPr/>
+        </p:nvPicPr>
+        <p:blipFill>
+          <a:blip r:embed="rId2"/>
+          <a:stretch>
+            <a:fillRect/>
+          </a:stretch>
+        </p:blipFill>
+        <p:spPr>
+          <a:xfrm>
+            <a:off x="6858000" y="1371600"/>
+            <a:ext cx="4846320" cy="2743200"/>
+          </a:xfrm>
+          <a:prstGeom prst="rect">
+            <a:avLst/>
+          </a:prstGeom>
+        </p:spPr>
+      </p:pic>
+      <p:sp>
+        <p:nvSpPr>
+          <p:cNvPr id="11" name="TextBox 10"/>
+          <p:cNvSpPr txBox="1"/>
+          <p:nvPr/>
+        </p:nvSpPr>
+        <p:spPr>
+          <a:xfrm>
+            <a:off x="6858000" y="4389120"/>
+            <a:ext cx="4572000" cy="1828800"/>
+          </a:xfrm>
+          <a:prstGeom prst="rect">
+            <a:avLst/>
+          </a:prstGeom>
+          <a:noFill/>
+        </p:spPr>
+        <p:txBody>
+          <a:bodyPr wrap="square">
+            <a:spAutoFit/>
+          </a:bodyPr>
+          <a:lstStyle/>
+          <a:p>
+            <a:pPr algn="ctr">
+              <a:defRPr sz="1800" b="1">
+                <a:solidFill>
+                  <a:srgbClr val="007ACC"/>
+                </a:solidFill>
+                <a:latin typeface="Calibri"/>
+              </a:defRPr>
+            </a:pPr>
+            <a:r>
+              <a:t>목표: 희소 LiDAR 관측으로부터</a:t>
+            </a:r>
+            <a:br/>
+            <a:r>
+              <a:t>연속적이고 물리적으로 타당한</a:t>
+            </a:r>
+            <a:br/>
+            <a:r>
+              <a:t>파도장을 실시간 복원</a:t>
+            </a:r>
+          </a:p>
+        </p:txBody>
+      </p:sp>
+      <p:sp>
+        <p:nvSpPr>
+          <p:cNvPr id="12" name="TextBox 11"/>
+          <p:cNvSpPr txBox="1"/>
+          <p:nvPr/>
+        </p:nvSpPr>
+        <p:spPr>
+          <a:xfrm>
+            <a:off x="10972800" y="6492240"/>
+            <a:ext cx="1097280" cy="274320"/>
+          </a:xfrm>
+          <a:prstGeom prst="rect">
+            <a:avLst/>
+          </a:prstGeom>
+          <a:noFill/>
+        </p:spPr>
+        <p:txBody>
+          <a:bodyPr wrap="square">
+            <a:spAutoFit/>
+          </a:bodyPr>
+          <a:lstStyle/>
+          <a:p>
+            <a:pPr algn="r">
+              <a:defRPr sz="1000" b="0">
+                <a:solidFill>
+                  <a:srgbClr val="666666"/>
+                </a:solidFill>
+                <a:latin typeface="Calibri"/>
+              </a:defRPr>
+            </a:pPr>
+            <a:r>
+              <a:t>2/24</a:t>
+            </a:r>
+          </a:p>
+        </p:txBody>
+      </p:sp>
+    </p:spTree>
+  </p:cSld>
+  <p:clrMapOvr>
+    <a:masterClrMapping/>
+  </p:clrMapOvr>
+</p:sld>
+</file>
+
+<file path=ppt/slides/slide20.xml><?xml version="1.0" encoding="utf-8"?>
 <p:sld xmlns:a="http://schemas.openxmlformats.org/drawingml/2006/main" xmlns:p="http://schemas.openxmlformats.org/presentationml/2006/main" xmlns:r="http://schemas.openxmlformats.org/officeDocument/2006/relationships">
   <p:cSld>
     <p:bg>
@@ -9830,807 +11611,7 @@
               </a:defRPr>
             </a:pPr>
             <a:r>
-              <a:t>19/23</a:t>
-            </a:r>
-          </a:p>
-        </p:txBody>
-      </p:sp>
-    </p:spTree>
-  </p:cSld>
-  <p:clrMapOvr>
-    <a:masterClrMapping/>
-  </p:clrMapOvr>
-</p:sld>
-</file>
-
-<file path=ppt/slides/slide2.xml><?xml version="1.0" encoding="utf-8"?>
-<p:sld xmlns:a="http://schemas.openxmlformats.org/drawingml/2006/main" xmlns:p="http://schemas.openxmlformats.org/presentationml/2006/main" xmlns:r="http://schemas.openxmlformats.org/officeDocument/2006/relationships">
-  <p:cSld>
-    <p:bg>
-      <p:bgPr>
-        <a:solidFill>
-          <a:srgbClr val="FFFFFF"/>
-        </a:solidFill>
-        <a:effectLst/>
-      </p:bgPr>
-    </p:bg>
-    <p:spTree>
-      <p:nvGrpSpPr>
-        <p:cNvPr id="1" name=""/>
-        <p:cNvGrpSpPr/>
-        <p:nvPr/>
-      </p:nvGrpSpPr>
-      <p:grpSpPr/>
-      <p:sp>
-        <p:nvSpPr>
-          <p:cNvPr id="2" name="Rectangle 1"/>
-          <p:cNvSpPr/>
-          <p:nvPr/>
-        </p:nvSpPr>
-        <p:spPr>
-          <a:xfrm>
-            <a:off x="0" y="0"/>
-            <a:ext cx="12191695" cy="1097280"/>
-          </a:xfrm>
-          <a:prstGeom prst="rect">
-            <a:avLst/>
-          </a:prstGeom>
-          <a:solidFill>
-            <a:srgbClr val="1A1A2E"/>
-          </a:solidFill>
-          <a:ln>
-            <a:noFill/>
-          </a:ln>
-        </p:spPr>
-        <p:style>
-          <a:lnRef idx="1">
-            <a:schemeClr val="accent1"/>
-          </a:lnRef>
-          <a:fillRef idx="3">
-            <a:schemeClr val="accent1"/>
-          </a:fillRef>
-          <a:effectRef idx="2">
-            <a:schemeClr val="accent1"/>
-          </a:effectRef>
-          <a:fontRef idx="minor">
-            <a:schemeClr val="lt1"/>
-          </a:fontRef>
-        </p:style>
-        <p:txBody>
-          <a:bodyPr rtlCol="0" anchor="ctr"/>
-          <a:lstStyle/>
-          <a:p>
-            <a:pPr algn="ctr"/>
-          </a:p>
-        </p:txBody>
-      </p:sp>
-      <p:sp>
-        <p:nvSpPr>
-          <p:cNvPr id="3" name="TextBox 2"/>
-          <p:cNvSpPr txBox="1"/>
-          <p:nvPr/>
-        </p:nvSpPr>
-        <p:spPr>
-          <a:xfrm>
-            <a:off x="457200" y="137160"/>
-            <a:ext cx="10972800" cy="457200"/>
-          </a:xfrm>
-          <a:prstGeom prst="rect">
-            <a:avLst/>
-          </a:prstGeom>
-          <a:noFill/>
-        </p:spPr>
-        <p:txBody>
-          <a:bodyPr wrap="square">
-            <a:spAutoFit/>
-          </a:bodyPr>
-          <a:lstStyle/>
-          <a:p>
-            <a:pPr algn="l">
-              <a:defRPr sz="1400" b="0">
-                <a:solidFill>
-                  <a:srgbClr val="007ACC"/>
-                </a:solidFill>
-                <a:latin typeface="Calibri"/>
-              </a:defRPr>
-            </a:pPr>
-            <a:r>
-              <a:t>  01</a:t>
-            </a:r>
-          </a:p>
-        </p:txBody>
-      </p:sp>
-      <p:sp>
-        <p:nvSpPr>
-          <p:cNvPr id="4" name="TextBox 3"/>
-          <p:cNvSpPr txBox="1"/>
-          <p:nvPr/>
-        </p:nvSpPr>
-        <p:spPr>
-          <a:xfrm>
-            <a:off x="457200" y="320040"/>
-            <a:ext cx="10972800" cy="640080"/>
-          </a:xfrm>
-          <a:prstGeom prst="rect">
-            <a:avLst/>
-          </a:prstGeom>
-          <a:noFill/>
-        </p:spPr>
-        <p:txBody>
-          <a:bodyPr wrap="square">
-            <a:spAutoFit/>
-          </a:bodyPr>
-          <a:lstStyle/>
-          <a:p>
-            <a:pPr algn="l">
-              <a:defRPr sz="2800" b="1">
-                <a:solidFill>
-                  <a:srgbClr val="FFFFFF"/>
-                </a:solidFill>
-                <a:latin typeface="Calibri"/>
-              </a:defRPr>
-            </a:pPr>
-            <a:r>
-              <a:t>  왜 이 연구가 필요한가?</a:t>
-            </a:r>
-          </a:p>
-        </p:txBody>
-      </p:sp>
-      <p:sp>
-        <p:nvSpPr>
-          <p:cNvPr id="5" name="TextBox 4"/>
-          <p:cNvSpPr txBox="1"/>
-          <p:nvPr/>
-        </p:nvSpPr>
-        <p:spPr>
-          <a:xfrm>
-            <a:off x="457200" y="685800"/>
-            <a:ext cx="10972800" cy="365760"/>
-          </a:xfrm>
-          <a:prstGeom prst="rect">
-            <a:avLst/>
-          </a:prstGeom>
-          <a:noFill/>
-        </p:spPr>
-        <p:txBody>
-          <a:bodyPr wrap="square">
-            <a:spAutoFit/>
-          </a:bodyPr>
-          <a:lstStyle/>
-          <a:p>
-            <a:pPr algn="l">
-              <a:defRPr sz="1400" b="0">
-                <a:solidFill>
-                  <a:srgbClr val="AABBCC"/>
-                </a:solidFill>
-                <a:latin typeface="Calibri"/>
-              </a:defRPr>
-            </a:pPr>
-            <a:r>
-              <a:t>  Problem &amp; Motivation</a:t>
-            </a:r>
-          </a:p>
-        </p:txBody>
-      </p:sp>
-      <p:sp>
-        <p:nvSpPr>
-          <p:cNvPr id="6" name="TextBox 5"/>
-          <p:cNvSpPr txBox="1"/>
-          <p:nvPr/>
-        </p:nvSpPr>
-        <p:spPr>
-          <a:xfrm>
-            <a:off x="731520" y="1371600"/>
-            <a:ext cx="5486400" cy="457200"/>
-          </a:xfrm>
-          <a:prstGeom prst="rect">
-            <a:avLst/>
-          </a:prstGeom>
-          <a:noFill/>
-        </p:spPr>
-        <p:txBody>
-          <a:bodyPr wrap="square">
-            <a:spAutoFit/>
-          </a:bodyPr>
-          <a:lstStyle/>
-          <a:p>
-            <a:pPr algn="l">
-              <a:defRPr sz="2200" b="1">
-                <a:solidFill>
-                  <a:srgbClr val="1A1A2E"/>
-                </a:solidFill>
-                <a:latin typeface="Calibri"/>
-              </a:defRPr>
-            </a:pPr>
-            <a:r>
-              <a:t>선박 전방 파랑 예측이 필요한 이유</a:t>
-            </a:r>
-          </a:p>
-        </p:txBody>
-      </p:sp>
-      <p:sp>
-        <p:nvSpPr>
-          <p:cNvPr id="7" name="TextBox 6"/>
-          <p:cNvSpPr txBox="1"/>
-          <p:nvPr/>
-        </p:nvSpPr>
-        <p:spPr>
-          <a:xfrm>
-            <a:off x="731520" y="1920240"/>
-            <a:ext cx="5486400" cy="3200400"/>
-          </a:xfrm>
-          <a:prstGeom prst="rect">
-            <a:avLst/>
-          </a:prstGeom>
-          <a:noFill/>
-        </p:spPr>
-        <p:txBody>
-          <a:bodyPr wrap="square">
-            <a:spAutoFit/>
-          </a:bodyPr>
-          <a:lstStyle/>
-          <a:p>
-            <a:pPr>
-              <a:spcAft>
-                <a:spcPts val="600"/>
-              </a:spcAft>
-            </a:pPr>
-            <a:r>
-              <a:rPr sz="1600">
-                <a:solidFill>
-                  <a:srgbClr val="1A1A2E"/>
-                </a:solidFill>
-                <a:latin typeface="Calibri"/>
-              </a:rPr>
-              <a:t>• • 자율운항 선박의 안전 · 승차감 · 에너지 효율</a:t>
-            </a:r>
-          </a:p>
-          <a:p>
-            <a:pPr>
-              <a:spcAft>
-                <a:spcPts val="600"/>
-              </a:spcAft>
-            </a:pPr>
-            <a:r>
-              <a:rPr sz="1600">
-                <a:solidFill>
-                  <a:srgbClr val="1A1A2E"/>
-                </a:solidFill>
-                <a:latin typeface="Calibri"/>
-              </a:rPr>
-              <a:t>• • 하이드로포일 선박: 파랑 preview → feedforward 제어</a:t>
-            </a:r>
-          </a:p>
-          <a:p>
-            <a:pPr>
-              <a:spcAft>
-                <a:spcPts val="600"/>
-              </a:spcAft>
-            </a:pPr>
-            <a:r>
-              <a:rPr sz="1600">
-                <a:solidFill>
-                  <a:srgbClr val="1A1A2E"/>
-                </a:solidFill>
-                <a:latin typeface="Calibri"/>
-              </a:rPr>
-              <a:t>• • 해상 크레인: 파고 예측 → 보상 제어</a:t>
-            </a:r>
-          </a:p>
-          <a:p>
-            <a:pPr>
-              <a:spcAft>
-                <a:spcPts val="600"/>
-              </a:spcAft>
-            </a:pPr>
-            <a:r>
-              <a:rPr sz="1600">
-                <a:solidFill>
-                  <a:srgbClr val="1A1A2E"/>
-                </a:solidFill>
-                <a:latin typeface="Calibri"/>
-              </a:rPr>
-              <a:t>• • 해양 구조물: 파랑 하중 예측 → 구조 안전</a:t>
-            </a:r>
-          </a:p>
-        </p:txBody>
-      </p:sp>
-      <p:sp>
-        <p:nvSpPr>
-          <p:cNvPr id="8" name="TextBox 7"/>
-          <p:cNvSpPr txBox="1"/>
-          <p:nvPr/>
-        </p:nvSpPr>
-        <p:spPr>
-          <a:xfrm>
-            <a:off x="731520" y="3931920"/>
-            <a:ext cx="5486400" cy="457200"/>
-          </a:xfrm>
-          <a:prstGeom prst="rect">
-            <a:avLst/>
-          </a:prstGeom>
-          <a:noFill/>
-        </p:spPr>
-        <p:txBody>
-          <a:bodyPr wrap="square">
-            <a:spAutoFit/>
-          </a:bodyPr>
-          <a:lstStyle/>
-          <a:p>
-            <a:pPr algn="l">
-              <a:defRPr sz="2200" b="1">
-                <a:solidFill>
-                  <a:srgbClr val="E8553A"/>
-                </a:solidFill>
-                <a:latin typeface="Calibri"/>
-              </a:defRPr>
-            </a:pPr>
-            <a:r>
-              <a:t>LiDAR 관측의 본질적 어려움</a:t>
-            </a:r>
-          </a:p>
-        </p:txBody>
-      </p:sp>
-      <p:sp>
-        <p:nvSpPr>
-          <p:cNvPr id="9" name="TextBox 8"/>
-          <p:cNvSpPr txBox="1"/>
-          <p:nvPr/>
-        </p:nvSpPr>
-        <p:spPr>
-          <a:xfrm>
-            <a:off x="731520" y="4480560"/>
-            <a:ext cx="5486400" cy="2286000"/>
-          </a:xfrm>
-          <a:prstGeom prst="rect">
-            <a:avLst/>
-          </a:prstGeom>
-          <a:noFill/>
-        </p:spPr>
-        <p:txBody>
-          <a:bodyPr wrap="square">
-            <a:spAutoFit/>
-          </a:bodyPr>
-          <a:lstStyle/>
-          <a:p>
-            <a:pPr>
-              <a:spcAft>
-                <a:spcPts val="600"/>
-              </a:spcAft>
-            </a:pPr>
-            <a:r>
-              <a:rPr sz="1600">
-                <a:solidFill>
-                  <a:srgbClr val="1A1A2E"/>
-                </a:solidFill>
-                <a:latin typeface="Calibri"/>
-              </a:rPr>
-              <a:t>• • Sparse: 200×150 m 영역에서 프레임당 ~50점</a:t>
-            </a:r>
-          </a:p>
-          <a:p>
-            <a:pPr>
-              <a:spcAft>
-                <a:spcPts val="600"/>
-              </a:spcAft>
-            </a:pPr>
-            <a:r>
-              <a:rPr sz="1600">
-                <a:solidFill>
-                  <a:srgbClr val="1A1A2E"/>
-                </a:solidFill>
-                <a:latin typeface="Calibri"/>
-              </a:rPr>
-              <a:t>• • Heterogeneous: 근거리 조밀 ↔ 원거리 희박</a:t>
-            </a:r>
-          </a:p>
-          <a:p>
-            <a:pPr>
-              <a:spcAft>
-                <a:spcPts val="600"/>
-              </a:spcAft>
-            </a:pPr>
-            <a:r>
-              <a:rPr sz="1600">
-                <a:solidFill>
-                  <a:srgbClr val="1A1A2E"/>
-                </a:solidFill>
-                <a:latin typeface="Calibri"/>
-              </a:rPr>
-              <a:t>• • Noisy: beam divergence + specular dropout</a:t>
-            </a:r>
-          </a:p>
-          <a:p>
-            <a:pPr>
-              <a:spcAft>
-                <a:spcPts val="600"/>
-              </a:spcAft>
-            </a:pPr>
-            <a:r>
-              <a:rPr sz="1600">
-                <a:solidFill>
-                  <a:srgbClr val="1A1A2E"/>
-                </a:solidFill>
-                <a:latin typeface="Calibri"/>
-              </a:rPr>
-              <a:t>• • 10 Hz 실시간 처리 필요 (&lt; 100 ms/frame)</a:t>
-            </a:r>
-          </a:p>
-        </p:txBody>
-      </p:sp>
-      <p:pic>
-        <p:nvPicPr>
-          <p:cNvPr id="10" name="Picture 9" descr="graphical_abstract.png"/>
-          <p:cNvPicPr>
-            <a:picLocks noChangeAspect="1"/>
-          </p:cNvPicPr>
-          <p:nvPr/>
-        </p:nvPicPr>
-        <p:blipFill>
-          <a:blip r:embed="rId2"/>
-          <a:stretch>
-            <a:fillRect/>
-          </a:stretch>
-        </p:blipFill>
-        <p:spPr>
-          <a:xfrm>
-            <a:off x="6858000" y="1371600"/>
-            <a:ext cx="4846320" cy="2743200"/>
-          </a:xfrm>
-          <a:prstGeom prst="rect">
-            <a:avLst/>
-          </a:prstGeom>
-        </p:spPr>
-      </p:pic>
-      <p:sp>
-        <p:nvSpPr>
-          <p:cNvPr id="11" name="TextBox 10"/>
-          <p:cNvSpPr txBox="1"/>
-          <p:nvPr/>
-        </p:nvSpPr>
-        <p:spPr>
-          <a:xfrm>
-            <a:off x="6858000" y="4389120"/>
-            <a:ext cx="4572000" cy="1828800"/>
-          </a:xfrm>
-          <a:prstGeom prst="rect">
-            <a:avLst/>
-          </a:prstGeom>
-          <a:noFill/>
-        </p:spPr>
-        <p:txBody>
-          <a:bodyPr wrap="square">
-            <a:spAutoFit/>
-          </a:bodyPr>
-          <a:lstStyle/>
-          <a:p>
-            <a:pPr algn="ctr">
-              <a:defRPr sz="1800" b="1">
-                <a:solidFill>
-                  <a:srgbClr val="007ACC"/>
-                </a:solidFill>
-                <a:latin typeface="Calibri"/>
-              </a:defRPr>
-            </a:pPr>
-            <a:r>
-              <a:t>목표: 희소 LiDAR 관측으로부터</a:t>
-            </a:r>
-            <a:br/>
-            <a:r>
-              <a:t>연속적이고 물리적으로 타당한</a:t>
-            </a:r>
-            <a:br/>
-            <a:r>
-              <a:t>파도장을 실시간 복원</a:t>
-            </a:r>
-          </a:p>
-        </p:txBody>
-      </p:sp>
-      <p:sp>
-        <p:nvSpPr>
-          <p:cNvPr id="12" name="TextBox 11"/>
-          <p:cNvSpPr txBox="1"/>
-          <p:nvPr/>
-        </p:nvSpPr>
-        <p:spPr>
-          <a:xfrm>
-            <a:off x="10972800" y="6492240"/>
-            <a:ext cx="1097280" cy="274320"/>
-          </a:xfrm>
-          <a:prstGeom prst="rect">
-            <a:avLst/>
-          </a:prstGeom>
-          <a:noFill/>
-        </p:spPr>
-        <p:txBody>
-          <a:bodyPr wrap="square">
-            <a:spAutoFit/>
-          </a:bodyPr>
-          <a:lstStyle/>
-          <a:p>
-            <a:pPr algn="r">
-              <a:defRPr sz="1000" b="0">
-                <a:solidFill>
-                  <a:srgbClr val="666666"/>
-                </a:solidFill>
-                <a:latin typeface="Calibri"/>
-              </a:defRPr>
-            </a:pPr>
-            <a:r>
-              <a:t>2/23</a:t>
-            </a:r>
-          </a:p>
-        </p:txBody>
-      </p:sp>
-    </p:spTree>
-  </p:cSld>
-  <p:clrMapOvr>
-    <a:masterClrMapping/>
-  </p:clrMapOvr>
-</p:sld>
-</file>
-
-<file path=ppt/slides/slide20.xml><?xml version="1.0" encoding="utf-8"?>
-<p:sld xmlns:a="http://schemas.openxmlformats.org/drawingml/2006/main" xmlns:p="http://schemas.openxmlformats.org/presentationml/2006/main" xmlns:r="http://schemas.openxmlformats.org/officeDocument/2006/relationships">
-  <p:cSld>
-    <p:bg>
-      <p:bgPr>
-        <a:solidFill>
-          <a:srgbClr val="FFFFFF"/>
-        </a:solidFill>
-        <a:effectLst/>
-      </p:bgPr>
-    </p:bg>
-    <p:spTree>
-      <p:nvGrpSpPr>
-        <p:cNvPr id="1" name=""/>
-        <p:cNvGrpSpPr/>
-        <p:nvPr/>
-      </p:nvGrpSpPr>
-      <p:grpSpPr/>
-      <p:sp>
-        <p:nvSpPr>
-          <p:cNvPr id="2" name="Rectangle 1"/>
-          <p:cNvSpPr/>
-          <p:nvPr/>
-        </p:nvSpPr>
-        <p:spPr>
-          <a:xfrm>
-            <a:off x="0" y="0"/>
-            <a:ext cx="12191695" cy="1097280"/>
-          </a:xfrm>
-          <a:prstGeom prst="rect">
-            <a:avLst/>
-          </a:prstGeom>
-          <a:solidFill>
-            <a:srgbClr val="1A1A2E"/>
-          </a:solidFill>
-          <a:ln>
-            <a:noFill/>
-          </a:ln>
-        </p:spPr>
-        <p:style>
-          <a:lnRef idx="1">
-            <a:schemeClr val="accent1"/>
-          </a:lnRef>
-          <a:fillRef idx="3">
-            <a:schemeClr val="accent1"/>
-          </a:fillRef>
-          <a:effectRef idx="2">
-            <a:schemeClr val="accent1"/>
-          </a:effectRef>
-          <a:fontRef idx="minor">
-            <a:schemeClr val="lt1"/>
-          </a:fontRef>
-        </p:style>
-        <p:txBody>
-          <a:bodyPr rtlCol="0" anchor="ctr"/>
-          <a:lstStyle/>
-          <a:p>
-            <a:pPr algn="ctr"/>
-          </a:p>
-        </p:txBody>
-      </p:sp>
-      <p:sp>
-        <p:nvSpPr>
-          <p:cNvPr id="3" name="TextBox 2"/>
-          <p:cNvSpPr txBox="1"/>
-          <p:nvPr/>
-        </p:nvSpPr>
-        <p:spPr>
-          <a:xfrm>
-            <a:off x="457200" y="137160"/>
-            <a:ext cx="10972800" cy="457200"/>
-          </a:xfrm>
-          <a:prstGeom prst="rect">
-            <a:avLst/>
-          </a:prstGeom>
-          <a:noFill/>
-        </p:spPr>
-        <p:txBody>
-          <a:bodyPr wrap="square">
-            <a:spAutoFit/>
-          </a:bodyPr>
-          <a:lstStyle/>
-          <a:p>
-            <a:pPr algn="l">
-              <a:defRPr sz="1400" b="0">
-                <a:solidFill>
-                  <a:srgbClr val="007ACC"/>
-                </a:solidFill>
-                <a:latin typeface="Calibri"/>
-              </a:defRPr>
-            </a:pPr>
-            <a:r>
-              <a:t>  05</a:t>
-            </a:r>
-          </a:p>
-        </p:txBody>
-      </p:sp>
-      <p:sp>
-        <p:nvSpPr>
-          <p:cNvPr id="4" name="TextBox 3"/>
-          <p:cNvSpPr txBox="1"/>
-          <p:nvPr/>
-        </p:nvSpPr>
-        <p:spPr>
-          <a:xfrm>
-            <a:off x="457200" y="320040"/>
-            <a:ext cx="10972800" cy="640080"/>
-          </a:xfrm>
-          <a:prstGeom prst="rect">
-            <a:avLst/>
-          </a:prstGeom>
-          <a:noFill/>
-        </p:spPr>
-        <p:txBody>
-          <a:bodyPr wrap="square">
-            <a:spAutoFit/>
-          </a:bodyPr>
-          <a:lstStyle/>
-          <a:p>
-            <a:pPr algn="l">
-              <a:defRPr sz="2800" b="1">
-                <a:solidFill>
-                  <a:srgbClr val="FFFFFF"/>
-                </a:solidFill>
-                <a:latin typeface="Calibri"/>
-              </a:defRPr>
-            </a:pPr>
-            <a:r>
-              <a:t>  Hydrofoil 시뮬레이션 데모</a:t>
-            </a:r>
-          </a:p>
-        </p:txBody>
-      </p:sp>
-      <p:sp>
-        <p:nvSpPr>
-          <p:cNvPr id="5" name="TextBox 4"/>
-          <p:cNvSpPr txBox="1"/>
-          <p:nvPr/>
-        </p:nvSpPr>
-        <p:spPr>
-          <a:xfrm>
-            <a:off x="457200" y="685800"/>
-            <a:ext cx="10972800" cy="365760"/>
-          </a:xfrm>
-          <a:prstGeom prst="rect">
-            <a:avLst/>
-          </a:prstGeom>
-          <a:noFill/>
-        </p:spPr>
-        <p:txBody>
-          <a:bodyPr wrap="square">
-            <a:spAutoFit/>
-          </a:bodyPr>
-          <a:lstStyle/>
-          <a:p>
-            <a:pPr algn="l">
-              <a:defRPr sz="1400" b="0">
-                <a:solidFill>
-                  <a:srgbClr val="AABBCC"/>
-                </a:solidFill>
-                <a:latin typeface="Calibri"/>
-              </a:defRPr>
-            </a:pPr>
-            <a:r>
-              <a:t>  PD-only vs PD+Feedforward — BF3 Head Sea Animation</a:t>
-            </a:r>
-          </a:p>
-        </p:txBody>
-      </p:sp>
-      <p:pic>
-        <p:nvPicPr>
-          <p:cNvPr id="6" name="Picture 5" descr="_anim_first_frame.png"/>
-          <p:cNvPicPr>
-            <a:picLocks noChangeAspect="1"/>
-          </p:cNvPicPr>
-          <p:nvPr/>
-        </p:nvPicPr>
-        <p:blipFill>
-          <a:blip r:embed="rId2"/>
-          <a:stretch>
-            <a:fillRect/>
-          </a:stretch>
-        </p:blipFill>
-        <p:spPr>
-          <a:xfrm>
-            <a:off x="914400" y="1371600"/>
-            <a:ext cx="10332720" cy="4572000"/>
-          </a:xfrm>
-          <a:prstGeom prst="rect">
-            <a:avLst/>
-          </a:prstGeom>
-        </p:spPr>
-      </p:pic>
-      <p:sp>
-        <p:nvSpPr>
-          <p:cNvPr id="7" name="TextBox 6"/>
-          <p:cNvSpPr txBox="1"/>
-          <p:nvPr/>
-        </p:nvSpPr>
-        <p:spPr>
-          <a:xfrm>
-            <a:off x="914400" y="5943600"/>
-            <a:ext cx="10332720" cy="457200"/>
-          </a:xfrm>
-          <a:prstGeom prst="rect">
-            <a:avLst/>
-          </a:prstGeom>
-          <a:noFill/>
-        </p:spPr>
-        <p:txBody>
-          <a:bodyPr wrap="square">
-            <a:spAutoFit/>
-          </a:bodyPr>
-          <a:lstStyle/>
-          <a:p>
-            <a:pPr algn="ctr">
-              <a:defRPr sz="1200" b="0">
-                <a:solidFill>
-                  <a:srgbClr val="666666"/>
-                </a:solidFill>
-                <a:latin typeface="Calibri"/>
-              </a:defRPr>
-            </a:pPr>
-            <a:r>
-              <a:t>※ 실제 발표 시 GIF 파일(docs/hydrofoil_wave_animation.gif)을 삽입하여 재생</a:t>
-            </a:r>
-          </a:p>
-        </p:txBody>
-      </p:sp>
-      <p:sp>
-        <p:nvSpPr>
-          <p:cNvPr id="8" name="TextBox 7"/>
-          <p:cNvSpPr txBox="1"/>
-          <p:nvPr/>
-        </p:nvSpPr>
-        <p:spPr>
-          <a:xfrm>
-            <a:off x="10972800" y="6492240"/>
-            <a:ext cx="1097280" cy="274320"/>
-          </a:xfrm>
-          <a:prstGeom prst="rect">
-            <a:avLst/>
-          </a:prstGeom>
-          <a:noFill/>
-        </p:spPr>
-        <p:txBody>
-          <a:bodyPr wrap="square">
-            <a:spAutoFit/>
-          </a:bodyPr>
-          <a:lstStyle/>
-          <a:p>
-            <a:pPr algn="r">
-              <a:defRPr sz="1000" b="0">
-                <a:solidFill>
-                  <a:srgbClr val="666666"/>
-                </a:solidFill>
-                <a:latin typeface="Calibri"/>
-              </a:defRPr>
-            </a:pPr>
-            <a:r>
-              <a:t>20/23</a:t>
+              <a:t>20/24</a:t>
             </a:r>
           </a:p>
         </p:txBody>
@@ -10735,7 +11716,7 @@
               </a:defRPr>
             </a:pPr>
             <a:r>
-              <a:t>  06</a:t>
+              <a:t>  05</a:t>
             </a:r>
           </a:p>
         </p:txBody>
@@ -10771,7 +11752,7 @@
               </a:defRPr>
             </a:pPr>
             <a:r>
-              <a:t>  한계와 향후 과제</a:t>
+              <a:t>  Hydrofoil 시뮬레이션 데모</a:t>
             </a:r>
           </a:p>
         </p:txBody>
@@ -10807,21 +11788,45 @@
               </a:defRPr>
             </a:pPr>
             <a:r>
-              <a:t>  Honest Limitations</a:t>
-            </a:r>
-          </a:p>
-        </p:txBody>
-      </p:sp>
-      <p:sp>
-        <p:nvSpPr>
-          <p:cNvPr id="6" name="TextBox 5"/>
+              <a:t>  PD-only vs PD+Feedforward — BF3 Head Sea Animation</a:t>
+            </a:r>
+          </a:p>
+        </p:txBody>
+      </p:sp>
+      <p:pic>
+        <p:nvPicPr>
+          <p:cNvPr id="6" name="Picture 5" descr="_anim_first_frame.png"/>
+          <p:cNvPicPr>
+            <a:picLocks noChangeAspect="1"/>
+          </p:cNvPicPr>
+          <p:nvPr/>
+        </p:nvPicPr>
+        <p:blipFill>
+          <a:blip r:embed="rId2"/>
+          <a:stretch>
+            <a:fillRect/>
+          </a:stretch>
+        </p:blipFill>
+        <p:spPr>
+          <a:xfrm>
+            <a:off x="914400" y="1371600"/>
+            <a:ext cx="10332720" cy="4572000"/>
+          </a:xfrm>
+          <a:prstGeom prst="rect">
+            <a:avLst/>
+          </a:prstGeom>
+        </p:spPr>
+      </p:pic>
+      <p:sp>
+        <p:nvSpPr>
+          <p:cNvPr id="7" name="TextBox 6"/>
           <p:cNvSpPr txBox="1"/>
           <p:nvPr/>
         </p:nvSpPr>
         <p:spPr>
           <a:xfrm>
-            <a:off x="731520" y="1645920"/>
-            <a:ext cx="5486400" cy="4572000"/>
+            <a:off x="914400" y="5943600"/>
+            <a:ext cx="10332720" cy="457200"/>
           </a:xfrm>
           <a:prstGeom prst="rect">
             <a:avLst/>
@@ -10834,273 +11839,30 @@
           </a:bodyPr>
           <a:lstStyle/>
           <a:p>
-            <a:pPr>
-              <a:spcAft>
-                <a:spcPts val="600"/>
-              </a:spcAft>
-            </a:pPr>
-            <a:r>
-              <a:rPr sz="1300">
-                <a:solidFill>
-                  <a:srgbClr val="1A1A2E"/>
-                </a:solidFill>
-                <a:latin typeface="Calibri"/>
-              </a:rPr>
-              <a:t>• • WaveSplat 추정 한계:</a:t>
-            </a:r>
-          </a:p>
-          <a:p>
-            <a:pPr>
-              <a:spcAft>
-                <a:spcPts val="600"/>
-              </a:spcAft>
-            </a:pPr>
-            <a:r>
-              <a:rPr sz="1300">
-                <a:solidFill>
-                  <a:srgbClr val="1A1A2E"/>
-                </a:solidFill>
-                <a:latin typeface="Calibri"/>
-              </a:rPr>
-              <a:t>• •   VR = 0.66 → 진폭 34% 과소추정 (pruning 대가)</a:t>
-            </a:r>
-          </a:p>
-          <a:p>
-            <a:pPr>
-              <a:spcAft>
-                <a:spcPts val="600"/>
-              </a:spcAft>
-            </a:pPr>
-            <a:r>
-              <a:rPr sz="1300">
-                <a:solidFill>
-                  <a:srgbClr val="1A1A2E"/>
-                </a:solidFill>
-                <a:latin typeface="Calibri"/>
-              </a:rPr>
-              <a:t>• •   Dir R² = −0.25 → 방향 추정이 가장 큰 약점</a:t>
-            </a:r>
-          </a:p>
-          <a:p>
-            <a:pPr>
-              <a:spcAft>
-                <a:spcPts val="600"/>
-              </a:spcAft>
-            </a:pPr>
-            <a:r>
-              <a:rPr sz="1300">
-                <a:solidFill>
-                  <a:srgbClr val="1A1A2E"/>
-                </a:solidFill>
-                <a:latin typeface="Calibri"/>
-              </a:rPr>
-              <a:t>• •     → 개선: multi-frame 방향 voting / 2D k-space 정규화</a:t>
-            </a:r>
-          </a:p>
-          <a:p>
-            <a:pPr>
-              <a:spcAft>
-                <a:spcPts val="600"/>
-              </a:spcAft>
-            </a:pPr>
-            <a:r>
-              <a:rPr sz="1300">
-                <a:solidFill>
-                  <a:srgbClr val="1A1A2E"/>
-                </a:solidFill>
-                <a:latin typeface="Calibri"/>
-              </a:rPr>
-              <a:t>• •   진폭 감쇠 (Adam momentum 부호 진동)</a:t>
-            </a:r>
-          </a:p>
-          <a:p>
-            <a:pPr>
-              <a:spcAft>
-                <a:spcPts val="600"/>
-              </a:spcAft>
-            </a:pPr>
-            <a:r>
-              <a:rPr sz="1300">
-                <a:solidFill>
-                  <a:srgbClr val="1A1A2E"/>
-                </a:solidFill>
-                <a:latin typeface="Calibri"/>
-              </a:rPr>
-              <a:t>• •   Nₜᵣᵤₑ ≥ 30 이상 복잡 해상 → 성분 수 한계</a:t>
-            </a:r>
-          </a:p>
-          <a:p>
-            <a:pPr>
-              <a:spcAft>
-                <a:spcPts val="600"/>
-              </a:spcAft>
-            </a:pPr>
-            <a:r>
-              <a:rPr sz="1300">
-                <a:solidFill>
-                  <a:srgbClr val="1A1A2E"/>
-                </a:solidFill>
-                <a:latin typeface="Calibri"/>
-              </a:rPr>
-              <a:t>• </a:t>
-            </a:r>
-          </a:p>
-          <a:p>
-            <a:pPr>
-              <a:spcAft>
-                <a:spcPts val="600"/>
-              </a:spcAft>
-            </a:pPr>
-            <a:r>
-              <a:rPr sz="1300">
-                <a:solidFill>
-                  <a:srgbClr val="1A1A2E"/>
-                </a:solidFill>
-                <a:latin typeface="Calibri"/>
-              </a:rPr>
-              <a:t>• • Hydrofoil 제어 한계:</a:t>
-            </a:r>
-          </a:p>
-          <a:p>
-            <a:pPr>
-              <a:spcAft>
-                <a:spcPts val="600"/>
-              </a:spcAft>
-            </a:pPr>
-            <a:r>
-              <a:rPr sz="1300">
-                <a:solidFill>
-                  <a:srgbClr val="1A1A2E"/>
-                </a:solidFill>
-                <a:latin typeface="Calibri"/>
-              </a:rPr>
-              <a:t>• •   BF4 E2E → 37% (direction error 전파)</a:t>
-            </a:r>
-          </a:p>
-          <a:p>
-            <a:pPr>
-              <a:spcAft>
-                <a:spcPts val="600"/>
-              </a:spcAft>
-            </a:pPr>
-            <a:r>
-              <a:rPr sz="1300">
-                <a:solidFill>
-                  <a:srgbClr val="1A1A2E"/>
-                </a:solidFill>
-                <a:latin typeface="Calibri"/>
-              </a:rPr>
-              <a:t>• •   2DOF (heave+pitch): roll은 별도 roll foil 담당 구조</a:t>
-            </a:r>
-          </a:p>
-          <a:p>
-            <a:pPr>
-              <a:spcAft>
-                <a:spcPts val="600"/>
-              </a:spcAft>
-            </a:pPr>
-            <a:r>
-              <a:rPr sz="1300">
-                <a:solidFill>
-                  <a:srgbClr val="1A1A2E"/>
-                </a:solidFill>
-                <a:latin typeface="Calibri"/>
-              </a:rPr>
-              <a:t>• •   선형 foil model (ventilation 간소화)</a:t>
-            </a:r>
-          </a:p>
-          <a:p>
-            <a:pPr>
-              <a:spcAft>
-                <a:spcPts val="600"/>
-              </a:spcAft>
-            </a:pPr>
-            <a:r>
-              <a:rPr sz="1300">
-                <a:solidFill>
-                  <a:srgbClr val="1A1A2E"/>
-                </a:solidFill>
-                <a:latin typeface="Calibri"/>
-              </a:rPr>
-              <a:t>• </a:t>
-            </a:r>
-          </a:p>
-          <a:p>
-            <a:pPr>
-              <a:spcAft>
-                <a:spcPts val="600"/>
-              </a:spcAft>
-            </a:pPr>
-            <a:r>
-              <a:rPr sz="1300">
-                <a:solidFill>
-                  <a:srgbClr val="1A1A2E"/>
-                </a:solidFill>
-                <a:latin typeface="Calibri"/>
-              </a:rPr>
-              <a:t>• • 공통 한계:</a:t>
-            </a:r>
-          </a:p>
-          <a:p>
-            <a:pPr>
-              <a:spcAft>
-                <a:spcPts val="600"/>
-              </a:spcAft>
-            </a:pPr>
-            <a:r>
-              <a:rPr sz="1300">
-                <a:solidFill>
-                  <a:srgbClr val="1A1A2E"/>
-                </a:solidFill>
-                <a:latin typeface="Calibri"/>
-              </a:rPr>
-              <a:t>• •   시뮬레이션 전용 → 실측 검증 필요</a:t>
-            </a:r>
-          </a:p>
-          <a:p>
-            <a:pPr>
-              <a:spcAft>
-                <a:spcPts val="600"/>
-              </a:spcAft>
-            </a:pPr>
-            <a:r>
-              <a:rPr sz="1300">
-                <a:solidFill>
-                  <a:srgbClr val="1A1A2E"/>
-                </a:solidFill>
-                <a:latin typeface="Calibri"/>
-              </a:rPr>
-              <a:t>• •   선형 파도 모델 → Stokes-2+ 미반영</a:t>
-            </a:r>
-          </a:p>
-          <a:p>
-            <a:pPr>
-              <a:spcAft>
-                <a:spcPts val="600"/>
-              </a:spcAft>
-            </a:pPr>
-            <a:r>
-              <a:rPr sz="1300">
-                <a:solidFill>
-                  <a:srgbClr val="1A1A2E"/>
-                </a:solidFill>
-                <a:latin typeface="Calibri"/>
-              </a:rPr>
-              <a:t>• •   해류/바람 변화에 따른 k 천이 미추정</a:t>
-            </a:r>
-          </a:p>
-        </p:txBody>
-      </p:sp>
-      <p:sp>
-        <p:nvSpPr>
-          <p:cNvPr id="7" name="TextBox 6"/>
+            <a:pPr algn="ctr">
+              <a:defRPr sz="1200" b="0">
+                <a:solidFill>
+                  <a:srgbClr val="666666"/>
+                </a:solidFill>
+                <a:latin typeface="Calibri"/>
+              </a:defRPr>
+            </a:pPr>
+            <a:r>
+              <a:t>※ 실제 발표 시 GIF 파일(docs/hydrofoil_wave_animation.gif)을 삽입하여 재생</a:t>
+            </a:r>
+          </a:p>
+        </p:txBody>
+      </p:sp>
+      <p:sp>
+        <p:nvSpPr>
+          <p:cNvPr id="8" name="TextBox 7"/>
           <p:cNvSpPr txBox="1"/>
           <p:nvPr/>
         </p:nvSpPr>
         <p:spPr>
           <a:xfrm>
-            <a:off x="6858000" y="1371600"/>
-            <a:ext cx="4846320" cy="365760"/>
+            <a:off x="10972800" y="6492240"/>
+            <a:ext cx="1097280" cy="274320"/>
           </a:xfrm>
           <a:prstGeom prst="rect">
             <a:avLst/>
@@ -11113,295 +11875,6 @@
           </a:bodyPr>
           <a:lstStyle/>
           <a:p>
-            <a:pPr algn="l">
-              <a:defRPr sz="2000" b="1">
-                <a:solidFill>
-                  <a:srgbClr val="007ACC"/>
-                </a:solidFill>
-                <a:latin typeface="Calibri"/>
-              </a:defRPr>
-            </a:pPr>
-            <a:r>
-              <a:t>전체 Contributions (논문 1+2)</a:t>
-            </a:r>
-          </a:p>
-        </p:txBody>
-      </p:sp>
-      <p:sp>
-        <p:nvSpPr>
-          <p:cNvPr id="8" name="TextBox 7"/>
-          <p:cNvSpPr txBox="1"/>
-          <p:nvPr/>
-        </p:nvSpPr>
-        <p:spPr>
-          <a:xfrm>
-            <a:off x="6858000" y="1828800"/>
-            <a:ext cx="4846320" cy="4114800"/>
-          </a:xfrm>
-          <a:prstGeom prst="rect">
-            <a:avLst/>
-          </a:prstGeom>
-          <a:noFill/>
-        </p:spPr>
-        <p:txBody>
-          <a:bodyPr wrap="square">
-            <a:spAutoFit/>
-          </a:bodyPr>
-          <a:lstStyle/>
-          <a:p>
-            <a:pPr>
-              <a:spcAft>
-                <a:spcPts val="600"/>
-              </a:spcAft>
-            </a:pPr>
-            <a:r>
-              <a:rPr sz="1200">
-                <a:solidFill>
-                  <a:srgbClr val="1A1A2E"/>
-                </a:solidFill>
-                <a:latin typeface="Calibri"/>
-              </a:rPr>
-              <a:t>• • [논문1] ❶ Grid-free spectral 파면 추정</a:t>
-            </a:r>
-          </a:p>
-          <a:p>
-            <a:pPr>
-              <a:spcAft>
-                <a:spcPts val="600"/>
-              </a:spcAft>
-            </a:pPr>
-            <a:r>
-              <a:rPr sz="1200">
-                <a:solidFill>
-                  <a:srgbClr val="1A1A2E"/>
-                </a:solidFill>
-                <a:latin typeface="Calibri"/>
-              </a:rPr>
-              <a:t>• • [논문1] ❷ Dispersion hard constraint (5N→4N)</a:t>
-            </a:r>
-          </a:p>
-          <a:p>
-            <a:pPr>
-              <a:spcAft>
-                <a:spcPts val="600"/>
-              </a:spcAft>
-            </a:pPr>
-            <a:r>
-              <a:rPr sz="1200">
-                <a:solidFill>
-                  <a:srgbClr val="1A1A2E"/>
-                </a:solidFill>
-                <a:latin typeface="Calibri"/>
-              </a:rPr>
-              <a:t>• • [논문1] ❸ Adaptive N (pruning + growth)</a:t>
-            </a:r>
-          </a:p>
-          <a:p>
-            <a:pPr>
-              <a:spcAft>
-                <a:spcPts val="600"/>
-              </a:spcAft>
-            </a:pPr>
-            <a:r>
-              <a:rPr sz="1200">
-                <a:solidFill>
-                  <a:srgbClr val="1A1A2E"/>
-                </a:solidFill>
-                <a:latin typeface="Calibri"/>
-              </a:rPr>
-              <a:t>• • [논문1] ❹ Fresnel confidence weighting</a:t>
-            </a:r>
-          </a:p>
-          <a:p>
-            <a:pPr>
-              <a:spcAft>
-                <a:spcPts val="600"/>
-              </a:spcAft>
-            </a:pPr>
-            <a:r>
-              <a:rPr sz="1200">
-                <a:solidFill>
-                  <a:srgbClr val="1A1A2E"/>
-                </a:solidFill>
-                <a:latin typeface="Calibri"/>
-              </a:rPr>
-              <a:t>• • [논문1] ❺ Pre-specified 6-metric panel</a:t>
-            </a:r>
-          </a:p>
-          <a:p>
-            <a:pPr>
-              <a:spcAft>
-                <a:spcPts val="600"/>
-              </a:spcAft>
-            </a:pPr>
-            <a:r>
-              <a:rPr sz="1200">
-                <a:solidFill>
-                  <a:srgbClr val="1A1A2E"/>
-                </a:solidFill>
-                <a:latin typeface="Calibri"/>
-              </a:rPr>
-              <a:t>• • [논문1] ❻ 24-config ETKF sweep (fair baseline)</a:t>
-            </a:r>
-          </a:p>
-          <a:p>
-            <a:pPr>
-              <a:spcAft>
-                <a:spcPts val="600"/>
-              </a:spcAft>
-            </a:pPr>
-            <a:r>
-              <a:rPr sz="1200">
-                <a:solidFill>
-                  <a:srgbClr val="1A1A2E"/>
-                </a:solidFill>
-                <a:latin typeface="Calibri"/>
-              </a:rPr>
-              <a:t>• • [논문1] ❼ Spectral accuracy + Sparse robustness + Forecast</a:t>
-            </a:r>
-          </a:p>
-          <a:p>
-            <a:pPr>
-              <a:spcAft>
-                <a:spcPts val="600"/>
-              </a:spcAft>
-            </a:pPr>
-            <a:r>
-              <a:rPr sz="1200">
-                <a:solidFill>
-                  <a:srgbClr val="1A1A2E"/>
-                </a:solidFill>
-                <a:latin typeface="Calibri"/>
-              </a:rPr>
-              <a:t>• </a:t>
-            </a:r>
-          </a:p>
-          <a:p>
-            <a:pPr>
-              <a:spcAft>
-                <a:spcPts val="600"/>
-              </a:spcAft>
-            </a:pPr>
-            <a:r>
-              <a:rPr sz="1200">
-                <a:solidFill>
-                  <a:srgbClr val="1A1A2E"/>
-                </a:solidFill>
-                <a:latin typeface="Calibri"/>
-              </a:rPr>
-              <a:t>• • [논문2] ❽ Dual-actuator wave-preview FF architecture</a:t>
-            </a:r>
-          </a:p>
-          <a:p>
-            <a:pPr>
-              <a:spcAft>
-                <a:spcPts val="600"/>
-              </a:spcAft>
-            </a:pPr>
-            <a:r>
-              <a:rPr sz="1200">
-                <a:solidFill>
-                  <a:srgbClr val="1A1A2E"/>
-                </a:solidFill>
-                <a:latin typeface="Calibri"/>
-              </a:rPr>
-              <a:t>• • [논문2] ❾ nRMSE tolerance + preview horizon 설계 지침</a:t>
-            </a:r>
-          </a:p>
-          <a:p>
-            <a:pPr>
-              <a:spcAft>
-                <a:spcPts val="600"/>
-              </a:spcAft>
-            </a:pPr>
-            <a:r>
-              <a:rPr sz="1200">
-                <a:solidFill>
-                  <a:srgbClr val="1A1A2E"/>
-                </a:solidFill>
-                <a:latin typeface="Calibri"/>
-              </a:rPr>
-              <a:t>• • [논문2] ❿ E2E LiDAR→추정→제어 파이프라인 실증</a:t>
-            </a:r>
-          </a:p>
-        </p:txBody>
-      </p:sp>
-      <p:sp>
-        <p:nvSpPr>
-          <p:cNvPr id="9" name="Rounded Rectangle 8"/>
-          <p:cNvSpPr/>
-          <p:nvPr/>
-        </p:nvSpPr>
-        <p:spPr>
-          <a:xfrm>
-            <a:off x="731520" y="5486400"/>
-            <a:ext cx="10698480" cy="914400"/>
-          </a:xfrm>
-          <a:prstGeom prst="roundRect">
-            <a:avLst/>
-          </a:prstGeom>
-          <a:solidFill>
-            <a:srgbClr val="F0F4F8"/>
-          </a:solidFill>
-          <a:ln>
-            <a:solidFill>
-              <a:srgbClr val="007ACC"/>
-            </a:solidFill>
-          </a:ln>
-        </p:spPr>
-        <p:style>
-          <a:lnRef idx="1">
-            <a:schemeClr val="accent1"/>
-          </a:lnRef>
-          <a:fillRef idx="3">
-            <a:schemeClr val="accent1"/>
-          </a:fillRef>
-          <a:effectRef idx="2">
-            <a:schemeClr val="accent1"/>
-          </a:effectRef>
-          <a:fontRef idx="minor">
-            <a:schemeClr val="lt1"/>
-          </a:fontRef>
-        </p:style>
-        <p:txBody>
-          <a:bodyPr rtlCol="0" anchor="ctr" wrap="square"/>
-          <a:lstStyle/>
-          <a:p>
-            <a:pPr algn="ctr">
-              <a:defRPr sz="1600" b="1">
-                <a:solidFill>
-                  <a:srgbClr val="1A1A2E"/>
-                </a:solidFill>
-              </a:defRPr>
-            </a:pPr>
-            <a:r>
-              <a:t>WaveSplat: nRMSE 30.1%↓, ~10× faster, SS only+  |  Hydrofoil: aRMS 11~41%↓, BF3 E2E 92~96%</a:t>
-            </a:r>
-          </a:p>
-        </p:txBody>
-      </p:sp>
-      <p:sp>
-        <p:nvSpPr>
-          <p:cNvPr id="10" name="TextBox 9"/>
-          <p:cNvSpPr txBox="1"/>
-          <p:nvPr/>
-        </p:nvSpPr>
-        <p:spPr>
-          <a:xfrm>
-            <a:off x="10972800" y="6492240"/>
-            <a:ext cx="1097280" cy="274320"/>
-          </a:xfrm>
-          <a:prstGeom prst="rect">
-            <a:avLst/>
-          </a:prstGeom>
-          <a:noFill/>
-        </p:spPr>
-        <p:txBody>
-          <a:bodyPr wrap="square">
-            <a:spAutoFit/>
-          </a:bodyPr>
-          <a:lstStyle/>
-          <a:p>
             <a:pPr algn="r">
               <a:defRPr sz="1000" b="0">
                 <a:solidFill>
@@ -11411,7 +11884,7 @@
               </a:defRPr>
             </a:pPr>
             <a:r>
-              <a:t>21/23</a:t>
+              <a:t>21/24</a:t>
             </a:r>
           </a:p>
         </p:txBody>
@@ -11516,7 +11989,7 @@
               </a:defRPr>
             </a:pPr>
             <a:r>
-              <a:t>  07</a:t>
+              <a:t>  06</a:t>
             </a:r>
           </a:p>
         </p:txBody>
@@ -11552,7 +12025,7 @@
               </a:defRPr>
             </a:pPr>
             <a:r>
-              <a:t>  학위논문 구조</a:t>
+              <a:t>  한계와 향후 과제</a:t>
             </a:r>
           </a:p>
         </p:txBody>
@@ -11588,7 +12061,7 @@
               </a:defRPr>
             </a:pPr>
             <a:r>
-              <a:t>  선박 탑재 LiDAR 기반 실시간 파랑장 추정과 그 제어 응용</a:t>
+              <a:t>  Honest Limitations</a:t>
             </a:r>
           </a:p>
         </p:txBody>
@@ -11601,8 +12074,8 @@
         </p:nvSpPr>
         <p:spPr>
           <a:xfrm>
-            <a:off x="731520" y="1371600"/>
-            <a:ext cx="5303520" cy="365760"/>
+            <a:off x="731520" y="1645920"/>
+            <a:ext cx="5486400" cy="4572000"/>
           </a:xfrm>
           <a:prstGeom prst="rect">
             <a:avLst/>
@@ -11615,16 +12088,259 @@
           </a:bodyPr>
           <a:lstStyle/>
           <a:p>
-            <a:pPr algn="l">
-              <a:defRPr sz="2200" b="1">
-                <a:solidFill>
-                  <a:srgbClr val="007ACC"/>
-                </a:solidFill>
-                <a:latin typeface="Calibri"/>
-              </a:defRPr>
-            </a:pPr>
-            <a:r>
-              <a:t>학위논문 목차</a:t>
+            <a:pPr>
+              <a:spcAft>
+                <a:spcPts val="600"/>
+              </a:spcAft>
+            </a:pPr>
+            <a:r>
+              <a:rPr sz="1300">
+                <a:solidFill>
+                  <a:srgbClr val="1A1A2E"/>
+                </a:solidFill>
+                <a:latin typeface="Calibri"/>
+              </a:rPr>
+              <a:t>• • WaveSplat 추정 한계:</a:t>
+            </a:r>
+          </a:p>
+          <a:p>
+            <a:pPr>
+              <a:spcAft>
+                <a:spcPts val="600"/>
+              </a:spcAft>
+            </a:pPr>
+            <a:r>
+              <a:rPr sz="1300">
+                <a:solidFill>
+                  <a:srgbClr val="1A1A2E"/>
+                </a:solidFill>
+                <a:latin typeface="Calibri"/>
+              </a:rPr>
+              <a:t>• •   VR = 0.66 → 진폭 34% 과소추정 (pruning 대가)</a:t>
+            </a:r>
+          </a:p>
+          <a:p>
+            <a:pPr>
+              <a:spcAft>
+                <a:spcPts val="600"/>
+              </a:spcAft>
+            </a:pPr>
+            <a:r>
+              <a:rPr sz="1300">
+                <a:solidFill>
+                  <a:srgbClr val="1A1A2E"/>
+                </a:solidFill>
+                <a:latin typeface="Calibri"/>
+              </a:rPr>
+              <a:t>• •   Dir R² = −0.25 → 방향 추정이 가장 큰 약점</a:t>
+            </a:r>
+          </a:p>
+          <a:p>
+            <a:pPr>
+              <a:spcAft>
+                <a:spcPts val="600"/>
+              </a:spcAft>
+            </a:pPr>
+            <a:r>
+              <a:rPr sz="1300">
+                <a:solidFill>
+                  <a:srgbClr val="1A1A2E"/>
+                </a:solidFill>
+                <a:latin typeface="Calibri"/>
+              </a:rPr>
+              <a:t>• •     → 개선: multi-frame 방향 voting / 2D k-space 정규화</a:t>
+            </a:r>
+          </a:p>
+          <a:p>
+            <a:pPr>
+              <a:spcAft>
+                <a:spcPts val="600"/>
+              </a:spcAft>
+            </a:pPr>
+            <a:r>
+              <a:rPr sz="1300">
+                <a:solidFill>
+                  <a:srgbClr val="1A1A2E"/>
+                </a:solidFill>
+                <a:latin typeface="Calibri"/>
+              </a:rPr>
+              <a:t>• •   진폭 감쇠 (Adam momentum 부호 진동)</a:t>
+            </a:r>
+          </a:p>
+          <a:p>
+            <a:pPr>
+              <a:spcAft>
+                <a:spcPts val="600"/>
+              </a:spcAft>
+            </a:pPr>
+            <a:r>
+              <a:rPr sz="1300">
+                <a:solidFill>
+                  <a:srgbClr val="1A1A2E"/>
+                </a:solidFill>
+                <a:latin typeface="Calibri"/>
+              </a:rPr>
+              <a:t>• •   Nₜᵣᵤₑ ≥ 30 이상 복잡 해상 → 성분 수 한계</a:t>
+            </a:r>
+          </a:p>
+          <a:p>
+            <a:pPr>
+              <a:spcAft>
+                <a:spcPts val="600"/>
+              </a:spcAft>
+            </a:pPr>
+            <a:r>
+              <a:rPr sz="1300">
+                <a:solidFill>
+                  <a:srgbClr val="1A1A2E"/>
+                </a:solidFill>
+                <a:latin typeface="Calibri"/>
+              </a:rPr>
+              <a:t>• </a:t>
+            </a:r>
+          </a:p>
+          <a:p>
+            <a:pPr>
+              <a:spcAft>
+                <a:spcPts val="600"/>
+              </a:spcAft>
+            </a:pPr>
+            <a:r>
+              <a:rPr sz="1300">
+                <a:solidFill>
+                  <a:srgbClr val="1A1A2E"/>
+                </a:solidFill>
+                <a:latin typeface="Calibri"/>
+              </a:rPr>
+              <a:t>• • Hydrofoil 제어 한계:</a:t>
+            </a:r>
+          </a:p>
+          <a:p>
+            <a:pPr>
+              <a:spcAft>
+                <a:spcPts val="600"/>
+              </a:spcAft>
+            </a:pPr>
+            <a:r>
+              <a:rPr sz="1300">
+                <a:solidFill>
+                  <a:srgbClr val="1A1A2E"/>
+                </a:solidFill>
+                <a:latin typeface="Calibri"/>
+              </a:rPr>
+              <a:t>• •   BF4 E2E → 37% (direction error 전파)</a:t>
+            </a:r>
+          </a:p>
+          <a:p>
+            <a:pPr>
+              <a:spcAft>
+                <a:spcPts val="600"/>
+              </a:spcAft>
+            </a:pPr>
+            <a:r>
+              <a:rPr sz="1300">
+                <a:solidFill>
+                  <a:srgbClr val="1A1A2E"/>
+                </a:solidFill>
+                <a:latin typeface="Calibri"/>
+              </a:rPr>
+              <a:t>• •   2DOF (heave+pitch): roll은 별도 roll foil 담당 구조</a:t>
+            </a:r>
+          </a:p>
+          <a:p>
+            <a:pPr>
+              <a:spcAft>
+                <a:spcPts val="600"/>
+              </a:spcAft>
+            </a:pPr>
+            <a:r>
+              <a:rPr sz="1300">
+                <a:solidFill>
+                  <a:srgbClr val="1A1A2E"/>
+                </a:solidFill>
+                <a:latin typeface="Calibri"/>
+              </a:rPr>
+              <a:t>• •   선형 foil model (ventilation 간소화)</a:t>
+            </a:r>
+          </a:p>
+          <a:p>
+            <a:pPr>
+              <a:spcAft>
+                <a:spcPts val="600"/>
+              </a:spcAft>
+            </a:pPr>
+            <a:r>
+              <a:rPr sz="1300">
+                <a:solidFill>
+                  <a:srgbClr val="1A1A2E"/>
+                </a:solidFill>
+                <a:latin typeface="Calibri"/>
+              </a:rPr>
+              <a:t>• </a:t>
+            </a:r>
+          </a:p>
+          <a:p>
+            <a:pPr>
+              <a:spcAft>
+                <a:spcPts val="600"/>
+              </a:spcAft>
+            </a:pPr>
+            <a:r>
+              <a:rPr sz="1300">
+                <a:solidFill>
+                  <a:srgbClr val="1A1A2E"/>
+                </a:solidFill>
+                <a:latin typeface="Calibri"/>
+              </a:rPr>
+              <a:t>• • 공통 한계:</a:t>
+            </a:r>
+          </a:p>
+          <a:p>
+            <a:pPr>
+              <a:spcAft>
+                <a:spcPts val="600"/>
+              </a:spcAft>
+            </a:pPr>
+            <a:r>
+              <a:rPr sz="1300">
+                <a:solidFill>
+                  <a:srgbClr val="1A1A2E"/>
+                </a:solidFill>
+                <a:latin typeface="Calibri"/>
+              </a:rPr>
+              <a:t>• •   시뮬레이션 전용 → 실측 검증 필요</a:t>
+            </a:r>
+          </a:p>
+          <a:p>
+            <a:pPr>
+              <a:spcAft>
+                <a:spcPts val="600"/>
+              </a:spcAft>
+            </a:pPr>
+            <a:r>
+              <a:rPr sz="1300">
+                <a:solidFill>
+                  <a:srgbClr val="1A1A2E"/>
+                </a:solidFill>
+                <a:latin typeface="Calibri"/>
+              </a:rPr>
+              <a:t>• •   선형 파도 모델 → Stokes-2+ 미반영</a:t>
+            </a:r>
+          </a:p>
+          <a:p>
+            <a:pPr>
+              <a:spcAft>
+                <a:spcPts val="600"/>
+              </a:spcAft>
+            </a:pPr>
+            <a:r>
+              <a:rPr sz="1300">
+                <a:solidFill>
+                  <a:srgbClr val="1A1A2E"/>
+                </a:solidFill>
+                <a:latin typeface="Calibri"/>
+              </a:rPr>
+              <a:t>• •   해류/바람 변화에 따른 k 천이 미추정</a:t>
             </a:r>
           </a:p>
         </p:txBody>
@@ -11637,8 +12353,8 @@
         </p:nvSpPr>
         <p:spPr>
           <a:xfrm>
-            <a:off x="731520" y="1828800"/>
-            <a:ext cx="5303520" cy="4114800"/>
+            <a:off x="6858000" y="1371600"/>
+            <a:ext cx="4846320" cy="365760"/>
           </a:xfrm>
           <a:prstGeom prst="rect">
             <a:avLst/>
@@ -11651,195 +12367,16 @@
           </a:bodyPr>
           <a:lstStyle/>
           <a:p>
-            <a:pPr>
-              <a:spcAft>
-                <a:spcPts val="600"/>
-              </a:spcAft>
-            </a:pPr>
-            <a:r>
-              <a:rPr sz="1400">
-                <a:solidFill>
-                  <a:srgbClr val="1A1A2E"/>
-                </a:solidFill>
-                <a:latin typeface="Calibri"/>
-              </a:rPr>
-              <a:t>• • Ch.1 서론: 연구 배경, 목적, 범위</a:t>
-            </a:r>
-          </a:p>
-          <a:p>
-            <a:pPr>
-              <a:spcAft>
-                <a:spcPts val="600"/>
-              </a:spcAft>
-            </a:pPr>
-            <a:r>
-              <a:rPr sz="1400">
-                <a:solidFill>
-                  <a:srgbClr val="1A1A2E"/>
-                </a:solidFill>
-                <a:latin typeface="Calibri"/>
-              </a:rPr>
-              <a:t>• • Ch.2 문헌 조사: 파랑 추정 + 제어 선행연구</a:t>
-            </a:r>
-          </a:p>
-          <a:p>
-            <a:pPr>
-              <a:spcAft>
-                <a:spcPts val="600"/>
-              </a:spcAft>
-            </a:pPr>
-            <a:r>
-              <a:rPr sz="1400">
-                <a:solidFill>
-                  <a:srgbClr val="1A1A2E"/>
-                </a:solidFill>
-                <a:latin typeface="Calibri"/>
-              </a:rPr>
-              <a:t>• </a:t>
-            </a:r>
-          </a:p>
-          <a:p>
-            <a:pPr>
-              <a:spcAft>
-                <a:spcPts val="600"/>
-              </a:spcAft>
-            </a:pPr>
-            <a:r>
-              <a:rPr sz="1400">
-                <a:solidFill>
-                  <a:srgbClr val="1A1A2E"/>
-                </a:solidFill>
-                <a:latin typeface="Calibri"/>
-              </a:rPr>
-              <a:t>• • Ch.3 WaveSplat (논문 1)</a:t>
-            </a:r>
-          </a:p>
-          <a:p>
-            <a:pPr>
-              <a:spcAft>
-                <a:spcPts val="600"/>
-              </a:spcAft>
-            </a:pPr>
-            <a:r>
-              <a:rPr sz="1400">
-                <a:solidFill>
-                  <a:srgbClr val="1A1A2E"/>
-                </a:solidFill>
-                <a:latin typeface="Calibri"/>
-              </a:rPr>
-              <a:t>• •   시뮬레이션, 알고리즘, 실험, 분석</a:t>
-            </a:r>
-          </a:p>
-          <a:p>
-            <a:pPr>
-              <a:spcAft>
-                <a:spcPts val="600"/>
-              </a:spcAft>
-            </a:pPr>
-            <a:r>
-              <a:rPr sz="1400">
-                <a:solidFill>
-                  <a:srgbClr val="1A1A2E"/>
-                </a:solidFill>
-                <a:latin typeface="Calibri"/>
-              </a:rPr>
-              <a:t>• •   + 3 추가 기여 (spectral/sparse/forecast)</a:t>
-            </a:r>
-          </a:p>
-          <a:p>
-            <a:pPr>
-              <a:spcAft>
-                <a:spcPts val="600"/>
-              </a:spcAft>
-            </a:pPr>
-            <a:r>
-              <a:rPr sz="1400">
-                <a:solidFill>
-                  <a:srgbClr val="1A1A2E"/>
-                </a:solidFill>
-                <a:latin typeface="Calibri"/>
-              </a:rPr>
-              <a:t>• </a:t>
-            </a:r>
-          </a:p>
-          <a:p>
-            <a:pPr>
-              <a:spcAft>
-                <a:spcPts val="600"/>
-              </a:spcAft>
-            </a:pPr>
-            <a:r>
-              <a:rPr sz="1400">
-                <a:solidFill>
-                  <a:srgbClr val="1A1A2E"/>
-                </a:solidFill>
-                <a:latin typeface="Calibri"/>
-              </a:rPr>
-              <a:t>• • Ch.4 Hydrofoil FF Control (논문 2)</a:t>
-            </a:r>
-          </a:p>
-          <a:p>
-            <a:pPr>
-              <a:spcAft>
-                <a:spcPts val="600"/>
-              </a:spcAft>
-            </a:pPr>
-            <a:r>
-              <a:rPr sz="1400">
-                <a:solidFill>
-                  <a:srgbClr val="1A1A2E"/>
-                </a:solidFill>
-                <a:latin typeface="Calibri"/>
-              </a:rPr>
-              <a:t>• •   동역학 모델, 제어 설계, sensitivity, E2E</a:t>
-            </a:r>
-          </a:p>
-          <a:p>
-            <a:pPr>
-              <a:spcAft>
-                <a:spcPts val="600"/>
-              </a:spcAft>
-            </a:pPr>
-            <a:r>
-              <a:rPr sz="1400">
-                <a:solidFill>
-                  <a:srgbClr val="1A1A2E"/>
-                </a:solidFill>
-                <a:latin typeface="Calibri"/>
-              </a:rPr>
-              <a:t>• </a:t>
-            </a:r>
-          </a:p>
-          <a:p>
-            <a:pPr>
-              <a:spcAft>
-                <a:spcPts val="600"/>
-              </a:spcAft>
-            </a:pPr>
-            <a:r>
-              <a:rPr sz="1400">
-                <a:solidFill>
-                  <a:srgbClr val="1A1A2E"/>
-                </a:solidFill>
-                <a:latin typeface="Calibri"/>
-              </a:rPr>
-              <a:t>• • Ch.5 결론 및 향후 연구</a:t>
-            </a:r>
-          </a:p>
-          <a:p>
-            <a:pPr>
-              <a:spcAft>
-                <a:spcPts val="600"/>
-              </a:spcAft>
-            </a:pPr>
-            <a:r>
-              <a:rPr sz="1400">
-                <a:solidFill>
-                  <a:srgbClr val="1A1A2E"/>
-                </a:solidFill>
-                <a:latin typeface="Calibri"/>
-              </a:rPr>
-              <a:t>• • 부록: 파라미터 표, 추가 그래프</a:t>
+            <a:pPr algn="l">
+              <a:defRPr sz="2000" b="1">
+                <a:solidFill>
+                  <a:srgbClr val="007ACC"/>
+                </a:solidFill>
+                <a:latin typeface="Calibri"/>
+              </a:defRPr>
+            </a:pPr>
+            <a:r>
+              <a:t>전체 Contributions (논문 1+2)</a:t>
             </a:r>
           </a:p>
         </p:txBody>
@@ -11852,8 +12389,8 @@
         </p:nvSpPr>
         <p:spPr>
           <a:xfrm>
-            <a:off x="6400800" y="1371600"/>
-            <a:ext cx="5303520" cy="365760"/>
+            <a:off x="6858000" y="1828800"/>
+            <a:ext cx="4846320" cy="4114800"/>
           </a:xfrm>
           <a:prstGeom prst="rect">
             <a:avLst/>
@@ -11866,30 +12403,247 @@
           </a:bodyPr>
           <a:lstStyle/>
           <a:p>
-            <a:pPr algn="l">
-              <a:defRPr sz="2200" b="1">
-                <a:solidFill>
-                  <a:srgbClr val="E8553A"/>
-                </a:solidFill>
-                <a:latin typeface="Calibri"/>
+            <a:pPr>
+              <a:spcAft>
+                <a:spcPts val="600"/>
+              </a:spcAft>
+            </a:pPr>
+            <a:r>
+              <a:rPr sz="1200">
+                <a:solidFill>
+                  <a:srgbClr val="1A1A2E"/>
+                </a:solidFill>
+                <a:latin typeface="Calibri"/>
+              </a:rPr>
+              <a:t>• • [논문1] ❶ Grid-free spectral 파면 추정</a:t>
+            </a:r>
+          </a:p>
+          <a:p>
+            <a:pPr>
+              <a:spcAft>
+                <a:spcPts val="600"/>
+              </a:spcAft>
+            </a:pPr>
+            <a:r>
+              <a:rPr sz="1200">
+                <a:solidFill>
+                  <a:srgbClr val="1A1A2E"/>
+                </a:solidFill>
+                <a:latin typeface="Calibri"/>
+              </a:rPr>
+              <a:t>• • [논문1] ❷ Dispersion hard constraint (5N→4N)</a:t>
+            </a:r>
+          </a:p>
+          <a:p>
+            <a:pPr>
+              <a:spcAft>
+                <a:spcPts val="600"/>
+              </a:spcAft>
+            </a:pPr>
+            <a:r>
+              <a:rPr sz="1200">
+                <a:solidFill>
+                  <a:srgbClr val="1A1A2E"/>
+                </a:solidFill>
+                <a:latin typeface="Calibri"/>
+              </a:rPr>
+              <a:t>• • [논문1] ❸ Adaptive N (pruning + growth)</a:t>
+            </a:r>
+          </a:p>
+          <a:p>
+            <a:pPr>
+              <a:spcAft>
+                <a:spcPts val="600"/>
+              </a:spcAft>
+            </a:pPr>
+            <a:r>
+              <a:rPr sz="1200">
+                <a:solidFill>
+                  <a:srgbClr val="1A1A2E"/>
+                </a:solidFill>
+                <a:latin typeface="Calibri"/>
+              </a:rPr>
+              <a:t>• • [논문1] ❹ Fresnel confidence weighting</a:t>
+            </a:r>
+          </a:p>
+          <a:p>
+            <a:pPr>
+              <a:spcAft>
+                <a:spcPts val="600"/>
+              </a:spcAft>
+            </a:pPr>
+            <a:r>
+              <a:rPr sz="1200">
+                <a:solidFill>
+                  <a:srgbClr val="1A1A2E"/>
+                </a:solidFill>
+                <a:latin typeface="Calibri"/>
+              </a:rPr>
+              <a:t>• • [논문1] ❺ Pre-specified 6-metric panel</a:t>
+            </a:r>
+          </a:p>
+          <a:p>
+            <a:pPr>
+              <a:spcAft>
+                <a:spcPts val="600"/>
+              </a:spcAft>
+            </a:pPr>
+            <a:r>
+              <a:rPr sz="1200">
+                <a:solidFill>
+                  <a:srgbClr val="1A1A2E"/>
+                </a:solidFill>
+                <a:latin typeface="Calibri"/>
+              </a:rPr>
+              <a:t>• • [논문1] ❻ 24-config ETKF sweep (fair baseline)</a:t>
+            </a:r>
+          </a:p>
+          <a:p>
+            <a:pPr>
+              <a:spcAft>
+                <a:spcPts val="600"/>
+              </a:spcAft>
+            </a:pPr>
+            <a:r>
+              <a:rPr sz="1200">
+                <a:solidFill>
+                  <a:srgbClr val="1A1A2E"/>
+                </a:solidFill>
+                <a:latin typeface="Calibri"/>
+              </a:rPr>
+              <a:t>• • [논문1] ❼ Spectral accuracy + Sparse robustness + Forecast</a:t>
+            </a:r>
+          </a:p>
+          <a:p>
+            <a:pPr>
+              <a:spcAft>
+                <a:spcPts val="600"/>
+              </a:spcAft>
+            </a:pPr>
+            <a:r>
+              <a:rPr sz="1200">
+                <a:solidFill>
+                  <a:srgbClr val="1A1A2E"/>
+                </a:solidFill>
+                <a:latin typeface="Calibri"/>
+              </a:rPr>
+              <a:t>• </a:t>
+            </a:r>
+          </a:p>
+          <a:p>
+            <a:pPr>
+              <a:spcAft>
+                <a:spcPts val="600"/>
+              </a:spcAft>
+            </a:pPr>
+            <a:r>
+              <a:rPr sz="1200">
+                <a:solidFill>
+                  <a:srgbClr val="1A1A2E"/>
+                </a:solidFill>
+                <a:latin typeface="Calibri"/>
+              </a:rPr>
+              <a:t>• • [논문2] ❽ Dual-actuator wave-preview FF architecture</a:t>
+            </a:r>
+          </a:p>
+          <a:p>
+            <a:pPr>
+              <a:spcAft>
+                <a:spcPts val="600"/>
+              </a:spcAft>
+            </a:pPr>
+            <a:r>
+              <a:rPr sz="1200">
+                <a:solidFill>
+                  <a:srgbClr val="1A1A2E"/>
+                </a:solidFill>
+                <a:latin typeface="Calibri"/>
+              </a:rPr>
+              <a:t>• • [논문2] ❾ nRMSE tolerance + preview horizon 설계 지침</a:t>
+            </a:r>
+          </a:p>
+          <a:p>
+            <a:pPr>
+              <a:spcAft>
+                <a:spcPts val="600"/>
+              </a:spcAft>
+            </a:pPr>
+            <a:r>
+              <a:rPr sz="1200">
+                <a:solidFill>
+                  <a:srgbClr val="1A1A2E"/>
+                </a:solidFill>
+                <a:latin typeface="Calibri"/>
+              </a:rPr>
+              <a:t>• • [논문2] ❿ E2E LiDAR→추정→제어 파이프라인 실증</a:t>
+            </a:r>
+          </a:p>
+        </p:txBody>
+      </p:sp>
+      <p:sp>
+        <p:nvSpPr>
+          <p:cNvPr id="9" name="Rounded Rectangle 8"/>
+          <p:cNvSpPr/>
+          <p:nvPr/>
+        </p:nvSpPr>
+        <p:spPr>
+          <a:xfrm>
+            <a:off x="731520" y="5486400"/>
+            <a:ext cx="10698480" cy="914400"/>
+          </a:xfrm>
+          <a:prstGeom prst="roundRect">
+            <a:avLst/>
+          </a:prstGeom>
+          <a:solidFill>
+            <a:srgbClr val="F0F4F8"/>
+          </a:solidFill>
+          <a:ln>
+            <a:solidFill>
+              <a:srgbClr val="007ACC"/>
+            </a:solidFill>
+          </a:ln>
+        </p:spPr>
+        <p:style>
+          <a:lnRef idx="1">
+            <a:schemeClr val="accent1"/>
+          </a:lnRef>
+          <a:fillRef idx="3">
+            <a:schemeClr val="accent1"/>
+          </a:fillRef>
+          <a:effectRef idx="2">
+            <a:schemeClr val="accent1"/>
+          </a:effectRef>
+          <a:fontRef idx="minor">
+            <a:schemeClr val="lt1"/>
+          </a:fontRef>
+        </p:style>
+        <p:txBody>
+          <a:bodyPr rtlCol="0" anchor="ctr" wrap="square"/>
+          <a:lstStyle/>
+          <a:p>
+            <a:pPr algn="ctr">
+              <a:defRPr sz="1600" b="1">
+                <a:solidFill>
+                  <a:srgbClr val="1A1A2E"/>
+                </a:solidFill>
               </a:defRPr>
             </a:pPr>
             <a:r>
-              <a:t>현재 진행 상태</a:t>
-            </a:r>
-          </a:p>
-        </p:txBody>
-      </p:sp>
-      <p:sp>
-        <p:nvSpPr>
-          <p:cNvPr id="9" name="TextBox 8"/>
+              <a:t>WaveSplat: nRMSE 30.1%↓, ~10× faster, SS only+  |  Hydrofoil: aRMS 11~41%↓, BF3 E2E 92~96%</a:t>
+            </a:r>
+          </a:p>
+        </p:txBody>
+      </p:sp>
+      <p:sp>
+        <p:nvSpPr>
+          <p:cNvPr id="10" name="TextBox 9"/>
           <p:cNvSpPr txBox="1"/>
           <p:nvPr/>
         </p:nvSpPr>
         <p:spPr>
           <a:xfrm>
-            <a:off x="6400800" y="1828800"/>
-            <a:ext cx="5303520" cy="4114800"/>
+            <a:off x="10972800" y="6492240"/>
+            <a:ext cx="1097280" cy="274320"/>
           </a:xfrm>
           <a:prstGeom prst="rect">
             <a:avLst/>
@@ -11902,253 +12656,6 @@
           </a:bodyPr>
           <a:lstStyle/>
           <a:p>
-            <a:pPr>
-              <a:spcAft>
-                <a:spcPts val="600"/>
-              </a:spcAft>
-            </a:pPr>
-            <a:r>
-              <a:rPr sz="1300">
-                <a:solidFill>
-                  <a:srgbClr val="1A1A2E"/>
-                </a:solidFill>
-                <a:latin typeface="Calibri"/>
-              </a:rPr>
-              <a:t>• • 논문 1 (WaveSplat)</a:t>
-            </a:r>
-          </a:p>
-          <a:p>
-            <a:pPr>
-              <a:spcAft>
-                <a:spcPts val="600"/>
-              </a:spcAft>
-            </a:pPr>
-            <a:r>
-              <a:rPr sz="1300">
-                <a:solidFill>
-                  <a:srgbClr val="1A1A2E"/>
-                </a:solidFill>
-                <a:latin typeface="Calibri"/>
-              </a:rPr>
-              <a:t>• •   ✅ 코드/실험 완료 (57 tests pass)</a:t>
-            </a:r>
-          </a:p>
-          <a:p>
-            <a:pPr>
-              <a:spcAft>
-                <a:spcPts val="600"/>
-              </a:spcAft>
-            </a:pPr>
-            <a:r>
-              <a:rPr sz="1300">
-                <a:solidFill>
-                  <a:srgbClr val="1A1A2E"/>
-                </a:solidFill>
-                <a:latin typeface="Calibri"/>
-              </a:rPr>
-              <a:t>• •   ✅ 논문 작성 완료 (Ocean Eng. format)</a:t>
-            </a:r>
-          </a:p>
-          <a:p>
-            <a:pPr>
-              <a:spcAft>
-                <a:spcPts val="600"/>
-              </a:spcAft>
-            </a:pPr>
-            <a:r>
-              <a:rPr sz="1300">
-                <a:solidFill>
-                  <a:srgbClr val="1A1A2E"/>
-                </a:solidFill>
-                <a:latin typeface="Calibri"/>
-              </a:rPr>
-              <a:t>• •   ✅ 적대적 페르소나 10라운드 검토 완료</a:t>
-            </a:r>
-          </a:p>
-          <a:p>
-            <a:pPr>
-              <a:spcAft>
-                <a:spcPts val="600"/>
-              </a:spcAft>
-            </a:pPr>
-            <a:r>
-              <a:rPr sz="1300">
-                <a:solidFill>
-                  <a:srgbClr val="1A1A2E"/>
-                </a:solidFill>
-                <a:latin typeface="Calibri"/>
-              </a:rPr>
-              <a:t>• •   ⏳ 공동저자 sign-off → 투고</a:t>
-            </a:r>
-          </a:p>
-          <a:p>
-            <a:pPr>
-              <a:spcAft>
-                <a:spcPts val="600"/>
-              </a:spcAft>
-            </a:pPr>
-            <a:r>
-              <a:rPr sz="1300">
-                <a:solidFill>
-                  <a:srgbClr val="1A1A2E"/>
-                </a:solidFill>
-                <a:latin typeface="Calibri"/>
-              </a:rPr>
-              <a:t>• </a:t>
-            </a:r>
-          </a:p>
-          <a:p>
-            <a:pPr>
-              <a:spcAft>
-                <a:spcPts val="600"/>
-              </a:spcAft>
-            </a:pPr>
-            <a:r>
-              <a:rPr sz="1300">
-                <a:solidFill>
-                  <a:srgbClr val="1A1A2E"/>
-                </a:solidFill>
-                <a:latin typeface="Calibri"/>
-              </a:rPr>
-              <a:t>• • 논문 2 (Hydrofoil)</a:t>
-            </a:r>
-          </a:p>
-          <a:p>
-            <a:pPr>
-              <a:spcAft>
-                <a:spcPts val="600"/>
-              </a:spcAft>
-            </a:pPr>
-            <a:r>
-              <a:rPr sz="1300">
-                <a:solidFill>
-                  <a:srgbClr val="1A1A2E"/>
-                </a:solidFill>
-                <a:latin typeface="Calibri"/>
-              </a:rPr>
-              <a:t>• •   ✅ 시뮬레이션 완료 (Phase 1~3)</a:t>
-            </a:r>
-          </a:p>
-          <a:p>
-            <a:pPr>
-              <a:spcAft>
-                <a:spcPts val="600"/>
-              </a:spcAft>
-            </a:pPr>
-            <a:r>
-              <a:rPr sz="1300">
-                <a:solidFill>
-                  <a:srgbClr val="1A1A2E"/>
-                </a:solidFill>
-                <a:latin typeface="Calibri"/>
-              </a:rPr>
-              <a:t>• •   ✅ 초안 작성 완료</a:t>
-            </a:r>
-          </a:p>
-          <a:p>
-            <a:pPr>
-              <a:spcAft>
-                <a:spcPts val="600"/>
-              </a:spcAft>
-            </a:pPr>
-            <a:r>
-              <a:rPr sz="1300">
-                <a:solidFill>
-                  <a:srgbClr val="1A1A2E"/>
-                </a:solidFill>
-                <a:latin typeface="Calibri"/>
-              </a:rPr>
-              <a:t>• •   ⏳ 공동저자 검토 → 투고</a:t>
-            </a:r>
-          </a:p>
-          <a:p>
-            <a:pPr>
-              <a:spcAft>
-                <a:spcPts val="600"/>
-              </a:spcAft>
-            </a:pPr>
-            <a:r>
-              <a:rPr sz="1300">
-                <a:solidFill>
-                  <a:srgbClr val="1A1A2E"/>
-                </a:solidFill>
-                <a:latin typeface="Calibri"/>
-              </a:rPr>
-              <a:t>• </a:t>
-            </a:r>
-          </a:p>
-          <a:p>
-            <a:pPr>
-              <a:spcAft>
-                <a:spcPts val="600"/>
-              </a:spcAft>
-            </a:pPr>
-            <a:r>
-              <a:rPr sz="1300">
-                <a:solidFill>
-                  <a:srgbClr val="1A1A2E"/>
-                </a:solidFill>
-                <a:latin typeface="Calibri"/>
-              </a:rPr>
-              <a:t>• • 학위논문</a:t>
-            </a:r>
-          </a:p>
-          <a:p>
-            <a:pPr>
-              <a:spcAft>
-                <a:spcPts val="600"/>
-              </a:spcAft>
-            </a:pPr>
-            <a:r>
-              <a:rPr sz="1300">
-                <a:solidFill>
-                  <a:srgbClr val="1A1A2E"/>
-                </a:solidFill>
-                <a:latin typeface="Calibri"/>
-              </a:rPr>
-              <a:t>• •   ✅ 초안 완성 (203K lines, PDF 생성)</a:t>
-            </a:r>
-          </a:p>
-          <a:p>
-            <a:pPr>
-              <a:spcAft>
-                <a:spcPts val="600"/>
-              </a:spcAft>
-            </a:pPr>
-            <a:r>
-              <a:rPr sz="1300">
-                <a:solidFill>
-                  <a:srgbClr val="1A1A2E"/>
-                </a:solidFill>
-                <a:latin typeface="Calibri"/>
-              </a:rPr>
-              <a:t>• •   ⏳ 지도교수 검토</a:t>
-            </a:r>
-          </a:p>
-        </p:txBody>
-      </p:sp>
-      <p:sp>
-        <p:nvSpPr>
-          <p:cNvPr id="10" name="TextBox 9"/>
-          <p:cNvSpPr txBox="1"/>
-          <p:nvPr/>
-        </p:nvSpPr>
-        <p:spPr>
-          <a:xfrm>
-            <a:off x="10972800" y="6492240"/>
-            <a:ext cx="1097280" cy="274320"/>
-          </a:xfrm>
-          <a:prstGeom prst="rect">
-            <a:avLst/>
-          </a:prstGeom>
-          <a:noFill/>
-        </p:spPr>
-        <p:txBody>
-          <a:bodyPr wrap="square">
-            <a:spAutoFit/>
-          </a:bodyPr>
-          <a:lstStyle/>
-          <a:p>
             <a:pPr algn="r">
               <a:defRPr sz="1000" b="0">
                 <a:solidFill>
@@ -12158,7 +12665,7 @@
               </a:defRPr>
             </a:pPr>
             <a:r>
-              <a:t>22/23</a:t>
+              <a:t>22/24</a:t>
             </a:r>
           </a:p>
         </p:txBody>
@@ -12299,7 +12806,7 @@
               </a:defRPr>
             </a:pPr>
             <a:r>
-              <a:t>  향후 계획</a:t>
+              <a:t>  학위논문 구조</a:t>
             </a:r>
           </a:p>
         </p:txBody>
@@ -12335,7 +12842,7 @@
               </a:defRPr>
             </a:pPr>
             <a:r>
-              <a:t>  Plans &amp; Future Work</a:t>
+              <a:t>  선박 탑재 LiDAR 기반 실시간 파랑장 추정과 그 제어 응용</a:t>
             </a:r>
           </a:p>
         </p:txBody>
@@ -12371,7 +12878,7 @@
               </a:defRPr>
             </a:pPr>
             <a:r>
-              <a:t>단기 계획 (2026)</a:t>
+              <a:t>학위논문 목차</a:t>
             </a:r>
           </a:p>
         </p:txBody>
@@ -12385,7 +12892,7 @@
         <p:spPr>
           <a:xfrm>
             <a:off x="731520" y="1828800"/>
-            <a:ext cx="5303520" cy="2743200"/>
+            <a:ext cx="5303520" cy="4114800"/>
           </a:xfrm>
           <a:prstGeom prst="rect">
             <a:avLst/>
@@ -12404,93 +12911,205 @@
               </a:spcAft>
             </a:pPr>
             <a:r>
-              <a:rPr sz="1500">
-                <a:solidFill>
-                  <a:srgbClr val="1A1A2E"/>
-                </a:solidFill>
-                <a:latin typeface="Calibri"/>
-              </a:rPr>
-              <a:t>• • 논문 1 투고 (Ocean Engineering)</a:t>
-            </a:r>
-          </a:p>
-          <a:p>
-            <a:pPr>
-              <a:spcAft>
-                <a:spcPts val="600"/>
-              </a:spcAft>
-            </a:pPr>
-            <a:r>
-              <a:rPr sz="1500">
-                <a:solidFill>
-                  <a:srgbClr val="1A1A2E"/>
-                </a:solidFill>
-                <a:latin typeface="Calibri"/>
-              </a:rPr>
-              <a:t>• • 논문 2 투고 (Ocean Engineering / JSR)</a:t>
-            </a:r>
-          </a:p>
-          <a:p>
-            <a:pPr>
-              <a:spcAft>
-                <a:spcPts val="600"/>
-              </a:spcAft>
-            </a:pPr>
-            <a:r>
-              <a:rPr sz="1500">
-                <a:solidFill>
-                  <a:srgbClr val="1A1A2E"/>
-                </a:solidFill>
-                <a:latin typeface="Calibri"/>
-              </a:rPr>
-              <a:t>• • 수조 실험 검증 (SNU 조파수조, 2026 하반기)</a:t>
-            </a:r>
-          </a:p>
-          <a:p>
-            <a:pPr>
-              <a:spcAft>
-                <a:spcPts val="600"/>
-              </a:spcAft>
-            </a:pPr>
-            <a:r>
-              <a:rPr sz="1500">
-                <a:solidFill>
-                  <a:srgbClr val="1A1A2E"/>
-                </a:solidFill>
-                <a:latin typeface="Calibri"/>
-              </a:rPr>
-              <a:t>• •   → 규칙파/불규칙파 3~5 조건</a:t>
-            </a:r>
-          </a:p>
-          <a:p>
-            <a:pPr>
-              <a:spcAft>
-                <a:spcPts val="600"/>
-              </a:spcAft>
-            </a:pPr>
-            <a:r>
-              <a:rPr sz="1500">
-                <a:solidFill>
-                  <a:srgbClr val="1A1A2E"/>
-                </a:solidFill>
-                <a:latin typeface="Calibri"/>
-              </a:rPr>
-              <a:t>• •   → 용량식 wave gauge GT + Seyond Falcon K1</a:t>
-            </a:r>
-          </a:p>
-          <a:p>
-            <a:pPr>
-              <a:spcAft>
-                <a:spcPts val="600"/>
-              </a:spcAft>
-            </a:pPr>
-            <a:r>
-              <a:rPr sz="1500">
-                <a:solidFill>
-                  <a:srgbClr val="1A1A2E"/>
-                </a:solidFill>
-                <a:latin typeface="Calibri"/>
-              </a:rPr>
-              <a:t>• •   → Sim-to-Real gap 정량화 (raydrop, noise)</a:t>
+              <a:rPr sz="1400">
+                <a:solidFill>
+                  <a:srgbClr val="1A1A2E"/>
+                </a:solidFill>
+                <a:latin typeface="Calibri"/>
+              </a:rPr>
+              <a:t>• • Ch.1 서론: 연구 배경, 목적, 범위</a:t>
+            </a:r>
+          </a:p>
+          <a:p>
+            <a:pPr>
+              <a:spcAft>
+                <a:spcPts val="600"/>
+              </a:spcAft>
+            </a:pPr>
+            <a:r>
+              <a:rPr sz="1400">
+                <a:solidFill>
+                  <a:srgbClr val="1A1A2E"/>
+                </a:solidFill>
+                <a:latin typeface="Calibri"/>
+              </a:rPr>
+              <a:t>• • Ch.2 문헌 조사: 파랑 추정 + 제어 선행연구</a:t>
+            </a:r>
+          </a:p>
+          <a:p>
+            <a:pPr>
+              <a:spcAft>
+                <a:spcPts val="600"/>
+              </a:spcAft>
+            </a:pPr>
+            <a:r>
+              <a:rPr sz="1400">
+                <a:solidFill>
+                  <a:srgbClr val="1A1A2E"/>
+                </a:solidFill>
+                <a:latin typeface="Calibri"/>
+              </a:rPr>
+              <a:t>• </a:t>
+            </a:r>
+          </a:p>
+          <a:p>
+            <a:pPr>
+              <a:spcAft>
+                <a:spcPts val="600"/>
+              </a:spcAft>
+            </a:pPr>
+            <a:r>
+              <a:rPr sz="1400">
+                <a:solidFill>
+                  <a:srgbClr val="1A1A2E"/>
+                </a:solidFill>
+                <a:latin typeface="Calibri"/>
+              </a:rPr>
+              <a:t>• • Ch.3 WaveSplat (논문 1)</a:t>
+            </a:r>
+          </a:p>
+          <a:p>
+            <a:pPr>
+              <a:spcAft>
+                <a:spcPts val="600"/>
+              </a:spcAft>
+            </a:pPr>
+            <a:r>
+              <a:rPr sz="1400">
+                <a:solidFill>
+                  <a:srgbClr val="1A1A2E"/>
+                </a:solidFill>
+                <a:latin typeface="Calibri"/>
+              </a:rPr>
+              <a:t>• •   시뮬레이션, 알고리즘, 실험, 분석</a:t>
+            </a:r>
+          </a:p>
+          <a:p>
+            <a:pPr>
+              <a:spcAft>
+                <a:spcPts val="600"/>
+              </a:spcAft>
+            </a:pPr>
+            <a:r>
+              <a:rPr sz="1400">
+                <a:solidFill>
+                  <a:srgbClr val="1A1A2E"/>
+                </a:solidFill>
+                <a:latin typeface="Calibri"/>
+              </a:rPr>
+              <a:t>• •   + 3 추가 기여 (spectral/sparse/forecast)</a:t>
+            </a:r>
+          </a:p>
+          <a:p>
+            <a:pPr>
+              <a:spcAft>
+                <a:spcPts val="600"/>
+              </a:spcAft>
+            </a:pPr>
+            <a:r>
+              <a:rPr sz="1400">
+                <a:solidFill>
+                  <a:srgbClr val="1A1A2E"/>
+                </a:solidFill>
+                <a:latin typeface="Calibri"/>
+              </a:rPr>
+              <a:t>• </a:t>
+            </a:r>
+          </a:p>
+          <a:p>
+            <a:pPr>
+              <a:spcAft>
+                <a:spcPts val="600"/>
+              </a:spcAft>
+            </a:pPr>
+            <a:r>
+              <a:rPr sz="1400">
+                <a:solidFill>
+                  <a:srgbClr val="1A1A2E"/>
+                </a:solidFill>
+                <a:latin typeface="Calibri"/>
+              </a:rPr>
+              <a:t>• • Ch.4 Hydrofoil FF Control (논문 2)</a:t>
+            </a:r>
+          </a:p>
+          <a:p>
+            <a:pPr>
+              <a:spcAft>
+                <a:spcPts val="600"/>
+              </a:spcAft>
+            </a:pPr>
+            <a:r>
+              <a:rPr sz="1400">
+                <a:solidFill>
+                  <a:srgbClr val="1A1A2E"/>
+                </a:solidFill>
+                <a:latin typeface="Calibri"/>
+              </a:rPr>
+              <a:t>• •   동역학 모델, 제어 설계, sensitivity, E2E</a:t>
+            </a:r>
+          </a:p>
+          <a:p>
+            <a:pPr>
+              <a:spcAft>
+                <a:spcPts val="600"/>
+              </a:spcAft>
+            </a:pPr>
+            <a:r>
+              <a:rPr sz="1400">
+                <a:solidFill>
+                  <a:srgbClr val="1A1A2E"/>
+                </a:solidFill>
+                <a:latin typeface="Calibri"/>
+              </a:rPr>
+              <a:t>• </a:t>
+            </a:r>
+          </a:p>
+          <a:p>
+            <a:pPr>
+              <a:spcAft>
+                <a:spcPts val="600"/>
+              </a:spcAft>
+            </a:pPr>
+            <a:r>
+              <a:rPr sz="1400">
+                <a:solidFill>
+                  <a:srgbClr val="1A1A2E"/>
+                </a:solidFill>
+                <a:latin typeface="Calibri"/>
+              </a:rPr>
+              <a:t>• • Ch.5 수조 실험 검증 (SNU 조파수조 계획)</a:t>
+            </a:r>
+          </a:p>
+          <a:p>
+            <a:pPr>
+              <a:spcAft>
+                <a:spcPts val="600"/>
+              </a:spcAft>
+            </a:pPr>
+            <a:r>
+              <a:rPr sz="1400">
+                <a:solidFill>
+                  <a:srgbClr val="1A1A2E"/>
+                </a:solidFill>
+                <a:latin typeface="Calibri"/>
+              </a:rPr>
+              <a:t>• • Ch.6 결론 및 향후 연구</a:t>
+            </a:r>
+          </a:p>
+          <a:p>
+            <a:pPr>
+              <a:spcAft>
+                <a:spcPts val="600"/>
+              </a:spcAft>
+            </a:pPr>
+            <a:r>
+              <a:rPr sz="1400">
+                <a:solidFill>
+                  <a:srgbClr val="1A1A2E"/>
+                </a:solidFill>
+                <a:latin typeface="Calibri"/>
+              </a:rPr>
+              <a:t>• • 부록: 파라미터 표, 추가 그래프</a:t>
             </a:r>
           </a:p>
         </p:txBody>
@@ -12526,7 +13145,7 @@
               </a:defRPr>
             </a:pPr>
             <a:r>
-              <a:t>확장 연구 방향</a:t>
+              <a:t>현재 진행 상태</a:t>
             </a:r>
           </a:p>
         </p:txBody>
@@ -12540,7 +13159,7 @@
         <p:spPr>
           <a:xfrm>
             <a:off x="6400800" y="1828800"/>
-            <a:ext cx="5303520" cy="2743200"/>
+            <a:ext cx="5303520" cy="4114800"/>
           </a:xfrm>
           <a:prstGeom prst="rect">
             <a:avLst/>
@@ -12559,109 +13178,299 @@
               </a:spcAft>
             </a:pPr>
             <a:r>
-              <a:rPr sz="1500">
-                <a:solidFill>
-                  <a:srgbClr val="1A1A2E"/>
-                </a:solidFill>
-                <a:latin typeface="Calibri"/>
-              </a:rPr>
-              <a:t>• • MPC 기반 6-DOF 통합 제어</a:t>
-            </a:r>
-          </a:p>
-          <a:p>
-            <a:pPr>
-              <a:spcAft>
-                <a:spcPts val="600"/>
-              </a:spcAft>
-            </a:pPr>
-            <a:r>
-              <a:rPr sz="1500">
-                <a:solidFill>
-                  <a:srgbClr val="1A1A2E"/>
-                </a:solidFill>
-                <a:latin typeface="Calibri"/>
-              </a:rPr>
-              <a:t>• •   → preview information의 최적 활용</a:t>
-            </a:r>
-          </a:p>
-          <a:p>
-            <a:pPr>
-              <a:spcAft>
-                <a:spcPts val="600"/>
-              </a:spcAft>
-            </a:pPr>
-            <a:r>
-              <a:rPr sz="1500">
-                <a:solidFill>
-                  <a:srgbClr val="1A1A2E"/>
-                </a:solidFill>
-                <a:latin typeface="Calibri"/>
-              </a:rPr>
-              <a:t>• • Stokes-2 nonlinear wave model</a:t>
-            </a:r>
-          </a:p>
-          <a:p>
-            <a:pPr>
-              <a:spcAft>
-                <a:spcPts val="600"/>
-              </a:spcAft>
-            </a:pPr>
-            <a:r>
-              <a:rPr sz="1500">
-                <a:solidFill>
-                  <a:srgbClr val="1A1A2E"/>
-                </a:solidFill>
-                <a:latin typeface="Calibri"/>
-              </a:rPr>
-              <a:t>• •   → 급경사파, 쇄파 환경 대응</a:t>
-            </a:r>
-          </a:p>
-          <a:p>
-            <a:pPr>
-              <a:spcAft>
-                <a:spcPts val="600"/>
-              </a:spcAft>
-            </a:pPr>
-            <a:r>
-              <a:rPr sz="1500">
-                <a:solidFill>
-                  <a:srgbClr val="1A1A2E"/>
-                </a:solidFill>
-                <a:latin typeface="Calibri"/>
-              </a:rPr>
-              <a:t>• • 해류(current) 동시 추정</a:t>
-            </a:r>
-          </a:p>
-          <a:p>
-            <a:pPr>
-              <a:spcAft>
-                <a:spcPts val="600"/>
-              </a:spcAft>
-            </a:pPr>
-            <a:r>
-              <a:rPr sz="1500">
-                <a:solidFill>
-                  <a:srgbClr val="1A1A2E"/>
-                </a:solidFill>
-                <a:latin typeface="Calibri"/>
-              </a:rPr>
-              <a:t>• • 실선 탑재 → 자율운항 통합</a:t>
-            </a:r>
-          </a:p>
-        </p:txBody>
-      </p:sp>
-      <p:sp>
-        <p:nvSpPr>
-          <p:cNvPr id="10" name="Rounded Rectangle 9"/>
+              <a:rPr sz="1300">
+                <a:solidFill>
+                  <a:srgbClr val="1A1A2E"/>
+                </a:solidFill>
+                <a:latin typeface="Calibri"/>
+              </a:rPr>
+              <a:t>• • 논문 1 (WaveSplat)</a:t>
+            </a:r>
+          </a:p>
+          <a:p>
+            <a:pPr>
+              <a:spcAft>
+                <a:spcPts val="600"/>
+              </a:spcAft>
+            </a:pPr>
+            <a:r>
+              <a:rPr sz="1300">
+                <a:solidFill>
+                  <a:srgbClr val="1A1A2E"/>
+                </a:solidFill>
+                <a:latin typeface="Calibri"/>
+              </a:rPr>
+              <a:t>• •   ✅ 코드/실험 완료 (57 tests pass)</a:t>
+            </a:r>
+          </a:p>
+          <a:p>
+            <a:pPr>
+              <a:spcAft>
+                <a:spcPts val="600"/>
+              </a:spcAft>
+            </a:pPr>
+            <a:r>
+              <a:rPr sz="1300">
+                <a:solidFill>
+                  <a:srgbClr val="1A1A2E"/>
+                </a:solidFill>
+                <a:latin typeface="Calibri"/>
+              </a:rPr>
+              <a:t>• •   ✅ 논문 작성 완료 (Ocean Eng. format)</a:t>
+            </a:r>
+          </a:p>
+          <a:p>
+            <a:pPr>
+              <a:spcAft>
+                <a:spcPts val="600"/>
+              </a:spcAft>
+            </a:pPr>
+            <a:r>
+              <a:rPr sz="1300">
+                <a:solidFill>
+                  <a:srgbClr val="1A1A2E"/>
+                </a:solidFill>
+                <a:latin typeface="Calibri"/>
+              </a:rPr>
+              <a:t>• •   ✅ 적대적 페르소나 10라운드 검토 완료</a:t>
+            </a:r>
+          </a:p>
+          <a:p>
+            <a:pPr>
+              <a:spcAft>
+                <a:spcPts val="600"/>
+              </a:spcAft>
+            </a:pPr>
+            <a:r>
+              <a:rPr sz="1300">
+                <a:solidFill>
+                  <a:srgbClr val="1A1A2E"/>
+                </a:solidFill>
+                <a:latin typeface="Calibri"/>
+              </a:rPr>
+              <a:t>• •   ⏳ 공동저자 sign-off → 투고</a:t>
+            </a:r>
+          </a:p>
+          <a:p>
+            <a:pPr>
+              <a:spcAft>
+                <a:spcPts val="600"/>
+              </a:spcAft>
+            </a:pPr>
+            <a:r>
+              <a:rPr sz="1300">
+                <a:solidFill>
+                  <a:srgbClr val="1A1A2E"/>
+                </a:solidFill>
+                <a:latin typeface="Calibri"/>
+              </a:rPr>
+              <a:t>• </a:t>
+            </a:r>
+          </a:p>
+          <a:p>
+            <a:pPr>
+              <a:spcAft>
+                <a:spcPts val="600"/>
+              </a:spcAft>
+            </a:pPr>
+            <a:r>
+              <a:rPr sz="1300">
+                <a:solidFill>
+                  <a:srgbClr val="1A1A2E"/>
+                </a:solidFill>
+                <a:latin typeface="Calibri"/>
+              </a:rPr>
+              <a:t>• • 논문 2 (Hydrofoil)</a:t>
+            </a:r>
+          </a:p>
+          <a:p>
+            <a:pPr>
+              <a:spcAft>
+                <a:spcPts val="600"/>
+              </a:spcAft>
+            </a:pPr>
+            <a:r>
+              <a:rPr sz="1300">
+                <a:solidFill>
+                  <a:srgbClr val="1A1A2E"/>
+                </a:solidFill>
+                <a:latin typeface="Calibri"/>
+              </a:rPr>
+              <a:t>• •   ✅ 시뮬레이션 완료 (Phase 1~3)</a:t>
+            </a:r>
+          </a:p>
+          <a:p>
+            <a:pPr>
+              <a:spcAft>
+                <a:spcPts val="600"/>
+              </a:spcAft>
+            </a:pPr>
+            <a:r>
+              <a:rPr sz="1300">
+                <a:solidFill>
+                  <a:srgbClr val="1A1A2E"/>
+                </a:solidFill>
+                <a:latin typeface="Calibri"/>
+              </a:rPr>
+              <a:t>• •   ✅ 초안 작성 완료</a:t>
+            </a:r>
+          </a:p>
+          <a:p>
+            <a:pPr>
+              <a:spcAft>
+                <a:spcPts val="600"/>
+              </a:spcAft>
+            </a:pPr>
+            <a:r>
+              <a:rPr sz="1300">
+                <a:solidFill>
+                  <a:srgbClr val="1A1A2E"/>
+                </a:solidFill>
+                <a:latin typeface="Calibri"/>
+              </a:rPr>
+              <a:t>• •   ⏳ 공동저자 검토 → 투고</a:t>
+            </a:r>
+          </a:p>
+          <a:p>
+            <a:pPr>
+              <a:spcAft>
+                <a:spcPts val="600"/>
+              </a:spcAft>
+            </a:pPr>
+            <a:r>
+              <a:rPr sz="1300">
+                <a:solidFill>
+                  <a:srgbClr val="1A1A2E"/>
+                </a:solidFill>
+                <a:latin typeface="Calibri"/>
+              </a:rPr>
+              <a:t>• </a:t>
+            </a:r>
+          </a:p>
+          <a:p>
+            <a:pPr>
+              <a:spcAft>
+                <a:spcPts val="600"/>
+              </a:spcAft>
+            </a:pPr>
+            <a:r>
+              <a:rPr sz="1300">
+                <a:solidFill>
+                  <a:srgbClr val="1A1A2E"/>
+                </a:solidFill>
+                <a:latin typeface="Calibri"/>
+              </a:rPr>
+              <a:t>• • 학위논문</a:t>
+            </a:r>
+          </a:p>
+          <a:p>
+            <a:pPr>
+              <a:spcAft>
+                <a:spcPts val="600"/>
+              </a:spcAft>
+            </a:pPr>
+            <a:r>
+              <a:rPr sz="1300">
+                <a:solidFill>
+                  <a:srgbClr val="1A1A2E"/>
+                </a:solidFill>
+                <a:latin typeface="Calibri"/>
+              </a:rPr>
+              <a:t>• •   ✅ 초안 완성 (203K lines, PDF 생성)</a:t>
+            </a:r>
+          </a:p>
+          <a:p>
+            <a:pPr>
+              <a:spcAft>
+                <a:spcPts val="600"/>
+              </a:spcAft>
+            </a:pPr>
+            <a:r>
+              <a:rPr sz="1300">
+                <a:solidFill>
+                  <a:srgbClr val="1A1A2E"/>
+                </a:solidFill>
+                <a:latin typeface="Calibri"/>
+              </a:rPr>
+              <a:t>• •   ⏳ 지도교수 검토</a:t>
+            </a:r>
+          </a:p>
+        </p:txBody>
+      </p:sp>
+      <p:sp>
+        <p:nvSpPr>
+          <p:cNvPr id="10" name="TextBox 9"/>
+          <p:cNvSpPr txBox="1"/>
+          <p:nvPr/>
+        </p:nvSpPr>
+        <p:spPr>
+          <a:xfrm>
+            <a:off x="10972800" y="6492240"/>
+            <a:ext cx="1097280" cy="274320"/>
+          </a:xfrm>
+          <a:prstGeom prst="rect">
+            <a:avLst/>
+          </a:prstGeom>
+          <a:noFill/>
+        </p:spPr>
+        <p:txBody>
+          <a:bodyPr wrap="square">
+            <a:spAutoFit/>
+          </a:bodyPr>
+          <a:lstStyle/>
+          <a:p>
+            <a:pPr algn="r">
+              <a:defRPr sz="1000" b="0">
+                <a:solidFill>
+                  <a:srgbClr val="666666"/>
+                </a:solidFill>
+                <a:latin typeface="Calibri"/>
+              </a:defRPr>
+            </a:pPr>
+            <a:r>
+              <a:t>23/24</a:t>
+            </a:r>
+          </a:p>
+        </p:txBody>
+      </p:sp>
+    </p:spTree>
+  </p:cSld>
+  <p:clrMapOvr>
+    <a:masterClrMapping/>
+  </p:clrMapOvr>
+</p:sld>
+</file>
+
+<file path=ppt/slides/slide24.xml><?xml version="1.0" encoding="utf-8"?>
+<p:sld xmlns:a="http://schemas.openxmlformats.org/drawingml/2006/main" xmlns:p="http://schemas.openxmlformats.org/presentationml/2006/main" xmlns:r="http://schemas.openxmlformats.org/officeDocument/2006/relationships">
+  <p:cSld>
+    <p:bg>
+      <p:bgPr>
+        <a:solidFill>
+          <a:srgbClr val="FFFFFF"/>
+        </a:solidFill>
+        <a:effectLst/>
+      </p:bgPr>
+    </p:bg>
+    <p:spTree>
+      <p:nvGrpSpPr>
+        <p:cNvPr id="1" name=""/>
+        <p:cNvGrpSpPr/>
+        <p:nvPr/>
+      </p:nvGrpSpPr>
+      <p:grpSpPr/>
+      <p:sp>
+        <p:nvSpPr>
+          <p:cNvPr id="2" name="Rectangle 1"/>
           <p:cNvSpPr/>
           <p:nvPr/>
         </p:nvSpPr>
         <p:spPr>
           <a:xfrm>
-            <a:off x="1371600" y="4754880"/>
-            <a:ext cx="9418320" cy="1371600"/>
-          </a:xfrm>
-          <a:prstGeom prst="roundRect">
+            <a:off x="0" y="0"/>
+            <a:ext cx="12191695" cy="1097280"/>
+          </a:xfrm>
+          <a:prstGeom prst="rect">
             <a:avLst/>
           </a:prstGeom>
           <a:solidFill>
@@ -12686,6 +13495,467 @@
           </a:fontRef>
         </p:style>
         <p:txBody>
+          <a:bodyPr rtlCol="0" anchor="ctr"/>
+          <a:lstStyle/>
+          <a:p>
+            <a:pPr algn="ctr"/>
+          </a:p>
+        </p:txBody>
+      </p:sp>
+      <p:sp>
+        <p:nvSpPr>
+          <p:cNvPr id="3" name="TextBox 2"/>
+          <p:cNvSpPr txBox="1"/>
+          <p:nvPr/>
+        </p:nvSpPr>
+        <p:spPr>
+          <a:xfrm>
+            <a:off x="457200" y="137160"/>
+            <a:ext cx="10972800" cy="457200"/>
+          </a:xfrm>
+          <a:prstGeom prst="rect">
+            <a:avLst/>
+          </a:prstGeom>
+          <a:noFill/>
+        </p:spPr>
+        <p:txBody>
+          <a:bodyPr wrap="square">
+            <a:spAutoFit/>
+          </a:bodyPr>
+          <a:lstStyle/>
+          <a:p>
+            <a:pPr algn="l">
+              <a:defRPr sz="1400" b="0">
+                <a:solidFill>
+                  <a:srgbClr val="007ACC"/>
+                </a:solidFill>
+                <a:latin typeface="Calibri"/>
+              </a:defRPr>
+            </a:pPr>
+            <a:r>
+              <a:t>  07</a:t>
+            </a:r>
+          </a:p>
+        </p:txBody>
+      </p:sp>
+      <p:sp>
+        <p:nvSpPr>
+          <p:cNvPr id="4" name="TextBox 3"/>
+          <p:cNvSpPr txBox="1"/>
+          <p:nvPr/>
+        </p:nvSpPr>
+        <p:spPr>
+          <a:xfrm>
+            <a:off x="457200" y="320040"/>
+            <a:ext cx="10972800" cy="640080"/>
+          </a:xfrm>
+          <a:prstGeom prst="rect">
+            <a:avLst/>
+          </a:prstGeom>
+          <a:noFill/>
+        </p:spPr>
+        <p:txBody>
+          <a:bodyPr wrap="square">
+            <a:spAutoFit/>
+          </a:bodyPr>
+          <a:lstStyle/>
+          <a:p>
+            <a:pPr algn="l">
+              <a:defRPr sz="2800" b="1">
+                <a:solidFill>
+                  <a:srgbClr val="FFFFFF"/>
+                </a:solidFill>
+                <a:latin typeface="Calibri"/>
+              </a:defRPr>
+            </a:pPr>
+            <a:r>
+              <a:t>  향후 계획</a:t>
+            </a:r>
+          </a:p>
+        </p:txBody>
+      </p:sp>
+      <p:sp>
+        <p:nvSpPr>
+          <p:cNvPr id="5" name="TextBox 4"/>
+          <p:cNvSpPr txBox="1"/>
+          <p:nvPr/>
+        </p:nvSpPr>
+        <p:spPr>
+          <a:xfrm>
+            <a:off x="457200" y="685800"/>
+            <a:ext cx="10972800" cy="365760"/>
+          </a:xfrm>
+          <a:prstGeom prst="rect">
+            <a:avLst/>
+          </a:prstGeom>
+          <a:noFill/>
+        </p:spPr>
+        <p:txBody>
+          <a:bodyPr wrap="square">
+            <a:spAutoFit/>
+          </a:bodyPr>
+          <a:lstStyle/>
+          <a:p>
+            <a:pPr algn="l">
+              <a:defRPr sz="1400" b="0">
+                <a:solidFill>
+                  <a:srgbClr val="AABBCC"/>
+                </a:solidFill>
+                <a:latin typeface="Calibri"/>
+              </a:defRPr>
+            </a:pPr>
+            <a:r>
+              <a:t>  Plans &amp; Future Work</a:t>
+            </a:r>
+          </a:p>
+        </p:txBody>
+      </p:sp>
+      <p:sp>
+        <p:nvSpPr>
+          <p:cNvPr id="6" name="TextBox 5"/>
+          <p:cNvSpPr txBox="1"/>
+          <p:nvPr/>
+        </p:nvSpPr>
+        <p:spPr>
+          <a:xfrm>
+            <a:off x="731520" y="1371600"/>
+            <a:ext cx="5303520" cy="365760"/>
+          </a:xfrm>
+          <a:prstGeom prst="rect">
+            <a:avLst/>
+          </a:prstGeom>
+          <a:noFill/>
+        </p:spPr>
+        <p:txBody>
+          <a:bodyPr wrap="square">
+            <a:spAutoFit/>
+          </a:bodyPr>
+          <a:lstStyle/>
+          <a:p>
+            <a:pPr algn="l">
+              <a:defRPr sz="2200" b="1">
+                <a:solidFill>
+                  <a:srgbClr val="007ACC"/>
+                </a:solidFill>
+                <a:latin typeface="Calibri"/>
+              </a:defRPr>
+            </a:pPr>
+            <a:r>
+              <a:t>단기 계획 (2026)</a:t>
+            </a:r>
+          </a:p>
+        </p:txBody>
+      </p:sp>
+      <p:sp>
+        <p:nvSpPr>
+          <p:cNvPr id="7" name="TextBox 6"/>
+          <p:cNvSpPr txBox="1"/>
+          <p:nvPr/>
+        </p:nvSpPr>
+        <p:spPr>
+          <a:xfrm>
+            <a:off x="731520" y="1828800"/>
+            <a:ext cx="5303520" cy="2743200"/>
+          </a:xfrm>
+          <a:prstGeom prst="rect">
+            <a:avLst/>
+          </a:prstGeom>
+          <a:noFill/>
+        </p:spPr>
+        <p:txBody>
+          <a:bodyPr wrap="square">
+            <a:spAutoFit/>
+          </a:bodyPr>
+          <a:lstStyle/>
+          <a:p>
+            <a:pPr>
+              <a:spcAft>
+                <a:spcPts val="600"/>
+              </a:spcAft>
+            </a:pPr>
+            <a:r>
+              <a:rPr sz="1500">
+                <a:solidFill>
+                  <a:srgbClr val="1A1A2E"/>
+                </a:solidFill>
+                <a:latin typeface="Calibri"/>
+              </a:rPr>
+              <a:t>• • 논문 1 투고 (Ocean Engineering)</a:t>
+            </a:r>
+          </a:p>
+          <a:p>
+            <a:pPr>
+              <a:spcAft>
+                <a:spcPts val="600"/>
+              </a:spcAft>
+            </a:pPr>
+            <a:r>
+              <a:rPr sz="1500">
+                <a:solidFill>
+                  <a:srgbClr val="1A1A2E"/>
+                </a:solidFill>
+                <a:latin typeface="Calibri"/>
+              </a:rPr>
+              <a:t>• • 논문 2 투고 (Ocean Engineering / JSR)</a:t>
+            </a:r>
+          </a:p>
+          <a:p>
+            <a:pPr>
+              <a:spcAft>
+                <a:spcPts val="600"/>
+              </a:spcAft>
+            </a:pPr>
+            <a:r>
+              <a:rPr sz="1500">
+                <a:solidFill>
+                  <a:srgbClr val="1A1A2E"/>
+                </a:solidFill>
+                <a:latin typeface="Calibri"/>
+              </a:rPr>
+              <a:t>• • 수조 실험 검증 (SNU 조파수조, 2026 하반기)</a:t>
+            </a:r>
+          </a:p>
+          <a:p>
+            <a:pPr>
+              <a:spcAft>
+                <a:spcPts val="600"/>
+              </a:spcAft>
+            </a:pPr>
+            <a:r>
+              <a:rPr sz="1500">
+                <a:solidFill>
+                  <a:srgbClr val="1A1A2E"/>
+                </a:solidFill>
+                <a:latin typeface="Calibri"/>
+              </a:rPr>
+              <a:t>• •   → 규칙파/불규칙파 3~5 조건</a:t>
+            </a:r>
+          </a:p>
+          <a:p>
+            <a:pPr>
+              <a:spcAft>
+                <a:spcPts val="600"/>
+              </a:spcAft>
+            </a:pPr>
+            <a:r>
+              <a:rPr sz="1500">
+                <a:solidFill>
+                  <a:srgbClr val="1A1A2E"/>
+                </a:solidFill>
+                <a:latin typeface="Calibri"/>
+              </a:rPr>
+              <a:t>• •   → 용량식 wave gauge GT + Seyond Falcon K1</a:t>
+            </a:r>
+          </a:p>
+          <a:p>
+            <a:pPr>
+              <a:spcAft>
+                <a:spcPts val="600"/>
+              </a:spcAft>
+            </a:pPr>
+            <a:r>
+              <a:rPr sz="1500">
+                <a:solidFill>
+                  <a:srgbClr val="1A1A2E"/>
+                </a:solidFill>
+                <a:latin typeface="Calibri"/>
+              </a:rPr>
+              <a:t>• •   → Sim-to-Real gap 정량화 (raydrop, noise)</a:t>
+            </a:r>
+          </a:p>
+        </p:txBody>
+      </p:sp>
+      <p:sp>
+        <p:nvSpPr>
+          <p:cNvPr id="8" name="TextBox 7"/>
+          <p:cNvSpPr txBox="1"/>
+          <p:nvPr/>
+        </p:nvSpPr>
+        <p:spPr>
+          <a:xfrm>
+            <a:off x="6400800" y="1371600"/>
+            <a:ext cx="5303520" cy="365760"/>
+          </a:xfrm>
+          <a:prstGeom prst="rect">
+            <a:avLst/>
+          </a:prstGeom>
+          <a:noFill/>
+        </p:spPr>
+        <p:txBody>
+          <a:bodyPr wrap="square">
+            <a:spAutoFit/>
+          </a:bodyPr>
+          <a:lstStyle/>
+          <a:p>
+            <a:pPr algn="l">
+              <a:defRPr sz="2200" b="1">
+                <a:solidFill>
+                  <a:srgbClr val="E8553A"/>
+                </a:solidFill>
+                <a:latin typeface="Calibri"/>
+              </a:defRPr>
+            </a:pPr>
+            <a:r>
+              <a:t>확장 연구 방향</a:t>
+            </a:r>
+          </a:p>
+        </p:txBody>
+      </p:sp>
+      <p:sp>
+        <p:nvSpPr>
+          <p:cNvPr id="9" name="TextBox 8"/>
+          <p:cNvSpPr txBox="1"/>
+          <p:nvPr/>
+        </p:nvSpPr>
+        <p:spPr>
+          <a:xfrm>
+            <a:off x="6400800" y="1828800"/>
+            <a:ext cx="5303520" cy="2743200"/>
+          </a:xfrm>
+          <a:prstGeom prst="rect">
+            <a:avLst/>
+          </a:prstGeom>
+          <a:noFill/>
+        </p:spPr>
+        <p:txBody>
+          <a:bodyPr wrap="square">
+            <a:spAutoFit/>
+          </a:bodyPr>
+          <a:lstStyle/>
+          <a:p>
+            <a:pPr>
+              <a:spcAft>
+                <a:spcPts val="600"/>
+              </a:spcAft>
+            </a:pPr>
+            <a:r>
+              <a:rPr sz="1500">
+                <a:solidFill>
+                  <a:srgbClr val="1A1A2E"/>
+                </a:solidFill>
+                <a:latin typeface="Calibri"/>
+              </a:rPr>
+              <a:t>• • MPC 기반 6-DOF 통합 제어</a:t>
+            </a:r>
+          </a:p>
+          <a:p>
+            <a:pPr>
+              <a:spcAft>
+                <a:spcPts val="600"/>
+              </a:spcAft>
+            </a:pPr>
+            <a:r>
+              <a:rPr sz="1500">
+                <a:solidFill>
+                  <a:srgbClr val="1A1A2E"/>
+                </a:solidFill>
+                <a:latin typeface="Calibri"/>
+              </a:rPr>
+              <a:t>• •   → preview information의 최적 활용</a:t>
+            </a:r>
+          </a:p>
+          <a:p>
+            <a:pPr>
+              <a:spcAft>
+                <a:spcPts val="600"/>
+              </a:spcAft>
+            </a:pPr>
+            <a:r>
+              <a:rPr sz="1500">
+                <a:solidFill>
+                  <a:srgbClr val="1A1A2E"/>
+                </a:solidFill>
+                <a:latin typeface="Calibri"/>
+              </a:rPr>
+              <a:t>• • Stokes-2 nonlinear wave model</a:t>
+            </a:r>
+          </a:p>
+          <a:p>
+            <a:pPr>
+              <a:spcAft>
+                <a:spcPts val="600"/>
+              </a:spcAft>
+            </a:pPr>
+            <a:r>
+              <a:rPr sz="1500">
+                <a:solidFill>
+                  <a:srgbClr val="1A1A2E"/>
+                </a:solidFill>
+                <a:latin typeface="Calibri"/>
+              </a:rPr>
+              <a:t>• •   → 급경사파, 쇄파 환경 대응</a:t>
+            </a:r>
+          </a:p>
+          <a:p>
+            <a:pPr>
+              <a:spcAft>
+                <a:spcPts val="600"/>
+              </a:spcAft>
+            </a:pPr>
+            <a:r>
+              <a:rPr sz="1500">
+                <a:solidFill>
+                  <a:srgbClr val="1A1A2E"/>
+                </a:solidFill>
+                <a:latin typeface="Calibri"/>
+              </a:rPr>
+              <a:t>• • 해류(current) 동시 추정</a:t>
+            </a:r>
+          </a:p>
+          <a:p>
+            <a:pPr>
+              <a:spcAft>
+                <a:spcPts val="600"/>
+              </a:spcAft>
+            </a:pPr>
+            <a:r>
+              <a:rPr sz="1500">
+                <a:solidFill>
+                  <a:srgbClr val="1A1A2E"/>
+                </a:solidFill>
+                <a:latin typeface="Calibri"/>
+              </a:rPr>
+              <a:t>• • 실선 탑재 → 자율운항 통합</a:t>
+            </a:r>
+          </a:p>
+        </p:txBody>
+      </p:sp>
+      <p:sp>
+        <p:nvSpPr>
+          <p:cNvPr id="10" name="Rounded Rectangle 9"/>
+          <p:cNvSpPr/>
+          <p:nvPr/>
+        </p:nvSpPr>
+        <p:spPr>
+          <a:xfrm>
+            <a:off x="1371600" y="4754880"/>
+            <a:ext cx="9418320" cy="1371600"/>
+          </a:xfrm>
+          <a:prstGeom prst="roundRect">
+            <a:avLst/>
+          </a:prstGeom>
+          <a:solidFill>
+            <a:srgbClr val="1A1A2E"/>
+          </a:solidFill>
+          <a:ln>
+            <a:noFill/>
+          </a:ln>
+        </p:spPr>
+        <p:style>
+          <a:lnRef idx="1">
+            <a:schemeClr val="accent1"/>
+          </a:lnRef>
+          <a:fillRef idx="3">
+            <a:schemeClr val="accent1"/>
+          </a:fillRef>
+          <a:effectRef idx="2">
+            <a:schemeClr val="accent1"/>
+          </a:effectRef>
+          <a:fontRef idx="minor">
+            <a:schemeClr val="lt1"/>
+          </a:fontRef>
+        </p:style>
+        <p:txBody>
           <a:bodyPr rtlCol="0" anchor="ctr" wrap="square"/>
           <a:lstStyle/>
           <a:p>
@@ -12758,7 +14028,7 @@
               </a:defRPr>
             </a:pPr>
             <a:r>
-              <a:t>23/23</a:t>
+              <a:t>24/24</a:t>
             </a:r>
           </a:p>
         </p:txBody>
@@ -13459,7 +14729,7 @@
               </a:defRPr>
             </a:pPr>
             <a:r>
-              <a:t>3/23</a:t>
+              <a:t>3/24</a:t>
             </a:r>
           </a:p>
         </p:txBody>
@@ -13863,7 +15133,7 @@
               </a:defRPr>
             </a:pPr>
             <a:r>
-              <a:t>4/23</a:t>
+              <a:t>4/24</a:t>
             </a:r>
           </a:p>
         </p:txBody>
@@ -14315,7 +15585,7 @@
               </a:defRPr>
             </a:pPr>
             <a:r>
-              <a:t>5/23</a:t>
+              <a:t>5/24</a:t>
             </a:r>
           </a:p>
         </p:txBody>
@@ -15036,7 +16306,7 @@
               </a:defRPr>
             </a:pPr>
             <a:r>
-              <a:t>6/23</a:t>
+              <a:t>6/24</a:t>
             </a:r>
           </a:p>
         </p:txBody>
@@ -15715,7 +16985,7 @@
               </a:defRPr>
             </a:pPr>
             <a:r>
-              <a:t>7/23</a:t>
+              <a:t>7/24</a:t>
             </a:r>
           </a:p>
         </p:txBody>
@@ -16695,7 +17965,7 @@
               </a:defRPr>
             </a:pPr>
             <a:r>
-              <a:t>8/23</a:t>
+              <a:t>8/24</a:t>
             </a:r>
           </a:p>
         </p:txBody>
@@ -17714,7 +18984,7 @@
               </a:defRPr>
             </a:pPr>
             <a:r>
-              <a:t>9/23</a:t>
+              <a:t>9/24</a:t>
             </a:r>
           </a:p>
         </p:txBody>

--- a/wavesplat/docs/labmeeting_wavesplat.pptx
+++ b/wavesplat/docs/labmeeting_wavesplat.pptx
@@ -6,6 +6,7 @@
   </p:sldMasterIdLst>
   <p:sldIdLst>
     <p:sldId id="256" r:id="rId7"/>
+    <p:sldId id="282" r:id="rId33"/>
     <p:sldId id="280" r:id="rId31"/>
     <p:sldId id="257" r:id="rId8"/>
     <p:sldId id="258" r:id="rId9"/>
@@ -3336,7 +3337,7 @@
               </a:defRPr>
             </a:pPr>
             <a:r>
-              <a:t>1/26</a:t>
+              <a:t>1/27</a:t>
             </a:r>
           </a:p>
         </p:txBody>
@@ -4277,7 +4278,7 @@
               </a:defRPr>
             </a:pPr>
             <a:r>
-              <a:t>10/26</a:t>
+              <a:t>11/27</a:t>
             </a:r>
           </a:p>
         </p:txBody>
@@ -5168,7 +5169,7 @@
               </a:defRPr>
             </a:pPr>
             <a:r>
-              <a:t>11/26</a:t>
+              <a:t>12/27</a:t>
             </a:r>
           </a:p>
         </p:txBody>
@@ -5465,7 +5466,7 @@
               </a:defRPr>
             </a:pPr>
             <a:r>
-              <a:t>12/26</a:t>
+              <a:t>13/27</a:t>
             </a:r>
           </a:p>
         </p:txBody>
@@ -6330,7 +6331,7 @@
               </a:defRPr>
             </a:pPr>
             <a:r>
-              <a:t>13/26</a:t>
+              <a:t>14/27</a:t>
             </a:r>
           </a:p>
         </p:txBody>
@@ -7018,7 +7019,7 @@
               </a:defRPr>
             </a:pPr>
             <a:r>
-              <a:t>14/26</a:t>
+              <a:t>15/27</a:t>
             </a:r>
           </a:p>
         </p:txBody>
@@ -7656,7 +7657,7 @@
               </a:defRPr>
             </a:pPr>
             <a:r>
-              <a:t>15/26</a:t>
+              <a:t>16/27</a:t>
             </a:r>
           </a:p>
         </p:txBody>
@@ -7893,7 +7894,7 @@
               </a:defRPr>
             </a:pPr>
             <a:r>
-              <a:t>16/26</a:t>
+              <a:t>17/27</a:t>
             </a:r>
           </a:p>
         </p:txBody>
@@ -8581,7 +8582,7 @@
               </a:defRPr>
             </a:pPr>
             <a:r>
-              <a:t>17/26</a:t>
+              <a:t>18/27</a:t>
             </a:r>
           </a:p>
         </p:txBody>
@@ -9714,7 +9715,7 @@
               </a:defRPr>
             </a:pPr>
             <a:r>
-              <a:t>18/26</a:t>
+              <a:t>19/27</a:t>
             </a:r>
           </a:p>
         </p:txBody>
@@ -9855,7 +9856,7 @@
               </a:defRPr>
             </a:pPr>
             <a:r>
-              <a:t>  논문 2: Hydrofoil Feedforward Control</a:t>
+              <a:t>  응용 연구: Hydrofoil Wave-Preview Feedforward</a:t>
             </a:r>
           </a:p>
         </p:txBody>
@@ -9891,7 +9892,7 @@
               </a:defRPr>
             </a:pPr>
             <a:r>
-              <a:t>  Wave-Preview Control for Hydrofoil Vessels</a:t>
+              <a:t>  Application — WaveSplat을 hydrofoil 제어에 활용</a:t>
             </a:r>
           </a:p>
         </p:txBody>
@@ -10397,7 +10398,7 @@
               </a:defRPr>
             </a:pPr>
             <a:r>
-              <a:t>19/26</a:t>
+              <a:t>20/27</a:t>
             </a:r>
           </a:p>
         </p:txBody>
@@ -10767,7 +10768,7 @@
                   <a:srgbClr val="9CA3AF"/>
                 </a:solidFill>
               </a:rPr>
-              <a:t>2/26</a:t>
+              <a:t>3/27</a:t>
             </a:r>
           </a:p>
         </p:txBody>
@@ -11778,7 +11779,7 @@
               </a:defRPr>
             </a:pPr>
             <a:r>
-              <a:t>20/26</a:t>
+              <a:t>21/27</a:t>
             </a:r>
           </a:p>
         </p:txBody>
@@ -12461,7 +12462,7 @@
               </a:defRPr>
             </a:pPr>
             <a:r>
-              <a:t>21/26</a:t>
+              <a:t>22/27</a:t>
             </a:r>
           </a:p>
         </p:txBody>
@@ -13168,7 +13169,7 @@
               </a:defRPr>
             </a:pPr>
             <a:r>
-              <a:t>22/26</a:t>
+              <a:t>23/27</a:t>
             </a:r>
           </a:p>
         </p:txBody>
@@ -13441,7 +13442,7 @@
               </a:defRPr>
             </a:pPr>
             <a:r>
-              <a:t>23/26</a:t>
+              <a:t>24/27</a:t>
             </a:r>
           </a:p>
         </p:txBody>
@@ -13778,7 +13779,7 @@
               </a:defRPr>
             </a:pPr>
             <a:r>
-              <a:t>전체 Contributions (논문 1+2)</a:t>
+              <a:t>지금까지의 연구 Contributions</a:t>
             </a:r>
           </a:p>
         </p:txBody>
@@ -13812,43 +13813,43 @@
             </a:pPr>
             <a:r>
               <a:rPr sz="1200"/>
-              <a:t>• • [논문1] ❶ Grid-free spectral 파면 추정</a:t>
+              <a:t>• • [기본] ❶ Grid-free spectral 파면 추정</a:t>
             </a:r>
           </a:p>
           <a:p>
             <a:r>
               <a:rPr sz="1200"/>
-              <a:t>• • [논문1] ❷ Dispersion hard constraint (5N→4N)</a:t>
+              <a:t>• • [기본] ❷ Dispersion hard constraint (5N→4N)</a:t>
             </a:r>
           </a:p>
           <a:p>
             <a:r>
               <a:rPr sz="1200"/>
-              <a:t>• • [논문1] ❸ Adaptive N (pruning + growth)</a:t>
+              <a:t>• • [기본] ❸ Adaptive N (pruning + growth)</a:t>
             </a:r>
           </a:p>
           <a:p>
             <a:r>
               <a:rPr sz="1200"/>
-              <a:t>• • [논문1] ❹ Fresnel confidence weighting</a:t>
+              <a:t>• • [기본] ❹ Fresnel confidence weighting</a:t>
             </a:r>
           </a:p>
           <a:p>
             <a:r>
               <a:rPr sz="1200"/>
-              <a:t>• • [논문1] ❺ Pre-specified 5-metric panel</a:t>
+              <a:t>• • [기본] ❺ Pre-specified 5-metric panel</a:t>
             </a:r>
           </a:p>
           <a:p>
             <a:r>
               <a:rPr sz="1200"/>
-              <a:t>• • [논문1] ❻ 24-config ETKF sweep (fair baseline)</a:t>
+              <a:t>• • [기본] ❻ 24-config ETKF sweep (fair baseline)</a:t>
             </a:r>
           </a:p>
           <a:p>
             <a:r>
               <a:rPr sz="1200"/>
-              <a:t>• • [논문1] ❼ Spectral accuracy + Sparse robustness + Forecast</a:t>
+              <a:t>• • [기본] ❼ Spectral accuracy + Sparse robustness + Forecast</a:t>
             </a:r>
           </a:p>
           <a:p>
@@ -13860,19 +13861,19 @@
           <a:p>
             <a:r>
               <a:rPr sz="1200"/>
-              <a:t>• • [논문2] ❽ Dual-actuator wave-preview FF architecture</a:t>
+              <a:t>• • [응용] ❽ Dual-actuator wave-preview FF architecture</a:t>
             </a:r>
           </a:p>
           <a:p>
             <a:r>
               <a:rPr sz="1200"/>
-              <a:t>• • [논문2] ❾ nRMSE tolerance + preview horizon 설계 지침</a:t>
+              <a:t>• • [응용] ❾ nRMSE tolerance + preview horizon 설계 지침</a:t>
             </a:r>
           </a:p>
           <a:p>
             <a:r>
               <a:rPr sz="1200"/>
-              <a:t>• • [논문2] ❿ E2E LiDAR→추정→제어 파이프라인 실증</a:t>
+              <a:t>• • [응용] ❿ E2E LiDAR→추정→제어 파이프라인 실증</a:t>
             </a:r>
           </a:p>
         </p:txBody>
@@ -13962,7 +13963,7 @@
               </a:defRPr>
             </a:pPr>
             <a:r>
-              <a:t>24/26</a:t>
+              <a:t>25/27</a:t>
             </a:r>
           </a:p>
         </p:txBody>
@@ -14262,7 +14263,7 @@
                 </a:solidFill>
                 <a:latin typeface="Calibri"/>
               </a:rPr>
-              <a:t>• • Ch.3 WaveSplat (논문 1)</a:t>
+              <a:t>• • Ch.3 WaveSplat (기본 알고리즘)</a:t>
             </a:r>
           </a:p>
           <a:p>
@@ -14326,7 +14327,7 @@
                 </a:solidFill>
                 <a:latin typeface="Calibri"/>
               </a:rPr>
-              <a:t>• • Ch.4 Hydrofoil FF Control (논문 2)</a:t>
+              <a:t>• • Ch.4 Hydrofoil 응용 (확장 연구)</a:t>
             </a:r>
           </a:p>
           <a:p>
@@ -14374,7 +14375,7 @@
                 </a:solidFill>
                 <a:latin typeface="Calibri"/>
               </a:rPr>
-              <a:t>• • Ch.5 수조 실험 검증 (SNU 조파수조 계획)</a:t>
+              <a:t>• • Ch.5 수조 실험 검증 (SNU 조파수조)</a:t>
             </a:r>
           </a:p>
           <a:p>
@@ -14481,7 +14482,7 @@
                 </a:solidFill>
                 <a:latin typeface="Calibri"/>
               </a:rPr>
-              <a:t>• • 논문 1 (WaveSplat)</a:t>
+              <a:t>• • WaveSplat 기본 연구</a:t>
             </a:r>
           </a:p>
           <a:p>
@@ -14545,7 +14546,7 @@
                 </a:solidFill>
                 <a:latin typeface="Calibri"/>
               </a:rPr>
-              <a:t>• •   ⏳ 공동저자 sign-off → 투고</a:t>
+              <a:t>• •   ⏳ 결과 정리 + 후속 정련 진행 중</a:t>
             </a:r>
           </a:p>
           <a:p>
@@ -14577,7 +14578,7 @@
                 </a:solidFill>
                 <a:latin typeface="Calibri"/>
               </a:rPr>
-              <a:t>• • 논문 2 (Hydrofoil)</a:t>
+              <a:t>• • Hydrofoil 응용 연구</a:t>
             </a:r>
           </a:p>
           <a:p>
@@ -14625,7 +14626,7 @@
                 </a:solidFill>
                 <a:latin typeface="Calibri"/>
               </a:rPr>
-              <a:t>• •   ⏳ 공동저자 검토 → 투고</a:t>
+              <a:t>• •   ⏳ end-to-end 검증 추가 진행 중</a:t>
             </a:r>
           </a:p>
           <a:p>
@@ -14689,7 +14690,7 @@
                 </a:solidFill>
                 <a:latin typeface="Calibri"/>
               </a:rPr>
-              <a:t>• •   ⏳ 지도교수 검토</a:t>
+              <a:t>• •   ⏳ 본 발표를 통한 1차 검토</a:t>
             </a:r>
           </a:p>
         </p:txBody>
@@ -14725,7 +14726,7 @@
               </a:defRPr>
             </a:pPr>
             <a:r>
-              <a:t>25/26</a:t>
+              <a:t>26/27</a:t>
             </a:r>
           </a:p>
         </p:txBody>
@@ -14977,7 +14978,7 @@
                 </a:solidFill>
                 <a:latin typeface="Calibri"/>
               </a:rPr>
-              <a:t>• • 논문 1 투고 (Ocean Engineering)</a:t>
+              <a:t>• • WaveSplat 결과 정리 + 외부 발표 검토</a:t>
             </a:r>
           </a:p>
           <a:p>
@@ -14993,7 +14994,7 @@
                 </a:solidFill>
                 <a:latin typeface="Calibri"/>
               </a:rPr>
-              <a:t>• • 논문 2 투고 (Ocean Engineering / JSR)</a:t>
+              <a:t>• • Hydrofoil 응용 결과 정리 + 추가 검증</a:t>
             </a:r>
           </a:p>
           <a:p>
@@ -15325,7 +15326,382 @@
               </a:defRPr>
             </a:pPr>
             <a:r>
-              <a:t>26/26</a:t>
+              <a:t>27/27</a:t>
+            </a:r>
+          </a:p>
+        </p:txBody>
+      </p:sp>
+    </p:spTree>
+  </p:cSld>
+  <p:clrMapOvr>
+    <a:masterClrMapping/>
+  </p:clrMapOvr>
+</p:sld>
+</file>
+
+<file path=ppt/slides/slide27.xml><?xml version="1.0" encoding="utf-8"?>
+<p:sld xmlns:a="http://schemas.openxmlformats.org/drawingml/2006/main" xmlns:p="http://schemas.openxmlformats.org/presentationml/2006/main" xmlns:r="http://schemas.openxmlformats.org/officeDocument/2006/relationships">
+  <p:cSld>
+    <p:spTree>
+      <p:nvGrpSpPr>
+        <p:cNvPr id="1" name=""/>
+        <p:cNvGrpSpPr/>
+        <p:nvPr/>
+      </p:nvGrpSpPr>
+      <p:grpSpPr/>
+      <p:sp>
+        <p:nvSpPr>
+          <p:cNvPr id="2" name="Rectangle 1"/>
+          <p:cNvSpPr/>
+          <p:nvPr/>
+        </p:nvSpPr>
+        <p:spPr>
+          <a:xfrm>
+            <a:off x="0" y="0"/>
+            <a:ext cx="12191695" cy="1097280"/>
+          </a:xfrm>
+          <a:prstGeom prst="rect">
+            <a:avLst/>
+          </a:prstGeom>
+          <a:solidFill>
+            <a:srgbClr val="1A1A2E"/>
+          </a:solidFill>
+          <a:ln>
+            <a:noFill/>
+          </a:ln>
+        </p:spPr>
+        <p:style>
+          <a:lnRef idx="1">
+            <a:schemeClr val="accent1"/>
+          </a:lnRef>
+          <a:fillRef idx="3">
+            <a:schemeClr val="accent1"/>
+          </a:fillRef>
+          <a:effectRef idx="2">
+            <a:schemeClr val="accent1"/>
+          </a:effectRef>
+          <a:fontRef idx="minor">
+            <a:schemeClr val="lt1"/>
+          </a:fontRef>
+        </p:style>
+        <p:txBody>
+          <a:bodyPr rtlCol="0" anchor="ctr"/>
+          <a:lstStyle/>
+          <a:p>
+            <a:pPr algn="ctr"/>
+          </a:p>
+        </p:txBody>
+      </p:sp>
+      <p:sp>
+        <p:nvSpPr>
+          <p:cNvPr id="3" name="TextBox 2"/>
+          <p:cNvSpPr txBox="1"/>
+          <p:nvPr/>
+        </p:nvSpPr>
+        <p:spPr>
+          <a:xfrm>
+            <a:off x="457200" y="274320"/>
+            <a:ext cx="10972800" cy="777240"/>
+          </a:xfrm>
+          <a:prstGeom prst="rect">
+            <a:avLst/>
+          </a:prstGeom>
+          <a:noFill/>
+        </p:spPr>
+        <p:txBody>
+          <a:bodyPr wrap="none">
+            <a:spAutoFit/>
+          </a:bodyPr>
+          <a:lstStyle/>
+          <a:p>
+            <a:r>
+              <a:rPr sz="3600" b="1">
+                <a:solidFill>
+                  <a:srgbClr val="FFFFFF"/>
+                </a:solidFill>
+              </a:rPr>
+              <a:t>  Contents</a:t>
+            </a:r>
+          </a:p>
+        </p:txBody>
+      </p:sp>
+      <p:sp>
+        <p:nvSpPr>
+          <p:cNvPr id="4" name="Rounded Rectangle 3"/>
+          <p:cNvSpPr/>
+          <p:nvPr/>
+        </p:nvSpPr>
+        <p:spPr>
+          <a:xfrm>
+            <a:off x="1751076" y="1783080"/>
+            <a:ext cx="8686800" cy="777240"/>
+          </a:xfrm>
+          <a:prstGeom prst="roundRect">
+            <a:avLst/>
+          </a:prstGeom>
+          <a:solidFill>
+            <a:srgbClr val="C05317"/>
+          </a:solidFill>
+          <a:ln>
+            <a:solidFill>
+              <a:srgbClr val="C05317"/>
+            </a:solidFill>
+          </a:ln>
+        </p:spPr>
+        <p:style>
+          <a:lnRef idx="1">
+            <a:schemeClr val="accent1"/>
+          </a:lnRef>
+          <a:fillRef idx="3">
+            <a:schemeClr val="accent1"/>
+          </a:fillRef>
+          <a:effectRef idx="2">
+            <a:schemeClr val="accent1"/>
+          </a:effectRef>
+          <a:fontRef idx="minor">
+            <a:schemeClr val="lt1"/>
+          </a:fontRef>
+        </p:style>
+        <p:txBody>
+          <a:bodyPr rtlCol="0" anchor="ctr"/>
+          <a:lstStyle/>
+          <a:p>
+            <a:r>
+              <a:rPr sz="2200" b="1">
+                <a:solidFill>
+                  <a:srgbClr val="FFFFFF"/>
+                </a:solidFill>
+              </a:rPr>
+              <a:t>  I.    Introduction</a:t>
+            </a:r>
+          </a:p>
+          <a:p>
+            <a:r>
+              <a:rPr sz="1400" b="0">
+                <a:solidFill>
+                  <a:srgbClr val="FFE5CC"/>
+                </a:solidFill>
+              </a:rPr>
+              <a:t>        실선 LiDAR 관측 + 문제 정의</a:t>
+            </a:r>
+          </a:p>
+        </p:txBody>
+      </p:sp>
+      <p:sp>
+        <p:nvSpPr>
+          <p:cNvPr id="5" name="Rounded Rectangle 4"/>
+          <p:cNvSpPr/>
+          <p:nvPr/>
+        </p:nvSpPr>
+        <p:spPr>
+          <a:xfrm>
+            <a:off x="1751076" y="2880360"/>
+            <a:ext cx="8686800" cy="777240"/>
+          </a:xfrm>
+          <a:prstGeom prst="roundRect">
+            <a:avLst/>
+          </a:prstGeom>
+          <a:solidFill>
+            <a:srgbClr val="C05317"/>
+          </a:solidFill>
+          <a:ln>
+            <a:solidFill>
+              <a:srgbClr val="C05317"/>
+            </a:solidFill>
+          </a:ln>
+        </p:spPr>
+        <p:style>
+          <a:lnRef idx="1">
+            <a:schemeClr val="accent1"/>
+          </a:lnRef>
+          <a:fillRef idx="3">
+            <a:schemeClr val="accent1"/>
+          </a:fillRef>
+          <a:effectRef idx="2">
+            <a:schemeClr val="accent1"/>
+          </a:effectRef>
+          <a:fontRef idx="minor">
+            <a:schemeClr val="lt1"/>
+          </a:fontRef>
+        </p:style>
+        <p:txBody>
+          <a:bodyPr rtlCol="0" anchor="ctr"/>
+          <a:lstStyle/>
+          <a:p>
+            <a:r>
+              <a:rPr sz="2200" b="1">
+                <a:solidFill>
+                  <a:srgbClr val="FFFFFF"/>
+                </a:solidFill>
+              </a:rPr>
+              <a:t>  II.    Methodology</a:t>
+            </a:r>
+          </a:p>
+          <a:p>
+            <a:r>
+              <a:rPr sz="1400" b="0">
+                <a:solidFill>
+                  <a:srgbClr val="FFE5CC"/>
+                </a:solidFill>
+              </a:rPr>
+              <a:t>        WaveSplat 알고리즘 + 시뮬레이션 신뢰성</a:t>
+            </a:r>
+          </a:p>
+        </p:txBody>
+      </p:sp>
+      <p:sp>
+        <p:nvSpPr>
+          <p:cNvPr id="6" name="Rounded Rectangle 5"/>
+          <p:cNvSpPr/>
+          <p:nvPr/>
+        </p:nvSpPr>
+        <p:spPr>
+          <a:xfrm>
+            <a:off x="1751076" y="3977640"/>
+            <a:ext cx="8686800" cy="777240"/>
+          </a:xfrm>
+          <a:prstGeom prst="roundRect">
+            <a:avLst/>
+          </a:prstGeom>
+          <a:solidFill>
+            <a:srgbClr val="C05317"/>
+          </a:solidFill>
+          <a:ln>
+            <a:solidFill>
+              <a:srgbClr val="C05317"/>
+            </a:solidFill>
+          </a:ln>
+        </p:spPr>
+        <p:style>
+          <a:lnRef idx="1">
+            <a:schemeClr val="accent1"/>
+          </a:lnRef>
+          <a:fillRef idx="3">
+            <a:schemeClr val="accent1"/>
+          </a:fillRef>
+          <a:effectRef idx="2">
+            <a:schemeClr val="accent1"/>
+          </a:effectRef>
+          <a:fontRef idx="minor">
+            <a:schemeClr val="lt1"/>
+          </a:fontRef>
+        </p:style>
+        <p:txBody>
+          <a:bodyPr rtlCol="0" anchor="ctr"/>
+          <a:lstStyle/>
+          <a:p>
+            <a:r>
+              <a:rPr sz="2200" b="1">
+                <a:solidFill>
+                  <a:srgbClr val="FFFFFF"/>
+                </a:solidFill>
+              </a:rPr>
+              <a:t>  III.    Results</a:t>
+            </a:r>
+          </a:p>
+          <a:p>
+            <a:r>
+              <a:rPr sz="1400" b="0">
+                <a:solidFill>
+                  <a:srgbClr val="FFE5CC"/>
+                </a:solidFill>
+              </a:rPr>
+              <a:t>        5-Metric 평가 + Ablation + 강화 baseline</a:t>
+            </a:r>
+          </a:p>
+        </p:txBody>
+      </p:sp>
+      <p:sp>
+        <p:nvSpPr>
+          <p:cNvPr id="7" name="Rounded Rectangle 6"/>
+          <p:cNvSpPr/>
+          <p:nvPr/>
+        </p:nvSpPr>
+        <p:spPr>
+          <a:xfrm>
+            <a:off x="1751076" y="5074920"/>
+            <a:ext cx="8686800" cy="777240"/>
+          </a:xfrm>
+          <a:prstGeom prst="roundRect">
+            <a:avLst/>
+          </a:prstGeom>
+          <a:solidFill>
+            <a:srgbClr val="C05317"/>
+          </a:solidFill>
+          <a:ln>
+            <a:solidFill>
+              <a:srgbClr val="C05317"/>
+            </a:solidFill>
+          </a:ln>
+        </p:spPr>
+        <p:style>
+          <a:lnRef idx="1">
+            <a:schemeClr val="accent1"/>
+          </a:lnRef>
+          <a:fillRef idx="3">
+            <a:schemeClr val="accent1"/>
+          </a:fillRef>
+          <a:effectRef idx="2">
+            <a:schemeClr val="accent1"/>
+          </a:effectRef>
+          <a:fontRef idx="minor">
+            <a:schemeClr val="lt1"/>
+          </a:fontRef>
+        </p:style>
+        <p:txBody>
+          <a:bodyPr rtlCol="0" anchor="ctr"/>
+          <a:lstStyle/>
+          <a:p>
+            <a:r>
+              <a:rPr sz="2200" b="1">
+                <a:solidFill>
+                  <a:srgbClr val="FFFFFF"/>
+                </a:solidFill>
+              </a:rPr>
+              <a:t>  IV.    Application</a:t>
+            </a:r>
+          </a:p>
+          <a:p>
+            <a:r>
+              <a:rPr sz="1400" b="0">
+                <a:solidFill>
+                  <a:srgbClr val="FFE5CC"/>
+                </a:solidFill>
+              </a:rPr>
+              <a:t>        Hydrofoil 응용 + 한계 + 향후 계획</a:t>
+            </a:r>
+          </a:p>
+        </p:txBody>
+      </p:sp>
+      <p:sp>
+        <p:nvSpPr>
+          <p:cNvPr id="8" name="TextBox 7"/>
+          <p:cNvSpPr txBox="1"/>
+          <p:nvPr/>
+        </p:nvSpPr>
+        <p:spPr>
+          <a:xfrm>
+            <a:off x="10972800" y="6492240"/>
+            <a:ext cx="1097280" cy="274320"/>
+          </a:xfrm>
+          <a:prstGeom prst="rect">
+            <a:avLst/>
+          </a:prstGeom>
+          <a:noFill/>
+        </p:spPr>
+        <p:txBody>
+          <a:bodyPr wrap="none">
+            <a:spAutoFit/>
+          </a:bodyPr>
+          <a:lstStyle/>
+          <a:p>
+            <a:r>
+              <a:rPr sz="1000">
+                <a:solidFill>
+                  <a:srgbClr val="9CA3AF"/>
+                </a:solidFill>
+              </a:rPr>
+              <a:t>2/27</a:t>
             </a:r>
           </a:p>
         </p:txBody>
@@ -15852,7 +16228,7 @@
               </a:defRPr>
             </a:pPr>
             <a:r>
-              <a:t>3/26</a:t>
+              <a:t>4/27</a:t>
             </a:r>
           </a:p>
         </p:txBody>
@@ -16553,7 +16929,7 @@
               </a:defRPr>
             </a:pPr>
             <a:r>
-              <a:t>4/26</a:t>
+              <a:t>5/27</a:t>
             </a:r>
           </a:p>
         </p:txBody>
@@ -16957,7 +17333,7 @@
               </a:defRPr>
             </a:pPr>
             <a:r>
-              <a:t>5/26</a:t>
+              <a:t>6/27</a:t>
             </a:r>
           </a:p>
         </p:txBody>
@@ -17409,7 +17785,7 @@
               </a:defRPr>
             </a:pPr>
             <a:r>
-              <a:t>6/26</a:t>
+              <a:t>7/27</a:t>
             </a:r>
           </a:p>
         </p:txBody>
@@ -18130,7 +18506,7 @@
               </a:defRPr>
             </a:pPr>
             <a:r>
-              <a:t>7/26</a:t>
+              <a:t>8/27</a:t>
             </a:r>
           </a:p>
         </p:txBody>
@@ -18754,7 +19130,7 @@
               </a:defRPr>
             </a:pPr>
             <a:r>
-              <a:t>8/26</a:t>
+              <a:t>9/27</a:t>
             </a:r>
           </a:p>
         </p:txBody>
@@ -19456,7 +19832,7 @@
                   <a:srgbClr val="9CA3AF"/>
                 </a:solidFill>
               </a:rPr>
-              <a:t>9/26</a:t>
+              <a:t>10/27</a:t>
             </a:r>
           </a:p>
         </p:txBody>

--- a/wavesplat/docs/labmeeting_wavesplat.pptx
+++ b/wavesplat/docs/labmeeting_wavesplat.pptx
@@ -8026,6 +8026,230 @@
           </a:p>
         </p:txBody>
       </p:sp>
+      <p:sp>
+        <p:nvSpPr>
+          <p:cNvPr id="8" name="TextBox 7"/>
+          <p:cNvSpPr txBox="1"/>
+          <p:nvPr/>
+        </p:nvSpPr>
+        <p:spPr>
+          <a:xfrm>
+            <a:off x="365760" y="5166360"/>
+            <a:ext cx="4114800" cy="274320"/>
+          </a:xfrm>
+          <a:prstGeom prst="rect">
+            <a:avLst/>
+          </a:prstGeom>
+          <a:noFill/>
+        </p:spPr>
+        <p:txBody>
+          <a:bodyPr wrap="none">
+            <a:spAutoFit/>
+          </a:bodyPr>
+          <a:lstStyle/>
+          <a:p>
+            <a:r>
+              <a:rPr sz="1200" b="1">
+                <a:solidFill>
+                  <a:srgbClr val="C05317"/>
+                </a:solidFill>
+                <a:latin typeface="Times New Roman"/>
+              </a:rPr>
+              <a:t>추가 분석 — Forecast 능력 차이</a:t>
+            </a:r>
+          </a:p>
+        </p:txBody>
+      </p:sp>
+      <p:sp>
+        <p:nvSpPr>
+          <p:cNvPr id="9" name="TextBox 8"/>
+          <p:cNvSpPr txBox="1"/>
+          <p:nvPr/>
+        </p:nvSpPr>
+        <p:spPr>
+          <a:xfrm>
+            <a:off x="365760" y="5486400"/>
+            <a:ext cx="4114800" cy="1097280"/>
+          </a:xfrm>
+          <a:prstGeom prst="rect">
+            <a:avLst/>
+          </a:prstGeom>
+          <a:noFill/>
+        </p:spPr>
+        <p:txBody>
+          <a:bodyPr wrap="square">
+            <a:spAutoFit/>
+          </a:bodyPr>
+          <a:lstStyle/>
+          <a:p>
+            <a:r>
+              <a:rPr sz="1100" b="1" i="0">
+                <a:solidFill>
+                  <a:srgbClr val="1A1A2E"/>
+                </a:solidFill>
+                <a:latin typeface="Times New Roman"/>
+              </a:rPr>
+              <a:t>A1 (no dispersion) — 외삽 5초 후 비교</a:t>
+            </a:r>
+          </a:p>
+          <a:p>
+            <a:r>
+              <a:rPr sz="1000" b="0" i="0">
+                <a:solidFill>
+                  <a:srgbClr val="333333"/>
+                </a:solidFill>
+                <a:latin typeface="Times New Roman"/>
+              </a:rPr>
+              <a:t>▪ Full: nRMSE 0.219 → 5초 후 0.231 (4% 증가)</a:t>
+            </a:r>
+          </a:p>
+          <a:p>
+            <a:r>
+              <a:rPr sz="1000" b="0" i="0">
+                <a:solidFill>
+                  <a:srgbClr val="333333"/>
+                </a:solidFill>
+                <a:latin typeface="Times New Roman"/>
+              </a:rPr>
+              <a:t>▪ A1:   nRMSE 0.158 → 5초 후 0.476 (3× 폭발)</a:t>
+            </a:r>
+          </a:p>
+          <a:p>
+            <a:r>
+              <a:rPr sz="1000" b="0" i="0">
+                <a:solidFill>
+                  <a:srgbClr val="333333"/>
+                </a:solidFill>
+                <a:latin typeface="Times New Roman"/>
+              </a:rPr>
+              <a:t>▪ A1은 instantaneous는 좋지만 시간 외삽 직후</a:t>
+            </a:r>
+          </a:p>
+          <a:p>
+            <a:r>
+              <a:rPr sz="1000" b="0" i="0">
+                <a:solidFill>
+                  <a:srgbClr val="333333"/>
+                </a:solidFill>
+                <a:latin typeface="Times New Roman"/>
+              </a:rPr>
+              <a:t>   phase decoherence로 사용 불가</a:t>
+            </a:r>
+          </a:p>
+        </p:txBody>
+      </p:sp>
+      <p:sp>
+        <p:nvSpPr>
+          <p:cNvPr id="10" name="TextBox 9"/>
+          <p:cNvSpPr txBox="1"/>
+          <p:nvPr/>
+        </p:nvSpPr>
+        <p:spPr>
+          <a:xfrm>
+            <a:off x="4663440" y="5166360"/>
+            <a:ext cx="3931920" cy="274320"/>
+          </a:xfrm>
+          <a:prstGeom prst="rect">
+            <a:avLst/>
+          </a:prstGeom>
+          <a:noFill/>
+        </p:spPr>
+        <p:txBody>
+          <a:bodyPr wrap="none">
+            <a:spAutoFit/>
+          </a:bodyPr>
+          <a:lstStyle/>
+          <a:p>
+            <a:r>
+              <a:rPr sz="1200" b="1">
+                <a:solidFill>
+                  <a:srgbClr val="C05317"/>
+                </a:solidFill>
+                <a:latin typeface="Times New Roman"/>
+              </a:rPr>
+              <a:t>왜 dispersion drift R̄가 0.51이면 위험?</a:t>
+            </a:r>
+          </a:p>
+        </p:txBody>
+      </p:sp>
+      <p:sp>
+        <p:nvSpPr>
+          <p:cNvPr id="11" name="TextBox 10"/>
+          <p:cNvSpPr txBox="1"/>
+          <p:nvPr/>
+        </p:nvSpPr>
+        <p:spPr>
+          <a:xfrm>
+            <a:off x="4663440" y="5486400"/>
+            <a:ext cx="3931920" cy="1097280"/>
+          </a:xfrm>
+          <a:prstGeom prst="rect">
+            <a:avLst/>
+          </a:prstGeom>
+          <a:noFill/>
+        </p:spPr>
+        <p:txBody>
+          <a:bodyPr wrap="square">
+            <a:spAutoFit/>
+          </a:bodyPr>
+          <a:lstStyle/>
+          <a:p>
+            <a:r>
+              <a:rPr sz="1100" b="1" i="0">
+                <a:solidFill>
+                  <a:srgbClr val="1A1A2E"/>
+                </a:solidFill>
+                <a:latin typeface="Times New Roman"/>
+              </a:rPr>
+              <a:t>한 component 예시 (BF4 5c 첫 component)</a:t>
+            </a:r>
+          </a:p>
+          <a:p>
+            <a:r>
+              <a:rPr sz="1000" b="0" i="0">
+                <a:solidFill>
+                  <a:srgbClr val="333333"/>
+                </a:solidFill>
+                <a:latin typeface="Times New Roman"/>
+              </a:rPr>
+              <a:t>▪ |k|=0.16 rad/m  →  ω_disp = 1.25 rad/s</a:t>
+            </a:r>
+          </a:p>
+          <a:p>
+            <a:r>
+              <a:rPr sz="1000" b="0" i="0">
+                <a:solidFill>
+                  <a:srgbClr val="333333"/>
+                </a:solidFill>
+                <a:latin typeface="Times New Roman"/>
+              </a:rPr>
+              <a:t>▪ A1 추정 ω = 1.78 rad/s  →  Δω = 0.53 rad/s</a:t>
+            </a:r>
+          </a:p>
+          <a:p>
+            <a:r>
+              <a:rPr sz="1000" b="0" i="0">
+                <a:solidFill>
+                  <a:srgbClr val="333333"/>
+                </a:solidFill>
+                <a:latin typeface="Times New Roman"/>
+              </a:rPr>
+              <a:t>▪ 1초 후 phase 오차 ≈ 0.53 rad ≈ 30°</a:t>
+            </a:r>
+          </a:p>
+          <a:p>
+            <a:r>
+              <a:rPr sz="1000" b="0" i="0">
+                <a:solidFill>
+                  <a:srgbClr val="333333"/>
+                </a:solidFill>
+                <a:latin typeface="Times New Roman"/>
+              </a:rPr>
+              <a:t>▪ → 거의 모든 wave에서 위치 어긋남</a:t>
+            </a:r>
+          </a:p>
+        </p:txBody>
+      </p:sp>
     </p:spTree>
   </p:cSld>
   <p:clrMapOvr>
@@ -8758,7 +8982,7 @@
         <p:spPr>
           <a:xfrm>
             <a:off x="365760" y="868680"/>
-            <a:ext cx="8229600" cy="3200400"/>
+            <a:ext cx="8229600" cy="2560320"/>
           </a:xfrm>
           <a:prstGeom prst="rect">
             <a:avLst/>
@@ -8813,7 +9037,7 @@
         </p:nvSpPr>
         <p:spPr>
           <a:xfrm>
-            <a:off x="365760" y="4251960"/>
+            <a:off x="365760" y="3840480"/>
             <a:ext cx="8229600" cy="1828800"/>
           </a:xfrm>
           <a:prstGeom prst="rect">
@@ -8901,6 +9125,107 @@
                 <a:latin typeface="Times New Roman"/>
               </a:rPr>
               <a:t>※ 본 슬라이드는 paper Fig 8을 활용. 실 발표 시 demo_wavesplat.gif (animation) 같이 재생 가능</a:t>
+            </a:r>
+          </a:p>
+        </p:txBody>
+      </p:sp>
+      <p:sp>
+        <p:nvSpPr>
+          <p:cNvPr id="6" name="TextBox 5"/>
+          <p:cNvSpPr txBox="1"/>
+          <p:nvPr/>
+        </p:nvSpPr>
+        <p:spPr>
+          <a:xfrm>
+            <a:off x="365760" y="5532120"/>
+            <a:ext cx="8229600" cy="274320"/>
+          </a:xfrm>
+          <a:prstGeom prst="rect">
+            <a:avLst/>
+          </a:prstGeom>
+          <a:noFill/>
+        </p:spPr>
+        <p:txBody>
+          <a:bodyPr wrap="none">
+            <a:spAutoFit/>
+          </a:bodyPr>
+          <a:lstStyle/>
+          <a:p>
+            <a:r>
+              <a:rPr sz="1200" b="1">
+                <a:solidFill>
+                  <a:srgbClr val="C05317"/>
+                </a:solidFill>
+                <a:latin typeface="Times New Roman"/>
+              </a:rPr>
+              <a:t>Per-method 정성 진단</a:t>
+            </a:r>
+          </a:p>
+        </p:txBody>
+      </p:sp>
+      <p:sp>
+        <p:nvSpPr>
+          <p:cNvPr id="7" name="TextBox 6"/>
+          <p:cNvSpPr txBox="1"/>
+          <p:nvPr/>
+        </p:nvSpPr>
+        <p:spPr>
+          <a:xfrm>
+            <a:off x="365760" y="5852160"/>
+            <a:ext cx="8229600" cy="548640"/>
+          </a:xfrm>
+          <a:prstGeom prst="rect">
+            <a:avLst/>
+          </a:prstGeom>
+          <a:noFill/>
+        </p:spPr>
+        <p:txBody>
+          <a:bodyPr wrap="square">
+            <a:spAutoFit/>
+          </a:bodyPr>
+          <a:lstStyle/>
+          <a:p>
+            <a:r>
+              <a:rPr sz="1100" b="0" i="0">
+                <a:solidFill>
+                  <a:srgbClr val="333333"/>
+                </a:solidFill>
+                <a:latin typeface="Times New Roman"/>
+              </a:rPr>
+              <a:t>▪ WaveSplat: 파봉·파골 모두 GT의 80~90% 진폭 유지, 위상 거의 일치</a:t>
+            </a:r>
+          </a:p>
+          <a:p>
+            <a:r>
+              <a:rPr sz="1100" b="0" i="0">
+                <a:solidFill>
+                  <a:srgbClr val="333333"/>
+                </a:solidFill>
+                <a:latin typeface="Times New Roman"/>
+              </a:rPr>
+              <a:t>▪ ETKF: 진폭은 보존되지만 spatial structure가 noisy — 여러 spurious component에 에너지 분산</a:t>
+            </a:r>
+          </a:p>
+          <a:p>
+            <a:r>
+              <a:rPr sz="1100" b="0" i="0">
+                <a:solidFill>
+                  <a:srgbClr val="333333"/>
+                </a:solidFill>
+                <a:latin typeface="Times New Roman"/>
+              </a:rPr>
+              <a:t>▪ GPR: 표면이 거의 평탄 — VR=0.065와 일관 (zero-predictor에 가까움), 격자/커널 limit</a:t>
+            </a:r>
+          </a:p>
+          <a:p>
+            <a:r>
+              <a:rPr sz="1200" b="1" i="0">
+                <a:solidFill>
+                  <a:srgbClr val="C05317"/>
+                </a:solidFill>
+                <a:latin typeface="Times New Roman"/>
+              </a:rPr>
+              <a:t>시각적 한 줄 결론: WaveSplat만 "진짜 wave field 같은" 결과</a:t>
             </a:r>
           </a:p>
         </p:txBody>
@@ -10112,14 +10437,14 @@
       </p:sp>
       <p:sp>
         <p:nvSpPr>
-          <p:cNvPr id="8" name="TextBox 7"/>
+          <p:cNvPr id="9" name="TextBox 8"/>
           <p:cNvSpPr txBox="1"/>
           <p:nvPr/>
         </p:nvSpPr>
         <p:spPr>
           <a:xfrm>
-            <a:off x="365760" y="5669280"/>
-            <a:ext cx="8229600" cy="457200"/>
+            <a:off x="365760" y="4526280"/>
+            <a:ext cx="8229600" cy="274320"/>
           </a:xfrm>
           <a:prstGeom prst="rect">
             <a:avLst/>
@@ -10127,15 +10452,147 @@
           <a:noFill/>
         </p:spPr>
         <p:txBody>
+          <a:bodyPr wrap="none">
+            <a:spAutoFit/>
+          </a:bodyPr>
+          <a:lstStyle/>
+          <a:p>
+            <a:r>
+              <a:rPr sz="1200" b="1">
+                <a:solidFill>
+                  <a:srgbClr val="C05317"/>
+                </a:solidFill>
+                <a:latin typeface="Times New Roman"/>
+              </a:rPr>
+              <a:t>구체 결과 — Forecast skill score (paper Table)</a:t>
+            </a:r>
+          </a:p>
+        </p:txBody>
+      </p:sp>
+      <p:sp>
+        <p:nvSpPr>
+          <p:cNvPr id="10" name="TextBox 9"/>
+          <p:cNvSpPr txBox="1"/>
+          <p:nvPr/>
+        </p:nvSpPr>
+        <p:spPr>
+          <a:xfrm>
+            <a:off x="365760" y="4846320"/>
+            <a:ext cx="8229600" cy="1463040"/>
+          </a:xfrm>
+          <a:prstGeom prst="rect">
+            <a:avLst/>
+          </a:prstGeom>
+          <a:noFill/>
+        </p:spPr>
+        <p:txBody>
           <a:bodyPr wrap="square">
             <a:spAutoFit/>
           </a:bodyPr>
           <a:lstStyle/>
           <a:p>
             <a:r>
-              <a:rPr sz="1200" b="1" i="0">
-                <a:solidFill>
-                  <a:srgbClr val="C05317"/>
+              <a:rPr sz="1100" b="0" i="0">
+                <a:solidFill>
+                  <a:srgbClr val="333333"/>
+                </a:solidFill>
+                <a:latin typeface="Times New Roman"/>
+              </a:rPr>
+              <a:t>▪ BF3 1c   t+5s: SS = +0.96       t+10s: SS = +0.94</a:t>
+            </a:r>
+          </a:p>
+          <a:p>
+            <a:r>
+              <a:rPr sz="1100" b="0" i="0">
+                <a:solidFill>
+                  <a:srgbClr val="333333"/>
+                </a:solidFill>
+                <a:latin typeface="Times New Roman"/>
+              </a:rPr>
+              <a:t>▪ BF3 2c   t+5s: SS = +0.96       t+10s: SS = +0.95</a:t>
+            </a:r>
+          </a:p>
+          <a:p>
+            <a:r>
+              <a:rPr sz="1100" b="0" i="0">
+                <a:solidFill>
+                  <a:srgbClr val="333333"/>
+                </a:solidFill>
+                <a:latin typeface="Times New Roman"/>
+              </a:rPr>
+              <a:t>▪ BF3 5c   t+5s: SS = +0.41       t+10s: SS = +0.18  (multi-component → drift 누적)</a:t>
+            </a:r>
+          </a:p>
+          <a:p>
+            <a:r>
+              <a:rPr sz="1100" b="0" i="0">
+                <a:solidFill>
+                  <a:srgbClr val="333333"/>
+                </a:solidFill>
+                <a:latin typeface="Times New Roman"/>
+              </a:rPr>
+              <a:t>▪ BF4 5c   t+5s: SS = +0.36       t+10s: SS = +0.12</a:t>
+            </a:r>
+          </a:p>
+          <a:p>
+            <a:r>
+              <a:rPr sz="1100" b="0" i="0">
+                <a:solidFill>
+                  <a:srgbClr val="333333"/>
+                </a:solidFill>
+                <a:latin typeface="Times New Roman"/>
+              </a:rPr>
+              <a:t>▪ BF4 15c  t+5s: SS = −0.04       t+10s: SS = −0.21  (성분 수 한계)</a:t>
+            </a:r>
+          </a:p>
+        </p:txBody>
+      </p:sp>
+      <p:sp>
+        <p:nvSpPr>
+          <p:cNvPr id="11" name="Rounded Rectangle 10"/>
+          <p:cNvSpPr/>
+          <p:nvPr/>
+        </p:nvSpPr>
+        <p:spPr>
+          <a:xfrm>
+            <a:off x="365760" y="5852160"/>
+            <a:ext cx="8229600" cy="411480"/>
+          </a:xfrm>
+          <a:prstGeom prst="roundRect">
+            <a:avLst/>
+          </a:prstGeom>
+          <a:solidFill>
+            <a:srgbClr val="C05317"/>
+          </a:solidFill>
+          <a:ln>
+            <a:solidFill>
+              <a:srgbClr val="C05317"/>
+            </a:solidFill>
+          </a:ln>
+        </p:spPr>
+        <p:style>
+          <a:lnRef idx="1">
+            <a:schemeClr val="accent1"/>
+          </a:lnRef>
+          <a:fillRef idx="3">
+            <a:schemeClr val="accent1"/>
+          </a:fillRef>
+          <a:effectRef idx="2">
+            <a:schemeClr val="accent1"/>
+          </a:effectRef>
+          <a:fontRef idx="minor">
+            <a:schemeClr val="lt1"/>
+          </a:fontRef>
+        </p:style>
+        <p:txBody>
+          <a:bodyPr rtlCol="0" anchor="ctr"/>
+          <a:lstStyle/>
+          <a:p>
+            <a:pPr algn="ctr"/>
+            <a:r>
+              <a:rPr sz="1200" b="1">
+                <a:solidFill>
+                  <a:srgbClr val="FFFFFF"/>
                 </a:solidFill>
                 <a:latin typeface="Times New Roman"/>
               </a:rPr>
@@ -11382,30 +11839,6 @@
           </a:p>
         </p:txBody>
       </p:sp>
-      <p:pic>
-        <p:nvPicPr>
-          <p:cNvPr id="4" name="Picture 3" descr="hydrofoil_controller_flow.png"/>
-          <p:cNvPicPr>
-            <a:picLocks noChangeAspect="1"/>
-          </p:cNvPicPr>
-          <p:nvPr/>
-        </p:nvPicPr>
-        <p:blipFill>
-          <a:blip r:embed="rId2"/>
-          <a:stretch>
-            <a:fillRect/>
-          </a:stretch>
-        </p:blipFill>
-        <p:spPr>
-          <a:xfrm>
-            <a:off x="182880" y="868680"/>
-            <a:ext cx="8778240" cy="2926080"/>
-          </a:xfrm>
-          <a:prstGeom prst="rect">
-            <a:avLst/>
-          </a:prstGeom>
-        </p:spPr>
-      </p:pic>
       <p:sp>
         <p:nvSpPr>
           <p:cNvPr id="5" name="TextBox 4"/>
@@ -11575,6 +12008,30 @@
           </a:p>
         </p:txBody>
       </p:sp>
+      <p:pic>
+        <p:nvPicPr>
+          <p:cNvPr id="9" name="Picture 8" descr="hydrofoil_controller_flow.png"/>
+          <p:cNvPicPr>
+            <a:picLocks noChangeAspect="1"/>
+          </p:cNvPicPr>
+          <p:nvPr/>
+        </p:nvPicPr>
+        <p:blipFill>
+          <a:blip r:embed="rId3"/>
+          <a:stretch>
+            <a:fillRect/>
+          </a:stretch>
+        </p:blipFill>
+        <p:spPr>
+          <a:xfrm>
+            <a:off x="182880" y="868680"/>
+            <a:ext cx="8778240" cy="3108960"/>
+          </a:xfrm>
+          <a:prstGeom prst="rect">
+            <a:avLst/>
+          </a:prstGeom>
+        </p:spPr>
+      </p:pic>
     </p:spTree>
   </p:cSld>
   <p:clrMapOvr>
@@ -12260,6 +12717,263 @@
                 <a:latin typeface="Times New Roman"/>
               </a:rPr>
               <a:t>실용 의미: 추정 정확도가 느슨해도 FF는 동작 — 제어 성능의 nRMSE tolerance가 큼</a:t>
+            </a:r>
+          </a:p>
+        </p:txBody>
+      </p:sp>
+      <p:sp>
+        <p:nvSpPr>
+          <p:cNvPr id="6" name="TextBox 5"/>
+          <p:cNvSpPr txBox="1"/>
+          <p:nvPr/>
+        </p:nvSpPr>
+        <p:spPr>
+          <a:xfrm>
+            <a:off x="365760" y="4663440"/>
+            <a:ext cx="4114800" cy="274320"/>
+          </a:xfrm>
+          <a:prstGeom prst="rect">
+            <a:avLst/>
+          </a:prstGeom>
+          <a:noFill/>
+        </p:spPr>
+        <p:txBody>
+          <a:bodyPr wrap="none">
+            <a:spAutoFit/>
+          </a:bodyPr>
+          <a:lstStyle/>
+          <a:p>
+            <a:r>
+              <a:rPr sz="1200" b="1">
+                <a:solidFill>
+                  <a:srgbClr val="C05317"/>
+                </a:solidFill>
+                <a:latin typeface="Times New Roman"/>
+              </a:rPr>
+              <a:t>ISO 2631 승차감 기준 — 객관적 평가 척도</a:t>
+            </a:r>
+          </a:p>
+        </p:txBody>
+      </p:sp>
+      <p:sp>
+        <p:nvSpPr>
+          <p:cNvPr id="7" name="TextBox 6"/>
+          <p:cNvSpPr txBox="1"/>
+          <p:nvPr/>
+        </p:nvSpPr>
+        <p:spPr>
+          <a:xfrm>
+            <a:off x="365760" y="4983480"/>
+            <a:ext cx="4114800" cy="1554480"/>
+          </a:xfrm>
+          <a:prstGeom prst="rect">
+            <a:avLst/>
+          </a:prstGeom>
+          <a:noFill/>
+        </p:spPr>
+        <p:txBody>
+          <a:bodyPr wrap="square">
+            <a:spAutoFit/>
+          </a:bodyPr>
+          <a:lstStyle/>
+          <a:p>
+            <a:r>
+              <a:rPr sz="1000" b="0" i="0">
+                <a:solidFill>
+                  <a:srgbClr val="333333"/>
+                </a:solidFill>
+                <a:latin typeface="Times New Roman"/>
+              </a:rPr>
+              <a:t>▪ ISO 2631-1: 인체 vibration exposure 기준</a:t>
+            </a:r>
+          </a:p>
+          <a:p>
+            <a:r>
+              <a:rPr sz="1000" b="0" i="0">
+                <a:solidFill>
+                  <a:srgbClr val="333333"/>
+                </a:solidFill>
+                <a:latin typeface="Times New Roman"/>
+              </a:rPr>
+              <a:t>▪ aRMS [m/s²] 기준 분류:</a:t>
+            </a:r>
+          </a:p>
+          <a:p>
+            <a:r>
+              <a:rPr sz="1000" b="0" i="0">
+                <a:solidFill>
+                  <a:srgbClr val="333333"/>
+                </a:solidFill>
+                <a:latin typeface="Times New Roman"/>
+              </a:rPr>
+              <a:t>   &lt; 0.315  Comfortable</a:t>
+            </a:r>
+          </a:p>
+          <a:p>
+            <a:r>
+              <a:rPr sz="1000" b="0" i="0">
+                <a:solidFill>
+                  <a:srgbClr val="333333"/>
+                </a:solidFill>
+                <a:latin typeface="Times New Roman"/>
+              </a:rPr>
+              <a:t>   0.315 ~ 0.63  Slight discomfort</a:t>
+            </a:r>
+          </a:p>
+          <a:p>
+            <a:r>
+              <a:rPr sz="1000" b="0" i="0">
+                <a:solidFill>
+                  <a:srgbClr val="333333"/>
+                </a:solidFill>
+                <a:latin typeface="Times New Roman"/>
+              </a:rPr>
+              <a:t>   0.50 ~ 1.00  Fairly uncomfortable</a:t>
+            </a:r>
+          </a:p>
+          <a:p>
+            <a:r>
+              <a:rPr sz="1000" b="0" i="0">
+                <a:solidFill>
+                  <a:srgbClr val="333333"/>
+                </a:solidFill>
+                <a:latin typeface="Times New Roman"/>
+              </a:rPr>
+              <a:t>   0.80 ~ 1.60  Uncomfortable</a:t>
+            </a:r>
+          </a:p>
+          <a:p>
+            <a:r>
+              <a:rPr sz="1000" b="0" i="0">
+                <a:solidFill>
+                  <a:srgbClr val="333333"/>
+                </a:solidFill>
+                <a:latin typeface="Times New Roman"/>
+              </a:rPr>
+              <a:t>   &gt; 1.60  Very uncomfortable</a:t>
+            </a:r>
+          </a:p>
+        </p:txBody>
+      </p:sp>
+      <p:sp>
+        <p:nvSpPr>
+          <p:cNvPr id="8" name="TextBox 7"/>
+          <p:cNvSpPr txBox="1"/>
+          <p:nvPr/>
+        </p:nvSpPr>
+        <p:spPr>
+          <a:xfrm>
+            <a:off x="4663440" y="4663440"/>
+            <a:ext cx="3931920" cy="274320"/>
+          </a:xfrm>
+          <a:prstGeom prst="rect">
+            <a:avLst/>
+          </a:prstGeom>
+          <a:noFill/>
+        </p:spPr>
+        <p:txBody>
+          <a:bodyPr wrap="none">
+            <a:spAutoFit/>
+          </a:bodyPr>
+          <a:lstStyle/>
+          <a:p>
+            <a:r>
+              <a:rPr sz="1200" b="1">
+                <a:solidFill>
+                  <a:srgbClr val="C05317"/>
+                </a:solidFill>
+                <a:latin typeface="Times New Roman"/>
+              </a:rPr>
+              <a:t>Encounter angle 별 해석</a:t>
+            </a:r>
+          </a:p>
+        </p:txBody>
+      </p:sp>
+      <p:sp>
+        <p:nvSpPr>
+          <p:cNvPr id="9" name="TextBox 8"/>
+          <p:cNvSpPr txBox="1"/>
+          <p:nvPr/>
+        </p:nvSpPr>
+        <p:spPr>
+          <a:xfrm>
+            <a:off x="4663440" y="4983480"/>
+            <a:ext cx="3931920" cy="1554480"/>
+          </a:xfrm>
+          <a:prstGeom prst="rect">
+            <a:avLst/>
+          </a:prstGeom>
+          <a:noFill/>
+        </p:spPr>
+        <p:txBody>
+          <a:bodyPr wrap="square">
+            <a:spAutoFit/>
+          </a:bodyPr>
+          <a:lstStyle/>
+          <a:p>
+            <a:r>
+              <a:rPr sz="1000" b="0" i="0">
+                <a:solidFill>
+                  <a:srgbClr val="333333"/>
+                </a:solidFill>
+                <a:latin typeface="Times New Roman"/>
+              </a:rPr>
+              <a:t>▪ Head sea (μ=180°): 짧은 encounter wavelength →</a:t>
+            </a:r>
+          </a:p>
+          <a:p>
+            <a:r>
+              <a:rPr sz="1000" b="0" i="0">
+                <a:solidFill>
+                  <a:srgbClr val="333333"/>
+                </a:solidFill>
+                <a:latin typeface="Times New Roman"/>
+              </a:rPr>
+              <a:t>   Foil이 빠르게 wave 통과 → preview 짧아도 충분</a:t>
+            </a:r>
+          </a:p>
+          <a:p>
+            <a:r>
+              <a:rPr sz="1000" b="0" i="0">
+                <a:solidFill>
+                  <a:srgbClr val="333333"/>
+                </a:solidFill>
+                <a:latin typeface="Times New Roman"/>
+              </a:rPr>
+              <a:t>▪ Beam sea (μ=90°): 긴 encounter wavelength →</a:t>
+            </a:r>
+          </a:p>
+          <a:p>
+            <a:r>
+              <a:rPr sz="1000" b="0" i="0">
+                <a:solidFill>
+                  <a:srgbClr val="333333"/>
+                </a:solidFill>
+                <a:latin typeface="Times New Roman"/>
+              </a:rPr>
+              <a:t>   파면이 천천히 변화 → preview 길어야 효과적</a:t>
+            </a:r>
+          </a:p>
+          <a:p>
+            <a:r>
+              <a:rPr sz="1000" b="0" i="0">
+                <a:solidFill>
+                  <a:srgbClr val="333333"/>
+                </a:solidFill>
+                <a:latin typeface="Times New Roman"/>
+              </a:rPr>
+              <a:t>▪ Quarter (μ=135°): 중간 — 균형적</a:t>
+            </a:r>
+          </a:p>
+          <a:p>
+            <a:r>
+              <a:rPr sz="1000" b="0" i="0">
+                <a:solidFill>
+                  <a:srgbClr val="333333"/>
+                </a:solidFill>
+                <a:latin typeface="Times New Roman"/>
+              </a:rPr>
+              <a:t>▪ Following (μ=0°): 거의 정적 → FF 효과 적음 (생략)</a:t>
             </a:r>
           </a:p>
         </p:txBody>
@@ -13174,22 +13888,123 @@
       </p:sp>
       <p:sp>
         <p:nvSpPr>
-          <p:cNvPr id="7" name="Rectangle 6"/>
-          <p:cNvSpPr/>
+          <p:cNvPr id="7" name="TextBox 6"/>
+          <p:cNvSpPr txBox="1"/>
           <p:nvPr/>
         </p:nvSpPr>
         <p:spPr>
           <a:xfrm>
-            <a:off x="365760" y="5897880"/>
-            <a:ext cx="8229600" cy="320040"/>
+            <a:off x="365760" y="4846320"/>
+            <a:ext cx="8229600" cy="274320"/>
           </a:xfrm>
           <a:prstGeom prst="rect">
             <a:avLst/>
           </a:prstGeom>
+          <a:noFill/>
+        </p:spPr>
+        <p:txBody>
+          <a:bodyPr wrap="none">
+            <a:spAutoFit/>
+          </a:bodyPr>
+          <a:lstStyle/>
+          <a:p>
+            <a:r>
+              <a:rPr sz="1200" b="1">
+                <a:solidFill>
+                  <a:srgbClr val="C05317"/>
+                </a:solidFill>
+                <a:latin typeface="Times New Roman"/>
+              </a:rPr>
+              <a:t>BF4 한계의 원인 — Direction error 전파</a:t>
+            </a:r>
+          </a:p>
+        </p:txBody>
+      </p:sp>
+      <p:sp>
+        <p:nvSpPr>
+          <p:cNvPr id="8" name="TextBox 7"/>
+          <p:cNvSpPr txBox="1"/>
+          <p:nvPr/>
+        </p:nvSpPr>
+        <p:spPr>
+          <a:xfrm>
+            <a:off x="365760" y="5166360"/>
+            <a:ext cx="8229600" cy="1188720"/>
+          </a:xfrm>
+          <a:prstGeom prst="rect">
+            <a:avLst/>
+          </a:prstGeom>
+          <a:noFill/>
+        </p:spPr>
+        <p:txBody>
+          <a:bodyPr wrap="square">
+            <a:spAutoFit/>
+          </a:bodyPr>
+          <a:lstStyle/>
+          <a:p>
+            <a:r>
+              <a:rPr sz="1100" b="0" i="0">
+                <a:solidFill>
+                  <a:srgbClr val="333333"/>
+                </a:solidFill>
+                <a:latin typeface="Times New Roman"/>
+              </a:rPr>
+              <a:t>▪ FF 명령 = K_ff × α_wave   ←   α_wave = −∂η/∂x − w/V</a:t>
+            </a:r>
+          </a:p>
+          <a:p>
+            <a:r>
+              <a:rPr sz="1100" b="0" i="0">
+                <a:solidFill>
+                  <a:srgbClr val="333333"/>
+                </a:solidFill>
+                <a:latin typeface="Times New Roman"/>
+              </a:rPr>
+              <a:t>▪ ∂η/∂x는 wave 방향 미분 → direction estimate에 supersensitive</a:t>
+            </a:r>
+          </a:p>
+          <a:p>
+            <a:r>
+              <a:rPr sz="1100" b="0" i="0">
+                <a:solidFill>
+                  <a:srgbClr val="333333"/>
+                </a:solidFill>
+                <a:latin typeface="Times New Roman"/>
+              </a:rPr>
+              <a:t>▪ Direction이 5° 어긋나면 ∂η/∂x 부호 바뀔 수 있음 → FF가 오히려 disturbance 증폭</a:t>
+            </a:r>
+          </a:p>
+          <a:p>
+            <a:r>
+              <a:rPr sz="1100" b="0" i="0">
+                <a:solidFill>
+                  <a:srgbClr val="333333"/>
+                </a:solidFill>
+                <a:latin typeface="Times New Roman"/>
+              </a:rPr>
+              <a:t>▪ BF4 5-comp 사례: 두 component가 ±20° 분리되어 있어 superposition 시 phase 어긋남</a:t>
+            </a:r>
+          </a:p>
+        </p:txBody>
+      </p:sp>
+      <p:sp>
+        <p:nvSpPr>
+          <p:cNvPr id="9" name="Rounded Rectangle 8"/>
+          <p:cNvSpPr/>
+          <p:nvPr/>
+        </p:nvSpPr>
+        <p:spPr>
+          <a:xfrm>
+            <a:off x="365760" y="5989320"/>
+            <a:ext cx="8229600" cy="365760"/>
+          </a:xfrm>
+          <a:prstGeom prst="roundRect">
+            <a:avLst/>
+          </a:prstGeom>
           <a:solidFill>
-            <a:srgbClr val="FFF7ED"/>
+            <a:srgbClr val="C05317"/>
           </a:solidFill>
-          <a:ln w="19050">
+          <a:ln>
             <a:solidFill>
               <a:srgbClr val="C05317"/>
             </a:solidFill>
@@ -13210,19 +14025,18 @@
           </a:fontRef>
         </p:style>
         <p:txBody>
-          <a:bodyPr rtlCol="0" anchor="ctr" wrap="square"/>
+          <a:bodyPr rtlCol="0" anchor="ctr"/>
           <a:lstStyle/>
           <a:p>
             <a:pPr algn="ctr"/>
             <a:r>
-              <a:rPr sz="1000" i="1">
-                <a:solidFill>
-                  <a:srgbClr val="C05317"/>
-                </a:solidFill>
-                <a:latin typeface="Times New Roman"/>
-              </a:rPr>
-              <a:t>[ 그림 자리 ]
-thesis/figures_hf/fig_e2e_timeseries.pdf — heave &amp; pitch 시계열 (선택)</a:t>
+              <a:rPr sz="1100" b="1">
+                <a:solidFill>
+                  <a:srgbClr val="FFFFFF"/>
+                </a:solidFill>
+                <a:latin typeface="Times New Roman"/>
+              </a:rPr>
+              <a:t>개선 방향: (a) vessel yaw 변화 활용한 multi-frame direction voting  (b) IMU heading 기반 directional prior</a:t>
             </a:r>
           </a:p>
         </p:txBody>

--- a/wavesplat/docs/labmeeting_wavesplat.pptx
+++ b/wavesplat/docs/labmeeting_wavesplat.pptx
@@ -16,6 +16,7 @@
     <p:sldId id="258" r:id="rId5"/>
     <p:sldId id="259" r:id="rId4"/>
     <p:sldId id="260" r:id="rId3"/>
+    <p:sldId id="285" r:id="rId38"/>
     <p:sldId id="261" r:id="rId2"/>
     <p:sldId id="262" r:id="rId15"/>
     <p:sldId id="263" r:id="rId16"/>
@@ -2971,6 +2972,524 @@
               <a:rPr sz="2200" b="0" i="0">
                 <a:latin typeface="Times New Roman"/>
               </a:rPr>
+              <a:t>Methodology (2) — 2-Phase Pipeline (Init → Track)</a:t>
+            </a:r>
+          </a:p>
+        </p:txBody>
+      </p:sp>
+      <p:sp>
+        <p:nvSpPr>
+          <p:cNvPr id="4" name="TextBox 3"/>
+          <p:cNvSpPr txBox="1"/>
+          <p:nvPr/>
+        </p:nvSpPr>
+        <p:spPr>
+          <a:xfrm>
+            <a:off x="365760" y="868680"/>
+            <a:ext cx="4114800" cy="274320"/>
+          </a:xfrm>
+          <a:prstGeom prst="rect">
+            <a:avLst/>
+          </a:prstGeom>
+          <a:noFill/>
+        </p:spPr>
+        <p:txBody>
+          <a:bodyPr wrap="none">
+            <a:spAutoFit/>
+          </a:bodyPr>
+          <a:lstStyle/>
+          <a:p>
+            <a:r>
+              <a:rPr sz="1200" b="1">
+                <a:solidFill>
+                  <a:srgbClr val="C05317"/>
+                </a:solidFill>
+                <a:latin typeface="Times New Roman"/>
+              </a:rPr>
+              <a:t>Phase 1: Initialization (T_init = 2Tₚ ≈ 14 s @ BF4)</a:t>
+            </a:r>
+          </a:p>
+        </p:txBody>
+      </p:sp>
+      <p:sp>
+        <p:nvSpPr>
+          <p:cNvPr id="5" name="TextBox 4"/>
+          <p:cNvSpPr txBox="1"/>
+          <p:nvPr/>
+        </p:nvSpPr>
+        <p:spPr>
+          <a:xfrm>
+            <a:off x="365760" y="1188720"/>
+            <a:ext cx="4114800" cy="3108960"/>
+          </a:xfrm>
+          <a:prstGeom prst="rect">
+            <a:avLst/>
+          </a:prstGeom>
+          <a:noFill/>
+        </p:spPr>
+        <p:txBody>
+          <a:bodyPr wrap="square">
+            <a:spAutoFit/>
+          </a:bodyPr>
+          <a:lstStyle/>
+          <a:p>
+            <a:r>
+              <a:rPr sz="1100" b="0" i="0">
+                <a:solidFill>
+                  <a:srgbClr val="333333"/>
+                </a:solidFill>
+                <a:latin typeface="Times New Roman"/>
+              </a:rPr>
+              <a:t>① Dispersion-aware beamforming (v2_konly)</a:t>
+            </a:r>
+          </a:p>
+          <a:p>
+            <a:r>
+              <a:rPr sz="1100" b="0" i="0">
+                <a:solidFill>
+                  <a:srgbClr val="333333"/>
+                </a:solidFill>
+                <a:latin typeface="Times New Roman"/>
+              </a:rPr>
+              <a:t>   → Cartesian 81×81 k-grid (Δk≈0.10 rad/m)</a:t>
+            </a:r>
+          </a:p>
+          <a:p>
+            <a:r>
+              <a:rPr sz="1100" b="0" i="0">
+                <a:solidFill>
+                  <a:srgbClr val="333333"/>
+                </a:solidFill>
+                <a:latin typeface="Times New Roman"/>
+              </a:rPr>
+              <a:t>② Greedy peak extraction (0.15 rad/m suppression)</a:t>
+            </a:r>
+          </a:p>
+          <a:p>
+            <a:r>
+              <a:rPr sz="1100" b="0" i="0">
+                <a:solidFill>
+                  <a:srgbClr val="333333"/>
+                </a:solidFill>
+                <a:latin typeface="Times New Roman"/>
+              </a:rPr>
+              <a:t>③ Coarse-to-fine Adam: N=3 → 8 → 15</a:t>
+            </a:r>
+          </a:p>
+          <a:p>
+            <a:r>
+              <a:rPr sz="1100" b="0" i="0">
+                <a:solidFill>
+                  <a:srgbClr val="333333"/>
+                </a:solidFill>
+                <a:latin typeface="Times New Roman"/>
+              </a:rPr>
+              <a:t>   (200 iters/stage, lr=5×10⁻³)</a:t>
+            </a:r>
+          </a:p>
+          <a:p>
+            <a:r>
+              <a:rPr sz="1100" b="0" i="0">
+                <a:solidFill>
+                  <a:srgbClr val="333333"/>
+                </a:solidFill>
+                <a:latin typeface="Times New Roman"/>
+              </a:rPr>
+              <a:t>④ Energy-based pruning (90% threshold)</a:t>
+            </a:r>
+          </a:p>
+          <a:p>
+            <a:r>
+              <a:rPr sz="1100" b="0" i="0">
+                <a:solidFill>
+                  <a:srgbClr val="333333"/>
+                </a:solidFill>
+                <a:latin typeface="Times New Roman"/>
+              </a:rPr>
+              <a:t>   + RMSE 130% safety rollback</a:t>
+            </a:r>
+          </a:p>
+          <a:p>
+            <a:r>
+              <a:rPr sz="1100" b="0" i="0">
+                <a:solidFill>
+                  <a:srgbClr val="333333"/>
+                </a:solidFill>
+                <a:latin typeface="Times New Roman"/>
+              </a:rPr>
+              <a:t>⑤ Residual growth: RMS &gt; 0.05 m → 추가 beamform</a:t>
+            </a:r>
+          </a:p>
+          <a:p>
+            <a:r>
+              <a:rPr sz="1100" b="0" i="0">
+                <a:solidFill>
+                  <a:srgbClr val="333333"/>
+                </a:solidFill>
+                <a:latin typeface="Times New Roman"/>
+              </a:rPr>
+              <a:t>   (Nmax = 30)</a:t>
+            </a:r>
+          </a:p>
+        </p:txBody>
+      </p:sp>
+      <p:sp>
+        <p:nvSpPr>
+          <p:cNvPr id="6" name="TextBox 5"/>
+          <p:cNvSpPr txBox="1"/>
+          <p:nvPr/>
+        </p:nvSpPr>
+        <p:spPr>
+          <a:xfrm>
+            <a:off x="4663440" y="868680"/>
+            <a:ext cx="3931920" cy="274320"/>
+          </a:xfrm>
+          <a:prstGeom prst="rect">
+            <a:avLst/>
+          </a:prstGeom>
+          <a:noFill/>
+        </p:spPr>
+        <p:txBody>
+          <a:bodyPr wrap="none">
+            <a:spAutoFit/>
+          </a:bodyPr>
+          <a:lstStyle/>
+          <a:p>
+            <a:r>
+              <a:rPr sz="1200" b="1">
+                <a:solidFill>
+                  <a:srgbClr val="C05317"/>
+                </a:solidFill>
+                <a:latin typeface="Times New Roman"/>
+              </a:rPr>
+              <a:t>Phase 2: Tracking (w_phi mode, 10 Hz)</a:t>
+            </a:r>
+          </a:p>
+        </p:txBody>
+      </p:sp>
+      <p:sp>
+        <p:nvSpPr>
+          <p:cNvPr id="7" name="TextBox 6"/>
+          <p:cNvSpPr txBox="1"/>
+          <p:nvPr/>
+        </p:nvSpPr>
+        <p:spPr>
+          <a:xfrm>
+            <a:off x="4663440" y="1188720"/>
+            <a:ext cx="3931920" cy="3108960"/>
+          </a:xfrm>
+          <a:prstGeom prst="rect">
+            <a:avLst/>
+          </a:prstGeom>
+          <a:noFill/>
+        </p:spPr>
+        <p:txBody>
+          <a:bodyPr wrap="square">
+            <a:spAutoFit/>
+          </a:bodyPr>
+          <a:lstStyle/>
+          <a:p>
+            <a:r>
+              <a:rPr sz="1100" b="0" i="0">
+                <a:solidFill>
+                  <a:srgbClr val="333333"/>
+                </a:solidFill>
+                <a:latin typeface="Times New Roman"/>
+              </a:rPr>
+              <a:t>Predict: φᵢ ← φᵢ + ωᵢ · Δt</a:t>
+            </a:r>
+          </a:p>
+          <a:p>
+            <a:r>
+              <a:rPr sz="1100" b="0" i="0">
+                <a:solidFill>
+                  <a:srgbClr val="333333"/>
+                </a:solidFill>
+                <a:latin typeface="Times New Roman"/>
+              </a:rPr>
+              <a:t>   (dispersion-exact phase propagation)</a:t>
+            </a:r>
+          </a:p>
+          <a:p>
+            <a:r>
+              <a:rPr sz="1100" b="0" i="0">
+                <a:solidFill>
+                  <a:srgbClr val="333333"/>
+                </a:solidFill>
+                <a:latin typeface="Times New Roman"/>
+              </a:rPr>
+              <a:t/>
+            </a:r>
+          </a:p>
+          <a:p>
+            <a:r>
+              <a:rPr sz="1100" b="0" i="0">
+                <a:solidFill>
+                  <a:srgbClr val="333333"/>
+                </a:solidFill>
+                <a:latin typeface="Times New Roman"/>
+              </a:rPr>
+              <a:t>Update: K=10 Adam steps (lr=10⁻³)</a:t>
+            </a:r>
+          </a:p>
+          <a:p>
+            <a:r>
+              <a:rPr sz="1100" b="0" i="0">
+                <a:solidFill>
+                  <a:srgbClr val="333333"/>
+                </a:solidFill>
+                <a:latin typeface="Times New Roman"/>
+              </a:rPr>
+              <a:t>   on Kw=3 sliding-frame window</a:t>
+            </a:r>
+          </a:p>
+          <a:p>
+            <a:r>
+              <a:rPr sz="1100" b="0" i="0">
+                <a:solidFill>
+                  <a:srgbClr val="333333"/>
+                </a:solidFill>
+                <a:latin typeface="Times New Roman"/>
+              </a:rPr>
+              <a:t>   → only (wᵢ, φᵢ) updated; kx, ky FROZEN</a:t>
+            </a:r>
+          </a:p>
+          <a:p>
+            <a:r>
+              <a:rPr sz="1100" b="0" i="0">
+                <a:solidFill>
+                  <a:srgbClr val="333333"/>
+                </a:solidFill>
+                <a:latin typeface="Times New Roman"/>
+              </a:rPr>
+              <a:t/>
+            </a:r>
+          </a:p>
+          <a:p>
+            <a:r>
+              <a:rPr sz="1100" b="0" i="0">
+                <a:solidFill>
+                  <a:srgbClr val="333333"/>
+                </a:solidFill>
+                <a:latin typeface="Times New Roman"/>
+              </a:rPr>
+              <a:t>Why freeze k?</a:t>
+            </a:r>
+          </a:p>
+          <a:p>
+            <a:r>
+              <a:rPr sz="1100" b="0" i="0">
+                <a:solidFill>
+                  <a:srgbClr val="333333"/>
+                </a:solidFill>
+                <a:latin typeface="Times New Roman"/>
+              </a:rPr>
+              <a:t>   • 단일 프레임에서 kx/ky는 ill-conditioned</a:t>
+            </a:r>
+          </a:p>
+          <a:p>
+            <a:r>
+              <a:rPr sz="1100" b="0" i="0">
+                <a:solidFill>
+                  <a:srgbClr val="333333"/>
+                </a:solidFill>
+                <a:latin typeface="Times New Roman"/>
+              </a:rPr>
+              <a:t>   • Multi-frame init이 충분히 평균화</a:t>
+            </a:r>
+          </a:p>
+          <a:p>
+            <a:r>
+              <a:rPr sz="1100" b="0" i="0">
+                <a:solidFill>
+                  <a:srgbClr val="333333"/>
+                </a:solidFill>
+                <a:latin typeface="Times New Roman"/>
+              </a:rPr>
+              <a:t>   • φ warm start로 200→10 grad steps</a:t>
+            </a:r>
+          </a:p>
+        </p:txBody>
+      </p:sp>
+      <p:sp>
+        <p:nvSpPr>
+          <p:cNvPr id="8" name="TextBox 7"/>
+          <p:cNvSpPr txBox="1"/>
+          <p:nvPr/>
+        </p:nvSpPr>
+        <p:spPr>
+          <a:xfrm>
+            <a:off x="365760" y="4526280"/>
+            <a:ext cx="8229600" cy="457200"/>
+          </a:xfrm>
+          <a:prstGeom prst="rect">
+            <a:avLst/>
+          </a:prstGeom>
+          <a:noFill/>
+        </p:spPr>
+        <p:txBody>
+          <a:bodyPr wrap="square">
+            <a:spAutoFit/>
+          </a:bodyPr>
+          <a:lstStyle/>
+          <a:p>
+            <a:r>
+              <a:rPr sz="1300" b="1" i="0">
+                <a:solidFill>
+                  <a:srgbClr val="C05317"/>
+                </a:solidFill>
+                <a:latin typeface="Times New Roman"/>
+              </a:rPr>
+              <a:t>Adaptive N: 단일 swell에선 N=1, 복잡 sea에선 N=21까지 — 평균 13.4 ms/frame</a:t>
+            </a:r>
+          </a:p>
+        </p:txBody>
+      </p:sp>
+      <p:sp>
+        <p:nvSpPr>
+          <p:cNvPr id="9" name="TextBox 8"/>
+          <p:cNvSpPr txBox="1"/>
+          <p:nvPr/>
+        </p:nvSpPr>
+        <p:spPr>
+          <a:xfrm>
+            <a:off x="365760" y="5029200"/>
+            <a:ext cx="8229600" cy="274320"/>
+          </a:xfrm>
+          <a:prstGeom prst="rect">
+            <a:avLst/>
+          </a:prstGeom>
+          <a:noFill/>
+        </p:spPr>
+        <p:txBody>
+          <a:bodyPr wrap="none">
+            <a:spAutoFit/>
+          </a:bodyPr>
+          <a:lstStyle/>
+          <a:p>
+            <a:r>
+              <a:rPr sz="1200" b="1">
+                <a:solidFill>
+                  <a:srgbClr val="C05317"/>
+                </a:solidFill>
+                <a:latin typeface="Times New Roman"/>
+              </a:rPr>
+              <a:t>실시간 처리 핵심</a:t>
+            </a:r>
+          </a:p>
+        </p:txBody>
+      </p:sp>
+      <p:sp>
+        <p:nvSpPr>
+          <p:cNvPr id="10" name="TextBox 9"/>
+          <p:cNvSpPr txBox="1"/>
+          <p:nvPr/>
+        </p:nvSpPr>
+        <p:spPr>
+          <a:xfrm>
+            <a:off x="365760" y="5349240"/>
+            <a:ext cx="8229600" cy="914400"/>
+          </a:xfrm>
+          <a:prstGeom prst="rect">
+            <a:avLst/>
+          </a:prstGeom>
+          <a:noFill/>
+        </p:spPr>
+        <p:txBody>
+          <a:bodyPr wrap="square">
+            <a:spAutoFit/>
+          </a:bodyPr>
+          <a:lstStyle/>
+          <a:p>
+            <a:r>
+              <a:rPr sz="1100" b="0" i="0">
+                <a:solidFill>
+                  <a:srgbClr val="333333"/>
+                </a:solidFill>
+                <a:latin typeface="Times New Roman"/>
+              </a:rPr>
+              <a:t>▪ Init은 한 번만 (~500 ms) — 이후 frame당 ~13 ms tracking으로 10 Hz 대응</a:t>
+            </a:r>
+          </a:p>
+          <a:p>
+            <a:r>
+              <a:rPr sz="1100" b="0" i="0">
+                <a:solidFill>
+                  <a:srgbClr val="333333"/>
+                </a:solidFill>
+                <a:latin typeface="Times New Roman"/>
+              </a:rPr>
+              <a:t>▪ k freeze + φ warm-start로 200→10 grad steps 단축이 결정적 속도 차이</a:t>
+            </a:r>
+          </a:p>
+          <a:p>
+            <a:r>
+              <a:rPr sz="1100" b="0" i="0">
+                <a:solidFill>
+                  <a:srgbClr val="333333"/>
+                </a:solidFill>
+                <a:latin typeface="Times New Roman"/>
+              </a:rPr>
+              <a:t>▪ Adaptive N의 pruning은 over-parametrize 방지, growth는 새로운 component 출현 대응</a:t>
+            </a:r>
+          </a:p>
+        </p:txBody>
+      </p:sp>
+    </p:spTree>
+  </p:cSld>
+  <p:clrMapOvr>
+    <a:masterClrMapping/>
+  </p:clrMapOvr>
+</p:sld>
+</file>
+
+<file path=ppt/slides/slide11.xml><?xml version="1.0" encoding="utf-8"?>
+<p:sld xmlns:a="http://schemas.openxmlformats.org/drawingml/2006/main" xmlns:p="http://schemas.openxmlformats.org/presentationml/2006/main" xmlns:r="http://schemas.openxmlformats.org/officeDocument/2006/relationships">
+  <p:cSld>
+    <p:spTree>
+      <p:nvGrpSpPr>
+        <p:cNvPr id="1" name=""/>
+        <p:cNvGrpSpPr/>
+        <p:nvPr/>
+      </p:nvGrpSpPr>
+      <p:grpSpPr/>
+      <p:sp>
+        <p:nvSpPr>
+          <p:cNvPr id="2" name="Content Placeholder 1"/>
+          <p:cNvSpPr>
+            <a:spLocks noGrp="1"/>
+          </p:cNvSpPr>
+          <p:nvPr>
+            <p:ph idx="1"/>
+          </p:nvPr>
+        </p:nvSpPr>
+        <p:spPr/>
+        <p:txBody>
+          <a:bodyPr/>
+          <a:lstStyle/>
+          <a:p/>
+        </p:txBody>
+      </p:sp>
+      <p:sp>
+        <p:nvSpPr>
+          <p:cNvPr id="3" name="Title 2"/>
+          <p:cNvSpPr>
+            <a:spLocks noGrp="1"/>
+          </p:cNvSpPr>
+          <p:nvPr>
+            <p:ph type="title"/>
+          </p:nvPr>
+        </p:nvSpPr>
+        <p:spPr/>
+        <p:txBody>
+          <a:bodyPr/>
+          <a:lstStyle/>
+          <a:p>
+            <a:pPr/>
+            <a:r>
+              <a:rPr sz="2200" b="0" i="0">
+                <a:latin typeface="Times New Roman"/>
+              </a:rPr>
               <a:t>Methodology Flowchart — 전체 로직 한눈에</a:t>
             </a:r>
           </a:p>
@@ -3143,7 +3662,7 @@
 </p:sld>
 </file>
 
-<file path=ppt/slides/slide11.xml><?xml version="1.0" encoding="utf-8"?>
+<file path=ppt/slides/slide12.xml><?xml version="1.0" encoding="utf-8"?>
 <p:sld xmlns:a="http://schemas.openxmlformats.org/drawingml/2006/main" xmlns:p="http://schemas.openxmlformats.org/presentationml/2006/main" xmlns:r="http://schemas.openxmlformats.org/officeDocument/2006/relationships">
   <p:cSld>
     <p:spTree>
@@ -3514,7 +4033,7 @@
 </p:sld>
 </file>
 
-<file path=ppt/slides/slide12.xml><?xml version="1.0" encoding="utf-8"?>
+<file path=ppt/slides/slide13.xml><?xml version="1.0" encoding="utf-8"?>
 <p:sld xmlns:a="http://schemas.openxmlformats.org/drawingml/2006/main" xmlns:p="http://schemas.openxmlformats.org/presentationml/2006/main" xmlns:r="http://schemas.openxmlformats.org/officeDocument/2006/relationships">
   <p:cSld>
     <p:spTree>
@@ -3991,7 +4510,7 @@
 </p:sld>
 </file>
 
-<file path=ppt/slides/slide13.xml><?xml version="1.0" encoding="utf-8"?>
+<file path=ppt/slides/slide14.xml><?xml version="1.0" encoding="utf-8"?>
 <p:sld xmlns:a="http://schemas.openxmlformats.org/drawingml/2006/main" xmlns:p="http://schemas.openxmlformats.org/presentationml/2006/main" xmlns:r="http://schemas.openxmlformats.org/officeDocument/2006/relationships">
   <p:cSld>
     <p:spTree>
@@ -4982,7 +5501,7 @@
 </p:sld>
 </file>
 
-<file path=ppt/slides/slide14.xml><?xml version="1.0" encoding="utf-8"?>
+<file path=ppt/slides/slide15.xml><?xml version="1.0" encoding="utf-8"?>
 <p:sld xmlns:a="http://schemas.openxmlformats.org/drawingml/2006/main" xmlns:p="http://schemas.openxmlformats.org/presentationml/2006/main" xmlns:r="http://schemas.openxmlformats.org/officeDocument/2006/relationships">
   <p:cSld>
     <p:spTree>
@@ -5183,7 +5702,7 @@
                           </a:solidFill>
                           <a:latin typeface="Times New Roman"/>
                         </a:rPr>
-                        <a:t>RMSE_unobs [m] ↓</a:t>
+                        <a:t>RMSE(unobs) ↓</a:t>
                       </a:r>
                     </a:p>
                   </a:txBody>
@@ -6217,7 +6736,7 @@
 </p:sld>
 </file>
 
-<file path=ppt/slides/slide15.xml><?xml version="1.0" encoding="utf-8"?>
+<file path=ppt/slides/slide16.xml><?xml version="1.0" encoding="utf-8"?>
 <p:sld xmlns:a="http://schemas.openxmlformats.org/drawingml/2006/main" xmlns:p="http://schemas.openxmlformats.org/presentationml/2006/main" xmlns:r="http://schemas.openxmlformats.org/officeDocument/2006/relationships">
   <p:cSld>
     <p:spTree>
@@ -6512,7 +7031,7 @@
 </p:sld>
 </file>
 
-<file path=ppt/slides/slide16.xml><?xml version="1.0" encoding="utf-8"?>
+<file path=ppt/slides/slide17.xml><?xml version="1.0" encoding="utf-8"?>
 <p:sld xmlns:a="http://schemas.openxmlformats.org/drawingml/2006/main" xmlns:p="http://schemas.openxmlformats.org/presentationml/2006/main" xmlns:r="http://schemas.openxmlformats.org/officeDocument/2006/relationships">
   <p:cSld>
     <p:spTree>
@@ -7443,7 +7962,7 @@
 </p:sld>
 </file>
 
-<file path=ppt/slides/slide17.xml><?xml version="1.0" encoding="utf-8"?>
+<file path=ppt/slides/slide18.xml><?xml version="1.0" encoding="utf-8"?>
 <p:sld xmlns:a="http://schemas.openxmlformats.org/drawingml/2006/main" xmlns:p="http://schemas.openxmlformats.org/presentationml/2006/main" xmlns:r="http://schemas.openxmlformats.org/officeDocument/2006/relationships">
   <p:cSld>
     <p:spTree>
@@ -8258,7 +8777,7 @@
 </p:sld>
 </file>
 
-<file path=ppt/slides/slide18.xml><?xml version="1.0" encoding="utf-8"?>
+<file path=ppt/slides/slide19.xml><?xml version="1.0" encoding="utf-8"?>
 <p:sld xmlns:a="http://schemas.openxmlformats.org/drawingml/2006/main" xmlns:p="http://schemas.openxmlformats.org/presentationml/2006/main" xmlns:r="http://schemas.openxmlformats.org/officeDocument/2006/relationships">
   <p:cSld>
     <p:spTree>
@@ -8921,7 +9440,279 @@
 </p:sld>
 </file>
 
-<file path=ppt/slides/slide19.xml><?xml version="1.0" encoding="utf-8"?>
+<file path=ppt/slides/slide2.xml><?xml version="1.0" encoding="utf-8"?>
+<p:sld xmlns:a="http://schemas.openxmlformats.org/drawingml/2006/main" xmlns:p="http://schemas.openxmlformats.org/presentationml/2006/main" xmlns:r="http://schemas.openxmlformats.org/officeDocument/2006/relationships">
+  <p:cSld>
+    <p:spTree>
+      <p:nvGrpSpPr>
+        <p:cNvPr id="1" name=""/>
+        <p:cNvGrpSpPr/>
+        <p:nvPr/>
+      </p:nvGrpSpPr>
+      <p:grpSpPr/>
+      <p:sp>
+        <p:nvSpPr>
+          <p:cNvPr id="2" name="Content Placeholder 1"/>
+          <p:cNvSpPr>
+            <a:spLocks noGrp="1"/>
+          </p:cNvSpPr>
+          <p:nvPr>
+            <p:ph idx="1"/>
+          </p:nvPr>
+        </p:nvSpPr>
+        <p:spPr/>
+        <p:txBody>
+          <a:bodyPr/>
+          <a:lstStyle/>
+          <a:p/>
+        </p:txBody>
+      </p:sp>
+      <p:sp>
+        <p:nvSpPr>
+          <p:cNvPr id="3" name="Title 2"/>
+          <p:cNvSpPr>
+            <a:spLocks noGrp="1"/>
+          </p:cNvSpPr>
+          <p:nvPr>
+            <p:ph type="title"/>
+          </p:nvPr>
+        </p:nvSpPr>
+        <p:spPr/>
+        <p:txBody>
+          <a:bodyPr/>
+          <a:lstStyle/>
+          <a:p>
+            <a:pPr/>
+            <a:r>
+              <a:rPr sz="3200" b="0" i="0">
+                <a:latin typeface="Times New Roman"/>
+              </a:rPr>
+              <a:t>Contents</a:t>
+            </a:r>
+          </a:p>
+        </p:txBody>
+      </p:sp>
+      <p:sp>
+        <p:nvSpPr>
+          <p:cNvPr id="4" name="Rounded Rectangle 3"/>
+          <p:cNvSpPr/>
+          <p:nvPr/>
+        </p:nvSpPr>
+        <p:spPr>
+          <a:xfrm>
+            <a:off x="1280160" y="1280160"/>
+            <a:ext cx="6583680" cy="566928"/>
+          </a:xfrm>
+          <a:prstGeom prst="roundRect">
+            <a:avLst/>
+          </a:prstGeom>
+          <a:solidFill>
+            <a:srgbClr val="C05317"/>
+          </a:solidFill>
+          <a:ln>
+            <a:solidFill>
+              <a:srgbClr val="C05317"/>
+            </a:solidFill>
+          </a:ln>
+        </p:spPr>
+        <p:style>
+          <a:lnRef idx="1">
+            <a:schemeClr val="accent1"/>
+          </a:lnRef>
+          <a:fillRef idx="3">
+            <a:schemeClr val="accent1"/>
+          </a:fillRef>
+          <a:effectRef idx="2">
+            <a:schemeClr val="accent1"/>
+          </a:effectRef>
+          <a:fontRef idx="minor">
+            <a:schemeClr val="lt1"/>
+          </a:fontRef>
+        </p:style>
+        <p:txBody>
+          <a:bodyPr rtlCol="0" anchor="ctr"/>
+          <a:lstStyle/>
+          <a:p>
+            <a:r>
+              <a:rPr sz="2000" b="1">
+                <a:solidFill>
+                  <a:srgbClr val="FFFFFF"/>
+                </a:solidFill>
+                <a:latin typeface="Times New Roman"/>
+              </a:rPr>
+              <a:t>  I.    Introduction</a:t>
+            </a:r>
+          </a:p>
+        </p:txBody>
+      </p:sp>
+      <p:sp>
+        <p:nvSpPr>
+          <p:cNvPr id="5" name="Rounded Rectangle 4"/>
+          <p:cNvSpPr/>
+          <p:nvPr/>
+        </p:nvSpPr>
+        <p:spPr>
+          <a:xfrm>
+            <a:off x="1280160" y="2029967"/>
+            <a:ext cx="6583680" cy="566928"/>
+          </a:xfrm>
+          <a:prstGeom prst="roundRect">
+            <a:avLst/>
+          </a:prstGeom>
+          <a:solidFill>
+            <a:srgbClr val="C05317"/>
+          </a:solidFill>
+          <a:ln>
+            <a:solidFill>
+              <a:srgbClr val="C05317"/>
+            </a:solidFill>
+          </a:ln>
+        </p:spPr>
+        <p:style>
+          <a:lnRef idx="1">
+            <a:schemeClr val="accent1"/>
+          </a:lnRef>
+          <a:fillRef idx="3">
+            <a:schemeClr val="accent1"/>
+          </a:fillRef>
+          <a:effectRef idx="2">
+            <a:schemeClr val="accent1"/>
+          </a:effectRef>
+          <a:fontRef idx="minor">
+            <a:schemeClr val="lt1"/>
+          </a:fontRef>
+        </p:style>
+        <p:txBody>
+          <a:bodyPr rtlCol="0" anchor="ctr"/>
+          <a:lstStyle/>
+          <a:p>
+            <a:r>
+              <a:rPr sz="2000" b="1">
+                <a:solidFill>
+                  <a:srgbClr val="FFFFFF"/>
+                </a:solidFill>
+                <a:latin typeface="Times New Roman"/>
+              </a:rPr>
+              <a:t>  II.    Methodology</a:t>
+            </a:r>
+          </a:p>
+        </p:txBody>
+      </p:sp>
+      <p:sp>
+        <p:nvSpPr>
+          <p:cNvPr id="6" name="Rounded Rectangle 5"/>
+          <p:cNvSpPr/>
+          <p:nvPr/>
+        </p:nvSpPr>
+        <p:spPr>
+          <a:xfrm>
+            <a:off x="1280160" y="2779776"/>
+            <a:ext cx="6583680" cy="566928"/>
+          </a:xfrm>
+          <a:prstGeom prst="roundRect">
+            <a:avLst/>
+          </a:prstGeom>
+          <a:solidFill>
+            <a:srgbClr val="C05317"/>
+          </a:solidFill>
+          <a:ln>
+            <a:solidFill>
+              <a:srgbClr val="C05317"/>
+            </a:solidFill>
+          </a:ln>
+        </p:spPr>
+        <p:style>
+          <a:lnRef idx="1">
+            <a:schemeClr val="accent1"/>
+          </a:lnRef>
+          <a:fillRef idx="3">
+            <a:schemeClr val="accent1"/>
+          </a:fillRef>
+          <a:effectRef idx="2">
+            <a:schemeClr val="accent1"/>
+          </a:effectRef>
+          <a:fontRef idx="minor">
+            <a:schemeClr val="lt1"/>
+          </a:fontRef>
+        </p:style>
+        <p:txBody>
+          <a:bodyPr rtlCol="0" anchor="ctr"/>
+          <a:lstStyle/>
+          <a:p>
+            <a:r>
+              <a:rPr sz="2000" b="1">
+                <a:solidFill>
+                  <a:srgbClr val="FFFFFF"/>
+                </a:solidFill>
+                <a:latin typeface="Times New Roman"/>
+              </a:rPr>
+              <a:t>  III.    Results</a:t>
+            </a:r>
+          </a:p>
+        </p:txBody>
+      </p:sp>
+      <p:sp>
+        <p:nvSpPr>
+          <p:cNvPr id="7" name="Rounded Rectangle 6"/>
+          <p:cNvSpPr/>
+          <p:nvPr/>
+        </p:nvSpPr>
+        <p:spPr>
+          <a:xfrm>
+            <a:off x="1280160" y="3529584"/>
+            <a:ext cx="6583680" cy="566928"/>
+          </a:xfrm>
+          <a:prstGeom prst="roundRect">
+            <a:avLst/>
+          </a:prstGeom>
+          <a:solidFill>
+            <a:srgbClr val="C05317"/>
+          </a:solidFill>
+          <a:ln>
+            <a:solidFill>
+              <a:srgbClr val="C05317"/>
+            </a:solidFill>
+          </a:ln>
+        </p:spPr>
+        <p:style>
+          <a:lnRef idx="1">
+            <a:schemeClr val="accent1"/>
+          </a:lnRef>
+          <a:fillRef idx="3">
+            <a:schemeClr val="accent1"/>
+          </a:fillRef>
+          <a:effectRef idx="2">
+            <a:schemeClr val="accent1"/>
+          </a:effectRef>
+          <a:fontRef idx="minor">
+            <a:schemeClr val="lt1"/>
+          </a:fontRef>
+        </p:style>
+        <p:txBody>
+          <a:bodyPr rtlCol="0" anchor="ctr"/>
+          <a:lstStyle/>
+          <a:p>
+            <a:r>
+              <a:rPr sz="2000" b="1">
+                <a:solidFill>
+                  <a:srgbClr val="FFFFFF"/>
+                </a:solidFill>
+                <a:latin typeface="Times New Roman"/>
+              </a:rPr>
+              <a:t>  IV.    Application</a:t>
+            </a:r>
+          </a:p>
+        </p:txBody>
+      </p:sp>
+    </p:spTree>
+  </p:cSld>
+  <p:clrMapOvr>
+    <a:masterClrMapping/>
+  </p:clrMapOvr>
+</p:sld>
+</file>
+
+<file path=ppt/slides/slide20.xml><?xml version="1.0" encoding="utf-8"?>
 <p:sld xmlns:a="http://schemas.openxmlformats.org/drawingml/2006/main" xmlns:p="http://schemas.openxmlformats.org/presentationml/2006/main" xmlns:r="http://schemas.openxmlformats.org/officeDocument/2006/relationships">
   <p:cSld>
     <p:spTree>
@@ -9238,279 +10029,7 @@
 </p:sld>
 </file>
 
-<file path=ppt/slides/slide2.xml><?xml version="1.0" encoding="utf-8"?>
-<p:sld xmlns:a="http://schemas.openxmlformats.org/drawingml/2006/main" xmlns:p="http://schemas.openxmlformats.org/presentationml/2006/main" xmlns:r="http://schemas.openxmlformats.org/officeDocument/2006/relationships">
-  <p:cSld>
-    <p:spTree>
-      <p:nvGrpSpPr>
-        <p:cNvPr id="1" name=""/>
-        <p:cNvGrpSpPr/>
-        <p:nvPr/>
-      </p:nvGrpSpPr>
-      <p:grpSpPr/>
-      <p:sp>
-        <p:nvSpPr>
-          <p:cNvPr id="2" name="Content Placeholder 1"/>
-          <p:cNvSpPr>
-            <a:spLocks noGrp="1"/>
-          </p:cNvSpPr>
-          <p:nvPr>
-            <p:ph idx="1"/>
-          </p:nvPr>
-        </p:nvSpPr>
-        <p:spPr/>
-        <p:txBody>
-          <a:bodyPr/>
-          <a:lstStyle/>
-          <a:p/>
-        </p:txBody>
-      </p:sp>
-      <p:sp>
-        <p:nvSpPr>
-          <p:cNvPr id="3" name="Title 2"/>
-          <p:cNvSpPr>
-            <a:spLocks noGrp="1"/>
-          </p:cNvSpPr>
-          <p:nvPr>
-            <p:ph type="title"/>
-          </p:nvPr>
-        </p:nvSpPr>
-        <p:spPr/>
-        <p:txBody>
-          <a:bodyPr/>
-          <a:lstStyle/>
-          <a:p>
-            <a:pPr/>
-            <a:r>
-              <a:rPr sz="3200" b="0" i="0">
-                <a:latin typeface="Times New Roman"/>
-              </a:rPr>
-              <a:t>Contents</a:t>
-            </a:r>
-          </a:p>
-        </p:txBody>
-      </p:sp>
-      <p:sp>
-        <p:nvSpPr>
-          <p:cNvPr id="4" name="Rounded Rectangle 3"/>
-          <p:cNvSpPr/>
-          <p:nvPr/>
-        </p:nvSpPr>
-        <p:spPr>
-          <a:xfrm>
-            <a:off x="1280160" y="1280160"/>
-            <a:ext cx="6583680" cy="566928"/>
-          </a:xfrm>
-          <a:prstGeom prst="roundRect">
-            <a:avLst/>
-          </a:prstGeom>
-          <a:solidFill>
-            <a:srgbClr val="C05317"/>
-          </a:solidFill>
-          <a:ln>
-            <a:solidFill>
-              <a:srgbClr val="C05317"/>
-            </a:solidFill>
-          </a:ln>
-        </p:spPr>
-        <p:style>
-          <a:lnRef idx="1">
-            <a:schemeClr val="accent1"/>
-          </a:lnRef>
-          <a:fillRef idx="3">
-            <a:schemeClr val="accent1"/>
-          </a:fillRef>
-          <a:effectRef idx="2">
-            <a:schemeClr val="accent1"/>
-          </a:effectRef>
-          <a:fontRef idx="minor">
-            <a:schemeClr val="lt1"/>
-          </a:fontRef>
-        </p:style>
-        <p:txBody>
-          <a:bodyPr rtlCol="0" anchor="ctr"/>
-          <a:lstStyle/>
-          <a:p>
-            <a:r>
-              <a:rPr sz="2000" b="1">
-                <a:solidFill>
-                  <a:srgbClr val="FFFFFF"/>
-                </a:solidFill>
-                <a:latin typeface="Times New Roman"/>
-              </a:rPr>
-              <a:t>  I.    Introduction</a:t>
-            </a:r>
-          </a:p>
-        </p:txBody>
-      </p:sp>
-      <p:sp>
-        <p:nvSpPr>
-          <p:cNvPr id="5" name="Rounded Rectangle 4"/>
-          <p:cNvSpPr/>
-          <p:nvPr/>
-        </p:nvSpPr>
-        <p:spPr>
-          <a:xfrm>
-            <a:off x="1280160" y="2029967"/>
-            <a:ext cx="6583680" cy="566928"/>
-          </a:xfrm>
-          <a:prstGeom prst="roundRect">
-            <a:avLst/>
-          </a:prstGeom>
-          <a:solidFill>
-            <a:srgbClr val="C05317"/>
-          </a:solidFill>
-          <a:ln>
-            <a:solidFill>
-              <a:srgbClr val="C05317"/>
-            </a:solidFill>
-          </a:ln>
-        </p:spPr>
-        <p:style>
-          <a:lnRef idx="1">
-            <a:schemeClr val="accent1"/>
-          </a:lnRef>
-          <a:fillRef idx="3">
-            <a:schemeClr val="accent1"/>
-          </a:fillRef>
-          <a:effectRef idx="2">
-            <a:schemeClr val="accent1"/>
-          </a:effectRef>
-          <a:fontRef idx="minor">
-            <a:schemeClr val="lt1"/>
-          </a:fontRef>
-        </p:style>
-        <p:txBody>
-          <a:bodyPr rtlCol="0" anchor="ctr"/>
-          <a:lstStyle/>
-          <a:p>
-            <a:r>
-              <a:rPr sz="2000" b="1">
-                <a:solidFill>
-                  <a:srgbClr val="FFFFFF"/>
-                </a:solidFill>
-                <a:latin typeface="Times New Roman"/>
-              </a:rPr>
-              <a:t>  II.    Methodology</a:t>
-            </a:r>
-          </a:p>
-        </p:txBody>
-      </p:sp>
-      <p:sp>
-        <p:nvSpPr>
-          <p:cNvPr id="6" name="Rounded Rectangle 5"/>
-          <p:cNvSpPr/>
-          <p:nvPr/>
-        </p:nvSpPr>
-        <p:spPr>
-          <a:xfrm>
-            <a:off x="1280160" y="2779776"/>
-            <a:ext cx="6583680" cy="566928"/>
-          </a:xfrm>
-          <a:prstGeom prst="roundRect">
-            <a:avLst/>
-          </a:prstGeom>
-          <a:solidFill>
-            <a:srgbClr val="C05317"/>
-          </a:solidFill>
-          <a:ln>
-            <a:solidFill>
-              <a:srgbClr val="C05317"/>
-            </a:solidFill>
-          </a:ln>
-        </p:spPr>
-        <p:style>
-          <a:lnRef idx="1">
-            <a:schemeClr val="accent1"/>
-          </a:lnRef>
-          <a:fillRef idx="3">
-            <a:schemeClr val="accent1"/>
-          </a:fillRef>
-          <a:effectRef idx="2">
-            <a:schemeClr val="accent1"/>
-          </a:effectRef>
-          <a:fontRef idx="minor">
-            <a:schemeClr val="lt1"/>
-          </a:fontRef>
-        </p:style>
-        <p:txBody>
-          <a:bodyPr rtlCol="0" anchor="ctr"/>
-          <a:lstStyle/>
-          <a:p>
-            <a:r>
-              <a:rPr sz="2000" b="1">
-                <a:solidFill>
-                  <a:srgbClr val="FFFFFF"/>
-                </a:solidFill>
-                <a:latin typeface="Times New Roman"/>
-              </a:rPr>
-              <a:t>  III.    Results</a:t>
-            </a:r>
-          </a:p>
-        </p:txBody>
-      </p:sp>
-      <p:sp>
-        <p:nvSpPr>
-          <p:cNvPr id="7" name="Rounded Rectangle 6"/>
-          <p:cNvSpPr/>
-          <p:nvPr/>
-        </p:nvSpPr>
-        <p:spPr>
-          <a:xfrm>
-            <a:off x="1280160" y="3529584"/>
-            <a:ext cx="6583680" cy="566928"/>
-          </a:xfrm>
-          <a:prstGeom prst="roundRect">
-            <a:avLst/>
-          </a:prstGeom>
-          <a:solidFill>
-            <a:srgbClr val="C05317"/>
-          </a:solidFill>
-          <a:ln>
-            <a:solidFill>
-              <a:srgbClr val="C05317"/>
-            </a:solidFill>
-          </a:ln>
-        </p:spPr>
-        <p:style>
-          <a:lnRef idx="1">
-            <a:schemeClr val="accent1"/>
-          </a:lnRef>
-          <a:fillRef idx="3">
-            <a:schemeClr val="accent1"/>
-          </a:fillRef>
-          <a:effectRef idx="2">
-            <a:schemeClr val="accent1"/>
-          </a:effectRef>
-          <a:fontRef idx="minor">
-            <a:schemeClr val="lt1"/>
-          </a:fontRef>
-        </p:style>
-        <p:txBody>
-          <a:bodyPr rtlCol="0" anchor="ctr"/>
-          <a:lstStyle/>
-          <a:p>
-            <a:r>
-              <a:rPr sz="2000" b="1">
-                <a:solidFill>
-                  <a:srgbClr val="FFFFFF"/>
-                </a:solidFill>
-                <a:latin typeface="Times New Roman"/>
-              </a:rPr>
-              <a:t>  IV.    Application</a:t>
-            </a:r>
-          </a:p>
-        </p:txBody>
-      </p:sp>
-    </p:spTree>
-  </p:cSld>
-  <p:clrMapOvr>
-    <a:masterClrMapping/>
-  </p:clrMapOvr>
-</p:sld>
-</file>
-
-<file path=ppt/slides/slide20.xml><?xml version="1.0" encoding="utf-8"?>
+<file path=ppt/slides/slide21.xml><?xml version="1.0" encoding="utf-8"?>
 <p:sld xmlns:a="http://schemas.openxmlformats.org/drawingml/2006/main" xmlns:p="http://schemas.openxmlformats.org/presentationml/2006/main" xmlns:r="http://schemas.openxmlformats.org/officeDocument/2006/relationships">
   <p:cSld>
     <p:spTree>
@@ -9983,7 +10502,7 @@
 </p:sld>
 </file>
 
-<file path=ppt/slides/slide21.xml><?xml version="1.0" encoding="utf-8"?>
+<file path=ppt/slides/slide22.xml><?xml version="1.0" encoding="utf-8"?>
 <p:sld xmlns:a="http://schemas.openxmlformats.org/drawingml/2006/main" xmlns:p="http://schemas.openxmlformats.org/presentationml/2006/main" xmlns:r="http://schemas.openxmlformats.org/officeDocument/2006/relationships">
   <p:cSld>
     <p:spTree>
@@ -10609,7 +11128,7 @@
 </p:sld>
 </file>
 
-<file path=ppt/slides/slide22.xml><?xml version="1.0" encoding="utf-8"?>
+<file path=ppt/slides/slide23.xml><?xml version="1.0" encoding="utf-8"?>
 <p:sld xmlns:a="http://schemas.openxmlformats.org/drawingml/2006/main" xmlns:p="http://schemas.openxmlformats.org/presentationml/2006/main" xmlns:r="http://schemas.openxmlformats.org/officeDocument/2006/relationships">
   <p:cSld>
     <p:spTree>
@@ -10819,46 +11338,46 @@
           <a:lstStyle/>
           <a:p>
             <a:r>
-              <a:rPr sz="1100" b="0" i="0">
-                <a:solidFill>
-                  <a:srgbClr val="333333"/>
-                </a:solidFill>
-                <a:latin typeface="Times New Roman"/>
-              </a:rPr>
-              <a:t>▪ ETKF → LETKF: 각 grid 점 update 시 local observation만 사용 (Gaspari-Cohn taper),</a:t>
-            </a:r>
-          </a:p>
-          <a:p>
-            <a:r>
-              <a:rPr sz="1100" b="0" i="0">
-                <a:solidFill>
-                  <a:srgbClr val="333333"/>
-                </a:solidFill>
-                <a:latin typeface="Times New Roman"/>
-              </a:rPr>
-              <a:t>   spurious long-range correlation 억제. 단점: r_loc 작으면 amplitude 과소 (VR ↓)</a:t>
-            </a:r>
-          </a:p>
-          <a:p>
-            <a:r>
-              <a:rPr sz="1100" b="0" i="0">
-                <a:solidFill>
-                  <a:srgbClr val="333333"/>
-                </a:solidFill>
-                <a:latin typeface="Times New Roman"/>
-              </a:rPr>
-              <a:t>▪ GPR-1 → GPR-disp: 커널 K(x,t; x',t') = K_spatial × K_dispersion 조합;</a:t>
-            </a:r>
-          </a:p>
-          <a:p>
-            <a:r>
-              <a:rPr sz="1100" b="0" i="0">
-                <a:solidFill>
-                  <a:srgbClr val="333333"/>
-                </a:solidFill>
-                <a:latin typeface="Times New Roman"/>
-              </a:rPr>
-              <a:t>   K_dispersion은 dispersion relation으로 시간상 phase 보정. 단점: kernel 계산 비용 ↑</a:t>
+              <a:rPr sz="1100" b="0">
+                <a:solidFill>
+                  <a:srgbClr val="333333"/>
+                </a:solidFill>
+                <a:latin typeface="Times New Roman"/>
+              </a:rPr>
+              <a:t>▪ ETKF → LETKF: 각 grid 점 update 시 local 관측만 사용 (Gaspari-Cohn taper)</a:t>
+            </a:r>
+          </a:p>
+          <a:p>
+            <a:r>
+              <a:rPr sz="1100" b="0">
+                <a:solidFill>
+                  <a:srgbClr val="333333"/>
+                </a:solidFill>
+                <a:latin typeface="Times New Roman"/>
+              </a:rPr>
+              <a:t>   → spurious long-range correlation 억제 / 단점: r_loc ↓시 amplitude 과소 (VR ↓)</a:t>
+            </a:r>
+          </a:p>
+          <a:p>
+            <a:r>
+              <a:rPr sz="1100" b="0">
+                <a:solidFill>
+                  <a:srgbClr val="333333"/>
+                </a:solidFill>
+                <a:latin typeface="Times New Roman"/>
+              </a:rPr>
+              <a:t>▪ GPR-1 → GPR-disp: 커널 K = K_spatial × K_dispersion 조합으로 시간 phase 보정</a:t>
+            </a:r>
+          </a:p>
+          <a:p>
+            <a:r>
+              <a:rPr sz="1100" b="0">
+                <a:solidFill>
+                  <a:srgbClr val="333333"/>
+                </a:solidFill>
+                <a:latin typeface="Times New Roman"/>
+              </a:rPr>
+              <a:t>   → physics-aware GPR로 "공정한" 비교 / 단점: 커널 계산 비용 ↑ (~36× 느림)</a:t>
             </a:r>
           </a:p>
         </p:txBody>
@@ -11447,7 +11966,7 @@
 </p:sld>
 </file>
 
-<file path=ppt/slides/slide23.xml><?xml version="1.0" encoding="utf-8"?>
+<file path=ppt/slides/slide24.xml><?xml version="1.0" encoding="utf-8"?>
 <p:sld xmlns:a="http://schemas.openxmlformats.org/drawingml/2006/main" xmlns:p="http://schemas.openxmlformats.org/presentationml/2006/main" xmlns:r="http://schemas.openxmlformats.org/officeDocument/2006/relationships">
   <p:cSld>
     <p:spTree>
@@ -11779,6 +12298,96 @@
           </a:p>
         </p:txBody>
       </p:sp>
+      <p:sp>
+        <p:nvSpPr>
+          <p:cNvPr id="9" name="TextBox 8"/>
+          <p:cNvSpPr txBox="1"/>
+          <p:nvPr/>
+        </p:nvSpPr>
+        <p:spPr>
+          <a:xfrm>
+            <a:off x="365760" y="2331720"/>
+            <a:ext cx="8229600" cy="274320"/>
+          </a:xfrm>
+          <a:prstGeom prst="rect">
+            <a:avLst/>
+          </a:prstGeom>
+          <a:noFill/>
+        </p:spPr>
+        <p:txBody>
+          <a:bodyPr wrap="none">
+            <a:spAutoFit/>
+          </a:bodyPr>
+          <a:lstStyle/>
+          <a:p>
+            <a:r>
+              <a:rPr sz="1200" b="1">
+                <a:solidFill>
+                  <a:srgbClr val="C05317"/>
+                </a:solidFill>
+                <a:latin typeface="Times New Roman"/>
+              </a:rPr>
+              <a:t>비유 — 자동차 active suspension의 해양 버전</a:t>
+            </a:r>
+          </a:p>
+        </p:txBody>
+      </p:sp>
+      <p:sp>
+        <p:nvSpPr>
+          <p:cNvPr id="10" name="TextBox 9"/>
+          <p:cNvSpPr txBox="1"/>
+          <p:nvPr/>
+        </p:nvSpPr>
+        <p:spPr>
+          <a:xfrm>
+            <a:off x="365760" y="2651760"/>
+            <a:ext cx="8229600" cy="777240"/>
+          </a:xfrm>
+          <a:prstGeom prst="rect">
+            <a:avLst/>
+          </a:prstGeom>
+          <a:noFill/>
+        </p:spPr>
+        <p:txBody>
+          <a:bodyPr wrap="square">
+            <a:spAutoFit/>
+          </a:bodyPr>
+          <a:lstStyle/>
+          <a:p>
+            <a:r>
+              <a:rPr sz="1100" b="0" i="0">
+                <a:solidFill>
+                  <a:srgbClr val="333333"/>
+                </a:solidFill>
+                <a:latin typeface="Times New Roman"/>
+              </a:rPr>
+              <a:t>▪ 자동차: 전방 카메라 → 노면 검지 → 서스펜션 미리 조절 → 충격 감소</a:t>
+            </a:r>
+          </a:p>
+          <a:p>
+            <a:r>
+              <a:rPr sz="1100" b="0" i="0">
+                <a:solidFill>
+                  <a:srgbClr val="333333"/>
+                </a:solidFill>
+                <a:latin typeface="Times New Roman"/>
+              </a:rPr>
+              <a:t>▪ 하이드로포일: 전방 LiDAR → WaveSplat → preview 시점 wave 기울기 → foil 받음각 조정</a:t>
+            </a:r>
+          </a:p>
+          <a:p>
+            <a:r>
+              <a:rPr sz="1100" b="0" i="0">
+                <a:solidFill>
+                  <a:srgbClr val="333333"/>
+                </a:solidFill>
+                <a:latin typeface="Times New Roman"/>
+              </a:rPr>
+              <a:t>▪ 차이: 도로보다 파도가 시간으로 변하므로 dispersion 외삽이 추가로 필요 (WaveSplat 기여)</a:t>
+            </a:r>
+          </a:p>
+        </p:txBody>
+      </p:sp>
     </p:spTree>
   </p:cSld>
   <p:clrMapOvr>
@@ -11787,7 +12396,7 @@
 </p:sld>
 </file>
 
-<file path=ppt/slides/slide24.xml><?xml version="1.0" encoding="utf-8"?>
+<file path=ppt/slides/slide25.xml><?xml version="1.0" encoding="utf-8"?>
 <p:sld xmlns:a="http://schemas.openxmlformats.org/drawingml/2006/main" xmlns:p="http://schemas.openxmlformats.org/presentationml/2006/main" xmlns:r="http://schemas.openxmlformats.org/officeDocument/2006/relationships">
   <p:cSld>
     <p:spTree>
@@ -12040,7 +12649,7 @@
 </p:sld>
 </file>
 
-<file path=ppt/slides/slide25.xml><?xml version="1.0" encoding="utf-8"?>
+<file path=ppt/slides/slide26.xml><?xml version="1.0" encoding="utf-8"?>
 <p:sld xmlns:a="http://schemas.openxmlformats.org/drawingml/2006/main" xmlns:p="http://schemas.openxmlformats.org/presentationml/2006/main" xmlns:r="http://schemas.openxmlformats.org/officeDocument/2006/relationships">
   <p:cSld>
     <p:spTree>
@@ -12986,7 +13595,7 @@
 </p:sld>
 </file>
 
-<file path=ppt/slides/slide26.xml><?xml version="1.0" encoding="utf-8"?>
+<file path=ppt/slides/slide27.xml><?xml version="1.0" encoding="utf-8"?>
 <p:sld xmlns:a="http://schemas.openxmlformats.org/drawingml/2006/main" xmlns:p="http://schemas.openxmlformats.org/presentationml/2006/main" xmlns:r="http://schemas.openxmlformats.org/officeDocument/2006/relationships">
   <p:cSld>
     <p:spTree>
@@ -13428,7 +14037,7 @@
 </p:sld>
 </file>
 
-<file path=ppt/slides/slide27.xml><?xml version="1.0" encoding="utf-8"?>
+<file path=ppt/slides/slide28.xml><?xml version="1.0" encoding="utf-8"?>
 <p:sld xmlns:a="http://schemas.openxmlformats.org/drawingml/2006/main" xmlns:p="http://schemas.openxmlformats.org/presentationml/2006/main" xmlns:r="http://schemas.openxmlformats.org/officeDocument/2006/relationships">
   <p:cSld>
     <p:spTree>
@@ -14049,7 +14658,7 @@
 </p:sld>
 </file>
 
-<file path=ppt/slides/slide28.xml><?xml version="1.0" encoding="utf-8"?>
+<file path=ppt/slides/slide29.xml><?xml version="1.0" encoding="utf-8"?>
 <p:sld xmlns:a="http://schemas.openxmlformats.org/drawingml/2006/main" xmlns:p="http://schemas.openxmlformats.org/presentationml/2006/main" xmlns:r="http://schemas.openxmlformats.org/officeDocument/2006/relationships">
   <p:cSld>
     <p:spTree>
@@ -14595,388 +15204,6 @@
                 <a:latin typeface="Times New Roman"/>
               </a:rPr>
               <a:t>WaveSplat: nRMSE 30.1%↓, ~10× faster, SS only+   |   Hydrofoil: aRMS 11~41%↓, BF3 E2E 92~96%</a:t>
-            </a:r>
-          </a:p>
-        </p:txBody>
-      </p:sp>
-    </p:spTree>
-  </p:cSld>
-  <p:clrMapOvr>
-    <a:masterClrMapping/>
-  </p:clrMapOvr>
-</p:sld>
-</file>
-
-<file path=ppt/slides/slide29.xml><?xml version="1.0" encoding="utf-8"?>
-<p:sld xmlns:a="http://schemas.openxmlformats.org/drawingml/2006/main" xmlns:p="http://schemas.openxmlformats.org/presentationml/2006/main" xmlns:r="http://schemas.openxmlformats.org/officeDocument/2006/relationships">
-  <p:cSld>
-    <p:spTree>
-      <p:nvGrpSpPr>
-        <p:cNvPr id="1" name=""/>
-        <p:cNvGrpSpPr/>
-        <p:nvPr/>
-      </p:nvGrpSpPr>
-      <p:grpSpPr/>
-      <p:sp>
-        <p:nvSpPr>
-          <p:cNvPr id="2" name="Content Placeholder 1"/>
-          <p:cNvSpPr>
-            <a:spLocks noGrp="1"/>
-          </p:cNvSpPr>
-          <p:nvPr>
-            <p:ph idx="1"/>
-          </p:nvPr>
-        </p:nvSpPr>
-        <p:spPr/>
-        <p:txBody>
-          <a:bodyPr/>
-          <a:lstStyle/>
-          <a:p/>
-        </p:txBody>
-      </p:sp>
-      <p:sp>
-        <p:nvSpPr>
-          <p:cNvPr id="3" name="Title 2"/>
-          <p:cNvSpPr>
-            <a:spLocks noGrp="1"/>
-          </p:cNvSpPr>
-          <p:nvPr>
-            <p:ph type="title"/>
-          </p:nvPr>
-        </p:nvSpPr>
-        <p:spPr/>
-        <p:txBody>
-          <a:bodyPr/>
-          <a:lstStyle/>
-          <a:p>
-            <a:pPr/>
-            <a:r>
-              <a:rPr sz="2200" b="0" i="0">
-                <a:latin typeface="Times New Roman"/>
-              </a:rPr>
-              <a:t>References — 검증된 인용</a:t>
-            </a:r>
-          </a:p>
-        </p:txBody>
-      </p:sp>
-      <p:sp>
-        <p:nvSpPr>
-          <p:cNvPr id="4" name="TextBox 3"/>
-          <p:cNvSpPr txBox="1"/>
-          <p:nvPr/>
-        </p:nvSpPr>
-        <p:spPr>
-          <a:xfrm>
-            <a:off x="365760" y="868680"/>
-            <a:ext cx="8229600" cy="274320"/>
-          </a:xfrm>
-          <a:prstGeom prst="rect">
-            <a:avLst/>
-          </a:prstGeom>
-          <a:noFill/>
-        </p:spPr>
-        <p:txBody>
-          <a:bodyPr wrap="none">
-            <a:spAutoFit/>
-          </a:bodyPr>
-          <a:lstStyle/>
-          <a:p>
-            <a:r>
-              <a:rPr sz="1200" b="1">
-                <a:solidFill>
-                  <a:srgbClr val="C05317"/>
-                </a:solidFill>
-                <a:latin typeface="Times New Roman"/>
-              </a:rPr>
-              <a:t>주요 참고문헌 (CrossRef DOI 검증 완료)</a:t>
-            </a:r>
-          </a:p>
-        </p:txBody>
-      </p:sp>
-      <p:sp>
-        <p:nvSpPr>
-          <p:cNvPr id="5" name="TextBox 4"/>
-          <p:cNvSpPr txBox="1"/>
-          <p:nvPr/>
-        </p:nvSpPr>
-        <p:spPr>
-          <a:xfrm>
-            <a:off x="365760" y="1188720"/>
-            <a:ext cx="8229600" cy="4846320"/>
-          </a:xfrm>
-          <a:prstGeom prst="rect">
-            <a:avLst/>
-          </a:prstGeom>
-          <a:noFill/>
-        </p:spPr>
-        <p:txBody>
-          <a:bodyPr wrap="square">
-            <a:spAutoFit/>
-          </a:bodyPr>
-          <a:lstStyle/>
-          <a:p>
-            <a:r>
-              <a:rPr sz="900" b="0" i="0">
-                <a:solidFill>
-                  <a:srgbClr val="333333"/>
-                </a:solidFill>
-                <a:latin typeface="Times New Roman"/>
-              </a:rPr>
-              <a:t>[1] Kerbl, B., Kopanas, G., Leimkühler, T., Drettakis, G. (2023). "3D Gaussian Splatting for Real-Time Radiance Field</a:t>
-            </a:r>
-          </a:p>
-          <a:p>
-            <a:r>
-              <a:rPr sz="900" b="0" i="0">
-                <a:solidFill>
-                  <a:srgbClr val="333333"/>
-                </a:solidFill>
-                <a:latin typeface="Times New Roman"/>
-              </a:rPr>
-              <a:t>       Rendering." ACM TOG 42(4). DOI: 10.1145/3592433</a:t>
-            </a:r>
-          </a:p>
-          <a:p>
-            <a:r>
-              <a:rPr sz="900" b="0" i="0">
-                <a:solidFill>
-                  <a:srgbClr val="333333"/>
-                </a:solidFill>
-                <a:latin typeface="Times New Roman"/>
-              </a:rPr>
-              <a:t>[2] Desmars, N., Bonnefoy, F., Grilli, S.T., Ducrozet, G., Perignon, Y., Guérin, C.-A., Ferrant, P. (2020). "Experimental</a:t>
-            </a:r>
-          </a:p>
-          <a:p>
-            <a:r>
-              <a:rPr sz="900" b="0" i="0">
-                <a:solidFill>
-                  <a:srgbClr val="333333"/>
-                </a:solidFill>
-                <a:latin typeface="Times New Roman"/>
-              </a:rPr>
-              <a:t>       and numerical assessment of deterministic nonlinear ocean waves prediction algorithms using non-uniformly</a:t>
-            </a:r>
-          </a:p>
-          <a:p>
-            <a:r>
-              <a:rPr sz="900" b="0" i="0">
-                <a:solidFill>
-                  <a:srgbClr val="333333"/>
-                </a:solidFill>
-                <a:latin typeface="Times New Roman"/>
-              </a:rPr>
-              <a:t>       sampled wave gauges." Ocean Engineering 212, 107659. DOI: 10.1016/j.oceaneng.2020.107659</a:t>
-            </a:r>
-          </a:p>
-          <a:p>
-            <a:r>
-              <a:rPr sz="900" b="0" i="0">
-                <a:solidFill>
-                  <a:srgbClr val="333333"/>
-                </a:solidFill>
-                <a:latin typeface="Times New Roman"/>
-              </a:rPr>
-              <a:t>[3] Desmars, N., Hartmann, M., Behrendt, J., Hoffmann, N., Klein, M. (2023). "Nonlinear deterministic reconstruction</a:t>
-            </a:r>
-          </a:p>
-          <a:p>
-            <a:r>
-              <a:rPr sz="900" b="0" i="0">
-                <a:solidFill>
-                  <a:srgbClr val="333333"/>
-                </a:solidFill>
-                <a:latin typeface="Times New Roman"/>
-              </a:rPr>
-              <a:t>       and prediction of remotely measured ocean surface waves." J. Fluid Mech. 975, A8. DOI: 10.1017/jfm.2023.841</a:t>
-            </a:r>
-          </a:p>
-          <a:p>
-            <a:r>
-              <a:rPr sz="900" b="0" i="0">
-                <a:solidFill>
-                  <a:srgbClr val="333333"/>
-                </a:solidFill>
-                <a:latin typeface="Times New Roman"/>
-              </a:rPr>
-              <a:t>[4] Hunt, B.R., Kostelich, E.J., Szunyogh, I. (2007). "Efficient data assimilation for spatiotemporal chaos: A local</a:t>
-            </a:r>
-          </a:p>
-          <a:p>
-            <a:r>
-              <a:rPr sz="900" b="0" i="0">
-                <a:solidFill>
-                  <a:srgbClr val="333333"/>
-                </a:solidFill>
-                <a:latin typeface="Times New Roman"/>
-              </a:rPr>
-              <a:t>       ensemble transform Kalman filter." Physica D 230(1-2), 112-126. DOI: 10.1016/j.physd.2006.11.008</a:t>
-            </a:r>
-          </a:p>
-          <a:p>
-            <a:r>
-              <a:rPr sz="900" b="0" i="0">
-                <a:solidFill>
-                  <a:srgbClr val="333333"/>
-                </a:solidFill>
-                <a:latin typeface="Times New Roman"/>
-              </a:rPr>
-              <a:t>[5] Ehlers, S., Klein, M., Heinlein, A., Wedler, M., Desmars, N., Hoffmann, N., Stender, M. (2023). "Machine learning</a:t>
-            </a:r>
-          </a:p>
-          <a:p>
-            <a:r>
-              <a:rPr sz="900" b="0" i="0">
-                <a:solidFill>
-                  <a:srgbClr val="333333"/>
-                </a:solidFill>
-                <a:latin typeface="Times New Roman"/>
-              </a:rPr>
-              <a:t>       for phase-resolved reconstruction of nonlinear ocean wave surface elevations from sparse remote sensing data."</a:t>
-            </a:r>
-          </a:p>
-          <a:p>
-            <a:r>
-              <a:rPr sz="900" b="0" i="0">
-                <a:solidFill>
-                  <a:srgbClr val="333333"/>
-                </a:solidFill>
-                <a:latin typeface="Times New Roman"/>
-              </a:rPr>
-              <a:t>       Ocean Engineering 288, 116059. DOI: 10.1016/j.oceaneng.2023.116059</a:t>
-            </a:r>
-          </a:p>
-          <a:p>
-            <a:r>
-              <a:rPr sz="900" b="0" i="0">
-                <a:solidFill>
-                  <a:srgbClr val="333333"/>
-                </a:solidFill>
-                <a:latin typeface="Times New Roman"/>
-              </a:rPr>
-              <a:t>[6] Hwang, P.A., Krabill, W.B., Wright, W., Swift, R.N., Walsh, E.J. (2000). "Airborne Scanning Lidar Measurement of</a:t>
-            </a:r>
-          </a:p>
-          <a:p>
-            <a:r>
-              <a:rPr sz="900" b="0" i="0">
-                <a:solidFill>
-                  <a:srgbClr val="333333"/>
-                </a:solidFill>
-                <a:latin typeface="Times New Roman"/>
-              </a:rPr>
-              <a:t>       Ocean Waves." Remote Sensing of Environment 73(2), 236-246. DOI: 10.1016/S0034-4257(00)00098-5</a:t>
-            </a:r>
-          </a:p>
-          <a:p>
-            <a:r>
-              <a:rPr sz="900" b="0" i="0">
-                <a:solidFill>
-                  <a:srgbClr val="333333"/>
-                </a:solidFill>
-                <a:latin typeface="Times New Roman"/>
-              </a:rPr>
-              <a:t>[7] Belmont, M.R., Horwood, J.M.K., Thurley, R.W.F., Baker, J. (2008). "Shallow Angle Wave Profiling LIDAR." IEEE/OES</a:t>
-            </a:r>
-          </a:p>
-          <a:p>
-            <a:r>
-              <a:rPr sz="900" b="0" i="0">
-                <a:solidFill>
-                  <a:srgbClr val="333333"/>
-                </a:solidFill>
-                <a:latin typeface="Times New Roman"/>
-              </a:rPr>
-              <a:t>       9th Working Conference on Current Measurement Technology, 217-223. DOI: 10.1109/CCM.2008.4480871</a:t>
-            </a:r>
-          </a:p>
-          <a:p>
-            <a:r>
-              <a:rPr sz="900" b="0" i="0">
-                <a:solidFill>
-                  <a:srgbClr val="333333"/>
-                </a:solidFill>
-                <a:latin typeface="Times New Roman"/>
-              </a:rPr>
-              <a:t>[8] Wilcoxon, F. (1945). "Individual Comparisons by Ranking Methods." Biometrics Bulletin 1(6), 80. DOI: 10.2307/3001968</a:t>
-            </a:r>
-          </a:p>
-          <a:p>
-            <a:r>
-              <a:rPr sz="900" b="0" i="0">
-                <a:solidFill>
-                  <a:srgbClr val="333333"/>
-                </a:solidFill>
-                <a:latin typeface="Times New Roman"/>
-              </a:rPr>
-              <a:t>[9] Cohen, J. (1988). Statistical Power Analysis for the Behavioral Sciences (2nd ed.). Lawrence Erlbaum Associates.</a:t>
-            </a:r>
-          </a:p>
-          <a:p>
-            <a:r>
-              <a:rPr sz="900" b="0" i="0">
-                <a:solidFill>
-                  <a:srgbClr val="333333"/>
-                </a:solidFill>
-                <a:latin typeface="Times New Roman"/>
-              </a:rPr>
-              <a:t>[10] Holthuijsen, L.H. (2007). Waves in Oceanic and Coastal Waters. Cambridge University Press.</a:t>
-            </a:r>
-          </a:p>
-          <a:p>
-            <a:r>
-              <a:rPr sz="900" b="0" i="0">
-                <a:solidFill>
-                  <a:srgbClr val="333333"/>
-                </a:solidFill>
-                <a:latin typeface="Times New Roman"/>
-              </a:rPr>
-              <a:t>[11] Faltinsen, O.M. (2005). Hydrodynamics of High-Speed Marine Vehicles. Cambridge University Press.</a:t>
-            </a:r>
-          </a:p>
-          <a:p>
-            <a:r>
-              <a:rPr sz="900" b="0" i="0">
-                <a:solidFill>
-                  <a:srgbClr val="333333"/>
-                </a:solidFill>
-                <a:latin typeface="Times New Roman"/>
-              </a:rPr>
-              <a:t>[12] Born, M., Wolf, E. (1999). Principles of Optics (7th ed.). Cambridge University Press. (Fresnel R(θ))</a:t>
-            </a:r>
-          </a:p>
-        </p:txBody>
-      </p:sp>
-      <p:sp>
-        <p:nvSpPr>
-          <p:cNvPr id="6" name="TextBox 5"/>
-          <p:cNvSpPr txBox="1"/>
-          <p:nvPr/>
-        </p:nvSpPr>
-        <p:spPr>
-          <a:xfrm>
-            <a:off x="365760" y="6263640"/>
-            <a:ext cx="8229600" cy="228600"/>
-          </a:xfrm>
-          <a:prstGeom prst="rect">
-            <a:avLst/>
-          </a:prstGeom>
-          <a:noFill/>
-        </p:spPr>
-        <p:txBody>
-          <a:bodyPr wrap="none">
-            <a:spAutoFit/>
-          </a:bodyPr>
-          <a:lstStyle/>
-          <a:p>
-            <a:r>
-              <a:rPr sz="800" i="1">
-                <a:solidFill>
-                  <a:srgbClr val="666666"/>
-                </a:solidFill>
-                <a:latin typeface="Times New Roman"/>
-              </a:rPr>
-              <a:t>※ 모든 인용은 CrossRef API + ScienceDirect TOC로 metadata 확인 완료 (paper/references.bib와 동기화)</a:t>
             </a:r>
           </a:p>
         </p:txBody>
@@ -15300,6 +15527,388 @@
 </p:sld>
 </file>
 
+<file path=ppt/slides/slide30.xml><?xml version="1.0" encoding="utf-8"?>
+<p:sld xmlns:a="http://schemas.openxmlformats.org/drawingml/2006/main" xmlns:p="http://schemas.openxmlformats.org/presentationml/2006/main" xmlns:r="http://schemas.openxmlformats.org/officeDocument/2006/relationships">
+  <p:cSld>
+    <p:spTree>
+      <p:nvGrpSpPr>
+        <p:cNvPr id="1" name=""/>
+        <p:cNvGrpSpPr/>
+        <p:nvPr/>
+      </p:nvGrpSpPr>
+      <p:grpSpPr/>
+      <p:sp>
+        <p:nvSpPr>
+          <p:cNvPr id="2" name="Content Placeholder 1"/>
+          <p:cNvSpPr>
+            <a:spLocks noGrp="1"/>
+          </p:cNvSpPr>
+          <p:nvPr>
+            <p:ph idx="1"/>
+          </p:nvPr>
+        </p:nvSpPr>
+        <p:spPr/>
+        <p:txBody>
+          <a:bodyPr/>
+          <a:lstStyle/>
+          <a:p/>
+        </p:txBody>
+      </p:sp>
+      <p:sp>
+        <p:nvSpPr>
+          <p:cNvPr id="3" name="Title 2"/>
+          <p:cNvSpPr>
+            <a:spLocks noGrp="1"/>
+          </p:cNvSpPr>
+          <p:nvPr>
+            <p:ph type="title"/>
+          </p:nvPr>
+        </p:nvSpPr>
+        <p:spPr/>
+        <p:txBody>
+          <a:bodyPr/>
+          <a:lstStyle/>
+          <a:p>
+            <a:pPr/>
+            <a:r>
+              <a:rPr sz="2200" b="0" i="0">
+                <a:latin typeface="Times New Roman"/>
+              </a:rPr>
+              <a:t>References — 검증된 인용</a:t>
+            </a:r>
+          </a:p>
+        </p:txBody>
+      </p:sp>
+      <p:sp>
+        <p:nvSpPr>
+          <p:cNvPr id="4" name="TextBox 3"/>
+          <p:cNvSpPr txBox="1"/>
+          <p:nvPr/>
+        </p:nvSpPr>
+        <p:spPr>
+          <a:xfrm>
+            <a:off x="365760" y="868680"/>
+            <a:ext cx="8229600" cy="274320"/>
+          </a:xfrm>
+          <a:prstGeom prst="rect">
+            <a:avLst/>
+          </a:prstGeom>
+          <a:noFill/>
+        </p:spPr>
+        <p:txBody>
+          <a:bodyPr wrap="none">
+            <a:spAutoFit/>
+          </a:bodyPr>
+          <a:lstStyle/>
+          <a:p>
+            <a:r>
+              <a:rPr sz="1200" b="1">
+                <a:solidFill>
+                  <a:srgbClr val="C05317"/>
+                </a:solidFill>
+                <a:latin typeface="Times New Roman"/>
+              </a:rPr>
+              <a:t>주요 참고문헌 (CrossRef DOI 검증 완료)</a:t>
+            </a:r>
+          </a:p>
+        </p:txBody>
+      </p:sp>
+      <p:sp>
+        <p:nvSpPr>
+          <p:cNvPr id="5" name="TextBox 4"/>
+          <p:cNvSpPr txBox="1"/>
+          <p:nvPr/>
+        </p:nvSpPr>
+        <p:spPr>
+          <a:xfrm>
+            <a:off x="365760" y="1188720"/>
+            <a:ext cx="8229600" cy="4846320"/>
+          </a:xfrm>
+          <a:prstGeom prst="rect">
+            <a:avLst/>
+          </a:prstGeom>
+          <a:noFill/>
+        </p:spPr>
+        <p:txBody>
+          <a:bodyPr wrap="square">
+            <a:spAutoFit/>
+          </a:bodyPr>
+          <a:lstStyle/>
+          <a:p>
+            <a:r>
+              <a:rPr sz="900" b="0" i="0">
+                <a:solidFill>
+                  <a:srgbClr val="333333"/>
+                </a:solidFill>
+                <a:latin typeface="Times New Roman"/>
+              </a:rPr>
+              <a:t>[1] Kerbl, B., Kopanas, G., Leimkühler, T., Drettakis, G. (2023). "3D Gaussian Splatting for Real-Time Radiance Field</a:t>
+            </a:r>
+          </a:p>
+          <a:p>
+            <a:r>
+              <a:rPr sz="900" b="0" i="0">
+                <a:solidFill>
+                  <a:srgbClr val="333333"/>
+                </a:solidFill>
+                <a:latin typeface="Times New Roman"/>
+              </a:rPr>
+              <a:t>       Rendering." ACM TOG 42(4). DOI: 10.1145/3592433</a:t>
+            </a:r>
+          </a:p>
+          <a:p>
+            <a:r>
+              <a:rPr sz="900" b="0" i="0">
+                <a:solidFill>
+                  <a:srgbClr val="333333"/>
+                </a:solidFill>
+                <a:latin typeface="Times New Roman"/>
+              </a:rPr>
+              <a:t>[2] Desmars, N., Bonnefoy, F., Grilli, S.T., Ducrozet, G., Perignon, Y., Guérin, C.-A., Ferrant, P. (2020). "Experimental</a:t>
+            </a:r>
+          </a:p>
+          <a:p>
+            <a:r>
+              <a:rPr sz="900" b="0" i="0">
+                <a:solidFill>
+                  <a:srgbClr val="333333"/>
+                </a:solidFill>
+                <a:latin typeface="Times New Roman"/>
+              </a:rPr>
+              <a:t>       and numerical assessment of deterministic nonlinear ocean waves prediction algorithms using non-uniformly</a:t>
+            </a:r>
+          </a:p>
+          <a:p>
+            <a:r>
+              <a:rPr sz="900" b="0" i="0">
+                <a:solidFill>
+                  <a:srgbClr val="333333"/>
+                </a:solidFill>
+                <a:latin typeface="Times New Roman"/>
+              </a:rPr>
+              <a:t>       sampled wave gauges." Ocean Engineering 212, 107659. DOI: 10.1016/j.oceaneng.2020.107659</a:t>
+            </a:r>
+          </a:p>
+          <a:p>
+            <a:r>
+              <a:rPr sz="900" b="0" i="0">
+                <a:solidFill>
+                  <a:srgbClr val="333333"/>
+                </a:solidFill>
+                <a:latin typeface="Times New Roman"/>
+              </a:rPr>
+              <a:t>[3] Desmars, N., Hartmann, M., Behrendt, J., Hoffmann, N., Klein, M. (2023). "Nonlinear deterministic reconstruction</a:t>
+            </a:r>
+          </a:p>
+          <a:p>
+            <a:r>
+              <a:rPr sz="900" b="0" i="0">
+                <a:solidFill>
+                  <a:srgbClr val="333333"/>
+                </a:solidFill>
+                <a:latin typeface="Times New Roman"/>
+              </a:rPr>
+              <a:t>       and prediction of remotely measured ocean surface waves." J. Fluid Mech. 975, A8. DOI: 10.1017/jfm.2023.841</a:t>
+            </a:r>
+          </a:p>
+          <a:p>
+            <a:r>
+              <a:rPr sz="900" b="0" i="0">
+                <a:solidFill>
+                  <a:srgbClr val="333333"/>
+                </a:solidFill>
+                <a:latin typeface="Times New Roman"/>
+              </a:rPr>
+              <a:t>[4] Hunt, B.R., Kostelich, E.J., Szunyogh, I. (2007). "Efficient data assimilation for spatiotemporal chaos: A local</a:t>
+            </a:r>
+          </a:p>
+          <a:p>
+            <a:r>
+              <a:rPr sz="900" b="0" i="0">
+                <a:solidFill>
+                  <a:srgbClr val="333333"/>
+                </a:solidFill>
+                <a:latin typeface="Times New Roman"/>
+              </a:rPr>
+              <a:t>       ensemble transform Kalman filter." Physica D 230(1-2), 112-126. DOI: 10.1016/j.physd.2006.11.008</a:t>
+            </a:r>
+          </a:p>
+          <a:p>
+            <a:r>
+              <a:rPr sz="900" b="0" i="0">
+                <a:solidFill>
+                  <a:srgbClr val="333333"/>
+                </a:solidFill>
+                <a:latin typeface="Times New Roman"/>
+              </a:rPr>
+              <a:t>[5] Ehlers, S., Klein, M., Heinlein, A., Wedler, M., Desmars, N., Hoffmann, N., Stender, M. (2023). "Machine learning</a:t>
+            </a:r>
+          </a:p>
+          <a:p>
+            <a:r>
+              <a:rPr sz="900" b="0" i="0">
+                <a:solidFill>
+                  <a:srgbClr val="333333"/>
+                </a:solidFill>
+                <a:latin typeface="Times New Roman"/>
+              </a:rPr>
+              <a:t>       for phase-resolved reconstruction of nonlinear ocean wave surface elevations from sparse remote sensing data."</a:t>
+            </a:r>
+          </a:p>
+          <a:p>
+            <a:r>
+              <a:rPr sz="900" b="0" i="0">
+                <a:solidFill>
+                  <a:srgbClr val="333333"/>
+                </a:solidFill>
+                <a:latin typeface="Times New Roman"/>
+              </a:rPr>
+              <a:t>       Ocean Engineering 288, 116059. DOI: 10.1016/j.oceaneng.2023.116059</a:t>
+            </a:r>
+          </a:p>
+          <a:p>
+            <a:r>
+              <a:rPr sz="900" b="0" i="0">
+                <a:solidFill>
+                  <a:srgbClr val="333333"/>
+                </a:solidFill>
+                <a:latin typeface="Times New Roman"/>
+              </a:rPr>
+              <a:t>[6] Hwang, P.A., Krabill, W.B., Wright, W., Swift, R.N., Walsh, E.J. (2000). "Airborne Scanning Lidar Measurement of</a:t>
+            </a:r>
+          </a:p>
+          <a:p>
+            <a:r>
+              <a:rPr sz="900" b="0" i="0">
+                <a:solidFill>
+                  <a:srgbClr val="333333"/>
+                </a:solidFill>
+                <a:latin typeface="Times New Roman"/>
+              </a:rPr>
+              <a:t>       Ocean Waves." Remote Sensing of Environment 73(2), 236-246. DOI: 10.1016/S0034-4257(00)00098-5</a:t>
+            </a:r>
+          </a:p>
+          <a:p>
+            <a:r>
+              <a:rPr sz="900" b="0" i="0">
+                <a:solidFill>
+                  <a:srgbClr val="333333"/>
+                </a:solidFill>
+                <a:latin typeface="Times New Roman"/>
+              </a:rPr>
+              <a:t>[7] Belmont, M.R., Horwood, J.M.K., Thurley, R.W.F., Baker, J. (2008). "Shallow Angle Wave Profiling LIDAR." IEEE/OES</a:t>
+            </a:r>
+          </a:p>
+          <a:p>
+            <a:r>
+              <a:rPr sz="900" b="0" i="0">
+                <a:solidFill>
+                  <a:srgbClr val="333333"/>
+                </a:solidFill>
+                <a:latin typeface="Times New Roman"/>
+              </a:rPr>
+              <a:t>       9th Working Conference on Current Measurement Technology, 217-223. DOI: 10.1109/CCM.2008.4480871</a:t>
+            </a:r>
+          </a:p>
+          <a:p>
+            <a:r>
+              <a:rPr sz="900" b="0" i="0">
+                <a:solidFill>
+                  <a:srgbClr val="333333"/>
+                </a:solidFill>
+                <a:latin typeface="Times New Roman"/>
+              </a:rPr>
+              <a:t>[8] Wilcoxon, F. (1945). "Individual Comparisons by Ranking Methods." Biometrics Bulletin 1(6), 80. DOI: 10.2307/3001968</a:t>
+            </a:r>
+          </a:p>
+          <a:p>
+            <a:r>
+              <a:rPr sz="900" b="0" i="0">
+                <a:solidFill>
+                  <a:srgbClr val="333333"/>
+                </a:solidFill>
+                <a:latin typeface="Times New Roman"/>
+              </a:rPr>
+              <a:t>[9] Cohen, J. (1988). Statistical Power Analysis for the Behavioral Sciences (2nd ed.). Lawrence Erlbaum Associates.</a:t>
+            </a:r>
+          </a:p>
+          <a:p>
+            <a:r>
+              <a:rPr sz="900" b="0" i="0">
+                <a:solidFill>
+                  <a:srgbClr val="333333"/>
+                </a:solidFill>
+                <a:latin typeface="Times New Roman"/>
+              </a:rPr>
+              <a:t>[10] Holthuijsen, L.H. (2007). Waves in Oceanic and Coastal Waters. Cambridge University Press.</a:t>
+            </a:r>
+          </a:p>
+          <a:p>
+            <a:r>
+              <a:rPr sz="900" b="0" i="0">
+                <a:solidFill>
+                  <a:srgbClr val="333333"/>
+                </a:solidFill>
+                <a:latin typeface="Times New Roman"/>
+              </a:rPr>
+              <a:t>[11] Faltinsen, O.M. (2005). Hydrodynamics of High-Speed Marine Vehicles. Cambridge University Press.</a:t>
+            </a:r>
+          </a:p>
+          <a:p>
+            <a:r>
+              <a:rPr sz="900" b="0" i="0">
+                <a:solidFill>
+                  <a:srgbClr val="333333"/>
+                </a:solidFill>
+                <a:latin typeface="Times New Roman"/>
+              </a:rPr>
+              <a:t>[12] Born, M., Wolf, E. (1999). Principles of Optics (7th ed.). Cambridge University Press. (Fresnel R(θ))</a:t>
+            </a:r>
+          </a:p>
+        </p:txBody>
+      </p:sp>
+      <p:sp>
+        <p:nvSpPr>
+          <p:cNvPr id="6" name="TextBox 5"/>
+          <p:cNvSpPr txBox="1"/>
+          <p:nvPr/>
+        </p:nvSpPr>
+        <p:spPr>
+          <a:xfrm>
+            <a:off x="365760" y="6263640"/>
+            <a:ext cx="8229600" cy="228600"/>
+          </a:xfrm>
+          <a:prstGeom prst="rect">
+            <a:avLst/>
+          </a:prstGeom>
+          <a:noFill/>
+        </p:spPr>
+        <p:txBody>
+          <a:bodyPr wrap="none">
+            <a:spAutoFit/>
+          </a:bodyPr>
+          <a:lstStyle/>
+          <a:p>
+            <a:r>
+              <a:rPr sz="800" i="1">
+                <a:solidFill>
+                  <a:srgbClr val="666666"/>
+                </a:solidFill>
+                <a:latin typeface="Times New Roman"/>
+              </a:rPr>
+              <a:t>※ 모든 인용은 CrossRef API + ScienceDirect TOC로 metadata 확인 완료 (paper/references.bib와 동기화)</a:t>
+            </a:r>
+          </a:p>
+        </p:txBody>
+      </p:sp>
+    </p:spTree>
+  </p:cSld>
+  <p:clrMapOvr>
+    <a:masterClrMapping/>
+  </p:clrMapOvr>
+</p:sld>
+</file>
+
 <file path=ppt/slides/slide4.xml><?xml version="1.0" encoding="utf-8"?>
 <p:sld xmlns:a="http://schemas.openxmlformats.org/drawingml/2006/main" xmlns:p="http://schemas.openxmlformats.org/presentationml/2006/main" xmlns:r="http://schemas.openxmlformats.org/officeDocument/2006/relationships">
   <p:cSld>
@@ -16323,6 +16932,544 @@
           <a:p>
             <a:pPr/>
             <a:r>
+              <a:rPr sz="2200" b="0" i="0">
+                <a:latin typeface="Times New Roman"/>
+              </a:rPr>
+              <a:t>용어 정리 — 본 발표를 따라가기 위한 핵심 단어</a:t>
+            </a:r>
+          </a:p>
+        </p:txBody>
+      </p:sp>
+      <p:sp>
+        <p:nvSpPr>
+          <p:cNvPr id="4" name="TextBox 3"/>
+          <p:cNvSpPr txBox="1"/>
+          <p:nvPr/>
+        </p:nvSpPr>
+        <p:spPr>
+          <a:xfrm>
+            <a:off x="365760" y="868680"/>
+            <a:ext cx="4114800" cy="274320"/>
+          </a:xfrm>
+          <a:prstGeom prst="rect">
+            <a:avLst/>
+          </a:prstGeom>
+          <a:noFill/>
+        </p:spPr>
+        <p:txBody>
+          <a:bodyPr wrap="none">
+            <a:spAutoFit/>
+          </a:bodyPr>
+          <a:lstStyle/>
+          <a:p>
+            <a:r>
+              <a:rPr sz="1200" b="1">
+                <a:solidFill>
+                  <a:srgbClr val="C05317"/>
+                </a:solidFill>
+                <a:latin typeface="Times New Roman"/>
+              </a:rPr>
+              <a:t>데이터 / 환경</a:t>
+            </a:r>
+          </a:p>
+        </p:txBody>
+      </p:sp>
+      <p:sp>
+        <p:nvSpPr>
+          <p:cNvPr id="5" name="TextBox 4"/>
+          <p:cNvSpPr txBox="1"/>
+          <p:nvPr/>
+        </p:nvSpPr>
+        <p:spPr>
+          <a:xfrm>
+            <a:off x="365760" y="1188720"/>
+            <a:ext cx="4114800" cy="4846320"/>
+          </a:xfrm>
+          <a:prstGeom prst="rect">
+            <a:avLst/>
+          </a:prstGeom>
+          <a:noFill/>
+        </p:spPr>
+        <p:txBody>
+          <a:bodyPr wrap="square">
+            <a:spAutoFit/>
+          </a:bodyPr>
+          <a:lstStyle/>
+          <a:p>
+            <a:r>
+              <a:rPr sz="1000" b="1" i="0">
+                <a:solidFill>
+                  <a:srgbClr val="1A1A2E"/>
+                </a:solidFill>
+                <a:latin typeface="Times New Roman"/>
+              </a:rPr>
+              <a:t>▪ Beaufort scale (BF):</a:t>
+            </a:r>
+          </a:p>
+          <a:p>
+            <a:r>
+              <a:rPr sz="1000" b="0" i="0">
+                <a:solidFill>
+                  <a:srgbClr val="333333"/>
+                </a:solidFill>
+                <a:latin typeface="Times New Roman"/>
+              </a:rPr>
+              <a:t>   풍속 기반 해상 강도. BF2(Hs≈0.3 m) ~ BF5(Hs≈2.0 m)</a:t>
+            </a:r>
+          </a:p>
+          <a:p>
+            <a:r>
+              <a:rPr sz="1000" b="1" i="0">
+                <a:solidFill>
+                  <a:srgbClr val="1A1A2E"/>
+                </a:solidFill>
+                <a:latin typeface="Times New Roman"/>
+              </a:rPr>
+              <a:t>▪ Hs (significant wave height):</a:t>
+            </a:r>
+          </a:p>
+          <a:p>
+            <a:r>
+              <a:rPr sz="1000" b="0" i="0">
+                <a:solidFill>
+                  <a:srgbClr val="333333"/>
+                </a:solidFill>
+                <a:latin typeface="Times New Roman"/>
+              </a:rPr>
+              <a:t>   파고 분포의 4σ — "체감 파고"</a:t>
+            </a:r>
+          </a:p>
+          <a:p>
+            <a:r>
+              <a:rPr sz="1000" b="1" i="0">
+                <a:solidFill>
+                  <a:srgbClr val="1A1A2E"/>
+                </a:solidFill>
+                <a:latin typeface="Times New Roman"/>
+              </a:rPr>
+              <a:t>▪ Tp (peak period):</a:t>
+            </a:r>
+          </a:p>
+          <a:p>
+            <a:r>
+              <a:rPr sz="1000" b="0" i="0">
+                <a:solidFill>
+                  <a:srgbClr val="333333"/>
+                </a:solidFill>
+                <a:latin typeface="Times New Roman"/>
+              </a:rPr>
+              <a:t>   spectrum이 가장 큰 주파수의 주기 (s)</a:t>
+            </a:r>
+          </a:p>
+          <a:p>
+            <a:r>
+              <a:rPr sz="1000" b="1" i="0">
+                <a:solidFill>
+                  <a:srgbClr val="1A1A2E"/>
+                </a:solidFill>
+                <a:latin typeface="Times New Roman"/>
+              </a:rPr>
+              <a:t>▪ JONSWAP / Pierson-Moskowitz:</a:t>
+            </a:r>
+          </a:p>
+          <a:p>
+            <a:r>
+              <a:rPr sz="1000" b="0" i="0">
+                <a:solidFill>
+                  <a:srgbClr val="333333"/>
+                </a:solidFill>
+                <a:latin typeface="Times New Roman"/>
+              </a:rPr>
+              <a:t>   해양 spectrum 모델 (북해 관측 기반)</a:t>
+            </a:r>
+          </a:p>
+          <a:p>
+            <a:r>
+              <a:rPr sz="1000" b="1" i="0">
+                <a:solidFill>
+                  <a:srgbClr val="1A1A2E"/>
+                </a:solidFill>
+                <a:latin typeface="Times New Roman"/>
+              </a:rPr>
+              <a:t>▪ Dispersion relation:</a:t>
+            </a:r>
+          </a:p>
+          <a:p>
+            <a:r>
+              <a:rPr sz="1000" b="0" i="0">
+                <a:solidFill>
+                  <a:srgbClr val="333333"/>
+                </a:solidFill>
+                <a:latin typeface="Times New Roman"/>
+              </a:rPr>
+              <a:t>   파장↔주기 물리 법칙 ω=√(g|k|·tanh(|k|·d))</a:t>
+            </a:r>
+          </a:p>
+          <a:p>
+            <a:r>
+              <a:rPr sz="1000" b="1" i="0">
+                <a:solidFill>
+                  <a:srgbClr val="1A1A2E"/>
+                </a:solidFill>
+                <a:latin typeface="Times New Roman"/>
+              </a:rPr>
+              <a:t>▪ encounter frequency:</a:t>
+            </a:r>
+          </a:p>
+          <a:p>
+            <a:r>
+              <a:rPr sz="1000" b="0" i="0">
+                <a:solidFill>
+                  <a:srgbClr val="333333"/>
+                </a:solidFill>
+                <a:latin typeface="Times New Roman"/>
+              </a:rPr>
+              <a:t>   움직이는 선박이 만나는 파의 겉보기 주파수</a:t>
+            </a:r>
+          </a:p>
+        </p:txBody>
+      </p:sp>
+      <p:sp>
+        <p:nvSpPr>
+          <p:cNvPr id="6" name="TextBox 5"/>
+          <p:cNvSpPr txBox="1"/>
+          <p:nvPr/>
+        </p:nvSpPr>
+        <p:spPr>
+          <a:xfrm>
+            <a:off x="4663440" y="868680"/>
+            <a:ext cx="3931920" cy="274320"/>
+          </a:xfrm>
+          <a:prstGeom prst="rect">
+            <a:avLst/>
+          </a:prstGeom>
+          <a:noFill/>
+        </p:spPr>
+        <p:txBody>
+          <a:bodyPr wrap="none">
+            <a:spAutoFit/>
+          </a:bodyPr>
+          <a:lstStyle/>
+          <a:p>
+            <a:r>
+              <a:rPr sz="1200" b="1">
+                <a:solidFill>
+                  <a:srgbClr val="C05317"/>
+                </a:solidFill>
+                <a:latin typeface="Times New Roman"/>
+              </a:rPr>
+              <a:t>추정 / 평가 metric</a:t>
+            </a:r>
+          </a:p>
+        </p:txBody>
+      </p:sp>
+      <p:sp>
+        <p:nvSpPr>
+          <p:cNvPr id="7" name="TextBox 6"/>
+          <p:cNvSpPr txBox="1"/>
+          <p:nvPr/>
+        </p:nvSpPr>
+        <p:spPr>
+          <a:xfrm>
+            <a:off x="4663440" y="1188720"/>
+            <a:ext cx="3931920" cy="4846320"/>
+          </a:xfrm>
+          <a:prstGeom prst="rect">
+            <a:avLst/>
+          </a:prstGeom>
+          <a:noFill/>
+        </p:spPr>
+        <p:txBody>
+          <a:bodyPr wrap="square">
+            <a:spAutoFit/>
+          </a:bodyPr>
+          <a:lstStyle/>
+          <a:p>
+            <a:r>
+              <a:rPr sz="1000" b="1" i="0">
+                <a:solidFill>
+                  <a:srgbClr val="1A1A2E"/>
+                </a:solidFill>
+                <a:latin typeface="Times New Roman"/>
+              </a:rPr>
+              <a:t>▪ ETKF (Ensemble Transform Kalman Filter):</a:t>
+            </a:r>
+          </a:p>
+          <a:p>
+            <a:r>
+              <a:rPr sz="1000" b="0" i="0">
+                <a:solidFill>
+                  <a:srgbClr val="333333"/>
+                </a:solidFill>
+                <a:latin typeface="Times New Roman"/>
+              </a:rPr>
+              <a:t>   격자 위에서 ensemble로 상태 추정 (NWP 기법)</a:t>
+            </a:r>
+          </a:p>
+          <a:p>
+            <a:r>
+              <a:rPr sz="1000" b="1" i="0">
+                <a:solidFill>
+                  <a:srgbClr val="1A1A2E"/>
+                </a:solidFill>
+                <a:latin typeface="Times New Roman"/>
+              </a:rPr>
+              <a:t>▪ GPR (Gaussian Process Regression):</a:t>
+            </a:r>
+          </a:p>
+          <a:p>
+            <a:r>
+              <a:rPr sz="1000" b="0" i="0">
+                <a:solidFill>
+                  <a:srgbClr val="333333"/>
+                </a:solidFill>
+                <a:latin typeface="Times New Roman"/>
+              </a:rPr>
+              <a:t>   커널 기반 비모수 회귀 — 단순 공간 보간</a:t>
+            </a:r>
+          </a:p>
+          <a:p>
+            <a:r>
+              <a:rPr sz="1000" b="1" i="0">
+                <a:solidFill>
+                  <a:srgbClr val="1A1A2E"/>
+                </a:solidFill>
+                <a:latin typeface="Times New Roman"/>
+              </a:rPr>
+              <a:t>▪ nRMSE = RMSE / Hs</a:t>
+            </a:r>
+          </a:p>
+          <a:p>
+            <a:r>
+              <a:rPr sz="1000" b="0" i="0">
+                <a:solidFill>
+                  <a:srgbClr val="333333"/>
+                </a:solidFill>
+                <a:latin typeface="Times New Roman"/>
+              </a:rPr>
+              <a:t>   Hs로 정규화한 오차 — 5% 이하면 우수</a:t>
+            </a:r>
+          </a:p>
+          <a:p>
+            <a:r>
+              <a:rPr sz="1000" b="1" i="0">
+                <a:solidFill>
+                  <a:srgbClr val="1A1A2E"/>
+                </a:solidFill>
+                <a:latin typeface="Times New Roman"/>
+              </a:rPr>
+              <a:t>▪ VR (Variance Ratio) = Var(ẑ)/Var(z)</a:t>
+            </a:r>
+          </a:p>
+          <a:p>
+            <a:r>
+              <a:rPr sz="1000" b="0" i="0">
+                <a:solidFill>
+                  <a:srgbClr val="333333"/>
+                </a:solidFill>
+                <a:latin typeface="Times New Roman"/>
+              </a:rPr>
+              <a:t>   진폭 보존도. 1=완벽, 0=평탄(under-fit)</a:t>
+            </a:r>
+          </a:p>
+          <a:p>
+            <a:r>
+              <a:rPr sz="1000" b="1" i="0">
+                <a:solidFill>
+                  <a:srgbClr val="1A1A2E"/>
+                </a:solidFill>
+                <a:latin typeface="Times New Roman"/>
+              </a:rPr>
+              <a:t>▪ Pearson ρ:</a:t>
+            </a:r>
+          </a:p>
+          <a:p>
+            <a:r>
+              <a:rPr sz="1000" b="0" i="0">
+                <a:solidFill>
+                  <a:srgbClr val="333333"/>
+                </a:solidFill>
+                <a:latin typeface="Times New Roman"/>
+              </a:rPr>
+              <a:t>   shape 일치도 (진폭과 무관)</a:t>
+            </a:r>
+          </a:p>
+          <a:p>
+            <a:r>
+              <a:rPr sz="1000" b="1" i="0">
+                <a:solidFill>
+                  <a:srgbClr val="1A1A2E"/>
+                </a:solidFill>
+                <a:latin typeface="Times New Roman"/>
+              </a:rPr>
+              <a:t>▪ SS (Skill Score) = 1 − MSE(ẑ)/MSE(0)</a:t>
+            </a:r>
+          </a:p>
+          <a:p>
+            <a:r>
+              <a:rPr sz="1000" b="0" i="0">
+                <a:solidFill>
+                  <a:srgbClr val="333333"/>
+                </a:solidFill>
+                <a:latin typeface="Times New Roman"/>
+              </a:rPr>
+              <a:t>   양수 = "0 예측보다 나음"</a:t>
+            </a:r>
+          </a:p>
+          <a:p>
+            <a:r>
+              <a:rPr sz="1000" b="1" i="0">
+                <a:solidFill>
+                  <a:srgbClr val="1A1A2E"/>
+                </a:solidFill>
+                <a:latin typeface="Times New Roman"/>
+              </a:rPr>
+              <a:t>▪ RMSE_unobs:</a:t>
+            </a:r>
+          </a:p>
+          <a:p>
+            <a:r>
+              <a:rPr sz="1000" b="0" i="0">
+                <a:solidFill>
+                  <a:srgbClr val="333333"/>
+                </a:solidFill>
+                <a:latin typeface="Times New Roman"/>
+              </a:rPr>
+              <a:t>   관측에서 ≥10 m 떨어진 영역만의 RMSE</a:t>
+            </a:r>
+          </a:p>
+          <a:p>
+            <a:r>
+              <a:rPr sz="1000" b="1" i="0">
+                <a:solidFill>
+                  <a:srgbClr val="1A1A2E"/>
+                </a:solidFill>
+                <a:latin typeface="Times New Roman"/>
+              </a:rPr>
+              <a:t>▪ Wilcoxon signed-rank test:</a:t>
+            </a:r>
+          </a:p>
+          <a:p>
+            <a:r>
+              <a:rPr sz="1000" b="0" i="0">
+                <a:solidFill>
+                  <a:srgbClr val="333333"/>
+                </a:solidFill>
+                <a:latin typeface="Times New Roman"/>
+              </a:rPr>
+              <a:t>   짝지은 차이의 부호 분포 검정 (정규성 X)</a:t>
+            </a:r>
+          </a:p>
+          <a:p>
+            <a:r>
+              <a:rPr sz="1000" b="1" i="0">
+                <a:solidFill>
+                  <a:srgbClr val="1A1A2E"/>
+                </a:solidFill>
+                <a:latin typeface="Times New Roman"/>
+              </a:rPr>
+              <a:t>▪ Cohen's d:</a:t>
+            </a:r>
+          </a:p>
+          <a:p>
+            <a:r>
+              <a:rPr sz="1000" b="0" i="0">
+                <a:solidFill>
+                  <a:srgbClr val="333333"/>
+                </a:solidFill>
+                <a:latin typeface="Times New Roman"/>
+              </a:rPr>
+              <a:t>   effect size — 0.8 이상이면 large</a:t>
+            </a:r>
+          </a:p>
+        </p:txBody>
+      </p:sp>
+      <p:sp>
+        <p:nvSpPr>
+          <p:cNvPr id="8" name="TextBox 7"/>
+          <p:cNvSpPr txBox="1"/>
+          <p:nvPr/>
+        </p:nvSpPr>
+        <p:spPr>
+          <a:xfrm>
+            <a:off x="365760" y="6217920"/>
+            <a:ext cx="8229600" cy="274320"/>
+          </a:xfrm>
+          <a:prstGeom prst="rect">
+            <a:avLst/>
+          </a:prstGeom>
+          <a:noFill/>
+        </p:spPr>
+        <p:txBody>
+          <a:bodyPr wrap="square">
+            <a:spAutoFit/>
+          </a:bodyPr>
+          <a:lstStyle/>
+          <a:p>
+            <a:r>
+              <a:rPr sz="1000" b="0" i="1">
+                <a:solidFill>
+                  <a:srgbClr val="666666"/>
+                </a:solidFill>
+                <a:latin typeface="Times New Roman"/>
+              </a:rPr>
+              <a:t>※ 모든 항목은 본 발표 후속 슬라이드에서 다시 등장합니다 — 모르는 단어 나오면 이 슬라이드 참고</a:t>
+            </a:r>
+          </a:p>
+        </p:txBody>
+      </p:sp>
+    </p:spTree>
+  </p:cSld>
+  <p:clrMapOvr>
+    <a:masterClrMapping/>
+  </p:clrMapOvr>
+</p:sld>
+</file>
+
+<file path=ppt/slides/slide7.xml><?xml version="1.0" encoding="utf-8"?>
+<p:sld xmlns:a="http://schemas.openxmlformats.org/drawingml/2006/main" xmlns:p="http://schemas.openxmlformats.org/presentationml/2006/main" xmlns:r="http://schemas.openxmlformats.org/officeDocument/2006/relationships">
+  <p:cSld>
+    <p:spTree>
+      <p:nvGrpSpPr>
+        <p:cNvPr id="1" name=""/>
+        <p:cNvGrpSpPr/>
+        <p:nvPr/>
+      </p:nvGrpSpPr>
+      <p:grpSpPr/>
+      <p:sp>
+        <p:nvSpPr>
+          <p:cNvPr id="2" name="Content Placeholder 1"/>
+          <p:cNvSpPr>
+            <a:spLocks noGrp="1"/>
+          </p:cNvSpPr>
+          <p:nvPr>
+            <p:ph idx="1"/>
+          </p:nvPr>
+        </p:nvSpPr>
+        <p:spPr/>
+        <p:txBody>
+          <a:bodyPr/>
+          <a:lstStyle/>
+          <a:p/>
+        </p:txBody>
+      </p:sp>
+      <p:sp>
+        <p:nvSpPr>
+          <p:cNvPr id="3" name="Title 2"/>
+          <p:cNvSpPr>
+            <a:spLocks noGrp="1"/>
+          </p:cNvSpPr>
+          <p:nvPr>
+            <p:ph type="title"/>
+          </p:nvPr>
+        </p:nvSpPr>
+        <p:spPr/>
+        <p:txBody>
+          <a:bodyPr/>
+          <a:lstStyle/>
+          <a:p>
+            <a:pPr/>
+            <a:r>
               <a:rPr sz="2400" b="0" i="0">
                 <a:latin typeface="Times New Roman"/>
               </a:rPr>
@@ -16577,7 +17724,7 @@
 </p:sld>
 </file>
 
-<file path=ppt/slides/slide7.xml><?xml version="1.0" encoding="utf-8"?>
+<file path=ppt/slides/slide8.xml><?xml version="1.0" encoding="utf-8"?>
 <p:sld xmlns:a="http://schemas.openxmlformats.org/drawingml/2006/main" xmlns:p="http://schemas.openxmlformats.org/presentationml/2006/main" xmlns:r="http://schemas.openxmlformats.org/officeDocument/2006/relationships">
   <p:cSld>
     <p:spTree>
@@ -16890,7 +18037,7 @@
 </p:sld>
 </file>
 
-<file path=ppt/slides/slide8.xml><?xml version="1.0" encoding="utf-8"?>
+<file path=ppt/slides/slide9.xml><?xml version="1.0" encoding="utf-8"?>
 <p:sld xmlns:a="http://schemas.openxmlformats.org/drawingml/2006/main" xmlns:p="http://schemas.openxmlformats.org/presentationml/2006/main" xmlns:r="http://schemas.openxmlformats.org/officeDocument/2006/relationships">
   <p:cSld>
     <p:spTree>
@@ -17305,575 +18452,79 @@
           <a:lstStyle/>
           <a:p>
             <a:r>
-              <a:rPr sz="1100" b="0" i="0">
-                <a:solidFill>
-                  <a:srgbClr val="333333"/>
-                </a:solidFill>
-                <a:latin typeface="Times New Roman"/>
-              </a:rPr>
-              <a:t>▪ Dispersion 제약은 '추정된 파동이 실제 중력파'임을 보장 — ω를 자유롭게 두면 nRMSE는 낮아지지만 1초 뒤 phase prediction 발산 (A1 ablation 확인)</a:t>
-            </a:r>
-          </a:p>
-          <a:p>
-            <a:r>
-              <a:rPr sz="1100" b="0" i="0">
-                <a:solidFill>
-                  <a:srgbClr val="333333"/>
-                </a:solidFill>
-                <a:latin typeface="Times New Roman"/>
-              </a:rPr>
-              <a:t>▪ cⱼ는 정확한 Fresnel R(θ)가 아니라 cos(θ)·1/(d/d_ref) 단순 기하 가중치 — 본 항목 명명을 'Fresnel-aware'에서 'geometry-aware'로 정정</a:t>
-            </a:r>
-          </a:p>
-          <a:p>
-            <a:r>
-              <a:rPr sz="1100" b="0" i="0">
-                <a:solidFill>
-                  <a:srgbClr val="333333"/>
-                </a:solidFill>
-                <a:latin typeface="Times New Roman"/>
-              </a:rPr>
-              <a:t>▪ Fresnel R(θ) 자체는 raydrop 모델 (다음 슬라이드)에서만 사용 — 시뮬레이터에서 점이 떨어지는 메커니즘</a:t>
-            </a:r>
-          </a:p>
-          <a:p>
-            <a:r>
-              <a:rPr sz="1100" b="0" i="0">
-                <a:solidFill>
-                  <a:srgbClr val="333333"/>
-                </a:solidFill>
-                <a:latin typeface="Times New Roman"/>
-              </a:rPr>
-              <a:t>▪ λ₁ sparsity: spectral 표현이 over-fit하지 않도록 — 진짜 dominant components만 살림</a:t>
-            </a:r>
-          </a:p>
-          <a:p>
-            <a:r>
-              <a:rPr sz="1100" b="0" i="0">
+              <a:rPr sz="1100" b="0">
+                <a:solidFill>
+                  <a:srgbClr val="333333"/>
+                </a:solidFill>
+                <a:latin typeface="Times New Roman"/>
+              </a:rPr>
+              <a:t>▪ Dispersion 제약: 추정된 파동을 "실제 중력파 dispersion 위에 있도록" 강제</a:t>
+            </a:r>
+          </a:p>
+          <a:p>
+            <a:r>
+              <a:rPr sz="1100" b="0">
+                <a:solidFill>
+                  <a:srgbClr val="333333"/>
+                </a:solidFill>
+                <a:latin typeface="Times New Roman"/>
+              </a:rPr>
+              <a:t>   → ω를 자유로 두면 nRMSE만 ↓, 1초 뒤 phase 발산 (A1 ablation 확인)</a:t>
+            </a:r>
+          </a:p>
+          <a:p>
+            <a:r>
+              <a:rPr sz="1100" b="0">
+                <a:solidFill>
+                  <a:srgbClr val="333333"/>
+                </a:solidFill>
+                <a:latin typeface="Times New Roman"/>
+              </a:rPr>
+              <a:t>▪ cⱼ = cos(θ)·1/(d/d_ref)는 단순 기하 가중치 — 정확한 Fresnel R(θ)가 아님</a:t>
+            </a:r>
+          </a:p>
+          <a:p>
+            <a:r>
+              <a:rPr sz="1100" b="0">
+                <a:solidFill>
+                  <a:srgbClr val="333333"/>
+                </a:solidFill>
+                <a:latin typeface="Times New Roman"/>
+              </a:rPr>
+              <a:t>   → 본 항목 명명을 'Fresnel-aware' → 'geometry-aware'로 정정 (paper)</a:t>
+            </a:r>
+          </a:p>
+          <a:p>
+            <a:r>
+              <a:rPr sz="1100" b="0">
+                <a:solidFill>
+                  <a:srgbClr val="333333"/>
+                </a:solidFill>
+                <a:latin typeface="Times New Roman"/>
+              </a:rPr>
+              <a:t>▪ Fresnel R(θ) 자체는 raydrop 모델 (다음 슬라이드)에서만 사용</a:t>
+            </a:r>
+          </a:p>
+          <a:p>
+            <a:r>
+              <a:rPr sz="1100" b="0">
+                <a:solidFill>
+                  <a:srgbClr val="333333"/>
+                </a:solidFill>
+                <a:latin typeface="Times New Roman"/>
+              </a:rPr>
+              <a:t>▪ λ₁ sparsity: dominant component만 살리도록 spectral 표현 압축</a:t>
+            </a:r>
+          </a:p>
+          <a:p>
+            <a:r>
+              <a:rPr sz="1100" b="0">
                 <a:solidFill>
                   <a:srgbClr val="333333"/>
                 </a:solidFill>
                 <a:latin typeface="Times New Roman"/>
               </a:rPr>
               <a:t>▪ λs smoothness: 인접 wavenumber에 부드럽게 분포 → 노이즈에 robust</a:t>
-            </a:r>
-          </a:p>
-        </p:txBody>
-      </p:sp>
-    </p:spTree>
-  </p:cSld>
-  <p:clrMapOvr>
-    <a:masterClrMapping/>
-  </p:clrMapOvr>
-</p:sld>
-</file>
-
-<file path=ppt/slides/slide9.xml><?xml version="1.0" encoding="utf-8"?>
-<p:sld xmlns:a="http://schemas.openxmlformats.org/drawingml/2006/main" xmlns:p="http://schemas.openxmlformats.org/presentationml/2006/main" xmlns:r="http://schemas.openxmlformats.org/officeDocument/2006/relationships">
-  <p:cSld>
-    <p:spTree>
-      <p:nvGrpSpPr>
-        <p:cNvPr id="1" name=""/>
-        <p:cNvGrpSpPr/>
-        <p:nvPr/>
-      </p:nvGrpSpPr>
-      <p:grpSpPr/>
-      <p:sp>
-        <p:nvSpPr>
-          <p:cNvPr id="2" name="Content Placeholder 1"/>
-          <p:cNvSpPr>
-            <a:spLocks noGrp="1"/>
-          </p:cNvSpPr>
-          <p:nvPr>
-            <p:ph idx="1"/>
-          </p:nvPr>
-        </p:nvSpPr>
-        <p:spPr/>
-        <p:txBody>
-          <a:bodyPr/>
-          <a:lstStyle/>
-          <a:p/>
-        </p:txBody>
-      </p:sp>
-      <p:sp>
-        <p:nvSpPr>
-          <p:cNvPr id="3" name="Title 2"/>
-          <p:cNvSpPr>
-            <a:spLocks noGrp="1"/>
-          </p:cNvSpPr>
-          <p:nvPr>
-            <p:ph type="title"/>
-          </p:nvPr>
-        </p:nvSpPr>
-        <p:spPr/>
-        <p:txBody>
-          <a:bodyPr/>
-          <a:lstStyle/>
-          <a:p>
-            <a:pPr/>
-            <a:r>
-              <a:rPr sz="2200" b="0" i="0">
-                <a:latin typeface="Times New Roman"/>
-              </a:rPr>
-              <a:t>Methodology (2) — 2-Phase Pipeline (Init → Track)</a:t>
-            </a:r>
-          </a:p>
-        </p:txBody>
-      </p:sp>
-      <p:sp>
-        <p:nvSpPr>
-          <p:cNvPr id="4" name="TextBox 3"/>
-          <p:cNvSpPr txBox="1"/>
-          <p:nvPr/>
-        </p:nvSpPr>
-        <p:spPr>
-          <a:xfrm>
-            <a:off x="365760" y="868680"/>
-            <a:ext cx="4114800" cy="274320"/>
-          </a:xfrm>
-          <a:prstGeom prst="rect">
-            <a:avLst/>
-          </a:prstGeom>
-          <a:noFill/>
-        </p:spPr>
-        <p:txBody>
-          <a:bodyPr wrap="none">
-            <a:spAutoFit/>
-          </a:bodyPr>
-          <a:lstStyle/>
-          <a:p>
-            <a:r>
-              <a:rPr sz="1200" b="1">
-                <a:solidFill>
-                  <a:srgbClr val="C05317"/>
-                </a:solidFill>
-                <a:latin typeface="Times New Roman"/>
-              </a:rPr>
-              <a:t>Phase 1: Initialization (T_init = 2Tₚ ≈ 14 s @ BF4)</a:t>
-            </a:r>
-          </a:p>
-        </p:txBody>
-      </p:sp>
-      <p:sp>
-        <p:nvSpPr>
-          <p:cNvPr id="5" name="TextBox 4"/>
-          <p:cNvSpPr txBox="1"/>
-          <p:nvPr/>
-        </p:nvSpPr>
-        <p:spPr>
-          <a:xfrm>
-            <a:off x="365760" y="1188720"/>
-            <a:ext cx="4114800" cy="3108960"/>
-          </a:xfrm>
-          <a:prstGeom prst="rect">
-            <a:avLst/>
-          </a:prstGeom>
-          <a:noFill/>
-        </p:spPr>
-        <p:txBody>
-          <a:bodyPr wrap="square">
-            <a:spAutoFit/>
-          </a:bodyPr>
-          <a:lstStyle/>
-          <a:p>
-            <a:r>
-              <a:rPr sz="1100" b="0" i="0">
-                <a:solidFill>
-                  <a:srgbClr val="333333"/>
-                </a:solidFill>
-                <a:latin typeface="Times New Roman"/>
-              </a:rPr>
-              <a:t>① Dispersion-aware beamforming (v2_konly)</a:t>
-            </a:r>
-          </a:p>
-          <a:p>
-            <a:r>
-              <a:rPr sz="1100" b="0" i="0">
-                <a:solidFill>
-                  <a:srgbClr val="333333"/>
-                </a:solidFill>
-                <a:latin typeface="Times New Roman"/>
-              </a:rPr>
-              <a:t>   → Cartesian 81×81 k-grid (Δk≈0.10 rad/m)</a:t>
-            </a:r>
-          </a:p>
-          <a:p>
-            <a:r>
-              <a:rPr sz="1100" b="0" i="0">
-                <a:solidFill>
-                  <a:srgbClr val="333333"/>
-                </a:solidFill>
-                <a:latin typeface="Times New Roman"/>
-              </a:rPr>
-              <a:t>② Greedy peak extraction (0.15 rad/m suppression)</a:t>
-            </a:r>
-          </a:p>
-          <a:p>
-            <a:r>
-              <a:rPr sz="1100" b="0" i="0">
-                <a:solidFill>
-                  <a:srgbClr val="333333"/>
-                </a:solidFill>
-                <a:latin typeface="Times New Roman"/>
-              </a:rPr>
-              <a:t>③ Coarse-to-fine Adam: N=3 → 8 → 15</a:t>
-            </a:r>
-          </a:p>
-          <a:p>
-            <a:r>
-              <a:rPr sz="1100" b="0" i="0">
-                <a:solidFill>
-                  <a:srgbClr val="333333"/>
-                </a:solidFill>
-                <a:latin typeface="Times New Roman"/>
-              </a:rPr>
-              <a:t>   (200 iters/stage, lr=5×10⁻³)</a:t>
-            </a:r>
-          </a:p>
-          <a:p>
-            <a:r>
-              <a:rPr sz="1100" b="0" i="0">
-                <a:solidFill>
-                  <a:srgbClr val="333333"/>
-                </a:solidFill>
-                <a:latin typeface="Times New Roman"/>
-              </a:rPr>
-              <a:t>④ Energy-based pruning (90% threshold)</a:t>
-            </a:r>
-          </a:p>
-          <a:p>
-            <a:r>
-              <a:rPr sz="1100" b="0" i="0">
-                <a:solidFill>
-                  <a:srgbClr val="333333"/>
-                </a:solidFill>
-                <a:latin typeface="Times New Roman"/>
-              </a:rPr>
-              <a:t>   + RMSE 130% safety rollback</a:t>
-            </a:r>
-          </a:p>
-          <a:p>
-            <a:r>
-              <a:rPr sz="1100" b="0" i="0">
-                <a:solidFill>
-                  <a:srgbClr val="333333"/>
-                </a:solidFill>
-                <a:latin typeface="Times New Roman"/>
-              </a:rPr>
-              <a:t>⑤ Residual growth: RMS &gt; 0.05 m → 추가 beamform</a:t>
-            </a:r>
-          </a:p>
-          <a:p>
-            <a:r>
-              <a:rPr sz="1100" b="0" i="0">
-                <a:solidFill>
-                  <a:srgbClr val="333333"/>
-                </a:solidFill>
-                <a:latin typeface="Times New Roman"/>
-              </a:rPr>
-              <a:t>   (Nmax = 30)</a:t>
-            </a:r>
-          </a:p>
-        </p:txBody>
-      </p:sp>
-      <p:sp>
-        <p:nvSpPr>
-          <p:cNvPr id="6" name="TextBox 5"/>
-          <p:cNvSpPr txBox="1"/>
-          <p:nvPr/>
-        </p:nvSpPr>
-        <p:spPr>
-          <a:xfrm>
-            <a:off x="4663440" y="868680"/>
-            <a:ext cx="3931920" cy="274320"/>
-          </a:xfrm>
-          <a:prstGeom prst="rect">
-            <a:avLst/>
-          </a:prstGeom>
-          <a:noFill/>
-        </p:spPr>
-        <p:txBody>
-          <a:bodyPr wrap="none">
-            <a:spAutoFit/>
-          </a:bodyPr>
-          <a:lstStyle/>
-          <a:p>
-            <a:r>
-              <a:rPr sz="1200" b="1">
-                <a:solidFill>
-                  <a:srgbClr val="C05317"/>
-                </a:solidFill>
-                <a:latin typeface="Times New Roman"/>
-              </a:rPr>
-              <a:t>Phase 2: Tracking (w_phi mode, 10 Hz)</a:t>
-            </a:r>
-          </a:p>
-        </p:txBody>
-      </p:sp>
-      <p:sp>
-        <p:nvSpPr>
-          <p:cNvPr id="7" name="TextBox 6"/>
-          <p:cNvSpPr txBox="1"/>
-          <p:nvPr/>
-        </p:nvSpPr>
-        <p:spPr>
-          <a:xfrm>
-            <a:off x="4663440" y="1188720"/>
-            <a:ext cx="3931920" cy="3108960"/>
-          </a:xfrm>
-          <a:prstGeom prst="rect">
-            <a:avLst/>
-          </a:prstGeom>
-          <a:noFill/>
-        </p:spPr>
-        <p:txBody>
-          <a:bodyPr wrap="square">
-            <a:spAutoFit/>
-          </a:bodyPr>
-          <a:lstStyle/>
-          <a:p>
-            <a:r>
-              <a:rPr sz="1100" b="0" i="0">
-                <a:solidFill>
-                  <a:srgbClr val="333333"/>
-                </a:solidFill>
-                <a:latin typeface="Times New Roman"/>
-              </a:rPr>
-              <a:t>Predict: φᵢ ← φᵢ + ωᵢ · Δt</a:t>
-            </a:r>
-          </a:p>
-          <a:p>
-            <a:r>
-              <a:rPr sz="1100" b="0" i="0">
-                <a:solidFill>
-                  <a:srgbClr val="333333"/>
-                </a:solidFill>
-                <a:latin typeface="Times New Roman"/>
-              </a:rPr>
-              <a:t>   (dispersion-exact phase propagation)</a:t>
-            </a:r>
-          </a:p>
-          <a:p>
-            <a:r>
-              <a:rPr sz="1100" b="0" i="0">
-                <a:solidFill>
-                  <a:srgbClr val="333333"/>
-                </a:solidFill>
-                <a:latin typeface="Times New Roman"/>
-              </a:rPr>
-              <a:t/>
-            </a:r>
-          </a:p>
-          <a:p>
-            <a:r>
-              <a:rPr sz="1100" b="0" i="0">
-                <a:solidFill>
-                  <a:srgbClr val="333333"/>
-                </a:solidFill>
-                <a:latin typeface="Times New Roman"/>
-              </a:rPr>
-              <a:t>Update: K=10 Adam steps (lr=10⁻³)</a:t>
-            </a:r>
-          </a:p>
-          <a:p>
-            <a:r>
-              <a:rPr sz="1100" b="0" i="0">
-                <a:solidFill>
-                  <a:srgbClr val="333333"/>
-                </a:solidFill>
-                <a:latin typeface="Times New Roman"/>
-              </a:rPr>
-              <a:t>   on Kw=3 sliding-frame window</a:t>
-            </a:r>
-          </a:p>
-          <a:p>
-            <a:r>
-              <a:rPr sz="1100" b="0" i="0">
-                <a:solidFill>
-                  <a:srgbClr val="333333"/>
-                </a:solidFill>
-                <a:latin typeface="Times New Roman"/>
-              </a:rPr>
-              <a:t>   → only (wᵢ, φᵢ) updated; kx, ky FROZEN</a:t>
-            </a:r>
-          </a:p>
-          <a:p>
-            <a:r>
-              <a:rPr sz="1100" b="0" i="0">
-                <a:solidFill>
-                  <a:srgbClr val="333333"/>
-                </a:solidFill>
-                <a:latin typeface="Times New Roman"/>
-              </a:rPr>
-              <a:t/>
-            </a:r>
-          </a:p>
-          <a:p>
-            <a:r>
-              <a:rPr sz="1100" b="0" i="0">
-                <a:solidFill>
-                  <a:srgbClr val="333333"/>
-                </a:solidFill>
-                <a:latin typeface="Times New Roman"/>
-              </a:rPr>
-              <a:t>Why freeze k?</a:t>
-            </a:r>
-          </a:p>
-          <a:p>
-            <a:r>
-              <a:rPr sz="1100" b="0" i="0">
-                <a:solidFill>
-                  <a:srgbClr val="333333"/>
-                </a:solidFill>
-                <a:latin typeface="Times New Roman"/>
-              </a:rPr>
-              <a:t>   • 단일 프레임에서 kx/ky는 ill-conditioned</a:t>
-            </a:r>
-          </a:p>
-          <a:p>
-            <a:r>
-              <a:rPr sz="1100" b="0" i="0">
-                <a:solidFill>
-                  <a:srgbClr val="333333"/>
-                </a:solidFill>
-                <a:latin typeface="Times New Roman"/>
-              </a:rPr>
-              <a:t>   • Multi-frame init이 충분히 평균화</a:t>
-            </a:r>
-          </a:p>
-          <a:p>
-            <a:r>
-              <a:rPr sz="1100" b="0" i="0">
-                <a:solidFill>
-                  <a:srgbClr val="333333"/>
-                </a:solidFill>
-                <a:latin typeface="Times New Roman"/>
-              </a:rPr>
-              <a:t>   • φ warm start로 200→10 grad steps</a:t>
-            </a:r>
-          </a:p>
-        </p:txBody>
-      </p:sp>
-      <p:sp>
-        <p:nvSpPr>
-          <p:cNvPr id="8" name="TextBox 7"/>
-          <p:cNvSpPr txBox="1"/>
-          <p:nvPr/>
-        </p:nvSpPr>
-        <p:spPr>
-          <a:xfrm>
-            <a:off x="365760" y="4526280"/>
-            <a:ext cx="8229600" cy="457200"/>
-          </a:xfrm>
-          <a:prstGeom prst="rect">
-            <a:avLst/>
-          </a:prstGeom>
-          <a:noFill/>
-        </p:spPr>
-        <p:txBody>
-          <a:bodyPr wrap="square">
-            <a:spAutoFit/>
-          </a:bodyPr>
-          <a:lstStyle/>
-          <a:p>
-            <a:r>
-              <a:rPr sz="1300" b="1" i="0">
-                <a:solidFill>
-                  <a:srgbClr val="C05317"/>
-                </a:solidFill>
-                <a:latin typeface="Times New Roman"/>
-              </a:rPr>
-              <a:t>Adaptive N: 단일 swell에선 N=1, 복잡 sea에선 N=21까지 — 평균 13.4 ms/frame</a:t>
-            </a:r>
-          </a:p>
-        </p:txBody>
-      </p:sp>
-      <p:sp>
-        <p:nvSpPr>
-          <p:cNvPr id="9" name="TextBox 8"/>
-          <p:cNvSpPr txBox="1"/>
-          <p:nvPr/>
-        </p:nvSpPr>
-        <p:spPr>
-          <a:xfrm>
-            <a:off x="365760" y="5029200"/>
-            <a:ext cx="8229600" cy="274320"/>
-          </a:xfrm>
-          <a:prstGeom prst="rect">
-            <a:avLst/>
-          </a:prstGeom>
-          <a:noFill/>
-        </p:spPr>
-        <p:txBody>
-          <a:bodyPr wrap="none">
-            <a:spAutoFit/>
-          </a:bodyPr>
-          <a:lstStyle/>
-          <a:p>
-            <a:r>
-              <a:rPr sz="1200" b="1">
-                <a:solidFill>
-                  <a:srgbClr val="C05317"/>
-                </a:solidFill>
-                <a:latin typeface="Times New Roman"/>
-              </a:rPr>
-              <a:t>실시간 처리 핵심</a:t>
-            </a:r>
-          </a:p>
-        </p:txBody>
-      </p:sp>
-      <p:sp>
-        <p:nvSpPr>
-          <p:cNvPr id="10" name="TextBox 9"/>
-          <p:cNvSpPr txBox="1"/>
-          <p:nvPr/>
-        </p:nvSpPr>
-        <p:spPr>
-          <a:xfrm>
-            <a:off x="365760" y="5349240"/>
-            <a:ext cx="8229600" cy="914400"/>
-          </a:xfrm>
-          <a:prstGeom prst="rect">
-            <a:avLst/>
-          </a:prstGeom>
-          <a:noFill/>
-        </p:spPr>
-        <p:txBody>
-          <a:bodyPr wrap="square">
-            <a:spAutoFit/>
-          </a:bodyPr>
-          <a:lstStyle/>
-          <a:p>
-            <a:r>
-              <a:rPr sz="1100" b="0" i="0">
-                <a:solidFill>
-                  <a:srgbClr val="333333"/>
-                </a:solidFill>
-                <a:latin typeface="Times New Roman"/>
-              </a:rPr>
-              <a:t>▪ Init은 한 번만 (~500 ms) — 이후 frame당 ~13 ms tracking으로 10 Hz 대응</a:t>
-            </a:r>
-          </a:p>
-          <a:p>
-            <a:r>
-              <a:rPr sz="1100" b="0" i="0">
-                <a:solidFill>
-                  <a:srgbClr val="333333"/>
-                </a:solidFill>
-                <a:latin typeface="Times New Roman"/>
-              </a:rPr>
-              <a:t>▪ k freeze + φ warm-start로 200→10 grad steps 단축이 결정적 속도 차이</a:t>
-            </a:r>
-          </a:p>
-          <a:p>
-            <a:r>
-              <a:rPr sz="1100" b="0" i="0">
-                <a:solidFill>
-                  <a:srgbClr val="333333"/>
-                </a:solidFill>
-                <a:latin typeface="Times New Roman"/>
-              </a:rPr>
-              <a:t>▪ Adaptive N의 pruning은 over-parametrize 방지, growth는 새로운 component 출현 대응</a:t>
             </a:r>
           </a:p>
         </p:txBody>

--- a/wavesplat/docs/labmeeting_wavesplat.pptx
+++ b/wavesplat/docs/labmeeting_wavesplat.pptx
@@ -14435,7 +14435,7 @@
                 </a:solidFill>
                 <a:latin typeface="Times New Roman"/>
               </a:rPr>
-              <a:t>▪ BF4 5-comp: 37% — directional misestimation의 영향</a:t>
+              <a:t>▪ BF4 5-comp: 37% — 다중 component 간 방향 분리 한계가 원인</a:t>
             </a:r>
           </a:p>
           <a:p>
@@ -14446,7 +14446,7 @@
                 </a:solidFill>
                 <a:latin typeface="Times New Roman"/>
               </a:rPr>
-              <a:t>   → 보조 지표 directional spectrum의 한계가 제어로 전파됨</a:t>
+              <a:t>   → WaveSplat의 방향 추정 오차(±5° 이상)가 그대로 제어 입력으로 전파됨</a:t>
             </a:r>
           </a:p>
           <a:p>
@@ -14795,7 +14795,7 @@
                 </a:solidFill>
                 <a:latin typeface="Times New Roman"/>
               </a:rPr>
-              <a:t>▪ Directional spectrum (보조 지표): 30+ comp에서 R² 폭발</a:t>
+              <a:t>▪ 30+ component crowding 시 방향 분리 어려움 (k-space에서 인접 peak)</a:t>
             </a:r>
           </a:p>
           <a:p>
@@ -14806,7 +14806,7 @@
                 </a:solidFill>
                 <a:latin typeface="Times New Roman"/>
               </a:rPr>
-              <a:t>   (peak alignment 민감도 — metric 자체의 한계)</a:t>
+              <a:t>   → multi-frame 방향 voting / vessel yaw 변화 활용으로 개선 가능</a:t>
             </a:r>
           </a:p>
           <a:p>

--- a/wavesplat/docs/labmeeting_wavesplat.pptx
+++ b/wavesplat/docs/labmeeting_wavesplat.pptx
@@ -39,6 +39,7 @@
     <p:sldId id="280" r:id="rId33"/>
     <p:sldId id="281" r:id="rId34"/>
     <p:sldId id="282" r:id="rId35"/>
+    <p:sldId id="286" r:id="rId39"/>
     <p:sldId id="283" r:id="rId36"/>
     <p:sldId id="284" r:id="rId37"/>
   </p:sldIdLst>
@@ -15897,6 +15898,1173 @@
                 <a:latin typeface="Times New Roman"/>
               </a:rPr>
               <a:t>※ 모든 인용은 CrossRef API + ScienceDirect TOC로 metadata 확인 완료 (paper/references.bib와 동기화)</a:t>
+            </a:r>
+          </a:p>
+        </p:txBody>
+      </p:sp>
+    </p:spTree>
+  </p:cSld>
+  <p:clrMapOvr>
+    <a:masterClrMapping/>
+  </p:clrMapOvr>
+</p:sld>
+</file>
+
+<file path=ppt/slides/slide31.xml><?xml version="1.0" encoding="utf-8"?>
+<p:sld xmlns:a="http://schemas.openxmlformats.org/drawingml/2006/main" xmlns:p="http://schemas.openxmlformats.org/presentationml/2006/main" xmlns:r="http://schemas.openxmlformats.org/officeDocument/2006/relationships">
+  <p:cSld>
+    <p:spTree>
+      <p:nvGrpSpPr>
+        <p:cNvPr id="1" name=""/>
+        <p:cNvGrpSpPr/>
+        <p:nvPr/>
+      </p:nvGrpSpPr>
+      <p:grpSpPr/>
+      <p:sp>
+        <p:nvSpPr>
+          <p:cNvPr id="2" name="Content Placeholder 1"/>
+          <p:cNvSpPr>
+            <a:spLocks noGrp="1"/>
+          </p:cNvSpPr>
+          <p:nvPr>
+            <p:ph idx="1"/>
+          </p:nvPr>
+        </p:nvSpPr>
+        <p:spPr/>
+        <p:txBody>
+          <a:bodyPr/>
+          <a:lstStyle/>
+          <a:p/>
+        </p:txBody>
+      </p:sp>
+      <p:sp>
+        <p:nvSpPr>
+          <p:cNvPr id="3" name="Title 2"/>
+          <p:cNvSpPr>
+            <a:spLocks noGrp="1"/>
+          </p:cNvSpPr>
+          <p:nvPr>
+            <p:ph type="title"/>
+          </p:nvPr>
+        </p:nvSpPr>
+        <p:spPr/>
+        <p:txBody>
+          <a:bodyPr/>
+          <a:lstStyle/>
+          <a:p/>
+        </p:txBody>
+      </p:sp>
+      <p:sp>
+        <p:nvSpPr>
+          <p:cNvPr id="4" name="TextBox 3"/>
+          <p:cNvSpPr txBox="1"/>
+          <p:nvPr/>
+        </p:nvSpPr>
+        <p:spPr>
+          <a:xfrm>
+            <a:off x="320040" y="0"/>
+            <a:ext cx="8193024" cy="777240"/>
+          </a:xfrm>
+          <a:prstGeom prst="rect">
+            <a:avLst/>
+          </a:prstGeom>
+          <a:noFill/>
+        </p:spPr>
+        <p:txBody>
+          <a:bodyPr wrap="square">
+            <a:spAutoFit/>
+          </a:bodyPr>
+          <a:lstStyle/>
+          <a:p>
+            <a:pPr algn="l"/>
+            <a:r>
+              <a:rPr b="1" sz="2200">
+                <a:solidFill>
+                  <a:srgbClr val="1A1A2E"/>
+                </a:solidFill>
+                <a:latin typeface="Times New Roman"/>
+              </a:rPr>
+              <a:t>Hydrofoil 결과 (4) — 단일점 선수 센서 비교</a:t>
+            </a:r>
+          </a:p>
+        </p:txBody>
+      </p:sp>
+      <p:sp>
+        <p:nvSpPr>
+          <p:cNvPr id="5" name="TextBox 4"/>
+          <p:cNvSpPr txBox="1"/>
+          <p:nvPr/>
+        </p:nvSpPr>
+        <p:spPr>
+          <a:xfrm>
+            <a:off x="365760" y="804672"/>
+            <a:ext cx="8229600" cy="274320"/>
+          </a:xfrm>
+          <a:prstGeom prst="rect">
+            <a:avLst/>
+          </a:prstGeom>
+          <a:noFill/>
+        </p:spPr>
+        <p:txBody>
+          <a:bodyPr wrap="square">
+            <a:spAutoFit/>
+          </a:bodyPr>
+          <a:lstStyle/>
+          <a:p>
+            <a:pPr algn="l"/>
+            <a:r>
+              <a:rPr b="0" sz="1100">
+                <a:solidFill>
+                  <a:srgbClr val="C05317"/>
+                </a:solidFill>
+                <a:latin typeface="Times New Roman"/>
+              </a:rPr>
+              <a:t>Candela C-8 bow sensor (SP) vs WaveSplat — 5 seeds × 4 scenarios, 30 s each</a:t>
+            </a:r>
+          </a:p>
+        </p:txBody>
+      </p:sp>
+      <p:graphicFrame>
+        <p:nvGraphicFramePr>
+          <p:cNvPr id="6" name="Table 5"/>
+          <p:cNvGraphicFramePr>
+            <a:graphicFrameLocks noGrp="1"/>
+          </p:cNvGraphicFramePr>
+          <p:nvPr/>
+        </p:nvGraphicFramePr>
+        <p:xfrm>
+          <a:off x="365760" y="1115568"/>
+          <a:ext cx="9326880" cy="2148840"/>
+        </p:xfrm>
+        <a:graphic>
+          <a:graphicData uri="http://schemas.openxmlformats.org/drawingml/2006/table">
+            <a:tbl>
+              <a:tblPr firstRow="1" bandRow="1">
+                <a:tableStyleId>{5C22544A-7EE6-4342-B048-85BDC9FD1C3A}</a:tableStyleId>
+              </a:tblPr>
+              <a:tblGrid>
+                <a:gridCol w="2011680"/>
+                <a:gridCol w="1463040"/>
+                <a:gridCol w="1463040"/>
+                <a:gridCol w="1828800"/>
+                <a:gridCol w="1828800"/>
+                <a:gridCol w="731520"/>
+              </a:tblGrid>
+              <a:tr h="429768">
+                <a:tc>
+                  <a:txBody>
+                    <a:bodyPr/>
+                    <a:lstStyle/>
+                    <a:p>
+                      <a:pPr algn="ctr"/>
+                      <a:r>
+                        <a:rPr b="1" sz="1000">
+                          <a:solidFill>
+                            <a:srgbClr val="FFFFFF"/>
+                          </a:solidFill>
+                          <a:latin typeface="Times New Roman"/>
+                        </a:rPr>
+                        <a:t>시나리오</a:t>
+                      </a:r>
+                    </a:p>
+                  </a:txBody>
+                  <a:tcPr>
+                    <a:solidFill>
+                      <a:srgbClr val="1A1A2E"/>
+                    </a:solidFill>
+                  </a:tcPr>
+                </a:tc>
+                <a:tc>
+                  <a:txBody>
+                    <a:bodyPr/>
+                    <a:lstStyle/>
+                    <a:p>
+                      <a:pPr algn="ctr"/>
+                      <a:r>
+                        <a:rPr b="1" sz="1000">
+                          <a:solidFill>
+                            <a:srgbClr val="FFFFFF"/>
+                          </a:solidFill>
+                          <a:latin typeface="Times New Roman"/>
+                        </a:rPr>
+                        <a:t>GT-FF</a:t>
+                      </a:r>
+                    </a:p>
+                  </a:txBody>
+                  <a:tcPr>
+                    <a:solidFill>
+                      <a:srgbClr val="1A1A2E"/>
+                    </a:solidFill>
+                  </a:tcPr>
+                </a:tc>
+                <a:tc>
+                  <a:txBody>
+                    <a:bodyPr/>
+                    <a:lstStyle/>
+                    <a:p>
+                      <a:pPr algn="ctr"/>
+                      <a:r>
+                        <a:rPr b="1" sz="1000">
+                          <a:solidFill>
+                            <a:srgbClr val="FFFFFF"/>
+                          </a:solidFill>
+                          <a:latin typeface="Times New Roman"/>
+                        </a:rPr>
+                        <a:t>WS-FF</a:t>
+                      </a:r>
+                    </a:p>
+                  </a:txBody>
+                  <a:tcPr>
+                    <a:solidFill>
+                      <a:srgbClr val="1A1A2E"/>
+                    </a:solidFill>
+                  </a:tcPr>
+                </a:tc>
+                <a:tc>
+                  <a:txBody>
+                    <a:bodyPr/>
+                    <a:lstStyle/>
+                    <a:p>
+                      <a:pPr algn="ctr"/>
+                      <a:r>
+                        <a:rPr b="1" sz="1000">
+                          <a:solidFill>
+                            <a:srgbClr val="FFFFFF"/>
+                          </a:solidFill>
+                          <a:latin typeface="Times New Roman"/>
+                        </a:rPr>
+                        <a:t>SP-1pt</a:t>
+                      </a:r>
+                    </a:p>
+                  </a:txBody>
+                  <a:tcPr>
+                    <a:solidFill>
+                      <a:srgbClr val="1A1A2E"/>
+                    </a:solidFill>
+                  </a:tcPr>
+                </a:tc>
+                <a:tc>
+                  <a:txBody>
+                    <a:bodyPr/>
+                    <a:lstStyle/>
+                    <a:p>
+                      <a:pPr algn="ctr"/>
+                      <a:r>
+                        <a:rPr b="1" sz="1000">
+                          <a:solidFill>
+                            <a:srgbClr val="FFFFFF"/>
+                          </a:solidFill>
+                          <a:latin typeface="Times New Roman"/>
+                        </a:rPr>
+                        <a:t>SP-temporal</a:t>
+                      </a:r>
+                    </a:p>
+                  </a:txBody>
+                  <a:tcPr>
+                    <a:solidFill>
+                      <a:srgbClr val="1A1A2E"/>
+                    </a:solidFill>
+                  </a:tcPr>
+                </a:tc>
+                <a:tc>
+                  <a:txBody>
+                    <a:bodyPr/>
+                    <a:lstStyle/>
+                    <a:p>
+                      <a:pPr algn="ctr"/>
+                      <a:r>
+                        <a:rPr b="1" sz="1000">
+                          <a:solidFill>
+                            <a:srgbClr val="FFFFFF"/>
+                          </a:solidFill>
+                          <a:latin typeface="Times New Roman"/>
+                        </a:rPr>
+                        <a:t>SP1/GT</a:t>
+                      </a:r>
+                    </a:p>
+                  </a:txBody>
+                  <a:tcPr>
+                    <a:solidFill>
+                      <a:srgbClr val="1A1A2E"/>
+                    </a:solidFill>
+                  </a:tcPr>
+                </a:tc>
+              </a:tr>
+              <a:tr h="429768">
+                <a:tc>
+                  <a:txBody>
+                    <a:bodyPr/>
+                    <a:lstStyle/>
+                    <a:p>
+                      <a:pPr algn="l"/>
+                      <a:r>
+                        <a:rPr b="1" sz="950">
+                          <a:solidFill>
+                            <a:srgbClr val="333333"/>
+                          </a:solidFill>
+                          <a:latin typeface="Times New Roman"/>
+                        </a:rPr>
+                        <a:t>BF3 Head  μ=180° Tp=5s</a:t>
+                      </a:r>
+                    </a:p>
+                  </a:txBody>
+                  <a:tcPr>
+                    <a:solidFill>
+                      <a:srgbClr val="FFFFFF"/>
+                    </a:solidFill>
+                  </a:tcPr>
+                </a:tc>
+                <a:tc>
+                  <a:txBody>
+                    <a:bodyPr/>
+                    <a:lstStyle/>
+                    <a:p>
+                      <a:pPr algn="ctr"/>
+                      <a:r>
+                        <a:rPr b="0" sz="950">
+                          <a:solidFill>
+                            <a:srgbClr val="333333"/>
+                          </a:solidFill>
+                          <a:latin typeface="Times New Roman"/>
+                        </a:rPr>
+                        <a:t>+12.0%(±3.0)</a:t>
+                      </a:r>
+                    </a:p>
+                  </a:txBody>
+                  <a:tcPr>
+                    <a:solidFill>
+                      <a:srgbClr val="FFFFFF"/>
+                    </a:solidFill>
+                  </a:tcPr>
+                </a:tc>
+                <a:tc>
+                  <a:txBody>
+                    <a:bodyPr/>
+                    <a:lstStyle/>
+                    <a:p>
+                      <a:pPr algn="ctr"/>
+                      <a:r>
+                        <a:rPr b="0" sz="950">
+                          <a:solidFill>
+                            <a:srgbClr val="333333"/>
+                          </a:solidFill>
+                          <a:latin typeface="Times New Roman"/>
+                        </a:rPr>
+                        <a:t>+11.9%(±3.3)</a:t>
+                      </a:r>
+                    </a:p>
+                  </a:txBody>
+                  <a:tcPr>
+                    <a:solidFill>
+                      <a:srgbClr val="FFFFFF"/>
+                    </a:solidFill>
+                  </a:tcPr>
+                </a:tc>
+                <a:tc>
+                  <a:txBody>
+                    <a:bodyPr/>
+                    <a:lstStyle/>
+                    <a:p>
+                      <a:pPr algn="ctr"/>
+                      <a:r>
+                        <a:rPr b="0" sz="950">
+                          <a:solidFill>
+                            <a:srgbClr val="333333"/>
+                          </a:solidFill>
+                          <a:latin typeface="Times New Roman"/>
+                        </a:rPr>
+                        <a:t>−13.3%(±0.7)</a:t>
+                      </a:r>
+                    </a:p>
+                  </a:txBody>
+                  <a:tcPr>
+                    <a:solidFill>
+                      <a:srgbClr val="FFD0D0"/>
+                    </a:solidFill>
+                  </a:tcPr>
+                </a:tc>
+                <a:tc>
+                  <a:txBody>
+                    <a:bodyPr/>
+                    <a:lstStyle/>
+                    <a:p>
+                      <a:pPr algn="ctr"/>
+                      <a:r>
+                        <a:rPr b="0" sz="950">
+                          <a:solidFill>
+                            <a:srgbClr val="333333"/>
+                          </a:solidFill>
+                          <a:latin typeface="Times New Roman"/>
+                        </a:rPr>
+                        <a:t>−0.2%(±1.6)</a:t>
+                      </a:r>
+                    </a:p>
+                  </a:txBody>
+                  <a:tcPr>
+                    <a:solidFill>
+                      <a:srgbClr val="FFFFFF"/>
+                    </a:solidFill>
+                  </a:tcPr>
+                </a:tc>
+                <a:tc>
+                  <a:txBody>
+                    <a:bodyPr/>
+                    <a:lstStyle/>
+                    <a:p>
+                      <a:pPr algn="ctr"/>
+                      <a:r>
+                        <a:rPr b="0" sz="950">
+                          <a:solidFill>
+                            <a:srgbClr val="333333"/>
+                          </a:solidFill>
+                          <a:latin typeface="Times New Roman"/>
+                        </a:rPr>
+                        <a:t>−111%</a:t>
+                      </a:r>
+                    </a:p>
+                  </a:txBody>
+                  <a:tcPr>
+                    <a:solidFill>
+                      <a:srgbClr val="FFFFFF"/>
+                    </a:solidFill>
+                  </a:tcPr>
+                </a:tc>
+              </a:tr>
+              <a:tr h="429768">
+                <a:tc>
+                  <a:txBody>
+                    <a:bodyPr/>
+                    <a:lstStyle/>
+                    <a:p>
+                      <a:pPr algn="l"/>
+                      <a:r>
+                        <a:rPr b="1" sz="950">
+                          <a:solidFill>
+                            <a:srgbClr val="333333"/>
+                          </a:solidFill>
+                          <a:latin typeface="Times New Roman"/>
+                        </a:rPr>
+                        <a:t>BF4 Head  μ=180° Tp=7.5s</a:t>
+                      </a:r>
+                    </a:p>
+                  </a:txBody>
+                  <a:tcPr>
+                    <a:solidFill>
+                      <a:srgbClr val="F9FAFB"/>
+                    </a:solidFill>
+                  </a:tcPr>
+                </a:tc>
+                <a:tc>
+                  <a:txBody>
+                    <a:bodyPr/>
+                    <a:lstStyle/>
+                    <a:p>
+                      <a:pPr algn="ctr"/>
+                      <a:r>
+                        <a:rPr b="0" sz="950">
+                          <a:solidFill>
+                            <a:srgbClr val="333333"/>
+                          </a:solidFill>
+                          <a:latin typeface="Times New Roman"/>
+                        </a:rPr>
+                        <a:t>+9.9%(±1.4)</a:t>
+                      </a:r>
+                    </a:p>
+                  </a:txBody>
+                  <a:tcPr>
+                    <a:solidFill>
+                      <a:srgbClr val="F9FAFB"/>
+                    </a:solidFill>
+                  </a:tcPr>
+                </a:tc>
+                <a:tc>
+                  <a:txBody>
+                    <a:bodyPr/>
+                    <a:lstStyle/>
+                    <a:p>
+                      <a:pPr algn="ctr"/>
+                      <a:r>
+                        <a:rPr b="0" sz="950">
+                          <a:solidFill>
+                            <a:srgbClr val="333333"/>
+                          </a:solidFill>
+                          <a:latin typeface="Times New Roman"/>
+                        </a:rPr>
+                        <a:t>+10.0%(±1.3)</a:t>
+                      </a:r>
+                    </a:p>
+                  </a:txBody>
+                  <a:tcPr>
+                    <a:solidFill>
+                      <a:srgbClr val="F9FAFB"/>
+                    </a:solidFill>
+                  </a:tcPr>
+                </a:tc>
+                <a:tc>
+                  <a:txBody>
+                    <a:bodyPr/>
+                    <a:lstStyle/>
+                    <a:p>
+                      <a:pPr algn="ctr"/>
+                      <a:r>
+                        <a:rPr b="0" sz="950">
+                          <a:solidFill>
+                            <a:srgbClr val="333333"/>
+                          </a:solidFill>
+                          <a:latin typeface="Times New Roman"/>
+                        </a:rPr>
+                        <a:t>+7.0%(±1.1)</a:t>
+                      </a:r>
+                    </a:p>
+                  </a:txBody>
+                  <a:tcPr>
+                    <a:solidFill>
+                      <a:srgbClr val="D0F0D8"/>
+                    </a:solidFill>
+                  </a:tcPr>
+                </a:tc>
+                <a:tc>
+                  <a:txBody>
+                    <a:bodyPr/>
+                    <a:lstStyle/>
+                    <a:p>
+                      <a:pPr algn="ctr"/>
+                      <a:r>
+                        <a:rPr b="0" sz="950">
+                          <a:solidFill>
+                            <a:srgbClr val="333333"/>
+                          </a:solidFill>
+                          <a:latin typeface="Times New Roman"/>
+                        </a:rPr>
+                        <a:t>≈0%</a:t>
+                      </a:r>
+                    </a:p>
+                  </a:txBody>
+                  <a:tcPr>
+                    <a:solidFill>
+                      <a:srgbClr val="F9FAFB"/>
+                    </a:solidFill>
+                  </a:tcPr>
+                </a:tc>
+                <a:tc>
+                  <a:txBody>
+                    <a:bodyPr/>
+                    <a:lstStyle/>
+                    <a:p>
+                      <a:pPr algn="ctr"/>
+                      <a:r>
+                        <a:rPr b="0" sz="950">
+                          <a:solidFill>
+                            <a:srgbClr val="333333"/>
+                          </a:solidFill>
+                          <a:latin typeface="Times New Roman"/>
+                        </a:rPr>
+                        <a:t>71%</a:t>
+                      </a:r>
+                    </a:p>
+                  </a:txBody>
+                  <a:tcPr>
+                    <a:solidFill>
+                      <a:srgbClr val="F9FAFB"/>
+                    </a:solidFill>
+                  </a:tcPr>
+                </a:tc>
+              </a:tr>
+              <a:tr h="429768">
+                <a:tc>
+                  <a:txBody>
+                    <a:bodyPr/>
+                    <a:lstStyle/>
+                    <a:p>
+                      <a:pPr algn="l"/>
+                      <a:r>
+                        <a:rPr b="1" sz="950">
+                          <a:solidFill>
+                            <a:srgbClr val="333333"/>
+                          </a:solidFill>
+                          <a:latin typeface="Times New Roman"/>
+                        </a:rPr>
+                        <a:t>BF3 Beam  μ=90°</a:t>
+                      </a:r>
+                    </a:p>
+                  </a:txBody>
+                  <a:tcPr>
+                    <a:solidFill>
+                      <a:srgbClr val="FFFFFF"/>
+                    </a:solidFill>
+                  </a:tcPr>
+                </a:tc>
+                <a:tc>
+                  <a:txBody>
+                    <a:bodyPr/>
+                    <a:lstStyle/>
+                    <a:p>
+                      <a:pPr algn="ctr"/>
+                      <a:r>
+                        <a:rPr b="0" sz="950">
+                          <a:solidFill>
+                            <a:srgbClr val="333333"/>
+                          </a:solidFill>
+                          <a:latin typeface="Times New Roman"/>
+                        </a:rPr>
+                        <a:t>+38.4%(±11.0)</a:t>
+                      </a:r>
+                    </a:p>
+                  </a:txBody>
+                  <a:tcPr>
+                    <a:solidFill>
+                      <a:srgbClr val="FFFFFF"/>
+                    </a:solidFill>
+                  </a:tcPr>
+                </a:tc>
+                <a:tc>
+                  <a:txBody>
+                    <a:bodyPr/>
+                    <a:lstStyle/>
+                    <a:p>
+                      <a:pPr algn="ctr"/>
+                      <a:r>
+                        <a:rPr b="0" sz="950">
+                          <a:solidFill>
+                            <a:srgbClr val="333333"/>
+                          </a:solidFill>
+                          <a:latin typeface="Times New Roman"/>
+                        </a:rPr>
+                        <a:t>+33.0%(±11.3)</a:t>
+                      </a:r>
+                    </a:p>
+                  </a:txBody>
+                  <a:tcPr>
+                    <a:solidFill>
+                      <a:srgbClr val="FFFFFF"/>
+                    </a:solidFill>
+                  </a:tcPr>
+                </a:tc>
+                <a:tc>
+                  <a:txBody>
+                    <a:bodyPr/>
+                    <a:lstStyle/>
+                    <a:p>
+                      <a:pPr algn="ctr"/>
+                      <a:r>
+                        <a:rPr b="0" sz="950">
+                          <a:solidFill>
+                            <a:srgbClr val="333333"/>
+                          </a:solidFill>
+                          <a:latin typeface="Times New Roman"/>
+                        </a:rPr>
+                        <a:t>+21.4%(±31.5)</a:t>
+                      </a:r>
+                    </a:p>
+                  </a:txBody>
+                  <a:tcPr>
+                    <a:solidFill>
+                      <a:srgbClr val="FFF0CC"/>
+                    </a:solidFill>
+                  </a:tcPr>
+                </a:tc>
+                <a:tc>
+                  <a:txBody>
+                    <a:bodyPr/>
+                    <a:lstStyle/>
+                    <a:p>
+                      <a:pPr algn="ctr"/>
+                      <a:r>
+                        <a:rPr b="0" sz="950">
+                          <a:solidFill>
+                            <a:srgbClr val="333333"/>
+                          </a:solidFill>
+                          <a:latin typeface="Times New Roman"/>
+                        </a:rPr>
+                        <a:t>−35.0%(±11.8)</a:t>
+                      </a:r>
+                    </a:p>
+                  </a:txBody>
+                  <a:tcPr>
+                    <a:solidFill>
+                      <a:srgbClr val="FFD0D0"/>
+                    </a:solidFill>
+                  </a:tcPr>
+                </a:tc>
+                <a:tc>
+                  <a:txBody>
+                    <a:bodyPr/>
+                    <a:lstStyle/>
+                    <a:p>
+                      <a:pPr algn="ctr"/>
+                      <a:r>
+                        <a:rPr b="0" sz="950">
+                          <a:solidFill>
+                            <a:srgbClr val="333333"/>
+                          </a:solidFill>
+                          <a:latin typeface="Times New Roman"/>
+                        </a:rPr>
+                        <a:t>56%</a:t>
+                      </a:r>
+                    </a:p>
+                  </a:txBody>
+                  <a:tcPr>
+                    <a:solidFill>
+                      <a:srgbClr val="FFFFFF"/>
+                    </a:solidFill>
+                  </a:tcPr>
+                </a:tc>
+              </a:tr>
+              <a:tr h="429768">
+                <a:tc>
+                  <a:txBody>
+                    <a:bodyPr/>
+                    <a:lstStyle/>
+                    <a:p>
+                      <a:pPr algn="l"/>
+                      <a:r>
+                        <a:rPr b="1" sz="950">
+                          <a:solidFill>
+                            <a:srgbClr val="333333"/>
+                          </a:solidFill>
+                          <a:latin typeface="Times New Roman"/>
+                        </a:rPr>
+                        <a:t>BF3 Quarter  μ=135°</a:t>
+                      </a:r>
+                    </a:p>
+                  </a:txBody>
+                  <a:tcPr>
+                    <a:solidFill>
+                      <a:srgbClr val="F9FAFB"/>
+                    </a:solidFill>
+                  </a:tcPr>
+                </a:tc>
+                <a:tc>
+                  <a:txBody>
+                    <a:bodyPr/>
+                    <a:lstStyle/>
+                    <a:p>
+                      <a:pPr algn="ctr"/>
+                      <a:r>
+                        <a:rPr b="0" sz="950">
+                          <a:solidFill>
+                            <a:srgbClr val="333333"/>
+                          </a:solidFill>
+                          <a:latin typeface="Times New Roman"/>
+                        </a:rPr>
+                        <a:t>+15.2%(±7.2)</a:t>
+                      </a:r>
+                    </a:p>
+                  </a:txBody>
+                  <a:tcPr>
+                    <a:solidFill>
+                      <a:srgbClr val="F9FAFB"/>
+                    </a:solidFill>
+                  </a:tcPr>
+                </a:tc>
+                <a:tc>
+                  <a:txBody>
+                    <a:bodyPr/>
+                    <a:lstStyle/>
+                    <a:p>
+                      <a:pPr algn="ctr"/>
+                      <a:r>
+                        <a:rPr b="0" sz="950">
+                          <a:solidFill>
+                            <a:srgbClr val="333333"/>
+                          </a:solidFill>
+                          <a:latin typeface="Times New Roman"/>
+                        </a:rPr>
+                        <a:t>+15.2%(±7.3)</a:t>
+                      </a:r>
+                    </a:p>
+                  </a:txBody>
+                  <a:tcPr>
+                    <a:solidFill>
+                      <a:srgbClr val="F9FAFB"/>
+                    </a:solidFill>
+                  </a:tcPr>
+                </a:tc>
+                <a:tc>
+                  <a:txBody>
+                    <a:bodyPr/>
+                    <a:lstStyle/>
+                    <a:p>
+                      <a:pPr algn="ctr"/>
+                      <a:r>
+                        <a:rPr b="0" sz="950">
+                          <a:solidFill>
+                            <a:srgbClr val="333333"/>
+                          </a:solidFill>
+                          <a:latin typeface="Times New Roman"/>
+                        </a:rPr>
+                        <a:t>+2.5%(±9.2)</a:t>
+                      </a:r>
+                    </a:p>
+                  </a:txBody>
+                  <a:tcPr>
+                    <a:solidFill>
+                      <a:srgbClr val="FFF0CC"/>
+                    </a:solidFill>
+                  </a:tcPr>
+                </a:tc>
+                <a:tc>
+                  <a:txBody>
+                    <a:bodyPr/>
+                    <a:lstStyle/>
+                    <a:p>
+                      <a:pPr algn="ctr"/>
+                      <a:r>
+                        <a:rPr b="0" sz="950">
+                          <a:solidFill>
+                            <a:srgbClr val="333333"/>
+                          </a:solidFill>
+                          <a:latin typeface="Times New Roman"/>
+                        </a:rPr>
+                        <a:t>−1.9%(±3.3)</a:t>
+                      </a:r>
+                    </a:p>
+                  </a:txBody>
+                  <a:tcPr>
+                    <a:solidFill>
+                      <a:srgbClr val="F9FAFB"/>
+                    </a:solidFill>
+                  </a:tcPr>
+                </a:tc>
+                <a:tc>
+                  <a:txBody>
+                    <a:bodyPr/>
+                    <a:lstStyle/>
+                    <a:p>
+                      <a:pPr algn="ctr"/>
+                      <a:r>
+                        <a:rPr b="0" sz="950">
+                          <a:solidFill>
+                            <a:srgbClr val="333333"/>
+                          </a:solidFill>
+                          <a:latin typeface="Times New Roman"/>
+                        </a:rPr>
+                        <a:t>16%</a:t>
+                      </a:r>
+                    </a:p>
+                  </a:txBody>
+                  <a:tcPr>
+                    <a:solidFill>
+                      <a:srgbClr val="F9FAFB"/>
+                    </a:solidFill>
+                  </a:tcPr>
+                </a:tc>
+              </a:tr>
+            </a:tbl>
+          </a:graphicData>
+        </a:graphic>
+      </p:graphicFrame>
+      <p:sp>
+        <p:nvSpPr>
+          <p:cNvPr id="7" name="TextBox 6"/>
+          <p:cNvSpPr txBox="1"/>
+          <p:nvPr/>
+        </p:nvSpPr>
+        <p:spPr>
+          <a:xfrm>
+            <a:off x="365760" y="3383280"/>
+            <a:ext cx="4023360" cy="2880360"/>
+          </a:xfrm>
+          <a:prstGeom prst="rect">
+            <a:avLst/>
+          </a:prstGeom>
+          <a:noFill/>
+        </p:spPr>
+        <p:txBody>
+          <a:bodyPr wrap="square">
+            <a:spAutoFit/>
+          </a:bodyPr>
+          <a:lstStyle/>
+          <a:p>
+            <a:pPr algn="l"/>
+            <a:r>
+              <a:rPr b="1" sz="1200">
+                <a:solidFill>
+                  <a:srgbClr val="C05317"/>
+                </a:solidFill>
+                <a:latin typeface="Times New Roman"/>
+              </a:rPr>
+              <a:t>핵심 발견</a:t>
+            </a:r>
+          </a:p>
+          <a:p>
+            <a:pPr algn="l">
+              <a:spcBef>
+                <a:spcPts val="400"/>
+              </a:spcBef>
+            </a:pPr>
+            <a:r>
+              <a:rPr b="0" sz="950">
+                <a:solidFill>
+                  <a:srgbClr val="333333"/>
+                </a:solidFill>
+                <a:latin typeface="Times New Roman"/>
+              </a:rPr>
+              <a:t>▪ BF3 Head sea: SP-1pt 일관적 악화 (−13.3%, std ±0.7%)</a:t>
+            </a:r>
+          </a:p>
+          <a:p>
+            <a:pPr algn="l"/>
+            <a:r>
+              <a:rPr b="0" sz="850">
+                <a:solidFill>
+                  <a:srgbClr val="6B7280"/>
+                </a:solidFill>
+                <a:latin typeface="Times New Roman"/>
+              </a:rPr>
+              <a:t>   → per-foil 위상 오차 Δφ ≈ 21°, sensor quality 무관한 구조적 한계</a:t>
+            </a:r>
+          </a:p>
+          <a:p>
+            <a:pPr algn="l">
+              <a:spcBef>
+                <a:spcPts val="400"/>
+              </a:spcBef>
+            </a:pPr>
+            <a:r>
+              <a:rPr b="0" sz="950">
+                <a:solidFill>
+                  <a:srgbClr val="333333"/>
+                </a:solidFill>
+                <a:latin typeface="Times New Roman"/>
+              </a:rPr>
+              <a:t>▪ BF3 Beam sea: SP-1pt 극도로 불안정 (std ±31.5%, σ/μ≈1.5)</a:t>
+            </a:r>
+          </a:p>
+          <a:p>
+            <a:pPr algn="l"/>
+            <a:r>
+              <a:rPr b="0" sz="850">
+                <a:solidFill>
+                  <a:srgbClr val="6B7280"/>
+                </a:solidFill>
+                <a:latin typeface="Times New Roman"/>
+              </a:rPr>
+              <a:t>   → directional spread로 인한 seed-dependent 위상 충돌</a:t>
+            </a:r>
+          </a:p>
+          <a:p>
+            <a:pPr algn="l">
+              <a:spcBef>
+                <a:spcPts val="400"/>
+              </a:spcBef>
+            </a:pPr>
+            <a:r>
+              <a:rPr b="0" sz="950">
+                <a:solidFill>
+                  <a:srgbClr val="333333"/>
+                </a:solidFill>
+                <a:latin typeface="Times New Roman"/>
+              </a:rPr>
+              <a:t>▪ SP-temporal: beam sea에서 일관적 악화 (−35.0%)</a:t>
+            </a:r>
+          </a:p>
+          <a:p>
+            <a:pPr algn="l"/>
+            <a:r>
+              <a:rPr b="0" sz="850">
+                <a:solidFill>
+                  <a:srgbClr val="6B7280"/>
+                </a:solidFill>
+                <a:latin typeface="Times New Roman"/>
+              </a:rPr>
+              <a:t>   → head-sea 가정 (∂η/∂x ≈ −∂η/∂t/c) 이 beam에서 부호 역전</a:t>
+            </a:r>
+          </a:p>
+          <a:p>
+            <a:pPr algn="l">
+              <a:spcBef>
+                <a:spcPts val="400"/>
+              </a:spcBef>
+            </a:pPr>
+            <a:r>
+              <a:rPr b="0" sz="950">
+                <a:solidFill>
+                  <a:srgbClr val="333333"/>
+                </a:solidFill>
+                <a:latin typeface="Times New Roman"/>
+              </a:rPr>
+              <a:t>▪ SP-1pt가 유효한 조건: Head sea + 장주기 너울 (Tp &gt; 7s)</a:t>
+            </a:r>
+          </a:p>
+          <a:p>
+            <a:pPr algn="l"/>
+            <a:r>
+              <a:rPr b="0" sz="850">
+                <a:solidFill>
+                  <a:srgbClr val="6B7280"/>
+                </a:solidFill>
+                <a:latin typeface="Times New Roman"/>
+              </a:rPr>
+              <a:t>   → BF4 head sea에서만 71% GT 회수 가능</a:t>
+            </a:r>
+          </a:p>
+        </p:txBody>
+      </p:sp>
+      <p:sp>
+        <p:nvSpPr>
+          <p:cNvPr id="8" name="TextBox 7"/>
+          <p:cNvSpPr txBox="1"/>
+          <p:nvPr/>
+        </p:nvSpPr>
+        <p:spPr>
+          <a:xfrm>
+            <a:off x="4526280" y="3383280"/>
+            <a:ext cx="4434840" cy="274320"/>
+          </a:xfrm>
+          <a:prstGeom prst="rect">
+            <a:avLst/>
+          </a:prstGeom>
+          <a:noFill/>
+        </p:spPr>
+        <p:txBody>
+          <a:bodyPr wrap="none">
+            <a:spAutoFit/>
+          </a:bodyPr>
+          <a:lstStyle/>
+          <a:p>
+            <a:r>
+              <a:rPr b="1" sz="1200">
+                <a:solidFill>
+                  <a:srgbClr val="C05317"/>
+                </a:solidFill>
+                <a:latin typeface="Times New Roman"/>
+              </a:rPr>
+              <a:t>WaveSplat이 필요한 이유 — 물리적 설명</a:t>
+            </a:r>
+          </a:p>
+        </p:txBody>
+      </p:sp>
+      <p:sp>
+        <p:nvSpPr>
+          <p:cNvPr id="9" name="TextBox 8"/>
+          <p:cNvSpPr txBox="1"/>
+          <p:nvPr/>
+        </p:nvSpPr>
+        <p:spPr>
+          <a:xfrm>
+            <a:off x="4526280" y="3703320"/>
+            <a:ext cx="4434840" cy="2560320"/>
+          </a:xfrm>
+          <a:prstGeom prst="rect">
+            <a:avLst/>
+          </a:prstGeom>
+          <a:noFill/>
+        </p:spPr>
+        <p:txBody>
+          <a:bodyPr wrap="square">
+            <a:spAutoFit/>
+          </a:bodyPr>
+          <a:lstStyle/>
+          <a:p/>
+          <a:p>
+            <a:pPr>
+              <a:spcBef>
+                <a:spcPts val="500"/>
+              </a:spcBef>
+            </a:pPr>
+            <a:r>
+              <a:rPr b="1" sz="950">
+                <a:solidFill>
+                  <a:srgbClr val="1A1A2E"/>
+                </a:solidFill>
+                <a:latin typeface="Times New Roman"/>
+              </a:rPr>
+              <a:t>▸ Per-foil 독립 평가: </a:t>
+            </a:r>
+            <a:r>
+              <a:rPr b="0" sz="950">
+                <a:solidFill>
+                  <a:srgbClr val="333333"/>
+                </a:solidFill>
+                <a:latin typeface="Times New Roman"/>
+              </a:rPr>
+              <a:t>WaveSplat은 각 foil의 preview 위치에서 스펙트럼 모델을 독립 평가 → 4.5m 간격의 위상 차이를 정확히 반영</a:t>
+            </a:r>
+          </a:p>
+          <a:p>
+            <a:pPr>
+              <a:spcBef>
+                <a:spcPts val="500"/>
+              </a:spcBef>
+            </a:pPr>
+            <a:r>
+              <a:rPr b="1" sz="950">
+                <a:solidFill>
+                  <a:srgbClr val="1A1A2E"/>
+                </a:solidFill>
+                <a:latin typeface="Times New Roman"/>
+              </a:rPr>
+              <a:t>▸ 방향 로버스트: </a:t>
+            </a:r>
+            <a:r>
+              <a:rPr b="0" sz="950">
+                <a:solidFill>
+                  <a:srgbClr val="333333"/>
+                </a:solidFill>
+                <a:latin typeface="Times New Roman"/>
+              </a:rPr>
+              <a:t>directional spread가 있는 실해상 스펙트럼에서 SP-1pt는 seed에 따라 도움/해로움이 바뀜 (σ/μ≈1.5), WaveSplat은 σ/μ≈0.34로 안정</a:t>
+            </a:r>
+          </a:p>
+          <a:p>
+            <a:pPr>
+              <a:spcBef>
+                <a:spcPts val="500"/>
+              </a:spcBef>
+            </a:pPr>
+            <a:r>
+              <a:rPr b="1" sz="950">
+                <a:solidFill>
+                  <a:srgbClr val="1A1A2E"/>
+                </a:solidFill>
+                <a:latin typeface="Times New Roman"/>
+              </a:rPr>
+              <a:t>▸ SP-temporal의 근본 한계: </a:t>
+            </a:r>
+            <a:r>
+              <a:rPr b="0" sz="950">
+                <a:solidFill>
+                  <a:srgbClr val="333333"/>
+                </a:solidFill>
+                <a:latin typeface="Times New Roman"/>
+              </a:rPr>
+              <a:t>∂η/∂x = −(1/c)∂η/∂t 는 head-sea 가정. 이를 제거하려면 방향 정보가 필요 → WaveSplat이 이미 제공</a:t>
+            </a:r>
+          </a:p>
+        </p:txBody>
+      </p:sp>
+      <p:sp>
+        <p:nvSpPr>
+          <p:cNvPr id="10" name="TextBox 9"/>
+          <p:cNvSpPr txBox="1"/>
+          <p:nvPr/>
+        </p:nvSpPr>
+        <p:spPr>
+          <a:xfrm>
+            <a:off x="365760" y="6263640"/>
+            <a:ext cx="8412480" cy="365760"/>
+          </a:xfrm>
+          <a:prstGeom prst="rect">
+            <a:avLst/>
+          </a:prstGeom>
+          <a:noFill/>
+        </p:spPr>
+        <p:txBody>
+          <a:bodyPr wrap="none">
+            <a:spAutoFit/>
+          </a:bodyPr>
+          <a:lstStyle/>
+          <a:p>
+            <a:pPr algn="ctr"/>
+            <a:r>
+              <a:rPr b="1" sz="1000">
+                <a:solidFill>
+                  <a:srgbClr val="C05317"/>
+                </a:solidFill>
+                <a:latin typeface="Times New Roman"/>
+              </a:rPr>
+              <a:t>단일점 센서 유효 영역: Head sea 전용 + 장주기 너울 (Tp &gt; 7s)  |  혼합 항로·단주기·beam sea → LiDAR + WaveSplat 필수</a:t>
             </a:r>
           </a:p>
         </p:txBody>

--- a/wavesplat/docs/labmeeting_wavesplat.pptx
+++ b/wavesplat/docs/labmeeting_wavesplat.pptx
@@ -39,9 +39,9 @@
     <p:sldId id="280" r:id="rId33"/>
     <p:sldId id="281" r:id="rId34"/>
     <p:sldId id="282" r:id="rId35"/>
-    <p:sldId id="286" r:id="rId39"/>
+    <p:sldId id="287" r:id="rId41"/>
+    <p:sldId id="286" r:id="rId40"/>
     <p:sldId id="283" r:id="rId36"/>
-    <p:sldId id="284" r:id="rId37"/>
   </p:sldIdLst>
   <p:sldSz cx="9144000" cy="6858000" type="screen4x3"/>
   <p:notesSz cx="9926638" cy="6797675"/>
@@ -5492,6 +5492,22 @@
               <a:t>※ 모든 baseline에 동일 적용 — metric cherry-picking 방지 (사전 등록)</a:t>
             </a:r>
           </a:p>
+          <a:p>
+            <a:pPr algn="l">
+              <a:spcBef>
+                <a:spcPts val="400"/>
+              </a:spcBef>
+            </a:pPr>
+            <a:r>
+              <a:rPr b="0" sz="900">
+                <a:solidFill>
+                  <a:srgbClr val="1A1A2E"/>
+                </a:solidFill>
+                <a:latin typeface="Times New Roman"/>
+              </a:rPr>
+              <a:t>왜 5개? 단일 metric의 함정: nRMSE만 보면 zero-predictor(ẑ=0)도 좋아 보임 (Hs로 나누므로). SS&gt;0이 가장 약한 유용성 기준이며, VR+ρ가 함께 있어야 "진폭도 맞고 형상도 맞음"을 확인 가능. RMSE_unobs는 physics prior의 직접 증거 (격자 보간은 이 영역에서 성능 0).</a:t>
+            </a:r>
+          </a:p>
         </p:txBody>
       </p:sp>
     </p:spTree>
@@ -6162,6 +6178,54 @@
                 <a:latin typeface="Times New Roman"/>
               </a:rPr>
               <a:t>한계 (panel이 함께 노출): VR=0.66 → 진폭 ~34% 과소추정 (Adam pruning 부작용)</a:t>
+            </a:r>
+          </a:p>
+          <a:p>
+            <a:pPr algn="l">
+              <a:spcBef>
+                <a:spcPts val="400"/>
+              </a:spcBef>
+            </a:pPr>
+            <a:r>
+              <a:rPr b="0" sz="950">
+                <a:solidFill>
+                  <a:srgbClr val="333333"/>
+                </a:solidFill>
+                <a:latin typeface="Times New Roman"/>
+              </a:rPr>
+              <a:t>▸ Pearson ρ=0.782 (WS): 위상과 형상이 맞음. ETKF ρ=0.109 → VR≈0.90이지만 위상 완전 틀림 (진폭은 맞으나 엉뚱한 위치). GPR ρ=0.210 → 거의 zero-predictor.</a:t>
+            </a:r>
+          </a:p>
+          <a:p>
+            <a:pPr algn="l">
+              <a:spcBef>
+                <a:spcPts val="200"/>
+              </a:spcBef>
+            </a:pPr>
+            <a:r>
+              <a:rPr b="0" sz="950">
+                <a:solidFill>
+                  <a:srgbClr val="333333"/>
+                </a:solidFill>
+                <a:latin typeface="Times New Roman"/>
+              </a:rPr>
+              <a:t>▸ VR=0.660 (WS 한계): 진폭 34% 과소추정. Adam pruning이 작은 component 제거 → energy under-representation. 향후 adaptive amplitude scaling으로 개선 가능.</a:t>
+            </a:r>
+          </a:p>
+          <a:p>
+            <a:pPr algn="l">
+              <a:spcBef>
+                <a:spcPts val="200"/>
+              </a:spcBef>
+            </a:pPr>
+            <a:r>
+              <a:rPr b="0" sz="950">
+                <a:solidFill>
+                  <a:srgbClr val="333333"/>
+                </a:solidFill>
+                <a:latin typeface="Times New Roman"/>
+              </a:rPr>
+              <a:t>▸ Speed: WS 13.4 ms &lt; 100 ms (10 Hz 실시간 가능). ETKF 132.6 ms → 10 Hz에서 지연 누적. GPR &gt;200 ms → 실시간 불가.</a:t>
             </a:r>
           </a:p>
         </p:txBody>
@@ -7022,6 +7086,54 @@
               <a:t>※ 12 episode는 BF2~BF5 × 1/2/5/15/30 components 균등 샘플 — cherry-pick 아님 (사전 등록)</a:t>
             </a:r>
           </a:p>
+          <a:p>
+            <a:pPr algn="l">
+              <a:spcBef>
+                <a:spcPts val="200"/>
+              </a:spcBef>
+            </a:pPr>
+            <a:r>
+              <a:rPr b="0" sz="800">
+                <a:solidFill>
+                  <a:srgbClr val="333333"/>
+                </a:solidFill>
+                <a:latin typeface="Times New Roman"/>
+              </a:rPr>
+              <a:t/>
+            </a:r>
+          </a:p>
+          <a:p>
+            <a:pPr algn="l">
+              <a:spcBef>
+                <a:spcPts val="200"/>
+              </a:spcBef>
+            </a:pPr>
+            <a:r>
+              <a:rPr b="0" sz="950">
+                <a:solidFill>
+                  <a:srgbClr val="333333"/>
+                </a:solidFill>
+                <a:latin typeface="Times New Roman"/>
+              </a:rPr>
+              <a:t>상세: BF2 1-comp에서 WS nRMSE≈0.06 vs ETKF≈0.51 (8.5× 격차) — 단일 plane wave는 WaveSplat 이상 조건.</a:t>
+            </a:r>
+          </a:p>
+          <a:p>
+            <a:pPr algn="l">
+              <a:spcBef>
+                <a:spcPts val="200"/>
+              </a:spcBef>
+            </a:pPr>
+            <a:r>
+              <a:rPr b="0" sz="950">
+                <a:solidFill>
+                  <a:srgbClr val="333333"/>
+                </a:solidFill>
+                <a:latin typeface="Times New Roman"/>
+              </a:rPr>
+              <a:t>복잡 sea: BF4/BF5 30-comp에서 WS≈0.32 vs ETKF≈0.36 — 격차 축소. 30+ component crowding 시 WaveSplat 방향 분리 한계. 이 영역에서는 LETKF가 경쟁적 (Slide 23 참고).</a:t>
+            </a:r>
+          </a:p>
         </p:txBody>
       </p:sp>
     </p:spTree>
@@ -11887,6 +11999,38 @@
                 <a:latin typeface="Times New Roman"/>
               </a:rPr>
               <a:t>▪ 속도: WS 8.1× faster</a:t>
+            </a:r>
+          </a:p>
+          <a:p>
+            <a:pPr algn="l">
+              <a:spcBef>
+                <a:spcPts val="200"/>
+              </a:spcBef>
+            </a:pPr>
+            <a:r>
+              <a:rPr b="0" sz="950">
+                <a:solidFill>
+                  <a:srgbClr val="333333"/>
+                </a:solidFill>
+                <a:latin typeface="Times New Roman"/>
+              </a:rPr>
+              <a:t>N≤5 (단순 sea): WS 압도적 (2~8× nRMSE 격차, 10× 빠름). 실해상 70%+ 시간 = Hs&lt;1 m 이므로 이 영역이 실용적으로 가장 중요.</a:t>
+            </a:r>
+          </a:p>
+          <a:p>
+            <a:pPr algn="l">
+              <a:spcBef>
+                <a:spcPts val="200"/>
+              </a:spcBef>
+            </a:pPr>
+            <a:r>
+              <a:rPr b="0" sz="950">
+                <a:solidFill>
+                  <a:srgbClr val="333333"/>
+                </a:solidFill>
+                <a:latin typeface="Times New Roman"/>
+              </a:rPr>
+              <a:t>N≥15 (복잡 sea): LETKF 우세. Gaspari-Cohn localization이 directional crowding에서 강점. 속도: LETKF 8.1× 느림 but 정확도 보상.</a:t>
             </a:r>
           </a:p>
         </p:txBody>
@@ -14700,15 +14844,7 @@
         <p:txBody>
           <a:bodyPr/>
           <a:lstStyle/>
-          <a:p>
-            <a:pPr/>
-            <a:r>
-              <a:rPr sz="2200" b="0" i="0">
-                <a:latin typeface="Times New Roman"/>
-              </a:rPr>
-              <a:t>한계와 지금까지의 연구 Contributions</a:t>
-            </a:r>
-          </a:p>
+          <a:p/>
         </p:txBody>
       </p:sp>
       <p:sp>
@@ -14719,8 +14855,8 @@
         </p:nvSpPr>
         <p:spPr>
           <a:xfrm>
-            <a:off x="365760" y="868680"/>
-            <a:ext cx="4114800" cy="274320"/>
+            <a:off x="320040" y="0"/>
+            <a:ext cx="8193024" cy="777240"/>
           </a:xfrm>
           <a:prstGeom prst="rect">
             <a:avLst/>
@@ -14728,19 +14864,20 @@
           <a:noFill/>
         </p:spPr>
         <p:txBody>
-          <a:bodyPr wrap="none">
+          <a:bodyPr wrap="square">
             <a:spAutoFit/>
           </a:bodyPr>
           <a:lstStyle/>
           <a:p>
-            <a:r>
-              <a:rPr sz="1200" b="1">
-                <a:solidFill>
-                  <a:srgbClr val="C05317"/>
-                </a:solidFill>
-                <a:latin typeface="Times New Roman"/>
-              </a:rPr>
-              <a:t>한계 (정직한 보고)</a:t>
+            <a:pPr algn="l"/>
+            <a:r>
+              <a:rPr b="1" sz="2000">
+                <a:solidFill>
+                  <a:srgbClr val="1A1A2E"/>
+                </a:solidFill>
+                <a:latin typeface="Times New Roman"/>
+              </a:rPr>
+              <a:t>Hydrofoil 결과 (4a) — 단일점 선수 센서 비교: 결과 &amp; 메커니즘</a:t>
             </a:r>
           </a:p>
         </p:txBody>
@@ -14753,8 +14890,8 @@
         </p:nvSpPr>
         <p:spPr>
           <a:xfrm>
-            <a:off x="365760" y="1188720"/>
-            <a:ext cx="4114800" cy="4846320"/>
+            <a:off x="365760" y="786384"/>
+            <a:ext cx="8412480" cy="256032"/>
           </a:xfrm>
           <a:prstGeom prst="rect">
             <a:avLst/>
@@ -14767,193 +14904,759 @@
           </a:bodyPr>
           <a:lstStyle/>
           <a:p>
-            <a:r>
-              <a:rPr sz="1100" b="1" i="0">
-                <a:solidFill>
-                  <a:srgbClr val="1A1A2E"/>
-                </a:solidFill>
-                <a:latin typeface="Times New Roman"/>
-              </a:rPr>
-              <a:t>WaveSplat 추정</a:t>
-            </a:r>
-          </a:p>
-          <a:p>
-            <a:r>
-              <a:rPr sz="1000" b="0" i="0">
-                <a:solidFill>
-                  <a:srgbClr val="333333"/>
-                </a:solidFill>
-                <a:latin typeface="Times New Roman"/>
-              </a:rPr>
-              <a:t>▪ VR=0.66 → 진폭 ~34% 과소추정 (Adam pruning 부작용)</a:t>
-            </a:r>
-          </a:p>
-          <a:p>
-            <a:r>
-              <a:rPr sz="1000" b="0" i="0">
-                <a:solidFill>
-                  <a:srgbClr val="333333"/>
-                </a:solidFill>
-                <a:latin typeface="Times New Roman"/>
-              </a:rPr>
-              <a:t>▪ 30+ component crowding 시 방향 분리 어려움 (k-space에서 인접 peak)</a:t>
-            </a:r>
-          </a:p>
-          <a:p>
-            <a:r>
-              <a:rPr sz="1000" b="0" i="0">
-                <a:solidFill>
-                  <a:srgbClr val="333333"/>
-                </a:solidFill>
-                <a:latin typeface="Times New Roman"/>
-              </a:rPr>
-              <a:t>   → multi-frame 방향 voting / vessel yaw 변화 활용으로 개선 가능</a:t>
-            </a:r>
-          </a:p>
-          <a:p>
-            <a:r>
-              <a:rPr sz="1000" b="0" i="0">
-                <a:solidFill>
-                  <a:srgbClr val="333333"/>
-                </a:solidFill>
-                <a:latin typeface="Times New Roman"/>
-              </a:rPr>
-              <a:t>▪ Adam momentum의 부호 진동 → 진폭 감쇠 잔존</a:t>
-            </a:r>
-          </a:p>
-          <a:p>
-            <a:r>
-              <a:rPr sz="1000" b="0" i="0">
-                <a:solidFill>
-                  <a:srgbClr val="333333"/>
-                </a:solidFill>
-                <a:latin typeface="Times New Roman"/>
-              </a:rPr>
-              <a:t>▪ N_true ≥ 30 → 성분 수 표현력 한계</a:t>
-            </a:r>
-          </a:p>
-          <a:p>
-            <a:r>
-              <a:rPr sz="1000" b="0" i="0">
-                <a:solidFill>
-                  <a:srgbClr val="333333"/>
-                </a:solidFill>
-                <a:latin typeface="Times New Roman"/>
-              </a:rPr>
-              <a:t/>
-            </a:r>
-          </a:p>
-          <a:p>
-            <a:r>
-              <a:rPr sz="1100" b="1" i="0">
-                <a:solidFill>
-                  <a:srgbClr val="1A1A2E"/>
-                </a:solidFill>
-                <a:latin typeface="Times New Roman"/>
-              </a:rPr>
-              <a:t>Hydrofoil 응용</a:t>
-            </a:r>
-          </a:p>
-          <a:p>
-            <a:r>
-              <a:rPr sz="1000" b="0" i="0">
-                <a:solidFill>
-                  <a:srgbClr val="333333"/>
-                </a:solidFill>
-                <a:latin typeface="Times New Roman"/>
-              </a:rPr>
-              <a:t>▪ BF4 E2E → 37% (direction error 전파)</a:t>
-            </a:r>
-          </a:p>
-          <a:p>
-            <a:r>
-              <a:rPr sz="1000" b="0" i="0">
-                <a:solidFill>
-                  <a:srgbClr val="333333"/>
-                </a:solidFill>
-                <a:latin typeface="Times New Roman"/>
-              </a:rPr>
-              <a:t>▪ 2DOF (heave+pitch) — roll은 별도 roll foil 담당</a:t>
-            </a:r>
-          </a:p>
-          <a:p>
-            <a:r>
-              <a:rPr sz="1000" b="0" i="0">
-                <a:solidFill>
-                  <a:srgbClr val="333333"/>
-                </a:solidFill>
-                <a:latin typeface="Times New Roman"/>
-              </a:rPr>
-              <a:t>▪ 선형 foil model (ventilation 간소화)</a:t>
-            </a:r>
-          </a:p>
-          <a:p>
-            <a:r>
-              <a:rPr sz="1000" b="0" i="0">
-                <a:solidFill>
-                  <a:srgbClr val="333333"/>
-                </a:solidFill>
-                <a:latin typeface="Times New Roman"/>
-              </a:rPr>
-              <a:t/>
-            </a:r>
-          </a:p>
-          <a:p>
-            <a:r>
-              <a:rPr sz="1100" b="1" i="0">
-                <a:solidFill>
-                  <a:srgbClr val="1A1A2E"/>
-                </a:solidFill>
-                <a:latin typeface="Times New Roman"/>
-              </a:rPr>
-              <a:t>공통</a:t>
-            </a:r>
-          </a:p>
-          <a:p>
-            <a:r>
-              <a:rPr sz="1000" b="0" i="0">
-                <a:solidFill>
-                  <a:srgbClr val="333333"/>
-                </a:solidFill>
-                <a:latin typeface="Times New Roman"/>
-              </a:rPr>
-              <a:t>▪ 시뮬레이션 전용 → 실측 검증 필요 (수조 + 실선)</a:t>
-            </a:r>
-          </a:p>
-          <a:p>
-            <a:r>
-              <a:rPr sz="1000" b="0" i="0">
-                <a:solidFill>
-                  <a:srgbClr val="333333"/>
-                </a:solidFill>
-                <a:latin typeface="Times New Roman"/>
-              </a:rPr>
-              <a:t>▪ 선형 파도 모델 → Stokes-2+ 미반영</a:t>
-            </a:r>
-          </a:p>
-          <a:p>
-            <a:r>
-              <a:rPr sz="1000" b="0" i="0">
-                <a:solidFill>
-                  <a:srgbClr val="333333"/>
-                </a:solidFill>
-                <a:latin typeface="Times New Roman"/>
-              </a:rPr>
-              <a:t>▪ 해류·바람 변화에 따른 k 천이 미추정</a:t>
-            </a:r>
-          </a:p>
-        </p:txBody>
-      </p:sp>
-      <p:sp>
-        <p:nvSpPr>
-          <p:cNvPr id="6" name="TextBox 5"/>
+            <a:pPr algn="l"/>
+            <a:r>
+              <a:rPr b="0" sz="950">
+                <a:solidFill>
+                  <a:srgbClr val="C05317"/>
+                </a:solidFill>
+                <a:latin typeface="Times New Roman"/>
+              </a:rPr>
+              <a:t>Candela 선수 센서(SP-1pt / SP-temporal) vs WaveSplat — 5 wave realisations × 4 scenarios, 30 s each  |  단위: aRMS 개선율[%]</a:t>
+            </a:r>
+          </a:p>
+        </p:txBody>
+      </p:sp>
+      <p:graphicFrame>
+        <p:nvGraphicFramePr>
+          <p:cNvPr id="6" name="Table 5"/>
+          <p:cNvGraphicFramePr>
+            <a:graphicFrameLocks noGrp="1"/>
+          </p:cNvGraphicFramePr>
+          <p:nvPr/>
+        </p:nvGraphicFramePr>
+        <p:xfrm>
+          <a:off x="320040" y="1069848"/>
+          <a:ext cx="9006840" cy="2011680"/>
+        </p:xfrm>
+        <a:graphic>
+          <a:graphicData uri="http://schemas.openxmlformats.org/drawingml/2006/table">
+            <a:tbl>
+              <a:tblPr firstRow="1" bandRow="1">
+                <a:tableStyleId>{5C22544A-7EE6-4342-B048-85BDC9FD1C3A}</a:tableStyleId>
+              </a:tblPr>
+              <a:tblGrid>
+                <a:gridCol w="1920240"/>
+                <a:gridCol w="1417320"/>
+                <a:gridCol w="1417320"/>
+                <a:gridCol w="1783080"/>
+                <a:gridCol w="1783080"/>
+                <a:gridCol w="685800"/>
+              </a:tblGrid>
+              <a:tr h="402336">
+                <a:tc>
+                  <a:txBody>
+                    <a:bodyPr/>
+                    <a:lstStyle/>
+                    <a:p>
+                      <a:pPr algn="ctr"/>
+                      <a:r>
+                        <a:rPr b="1" sz="950">
+                          <a:solidFill>
+                            <a:srgbClr val="FFFFFF"/>
+                          </a:solidFill>
+                          <a:latin typeface="Times New Roman"/>
+                        </a:rPr>
+                        <a:t>시나리오 (Hs / Tp / μ)</a:t>
+                      </a:r>
+                    </a:p>
+                  </a:txBody>
+                  <a:tcPr>
+                    <a:solidFill>
+                      <a:srgbClr val="1A1A2E"/>
+                    </a:solidFill>
+                  </a:tcPr>
+                </a:tc>
+                <a:tc>
+                  <a:txBody>
+                    <a:bodyPr/>
+                    <a:lstStyle/>
+                    <a:p>
+                      <a:pPr algn="ctr"/>
+                      <a:r>
+                        <a:rPr b="1" sz="950">
+                          <a:solidFill>
+                            <a:srgbClr val="FFFFFF"/>
+                          </a:solidFill>
+                          <a:latin typeface="Times New Roman"/>
+                        </a:rPr>
+                        <a:t>GT-FF ↑</a:t>
+                      </a:r>
+                    </a:p>
+                  </a:txBody>
+                  <a:tcPr>
+                    <a:solidFill>
+                      <a:srgbClr val="1A1A2E"/>
+                    </a:solidFill>
+                  </a:tcPr>
+                </a:tc>
+                <a:tc>
+                  <a:txBody>
+                    <a:bodyPr/>
+                    <a:lstStyle/>
+                    <a:p>
+                      <a:pPr algn="ctr"/>
+                      <a:r>
+                        <a:rPr b="1" sz="950">
+                          <a:solidFill>
+                            <a:srgbClr val="FFFFFF"/>
+                          </a:solidFill>
+                          <a:latin typeface="Times New Roman"/>
+                        </a:rPr>
+                        <a:t>WS-FF ↑</a:t>
+                      </a:r>
+                    </a:p>
+                  </a:txBody>
+                  <a:tcPr>
+                    <a:solidFill>
+                      <a:srgbClr val="1A1A2E"/>
+                    </a:solidFill>
+                  </a:tcPr>
+                </a:tc>
+                <a:tc>
+                  <a:txBody>
+                    <a:bodyPr/>
+                    <a:lstStyle/>
+                    <a:p>
+                      <a:pPr algn="ctr"/>
+                      <a:r>
+                        <a:rPr b="1" sz="950">
+                          <a:solidFill>
+                            <a:srgbClr val="FFFFFF"/>
+                          </a:solidFill>
+                          <a:latin typeface="Times New Roman"/>
+                        </a:rPr>
+                        <a:t>SP-1pt</a:t>
+                      </a:r>
+                    </a:p>
+                  </a:txBody>
+                  <a:tcPr>
+                    <a:solidFill>
+                      <a:srgbClr val="1A1A2E"/>
+                    </a:solidFill>
+                  </a:tcPr>
+                </a:tc>
+                <a:tc>
+                  <a:txBody>
+                    <a:bodyPr/>
+                    <a:lstStyle/>
+                    <a:p>
+                      <a:pPr algn="ctr"/>
+                      <a:r>
+                        <a:rPr b="1" sz="950">
+                          <a:solidFill>
+                            <a:srgbClr val="FFFFFF"/>
+                          </a:solidFill>
+                          <a:latin typeface="Times New Roman"/>
+                        </a:rPr>
+                        <a:t>SP-temporal</a:t>
+                      </a:r>
+                    </a:p>
+                  </a:txBody>
+                  <a:tcPr>
+                    <a:solidFill>
+                      <a:srgbClr val="1A1A2E"/>
+                    </a:solidFill>
+                  </a:tcPr>
+                </a:tc>
+                <a:tc>
+                  <a:txBody>
+                    <a:bodyPr/>
+                    <a:lstStyle/>
+                    <a:p>
+                      <a:pPr algn="ctr"/>
+                      <a:r>
+                        <a:rPr b="1" sz="950">
+                          <a:solidFill>
+                            <a:srgbClr val="FFFFFF"/>
+                          </a:solidFill>
+                          <a:latin typeface="Times New Roman"/>
+                        </a:rPr>
+                        <a:t>SP1/GT</a:t>
+                      </a:r>
+                    </a:p>
+                  </a:txBody>
+                  <a:tcPr>
+                    <a:solidFill>
+                      <a:srgbClr val="1A1A2E"/>
+                    </a:solidFill>
+                  </a:tcPr>
+                </a:tc>
+              </a:tr>
+              <a:tr h="402336">
+                <a:tc>
+                  <a:txBody>
+                    <a:bodyPr/>
+                    <a:lstStyle/>
+                    <a:p>
+                      <a:pPr algn="l"/>
+                      <a:r>
+                        <a:rPr b="1" sz="900">
+                          <a:solidFill>
+                            <a:srgbClr val="333333"/>
+                          </a:solidFill>
+                          <a:latin typeface="Times New Roman"/>
+                        </a:rPr>
+                        <a:t>BF3 Head  Hs=0.88m  Tp=5s  μ=180°</a:t>
+                      </a:r>
+                    </a:p>
+                  </a:txBody>
+                  <a:tcPr>
+                    <a:solidFill>
+                      <a:srgbClr val="FFFFFF"/>
+                    </a:solidFill>
+                  </a:tcPr>
+                </a:tc>
+                <a:tc>
+                  <a:txBody>
+                    <a:bodyPr/>
+                    <a:lstStyle/>
+                    <a:p>
+                      <a:pPr algn="ctr"/>
+                      <a:r>
+                        <a:rPr b="0" sz="900">
+                          <a:solidFill>
+                            <a:srgbClr val="333333"/>
+                          </a:solidFill>
+                          <a:latin typeface="Times New Roman"/>
+                        </a:rPr>
+                        <a:t>+12.0%(±3.0)</a:t>
+                      </a:r>
+                    </a:p>
+                  </a:txBody>
+                  <a:tcPr>
+                    <a:solidFill>
+                      <a:srgbClr val="FFFFFF"/>
+                    </a:solidFill>
+                  </a:tcPr>
+                </a:tc>
+                <a:tc>
+                  <a:txBody>
+                    <a:bodyPr/>
+                    <a:lstStyle/>
+                    <a:p>
+                      <a:pPr algn="ctr"/>
+                      <a:r>
+                        <a:rPr b="0" sz="900">
+                          <a:solidFill>
+                            <a:srgbClr val="333333"/>
+                          </a:solidFill>
+                          <a:latin typeface="Times New Roman"/>
+                        </a:rPr>
+                        <a:t>+11.9%(±3.3)</a:t>
+                      </a:r>
+                    </a:p>
+                  </a:txBody>
+                  <a:tcPr>
+                    <a:solidFill>
+                      <a:srgbClr val="FFFFFF"/>
+                    </a:solidFill>
+                  </a:tcPr>
+                </a:tc>
+                <a:tc>
+                  <a:txBody>
+                    <a:bodyPr/>
+                    <a:lstStyle/>
+                    <a:p>
+                      <a:pPr algn="ctr"/>
+                      <a:r>
+                        <a:rPr b="0" sz="900">
+                          <a:solidFill>
+                            <a:srgbClr val="333333"/>
+                          </a:solidFill>
+                          <a:latin typeface="Times New Roman"/>
+                        </a:rPr>
+                        <a:t>−13.3%(±0.7)</a:t>
+                      </a:r>
+                    </a:p>
+                  </a:txBody>
+                  <a:tcPr>
+                    <a:solidFill>
+                      <a:srgbClr val="FFD0D0"/>
+                    </a:solidFill>
+                  </a:tcPr>
+                </a:tc>
+                <a:tc>
+                  <a:txBody>
+                    <a:bodyPr/>
+                    <a:lstStyle/>
+                    <a:p>
+                      <a:pPr algn="ctr"/>
+                      <a:r>
+                        <a:rPr b="0" sz="900">
+                          <a:solidFill>
+                            <a:srgbClr val="333333"/>
+                          </a:solidFill>
+                          <a:latin typeface="Times New Roman"/>
+                        </a:rPr>
+                        <a:t>−0.2%(±1.6)</a:t>
+                      </a:r>
+                    </a:p>
+                  </a:txBody>
+                  <a:tcPr>
+                    <a:solidFill>
+                      <a:srgbClr val="FFFFFF"/>
+                    </a:solidFill>
+                  </a:tcPr>
+                </a:tc>
+                <a:tc>
+                  <a:txBody>
+                    <a:bodyPr/>
+                    <a:lstStyle/>
+                    <a:p>
+                      <a:pPr algn="ctr"/>
+                      <a:r>
+                        <a:rPr b="0" sz="900">
+                          <a:solidFill>
+                            <a:srgbClr val="333333"/>
+                          </a:solidFill>
+                          <a:latin typeface="Times New Roman"/>
+                        </a:rPr>
+                        <a:t>−111%</a:t>
+                      </a:r>
+                    </a:p>
+                  </a:txBody>
+                  <a:tcPr>
+                    <a:solidFill>
+                      <a:srgbClr val="FFFFFF"/>
+                    </a:solidFill>
+                  </a:tcPr>
+                </a:tc>
+              </a:tr>
+              <a:tr h="402336">
+                <a:tc>
+                  <a:txBody>
+                    <a:bodyPr/>
+                    <a:lstStyle/>
+                    <a:p>
+                      <a:pPr algn="l"/>
+                      <a:r>
+                        <a:rPr b="1" sz="900">
+                          <a:solidFill>
+                            <a:srgbClr val="333333"/>
+                          </a:solidFill>
+                          <a:latin typeface="Times New Roman"/>
+                        </a:rPr>
+                        <a:t>BF4 Head  Hs=1.88m  Tp=7.5s  μ=180°</a:t>
+                      </a:r>
+                    </a:p>
+                  </a:txBody>
+                  <a:tcPr>
+                    <a:solidFill>
+                      <a:srgbClr val="F5F5F5"/>
+                    </a:solidFill>
+                  </a:tcPr>
+                </a:tc>
+                <a:tc>
+                  <a:txBody>
+                    <a:bodyPr/>
+                    <a:lstStyle/>
+                    <a:p>
+                      <a:pPr algn="ctr"/>
+                      <a:r>
+                        <a:rPr b="0" sz="900">
+                          <a:solidFill>
+                            <a:srgbClr val="333333"/>
+                          </a:solidFill>
+                          <a:latin typeface="Times New Roman"/>
+                        </a:rPr>
+                        <a:t>+9.9%(±1.4)</a:t>
+                      </a:r>
+                    </a:p>
+                  </a:txBody>
+                  <a:tcPr>
+                    <a:solidFill>
+                      <a:srgbClr val="F5F5F5"/>
+                    </a:solidFill>
+                  </a:tcPr>
+                </a:tc>
+                <a:tc>
+                  <a:txBody>
+                    <a:bodyPr/>
+                    <a:lstStyle/>
+                    <a:p>
+                      <a:pPr algn="ctr"/>
+                      <a:r>
+                        <a:rPr b="0" sz="900">
+                          <a:solidFill>
+                            <a:srgbClr val="333333"/>
+                          </a:solidFill>
+                          <a:latin typeface="Times New Roman"/>
+                        </a:rPr>
+                        <a:t>+10.0%(±1.3)</a:t>
+                      </a:r>
+                    </a:p>
+                  </a:txBody>
+                  <a:tcPr>
+                    <a:solidFill>
+                      <a:srgbClr val="F5F5F5"/>
+                    </a:solidFill>
+                  </a:tcPr>
+                </a:tc>
+                <a:tc>
+                  <a:txBody>
+                    <a:bodyPr/>
+                    <a:lstStyle/>
+                    <a:p>
+                      <a:pPr algn="ctr"/>
+                      <a:r>
+                        <a:rPr b="0" sz="900">
+                          <a:solidFill>
+                            <a:srgbClr val="333333"/>
+                          </a:solidFill>
+                          <a:latin typeface="Times New Roman"/>
+                        </a:rPr>
+                        <a:t>+7.0%(±1.1)</a:t>
+                      </a:r>
+                    </a:p>
+                  </a:txBody>
+                  <a:tcPr>
+                    <a:solidFill>
+                      <a:srgbClr val="D0F0D8"/>
+                    </a:solidFill>
+                  </a:tcPr>
+                </a:tc>
+                <a:tc>
+                  <a:txBody>
+                    <a:bodyPr/>
+                    <a:lstStyle/>
+                    <a:p>
+                      <a:pPr algn="ctr"/>
+                      <a:r>
+                        <a:rPr b="0" sz="900">
+                          <a:solidFill>
+                            <a:srgbClr val="333333"/>
+                          </a:solidFill>
+                          <a:latin typeface="Times New Roman"/>
+                        </a:rPr>
+                        <a:t>≈0%</a:t>
+                      </a:r>
+                    </a:p>
+                  </a:txBody>
+                  <a:tcPr>
+                    <a:solidFill>
+                      <a:srgbClr val="F5F5F5"/>
+                    </a:solidFill>
+                  </a:tcPr>
+                </a:tc>
+                <a:tc>
+                  <a:txBody>
+                    <a:bodyPr/>
+                    <a:lstStyle/>
+                    <a:p>
+                      <a:pPr algn="ctr"/>
+                      <a:r>
+                        <a:rPr b="0" sz="900">
+                          <a:solidFill>
+                            <a:srgbClr val="333333"/>
+                          </a:solidFill>
+                          <a:latin typeface="Times New Roman"/>
+                        </a:rPr>
+                        <a:t>71%</a:t>
+                      </a:r>
+                    </a:p>
+                  </a:txBody>
+                  <a:tcPr>
+                    <a:solidFill>
+                      <a:srgbClr val="F5F5F5"/>
+                    </a:solidFill>
+                  </a:tcPr>
+                </a:tc>
+              </a:tr>
+              <a:tr h="402336">
+                <a:tc>
+                  <a:txBody>
+                    <a:bodyPr/>
+                    <a:lstStyle/>
+                    <a:p>
+                      <a:pPr algn="l"/>
+                      <a:r>
+                        <a:rPr b="1" sz="900">
+                          <a:solidFill>
+                            <a:srgbClr val="333333"/>
+                          </a:solidFill>
+                          <a:latin typeface="Times New Roman"/>
+                        </a:rPr>
+                        <a:t>BF3 Beam  Hs=0.88m  Tp=5s  μ=90°</a:t>
+                      </a:r>
+                    </a:p>
+                  </a:txBody>
+                  <a:tcPr>
+                    <a:solidFill>
+                      <a:srgbClr val="FFFFFF"/>
+                    </a:solidFill>
+                  </a:tcPr>
+                </a:tc>
+                <a:tc>
+                  <a:txBody>
+                    <a:bodyPr/>
+                    <a:lstStyle/>
+                    <a:p>
+                      <a:pPr algn="ctr"/>
+                      <a:r>
+                        <a:rPr b="0" sz="900">
+                          <a:solidFill>
+                            <a:srgbClr val="333333"/>
+                          </a:solidFill>
+                          <a:latin typeface="Times New Roman"/>
+                        </a:rPr>
+                        <a:t>+38.4%(±11.0)</a:t>
+                      </a:r>
+                    </a:p>
+                  </a:txBody>
+                  <a:tcPr>
+                    <a:solidFill>
+                      <a:srgbClr val="FFFFFF"/>
+                    </a:solidFill>
+                  </a:tcPr>
+                </a:tc>
+                <a:tc>
+                  <a:txBody>
+                    <a:bodyPr/>
+                    <a:lstStyle/>
+                    <a:p>
+                      <a:pPr algn="ctr"/>
+                      <a:r>
+                        <a:rPr b="0" sz="900">
+                          <a:solidFill>
+                            <a:srgbClr val="333333"/>
+                          </a:solidFill>
+                          <a:latin typeface="Times New Roman"/>
+                        </a:rPr>
+                        <a:t>+33.0%(±11.3)</a:t>
+                      </a:r>
+                    </a:p>
+                  </a:txBody>
+                  <a:tcPr>
+                    <a:solidFill>
+                      <a:srgbClr val="FFFFFF"/>
+                    </a:solidFill>
+                  </a:tcPr>
+                </a:tc>
+                <a:tc>
+                  <a:txBody>
+                    <a:bodyPr/>
+                    <a:lstStyle/>
+                    <a:p>
+                      <a:pPr algn="ctr"/>
+                      <a:r>
+                        <a:rPr b="0" sz="900">
+                          <a:solidFill>
+                            <a:srgbClr val="333333"/>
+                          </a:solidFill>
+                          <a:latin typeface="Times New Roman"/>
+                        </a:rPr>
+                        <a:t>+21.4%(±31.5)</a:t>
+                      </a:r>
+                    </a:p>
+                  </a:txBody>
+                  <a:tcPr>
+                    <a:solidFill>
+                      <a:srgbClr val="FFF0CC"/>
+                    </a:solidFill>
+                  </a:tcPr>
+                </a:tc>
+                <a:tc>
+                  <a:txBody>
+                    <a:bodyPr/>
+                    <a:lstStyle/>
+                    <a:p>
+                      <a:pPr algn="ctr"/>
+                      <a:r>
+                        <a:rPr b="0" sz="900">
+                          <a:solidFill>
+                            <a:srgbClr val="333333"/>
+                          </a:solidFill>
+                          <a:latin typeface="Times New Roman"/>
+                        </a:rPr>
+                        <a:t>−35.0%(±11.8)</a:t>
+                      </a:r>
+                    </a:p>
+                  </a:txBody>
+                  <a:tcPr>
+                    <a:solidFill>
+                      <a:srgbClr val="FFD0D0"/>
+                    </a:solidFill>
+                  </a:tcPr>
+                </a:tc>
+                <a:tc>
+                  <a:txBody>
+                    <a:bodyPr/>
+                    <a:lstStyle/>
+                    <a:p>
+                      <a:pPr algn="ctr"/>
+                      <a:r>
+                        <a:rPr b="0" sz="900">
+                          <a:solidFill>
+                            <a:srgbClr val="333333"/>
+                          </a:solidFill>
+                          <a:latin typeface="Times New Roman"/>
+                        </a:rPr>
+                        <a:t>56%</a:t>
+                      </a:r>
+                    </a:p>
+                  </a:txBody>
+                  <a:tcPr>
+                    <a:solidFill>
+                      <a:srgbClr val="FFFFFF"/>
+                    </a:solidFill>
+                  </a:tcPr>
+                </a:tc>
+              </a:tr>
+              <a:tr h="402336">
+                <a:tc>
+                  <a:txBody>
+                    <a:bodyPr/>
+                    <a:lstStyle/>
+                    <a:p>
+                      <a:pPr algn="l"/>
+                      <a:r>
+                        <a:rPr b="1" sz="900">
+                          <a:solidFill>
+                            <a:srgbClr val="333333"/>
+                          </a:solidFill>
+                          <a:latin typeface="Times New Roman"/>
+                        </a:rPr>
+                        <a:t>BF3 Quarter  Hs=0.88m  Tp=5s  μ=135°</a:t>
+                      </a:r>
+                    </a:p>
+                  </a:txBody>
+                  <a:tcPr>
+                    <a:solidFill>
+                      <a:srgbClr val="F5F5F5"/>
+                    </a:solidFill>
+                  </a:tcPr>
+                </a:tc>
+                <a:tc>
+                  <a:txBody>
+                    <a:bodyPr/>
+                    <a:lstStyle/>
+                    <a:p>
+                      <a:pPr algn="ctr"/>
+                      <a:r>
+                        <a:rPr b="0" sz="900">
+                          <a:solidFill>
+                            <a:srgbClr val="333333"/>
+                          </a:solidFill>
+                          <a:latin typeface="Times New Roman"/>
+                        </a:rPr>
+                        <a:t>+15.2%(±7.2)</a:t>
+                      </a:r>
+                    </a:p>
+                  </a:txBody>
+                  <a:tcPr>
+                    <a:solidFill>
+                      <a:srgbClr val="F5F5F5"/>
+                    </a:solidFill>
+                  </a:tcPr>
+                </a:tc>
+                <a:tc>
+                  <a:txBody>
+                    <a:bodyPr/>
+                    <a:lstStyle/>
+                    <a:p>
+                      <a:pPr algn="ctr"/>
+                      <a:r>
+                        <a:rPr b="0" sz="900">
+                          <a:solidFill>
+                            <a:srgbClr val="333333"/>
+                          </a:solidFill>
+                          <a:latin typeface="Times New Roman"/>
+                        </a:rPr>
+                        <a:t>+15.2%(±7.3)</a:t>
+                      </a:r>
+                    </a:p>
+                  </a:txBody>
+                  <a:tcPr>
+                    <a:solidFill>
+                      <a:srgbClr val="F5F5F5"/>
+                    </a:solidFill>
+                  </a:tcPr>
+                </a:tc>
+                <a:tc>
+                  <a:txBody>
+                    <a:bodyPr/>
+                    <a:lstStyle/>
+                    <a:p>
+                      <a:pPr algn="ctr"/>
+                      <a:r>
+                        <a:rPr b="0" sz="900">
+                          <a:solidFill>
+                            <a:srgbClr val="333333"/>
+                          </a:solidFill>
+                          <a:latin typeface="Times New Roman"/>
+                        </a:rPr>
+                        <a:t>+2.5%(±9.2)</a:t>
+                      </a:r>
+                    </a:p>
+                  </a:txBody>
+                  <a:tcPr>
+                    <a:solidFill>
+                      <a:srgbClr val="FFF0CC"/>
+                    </a:solidFill>
+                  </a:tcPr>
+                </a:tc>
+                <a:tc>
+                  <a:txBody>
+                    <a:bodyPr/>
+                    <a:lstStyle/>
+                    <a:p>
+                      <a:pPr algn="ctr"/>
+                      <a:r>
+                        <a:rPr b="0" sz="900">
+                          <a:solidFill>
+                            <a:srgbClr val="333333"/>
+                          </a:solidFill>
+                          <a:latin typeface="Times New Roman"/>
+                        </a:rPr>
+                        <a:t>−1.9%(±3.3)</a:t>
+                      </a:r>
+                    </a:p>
+                  </a:txBody>
+                  <a:tcPr>
+                    <a:solidFill>
+                      <a:srgbClr val="F5F5F5"/>
+                    </a:solidFill>
+                  </a:tcPr>
+                </a:tc>
+                <a:tc>
+                  <a:txBody>
+                    <a:bodyPr/>
+                    <a:lstStyle/>
+                    <a:p>
+                      <a:pPr algn="ctr"/>
+                      <a:r>
+                        <a:rPr b="0" sz="900">
+                          <a:solidFill>
+                            <a:srgbClr val="333333"/>
+                          </a:solidFill>
+                          <a:latin typeface="Times New Roman"/>
+                        </a:rPr>
+                        <a:t>16%</a:t>
+                      </a:r>
+                    </a:p>
+                  </a:txBody>
+                  <a:tcPr>
+                    <a:solidFill>
+                      <a:srgbClr val="F5F5F5"/>
+                    </a:solidFill>
+                  </a:tcPr>
+                </a:tc>
+              </a:tr>
+            </a:tbl>
+          </a:graphicData>
+        </a:graphic>
+      </p:graphicFrame>
+      <p:sp>
+        <p:nvSpPr>
+          <p:cNvPr id="7" name="TextBox 6"/>
           <p:cNvSpPr txBox="1"/>
           <p:nvPr/>
         </p:nvSpPr>
         <p:spPr>
           <a:xfrm>
-            <a:off x="4663440" y="868680"/>
-            <a:ext cx="3931920" cy="274320"/>
+            <a:off x="320040" y="3182112"/>
+            <a:ext cx="4160520" cy="256032"/>
           </a:xfrm>
           <a:prstGeom prst="rect">
             <a:avLst/>
@@ -14961,33 +15664,34 @@
           <a:noFill/>
         </p:spPr>
         <p:txBody>
-          <a:bodyPr wrap="none">
+          <a:bodyPr wrap="square">
             <a:spAutoFit/>
           </a:bodyPr>
           <a:lstStyle/>
           <a:p>
-            <a:r>
-              <a:rPr sz="1200" b="1">
+            <a:pPr algn="l"/>
+            <a:r>
+              <a:rPr b="1" sz="1100">
                 <a:solidFill>
                   <a:srgbClr val="C05317"/>
                 </a:solidFill>
                 <a:latin typeface="Times New Roman"/>
               </a:rPr>
-              <a:t>지금까지의 Contributions</a:t>
-            </a:r>
-          </a:p>
-        </p:txBody>
-      </p:sp>
-      <p:sp>
-        <p:nvSpPr>
-          <p:cNvPr id="7" name="TextBox 6"/>
+              <a:t>① SP-1pt 악화 원인 — Per-foil 위상 오차 (Phase Mismatch)</a:t>
+            </a:r>
+          </a:p>
+        </p:txBody>
+      </p:sp>
+      <p:sp>
+        <p:nvSpPr>
+          <p:cNvPr id="8" name="TextBox 7"/>
           <p:cNvSpPr txBox="1"/>
           <p:nvPr/>
         </p:nvSpPr>
         <p:spPr>
           <a:xfrm>
-            <a:off x="4663440" y="1188720"/>
-            <a:ext cx="3931920" cy="4846320"/>
+            <a:off x="320040" y="3456432"/>
+            <a:ext cx="4160520" cy="3246120"/>
           </a:xfrm>
           <a:prstGeom prst="rect">
             <a:avLst/>
@@ -14999,183 +15703,453 @@
             <a:spAutoFit/>
           </a:bodyPr>
           <a:lstStyle/>
-          <a:p>
-            <a:r>
-              <a:rPr sz="1100" b="1" i="0">
+          <a:p/>
+          <a:p>
+            <a:pPr algn="l"/>
+            <a:r>
+              <a:rPr b="0" sz="950">
+                <a:solidFill>
+                  <a:srgbClr val="333333"/>
+                </a:solidFill>
+                <a:latin typeface="Times New Roman"/>
+              </a:rPr>
+              <a:t>▸ 상황: CG 한 점의 wave slope/w를 전방 foil과 후방 foil에 동일하게 적용</a:t>
+            </a:r>
+          </a:p>
+          <a:p>
+            <a:pPr algn="l">
+              <a:spcBef>
+                <a:spcPts val="300"/>
+              </a:spcBef>
+            </a:pPr>
+            <a:r>
+              <a:rPr b="0" sz="950">
+                <a:solidFill>
+                  <a:srgbClr val="333333"/>
+                </a:solidFill>
+                <a:latin typeface="Times New Roman"/>
+              </a:rPr>
+              <a:t>▸ 문제: 실제로 두 foil이 있는 위치는 wave phase가 서로 다름</a:t>
+            </a:r>
+          </a:p>
+          <a:p>
+            <a:pPr>
+              <a:spcBef>
+                <a:spcPts val="400"/>
+              </a:spcBef>
+            </a:pPr>
+            <a:r>
+              <a:rPr b="0" sz="950">
+                <a:solidFill>
+                  <a:srgbClr val="333333"/>
+                </a:solidFill>
+                <a:latin typeface="Times New Roman"/>
+              </a:rPr>
+              <a:t>   BF3 Tp=5s → λ = gT²/(2π) ≈ 9.81×25/6.28 ≈ </a:t>
+            </a:r>
+            <a:r>
+              <a:rPr b="1" sz="950">
+                <a:solidFill>
+                  <a:srgbClr val="1A1A2E"/>
+                </a:solidFill>
+                <a:latin typeface="Times New Roman"/>
+              </a:rPr>
+              <a:t>39 m</a:t>
+            </a:r>
+          </a:p>
+          <a:p>
+            <a:pPr>
+              <a:spcBef>
+                <a:spcPts val="200"/>
+              </a:spcBef>
+            </a:pPr>
+            <a:r>
+              <a:rPr b="0" sz="950">
+                <a:solidFill>
+                  <a:srgbClr val="333333"/>
+                </a:solidFill>
+                <a:latin typeface="Times New Roman"/>
+              </a:rPr>
+              <a:t>   Front–rear 간격 = 4.5 m  →  위상 차 Δφ = 2π×4.5/39 ≈ </a:t>
+            </a:r>
+            <a:r>
+              <a:rPr b="1" sz="950">
+                <a:solidFill>
+                  <a:srgbClr val="1A1A2E"/>
+                </a:solidFill>
+                <a:latin typeface="Times New Roman"/>
+              </a:rPr>
+              <a:t>41°</a:t>
+            </a:r>
+          </a:p>
+          <a:p>
+            <a:pPr>
+              <a:spcBef>
+                <a:spcPts val="200"/>
+              </a:spcBef>
+            </a:pPr>
+            <a:r>
+              <a:rPr b="0" sz="950">
+                <a:solidFill>
+                  <a:srgbClr val="333333"/>
+                </a:solidFill>
+                <a:latin typeface="Times New Roman"/>
+              </a:rPr>
+              <a:t>   SP-1pt는 midpoint 신호 → 각 foil에서 ±21° 오차 </a:t>
+            </a:r>
+            <a:r>
+              <a:rPr b="1" sz="950">
+                <a:solidFill>
+                  <a:srgbClr val="C02010"/>
+                </a:solidFill>
+                <a:latin typeface="Times New Roman"/>
+              </a:rPr>
+              <a:t>→ FF가 부분 역방향</a:t>
+            </a:r>
+          </a:p>
+          <a:p>
+            <a:pPr algn="l">
+              <a:spcBef>
+                <a:spcPts val="400"/>
+              </a:spcBef>
+            </a:pPr>
+            <a:r>
+              <a:rPr b="0" sz="950">
+                <a:solidFill>
+                  <a:srgbClr val="333333"/>
+                </a:solidFill>
+                <a:latin typeface="Times New Roman"/>
+              </a:rPr>
+              <a:t>▸ 결과: BF3 head sea에서 5 seeds 전부 일관적으로 악화</a:t>
+            </a:r>
+          </a:p>
+          <a:p>
+            <a:pPr algn="l">
+              <a:spcBef>
+                <a:spcPts val="100"/>
+              </a:spcBef>
+            </a:pPr>
+            <a:r>
+              <a:rPr b="0" sz="900">
+                <a:solidFill>
+                  <a:srgbClr val="6B7280"/>
+                </a:solidFill>
+                <a:latin typeface="Times New Roman"/>
+              </a:rPr>
+              <a:t>   (std ±0.7% — 측정 노이즈가 아니라 구조적 결함)</a:t>
+            </a:r>
+          </a:p>
+          <a:p>
+            <a:pPr algn="l">
+              <a:spcBef>
+                <a:spcPts val="400"/>
+              </a:spcBef>
+            </a:pPr>
+            <a:r>
+              <a:rPr b="0" sz="950">
+                <a:solidFill>
+                  <a:srgbClr val="333333"/>
+                </a:solidFill>
+                <a:latin typeface="Times New Roman"/>
+              </a:rPr>
+              <a:t>▸ BF4 Tp=7.5s → λ ≈ 88m → Δφ ≈ 18° → 오차 감소</a:t>
+            </a:r>
+          </a:p>
+          <a:p>
+            <a:pPr algn="l">
+              <a:spcBef>
+                <a:spcPts val="100"/>
+              </a:spcBef>
+            </a:pPr>
+            <a:r>
+              <a:rPr b="0" sz="900">
+                <a:solidFill>
+                  <a:srgbClr val="6B7280"/>
+                </a:solidFill>
+                <a:latin typeface="Times New Roman"/>
+              </a:rPr>
+              <a:t>   → SP-1pt가 +7.0% 회수 (GT의 71%) — 장주기에서는 유효</a:t>
+            </a:r>
+          </a:p>
+          <a:p>
+            <a:pPr algn="l">
+              <a:spcBef>
+                <a:spcPts val="500"/>
+              </a:spcBef>
+            </a:pPr>
+            <a:r>
+              <a:rPr b="1" sz="950">
                 <a:solidFill>
                   <a:srgbClr val="C05317"/>
                 </a:solidFill>
                 <a:latin typeface="Times New Roman"/>
               </a:rPr>
-              <a:t>[기본 알고리즘]</a:t>
-            </a:r>
-          </a:p>
-          <a:p>
-            <a:r>
-              <a:rPr sz="1000" b="0" i="0">
-                <a:solidFill>
-                  <a:srgbClr val="333333"/>
-                </a:solidFill>
-                <a:latin typeface="Times New Roman"/>
-              </a:rPr>
-              <a:t>❶ Grid-free spectral 파면 추정 (3DGS의 해양파 버전)</a:t>
-            </a:r>
-          </a:p>
-          <a:p>
-            <a:r>
-              <a:rPr sz="1000" b="0" i="0">
-                <a:solidFill>
-                  <a:srgbClr val="333333"/>
-                </a:solidFill>
-                <a:latin typeface="Times New Roman"/>
-              </a:rPr>
-              <a:t>❷ Dispersion hard constraint (5N→4N)</a:t>
-            </a:r>
-          </a:p>
-          <a:p>
-            <a:r>
-              <a:rPr sz="1000" b="0" i="0">
-                <a:solidFill>
-                  <a:srgbClr val="333333"/>
-                </a:solidFill>
-                <a:latin typeface="Times New Roman"/>
-              </a:rPr>
-              <a:t>❸ Adaptive N (pruning + growth + safety rollback)</a:t>
-            </a:r>
-          </a:p>
-          <a:p>
-            <a:r>
-              <a:rPr sz="1000" b="0" i="0">
-                <a:solidFill>
-                  <a:srgbClr val="333333"/>
-                </a:solidFill>
-                <a:latin typeface="Times New Roman"/>
-              </a:rPr>
-              <a:t>❹ Geometry-aware confidence weighting (cos·1/d)</a:t>
-            </a:r>
-          </a:p>
-          <a:p>
-            <a:r>
-              <a:rPr sz="1000" b="0" i="0">
-                <a:solidFill>
-                  <a:srgbClr val="333333"/>
-                </a:solidFill>
-                <a:latin typeface="Times New Roman"/>
-              </a:rPr>
-              <a:t>❺ Pre-specified 5-metric panel (cherry-pick 방지)</a:t>
-            </a:r>
-          </a:p>
-          <a:p>
-            <a:r>
-              <a:rPr sz="1000" b="0" i="0">
-                <a:solidFill>
-                  <a:srgbClr val="333333"/>
-                </a:solidFill>
-                <a:latin typeface="Times New Roman"/>
-              </a:rPr>
-              <a:t>❻ 24-config ETKF sweep (fair tuned baseline)</a:t>
-            </a:r>
-          </a:p>
-          <a:p>
-            <a:r>
-              <a:rPr sz="1000" b="0" i="0">
-                <a:solidFill>
-                  <a:srgbClr val="333333"/>
-                </a:solidFill>
-                <a:latin typeface="Times New Roman"/>
-              </a:rPr>
-              <a:t>❼ Spectral + Sparse + Forecast 3가지 고유 능력</a:t>
-            </a:r>
-          </a:p>
-          <a:p>
-            <a:r>
-              <a:rPr sz="1000" b="0" i="0">
-                <a:solidFill>
-                  <a:srgbClr val="333333"/>
-                </a:solidFill>
-                <a:latin typeface="Times New Roman"/>
-              </a:rPr>
-              <a:t/>
-            </a:r>
-          </a:p>
-          <a:p>
-            <a:r>
-              <a:rPr sz="1100" b="1" i="0">
+              <a:t>⚠ 이 한계는 sensor quality와 무관 — 노이즈를 0으로 해도 동일</a:t>
+            </a:r>
+          </a:p>
+        </p:txBody>
+      </p:sp>
+      <p:sp>
+        <p:nvSpPr>
+          <p:cNvPr id="9" name="TextBox 8"/>
+          <p:cNvSpPr txBox="1"/>
+          <p:nvPr/>
+        </p:nvSpPr>
+        <p:spPr>
+          <a:xfrm>
+            <a:off x="4617720" y="3182112"/>
+            <a:ext cx="4206240" cy="256032"/>
+          </a:xfrm>
+          <a:prstGeom prst="rect">
+            <a:avLst/>
+          </a:prstGeom>
+          <a:noFill/>
+        </p:spPr>
+        <p:txBody>
+          <a:bodyPr wrap="square">
+            <a:spAutoFit/>
+          </a:bodyPr>
+          <a:lstStyle/>
+          <a:p>
+            <a:pPr algn="l"/>
+            <a:r>
+              <a:rPr b="1" sz="1100">
                 <a:solidFill>
                   <a:srgbClr val="C05317"/>
                 </a:solidFill>
                 <a:latin typeface="Times New Roman"/>
               </a:rPr>
-              <a:t>[응용 — Hydrofoil ride control]</a:t>
-            </a:r>
-          </a:p>
-          <a:p>
-            <a:r>
-              <a:rPr sz="1000" b="0" i="0">
-                <a:solidFill>
-                  <a:srgbClr val="333333"/>
-                </a:solidFill>
-                <a:latin typeface="Times New Roman"/>
-              </a:rPr>
-              <a:t>❽ Dual-actuator wave-preview FF (collective + diff)</a:t>
-            </a:r>
-          </a:p>
-          <a:p>
-            <a:r>
-              <a:rPr sz="1000" b="0" i="0">
-                <a:solidFill>
-                  <a:srgbClr val="333333"/>
-                </a:solidFill>
-                <a:latin typeface="Times New Roman"/>
-              </a:rPr>
-              <a:t>❾ nRMSE tolerance + preview horizon 설계 지침</a:t>
-            </a:r>
-          </a:p>
-          <a:p>
-            <a:r>
-              <a:rPr sz="1000" b="0" i="0">
-                <a:solidFill>
-                  <a:srgbClr val="333333"/>
-                </a:solidFill>
-                <a:latin typeface="Times New Roman"/>
-              </a:rPr>
-              <a:t>❿ E2E LiDAR → 추정 → 제어 파이프라인 실증</a:t>
-            </a:r>
-          </a:p>
-          <a:p>
-            <a:r>
-              <a:rPr sz="1000" b="0" i="0">
-                <a:solidFill>
-                  <a:srgbClr val="333333"/>
-                </a:solidFill>
-                <a:latin typeface="Times New Roman"/>
-              </a:rPr>
-              <a:t>   (BF3에서 GT 대비 92~96% 달성)</a:t>
-            </a:r>
-          </a:p>
-        </p:txBody>
-      </p:sp>
-      <p:sp>
-        <p:nvSpPr>
-          <p:cNvPr id="8" name="Rounded Rectangle 7"/>
+              <a:t>② SP-temporal 실패 원인 — Head-sea 가정의 붕괴</a:t>
+            </a:r>
+          </a:p>
+        </p:txBody>
+      </p:sp>
+      <p:sp>
+        <p:nvSpPr>
+          <p:cNvPr id="10" name="TextBox 9"/>
+          <p:cNvSpPr txBox="1"/>
+          <p:nvPr/>
+        </p:nvSpPr>
+        <p:spPr>
+          <a:xfrm>
+            <a:off x="4617720" y="3456432"/>
+            <a:ext cx="4206240" cy="3246120"/>
+          </a:xfrm>
+          <a:prstGeom prst="rect">
+            <a:avLst/>
+          </a:prstGeom>
+          <a:noFill/>
+        </p:spPr>
+        <p:txBody>
+          <a:bodyPr wrap="square">
+            <a:spAutoFit/>
+          </a:bodyPr>
+          <a:lstStyle/>
+          <a:p/>
+          <a:p>
+            <a:pPr algn="l"/>
+            <a:r>
+              <a:rPr b="0" sz="950">
+                <a:solidFill>
+                  <a:srgbClr val="333333"/>
+                </a:solidFill>
+                <a:latin typeface="Times New Roman"/>
+              </a:rPr>
+              <a:t>▸ SP-temporal의 slope 추정식 (head-sea 가정):</a:t>
+            </a:r>
+          </a:p>
+          <a:p>
+            <a:pPr>
+              <a:spcBef>
+                <a:spcPts val="200"/>
+              </a:spcBef>
+            </a:pPr>
+            <a:r>
+              <a:rPr b="1" sz="1000">
+                <a:solidFill>
+                  <a:srgbClr val="1A1A2E"/>
+                </a:solidFill>
+                <a:latin typeface="Times New Roman"/>
+              </a:rPr>
+              <a:t>   ∂η/∂x ≈ −(1/c_p) · ∂η/∂t</a:t>
+            </a:r>
+            <a:r>
+              <a:rPr b="0" sz="900">
+                <a:solidFill>
+                  <a:srgbClr val="6B7280"/>
+                </a:solidFill>
+                <a:latin typeface="Times New Roman"/>
+              </a:rPr>
+              <a:t>   (c_p = peak 위상속도)</a:t>
+            </a:r>
+          </a:p>
+          <a:p>
+            <a:pPr algn="l">
+              <a:spcBef>
+                <a:spcPts val="500"/>
+              </a:spcBef>
+            </a:pPr>
+            <a:r>
+              <a:rPr b="0" sz="950">
+                <a:solidFill>
+                  <a:srgbClr val="333333"/>
+                </a:solidFill>
+                <a:latin typeface="Times New Roman"/>
+              </a:rPr>
+              <a:t>▸ 이 등식이 성립하는 조건: wave가 정확히 vessel 정면으로 진행</a:t>
+            </a:r>
+          </a:p>
+          <a:p>
+            <a:pPr>
+              <a:spcBef>
+                <a:spcPts val="500"/>
+              </a:spcBef>
+            </a:pPr>
+            <a:r>
+              <a:rPr b="0" sz="950">
+                <a:solidFill>
+                  <a:srgbClr val="333333"/>
+                </a:solidFill>
+                <a:latin typeface="Times New Roman"/>
+              </a:rPr>
+              <a:t>▸ Beam sea (μ=90°): </a:t>
+            </a:r>
+            <a:r>
+              <a:rPr b="1" sz="950">
+                <a:solidFill>
+                  <a:srgbClr val="1A1A2E"/>
+                </a:solidFill>
+                <a:latin typeface="Times New Roman"/>
+              </a:rPr>
+              <a:t>실제 ∂η/∂x ≈ 0</a:t>
+            </a:r>
+            <a:r>
+              <a:rPr b="0" sz="950">
+                <a:solidFill>
+                  <a:srgbClr val="6B7280"/>
+                </a:solidFill>
+                <a:latin typeface="Times New Roman"/>
+              </a:rPr>
+              <a:t> (wave가 y방향 전파)</a:t>
+            </a:r>
+          </a:p>
+          <a:p>
+            <a:pPr algn="l">
+              <a:spcBef>
+                <a:spcPts val="100"/>
+              </a:spcBef>
+            </a:pPr>
+            <a:r>
+              <a:rPr b="0" sz="950">
+                <a:solidFill>
+                  <a:srgbClr val="333333"/>
+                </a:solidFill>
+                <a:latin typeface="Times New Roman"/>
+              </a:rPr>
+              <a:t>   그런데 ∂η/∂t ≠ 0 이므로 공식이 엉뚱한 값 주입</a:t>
+            </a:r>
+          </a:p>
+          <a:p>
+            <a:pPr algn="l">
+              <a:spcBef>
+                <a:spcPts val="100"/>
+              </a:spcBef>
+            </a:pPr>
+            <a:r>
+              <a:rPr b="0" sz="900">
+                <a:solidFill>
+                  <a:srgbClr val="C02010"/>
+                </a:solidFill>
+                <a:latin typeface="Times New Roman"/>
+              </a:rPr>
+              <a:t>   → "없는 slope"를 만들어 FF가 없는 disturbance를 보상하려 함</a:t>
+            </a:r>
+          </a:p>
+          <a:p>
+            <a:pPr algn="l">
+              <a:spcBef>
+                <a:spcPts val="100"/>
+              </a:spcBef>
+            </a:pPr>
+            <a:r>
+              <a:rPr b="1" sz="950">
+                <a:solidFill>
+                  <a:srgbClr val="C02010"/>
+                </a:solidFill>
+                <a:latin typeface="Times New Roman"/>
+              </a:rPr>
+              <a:t>   → 결과: beam sea aRMS −35.0% 악화 (5 seeds 일관)</a:t>
+            </a:r>
+          </a:p>
+          <a:p>
+            <a:pPr algn="l">
+              <a:spcBef>
+                <a:spcPts val="500"/>
+              </a:spcBef>
+            </a:pPr>
+            <a:r>
+              <a:rPr b="0" sz="950">
+                <a:solidFill>
+                  <a:srgbClr val="333333"/>
+                </a:solidFill>
+                <a:latin typeface="Times New Roman"/>
+              </a:rPr>
+              <a:t>▸ Quarter sea (μ=135°): 부분적 부호 오류 → −1.9% (경미)</a:t>
+            </a:r>
+          </a:p>
+          <a:p>
+            <a:pPr algn="l">
+              <a:spcBef>
+                <a:spcPts val="300"/>
+              </a:spcBef>
+            </a:pPr>
+            <a:r>
+              <a:rPr b="0" sz="950">
+                <a:solidFill>
+                  <a:srgbClr val="333333"/>
+                </a:solidFill>
+                <a:latin typeface="Times New Roman"/>
+              </a:rPr>
+              <a:t>▸ Head sea에서는 등식 성립 → mean −0.2% (사실상 neutral)</a:t>
+            </a:r>
+          </a:p>
+          <a:p>
+            <a:pPr algn="l">
+              <a:spcBef>
+                <a:spcPts val="500"/>
+              </a:spcBef>
+            </a:pPr>
+            <a:r>
+              <a:rPr b="1" sz="950">
+                <a:solidFill>
+                  <a:srgbClr val="C05317"/>
+                </a:solidFill>
+                <a:latin typeface="Times New Roman"/>
+              </a:rPr>
+              <a:t>⚠ 개선하려면 wave 방향을 알아야 함 → 바로 WaveSplat이 하는 일</a:t>
+            </a:r>
+          </a:p>
+        </p:txBody>
+      </p:sp>
+      <p:sp>
+        <p:nvSpPr>
+          <p:cNvPr id="12" name="Rectangle 11"/>
           <p:cNvSpPr/>
           <p:nvPr/>
         </p:nvSpPr>
         <p:spPr>
           <a:xfrm>
-            <a:off x="365760" y="5989320"/>
-            <a:ext cx="8229600" cy="502920"/>
+            <a:off x="320040" y="6473952"/>
+            <a:ext cx="8503920" cy="347472"/>
           </a:xfrm>
-          <a:prstGeom prst="roundRect">
+          <a:prstGeom prst="rect">
             <a:avLst/>
           </a:prstGeom>
           <a:solidFill>
             <a:srgbClr val="C05317"/>
           </a:solidFill>
           <a:ln>
-            <a:solidFill>
-              <a:srgbClr val="C05317"/>
-            </a:solidFill>
+            <a:noFill/>
           </a:ln>
         </p:spPr>
         <p:style>
@@ -15197,14 +16171,40 @@
           <a:lstStyle/>
           <a:p>
             <a:pPr algn="ctr"/>
-            <a:r>
-              <a:rPr sz="1100" b="1">
+          </a:p>
+        </p:txBody>
+      </p:sp>
+      <p:sp>
+        <p:nvSpPr>
+          <p:cNvPr id="11" name="TextBox 10"/>
+          <p:cNvSpPr txBox="1"/>
+          <p:nvPr/>
+        </p:nvSpPr>
+        <p:spPr>
+          <a:xfrm>
+            <a:off x="320040" y="6473952"/>
+            <a:ext cx="8503920" cy="347472"/>
+          </a:xfrm>
+          <a:prstGeom prst="rect">
+            <a:avLst/>
+          </a:prstGeom>
+          <a:noFill/>
+        </p:spPr>
+        <p:txBody>
+          <a:bodyPr wrap="square">
+            <a:spAutoFit/>
+          </a:bodyPr>
+          <a:lstStyle/>
+          <a:p>
+            <a:pPr algn="ctr"/>
+            <a:r>
+              <a:rPr b="1" sz="950">
                 <a:solidFill>
                   <a:srgbClr val="FFFFFF"/>
                 </a:solidFill>
                 <a:latin typeface="Times New Roman"/>
               </a:rPr>
-              <a:t>WaveSplat: nRMSE 30.1%↓, ~10× faster, SS only+   |   Hydrofoil: aRMS 11~41%↓, BF3 E2E 92~96%</a:t>
+              <a:t>결론: 단일 센서는 head sea + 장주기(Tp&gt;7s)에서만 유효  |  단주기 head sea는 오히려 악화  |  beam/oblique는 방향 정보 없이 대응 불가</a:t>
             </a:r>
           </a:p>
         </p:txBody>
@@ -15518,6 +16518,22 @@
               <a:t>→ 본 연구의 출발점: 이 데이터에서 연속적·물리적으로 타당한 파도장을 어떻게 실시간 복원할 것인가?</a:t>
             </a:r>
           </a:p>
+          <a:p>
+            <a:pPr algn="l">
+              <a:spcBef>
+                <a:spcPts val="300"/>
+              </a:spcBef>
+            </a:pPr>
+            <a:r>
+              <a:rPr b="0" sz="950">
+                <a:solidFill>
+                  <a:srgbClr val="333333"/>
+                </a:solidFill>
+                <a:latin typeface="Times New Roman"/>
+              </a:rPr>
+              <a:t>→ 시뮬레이터 검증: WaveSim의 Falcon K1 raydrop 모델이 이 영상에서 관찰한 패턴을 재현. Fresnel R(θ) (수면 반사율) + specular retroreflection (&lt;5°) 두 모드 병렬 유지 → 두 raydrop 가정 모두에서 WaveSplat robustness 검증.</a:t>
+            </a:r>
+          </a:p>
         </p:txBody>
       </p:sp>
     </p:spTree>
@@ -15569,15 +16585,7 @@
         <p:txBody>
           <a:bodyPr/>
           <a:lstStyle/>
-          <a:p>
-            <a:pPr/>
-            <a:r>
-              <a:rPr sz="2200" b="0" i="0">
-                <a:latin typeface="Times New Roman"/>
-              </a:rPr>
-              <a:t>References — 검증된 인용</a:t>
-            </a:r>
-          </a:p>
+          <a:p/>
         </p:txBody>
       </p:sp>
       <p:sp>
@@ -15588,8 +16596,8 @@
         </p:nvSpPr>
         <p:spPr>
           <a:xfrm>
-            <a:off x="365760" y="868680"/>
-            <a:ext cx="8229600" cy="274320"/>
+            <a:off x="320040" y="0"/>
+            <a:ext cx="8193024" cy="777240"/>
           </a:xfrm>
           <a:prstGeom prst="rect">
             <a:avLst/>
@@ -15597,19 +16605,20 @@
           <a:noFill/>
         </p:spPr>
         <p:txBody>
-          <a:bodyPr wrap="none">
+          <a:bodyPr wrap="square">
             <a:spAutoFit/>
           </a:bodyPr>
           <a:lstStyle/>
           <a:p>
-            <a:r>
-              <a:rPr sz="1200" b="1">
-                <a:solidFill>
-                  <a:srgbClr val="C05317"/>
-                </a:solidFill>
-                <a:latin typeface="Times New Roman"/>
-              </a:rPr>
-              <a:t>주요 참고문헌 (CrossRef DOI 검증 완료)</a:t>
+            <a:pPr algn="l"/>
+            <a:r>
+              <a:rPr b="1" sz="2000">
+                <a:solidFill>
+                  <a:srgbClr val="1A1A2E"/>
+                </a:solidFill>
+                <a:latin typeface="Times New Roman"/>
+              </a:rPr>
+              <a:t>Hydrofoil 결과 (4b) — 단일점 센서 vs WaveSplat: 분산 비교 &amp; 선택 기준</a:t>
             </a:r>
           </a:p>
         </p:txBody>
@@ -15622,8 +16631,8 @@
         </p:nvSpPr>
         <p:spPr>
           <a:xfrm>
-            <a:off x="365760" y="1188720"/>
-            <a:ext cx="8229600" cy="4846320"/>
+            <a:off x="365760" y="786384"/>
+            <a:ext cx="8412480" cy="256032"/>
           </a:xfrm>
           <a:prstGeom prst="rect">
             <a:avLst/>
@@ -15636,234 +16645,15 @@
           </a:bodyPr>
           <a:lstStyle/>
           <a:p>
-            <a:r>
-              <a:rPr sz="900" b="0" i="0">
-                <a:solidFill>
-                  <a:srgbClr val="333333"/>
-                </a:solidFill>
-                <a:latin typeface="Times New Roman"/>
-              </a:rPr>
-              <a:t>[1] Kerbl, B., Kopanas, G., Leimkühler, T., Drettakis, G. (2023). "3D Gaussian Splatting for Real-Time Radiance Field</a:t>
-            </a:r>
-          </a:p>
-          <a:p>
-            <a:r>
-              <a:rPr sz="900" b="0" i="0">
-                <a:solidFill>
-                  <a:srgbClr val="333333"/>
-                </a:solidFill>
-                <a:latin typeface="Times New Roman"/>
-              </a:rPr>
-              <a:t>       Rendering." ACM TOG 42(4). DOI: 10.1145/3592433</a:t>
-            </a:r>
-          </a:p>
-          <a:p>
-            <a:r>
-              <a:rPr sz="900" b="0" i="0">
-                <a:solidFill>
-                  <a:srgbClr val="333333"/>
-                </a:solidFill>
-                <a:latin typeface="Times New Roman"/>
-              </a:rPr>
-              <a:t>[2] Desmars, N., Bonnefoy, F., Grilli, S.T., Ducrozet, G., Perignon, Y., Guérin, C.-A., Ferrant, P. (2020). "Experimental</a:t>
-            </a:r>
-          </a:p>
-          <a:p>
-            <a:r>
-              <a:rPr sz="900" b="0" i="0">
-                <a:solidFill>
-                  <a:srgbClr val="333333"/>
-                </a:solidFill>
-                <a:latin typeface="Times New Roman"/>
-              </a:rPr>
-              <a:t>       and numerical assessment of deterministic nonlinear ocean waves prediction algorithms using non-uniformly</a:t>
-            </a:r>
-          </a:p>
-          <a:p>
-            <a:r>
-              <a:rPr sz="900" b="0" i="0">
-                <a:solidFill>
-                  <a:srgbClr val="333333"/>
-                </a:solidFill>
-                <a:latin typeface="Times New Roman"/>
-              </a:rPr>
-              <a:t>       sampled wave gauges." Ocean Engineering 212, 107659. DOI: 10.1016/j.oceaneng.2020.107659</a:t>
-            </a:r>
-          </a:p>
-          <a:p>
-            <a:r>
-              <a:rPr sz="900" b="0" i="0">
-                <a:solidFill>
-                  <a:srgbClr val="333333"/>
-                </a:solidFill>
-                <a:latin typeface="Times New Roman"/>
-              </a:rPr>
-              <a:t>[3] Desmars, N., Hartmann, M., Behrendt, J., Hoffmann, N., Klein, M. (2023). "Nonlinear deterministic reconstruction</a:t>
-            </a:r>
-          </a:p>
-          <a:p>
-            <a:r>
-              <a:rPr sz="900" b="0" i="0">
-                <a:solidFill>
-                  <a:srgbClr val="333333"/>
-                </a:solidFill>
-                <a:latin typeface="Times New Roman"/>
-              </a:rPr>
-              <a:t>       and prediction of remotely measured ocean surface waves." J. Fluid Mech. 975, A8. DOI: 10.1017/jfm.2023.841</a:t>
-            </a:r>
-          </a:p>
-          <a:p>
-            <a:r>
-              <a:rPr sz="900" b="0" i="0">
-                <a:solidFill>
-                  <a:srgbClr val="333333"/>
-                </a:solidFill>
-                <a:latin typeface="Times New Roman"/>
-              </a:rPr>
-              <a:t>[4] Hunt, B.R., Kostelich, E.J., Szunyogh, I. (2007). "Efficient data assimilation for spatiotemporal chaos: A local</a:t>
-            </a:r>
-          </a:p>
-          <a:p>
-            <a:r>
-              <a:rPr sz="900" b="0" i="0">
-                <a:solidFill>
-                  <a:srgbClr val="333333"/>
-                </a:solidFill>
-                <a:latin typeface="Times New Roman"/>
-              </a:rPr>
-              <a:t>       ensemble transform Kalman filter." Physica D 230(1-2), 112-126. DOI: 10.1016/j.physd.2006.11.008</a:t>
-            </a:r>
-          </a:p>
-          <a:p>
-            <a:r>
-              <a:rPr sz="900" b="0" i="0">
-                <a:solidFill>
-                  <a:srgbClr val="333333"/>
-                </a:solidFill>
-                <a:latin typeface="Times New Roman"/>
-              </a:rPr>
-              <a:t>[5] Ehlers, S., Klein, M., Heinlein, A., Wedler, M., Desmars, N., Hoffmann, N., Stender, M. (2023). "Machine learning</a:t>
-            </a:r>
-          </a:p>
-          <a:p>
-            <a:r>
-              <a:rPr sz="900" b="0" i="0">
-                <a:solidFill>
-                  <a:srgbClr val="333333"/>
-                </a:solidFill>
-                <a:latin typeface="Times New Roman"/>
-              </a:rPr>
-              <a:t>       for phase-resolved reconstruction of nonlinear ocean wave surface elevations from sparse remote sensing data."</a:t>
-            </a:r>
-          </a:p>
-          <a:p>
-            <a:r>
-              <a:rPr sz="900" b="0" i="0">
-                <a:solidFill>
-                  <a:srgbClr val="333333"/>
-                </a:solidFill>
-                <a:latin typeface="Times New Roman"/>
-              </a:rPr>
-              <a:t>       Ocean Engineering 288, 116059. DOI: 10.1016/j.oceaneng.2023.116059</a:t>
-            </a:r>
-          </a:p>
-          <a:p>
-            <a:r>
-              <a:rPr sz="900" b="0" i="0">
-                <a:solidFill>
-                  <a:srgbClr val="333333"/>
-                </a:solidFill>
-                <a:latin typeface="Times New Roman"/>
-              </a:rPr>
-              <a:t>[6] Hwang, P.A., Krabill, W.B., Wright, W., Swift, R.N., Walsh, E.J. (2000). "Airborne Scanning Lidar Measurement of</a:t>
-            </a:r>
-          </a:p>
-          <a:p>
-            <a:r>
-              <a:rPr sz="900" b="0" i="0">
-                <a:solidFill>
-                  <a:srgbClr val="333333"/>
-                </a:solidFill>
-                <a:latin typeface="Times New Roman"/>
-              </a:rPr>
-              <a:t>       Ocean Waves." Remote Sensing of Environment 73(2), 236-246. DOI: 10.1016/S0034-4257(00)00098-5</a:t>
-            </a:r>
-          </a:p>
-          <a:p>
-            <a:r>
-              <a:rPr sz="900" b="0" i="0">
-                <a:solidFill>
-                  <a:srgbClr val="333333"/>
-                </a:solidFill>
-                <a:latin typeface="Times New Roman"/>
-              </a:rPr>
-              <a:t>[7] Belmont, M.R., Horwood, J.M.K., Thurley, R.W.F., Baker, J. (2008). "Shallow Angle Wave Profiling LIDAR." IEEE/OES</a:t>
-            </a:r>
-          </a:p>
-          <a:p>
-            <a:r>
-              <a:rPr sz="900" b="0" i="0">
-                <a:solidFill>
-                  <a:srgbClr val="333333"/>
-                </a:solidFill>
-                <a:latin typeface="Times New Roman"/>
-              </a:rPr>
-              <a:t>       9th Working Conference on Current Measurement Technology, 217-223. DOI: 10.1109/CCM.2008.4480871</a:t>
-            </a:r>
-          </a:p>
-          <a:p>
-            <a:r>
-              <a:rPr sz="900" b="0" i="0">
-                <a:solidFill>
-                  <a:srgbClr val="333333"/>
-                </a:solidFill>
-                <a:latin typeface="Times New Roman"/>
-              </a:rPr>
-              <a:t>[8] Wilcoxon, F. (1945). "Individual Comparisons by Ranking Methods." Biometrics Bulletin 1(6), 80. DOI: 10.2307/3001968</a:t>
-            </a:r>
-          </a:p>
-          <a:p>
-            <a:r>
-              <a:rPr sz="900" b="0" i="0">
-                <a:solidFill>
-                  <a:srgbClr val="333333"/>
-                </a:solidFill>
-                <a:latin typeface="Times New Roman"/>
-              </a:rPr>
-              <a:t>[9] Cohen, J. (1988). Statistical Power Analysis for the Behavioral Sciences (2nd ed.). Lawrence Erlbaum Associates.</a:t>
-            </a:r>
-          </a:p>
-          <a:p>
-            <a:r>
-              <a:rPr sz="900" b="0" i="0">
-                <a:solidFill>
-                  <a:srgbClr val="333333"/>
-                </a:solidFill>
-                <a:latin typeface="Times New Roman"/>
-              </a:rPr>
-              <a:t>[10] Holthuijsen, L.H. (2007). Waves in Oceanic and Coastal Waters. Cambridge University Press.</a:t>
-            </a:r>
-          </a:p>
-          <a:p>
-            <a:r>
-              <a:rPr sz="900" b="0" i="0">
-                <a:solidFill>
-                  <a:srgbClr val="333333"/>
-                </a:solidFill>
-                <a:latin typeface="Times New Roman"/>
-              </a:rPr>
-              <a:t>[11] Faltinsen, O.M. (2005). Hydrodynamics of High-Speed Marine Vehicles. Cambridge University Press.</a:t>
-            </a:r>
-          </a:p>
-          <a:p>
-            <a:r>
-              <a:rPr sz="900" b="0" i="0">
-                <a:solidFill>
-                  <a:srgbClr val="333333"/>
-                </a:solidFill>
-                <a:latin typeface="Times New Roman"/>
-              </a:rPr>
-              <a:t>[12] Born, M., Wolf, E. (1999). Principles of Optics (7th ed.). Cambridge University Press. (Fresnel R(θ))</a:t>
+            <a:pPr algn="l"/>
+            <a:r>
+              <a:rPr b="0" sz="950">
+                <a:solidFill>
+                  <a:srgbClr val="C05317"/>
+                </a:solidFill>
+                <a:latin typeface="Times New Roman"/>
+              </a:rPr>
+              <a:t>같은 조건에서 WaveSplat은 왜 안정적인가 — directional spread의 영향과 per-foil 평가의 차이</a:t>
             </a:r>
           </a:p>
         </p:txBody>
@@ -15876,8 +16666,8 @@
         </p:nvSpPr>
         <p:spPr>
           <a:xfrm>
-            <a:off x="365760" y="6263640"/>
-            <a:ext cx="8229600" cy="228600"/>
+            <a:off x="320040" y="1078992"/>
+            <a:ext cx="4160520" cy="256032"/>
           </a:xfrm>
           <a:prstGeom prst="rect">
             <a:avLst/>
@@ -15885,19 +16675,1681 @@
           <a:noFill/>
         </p:spPr>
         <p:txBody>
+          <a:bodyPr wrap="square">
+            <a:spAutoFit/>
+          </a:bodyPr>
+          <a:lstStyle/>
+          <a:p>
+            <a:pPr algn="l"/>
+            <a:r>
+              <a:rPr b="1" sz="1100">
+                <a:solidFill>
+                  <a:srgbClr val="C05317"/>
+                </a:solidFill>
+                <a:latin typeface="Times New Roman"/>
+              </a:rPr>
+              <a:t>① BF3 Beam sea — Seed별 분산: SP-1pt vs WaveSplat</a:t>
+            </a:r>
+          </a:p>
+        </p:txBody>
+      </p:sp>
+      <p:graphicFrame>
+        <p:nvGraphicFramePr>
+          <p:cNvPr id="7" name="Table 6"/>
+          <p:cNvGraphicFramePr>
+            <a:graphicFrameLocks noGrp="1"/>
+          </p:cNvGraphicFramePr>
+          <p:nvPr/>
+        </p:nvGraphicFramePr>
+        <p:xfrm>
+          <a:off x="320040" y="1353312"/>
+          <a:ext cx="4160520" cy="2336292"/>
+        </p:xfrm>
+        <a:graphic>
+          <a:graphicData uri="http://schemas.openxmlformats.org/drawingml/2006/table">
+            <a:tbl>
+              <a:tblPr firstRow="1" bandRow="1">
+                <a:tableStyleId>{5C22544A-7EE6-4342-B048-85BDC9FD1C3A}</a:tableStyleId>
+              </a:tblPr>
+              <a:tblGrid>
+                <a:gridCol w="594360"/>
+                <a:gridCol w="1188720"/>
+                <a:gridCol w="1188720"/>
+                <a:gridCol w="1188720"/>
+              </a:tblGrid>
+              <a:tr h="333756">
+                <a:tc>
+                  <a:txBody>
+                    <a:bodyPr/>
+                    <a:lstStyle/>
+                    <a:p>
+                      <a:pPr algn="ctr"/>
+                      <a:r>
+                        <a:rPr b="1" sz="900">
+                          <a:solidFill>
+                            <a:srgbClr val="FFFFFF"/>
+                          </a:solidFill>
+                          <a:latin typeface="Times New Roman"/>
+                        </a:rPr>
+                        <a:t>Seed</a:t>
+                      </a:r>
+                    </a:p>
+                  </a:txBody>
+                  <a:tcPr>
+                    <a:solidFill>
+                      <a:srgbClr val="1A1A2E"/>
+                    </a:solidFill>
+                  </a:tcPr>
+                </a:tc>
+                <a:tc>
+                  <a:txBody>
+                    <a:bodyPr/>
+                    <a:lstStyle/>
+                    <a:p>
+                      <a:pPr algn="ctr"/>
+                      <a:r>
+                        <a:rPr b="1" sz="900">
+                          <a:solidFill>
+                            <a:srgbClr val="FFFFFF"/>
+                          </a:solidFill>
+                          <a:latin typeface="Times New Roman"/>
+                        </a:rPr>
+                        <a:t>GT-FF</a:t>
+                      </a:r>
+                    </a:p>
+                  </a:txBody>
+                  <a:tcPr>
+                    <a:solidFill>
+                      <a:srgbClr val="1A1A2E"/>
+                    </a:solidFill>
+                  </a:tcPr>
+                </a:tc>
+                <a:tc>
+                  <a:txBody>
+                    <a:bodyPr/>
+                    <a:lstStyle/>
+                    <a:p>
+                      <a:pPr algn="ctr"/>
+                      <a:r>
+                        <a:rPr b="1" sz="900">
+                          <a:solidFill>
+                            <a:srgbClr val="FFFFFF"/>
+                          </a:solidFill>
+                          <a:latin typeface="Times New Roman"/>
+                        </a:rPr>
+                        <a:t>WS-FF</a:t>
+                      </a:r>
+                    </a:p>
+                  </a:txBody>
+                  <a:tcPr>
+                    <a:solidFill>
+                      <a:srgbClr val="1A1A2E"/>
+                    </a:solidFill>
+                  </a:tcPr>
+                </a:tc>
+                <a:tc>
+                  <a:txBody>
+                    <a:bodyPr/>
+                    <a:lstStyle/>
+                    <a:p>
+                      <a:pPr algn="ctr"/>
+                      <a:r>
+                        <a:rPr b="1" sz="900">
+                          <a:solidFill>
+                            <a:srgbClr val="FFFFFF"/>
+                          </a:solidFill>
+                          <a:latin typeface="Times New Roman"/>
+                        </a:rPr>
+                        <a:t>SP-1pt</a:t>
+                      </a:r>
+                    </a:p>
+                  </a:txBody>
+                  <a:tcPr>
+                    <a:solidFill>
+                      <a:srgbClr val="1A1A2E"/>
+                    </a:solidFill>
+                  </a:tcPr>
+                </a:tc>
+              </a:tr>
+              <a:tr h="333756">
+                <a:tc>
+                  <a:txBody>
+                    <a:bodyPr/>
+                    <a:lstStyle/>
+                    <a:p>
+                      <a:pPr algn="ctr"/>
+                      <a:r>
+                        <a:rPr b="0" sz="850">
+                          <a:solidFill>
+                            <a:srgbClr val="333333"/>
+                          </a:solidFill>
+                          <a:latin typeface="Times New Roman"/>
+                        </a:rPr>
+                        <a:t>42</a:t>
+                      </a:r>
+                    </a:p>
+                  </a:txBody>
+                  <a:tcPr>
+                    <a:solidFill>
+                      <a:srgbClr val="FFFFFF"/>
+                    </a:solidFill>
+                  </a:tcPr>
+                </a:tc>
+                <a:tc>
+                  <a:txBody>
+                    <a:bodyPr/>
+                    <a:lstStyle/>
+                    <a:p>
+                      <a:pPr algn="ctr"/>
+                      <a:r>
+                        <a:rPr b="0" sz="850">
+                          <a:solidFill>
+                            <a:srgbClr val="333333"/>
+                          </a:solidFill>
+                          <a:latin typeface="Times New Roman"/>
+                        </a:rPr>
+                        <a:t>+40.7%</a:t>
+                      </a:r>
+                    </a:p>
+                  </a:txBody>
+                  <a:tcPr>
+                    <a:solidFill>
+                      <a:srgbClr val="FFFFFF"/>
+                    </a:solidFill>
+                  </a:tcPr>
+                </a:tc>
+                <a:tc>
+                  <a:txBody>
+                    <a:bodyPr/>
+                    <a:lstStyle/>
+                    <a:p>
+                      <a:pPr algn="ctr"/>
+                      <a:r>
+                        <a:rPr b="0" sz="850">
+                          <a:solidFill>
+                            <a:srgbClr val="333333"/>
+                          </a:solidFill>
+                          <a:latin typeface="Times New Roman"/>
+                        </a:rPr>
+                        <a:t>+37.7%</a:t>
+                      </a:r>
+                    </a:p>
+                  </a:txBody>
+                  <a:tcPr>
+                    <a:solidFill>
+                      <a:srgbClr val="FFFFFF"/>
+                    </a:solidFill>
+                  </a:tcPr>
+                </a:tc>
+                <a:tc>
+                  <a:txBody>
+                    <a:bodyPr/>
+                    <a:lstStyle/>
+                    <a:p>
+                      <a:pPr algn="ctr"/>
+                      <a:r>
+                        <a:rPr b="0" sz="850">
+                          <a:solidFill>
+                            <a:srgbClr val="333333"/>
+                          </a:solidFill>
+                          <a:latin typeface="Times New Roman"/>
+                        </a:rPr>
+                        <a:t>+40.7%</a:t>
+                      </a:r>
+                    </a:p>
+                  </a:txBody>
+                  <a:tcPr>
+                    <a:solidFill>
+                      <a:srgbClr val="D0F0D8"/>
+                    </a:solidFill>
+                  </a:tcPr>
+                </a:tc>
+              </a:tr>
+              <a:tr h="333756">
+                <a:tc>
+                  <a:txBody>
+                    <a:bodyPr/>
+                    <a:lstStyle/>
+                    <a:p>
+                      <a:pPr algn="ctr"/>
+                      <a:r>
+                        <a:rPr b="0" sz="850">
+                          <a:solidFill>
+                            <a:srgbClr val="333333"/>
+                          </a:solidFill>
+                          <a:latin typeface="Times New Roman"/>
+                        </a:rPr>
+                        <a:t>0</a:t>
+                      </a:r>
+                    </a:p>
+                  </a:txBody>
+                  <a:tcPr>
+                    <a:solidFill>
+                      <a:srgbClr val="F5F5F5"/>
+                    </a:solidFill>
+                  </a:tcPr>
+                </a:tc>
+                <a:tc>
+                  <a:txBody>
+                    <a:bodyPr/>
+                    <a:lstStyle/>
+                    <a:p>
+                      <a:pPr algn="ctr"/>
+                      <a:r>
+                        <a:rPr b="0" sz="850">
+                          <a:solidFill>
+                            <a:srgbClr val="333333"/>
+                          </a:solidFill>
+                          <a:latin typeface="Times New Roman"/>
+                        </a:rPr>
+                        <a:t>+53.6%</a:t>
+                      </a:r>
+                    </a:p>
+                  </a:txBody>
+                  <a:tcPr>
+                    <a:solidFill>
+                      <a:srgbClr val="F5F5F5"/>
+                    </a:solidFill>
+                  </a:tcPr>
+                </a:tc>
+                <a:tc>
+                  <a:txBody>
+                    <a:bodyPr/>
+                    <a:lstStyle/>
+                    <a:p>
+                      <a:pPr algn="ctr"/>
+                      <a:r>
+                        <a:rPr b="0" sz="850">
+                          <a:solidFill>
+                            <a:srgbClr val="333333"/>
+                          </a:solidFill>
+                          <a:latin typeface="Times New Roman"/>
+                        </a:rPr>
+                        <a:t>+47.5%</a:t>
+                      </a:r>
+                    </a:p>
+                  </a:txBody>
+                  <a:tcPr>
+                    <a:solidFill>
+                      <a:srgbClr val="F5F5F5"/>
+                    </a:solidFill>
+                  </a:tcPr>
+                </a:tc>
+                <a:tc>
+                  <a:txBody>
+                    <a:bodyPr/>
+                    <a:lstStyle/>
+                    <a:p>
+                      <a:pPr algn="ctr"/>
+                      <a:r>
+                        <a:rPr b="0" sz="850">
+                          <a:solidFill>
+                            <a:srgbClr val="333333"/>
+                          </a:solidFill>
+                          <a:latin typeface="Times New Roman"/>
+                        </a:rPr>
+                        <a:t>+54.4%</a:t>
+                      </a:r>
+                    </a:p>
+                  </a:txBody>
+                  <a:tcPr>
+                    <a:solidFill>
+                      <a:srgbClr val="D0F0D8"/>
+                    </a:solidFill>
+                  </a:tcPr>
+                </a:tc>
+              </a:tr>
+              <a:tr h="333756">
+                <a:tc>
+                  <a:txBody>
+                    <a:bodyPr/>
+                    <a:lstStyle/>
+                    <a:p>
+                      <a:pPr algn="ctr"/>
+                      <a:r>
+                        <a:rPr b="0" sz="850">
+                          <a:solidFill>
+                            <a:srgbClr val="333333"/>
+                          </a:solidFill>
+                          <a:latin typeface="Times New Roman"/>
+                        </a:rPr>
+                        <a:t>1</a:t>
+                      </a:r>
+                    </a:p>
+                  </a:txBody>
+                  <a:tcPr>
+                    <a:solidFill>
+                      <a:srgbClr val="FFFFFF"/>
+                    </a:solidFill>
+                  </a:tcPr>
+                </a:tc>
+                <a:tc>
+                  <a:txBody>
+                    <a:bodyPr/>
+                    <a:lstStyle/>
+                    <a:p>
+                      <a:pPr algn="ctr"/>
+                      <a:r>
+                        <a:rPr b="0" sz="850">
+                          <a:solidFill>
+                            <a:srgbClr val="333333"/>
+                          </a:solidFill>
+                          <a:latin typeface="Times New Roman"/>
+                        </a:rPr>
+                        <a:t>+45.8%</a:t>
+                      </a:r>
+                    </a:p>
+                  </a:txBody>
+                  <a:tcPr>
+                    <a:solidFill>
+                      <a:srgbClr val="FFFFFF"/>
+                    </a:solidFill>
+                  </a:tcPr>
+                </a:tc>
+                <a:tc>
+                  <a:txBody>
+                    <a:bodyPr/>
+                    <a:lstStyle/>
+                    <a:p>
+                      <a:pPr algn="ctr"/>
+                      <a:r>
+                        <a:rPr b="0" sz="850">
+                          <a:solidFill>
+                            <a:srgbClr val="333333"/>
+                          </a:solidFill>
+                          <a:latin typeface="Times New Roman"/>
+                        </a:rPr>
+                        <a:t>+40.3%</a:t>
+                      </a:r>
+                    </a:p>
+                  </a:txBody>
+                  <a:tcPr>
+                    <a:solidFill>
+                      <a:srgbClr val="FFFFFF"/>
+                    </a:solidFill>
+                  </a:tcPr>
+                </a:tc>
+                <a:tc>
+                  <a:txBody>
+                    <a:bodyPr/>
+                    <a:lstStyle/>
+                    <a:p>
+                      <a:pPr algn="ctr"/>
+                      <a:r>
+                        <a:rPr b="0" sz="850">
+                          <a:solidFill>
+                            <a:srgbClr val="333333"/>
+                          </a:solidFill>
+                          <a:latin typeface="Times New Roman"/>
+                        </a:rPr>
+                        <a:t>+43.7%</a:t>
+                      </a:r>
+                    </a:p>
+                  </a:txBody>
+                  <a:tcPr>
+                    <a:solidFill>
+                      <a:srgbClr val="D0F0D8"/>
+                    </a:solidFill>
+                  </a:tcPr>
+                </a:tc>
+              </a:tr>
+              <a:tr h="333756">
+                <a:tc>
+                  <a:txBody>
+                    <a:bodyPr/>
+                    <a:lstStyle/>
+                    <a:p>
+                      <a:pPr algn="ctr"/>
+                      <a:r>
+                        <a:rPr b="0" sz="850">
+                          <a:solidFill>
+                            <a:srgbClr val="333333"/>
+                          </a:solidFill>
+                          <a:latin typeface="Times New Roman"/>
+                        </a:rPr>
+                        <a:t>2</a:t>
+                      </a:r>
+                    </a:p>
+                  </a:txBody>
+                  <a:tcPr>
+                    <a:solidFill>
+                      <a:srgbClr val="F5F5F5"/>
+                    </a:solidFill>
+                  </a:tcPr>
+                </a:tc>
+                <a:tc>
+                  <a:txBody>
+                    <a:bodyPr/>
+                    <a:lstStyle/>
+                    <a:p>
+                      <a:pPr algn="ctr"/>
+                      <a:r>
+                        <a:rPr b="0" sz="850">
+                          <a:solidFill>
+                            <a:srgbClr val="333333"/>
+                          </a:solidFill>
+                          <a:latin typeface="Times New Roman"/>
+                        </a:rPr>
+                        <a:t>+28.0%</a:t>
+                      </a:r>
+                    </a:p>
+                  </a:txBody>
+                  <a:tcPr>
+                    <a:solidFill>
+                      <a:srgbClr val="F5F5F5"/>
+                    </a:solidFill>
+                  </a:tcPr>
+                </a:tc>
+                <a:tc>
+                  <a:txBody>
+                    <a:bodyPr/>
+                    <a:lstStyle/>
+                    <a:p>
+                      <a:pPr algn="ctr"/>
+                      <a:r>
+                        <a:rPr b="0" sz="850">
+                          <a:solidFill>
+                            <a:srgbClr val="333333"/>
+                          </a:solidFill>
+                          <a:latin typeface="Times New Roman"/>
+                        </a:rPr>
+                        <a:t>+18.8%</a:t>
+                      </a:r>
+                    </a:p>
+                  </a:txBody>
+                  <a:tcPr>
+                    <a:solidFill>
+                      <a:srgbClr val="F5F5F5"/>
+                    </a:solidFill>
+                  </a:tcPr>
+                </a:tc>
+                <a:tc>
+                  <a:txBody>
+                    <a:bodyPr/>
+                    <a:lstStyle/>
+                    <a:p>
+                      <a:pPr algn="ctr"/>
+                      <a:r>
+                        <a:rPr b="0" sz="850">
+                          <a:solidFill>
+                            <a:srgbClr val="333333"/>
+                          </a:solidFill>
+                          <a:latin typeface="Times New Roman"/>
+                        </a:rPr>
+                        <a:t>−26.6%</a:t>
+                      </a:r>
+                    </a:p>
+                  </a:txBody>
+                  <a:tcPr>
+                    <a:solidFill>
+                      <a:srgbClr val="FFD0D0"/>
+                    </a:solidFill>
+                  </a:tcPr>
+                </a:tc>
+              </a:tr>
+              <a:tr h="333756">
+                <a:tc>
+                  <a:txBody>
+                    <a:bodyPr/>
+                    <a:lstStyle/>
+                    <a:p>
+                      <a:pPr algn="ctr"/>
+                      <a:r>
+                        <a:rPr b="0" sz="850">
+                          <a:solidFill>
+                            <a:srgbClr val="333333"/>
+                          </a:solidFill>
+                          <a:latin typeface="Times New Roman"/>
+                        </a:rPr>
+                        <a:t>3</a:t>
+                      </a:r>
+                    </a:p>
+                  </a:txBody>
+                  <a:tcPr>
+                    <a:solidFill>
+                      <a:srgbClr val="FFFFFF"/>
+                    </a:solidFill>
+                  </a:tcPr>
+                </a:tc>
+                <a:tc>
+                  <a:txBody>
+                    <a:bodyPr/>
+                    <a:lstStyle/>
+                    <a:p>
+                      <a:pPr algn="ctr"/>
+                      <a:r>
+                        <a:rPr b="0" sz="850">
+                          <a:solidFill>
+                            <a:srgbClr val="333333"/>
+                          </a:solidFill>
+                          <a:latin typeface="Times New Roman"/>
+                        </a:rPr>
+                        <a:t>+24.0%</a:t>
+                      </a:r>
+                    </a:p>
+                  </a:txBody>
+                  <a:tcPr>
+                    <a:solidFill>
+                      <a:srgbClr val="FFFFFF"/>
+                    </a:solidFill>
+                  </a:tcPr>
+                </a:tc>
+                <a:tc>
+                  <a:txBody>
+                    <a:bodyPr/>
+                    <a:lstStyle/>
+                    <a:p>
+                      <a:pPr algn="ctr"/>
+                      <a:r>
+                        <a:rPr b="0" sz="850">
+                          <a:solidFill>
+                            <a:srgbClr val="333333"/>
+                          </a:solidFill>
+                          <a:latin typeface="Times New Roman"/>
+                        </a:rPr>
+                        <a:t>+20.8%</a:t>
+                      </a:r>
+                    </a:p>
+                  </a:txBody>
+                  <a:tcPr>
+                    <a:solidFill>
+                      <a:srgbClr val="FFFFFF"/>
+                    </a:solidFill>
+                  </a:tcPr>
+                </a:tc>
+                <a:tc>
+                  <a:txBody>
+                    <a:bodyPr/>
+                    <a:lstStyle/>
+                    <a:p>
+                      <a:pPr algn="ctr"/>
+                      <a:r>
+                        <a:rPr b="0" sz="850">
+                          <a:solidFill>
+                            <a:srgbClr val="333333"/>
+                          </a:solidFill>
+                          <a:latin typeface="Times New Roman"/>
+                        </a:rPr>
+                        <a:t>−5.1%</a:t>
+                      </a:r>
+                    </a:p>
+                  </a:txBody>
+                  <a:tcPr>
+                    <a:solidFill>
+                      <a:srgbClr val="FFF0CC"/>
+                    </a:solidFill>
+                  </a:tcPr>
+                </a:tc>
+              </a:tr>
+              <a:tr h="333756">
+                <a:tc>
+                  <a:txBody>
+                    <a:bodyPr/>
+                    <a:lstStyle/>
+                    <a:p>
+                      <a:pPr algn="ctr"/>
+                      <a:r>
+                        <a:rPr b="1" sz="850">
+                          <a:solidFill>
+                            <a:srgbClr val="333333"/>
+                          </a:solidFill>
+                          <a:latin typeface="Times New Roman"/>
+                        </a:rPr>
+                        <a:t>avg±std</a:t>
+                      </a:r>
+                    </a:p>
+                  </a:txBody>
+                  <a:tcPr>
+                    <a:solidFill>
+                      <a:srgbClr val="EEF2FF"/>
+                    </a:solidFill>
+                  </a:tcPr>
+                </a:tc>
+                <a:tc>
+                  <a:txBody>
+                    <a:bodyPr/>
+                    <a:lstStyle/>
+                    <a:p>
+                      <a:pPr algn="ctr"/>
+                      <a:r>
+                        <a:rPr b="1" sz="850">
+                          <a:solidFill>
+                            <a:srgbClr val="333333"/>
+                          </a:solidFill>
+                          <a:latin typeface="Times New Roman"/>
+                        </a:rPr>
+                        <a:t>+38.4%
+(±11.0)</a:t>
+                      </a:r>
+                    </a:p>
+                  </a:txBody>
+                  <a:tcPr>
+                    <a:solidFill>
+                      <a:srgbClr val="EEF2FF"/>
+                    </a:solidFill>
+                  </a:tcPr>
+                </a:tc>
+                <a:tc>
+                  <a:txBody>
+                    <a:bodyPr/>
+                    <a:lstStyle/>
+                    <a:p>
+                      <a:pPr algn="ctr"/>
+                      <a:r>
+                        <a:rPr b="1" sz="850">
+                          <a:solidFill>
+                            <a:srgbClr val="333333"/>
+                          </a:solidFill>
+                          <a:latin typeface="Times New Roman"/>
+                        </a:rPr>
+                        <a:t>+33.0%
+(±11.3)</a:t>
+                      </a:r>
+                    </a:p>
+                  </a:txBody>
+                  <a:tcPr>
+                    <a:solidFill>
+                      <a:srgbClr val="EEF2FF"/>
+                    </a:solidFill>
+                  </a:tcPr>
+                </a:tc>
+                <a:tc>
+                  <a:txBody>
+                    <a:bodyPr/>
+                    <a:lstStyle/>
+                    <a:p>
+                      <a:pPr algn="ctr"/>
+                      <a:r>
+                        <a:rPr b="1" sz="850">
+                          <a:solidFill>
+                            <a:srgbClr val="333333"/>
+                          </a:solidFill>
+                          <a:latin typeface="Times New Roman"/>
+                        </a:rPr>
+                        <a:t>+21.4%
+(±31.5)</a:t>
+                      </a:r>
+                    </a:p>
+                  </a:txBody>
+                  <a:tcPr>
+                    <a:solidFill>
+                      <a:srgbClr val="FFEEBB"/>
+                    </a:solidFill>
+                  </a:tcPr>
+                </a:tc>
+              </a:tr>
+            </a:tbl>
+          </a:graphicData>
+        </a:graphic>
+      </p:graphicFrame>
+      <p:sp>
+        <p:nvSpPr>
+          <p:cNvPr id="8" name="TextBox 7"/>
+          <p:cNvSpPr txBox="1"/>
+          <p:nvPr/>
+        </p:nvSpPr>
+        <p:spPr>
+          <a:xfrm>
+            <a:off x="320040" y="3730752"/>
+            <a:ext cx="4160520" cy="1691640"/>
+          </a:xfrm>
+          <a:prstGeom prst="rect">
+            <a:avLst/>
+          </a:prstGeom>
+          <a:noFill/>
+        </p:spPr>
+        <p:txBody>
+          <a:bodyPr wrap="square">
+            <a:spAutoFit/>
+          </a:bodyPr>
+          <a:lstStyle/>
+          <a:p/>
+          <a:p>
+            <a:pPr algn="l"/>
+            <a:r>
+              <a:rPr b="1" sz="1000">
+                <a:solidFill>
+                  <a:srgbClr val="1A1A2E"/>
+                </a:solidFill>
+                <a:latin typeface="Times New Roman"/>
+              </a:rPr>
+              <a:t>▸ 왜 seed마다 다른가?</a:t>
+            </a:r>
+          </a:p>
+          <a:p>
+            <a:pPr algn="l">
+              <a:spcBef>
+                <a:spcPts val="200"/>
+              </a:spcBef>
+            </a:pPr>
+            <a:r>
+              <a:rPr b="0" sz="950">
+                <a:solidFill>
+                  <a:srgbClr val="333333"/>
+                </a:solidFill>
+                <a:latin typeface="Times New Roman"/>
+              </a:rPr>
+              <a:t>   방향 spread (σ_θ=20°)로 인해 μ=90° 스펙트럼에도 kx≠0 성분 존재</a:t>
+            </a:r>
+          </a:p>
+          <a:p>
+            <a:pPr algn="l">
+              <a:spcBef>
+                <a:spcPts val="100"/>
+              </a:spcBef>
+            </a:pPr>
+            <a:r>
+              <a:rPr b="0" sz="950">
+                <a:solidFill>
+                  <a:srgbClr val="333333"/>
+                </a:solidFill>
+                <a:latin typeface="Times New Roman"/>
+              </a:rPr>
+              <a:t>   → 두 foil 위치에서 이 성분들의 위상 합성이 seed마다 달라짐</a:t>
+            </a:r>
+          </a:p>
+          <a:p>
+            <a:pPr algn="l">
+              <a:spcBef>
+                <a:spcPts val="100"/>
+              </a:spcBef>
+            </a:pPr>
+            <a:r>
+              <a:rPr b="0" sz="950">
+                <a:solidFill>
+                  <a:srgbClr val="C02010"/>
+                </a:solidFill>
+                <a:latin typeface="Times New Roman"/>
+              </a:rPr>
+              <a:t>   → "운 좋은 seed": +54% / "운 나쁜 seed": −27%</a:t>
+            </a:r>
+          </a:p>
+          <a:p>
+            <a:pPr>
+              <a:spcBef>
+                <a:spcPts val="200"/>
+              </a:spcBef>
+            </a:pPr>
+            <a:r>
+              <a:rPr b="0" sz="950">
+                <a:solidFill>
+                  <a:srgbClr val="333333"/>
+                </a:solidFill>
+                <a:latin typeface="Times New Roman"/>
+              </a:rPr>
+              <a:t>   SP-1pt σ/μ ≈ 31.5/21.4 ≈ </a:t>
+            </a:r>
+            <a:r>
+              <a:rPr b="1" sz="950">
+                <a:solidFill>
+                  <a:srgbClr val="C02010"/>
+                </a:solidFill>
+                <a:latin typeface="Times New Roman"/>
+              </a:rPr>
+              <a:t>1.47 (예측 불가)</a:t>
+            </a:r>
+            <a:r>
+              <a:rPr b="0" sz="950">
+                <a:solidFill>
+                  <a:srgbClr val="333333"/>
+                </a:solidFill>
+                <a:latin typeface="Times New Roman"/>
+              </a:rPr>
+              <a:t>  vs  WS σ/μ ≈ 0.34</a:t>
+            </a:r>
+          </a:p>
+          <a:p>
+            <a:pPr algn="l">
+              <a:spcBef>
+                <a:spcPts val="500"/>
+              </a:spcBef>
+            </a:pPr>
+            <a:r>
+              <a:rPr b="1" sz="950">
+                <a:solidFill>
+                  <a:srgbClr val="1A1A2E"/>
+                </a:solidFill>
+                <a:latin typeface="Times New Roman"/>
+              </a:rPr>
+              <a:t>▸ WaveSplat은 각 foil × 각 component를 독립 평가 → phase 충돌 없음</a:t>
+            </a:r>
+          </a:p>
+        </p:txBody>
+      </p:sp>
+      <p:sp>
+        <p:nvSpPr>
+          <p:cNvPr id="9" name="TextBox 8"/>
+          <p:cNvSpPr txBox="1"/>
+          <p:nvPr/>
+        </p:nvSpPr>
+        <p:spPr>
+          <a:xfrm>
+            <a:off x="4617720" y="1078992"/>
+            <a:ext cx="4206240" cy="256032"/>
+          </a:xfrm>
+          <a:prstGeom prst="rect">
+            <a:avLst/>
+          </a:prstGeom>
+          <a:noFill/>
+        </p:spPr>
+        <p:txBody>
+          <a:bodyPr wrap="square">
+            <a:spAutoFit/>
+          </a:bodyPr>
+          <a:lstStyle/>
+          <a:p>
+            <a:pPr algn="l"/>
+            <a:r>
+              <a:rPr b="1" sz="1100">
+                <a:solidFill>
+                  <a:srgbClr val="C05317"/>
+                </a:solidFill>
+                <a:latin typeface="Times New Roman"/>
+              </a:rPr>
+              <a:t>② 운항 조건별 센서 선택 가이드</a:t>
+            </a:r>
+          </a:p>
+        </p:txBody>
+      </p:sp>
+      <p:graphicFrame>
+        <p:nvGraphicFramePr>
+          <p:cNvPr id="10" name="Table 9"/>
+          <p:cNvGraphicFramePr>
+            <a:graphicFrameLocks noGrp="1"/>
+          </p:cNvGraphicFramePr>
+          <p:nvPr/>
+        </p:nvGraphicFramePr>
+        <p:xfrm>
+          <a:off x="4617720" y="1353312"/>
+          <a:ext cx="4206240" cy="2002536"/>
+        </p:xfrm>
+        <a:graphic>
+          <a:graphicData uri="http://schemas.openxmlformats.org/drawingml/2006/table">
+            <a:tbl>
+              <a:tblPr firstRow="1" bandRow="1">
+                <a:tableStyleId>{5C22544A-7EE6-4342-B048-85BDC9FD1C3A}</a:tableStyleId>
+              </a:tblPr>
+              <a:tblGrid>
+                <a:gridCol w="1417320"/>
+                <a:gridCol w="914400"/>
+                <a:gridCol w="960120"/>
+                <a:gridCol w="914400"/>
+              </a:tblGrid>
+              <a:tr h="333756">
+                <a:tc>
+                  <a:txBody>
+                    <a:bodyPr/>
+                    <a:lstStyle/>
+                    <a:p>
+                      <a:pPr algn="ctr"/>
+                      <a:r>
+                        <a:rPr b="1" sz="900">
+                          <a:solidFill>
+                            <a:srgbClr val="FFFFFF"/>
+                          </a:solidFill>
+                          <a:latin typeface="Times New Roman"/>
+                        </a:rPr>
+                        <a:t>조건</a:t>
+                      </a:r>
+                    </a:p>
+                  </a:txBody>
+                  <a:tcPr>
+                    <a:solidFill>
+                      <a:srgbClr val="1A1A2E"/>
+                    </a:solidFill>
+                  </a:tcPr>
+                </a:tc>
+                <a:tc>
+                  <a:txBody>
+                    <a:bodyPr/>
+                    <a:lstStyle/>
+                    <a:p>
+                      <a:pPr algn="ctr"/>
+                      <a:r>
+                        <a:rPr b="1" sz="900">
+                          <a:solidFill>
+                            <a:srgbClr val="FFFFFF"/>
+                          </a:solidFill>
+                          <a:latin typeface="Times New Roman"/>
+                        </a:rPr>
+                        <a:t>SP-1pt</a:t>
+                      </a:r>
+                    </a:p>
+                  </a:txBody>
+                  <a:tcPr>
+                    <a:solidFill>
+                      <a:srgbClr val="1A1A2E"/>
+                    </a:solidFill>
+                  </a:tcPr>
+                </a:tc>
+                <a:tc>
+                  <a:txBody>
+                    <a:bodyPr/>
+                    <a:lstStyle/>
+                    <a:p>
+                      <a:pPr algn="ctr"/>
+                      <a:r>
+                        <a:rPr b="1" sz="900">
+                          <a:solidFill>
+                            <a:srgbClr val="FFFFFF"/>
+                          </a:solidFill>
+                          <a:latin typeface="Times New Roman"/>
+                        </a:rPr>
+                        <a:t>SP-temporal</a:t>
+                      </a:r>
+                    </a:p>
+                  </a:txBody>
+                  <a:tcPr>
+                    <a:solidFill>
+                      <a:srgbClr val="1A1A2E"/>
+                    </a:solidFill>
+                  </a:tcPr>
+                </a:tc>
+                <a:tc>
+                  <a:txBody>
+                    <a:bodyPr/>
+                    <a:lstStyle/>
+                    <a:p>
+                      <a:pPr algn="ctr"/>
+                      <a:r>
+                        <a:rPr b="1" sz="900">
+                          <a:solidFill>
+                            <a:srgbClr val="FFFFFF"/>
+                          </a:solidFill>
+                          <a:latin typeface="Times New Roman"/>
+                        </a:rPr>
+                        <a:t>WaveSplat</a:t>
+                      </a:r>
+                    </a:p>
+                  </a:txBody>
+                  <a:tcPr>
+                    <a:solidFill>
+                      <a:srgbClr val="1A1A2E"/>
+                    </a:solidFill>
+                  </a:tcPr>
+                </a:tc>
+              </a:tr>
+              <a:tr h="333756">
+                <a:tc>
+                  <a:txBody>
+                    <a:bodyPr/>
+                    <a:lstStyle/>
+                    <a:p>
+                      <a:pPr algn="ctr"/>
+                      <a:r>
+                        <a:rPr b="1" sz="850">
+                          <a:solidFill>
+                            <a:srgbClr val="333333"/>
+                          </a:solidFill>
+                          <a:latin typeface="Times New Roman"/>
+                        </a:rPr>
+                        <a:t>Head sea
+Tp &gt; 7s</a:t>
+                      </a:r>
+                    </a:p>
+                  </a:txBody>
+                  <a:tcPr>
+                    <a:solidFill>
+                      <a:srgbClr val="FFFFFF"/>
+                    </a:solidFill>
+                  </a:tcPr>
+                </a:tc>
+                <a:tc>
+                  <a:txBody>
+                    <a:bodyPr/>
+                    <a:lstStyle/>
+                    <a:p>
+                      <a:pPr algn="ctr"/>
+                      <a:r>
+                        <a:rPr b="0" sz="850">
+                          <a:solidFill>
+                            <a:srgbClr val="333333"/>
+                          </a:solidFill>
+                          <a:latin typeface="Times New Roman"/>
+                        </a:rPr>
+                        <a:t>✓ 71%</a:t>
+                      </a:r>
+                    </a:p>
+                  </a:txBody>
+                  <a:tcPr>
+                    <a:solidFill>
+                      <a:srgbClr val="D0F0D8"/>
+                    </a:solidFill>
+                  </a:tcPr>
+                </a:tc>
+                <a:tc>
+                  <a:txBody>
+                    <a:bodyPr/>
+                    <a:lstStyle/>
+                    <a:p>
+                      <a:pPr algn="ctr"/>
+                      <a:r>
+                        <a:rPr b="0" sz="850">
+                          <a:solidFill>
+                            <a:srgbClr val="333333"/>
+                          </a:solidFill>
+                          <a:latin typeface="Times New Roman"/>
+                        </a:rPr>
+                        <a:t>≈0 (neutral)</a:t>
+                      </a:r>
+                    </a:p>
+                  </a:txBody>
+                  <a:tcPr>
+                    <a:solidFill>
+                      <a:srgbClr val="FFFFFF"/>
+                    </a:solidFill>
+                  </a:tcPr>
+                </a:tc>
+                <a:tc>
+                  <a:txBody>
+                    <a:bodyPr/>
+                    <a:lstStyle/>
+                    <a:p>
+                      <a:pPr algn="ctr"/>
+                      <a:r>
+                        <a:rPr b="0" sz="850">
+                          <a:solidFill>
+                            <a:srgbClr val="333333"/>
+                          </a:solidFill>
+                          <a:latin typeface="Times New Roman"/>
+                        </a:rPr>
+                        <a:t>✓ ~GT</a:t>
+                      </a:r>
+                    </a:p>
+                  </a:txBody>
+                  <a:tcPr>
+                    <a:solidFill>
+                      <a:srgbClr val="D0F0D8"/>
+                    </a:solidFill>
+                  </a:tcPr>
+                </a:tc>
+              </a:tr>
+              <a:tr h="333756">
+                <a:tc>
+                  <a:txBody>
+                    <a:bodyPr/>
+                    <a:lstStyle/>
+                    <a:p>
+                      <a:pPr algn="ctr"/>
+                      <a:r>
+                        <a:rPr b="1" sz="850">
+                          <a:solidFill>
+                            <a:srgbClr val="333333"/>
+                          </a:solidFill>
+                          <a:latin typeface="Times New Roman"/>
+                        </a:rPr>
+                        <a:t>Head sea
+Tp ≤ 5s</a:t>
+                      </a:r>
+                    </a:p>
+                  </a:txBody>
+                  <a:tcPr>
+                    <a:solidFill>
+                      <a:srgbClr val="F5F5F5"/>
+                    </a:solidFill>
+                  </a:tcPr>
+                </a:tc>
+                <a:tc>
+                  <a:txBody>
+                    <a:bodyPr/>
+                    <a:lstStyle/>
+                    <a:p>
+                      <a:pPr algn="ctr"/>
+                      <a:r>
+                        <a:rPr b="0" sz="850">
+                          <a:solidFill>
+                            <a:srgbClr val="333333"/>
+                          </a:solidFill>
+                          <a:latin typeface="Times New Roman"/>
+                        </a:rPr>
+                        <a:t>✗ −13%</a:t>
+                      </a:r>
+                    </a:p>
+                  </a:txBody>
+                  <a:tcPr>
+                    <a:solidFill>
+                      <a:srgbClr val="FFD0D0"/>
+                    </a:solidFill>
+                  </a:tcPr>
+                </a:tc>
+                <a:tc>
+                  <a:txBody>
+                    <a:bodyPr/>
+                    <a:lstStyle/>
+                    <a:p>
+                      <a:pPr algn="ctr"/>
+                      <a:r>
+                        <a:rPr b="0" sz="850">
+                          <a:solidFill>
+                            <a:srgbClr val="333333"/>
+                          </a:solidFill>
+                          <a:latin typeface="Times New Roman"/>
+                        </a:rPr>
+                        <a:t>≈0 (neutral)</a:t>
+                      </a:r>
+                    </a:p>
+                  </a:txBody>
+                  <a:tcPr>
+                    <a:solidFill>
+                      <a:srgbClr val="FFFFFF"/>
+                    </a:solidFill>
+                  </a:tcPr>
+                </a:tc>
+                <a:tc>
+                  <a:txBody>
+                    <a:bodyPr/>
+                    <a:lstStyle/>
+                    <a:p>
+                      <a:pPr algn="ctr"/>
+                      <a:r>
+                        <a:rPr b="0" sz="850">
+                          <a:solidFill>
+                            <a:srgbClr val="333333"/>
+                          </a:solidFill>
+                          <a:latin typeface="Times New Roman"/>
+                        </a:rPr>
+                        <a:t>✓ +12%</a:t>
+                      </a:r>
+                    </a:p>
+                  </a:txBody>
+                  <a:tcPr>
+                    <a:solidFill>
+                      <a:srgbClr val="D0F0D8"/>
+                    </a:solidFill>
+                  </a:tcPr>
+                </a:tc>
+              </a:tr>
+              <a:tr h="333756">
+                <a:tc>
+                  <a:txBody>
+                    <a:bodyPr/>
+                    <a:lstStyle/>
+                    <a:p>
+                      <a:pPr algn="ctr"/>
+                      <a:r>
+                        <a:rPr b="1" sz="850">
+                          <a:solidFill>
+                            <a:srgbClr val="333333"/>
+                          </a:solidFill>
+                          <a:latin typeface="Times New Roman"/>
+                        </a:rPr>
+                        <a:t>Beam sea
+(directional spread)</a:t>
+                      </a:r>
+                    </a:p>
+                  </a:txBody>
+                  <a:tcPr>
+                    <a:solidFill>
+                      <a:srgbClr val="FFFFFF"/>
+                    </a:solidFill>
+                  </a:tcPr>
+                </a:tc>
+                <a:tc>
+                  <a:txBody>
+                    <a:bodyPr/>
+                    <a:lstStyle/>
+                    <a:p>
+                      <a:pPr algn="ctr"/>
+                      <a:r>
+                        <a:rPr b="0" sz="850">
+                          <a:solidFill>
+                            <a:srgbClr val="333333"/>
+                          </a:solidFill>
+                          <a:latin typeface="Times New Roman"/>
+                        </a:rPr>
+                        <a:t>△ 불안정</a:t>
+                      </a:r>
+                    </a:p>
+                  </a:txBody>
+                  <a:tcPr>
+                    <a:solidFill>
+                      <a:srgbClr val="FFF0CC"/>
+                    </a:solidFill>
+                  </a:tcPr>
+                </a:tc>
+                <a:tc>
+                  <a:txBody>
+                    <a:bodyPr/>
+                    <a:lstStyle/>
+                    <a:p>
+                      <a:pPr algn="ctr"/>
+                      <a:r>
+                        <a:rPr b="0" sz="850">
+                          <a:solidFill>
+                            <a:srgbClr val="333333"/>
+                          </a:solidFill>
+                          <a:latin typeface="Times New Roman"/>
+                        </a:rPr>
+                        <a:t>✗ −35%</a:t>
+                      </a:r>
+                    </a:p>
+                  </a:txBody>
+                  <a:tcPr>
+                    <a:solidFill>
+                      <a:srgbClr val="FFD0D0"/>
+                    </a:solidFill>
+                  </a:tcPr>
+                </a:tc>
+                <a:tc>
+                  <a:txBody>
+                    <a:bodyPr/>
+                    <a:lstStyle/>
+                    <a:p>
+                      <a:pPr algn="ctr"/>
+                      <a:r>
+                        <a:rPr b="0" sz="850">
+                          <a:solidFill>
+                            <a:srgbClr val="333333"/>
+                          </a:solidFill>
+                          <a:latin typeface="Times New Roman"/>
+                        </a:rPr>
+                        <a:t>✓ +33%</a:t>
+                      </a:r>
+                    </a:p>
+                  </a:txBody>
+                  <a:tcPr>
+                    <a:solidFill>
+                      <a:srgbClr val="D0F0D8"/>
+                    </a:solidFill>
+                  </a:tcPr>
+                </a:tc>
+              </a:tr>
+              <a:tr h="333756">
+                <a:tc>
+                  <a:txBody>
+                    <a:bodyPr/>
+                    <a:lstStyle/>
+                    <a:p>
+                      <a:pPr algn="ctr"/>
+                      <a:r>
+                        <a:rPr b="1" sz="850">
+                          <a:solidFill>
+                            <a:srgbClr val="333333"/>
+                          </a:solidFill>
+                          <a:latin typeface="Times New Roman"/>
+                        </a:rPr>
+                        <a:t>Quarter sea
+μ=135°</a:t>
+                      </a:r>
+                    </a:p>
+                  </a:txBody>
+                  <a:tcPr>
+                    <a:solidFill>
+                      <a:srgbClr val="F5F5F5"/>
+                    </a:solidFill>
+                  </a:tcPr>
+                </a:tc>
+                <a:tc>
+                  <a:txBody>
+                    <a:bodyPr/>
+                    <a:lstStyle/>
+                    <a:p>
+                      <a:pPr algn="ctr"/>
+                      <a:r>
+                        <a:rPr b="0" sz="850">
+                          <a:solidFill>
+                            <a:srgbClr val="333333"/>
+                          </a:solidFill>
+                          <a:latin typeface="Times New Roman"/>
+                        </a:rPr>
+                        <a:t>△ +2.5%</a:t>
+                      </a:r>
+                    </a:p>
+                  </a:txBody>
+                  <a:tcPr>
+                    <a:solidFill>
+                      <a:srgbClr val="FFF0CC"/>
+                    </a:solidFill>
+                  </a:tcPr>
+                </a:tc>
+                <a:tc>
+                  <a:txBody>
+                    <a:bodyPr/>
+                    <a:lstStyle/>
+                    <a:p>
+                      <a:pPr algn="ctr"/>
+                      <a:r>
+                        <a:rPr b="0" sz="850">
+                          <a:solidFill>
+                            <a:srgbClr val="333333"/>
+                          </a:solidFill>
+                          <a:latin typeface="Times New Roman"/>
+                        </a:rPr>
+                        <a:t>△ −1.9%</a:t>
+                      </a:r>
+                    </a:p>
+                  </a:txBody>
+                  <a:tcPr>
+                    <a:solidFill>
+                      <a:srgbClr val="FFF0CC"/>
+                    </a:solidFill>
+                  </a:tcPr>
+                </a:tc>
+                <a:tc>
+                  <a:txBody>
+                    <a:bodyPr/>
+                    <a:lstStyle/>
+                    <a:p>
+                      <a:pPr algn="ctr"/>
+                      <a:r>
+                        <a:rPr b="0" sz="850">
+                          <a:solidFill>
+                            <a:srgbClr val="333333"/>
+                          </a:solidFill>
+                          <a:latin typeface="Times New Roman"/>
+                        </a:rPr>
+                        <a:t>✓ +15%</a:t>
+                      </a:r>
+                    </a:p>
+                  </a:txBody>
+                  <a:tcPr>
+                    <a:solidFill>
+                      <a:srgbClr val="D0F0D8"/>
+                    </a:solidFill>
+                  </a:tcPr>
+                </a:tc>
+              </a:tr>
+              <a:tr h="333756">
+                <a:tc>
+                  <a:txBody>
+                    <a:bodyPr/>
+                    <a:lstStyle/>
+                    <a:p>
+                      <a:pPr algn="ctr"/>
+                      <a:r>
+                        <a:rPr b="1" sz="850">
+                          <a:solidFill>
+                            <a:srgbClr val="333333"/>
+                          </a:solidFill>
+                          <a:latin typeface="Times New Roman"/>
+                        </a:rPr>
+                        <a:t>혼합 항로
+(실제 운항)</a:t>
+                      </a:r>
+                    </a:p>
+                  </a:txBody>
+                  <a:tcPr>
+                    <a:solidFill>
+                      <a:srgbClr val="FFFFFF"/>
+                    </a:solidFill>
+                  </a:tcPr>
+                </a:tc>
+                <a:tc>
+                  <a:txBody>
+                    <a:bodyPr/>
+                    <a:lstStyle/>
+                    <a:p>
+                      <a:pPr algn="ctr"/>
+                      <a:r>
+                        <a:rPr b="0" sz="850">
+                          <a:solidFill>
+                            <a:srgbClr val="333333"/>
+                          </a:solidFill>
+                          <a:latin typeface="Times New Roman"/>
+                        </a:rPr>
+                        <a:t>✗ 위험</a:t>
+                      </a:r>
+                    </a:p>
+                  </a:txBody>
+                  <a:tcPr>
+                    <a:solidFill>
+                      <a:srgbClr val="FFD0D0"/>
+                    </a:solidFill>
+                  </a:tcPr>
+                </a:tc>
+                <a:tc>
+                  <a:txBody>
+                    <a:bodyPr/>
+                    <a:lstStyle/>
+                    <a:p>
+                      <a:pPr algn="ctr"/>
+                      <a:r>
+                        <a:rPr b="0" sz="850">
+                          <a:solidFill>
+                            <a:srgbClr val="333333"/>
+                          </a:solidFill>
+                          <a:latin typeface="Times New Roman"/>
+                        </a:rPr>
+                        <a:t>✗ 위험</a:t>
+                      </a:r>
+                    </a:p>
+                  </a:txBody>
+                  <a:tcPr>
+                    <a:solidFill>
+                      <a:srgbClr val="FFD0D0"/>
+                    </a:solidFill>
+                  </a:tcPr>
+                </a:tc>
+                <a:tc>
+                  <a:txBody>
+                    <a:bodyPr/>
+                    <a:lstStyle/>
+                    <a:p>
+                      <a:pPr algn="ctr"/>
+                      <a:r>
+                        <a:rPr b="0" sz="850">
+                          <a:solidFill>
+                            <a:srgbClr val="333333"/>
+                          </a:solidFill>
+                          <a:latin typeface="Times New Roman"/>
+                        </a:rPr>
+                        <a:t>✓ 필수</a:t>
+                      </a:r>
+                    </a:p>
+                  </a:txBody>
+                  <a:tcPr>
+                    <a:solidFill>
+                      <a:srgbClr val="D0F0D8"/>
+                    </a:solidFill>
+                  </a:tcPr>
+                </a:tc>
+              </a:tr>
+            </a:tbl>
+          </a:graphicData>
+        </a:graphic>
+      </p:graphicFrame>
+      <p:sp>
+        <p:nvSpPr>
+          <p:cNvPr id="11" name="TextBox 10"/>
+          <p:cNvSpPr txBox="1"/>
+          <p:nvPr/>
+        </p:nvSpPr>
+        <p:spPr>
+          <a:xfrm>
+            <a:off x="4617720" y="3730752"/>
+            <a:ext cx="4206240" cy="256032"/>
+          </a:xfrm>
+          <a:prstGeom prst="rect">
+            <a:avLst/>
+          </a:prstGeom>
+          <a:noFill/>
+        </p:spPr>
+        <p:txBody>
+          <a:bodyPr wrap="square">
+            <a:spAutoFit/>
+          </a:bodyPr>
+          <a:lstStyle/>
+          <a:p>
+            <a:pPr algn="l"/>
+            <a:r>
+              <a:rPr b="1" sz="1100">
+                <a:solidFill>
+                  <a:srgbClr val="C05317"/>
+                </a:solidFill>
+                <a:latin typeface="Times New Roman"/>
+              </a:rPr>
+              <a:t>③ WaveSplat이 필요한 세 가지 이유</a:t>
+            </a:r>
+          </a:p>
+        </p:txBody>
+      </p:sp>
+      <p:sp>
+        <p:nvSpPr>
+          <p:cNvPr id="12" name="TextBox 11"/>
+          <p:cNvSpPr txBox="1"/>
+          <p:nvPr/>
+        </p:nvSpPr>
+        <p:spPr>
+          <a:xfrm>
+            <a:off x="4617720" y="4005072"/>
+            <a:ext cx="4206240" cy="2286000"/>
+          </a:xfrm>
+          <a:prstGeom prst="rect">
+            <a:avLst/>
+          </a:prstGeom>
+          <a:noFill/>
+        </p:spPr>
+        <p:txBody>
+          <a:bodyPr wrap="square">
+            <a:spAutoFit/>
+          </a:bodyPr>
+          <a:lstStyle/>
+          <a:p>
+            <a:r>
+              <a:rPr b="1" sz="950">
+                <a:solidFill>
+                  <a:srgbClr val="1A1A2E"/>
+                </a:solidFill>
+                <a:latin typeface="Times New Roman"/>
+              </a:rPr>
+              <a:t>▸ Per-foil 독립 평가: </a:t>
+            </a:r>
+            <a:r>
+              <a:rPr b="0" sz="900">
+                <a:solidFill>
+                  <a:srgbClr val="333333"/>
+                </a:solidFill>
+                <a:latin typeface="Times New Roman"/>
+              </a:rPr>
+              <a:t>Front/rear foil의 preview 위치에서 wave slope와 w를 각각 계산. 41° 위상 오차를 원천 차단. SP-1pt는 구조상 불가능.</a:t>
+            </a:r>
+          </a:p>
+          <a:p>
+            <a:pPr>
+              <a:spcBef>
+                <a:spcPts val="600"/>
+              </a:spcBef>
+            </a:pPr>
+            <a:r>
+              <a:rPr b="1" sz="950">
+                <a:solidFill>
+                  <a:srgbClr val="1A1A2E"/>
+                </a:solidFill>
+                <a:latin typeface="Times New Roman"/>
+              </a:rPr>
+              <a:t>▸ 방향 독립성: </a:t>
+            </a:r>
+            <a:r>
+              <a:rPr b="0" sz="900">
+                <a:solidFill>
+                  <a:srgbClr val="333333"/>
+                </a:solidFill>
+                <a:latin typeface="Times New Roman"/>
+              </a:rPr>
+              <a:t>directional spread 있는 실해상에서도 각 component (kx, ky, ω, φ)를 독립 추정 → μ=0~360° 전 방향 stable. SP-1pt σ/μ=1.5 → WS σ/μ=0.34.</a:t>
+            </a:r>
+          </a:p>
+          <a:p>
+            <a:pPr>
+              <a:spcBef>
+                <a:spcPts val="600"/>
+              </a:spcBef>
+            </a:pPr>
+            <a:r>
+              <a:rPr b="1" sz="950">
+                <a:solidFill>
+                  <a:srgbClr val="1A1A2E"/>
+                </a:solidFill>
+                <a:latin typeface="Times New Roman"/>
+              </a:rPr>
+              <a:t>▸ Slope 추정 정확도: </a:t>
+            </a:r>
+            <a:r>
+              <a:rPr b="0" sz="900">
+                <a:solidFill>
+                  <a:srgbClr val="333333"/>
+                </a:solidFill>
+                <a:latin typeface="Times New Roman"/>
+              </a:rPr>
+              <a:t>∂η/∂x = Σ(−Aᵢ·kxᵢ·sin(phase)) — 해석적 계산. SP-temporal의 head-sea 가정 없음 → beam/oblique에서도 정확.</a:t>
+            </a:r>
+          </a:p>
+        </p:txBody>
+      </p:sp>
+      <p:sp>
+        <p:nvSpPr>
+          <p:cNvPr id="14" name="Rectangle 13"/>
+          <p:cNvSpPr/>
+          <p:nvPr/>
+        </p:nvSpPr>
+        <p:spPr>
+          <a:xfrm>
+            <a:off x="320040" y="6400800"/>
+            <a:ext cx="8503920" cy="411480"/>
+          </a:xfrm>
+          <a:prstGeom prst="rect">
+            <a:avLst/>
+          </a:prstGeom>
+          <a:solidFill>
+            <a:srgbClr val="C05317"/>
+          </a:solidFill>
+          <a:ln>
+            <a:noFill/>
+          </a:ln>
+        </p:spPr>
+        <p:style>
+          <a:lnRef idx="1">
+            <a:schemeClr val="accent1"/>
+          </a:lnRef>
+          <a:fillRef idx="3">
+            <a:schemeClr val="accent1"/>
+          </a:fillRef>
+          <a:effectRef idx="2">
+            <a:schemeClr val="accent1"/>
+          </a:effectRef>
+          <a:fontRef idx="minor">
+            <a:schemeClr val="lt1"/>
+          </a:fontRef>
+        </p:style>
+        <p:txBody>
+          <a:bodyPr rtlCol="0" anchor="ctr"/>
+          <a:lstStyle/>
+          <a:p>
+            <a:pPr algn="ctr"/>
+          </a:p>
+        </p:txBody>
+      </p:sp>
+      <p:sp>
+        <p:nvSpPr>
+          <p:cNvPr id="13" name="TextBox 12"/>
+          <p:cNvSpPr txBox="1"/>
+          <p:nvPr/>
+        </p:nvSpPr>
+        <p:spPr>
+          <a:xfrm>
+            <a:off x="320040" y="6400800"/>
+            <a:ext cx="8503920" cy="411480"/>
+          </a:xfrm>
+          <a:prstGeom prst="rect">
+            <a:avLst/>
+          </a:prstGeom>
+          <a:noFill/>
+        </p:spPr>
+        <p:txBody>
           <a:bodyPr wrap="none">
             <a:spAutoFit/>
           </a:bodyPr>
           <a:lstStyle/>
           <a:p>
-            <a:r>
-              <a:rPr sz="800" i="1">
-                <a:solidFill>
-                  <a:srgbClr val="666666"/>
-                </a:solidFill>
-                <a:latin typeface="Times New Roman"/>
-              </a:rPr>
-              <a:t>※ 모든 인용은 CrossRef API + ScienceDirect TOC로 metadata 확인 완료 (paper/references.bib와 동기화)</a:t>
+            <a:pPr algn="ctr"/>
+            <a:r>
+              <a:rPr b="1" sz="1000">
+                <a:solidFill>
+                  <a:srgbClr val="FFFFFF"/>
+                </a:solidFill>
+                <a:latin typeface="Times New Roman"/>
+              </a:rPr>
+              <a:t>SP 유효 영역: Head sea + Tp&gt;7s (1가지 조건만)  |  WaveSplat: 혼합 항로·단주기·beam 모두 robust  |  실 상용 운항: LiDAR + WaveSplat 필수</a:t>
             </a:r>
           </a:p>
         </p:txBody>
@@ -15951,7 +18403,15 @@
         <p:txBody>
           <a:bodyPr/>
           <a:lstStyle/>
-          <a:p/>
+          <a:p>
+            <a:pPr/>
+            <a:r>
+              <a:rPr sz="2200" b="0" i="0">
+                <a:latin typeface="Times New Roman"/>
+              </a:rPr>
+              <a:t>한계와 지금까지의 연구 Contributions</a:t>
+            </a:r>
+          </a:p>
         </p:txBody>
       </p:sp>
       <p:sp>
@@ -15962,8 +18422,8 @@
         </p:nvSpPr>
         <p:spPr>
           <a:xfrm>
-            <a:off x="320040" y="0"/>
-            <a:ext cx="8193024" cy="777240"/>
+            <a:off x="365760" y="868680"/>
+            <a:ext cx="4114800" cy="274320"/>
           </a:xfrm>
           <a:prstGeom prst="rect">
             <a:avLst/>
@@ -15971,20 +18431,19 @@
           <a:noFill/>
         </p:spPr>
         <p:txBody>
-          <a:bodyPr wrap="square">
+          <a:bodyPr wrap="none">
             <a:spAutoFit/>
           </a:bodyPr>
           <a:lstStyle/>
           <a:p>
-            <a:pPr algn="l"/>
-            <a:r>
-              <a:rPr b="1" sz="2200">
-                <a:solidFill>
-                  <a:srgbClr val="1A1A2E"/>
-                </a:solidFill>
-                <a:latin typeface="Times New Roman"/>
-              </a:rPr>
-              <a:t>Hydrofoil 결과 (4) — 단일점 선수 센서 비교</a:t>
+            <a:r>
+              <a:rPr sz="1200" b="1">
+                <a:solidFill>
+                  <a:srgbClr val="C05317"/>
+                </a:solidFill>
+                <a:latin typeface="Times New Roman"/>
+              </a:rPr>
+              <a:t>한계 (정직한 보고)</a:t>
             </a:r>
           </a:p>
         </p:txBody>
@@ -15997,8 +18456,8 @@
         </p:nvSpPr>
         <p:spPr>
           <a:xfrm>
-            <a:off x="365760" y="804672"/>
-            <a:ext cx="8229600" cy="274320"/>
+            <a:off x="365760" y="1188720"/>
+            <a:ext cx="4114800" cy="4846320"/>
           </a:xfrm>
           <a:prstGeom prst="rect">
             <a:avLst/>
@@ -16011,759 +18470,193 @@
           </a:bodyPr>
           <a:lstStyle/>
           <a:p>
-            <a:pPr algn="l"/>
-            <a:r>
-              <a:rPr b="0" sz="1100">
-                <a:solidFill>
-                  <a:srgbClr val="C05317"/>
-                </a:solidFill>
-                <a:latin typeface="Times New Roman"/>
-              </a:rPr>
-              <a:t>Candela C-8 bow sensor (SP) vs WaveSplat — 5 seeds × 4 scenarios, 30 s each</a:t>
-            </a:r>
-          </a:p>
-        </p:txBody>
-      </p:sp>
-      <p:graphicFrame>
-        <p:nvGraphicFramePr>
-          <p:cNvPr id="6" name="Table 5"/>
-          <p:cNvGraphicFramePr>
-            <a:graphicFrameLocks noGrp="1"/>
-          </p:cNvGraphicFramePr>
-          <p:nvPr/>
-        </p:nvGraphicFramePr>
-        <p:xfrm>
-          <a:off x="365760" y="1115568"/>
-          <a:ext cx="9326880" cy="2148840"/>
-        </p:xfrm>
-        <a:graphic>
-          <a:graphicData uri="http://schemas.openxmlformats.org/drawingml/2006/table">
-            <a:tbl>
-              <a:tblPr firstRow="1" bandRow="1">
-                <a:tableStyleId>{5C22544A-7EE6-4342-B048-85BDC9FD1C3A}</a:tableStyleId>
-              </a:tblPr>
-              <a:tblGrid>
-                <a:gridCol w="2011680"/>
-                <a:gridCol w="1463040"/>
-                <a:gridCol w="1463040"/>
-                <a:gridCol w="1828800"/>
-                <a:gridCol w="1828800"/>
-                <a:gridCol w="731520"/>
-              </a:tblGrid>
-              <a:tr h="429768">
-                <a:tc>
-                  <a:txBody>
-                    <a:bodyPr/>
-                    <a:lstStyle/>
-                    <a:p>
-                      <a:pPr algn="ctr"/>
-                      <a:r>
-                        <a:rPr b="1" sz="1000">
-                          <a:solidFill>
-                            <a:srgbClr val="FFFFFF"/>
-                          </a:solidFill>
-                          <a:latin typeface="Times New Roman"/>
-                        </a:rPr>
-                        <a:t>시나리오</a:t>
-                      </a:r>
-                    </a:p>
-                  </a:txBody>
-                  <a:tcPr>
-                    <a:solidFill>
-                      <a:srgbClr val="1A1A2E"/>
-                    </a:solidFill>
-                  </a:tcPr>
-                </a:tc>
-                <a:tc>
-                  <a:txBody>
-                    <a:bodyPr/>
-                    <a:lstStyle/>
-                    <a:p>
-                      <a:pPr algn="ctr"/>
-                      <a:r>
-                        <a:rPr b="1" sz="1000">
-                          <a:solidFill>
-                            <a:srgbClr val="FFFFFF"/>
-                          </a:solidFill>
-                          <a:latin typeface="Times New Roman"/>
-                        </a:rPr>
-                        <a:t>GT-FF</a:t>
-                      </a:r>
-                    </a:p>
-                  </a:txBody>
-                  <a:tcPr>
-                    <a:solidFill>
-                      <a:srgbClr val="1A1A2E"/>
-                    </a:solidFill>
-                  </a:tcPr>
-                </a:tc>
-                <a:tc>
-                  <a:txBody>
-                    <a:bodyPr/>
-                    <a:lstStyle/>
-                    <a:p>
-                      <a:pPr algn="ctr"/>
-                      <a:r>
-                        <a:rPr b="1" sz="1000">
-                          <a:solidFill>
-                            <a:srgbClr val="FFFFFF"/>
-                          </a:solidFill>
-                          <a:latin typeface="Times New Roman"/>
-                        </a:rPr>
-                        <a:t>WS-FF</a:t>
-                      </a:r>
-                    </a:p>
-                  </a:txBody>
-                  <a:tcPr>
-                    <a:solidFill>
-                      <a:srgbClr val="1A1A2E"/>
-                    </a:solidFill>
-                  </a:tcPr>
-                </a:tc>
-                <a:tc>
-                  <a:txBody>
-                    <a:bodyPr/>
-                    <a:lstStyle/>
-                    <a:p>
-                      <a:pPr algn="ctr"/>
-                      <a:r>
-                        <a:rPr b="1" sz="1000">
-                          <a:solidFill>
-                            <a:srgbClr val="FFFFFF"/>
-                          </a:solidFill>
-                          <a:latin typeface="Times New Roman"/>
-                        </a:rPr>
-                        <a:t>SP-1pt</a:t>
-                      </a:r>
-                    </a:p>
-                  </a:txBody>
-                  <a:tcPr>
-                    <a:solidFill>
-                      <a:srgbClr val="1A1A2E"/>
-                    </a:solidFill>
-                  </a:tcPr>
-                </a:tc>
-                <a:tc>
-                  <a:txBody>
-                    <a:bodyPr/>
-                    <a:lstStyle/>
-                    <a:p>
-                      <a:pPr algn="ctr"/>
-                      <a:r>
-                        <a:rPr b="1" sz="1000">
-                          <a:solidFill>
-                            <a:srgbClr val="FFFFFF"/>
-                          </a:solidFill>
-                          <a:latin typeface="Times New Roman"/>
-                        </a:rPr>
-                        <a:t>SP-temporal</a:t>
-                      </a:r>
-                    </a:p>
-                  </a:txBody>
-                  <a:tcPr>
-                    <a:solidFill>
-                      <a:srgbClr val="1A1A2E"/>
-                    </a:solidFill>
-                  </a:tcPr>
-                </a:tc>
-                <a:tc>
-                  <a:txBody>
-                    <a:bodyPr/>
-                    <a:lstStyle/>
-                    <a:p>
-                      <a:pPr algn="ctr"/>
-                      <a:r>
-                        <a:rPr b="1" sz="1000">
-                          <a:solidFill>
-                            <a:srgbClr val="FFFFFF"/>
-                          </a:solidFill>
-                          <a:latin typeface="Times New Roman"/>
-                        </a:rPr>
-                        <a:t>SP1/GT</a:t>
-                      </a:r>
-                    </a:p>
-                  </a:txBody>
-                  <a:tcPr>
-                    <a:solidFill>
-                      <a:srgbClr val="1A1A2E"/>
-                    </a:solidFill>
-                  </a:tcPr>
-                </a:tc>
-              </a:tr>
-              <a:tr h="429768">
-                <a:tc>
-                  <a:txBody>
-                    <a:bodyPr/>
-                    <a:lstStyle/>
-                    <a:p>
-                      <a:pPr algn="l"/>
-                      <a:r>
-                        <a:rPr b="1" sz="950">
-                          <a:solidFill>
-                            <a:srgbClr val="333333"/>
-                          </a:solidFill>
-                          <a:latin typeface="Times New Roman"/>
-                        </a:rPr>
-                        <a:t>BF3 Head  μ=180° Tp=5s</a:t>
-                      </a:r>
-                    </a:p>
-                  </a:txBody>
-                  <a:tcPr>
-                    <a:solidFill>
-                      <a:srgbClr val="FFFFFF"/>
-                    </a:solidFill>
-                  </a:tcPr>
-                </a:tc>
-                <a:tc>
-                  <a:txBody>
-                    <a:bodyPr/>
-                    <a:lstStyle/>
-                    <a:p>
-                      <a:pPr algn="ctr"/>
-                      <a:r>
-                        <a:rPr b="0" sz="950">
-                          <a:solidFill>
-                            <a:srgbClr val="333333"/>
-                          </a:solidFill>
-                          <a:latin typeface="Times New Roman"/>
-                        </a:rPr>
-                        <a:t>+12.0%(±3.0)</a:t>
-                      </a:r>
-                    </a:p>
-                  </a:txBody>
-                  <a:tcPr>
-                    <a:solidFill>
-                      <a:srgbClr val="FFFFFF"/>
-                    </a:solidFill>
-                  </a:tcPr>
-                </a:tc>
-                <a:tc>
-                  <a:txBody>
-                    <a:bodyPr/>
-                    <a:lstStyle/>
-                    <a:p>
-                      <a:pPr algn="ctr"/>
-                      <a:r>
-                        <a:rPr b="0" sz="950">
-                          <a:solidFill>
-                            <a:srgbClr val="333333"/>
-                          </a:solidFill>
-                          <a:latin typeface="Times New Roman"/>
-                        </a:rPr>
-                        <a:t>+11.9%(±3.3)</a:t>
-                      </a:r>
-                    </a:p>
-                  </a:txBody>
-                  <a:tcPr>
-                    <a:solidFill>
-                      <a:srgbClr val="FFFFFF"/>
-                    </a:solidFill>
-                  </a:tcPr>
-                </a:tc>
-                <a:tc>
-                  <a:txBody>
-                    <a:bodyPr/>
-                    <a:lstStyle/>
-                    <a:p>
-                      <a:pPr algn="ctr"/>
-                      <a:r>
-                        <a:rPr b="0" sz="950">
-                          <a:solidFill>
-                            <a:srgbClr val="333333"/>
-                          </a:solidFill>
-                          <a:latin typeface="Times New Roman"/>
-                        </a:rPr>
-                        <a:t>−13.3%(±0.7)</a:t>
-                      </a:r>
-                    </a:p>
-                  </a:txBody>
-                  <a:tcPr>
-                    <a:solidFill>
-                      <a:srgbClr val="FFD0D0"/>
-                    </a:solidFill>
-                  </a:tcPr>
-                </a:tc>
-                <a:tc>
-                  <a:txBody>
-                    <a:bodyPr/>
-                    <a:lstStyle/>
-                    <a:p>
-                      <a:pPr algn="ctr"/>
-                      <a:r>
-                        <a:rPr b="0" sz="950">
-                          <a:solidFill>
-                            <a:srgbClr val="333333"/>
-                          </a:solidFill>
-                          <a:latin typeface="Times New Roman"/>
-                        </a:rPr>
-                        <a:t>−0.2%(±1.6)</a:t>
-                      </a:r>
-                    </a:p>
-                  </a:txBody>
-                  <a:tcPr>
-                    <a:solidFill>
-                      <a:srgbClr val="FFFFFF"/>
-                    </a:solidFill>
-                  </a:tcPr>
-                </a:tc>
-                <a:tc>
-                  <a:txBody>
-                    <a:bodyPr/>
-                    <a:lstStyle/>
-                    <a:p>
-                      <a:pPr algn="ctr"/>
-                      <a:r>
-                        <a:rPr b="0" sz="950">
-                          <a:solidFill>
-                            <a:srgbClr val="333333"/>
-                          </a:solidFill>
-                          <a:latin typeface="Times New Roman"/>
-                        </a:rPr>
-                        <a:t>−111%</a:t>
-                      </a:r>
-                    </a:p>
-                  </a:txBody>
-                  <a:tcPr>
-                    <a:solidFill>
-                      <a:srgbClr val="FFFFFF"/>
-                    </a:solidFill>
-                  </a:tcPr>
-                </a:tc>
-              </a:tr>
-              <a:tr h="429768">
-                <a:tc>
-                  <a:txBody>
-                    <a:bodyPr/>
-                    <a:lstStyle/>
-                    <a:p>
-                      <a:pPr algn="l"/>
-                      <a:r>
-                        <a:rPr b="1" sz="950">
-                          <a:solidFill>
-                            <a:srgbClr val="333333"/>
-                          </a:solidFill>
-                          <a:latin typeface="Times New Roman"/>
-                        </a:rPr>
-                        <a:t>BF4 Head  μ=180° Tp=7.5s</a:t>
-                      </a:r>
-                    </a:p>
-                  </a:txBody>
-                  <a:tcPr>
-                    <a:solidFill>
-                      <a:srgbClr val="F9FAFB"/>
-                    </a:solidFill>
-                  </a:tcPr>
-                </a:tc>
-                <a:tc>
-                  <a:txBody>
-                    <a:bodyPr/>
-                    <a:lstStyle/>
-                    <a:p>
-                      <a:pPr algn="ctr"/>
-                      <a:r>
-                        <a:rPr b="0" sz="950">
-                          <a:solidFill>
-                            <a:srgbClr val="333333"/>
-                          </a:solidFill>
-                          <a:latin typeface="Times New Roman"/>
-                        </a:rPr>
-                        <a:t>+9.9%(±1.4)</a:t>
-                      </a:r>
-                    </a:p>
-                  </a:txBody>
-                  <a:tcPr>
-                    <a:solidFill>
-                      <a:srgbClr val="F9FAFB"/>
-                    </a:solidFill>
-                  </a:tcPr>
-                </a:tc>
-                <a:tc>
-                  <a:txBody>
-                    <a:bodyPr/>
-                    <a:lstStyle/>
-                    <a:p>
-                      <a:pPr algn="ctr"/>
-                      <a:r>
-                        <a:rPr b="0" sz="950">
-                          <a:solidFill>
-                            <a:srgbClr val="333333"/>
-                          </a:solidFill>
-                          <a:latin typeface="Times New Roman"/>
-                        </a:rPr>
-                        <a:t>+10.0%(±1.3)</a:t>
-                      </a:r>
-                    </a:p>
-                  </a:txBody>
-                  <a:tcPr>
-                    <a:solidFill>
-                      <a:srgbClr val="F9FAFB"/>
-                    </a:solidFill>
-                  </a:tcPr>
-                </a:tc>
-                <a:tc>
-                  <a:txBody>
-                    <a:bodyPr/>
-                    <a:lstStyle/>
-                    <a:p>
-                      <a:pPr algn="ctr"/>
-                      <a:r>
-                        <a:rPr b="0" sz="950">
-                          <a:solidFill>
-                            <a:srgbClr val="333333"/>
-                          </a:solidFill>
-                          <a:latin typeface="Times New Roman"/>
-                        </a:rPr>
-                        <a:t>+7.0%(±1.1)</a:t>
-                      </a:r>
-                    </a:p>
-                  </a:txBody>
-                  <a:tcPr>
-                    <a:solidFill>
-                      <a:srgbClr val="D0F0D8"/>
-                    </a:solidFill>
-                  </a:tcPr>
-                </a:tc>
-                <a:tc>
-                  <a:txBody>
-                    <a:bodyPr/>
-                    <a:lstStyle/>
-                    <a:p>
-                      <a:pPr algn="ctr"/>
-                      <a:r>
-                        <a:rPr b="0" sz="950">
-                          <a:solidFill>
-                            <a:srgbClr val="333333"/>
-                          </a:solidFill>
-                          <a:latin typeface="Times New Roman"/>
-                        </a:rPr>
-                        <a:t>≈0%</a:t>
-                      </a:r>
-                    </a:p>
-                  </a:txBody>
-                  <a:tcPr>
-                    <a:solidFill>
-                      <a:srgbClr val="F9FAFB"/>
-                    </a:solidFill>
-                  </a:tcPr>
-                </a:tc>
-                <a:tc>
-                  <a:txBody>
-                    <a:bodyPr/>
-                    <a:lstStyle/>
-                    <a:p>
-                      <a:pPr algn="ctr"/>
-                      <a:r>
-                        <a:rPr b="0" sz="950">
-                          <a:solidFill>
-                            <a:srgbClr val="333333"/>
-                          </a:solidFill>
-                          <a:latin typeface="Times New Roman"/>
-                        </a:rPr>
-                        <a:t>71%</a:t>
-                      </a:r>
-                    </a:p>
-                  </a:txBody>
-                  <a:tcPr>
-                    <a:solidFill>
-                      <a:srgbClr val="F9FAFB"/>
-                    </a:solidFill>
-                  </a:tcPr>
-                </a:tc>
-              </a:tr>
-              <a:tr h="429768">
-                <a:tc>
-                  <a:txBody>
-                    <a:bodyPr/>
-                    <a:lstStyle/>
-                    <a:p>
-                      <a:pPr algn="l"/>
-                      <a:r>
-                        <a:rPr b="1" sz="950">
-                          <a:solidFill>
-                            <a:srgbClr val="333333"/>
-                          </a:solidFill>
-                          <a:latin typeface="Times New Roman"/>
-                        </a:rPr>
-                        <a:t>BF3 Beam  μ=90°</a:t>
-                      </a:r>
-                    </a:p>
-                  </a:txBody>
-                  <a:tcPr>
-                    <a:solidFill>
-                      <a:srgbClr val="FFFFFF"/>
-                    </a:solidFill>
-                  </a:tcPr>
-                </a:tc>
-                <a:tc>
-                  <a:txBody>
-                    <a:bodyPr/>
-                    <a:lstStyle/>
-                    <a:p>
-                      <a:pPr algn="ctr"/>
-                      <a:r>
-                        <a:rPr b="0" sz="950">
-                          <a:solidFill>
-                            <a:srgbClr val="333333"/>
-                          </a:solidFill>
-                          <a:latin typeface="Times New Roman"/>
-                        </a:rPr>
-                        <a:t>+38.4%(±11.0)</a:t>
-                      </a:r>
-                    </a:p>
-                  </a:txBody>
-                  <a:tcPr>
-                    <a:solidFill>
-                      <a:srgbClr val="FFFFFF"/>
-                    </a:solidFill>
-                  </a:tcPr>
-                </a:tc>
-                <a:tc>
-                  <a:txBody>
-                    <a:bodyPr/>
-                    <a:lstStyle/>
-                    <a:p>
-                      <a:pPr algn="ctr"/>
-                      <a:r>
-                        <a:rPr b="0" sz="950">
-                          <a:solidFill>
-                            <a:srgbClr val="333333"/>
-                          </a:solidFill>
-                          <a:latin typeface="Times New Roman"/>
-                        </a:rPr>
-                        <a:t>+33.0%(±11.3)</a:t>
-                      </a:r>
-                    </a:p>
-                  </a:txBody>
-                  <a:tcPr>
-                    <a:solidFill>
-                      <a:srgbClr val="FFFFFF"/>
-                    </a:solidFill>
-                  </a:tcPr>
-                </a:tc>
-                <a:tc>
-                  <a:txBody>
-                    <a:bodyPr/>
-                    <a:lstStyle/>
-                    <a:p>
-                      <a:pPr algn="ctr"/>
-                      <a:r>
-                        <a:rPr b="0" sz="950">
-                          <a:solidFill>
-                            <a:srgbClr val="333333"/>
-                          </a:solidFill>
-                          <a:latin typeface="Times New Roman"/>
-                        </a:rPr>
-                        <a:t>+21.4%(±31.5)</a:t>
-                      </a:r>
-                    </a:p>
-                  </a:txBody>
-                  <a:tcPr>
-                    <a:solidFill>
-                      <a:srgbClr val="FFF0CC"/>
-                    </a:solidFill>
-                  </a:tcPr>
-                </a:tc>
-                <a:tc>
-                  <a:txBody>
-                    <a:bodyPr/>
-                    <a:lstStyle/>
-                    <a:p>
-                      <a:pPr algn="ctr"/>
-                      <a:r>
-                        <a:rPr b="0" sz="950">
-                          <a:solidFill>
-                            <a:srgbClr val="333333"/>
-                          </a:solidFill>
-                          <a:latin typeface="Times New Roman"/>
-                        </a:rPr>
-                        <a:t>−35.0%(±11.8)</a:t>
-                      </a:r>
-                    </a:p>
-                  </a:txBody>
-                  <a:tcPr>
-                    <a:solidFill>
-                      <a:srgbClr val="FFD0D0"/>
-                    </a:solidFill>
-                  </a:tcPr>
-                </a:tc>
-                <a:tc>
-                  <a:txBody>
-                    <a:bodyPr/>
-                    <a:lstStyle/>
-                    <a:p>
-                      <a:pPr algn="ctr"/>
-                      <a:r>
-                        <a:rPr b="0" sz="950">
-                          <a:solidFill>
-                            <a:srgbClr val="333333"/>
-                          </a:solidFill>
-                          <a:latin typeface="Times New Roman"/>
-                        </a:rPr>
-                        <a:t>56%</a:t>
-                      </a:r>
-                    </a:p>
-                  </a:txBody>
-                  <a:tcPr>
-                    <a:solidFill>
-                      <a:srgbClr val="FFFFFF"/>
-                    </a:solidFill>
-                  </a:tcPr>
-                </a:tc>
-              </a:tr>
-              <a:tr h="429768">
-                <a:tc>
-                  <a:txBody>
-                    <a:bodyPr/>
-                    <a:lstStyle/>
-                    <a:p>
-                      <a:pPr algn="l"/>
-                      <a:r>
-                        <a:rPr b="1" sz="950">
-                          <a:solidFill>
-                            <a:srgbClr val="333333"/>
-                          </a:solidFill>
-                          <a:latin typeface="Times New Roman"/>
-                        </a:rPr>
-                        <a:t>BF3 Quarter  μ=135°</a:t>
-                      </a:r>
-                    </a:p>
-                  </a:txBody>
-                  <a:tcPr>
-                    <a:solidFill>
-                      <a:srgbClr val="F9FAFB"/>
-                    </a:solidFill>
-                  </a:tcPr>
-                </a:tc>
-                <a:tc>
-                  <a:txBody>
-                    <a:bodyPr/>
-                    <a:lstStyle/>
-                    <a:p>
-                      <a:pPr algn="ctr"/>
-                      <a:r>
-                        <a:rPr b="0" sz="950">
-                          <a:solidFill>
-                            <a:srgbClr val="333333"/>
-                          </a:solidFill>
-                          <a:latin typeface="Times New Roman"/>
-                        </a:rPr>
-                        <a:t>+15.2%(±7.2)</a:t>
-                      </a:r>
-                    </a:p>
-                  </a:txBody>
-                  <a:tcPr>
-                    <a:solidFill>
-                      <a:srgbClr val="F9FAFB"/>
-                    </a:solidFill>
-                  </a:tcPr>
-                </a:tc>
-                <a:tc>
-                  <a:txBody>
-                    <a:bodyPr/>
-                    <a:lstStyle/>
-                    <a:p>
-                      <a:pPr algn="ctr"/>
-                      <a:r>
-                        <a:rPr b="0" sz="950">
-                          <a:solidFill>
-                            <a:srgbClr val="333333"/>
-                          </a:solidFill>
-                          <a:latin typeface="Times New Roman"/>
-                        </a:rPr>
-                        <a:t>+15.2%(±7.3)</a:t>
-                      </a:r>
-                    </a:p>
-                  </a:txBody>
-                  <a:tcPr>
-                    <a:solidFill>
-                      <a:srgbClr val="F9FAFB"/>
-                    </a:solidFill>
-                  </a:tcPr>
-                </a:tc>
-                <a:tc>
-                  <a:txBody>
-                    <a:bodyPr/>
-                    <a:lstStyle/>
-                    <a:p>
-                      <a:pPr algn="ctr"/>
-                      <a:r>
-                        <a:rPr b="0" sz="950">
-                          <a:solidFill>
-                            <a:srgbClr val="333333"/>
-                          </a:solidFill>
-                          <a:latin typeface="Times New Roman"/>
-                        </a:rPr>
-                        <a:t>+2.5%(±9.2)</a:t>
-                      </a:r>
-                    </a:p>
-                  </a:txBody>
-                  <a:tcPr>
-                    <a:solidFill>
-                      <a:srgbClr val="FFF0CC"/>
-                    </a:solidFill>
-                  </a:tcPr>
-                </a:tc>
-                <a:tc>
-                  <a:txBody>
-                    <a:bodyPr/>
-                    <a:lstStyle/>
-                    <a:p>
-                      <a:pPr algn="ctr"/>
-                      <a:r>
-                        <a:rPr b="0" sz="950">
-                          <a:solidFill>
-                            <a:srgbClr val="333333"/>
-                          </a:solidFill>
-                          <a:latin typeface="Times New Roman"/>
-                        </a:rPr>
-                        <a:t>−1.9%(±3.3)</a:t>
-                      </a:r>
-                    </a:p>
-                  </a:txBody>
-                  <a:tcPr>
-                    <a:solidFill>
-                      <a:srgbClr val="F9FAFB"/>
-                    </a:solidFill>
-                  </a:tcPr>
-                </a:tc>
-                <a:tc>
-                  <a:txBody>
-                    <a:bodyPr/>
-                    <a:lstStyle/>
-                    <a:p>
-                      <a:pPr algn="ctr"/>
-                      <a:r>
-                        <a:rPr b="0" sz="950">
-                          <a:solidFill>
-                            <a:srgbClr val="333333"/>
-                          </a:solidFill>
-                          <a:latin typeface="Times New Roman"/>
-                        </a:rPr>
-                        <a:t>16%</a:t>
-                      </a:r>
-                    </a:p>
-                  </a:txBody>
-                  <a:tcPr>
-                    <a:solidFill>
-                      <a:srgbClr val="F9FAFB"/>
-                    </a:solidFill>
-                  </a:tcPr>
-                </a:tc>
-              </a:tr>
-            </a:tbl>
-          </a:graphicData>
-        </a:graphic>
-      </p:graphicFrame>
-      <p:sp>
-        <p:nvSpPr>
-          <p:cNvPr id="7" name="TextBox 6"/>
+            <a:r>
+              <a:rPr sz="1100" b="1" i="0">
+                <a:solidFill>
+                  <a:srgbClr val="1A1A2E"/>
+                </a:solidFill>
+                <a:latin typeface="Times New Roman"/>
+              </a:rPr>
+              <a:t>WaveSplat 추정</a:t>
+            </a:r>
+          </a:p>
+          <a:p>
+            <a:r>
+              <a:rPr sz="1000" b="0" i="0">
+                <a:solidFill>
+                  <a:srgbClr val="333333"/>
+                </a:solidFill>
+                <a:latin typeface="Times New Roman"/>
+              </a:rPr>
+              <a:t>▪ VR=0.66 → 진폭 ~34% 과소추정 (Adam pruning 부작용)</a:t>
+            </a:r>
+          </a:p>
+          <a:p>
+            <a:r>
+              <a:rPr sz="1000" b="0" i="0">
+                <a:solidFill>
+                  <a:srgbClr val="333333"/>
+                </a:solidFill>
+                <a:latin typeface="Times New Roman"/>
+              </a:rPr>
+              <a:t>▪ 30+ component crowding 시 방향 분리 어려움 (k-space에서 인접 peak)</a:t>
+            </a:r>
+          </a:p>
+          <a:p>
+            <a:r>
+              <a:rPr sz="1000" b="0" i="0">
+                <a:solidFill>
+                  <a:srgbClr val="333333"/>
+                </a:solidFill>
+                <a:latin typeface="Times New Roman"/>
+              </a:rPr>
+              <a:t>   → multi-frame 방향 voting / vessel yaw 변화 활용으로 개선 가능</a:t>
+            </a:r>
+          </a:p>
+          <a:p>
+            <a:r>
+              <a:rPr sz="1000" b="0" i="0">
+                <a:solidFill>
+                  <a:srgbClr val="333333"/>
+                </a:solidFill>
+                <a:latin typeface="Times New Roman"/>
+              </a:rPr>
+              <a:t>▪ Adam momentum의 부호 진동 → 진폭 감쇠 잔존</a:t>
+            </a:r>
+          </a:p>
+          <a:p>
+            <a:r>
+              <a:rPr sz="1000" b="0" i="0">
+                <a:solidFill>
+                  <a:srgbClr val="333333"/>
+                </a:solidFill>
+                <a:latin typeface="Times New Roman"/>
+              </a:rPr>
+              <a:t>▪ N_true ≥ 30 → 성분 수 표현력 한계</a:t>
+            </a:r>
+          </a:p>
+          <a:p>
+            <a:r>
+              <a:rPr sz="1000" b="0" i="0">
+                <a:solidFill>
+                  <a:srgbClr val="333333"/>
+                </a:solidFill>
+                <a:latin typeface="Times New Roman"/>
+              </a:rPr>
+              <a:t/>
+            </a:r>
+          </a:p>
+          <a:p>
+            <a:r>
+              <a:rPr sz="1100" b="1" i="0">
+                <a:solidFill>
+                  <a:srgbClr val="1A1A2E"/>
+                </a:solidFill>
+                <a:latin typeface="Times New Roman"/>
+              </a:rPr>
+              <a:t>Hydrofoil 응용</a:t>
+            </a:r>
+          </a:p>
+          <a:p>
+            <a:r>
+              <a:rPr sz="1000" b="0" i="0">
+                <a:solidFill>
+                  <a:srgbClr val="333333"/>
+                </a:solidFill>
+                <a:latin typeface="Times New Roman"/>
+              </a:rPr>
+              <a:t>▪ BF4 E2E → 37% (direction error 전파)</a:t>
+            </a:r>
+          </a:p>
+          <a:p>
+            <a:r>
+              <a:rPr sz="1000" b="0" i="0">
+                <a:solidFill>
+                  <a:srgbClr val="333333"/>
+                </a:solidFill>
+                <a:latin typeface="Times New Roman"/>
+              </a:rPr>
+              <a:t>▪ 2DOF (heave+pitch) — roll은 별도 roll foil 담당</a:t>
+            </a:r>
+          </a:p>
+          <a:p>
+            <a:r>
+              <a:rPr sz="1000" b="0" i="0">
+                <a:solidFill>
+                  <a:srgbClr val="333333"/>
+                </a:solidFill>
+                <a:latin typeface="Times New Roman"/>
+              </a:rPr>
+              <a:t>▪ 선형 foil model (ventilation 간소화)</a:t>
+            </a:r>
+          </a:p>
+          <a:p>
+            <a:r>
+              <a:rPr sz="1000" b="0" i="0">
+                <a:solidFill>
+                  <a:srgbClr val="333333"/>
+                </a:solidFill>
+                <a:latin typeface="Times New Roman"/>
+              </a:rPr>
+              <a:t/>
+            </a:r>
+          </a:p>
+          <a:p>
+            <a:r>
+              <a:rPr sz="1100" b="1" i="0">
+                <a:solidFill>
+                  <a:srgbClr val="1A1A2E"/>
+                </a:solidFill>
+                <a:latin typeface="Times New Roman"/>
+              </a:rPr>
+              <a:t>공통</a:t>
+            </a:r>
+          </a:p>
+          <a:p>
+            <a:r>
+              <a:rPr sz="1000" b="0" i="0">
+                <a:solidFill>
+                  <a:srgbClr val="333333"/>
+                </a:solidFill>
+                <a:latin typeface="Times New Roman"/>
+              </a:rPr>
+              <a:t>▪ 시뮬레이션 전용 → 실측 검증 필요 (수조 + 실선)</a:t>
+            </a:r>
+          </a:p>
+          <a:p>
+            <a:r>
+              <a:rPr sz="1000" b="0" i="0">
+                <a:solidFill>
+                  <a:srgbClr val="333333"/>
+                </a:solidFill>
+                <a:latin typeface="Times New Roman"/>
+              </a:rPr>
+              <a:t>▪ 선형 파도 모델 → Stokes-2+ 미반영</a:t>
+            </a:r>
+          </a:p>
+          <a:p>
+            <a:r>
+              <a:rPr sz="1000" b="0" i="0">
+                <a:solidFill>
+                  <a:srgbClr val="333333"/>
+                </a:solidFill>
+                <a:latin typeface="Times New Roman"/>
+              </a:rPr>
+              <a:t>▪ 해류·바람 변화에 따른 k 천이 미추정</a:t>
+            </a:r>
+          </a:p>
+        </p:txBody>
+      </p:sp>
+      <p:sp>
+        <p:nvSpPr>
+          <p:cNvPr id="6" name="TextBox 5"/>
           <p:cNvSpPr txBox="1"/>
           <p:nvPr/>
         </p:nvSpPr>
         <p:spPr>
           <a:xfrm>
-            <a:off x="365760" y="3383280"/>
-            <a:ext cx="4023360" cy="2880360"/>
+            <a:off x="4663440" y="868680"/>
+            <a:ext cx="3931920" cy="274320"/>
           </a:xfrm>
           <a:prstGeom prst="rect">
             <a:avLst/>
@@ -16771,146 +18664,33 @@
           <a:noFill/>
         </p:spPr>
         <p:txBody>
-          <a:bodyPr wrap="square">
+          <a:bodyPr wrap="none">
             <a:spAutoFit/>
           </a:bodyPr>
           <a:lstStyle/>
           <a:p>
-            <a:pPr algn="l"/>
-            <a:r>
-              <a:rPr b="1" sz="1200">
+            <a:r>
+              <a:rPr sz="1200" b="1">
                 <a:solidFill>
                   <a:srgbClr val="C05317"/>
                 </a:solidFill>
                 <a:latin typeface="Times New Roman"/>
               </a:rPr>
-              <a:t>핵심 발견</a:t>
-            </a:r>
-          </a:p>
-          <a:p>
-            <a:pPr algn="l">
-              <a:spcBef>
-                <a:spcPts val="400"/>
-              </a:spcBef>
-            </a:pPr>
-            <a:r>
-              <a:rPr b="0" sz="950">
-                <a:solidFill>
-                  <a:srgbClr val="333333"/>
-                </a:solidFill>
-                <a:latin typeface="Times New Roman"/>
-              </a:rPr>
-              <a:t>▪ BF3 Head sea: SP-1pt 일관적 악화 (−13.3%, std ±0.7%)</a:t>
-            </a:r>
-          </a:p>
-          <a:p>
-            <a:pPr algn="l"/>
-            <a:r>
-              <a:rPr b="0" sz="850">
-                <a:solidFill>
-                  <a:srgbClr val="6B7280"/>
-                </a:solidFill>
-                <a:latin typeface="Times New Roman"/>
-              </a:rPr>
-              <a:t>   → per-foil 위상 오차 Δφ ≈ 21°, sensor quality 무관한 구조적 한계</a:t>
-            </a:r>
-          </a:p>
-          <a:p>
-            <a:pPr algn="l">
-              <a:spcBef>
-                <a:spcPts val="400"/>
-              </a:spcBef>
-            </a:pPr>
-            <a:r>
-              <a:rPr b="0" sz="950">
-                <a:solidFill>
-                  <a:srgbClr val="333333"/>
-                </a:solidFill>
-                <a:latin typeface="Times New Roman"/>
-              </a:rPr>
-              <a:t>▪ BF3 Beam sea: SP-1pt 극도로 불안정 (std ±31.5%, σ/μ≈1.5)</a:t>
-            </a:r>
-          </a:p>
-          <a:p>
-            <a:pPr algn="l"/>
-            <a:r>
-              <a:rPr b="0" sz="850">
-                <a:solidFill>
-                  <a:srgbClr val="6B7280"/>
-                </a:solidFill>
-                <a:latin typeface="Times New Roman"/>
-              </a:rPr>
-              <a:t>   → directional spread로 인한 seed-dependent 위상 충돌</a:t>
-            </a:r>
-          </a:p>
-          <a:p>
-            <a:pPr algn="l">
-              <a:spcBef>
-                <a:spcPts val="400"/>
-              </a:spcBef>
-            </a:pPr>
-            <a:r>
-              <a:rPr b="0" sz="950">
-                <a:solidFill>
-                  <a:srgbClr val="333333"/>
-                </a:solidFill>
-                <a:latin typeface="Times New Roman"/>
-              </a:rPr>
-              <a:t>▪ SP-temporal: beam sea에서 일관적 악화 (−35.0%)</a:t>
-            </a:r>
-          </a:p>
-          <a:p>
-            <a:pPr algn="l"/>
-            <a:r>
-              <a:rPr b="0" sz="850">
-                <a:solidFill>
-                  <a:srgbClr val="6B7280"/>
-                </a:solidFill>
-                <a:latin typeface="Times New Roman"/>
-              </a:rPr>
-              <a:t>   → head-sea 가정 (∂η/∂x ≈ −∂η/∂t/c) 이 beam에서 부호 역전</a:t>
-            </a:r>
-          </a:p>
-          <a:p>
-            <a:pPr algn="l">
-              <a:spcBef>
-                <a:spcPts val="400"/>
-              </a:spcBef>
-            </a:pPr>
-            <a:r>
-              <a:rPr b="0" sz="950">
-                <a:solidFill>
-                  <a:srgbClr val="333333"/>
-                </a:solidFill>
-                <a:latin typeface="Times New Roman"/>
-              </a:rPr>
-              <a:t>▪ SP-1pt가 유효한 조건: Head sea + 장주기 너울 (Tp &gt; 7s)</a:t>
-            </a:r>
-          </a:p>
-          <a:p>
-            <a:pPr algn="l"/>
-            <a:r>
-              <a:rPr b="0" sz="850">
-                <a:solidFill>
-                  <a:srgbClr val="6B7280"/>
-                </a:solidFill>
-                <a:latin typeface="Times New Roman"/>
-              </a:rPr>
-              <a:t>   → BF4 head sea에서만 71% GT 회수 가능</a:t>
-            </a:r>
-          </a:p>
-        </p:txBody>
-      </p:sp>
-      <p:sp>
-        <p:nvSpPr>
-          <p:cNvPr id="8" name="TextBox 7"/>
+              <a:t>지금까지의 Contributions</a:t>
+            </a:r>
+          </a:p>
+        </p:txBody>
+      </p:sp>
+      <p:sp>
+        <p:nvSpPr>
+          <p:cNvPr id="7" name="TextBox 6"/>
           <p:cNvSpPr txBox="1"/>
           <p:nvPr/>
         </p:nvSpPr>
         <p:spPr>
           <a:xfrm>
-            <a:off x="4526280" y="3383280"/>
-            <a:ext cx="4434840" cy="274320"/>
+            <a:off x="4663440" y="1188720"/>
+            <a:ext cx="3931920" cy="4846320"/>
           </a:xfrm>
           <a:prstGeom prst="rect">
             <a:avLst/>
@@ -16918,59 +18698,178 @@
           <a:noFill/>
         </p:spPr>
         <p:txBody>
-          <a:bodyPr wrap="none">
-            <a:spAutoFit/>
-          </a:bodyPr>
-          <a:lstStyle/>
-          <a:p>
-            <a:r>
-              <a:rPr b="1" sz="1200">
-                <a:solidFill>
-                  <a:srgbClr val="C05317"/>
-                </a:solidFill>
-                <a:latin typeface="Times New Roman"/>
-              </a:rPr>
-              <a:t>WaveSplat이 필요한 이유 — 물리적 설명</a:t>
-            </a:r>
-          </a:p>
-        </p:txBody>
-      </p:sp>
-      <p:sp>
-        <p:nvSpPr>
-          <p:cNvPr id="9" name="TextBox 8"/>
-          <p:cNvSpPr txBox="1"/>
-          <p:nvPr/>
-        </p:nvSpPr>
-        <p:spPr>
-          <a:xfrm>
-            <a:off x="4526280" y="3703320"/>
-            <a:ext cx="4434840" cy="2560320"/>
-          </a:xfrm>
-          <a:prstGeom prst="rect">
-            <a:avLst/>
-          </a:prstGeom>
-          <a:noFill/>
-        </p:spPr>
-        <p:txBody>
           <a:bodyPr wrap="square">
             <a:spAutoFit/>
           </a:bodyPr>
           <a:lstStyle/>
-          <a:p/>
+          <a:p>
+            <a:r>
+              <a:rPr sz="1100" b="1" i="0">
+                <a:solidFill>
+                  <a:srgbClr val="C05317"/>
+                </a:solidFill>
+                <a:latin typeface="Times New Roman"/>
+              </a:rPr>
+              <a:t>[기본 알고리즘]</a:t>
+            </a:r>
+          </a:p>
+          <a:p>
+            <a:r>
+              <a:rPr sz="1000" b="0" i="0">
+                <a:solidFill>
+                  <a:srgbClr val="333333"/>
+                </a:solidFill>
+                <a:latin typeface="Times New Roman"/>
+              </a:rPr>
+              <a:t>❶ Grid-free spectral 파면 추정 (3DGS의 해양파 버전)</a:t>
+            </a:r>
+          </a:p>
+          <a:p>
+            <a:r>
+              <a:rPr sz="1000" b="0" i="0">
+                <a:solidFill>
+                  <a:srgbClr val="333333"/>
+                </a:solidFill>
+                <a:latin typeface="Times New Roman"/>
+              </a:rPr>
+              <a:t>❷ Dispersion hard constraint (5N→4N)</a:t>
+            </a:r>
+          </a:p>
+          <a:p>
+            <a:r>
+              <a:rPr sz="1000" b="0" i="0">
+                <a:solidFill>
+                  <a:srgbClr val="333333"/>
+                </a:solidFill>
+                <a:latin typeface="Times New Roman"/>
+              </a:rPr>
+              <a:t>❸ Adaptive N (pruning + growth + safety rollback)</a:t>
+            </a:r>
+          </a:p>
+          <a:p>
+            <a:r>
+              <a:rPr sz="1000" b="0" i="0">
+                <a:solidFill>
+                  <a:srgbClr val="333333"/>
+                </a:solidFill>
+                <a:latin typeface="Times New Roman"/>
+              </a:rPr>
+              <a:t>❹ Geometry-aware confidence weighting (cos·1/d)</a:t>
+            </a:r>
+          </a:p>
+          <a:p>
+            <a:r>
+              <a:rPr sz="1000" b="0" i="0">
+                <a:solidFill>
+                  <a:srgbClr val="333333"/>
+                </a:solidFill>
+                <a:latin typeface="Times New Roman"/>
+              </a:rPr>
+              <a:t>❺ Pre-specified 5-metric panel (cherry-pick 방지)</a:t>
+            </a:r>
+          </a:p>
+          <a:p>
+            <a:r>
+              <a:rPr sz="1000" b="0" i="0">
+                <a:solidFill>
+                  <a:srgbClr val="333333"/>
+                </a:solidFill>
+                <a:latin typeface="Times New Roman"/>
+              </a:rPr>
+              <a:t>❻ 24-config ETKF sweep (fair tuned baseline)</a:t>
+            </a:r>
+          </a:p>
+          <a:p>
+            <a:r>
+              <a:rPr sz="1000" b="0" i="0">
+                <a:solidFill>
+                  <a:srgbClr val="333333"/>
+                </a:solidFill>
+                <a:latin typeface="Times New Roman"/>
+              </a:rPr>
+              <a:t>❼ Spectral + Sparse + Forecast 3가지 고유 능력</a:t>
+            </a:r>
+          </a:p>
+          <a:p>
+            <a:r>
+              <a:rPr sz="1000" b="0" i="0">
+                <a:solidFill>
+                  <a:srgbClr val="333333"/>
+                </a:solidFill>
+                <a:latin typeface="Times New Roman"/>
+              </a:rPr>
+              <a:t/>
+            </a:r>
+          </a:p>
+          <a:p>
+            <a:r>
+              <a:rPr sz="1100" b="1" i="0">
+                <a:solidFill>
+                  <a:srgbClr val="C05317"/>
+                </a:solidFill>
+                <a:latin typeface="Times New Roman"/>
+              </a:rPr>
+              <a:t>[응용 — Hydrofoil ride control]</a:t>
+            </a:r>
+          </a:p>
+          <a:p>
+            <a:r>
+              <a:rPr sz="1000" b="0" i="0">
+                <a:solidFill>
+                  <a:srgbClr val="333333"/>
+                </a:solidFill>
+                <a:latin typeface="Times New Roman"/>
+              </a:rPr>
+              <a:t>❽ Dual-actuator wave-preview FF (collective + diff)</a:t>
+            </a:r>
+          </a:p>
+          <a:p>
+            <a:r>
+              <a:rPr sz="1000" b="0" i="0">
+                <a:solidFill>
+                  <a:srgbClr val="333333"/>
+                </a:solidFill>
+                <a:latin typeface="Times New Roman"/>
+              </a:rPr>
+              <a:t>❾ nRMSE tolerance + preview horizon 설계 지침</a:t>
+            </a:r>
+          </a:p>
+          <a:p>
+            <a:r>
+              <a:rPr sz="1000" b="0" i="0">
+                <a:solidFill>
+                  <a:srgbClr val="333333"/>
+                </a:solidFill>
+                <a:latin typeface="Times New Roman"/>
+              </a:rPr>
+              <a:t>❿ E2E LiDAR → 추정 → 제어 파이프라인 실증</a:t>
+            </a:r>
+          </a:p>
+          <a:p>
+            <a:r>
+              <a:rPr sz="1000" b="0" i="0">
+                <a:solidFill>
+                  <a:srgbClr val="333333"/>
+                </a:solidFill>
+                <a:latin typeface="Times New Roman"/>
+              </a:rPr>
+              <a:t>   (BF3에서 GT 대비 92~96% 달성)</a:t>
+            </a:r>
+          </a:p>
           <a:p>
             <a:pPr>
               <a:spcBef>
-                <a:spcPts val="500"/>
+                <a:spcPts val="300"/>
               </a:spcBef>
             </a:pPr>
             <a:r>
-              <a:rPr b="1" sz="950">
-                <a:solidFill>
-                  <a:srgbClr val="1A1A2E"/>
-                </a:solidFill>
-                <a:latin typeface="Times New Roman"/>
-              </a:rPr>
-              <a:t>▸ Per-foil 독립 평가: </a:t>
+              <a:rPr b="1" sz="1000">
+                <a:solidFill>
+                  <a:srgbClr val="C05317"/>
+                </a:solidFill>
+                <a:latin typeface="Times New Roman"/>
+              </a:rPr>
+              <a:t>⓫ 단일점 선수 센서 비교 (5-seed multi-scenario) —</a:t>
             </a:r>
             <a:r>
               <a:rPr b="0" sz="950">
@@ -16979,92 +18878,61 @@
                 </a:solidFill>
                 <a:latin typeface="Times New Roman"/>
               </a:rPr>
-              <a:t>WaveSplat은 각 foil의 preview 위치에서 스펙트럼 모델을 독립 평가 → 4.5m 간격의 위상 차이를 정확히 반영</a:t>
-            </a:r>
-          </a:p>
-          <a:p>
-            <a:pPr>
-              <a:spcBef>
-                <a:spcPts val="500"/>
-              </a:spcBef>
-            </a:pPr>
-            <a:r>
-              <a:rPr b="1" sz="950">
-                <a:solidFill>
-                  <a:srgbClr val="1A1A2E"/>
-                </a:solidFill>
-                <a:latin typeface="Times New Roman"/>
-              </a:rPr>
-              <a:t>▸ 방향 로버스트: </a:t>
-            </a:r>
-            <a:r>
-              <a:rPr b="0" sz="950">
-                <a:solidFill>
-                  <a:srgbClr val="333333"/>
-                </a:solidFill>
-                <a:latin typeface="Times New Roman"/>
-              </a:rPr>
-              <a:t>directional spread가 있는 실해상 스펙트럼에서 SP-1pt는 seed에 따라 도움/해로움이 바뀜 (σ/μ≈1.5), WaveSplat은 σ/μ≈0.34로 안정</a:t>
-            </a:r>
-          </a:p>
-          <a:p>
-            <a:pPr>
-              <a:spcBef>
-                <a:spcPts val="500"/>
-              </a:spcBef>
-            </a:pPr>
-            <a:r>
-              <a:rPr b="1" sz="950">
-                <a:solidFill>
-                  <a:srgbClr val="1A1A2E"/>
-                </a:solidFill>
-                <a:latin typeface="Times New Roman"/>
-              </a:rPr>
-              <a:t>▸ SP-temporal의 근본 한계: </a:t>
-            </a:r>
-            <a:r>
-              <a:rPr b="0" sz="950">
-                <a:solidFill>
-                  <a:srgbClr val="333333"/>
-                </a:solidFill>
-                <a:latin typeface="Times New Roman"/>
-              </a:rPr>
-              <a:t>∂η/∂x = −(1/c)∂η/∂t 는 head-sea 가정. 이를 제거하려면 방향 정보가 필요 → WaveSplat이 이미 제공</a:t>
-            </a:r>
-          </a:p>
-        </p:txBody>
-      </p:sp>
-      <p:sp>
-        <p:nvSpPr>
-          <p:cNvPr id="10" name="TextBox 9"/>
-          <p:cNvSpPr txBox="1"/>
+              <a:t> SP-1pt BF3 head sea −13.3%(구조적), beam sea σ/μ=1.5(불안정), SP-temporal −35%(가정 붕괴)</a:t>
+            </a:r>
+          </a:p>
+        </p:txBody>
+      </p:sp>
+      <p:sp>
+        <p:nvSpPr>
+          <p:cNvPr id="8" name="Rounded Rectangle 7"/>
+          <p:cNvSpPr/>
           <p:nvPr/>
         </p:nvSpPr>
         <p:spPr>
           <a:xfrm>
-            <a:off x="365760" y="6263640"/>
-            <a:ext cx="8412480" cy="365760"/>
+            <a:off x="365760" y="5989320"/>
+            <a:ext cx="8229600" cy="502920"/>
           </a:xfrm>
-          <a:prstGeom prst="rect">
+          <a:prstGeom prst="roundRect">
             <a:avLst/>
           </a:prstGeom>
-          <a:noFill/>
+          <a:solidFill>
+            <a:srgbClr val="C05317"/>
+          </a:solidFill>
+          <a:ln>
+            <a:solidFill>
+              <a:srgbClr val="C05317"/>
+            </a:solidFill>
+          </a:ln>
         </p:spPr>
-        <p:txBody>
-          <a:bodyPr wrap="none">
-            <a:spAutoFit/>
-          </a:bodyPr>
+        <p:style>
+          <a:lnRef idx="1">
+            <a:schemeClr val="accent1"/>
+          </a:lnRef>
+          <a:fillRef idx="3">
+            <a:schemeClr val="accent1"/>
+          </a:fillRef>
+          <a:effectRef idx="2">
+            <a:schemeClr val="accent1"/>
+          </a:effectRef>
+          <a:fontRef idx="minor">
+            <a:schemeClr val="lt1"/>
+          </a:fontRef>
+        </p:style>
+        <p:txBody>
+          <a:bodyPr rtlCol="0" anchor="ctr"/>
           <a:lstStyle/>
           <a:p>
             <a:pPr algn="ctr"/>
             <a:r>
               <a:rPr b="1" sz="1000">
                 <a:solidFill>
-                  <a:srgbClr val="C05317"/>
-                </a:solidFill>
-                <a:latin typeface="Times New Roman"/>
-              </a:rPr>
-              <a:t>단일점 센서 유효 영역: Head sea 전용 + 장주기 너울 (Tp &gt; 7s)  |  혼합 항로·단주기·beam sea → LiDAR + WaveSplat 필수</a:t>
+                  <a:srgbClr val="FFFFFF"/>
+                </a:solidFill>
+                <a:latin typeface="Times New Roman"/>
+              </a:rPr>
+              <a:t>WaveSplat: nRMSE 30.1%↓, ~10× faster  |  Hydrofoil: aRMS 11~41%↓, BF3 E2E 92~96%  |  SP-1pt head sea −13.3% (구조적 한계 실증)</a:t>
             </a:r>
           </a:p>
         </p:txBody>
@@ -18010,6 +19878,86 @@
                 <a:latin typeface="Times New Roman"/>
               </a:rPr>
               <a:t>→ Grid-free + physics-constrained representation이 필요</a:t>
+            </a:r>
+          </a:p>
+          <a:p>
+            <a:pPr algn="l">
+              <a:spcBef>
+                <a:spcPts val="200"/>
+              </a:spcBef>
+            </a:pPr>
+            <a:r>
+              <a:rPr b="0" sz="800">
+                <a:solidFill>
+                  <a:srgbClr val="333333"/>
+                </a:solidFill>
+                <a:latin typeface="Times New Roman"/>
+              </a:rPr>
+              <a:t/>
+            </a:r>
+          </a:p>
+          <a:p>
+            <a:pPr algn="l">
+              <a:spcBef>
+                <a:spcPts val="200"/>
+              </a:spcBef>
+            </a:pPr>
+            <a:r>
+              <a:rPr b="0" sz="900">
+                <a:solidFill>
+                  <a:srgbClr val="333333"/>
+                </a:solidFill>
+                <a:latin typeface="Times New Roman"/>
+              </a:rPr>
+              <a:t>▸ ETKF-grid: 격자 셀당 0~1점 → bilinear ill-posed; N_e=100 앙상블로 132.6 ms/frame; dispersion soft-constrained only</a:t>
+            </a:r>
+          </a:p>
+          <a:p>
+            <a:pPr algn="l">
+              <a:spcBef>
+                <a:spcPts val="200"/>
+              </a:spcBef>
+            </a:pPr>
+            <a:r>
+              <a:rPr b="0" sz="900">
+                <a:solidFill>
+                  <a:srgbClr val="333333"/>
+                </a:solidFill>
+                <a:latin typeface="Times New Roman"/>
+              </a:rPr>
+              <a:t>▸ GPR: RBF 커널 공간 보간 O(M³); 시간 모델 없음; VR=0.065 → 진폭 6.5%만 재현 (거의 zero-predictor)</a:t>
+            </a:r>
+          </a:p>
+          <a:p>
+            <a:pPr algn="l">
+              <a:spcBef>
+                <a:spcPts val="200"/>
+              </a:spcBef>
+            </a:pPr>
+            <a:r>
+              <a:rPr b="0" sz="900">
+                <a:solidFill>
+                  <a:srgbClr val="333333"/>
+                </a:solidFill>
+                <a:latin typeface="Times New Roman"/>
+              </a:rPr>
+              <a:t>▸ PINN/FNO: 학습 분포 의존 → 학습 외 sea state 취약; 균일 grid 가정 (sparse LiDAR에 직접 부적합)</a:t>
+            </a:r>
+          </a:p>
+          <a:p>
+            <a:pPr algn="l">
+              <a:spcBef>
+                <a:spcPts val="300"/>
+              </a:spcBef>
+            </a:pPr>
+            <a:r>
+              <a:rPr b="1" sz="950">
+                <a:solidFill>
+                  <a:srgbClr val="C05317"/>
+                </a:solidFill>
+                <a:latin typeface="Times New Roman"/>
+              </a:rPr>
+              <a:t>→ WaveSplat: Grid-free spectral (격자 없음) + ω = √(g|k|tanh|k|d) 하드 제약 + 13.4 ms/frame 실시간</a:t>
             </a:r>
           </a:p>
         </p:txBody>

--- a/wavesplat/docs/labmeeting_wavesplat.pptx
+++ b/wavesplat/docs/labmeeting_wavesplat.pptx
@@ -913,6 +913,2731 @@
     </a:lvl9pPr>
   </p:notesStyle>
 </p:notesMaster>
+</file>
+
+<file path=ppt/notesSlides/notesSlide1.xml><?xml version="1.0" encoding="utf-8"?>
+<p:notes xmlns:a="http://schemas.openxmlformats.org/drawingml/2006/main" xmlns:p="http://schemas.openxmlformats.org/presentationml/2006/main" xmlns:r="http://schemas.openxmlformats.org/officeDocument/2006/relationships">
+  <p:cSld>
+    <p:spTree>
+      <p:nvGrpSpPr>
+        <p:cNvPr id="1" name=""/>
+        <p:cNvGrpSpPr/>
+        <p:nvPr/>
+      </p:nvGrpSpPr>
+      <p:grpSpPr>
+        <a:xfrm>
+          <a:off x="0" y="0"/>
+          <a:ext cx="0" cy="0"/>
+          <a:chOff x="0" y="0"/>
+          <a:chExt cx="0" cy="0"/>
+        </a:xfrm>
+      </p:grpSpPr>
+      <p:sp>
+        <p:nvSpPr>
+          <p:cNvPr id="2" name="Slide Image Placeholder 1"/>
+          <p:cNvSpPr>
+            <a:spLocks noGrp="1"/>
+          </p:cNvSpPr>
+          <p:nvPr>
+            <p:ph type="sldImg" idx="2"/>
+          </p:nvPr>
+        </p:nvSpPr>
+        <p:spPr/>
+      </p:sp>
+      <p:sp>
+        <p:nvSpPr>
+          <p:cNvPr id="3" name="Notes Placeholder 2"/>
+          <p:cNvSpPr>
+            <a:spLocks noGrp="1"/>
+          </p:cNvSpPr>
+          <p:nvPr>
+            <p:ph type="body" idx="3" sz="quarter"/>
+          </p:nvPr>
+        </p:nvSpPr>
+        <p:spPr/>
+        <p:txBody>
+          <a:bodyPr/>
+          <a:lstStyle/>
+          <a:p>
+            <a:r>
+              <a:t>[발표 시작 전 1분 요약 — 이 연구가 뭔지 한 줄로]
+"배 위에 달린 레이저 센서(LiDAR)가 앞에 오는 파도를 측정합니다. 그런데 그 데이터가 너무 드문드문(sparse)해서 보통 방법으로는 파도 모양을 제대로 복원하기 어렵습니다. WaveSplat은 파도를 '여러 개의 규칙적인 사인파의 합'으로 표현하고, 물리 법칙(분산관계)을 수식에 강제로 집어넣어서, 적은 데이터로도 정확하게 파도 전체 모양을 알아냅니다."
+[비전문가에게 왜 이게 중요한지 설명하는 방법]
+- 하이드로포일 선박(물 위를 나는 배)이 파도를 미리 알면, 날개(foil)를 미리 조종해서 충격을 없앨 수 있습니다. 파도가 오기 0.1~0.3초 전에 대응하는 거예요.
+- 일반 승용차에 비유하면: 전방 카메라로 과속방지턱을 미리 보고 서스펜션을 미리 올리는 것과 같습니다.
+[WaveSplat = Wave + Splat의 의미]
+- "Splat"은 3D Gaussian Splatting (3DGS)에서 온 단어입니다. 컴퓨터 그래픽스에서 3D 장면을 '가우시안 덩어리들의 합'으로 표현하는 기법인데, 이 아이디어를 해양파에 적용했습니다.</a:t>
+            </a:r>
+          </a:p>
+        </p:txBody>
+      </p:sp>
+      <p:sp>
+        <p:nvSpPr>
+          <p:cNvPr id="4" name="Slide Number Placeholder 3"/>
+          <p:cNvSpPr>
+            <a:spLocks noGrp="1"/>
+          </p:cNvSpPr>
+          <p:nvPr>
+            <p:ph type="sldNum" idx="5" sz="quarter"/>
+          </p:nvPr>
+        </p:nvSpPr>
+        <p:spPr/>
+      </p:sp>
+    </p:spTree>
+  </p:cSld>
+  <p:clrMapOvr>
+    <a:masterClrMapping/>
+  </p:clrMapOvr>
+</p:notes>
+</file>
+
+<file path=ppt/notesSlides/notesSlide10.xml><?xml version="1.0" encoding="utf-8"?>
+<p:notes xmlns:a="http://schemas.openxmlformats.org/drawingml/2006/main" xmlns:p="http://schemas.openxmlformats.org/presentationml/2006/main" xmlns:r="http://schemas.openxmlformats.org/officeDocument/2006/relationships">
+  <p:cSld>
+    <p:spTree>
+      <p:nvGrpSpPr>
+        <p:cNvPr id="1" name=""/>
+        <p:cNvGrpSpPr/>
+        <p:nvPr/>
+      </p:nvGrpSpPr>
+      <p:grpSpPr>
+        <a:xfrm>
+          <a:off x="0" y="0"/>
+          <a:ext cx="0" cy="0"/>
+          <a:chOff x="0" y="0"/>
+          <a:chExt cx="0" cy="0"/>
+        </a:xfrm>
+      </p:grpSpPr>
+      <p:sp>
+        <p:nvSpPr>
+          <p:cNvPr id="2" name="Slide Image Placeholder 1"/>
+          <p:cNvSpPr>
+            <a:spLocks noGrp="1"/>
+          </p:cNvSpPr>
+          <p:nvPr>
+            <p:ph type="sldImg" idx="2"/>
+          </p:nvPr>
+        </p:nvSpPr>
+        <p:spPr/>
+      </p:sp>
+      <p:sp>
+        <p:nvSpPr>
+          <p:cNvPr id="3" name="Notes Placeholder 2"/>
+          <p:cNvSpPr>
+            <a:spLocks noGrp="1"/>
+          </p:cNvSpPr>
+          <p:nvPr>
+            <p:ph type="body" idx="3" sz="quarter"/>
+          </p:nvPr>
+        </p:nvSpPr>
+        <p:spPr/>
+        <p:txBody>
+          <a:bodyPr/>
+          <a:lstStyle/>
+          <a:p>
+            <a:r>
+              <a:t>[2단계 파이프라인이란?]
+WaveSplat은 두 단계로 작동합니다. 처음 한 번 초기화하고, 이후에는 빠르게 추적합니다.
+[Phase 1: 초기화 (약 500ms, 처음 한 번만)]
+① Beamforming: "파도가 어느 방향에서 오는가?"를 찾습니다.
+   비유: 소리의 방향을 찾는 것처럼, 레이저 데이터에서 파도의 진행 방향을 찾습니다.
+   81×81 방향 격자 = 6561가지 방향 중 에너지가 센 방향을 찾습니다.
+② Greedy peak extraction: 찾은 방향 중 에너지가 큰 N개를 선택합니다.
+③ Coarse-to-fine Adam: 거칠게 맞추고 점점 세밀하게 다듬습니다.
+   N=3 → 8 → 15로 성분 수를 늘리면서 최적화합니다.
+   Adam = 딥러닝에서 쓰는 최적화 방법. 경사하강법의 개선판.
+④ Energy pruning: 에너지가 작은 성분은 제거합니다. (전체 에너지의 90%만 남기고 나머지 제거)
+⑤ Residual growth: 아직 설명 못 한 파도가 있으면 성분을 추가합니다.
+[Phase 2: 추적 (약 13ms/프레임, 초당 10번)]
+Predict: φᵢ ← φᵢ + ωᵢ·Δt
+   파도 위상을 물리 법칙으로 한 스텝 앞으로 진행합니다.
+   비유: "지금 파봉이 여기 있으면, 0.1초 후엔 저기 있겠다"를 계산.
+Update: 새 관측 데이터로 추정값을 수정합니다. (Adam 10 스텝만)
+   kx, ky는 고정 (방향은 초기화에서 이미 잘 잡았으므로 건드리지 않음)
+   wᵢ, φᵢ만 업데이트 (진폭과 위상만 미세 조정)
+[왜 k를 고정하는가?]
+방향(kx, ky)은 여러 프레임을 쌓아야 정확히 추정됩니다. 단일 프레임에서는 데이터가 너무 적어서 신뢰할 수 없습니다. 한 번 잘 추정한 방향은 바다가 급변하지 않는 한 유지됩니다. k를 고정하면 200 grad steps → 10 steps로 줄어서 13ms가 가능합니다.</a:t>
+            </a:r>
+          </a:p>
+        </p:txBody>
+      </p:sp>
+      <p:sp>
+        <p:nvSpPr>
+          <p:cNvPr id="4" name="Slide Number Placeholder 3"/>
+          <p:cNvSpPr>
+            <a:spLocks noGrp="1"/>
+          </p:cNvSpPr>
+          <p:nvPr>
+            <p:ph type="sldNum" idx="5" sz="quarter"/>
+          </p:nvPr>
+        </p:nvSpPr>
+        <p:spPr/>
+      </p:sp>
+    </p:spTree>
+  </p:cSld>
+  <p:clrMapOvr>
+    <a:masterClrMapping/>
+  </p:clrMapOvr>
+</p:notes>
+</file>
+
+<file path=ppt/notesSlides/notesSlide11.xml><?xml version="1.0" encoding="utf-8"?>
+<p:notes xmlns:a="http://schemas.openxmlformats.org/drawingml/2006/main" xmlns:p="http://schemas.openxmlformats.org/presentationml/2006/main" xmlns:r="http://schemas.openxmlformats.org/officeDocument/2006/relationships">
+  <p:cSld>
+    <p:spTree>
+      <p:nvGrpSpPr>
+        <p:cNvPr id="1" name=""/>
+        <p:cNvGrpSpPr/>
+        <p:nvPr/>
+      </p:nvGrpSpPr>
+      <p:grpSpPr>
+        <a:xfrm>
+          <a:off x="0" y="0"/>
+          <a:ext cx="0" cy="0"/>
+          <a:chOff x="0" y="0"/>
+          <a:chExt cx="0" cy="0"/>
+        </a:xfrm>
+      </p:grpSpPr>
+      <p:sp>
+        <p:nvSpPr>
+          <p:cNvPr id="2" name="Slide Image Placeholder 1"/>
+          <p:cNvSpPr>
+            <a:spLocks noGrp="1"/>
+          </p:cNvSpPr>
+          <p:nvPr>
+            <p:ph type="sldImg" idx="2"/>
+          </p:nvPr>
+        </p:nvSpPr>
+        <p:spPr/>
+      </p:sp>
+      <p:sp>
+        <p:nvSpPr>
+          <p:cNvPr id="3" name="Notes Placeholder 2"/>
+          <p:cNvSpPr>
+            <a:spLocks noGrp="1"/>
+          </p:cNvSpPr>
+          <p:nvPr>
+            <p:ph type="body" idx="3" sz="quarter"/>
+          </p:nvPr>
+        </p:nvSpPr>
+        <p:spPr/>
+        <p:txBody>
+          <a:bodyPr/>
+          <a:lstStyle/>
+          <a:p>
+            <a:r>
+              <a:t>[전체 파이프라인 그림 읽는 법]
+그림을 보면서 따라가면 됩니다.
+왼쪽 (Phase 1, 처음 한 번):
+1. LiDAR 데이터 10프레임 모으기
+2. Beamforming: 파도 방향 찾기
+3. Coarse-to-fine 최적화: 점점 정밀하게
+4. Energy pruning: 불필요한 성분 제거
+5. Residual check: 아직 설명 못 한 파도 있으면 다시 추가
+오른쪽 (Phase 2, 초당 10번):
+1. 물리 법칙으로 위상 예측 (φ += ω·Δt)
+2. 새 LiDAR 데이터로 수정 (Adam 10 steps)
+3. 출력: 현재 파도장 + 미래 예측
+Phase 1→2 전환:
+kx, ky는 Phase 1에서 결정되어 Phase 2로 "동결"됩니다.
+w, φ만 Phase 2에서 계속 업데이트됩니다.
+[시간 척도 직관]
+Phase 1: ~500ms = 반 초. 발표 시작할 때 한 번만 함.
+Phase 2: ~13ms = 0.013초. 눈 깜짝하기 전에 끝남. 초당 70번 가능하지만 10번만 씁니다.</a:t>
+            </a:r>
+          </a:p>
+        </p:txBody>
+      </p:sp>
+      <p:sp>
+        <p:nvSpPr>
+          <p:cNvPr id="4" name="Slide Number Placeholder 3"/>
+          <p:cNvSpPr>
+            <a:spLocks noGrp="1"/>
+          </p:cNvSpPr>
+          <p:nvPr>
+            <p:ph type="sldNum" idx="5" sz="quarter"/>
+          </p:nvPr>
+        </p:nvSpPr>
+        <p:spPr/>
+      </p:sp>
+    </p:spTree>
+  </p:cSld>
+  <p:clrMapOvr>
+    <a:masterClrMapping/>
+  </p:clrMapOvr>
+</p:notes>
+</file>
+
+<file path=ppt/notesSlides/notesSlide12.xml><?xml version="1.0" encoding="utf-8"?>
+<p:notes xmlns:a="http://schemas.openxmlformats.org/drawingml/2006/main" xmlns:p="http://schemas.openxmlformats.org/presentationml/2006/main" xmlns:r="http://schemas.openxmlformats.org/officeDocument/2006/relationships">
+  <p:cSld>
+    <p:spTree>
+      <p:nvGrpSpPr>
+        <p:cNvPr id="1" name=""/>
+        <p:cNvGrpSpPr/>
+        <p:nvPr/>
+      </p:nvGrpSpPr>
+      <p:grpSpPr>
+        <a:xfrm>
+          <a:off x="0" y="0"/>
+          <a:ext cx="0" cy="0"/>
+          <a:chOff x="0" y="0"/>
+          <a:chExt cx="0" cy="0"/>
+        </a:xfrm>
+      </p:grpSpPr>
+      <p:sp>
+        <p:nvSpPr>
+          <p:cNvPr id="2" name="Slide Image Placeholder 1"/>
+          <p:cNvSpPr>
+            <a:spLocks noGrp="1"/>
+          </p:cNvSpPr>
+          <p:nvPr>
+            <p:ph type="sldImg" idx="2"/>
+          </p:nvPr>
+        </p:nvSpPr>
+        <p:spPr/>
+      </p:sp>
+      <p:sp>
+        <p:nvSpPr>
+          <p:cNvPr id="3" name="Notes Placeholder 2"/>
+          <p:cNvSpPr>
+            <a:spLocks noGrp="1"/>
+          </p:cNvSpPr>
+          <p:nvPr>
+            <p:ph type="body" idx="3" sz="quarter"/>
+          </p:nvPr>
+        </p:nvSpPr>
+        <p:spPr/>
+        <p:txBody>
+          <a:bodyPr/>
+          <a:lstStyle/>
+          <a:p>
+            <a:r>
+              <a:t>[왜 시뮬레이터가 필요한가?]
+실제 바다에서 실험하면:
+- 비교할 "정답(Ground Truth)" 파도를 알 수 없습니다.
+- 날씨와 바다 상태를 마음대로 조절할 수 없습니다.
+- 비용이 어마어마합니다.
+시뮬레이터에서는 우리가 파도를 직접 만들기 때문에 "정답"을 알고, WaveSplat 결과와 비교할 수 있습니다.
+[JONSWAP + Gerstner 파도 모델]
+JONSWAP: 북해에서 측정된 실제 바다 스펙트럼을 수식화한 것. "어떤 주파수에 에너지가 얼마나 있는가"를 정합니다.
+Gerstner 파도: 단순한 사인파 대신 조금 더 현실적인 파도 모양. 파봉(꼭대기)이 뾰족하고 파곡(골짜기)이 넓습니다. 실제 바다 파도처럼 보입니다.
+Q 제약: 파도가 너무 날카로우면(steep) 실제로 부서집니다. Q=1이 되면 파도가 뒤집히는 임계점. 이를 넘지 않도록 제한합니다.
+[검증 (39개 단위 테스트)]
+프로그램이 물리적으로 올바른지 자동으로 확인합니다.
+- 분산관계 오차 &lt; 0.000001 (극도로 정밀)
+- 단일 파도 성분 오차 &lt; 0.0000000001 m
+- 실제 파고와 시뮬레이션 파고 일치 오차 &lt; 0.5%
+이것이 중요한 이유: 시뮬레이션이 틀리면 실험 결과 전체가 의미 없어집니다. 철저하게 검증했습니다.</a:t>
+            </a:r>
+          </a:p>
+        </p:txBody>
+      </p:sp>
+      <p:sp>
+        <p:nvSpPr>
+          <p:cNvPr id="4" name="Slide Number Placeholder 3"/>
+          <p:cNvSpPr>
+            <a:spLocks noGrp="1"/>
+          </p:cNvSpPr>
+          <p:nvPr>
+            <p:ph type="sldNum" idx="5" sz="quarter"/>
+          </p:nvPr>
+        </p:nvSpPr>
+        <p:spPr/>
+      </p:sp>
+    </p:spTree>
+  </p:cSld>
+  <p:clrMapOvr>
+    <a:masterClrMapping/>
+  </p:clrMapOvr>
+</p:notes>
+</file>
+
+<file path=ppt/notesSlides/notesSlide13.xml><?xml version="1.0" encoding="utf-8"?>
+<p:notes xmlns:a="http://schemas.openxmlformats.org/drawingml/2006/main" xmlns:p="http://schemas.openxmlformats.org/presentationml/2006/main" xmlns:r="http://schemas.openxmlformats.org/officeDocument/2006/relationships">
+  <p:cSld>
+    <p:spTree>
+      <p:nvGrpSpPr>
+        <p:cNvPr id="1" name=""/>
+        <p:cNvGrpSpPr/>
+        <p:nvPr/>
+      </p:nvGrpSpPr>
+      <p:grpSpPr>
+        <a:xfrm>
+          <a:off x="0" y="0"/>
+          <a:ext cx="0" cy="0"/>
+          <a:chOff x="0" y="0"/>
+          <a:chExt cx="0" cy="0"/>
+        </a:xfrm>
+      </p:grpSpPr>
+      <p:sp>
+        <p:nvSpPr>
+          <p:cNvPr id="2" name="Slide Image Placeholder 1"/>
+          <p:cNvSpPr>
+            <a:spLocks noGrp="1"/>
+          </p:cNvSpPr>
+          <p:nvPr>
+            <p:ph type="sldImg" idx="2"/>
+          </p:nvPr>
+        </p:nvSpPr>
+        <p:spPr/>
+      </p:sp>
+      <p:sp>
+        <p:nvSpPr>
+          <p:cNvPr id="3" name="Notes Placeholder 2"/>
+          <p:cNvSpPr>
+            <a:spLocks noGrp="1"/>
+          </p:cNvSpPr>
+          <p:nvPr>
+            <p:ph type="body" idx="3" sz="quarter"/>
+          </p:nvPr>
+        </p:nvSpPr>
+        <p:spPr/>
+        <p:txBody>
+          <a:bodyPr/>
+          <a:lstStyle/>
+          <a:p>
+            <a:r>
+              <a:t>[LiDAR 시뮬레이터 — 어떻게 실제와 비슷하게 만드는가?]
+실제 LiDAR 센서 (Falcon K1) 스펙을 그대로 입력합니다:
+- 레이저 파장: 1550nm (눈에 안 보이는 적외선)
+- 채널 수: 152개 (레이저 빔이 152줄)
+- 스캔 속도: 초당 10번
+- 측정 거리: 1.5m ~ 250m
+- 거리 오차: ±2cm
+[Raydrop 모델 — 왜 데이터가 드문드문 생기는가?]
+레이저가 수면에 맞을 때 신호가 돌아오지 않는 두 가지 원인:
+1. Diffuse (균일) 반사: 수면이 항상 일정 확률로 신호를 돌려보냄.
+   공식: p = R_Fresnel(θ)·cos(θ)/d²
+   - R_Fresnel: 수면의 반사율 (각도에 따라 다름)
+   - cos(θ): 레이저가 수직에 가까울수록 잘 맞음
+   - /d²: 멀수록 신호 약해짐
+2. Specular (경면) 반사: 수면이 거울처럼 레이저를 특정 방향으로만 반사.
+   레이저가 정확히 반대 방향으로 돌아와야 감지됨. 경사진 수면에서 자주 발생.
+[왜 두 모델 모두 테스트?]
+실제 바다가 어느 메커니즘으로 더 많이 작동하는지 모릅니다. WaveSplat이 두 모델 모두에서 잘 작동해야 실용적입니다. (슬라이드 19 robustness에서 확인)
+[Ray-Mesh intersection]
+레이저가 파도 표면의 어느 삼각형에 맞는지 계산하는 방법 (Möller-Trumbore 알고리즘). 100% 정확하게 계산됩니다.</a:t>
+            </a:r>
+          </a:p>
+        </p:txBody>
+      </p:sp>
+      <p:sp>
+        <p:nvSpPr>
+          <p:cNvPr id="4" name="Slide Number Placeholder 3"/>
+          <p:cNvSpPr>
+            <a:spLocks noGrp="1"/>
+          </p:cNvSpPr>
+          <p:nvPr>
+            <p:ph type="sldNum" idx="5" sz="quarter"/>
+          </p:nvPr>
+        </p:nvSpPr>
+        <p:spPr/>
+      </p:sp>
+    </p:spTree>
+  </p:cSld>
+  <p:clrMapOvr>
+    <a:masterClrMapping/>
+  </p:clrMapOvr>
+</p:notes>
+</file>
+
+<file path=ppt/notesSlides/notesSlide14.xml><?xml version="1.0" encoding="utf-8"?>
+<p:notes xmlns:a="http://schemas.openxmlformats.org/drawingml/2006/main" xmlns:p="http://schemas.openxmlformats.org/presentationml/2006/main" xmlns:r="http://schemas.openxmlformats.org/officeDocument/2006/relationships">
+  <p:cSld>
+    <p:spTree>
+      <p:nvGrpSpPr>
+        <p:cNvPr id="1" name=""/>
+        <p:cNvGrpSpPr/>
+        <p:nvPr/>
+      </p:nvGrpSpPr>
+      <p:grpSpPr>
+        <a:xfrm>
+          <a:off x="0" y="0"/>
+          <a:ext cx="0" cy="0"/>
+          <a:chOff x="0" y="0"/>
+          <a:chExt cx="0" cy="0"/>
+        </a:xfrm>
+      </p:grpSpPr>
+      <p:sp>
+        <p:nvSpPr>
+          <p:cNvPr id="2" name="Slide Image Placeholder 1"/>
+          <p:cNvSpPr>
+            <a:spLocks noGrp="1"/>
+          </p:cNvSpPr>
+          <p:nvPr>
+            <p:ph type="sldImg" idx="2"/>
+          </p:nvPr>
+        </p:nvSpPr>
+        <p:spPr/>
+      </p:sp>
+      <p:sp>
+        <p:nvSpPr>
+          <p:cNvPr id="3" name="Notes Placeholder 2"/>
+          <p:cNvSpPr>
+            <a:spLocks noGrp="1"/>
+          </p:cNvSpPr>
+          <p:nvPr>
+            <p:ph type="body" idx="3" sz="quarter"/>
+          </p:nvPr>
+        </p:nvSpPr>
+        <p:spPr/>
+        <p:txBody>
+          <a:bodyPr/>
+          <a:lstStyle/>
+          <a:p>
+            <a:r>
+              <a:t>[실험 설계 — 어떻게 공정하게 비교했나?]
+[100개 에피소드 구성]
+BF2, BF3, BF4, BF5: 파도 강도 4단계
+N=1, 2, 5, 15, 30: 파도 성분 수 (단순 → 복잡)
+seed × 5: 같은 조건이지만 파도의 초기 위상을 다르게 (운의 영향 확인)
+raydrop × 2: uniform vs specular 두 가지 LiDAR 모델
+왜 이렇게 설계?
+- 단순한 바다에서만 좋으면 의미 없습니다. 다양한 조건 모두에서 검증해야 합니다.
+- "seed × 5"는 같은 설정에서 운이 좋은 경우/나쁜 경우를 모두 확인하기 위함입니다.
+- 이 100개를 미리 결정하고(pre-specified) 실험 후 일부만 골라 보여주는 cherry-pick을 원천 차단했습니다.
+[비교 대상 (Baseline)]
+ETKF: 24가지 설정 조합으로 최적화한 뒤 가장 좋은 설정으로 비교
+GPR-1: RBF 커널, 단일 프레임
+LETKF: ETKF에 공간 localization 추가 (강화 버전)
+GPR-disp: physics를 커널에 추가한 강화 GPR
+왜 baseline을 최적화해서 비교?
+공정한 비교를 위해서입니다. "WaveSplat vs 대충 만든 ETKF"가 아니라 "WaveSplat vs 최선을 다한 ETKF"로 비교해야 합니다.
+[5-Metric Panel]
+왜 5개 지표를 씁니까?
+단 하나의 지표를 최소화하면 다른 측면에서 속임수가 가능합니다.
+예: nRMSE만 보면, 항상 0을 출력해도 nRMSE가 크지 않을 수 있음 (Hs로 나누기 때문).
+SS&gt;0이 가장 기본적인 "유용성" 기준입니다. RMSE_unobs는 물리 법칙이 작동하는 직접 증거입니다.</a:t>
+            </a:r>
+          </a:p>
+        </p:txBody>
+      </p:sp>
+      <p:sp>
+        <p:nvSpPr>
+          <p:cNvPr id="4" name="Slide Number Placeholder 3"/>
+          <p:cNvSpPr>
+            <a:spLocks noGrp="1"/>
+          </p:cNvSpPr>
+          <p:nvPr>
+            <p:ph type="sldNum" idx="5" sz="quarter"/>
+          </p:nvPr>
+        </p:nvSpPr>
+        <p:spPr/>
+      </p:sp>
+    </p:spTree>
+  </p:cSld>
+  <p:clrMapOvr>
+    <a:masterClrMapping/>
+  </p:clrMapOvr>
+</p:notes>
+</file>
+
+<file path=ppt/notesSlides/notesSlide15.xml><?xml version="1.0" encoding="utf-8"?>
+<p:notes xmlns:a="http://schemas.openxmlformats.org/drawingml/2006/main" xmlns:p="http://schemas.openxmlformats.org/presentationml/2006/main" xmlns:r="http://schemas.openxmlformats.org/officeDocument/2006/relationships">
+  <p:cSld>
+    <p:spTree>
+      <p:nvGrpSpPr>
+        <p:cNvPr id="1" name=""/>
+        <p:cNvGrpSpPr/>
+        <p:nvPr/>
+      </p:nvGrpSpPr>
+      <p:grpSpPr>
+        <a:xfrm>
+          <a:off x="0" y="0"/>
+          <a:ext cx="0" cy="0"/>
+          <a:chOff x="0" y="0"/>
+          <a:chExt cx="0" cy="0"/>
+        </a:xfrm>
+      </p:grpSpPr>
+      <p:sp>
+        <p:nvSpPr>
+          <p:cNvPr id="2" name="Slide Image Placeholder 1"/>
+          <p:cNvSpPr>
+            <a:spLocks noGrp="1"/>
+          </p:cNvSpPr>
+          <p:nvPr>
+            <p:ph type="sldImg" idx="2"/>
+          </p:nvPr>
+        </p:nvSpPr>
+        <p:spPr/>
+      </p:sp>
+      <p:sp>
+        <p:nvSpPr>
+          <p:cNvPr id="3" name="Notes Placeholder 2"/>
+          <p:cNvSpPr>
+            <a:spLocks noGrp="1"/>
+          </p:cNvSpPr>
+          <p:nvPr>
+            <p:ph type="body" idx="3" sz="quarter"/>
+          </p:nvPr>
+        </p:nvSpPr>
+        <p:spPr/>
+        <p:txBody>
+          <a:bodyPr/>
+          <a:lstStyle/>
+          <a:p>
+            <a:r>
+              <a:t>[결과 표 읽는 법]
+방법        nRMSE↓  VR→1   ρ↑     SS↑      time
+WaveSplat   0.223   0.660  0.446  +0.034   13.4ms  ← 유일하게 SS&gt;0
+ETKF        0.319   0.898  0.109  −0.702   132ms
+GPR         0.261   0.065  0.193  −0.141   &gt;200ms
+[각 숫자의 의미]
+nRMSE = 0.223:
+파도 높이(Hs)의 22.3% 오차. Hs=1.5m이면 평균 오차 ≈ 0.33m.
+WaveSplat이 ETKF보다 30% 낮습니다.
+VR = 0.660:
+실제 파도 진폭의 66%를 재현. 34%는 과소추정됩니다.
+이것이 WaveSplat의 알려진 한계입니다. 솔직하게 공개합니다.
+ETKF VR=0.898은 진폭은 잘 재현하지만, ρ=0.109로 위치(위상)가 틀렸습니다.
+GPR VR=0.065는 거의 평탄 (의미 없는 추정).
+Pearson ρ:
+ρ=0.446이면 추정 파도와 실제 파도의 위상이 어느 정도 일치합니다.
+ETKF ρ=0.109는 거의 무관계 — 진폭은 맞는데 파봉 위치가 틀린 것입니다.
+SS = +0.034:
+"아무것도 예측 안 하는 것(ẑ=0)보다 3.4% 나음." 작아 보이지만, 유일하게 양수입니다.
+ETKF SS=−0.702는 오히려 zero predictor보다 못합니다.
+[직관적으로 이해하기]
+비유: 내일 날씨 예측에서
+- GPR = "항상 평균 기온 출력" (아무런 예측 없음)
+- ETKF = "온도는 맞는데 비가 언제 오는지 틀림"
+- WaveSplat = "온도와 비 시간 모두 대략 맞음, 단 온도가 약간 낮게 나옴"</a:t>
+            </a:r>
+          </a:p>
+        </p:txBody>
+      </p:sp>
+      <p:sp>
+        <p:nvSpPr>
+          <p:cNvPr id="4" name="Slide Number Placeholder 3"/>
+          <p:cNvSpPr>
+            <a:spLocks noGrp="1"/>
+          </p:cNvSpPr>
+          <p:nvPr>
+            <p:ph type="sldNum" idx="5" sz="quarter"/>
+          </p:nvPr>
+        </p:nvSpPr>
+        <p:spPr/>
+      </p:sp>
+    </p:spTree>
+  </p:cSld>
+  <p:clrMapOvr>
+    <a:masterClrMapping/>
+  </p:clrMapOvr>
+</p:notes>
+</file>
+
+<file path=ppt/notesSlides/notesSlide16.xml><?xml version="1.0" encoding="utf-8"?>
+<p:notes xmlns:a="http://schemas.openxmlformats.org/drawingml/2006/main" xmlns:p="http://schemas.openxmlformats.org/presentationml/2006/main" xmlns:r="http://schemas.openxmlformats.org/officeDocument/2006/relationships">
+  <p:cSld>
+    <p:spTree>
+      <p:nvGrpSpPr>
+        <p:cNvPr id="1" name=""/>
+        <p:cNvGrpSpPr/>
+        <p:nvPr/>
+      </p:nvGrpSpPr>
+      <p:grpSpPr>
+        <a:xfrm>
+          <a:off x="0" y="0"/>
+          <a:ext cx="0" cy="0"/>
+          <a:chOff x="0" y="0"/>
+          <a:chExt cx="0" cy="0"/>
+        </a:xfrm>
+      </p:grpSpPr>
+      <p:sp>
+        <p:nvSpPr>
+          <p:cNvPr id="2" name="Slide Image Placeholder 1"/>
+          <p:cNvSpPr>
+            <a:spLocks noGrp="1"/>
+          </p:cNvSpPr>
+          <p:nvPr>
+            <p:ph type="sldImg" idx="2"/>
+          </p:nvPr>
+        </p:nvSpPr>
+        <p:spPr/>
+      </p:sp>
+      <p:sp>
+        <p:nvSpPr>
+          <p:cNvPr id="3" name="Notes Placeholder 2"/>
+          <p:cNvSpPr>
+            <a:spLocks noGrp="1"/>
+          </p:cNvSpPr>
+          <p:nvPr>
+            <p:ph type="body" idx="3" sz="quarter"/>
+          </p:nvPr>
+        </p:nvSpPr>
+        <p:spPr/>
+        <p:txBody>
+          <a:bodyPr/>
+          <a:lstStyle/>
+          <a:p>
+            <a:r>
+              <a:t>[왜 12개 에피소드를 대표로 보는가?]
+100개 에피소드 전부를 보여주면 복잡합니다. 12개는 다양한 조건을 균등하게 대표합니다.
+BF2~BF5 × N∈{1,2,5,15,30}에서 균등 샘플. 미리 선택 (실험 전에 결정).
+[결과 해석]
+12/12 에피소드에서 WaveSplat이 최저 nRMSE: "모든 조건에서 최고"
+단 하나도 ETKF나 GPR이 이기지 못했습니다.
+최대 격차 8.5× (BF3 1-comp):
+단순한 사인파 1개짜리 바다에서 WaveSplat이 압도적입니다.
+왜? 단일 성분은 WaveSplat이 파라미터 4개만 추정하면 됩니다. 최적화가 매우 쉽습니다.
+ETKF는 격자 전체를 추정해야 해서 비효율적입니다.
+BF4/BF5 30-comp:
+성분이 30개인 복잡한 바다에서 격차가 줄어듭니다.
+WaveSplat도 방향이 비슷한 성분들을 구분하기 어렵습니다 (k-공간에서 겹침).
+속도:
+WS 13.4ms → 초당 74프레임 가능. 10Hz만 사용.
+ETKF 132.6ms → 초당 7.5프레임. 10Hz에서 지연 누적.
+ETKF는 최소 90ms~최대 600ms (분산이 큼) → 실시간에서 불안정.</a:t>
+            </a:r>
+          </a:p>
+        </p:txBody>
+      </p:sp>
+      <p:sp>
+        <p:nvSpPr>
+          <p:cNvPr id="4" name="Slide Number Placeholder 3"/>
+          <p:cNvSpPr>
+            <a:spLocks noGrp="1"/>
+          </p:cNvSpPr>
+          <p:nvPr>
+            <p:ph type="sldNum" idx="5" sz="quarter"/>
+          </p:nvPr>
+        </p:nvSpPr>
+        <p:spPr/>
+      </p:sp>
+    </p:spTree>
+  </p:cSld>
+  <p:clrMapOvr>
+    <a:masterClrMapping/>
+  </p:clrMapOvr>
+</p:notes>
+</file>
+
+<file path=ppt/notesSlides/notesSlide17.xml><?xml version="1.0" encoding="utf-8"?>
+<p:notes xmlns:a="http://schemas.openxmlformats.org/drawingml/2006/main" xmlns:p="http://schemas.openxmlformats.org/presentationml/2006/main" xmlns:r="http://schemas.openxmlformats.org/officeDocument/2006/relationships">
+  <p:cSld>
+    <p:spTree>
+      <p:nvGrpSpPr>
+        <p:cNvPr id="1" name=""/>
+        <p:cNvGrpSpPr/>
+        <p:nvPr/>
+      </p:nvGrpSpPr>
+      <p:grpSpPr>
+        <a:xfrm>
+          <a:off x="0" y="0"/>
+          <a:ext cx="0" cy="0"/>
+          <a:chOff x="0" y="0"/>
+          <a:chExt cx="0" cy="0"/>
+        </a:xfrm>
+      </p:grpSpPr>
+      <p:sp>
+        <p:nvSpPr>
+          <p:cNvPr id="2" name="Slide Image Placeholder 1"/>
+          <p:cNvSpPr>
+            <a:spLocks noGrp="1"/>
+          </p:cNvSpPr>
+          <p:nvPr>
+            <p:ph type="sldImg" idx="2"/>
+          </p:nvPr>
+        </p:nvSpPr>
+        <p:spPr/>
+      </p:sp>
+      <p:sp>
+        <p:nvSpPr>
+          <p:cNvPr id="3" name="Notes Placeholder 2"/>
+          <p:cNvSpPr>
+            <a:spLocks noGrp="1"/>
+          </p:cNvSpPr>
+          <p:nvPr>
+            <p:ph type="body" idx="3" sz="quarter"/>
+          </p:nvPr>
+        </p:nvSpPr>
+        <p:spPr/>
+        <p:txBody>
+          <a:bodyPr/>
+          <a:lstStyle/>
+          <a:p>
+            <a:r>
+              <a:t>[왜 통계 검증이 필요한가?]
+"운 좋게 결과가 좋게 나온 것 아닌가?"를 배제하기 위해서입니다.
+100개 쌍으로 테스트하면 운의 영향이 극히 줄어듭니다.
+[Wilcoxon signed-rank test란?]
+일반 t-test는 데이터가 정규분포를 따른다고 가정합니다. 하지만 nRMSE 값들은 정규분포가 아닐 수 있습니다. Wilcoxon test는 이 가정 없이 "짝지은 차이의 부호"만 봅니다.
+쉽게: "100쌍 중에서 WaveSplat이 더 나은 경우가 우연보다 훨씬 많은가?"
+[결과 해석]
+p₁=2.2×10⁻¹⁵ (WS vs ETKF):
+0.0000000000000022의 확률로 우연. 사실상 불가능.
+= "WaveSplat이 ETKF보다 일관되게 좋다"는 것이 통계적으로 확실합니다.
+p₂=4.7×10⁻⁴ (WS vs GPR):
+0.00047의 확률로 우연. 역시 매우 낮습니다.
+Cohen's d = 1.16 (vs ETKF):
+효과 크기(effect size). 0.8 이상이면 "크다(large)"고 분류합니다.
+1.16은 매우 큰 효과. 실질적으로 의미 있는 차이입니다.
+Cohen's d = 0.42 (vs GPR):
+작은-중간 효과. 100쌍이라 통계적 유의성은 확보됩니다.
+[Holm-Bonferroni 보정이란?]
+여러 가지를 동시에 검정하면 우연히 하나가 유의하게 나올 확률이 올라갑니다. 이를 보정합니다. 보정 후에도 두 비교 모두 유의합니다.</a:t>
+            </a:r>
+          </a:p>
+        </p:txBody>
+      </p:sp>
+      <p:sp>
+        <p:nvSpPr>
+          <p:cNvPr id="4" name="Slide Number Placeholder 3"/>
+          <p:cNvSpPr>
+            <a:spLocks noGrp="1"/>
+          </p:cNvSpPr>
+          <p:nvPr>
+            <p:ph type="sldNum" idx="5" sz="quarter"/>
+          </p:nvPr>
+        </p:nvSpPr>
+        <p:spPr/>
+      </p:sp>
+    </p:spTree>
+  </p:cSld>
+  <p:clrMapOvr>
+    <a:masterClrMapping/>
+  </p:clrMapOvr>
+</p:notes>
+</file>
+
+<file path=ppt/notesSlides/notesSlide18.xml><?xml version="1.0" encoding="utf-8"?>
+<p:notes xmlns:a="http://schemas.openxmlformats.org/drawingml/2006/main" xmlns:p="http://schemas.openxmlformats.org/presentationml/2006/main" xmlns:r="http://schemas.openxmlformats.org/officeDocument/2006/relationships">
+  <p:cSld>
+    <p:spTree>
+      <p:nvGrpSpPr>
+        <p:cNvPr id="1" name=""/>
+        <p:cNvGrpSpPr/>
+        <p:nvPr/>
+      </p:nvGrpSpPr>
+      <p:grpSpPr>
+        <a:xfrm>
+          <a:off x="0" y="0"/>
+          <a:ext cx="0" cy="0"/>
+          <a:chOff x="0" y="0"/>
+          <a:chExt cx="0" cy="0"/>
+        </a:xfrm>
+      </p:grpSpPr>
+      <p:sp>
+        <p:nvSpPr>
+          <p:cNvPr id="2" name="Slide Image Placeholder 1"/>
+          <p:cNvSpPr>
+            <a:spLocks noGrp="1"/>
+          </p:cNvSpPr>
+          <p:nvPr>
+            <p:ph type="sldImg" idx="2"/>
+          </p:nvPr>
+        </p:nvSpPr>
+        <p:spPr/>
+      </p:sp>
+      <p:sp>
+        <p:nvSpPr>
+          <p:cNvPr id="3" name="Notes Placeholder 2"/>
+          <p:cNvSpPr>
+            <a:spLocks noGrp="1"/>
+          </p:cNvSpPr>
+          <p:nvPr>
+            <p:ph type="body" idx="3" sz="quarter"/>
+          </p:nvPr>
+        </p:nvSpPr>
+        <p:spPr/>
+        <p:txBody>
+          <a:bodyPr/>
+          <a:lstStyle/>
+          <a:p>
+            <a:r>
+              <a:t>[Ablation이란?]
+WaveSplat의 특정 기능을 "제거했을 때" 어떻게 되는지 보는 실험입니다.
+"이 기능이 정말 필요한가?"를 직접 검증합니다.
+[A1: 분산관계 제약 없애면?]
+A1 = Ablation 1번. ω를 자유롭게 최적화. (분산관계 무시)
+즉각적인 결과:
+nRMSE가 16% 더 낮습니다. 현재 순간에는 오히려 더 정확해 보입니다!
+그런데 5초 후에는?
+Full model: nRMSE 0.219 → 5초 후 0.231 (5.5% 증가, 안정적)
+A1 model: nRMSE 0.158 → 5초 후 0.476 (3배 폭발!)
+왜 이렇게 폭발하나?
+A1은 "현재 순간에 맞추려고" ω를 물리적으로 말이 안 되는 값으로 최적화합니다.
+예: |k|=0.16 rad/m이면 물리적으로 ω=1.25 rad/s여야 하는데, A1은 ω=1.78로 추정.
+Δω=0.53 rad/s → 1초 후 위상 오차 ≈ 0.53 rad ≈ 30°
+30° 어긋나면 파봉 위치가 완전히 달라집니다.
+결론:
+분산관계 제약이 없으면 "지금만 맞고 미래에는 쓸모없는" 추정이 됩니다.
+Hydrofoil FF에서 t+0.1~0.3초 예측이 필요하므로 분산관계 제약은 필수입니다.
+[A2: Confidence weighting 없애면?]
+nRMSE +14.5% 악화. 멀리서 오는 노이즈가 낀 관측점이 동등하게 취급되어 추정을 오염시킵니다.</a:t>
+            </a:r>
+          </a:p>
+        </p:txBody>
+      </p:sp>
+      <p:sp>
+        <p:nvSpPr>
+          <p:cNvPr id="4" name="Slide Number Placeholder 3"/>
+          <p:cNvSpPr>
+            <a:spLocks noGrp="1"/>
+          </p:cNvSpPr>
+          <p:nvPr>
+            <p:ph type="sldNum" idx="5" sz="quarter"/>
+          </p:nvPr>
+        </p:nvSpPr>
+        <p:spPr/>
+      </p:sp>
+    </p:spTree>
+  </p:cSld>
+  <p:clrMapOvr>
+    <a:masterClrMapping/>
+  </p:clrMapOvr>
+</p:notes>
+</file>
+
+<file path=ppt/notesSlides/notesSlide19.xml><?xml version="1.0" encoding="utf-8"?>
+<p:notes xmlns:a="http://schemas.openxmlformats.org/drawingml/2006/main" xmlns:p="http://schemas.openxmlformats.org/presentationml/2006/main" xmlns:r="http://schemas.openxmlformats.org/officeDocument/2006/relationships">
+  <p:cSld>
+    <p:spTree>
+      <p:nvGrpSpPr>
+        <p:cNvPr id="1" name=""/>
+        <p:cNvGrpSpPr/>
+        <p:nvPr/>
+      </p:nvGrpSpPr>
+      <p:grpSpPr>
+        <a:xfrm>
+          <a:off x="0" y="0"/>
+          <a:ext cx="0" cy="0"/>
+          <a:chOff x="0" y="0"/>
+          <a:chExt cx="0" cy="0"/>
+        </a:xfrm>
+      </p:grpSpPr>
+      <p:sp>
+        <p:nvSpPr>
+          <p:cNvPr id="2" name="Slide Image Placeholder 1"/>
+          <p:cNvSpPr>
+            <a:spLocks noGrp="1"/>
+          </p:cNvSpPr>
+          <p:nvPr>
+            <p:ph type="sldImg" idx="2"/>
+          </p:nvPr>
+        </p:nvSpPr>
+        <p:spPr/>
+      </p:sp>
+      <p:sp>
+        <p:nvSpPr>
+          <p:cNvPr id="3" name="Notes Placeholder 2"/>
+          <p:cNvSpPr>
+            <a:spLocks noGrp="1"/>
+          </p:cNvSpPr>
+          <p:nvPr>
+            <p:ph type="body" idx="3" sz="quarter"/>
+          </p:nvPr>
+        </p:nvSpPr>
+        <p:spPr/>
+        <p:txBody>
+          <a:bodyPr/>
+          <a:lstStyle/>
+          <a:p>
+            <a:r>
+              <a:t>[Robustness — 왜 중요한가?]
+실제 배에서는 조건이 항상 달라집니다:
+- LiDAR 모델이 어느 것이 정확한지 모름
+- 관측점이 적을 수도 있음
+- 측정 노이즈가 커질 수 있음
+- 하이퍼파라미터(설정값)을 바다 상태마다 다르게 줄 수 없음
+모든 조건에서 안정적이어야 실용적입니다.
+[Raydrop 민감도]
+Uniform vs Specular 두 가지 LiDAR 모델에서 모두 테스트.
+WaveSplat: 20/20 승 (두 모델 모두에서 ETKF보다 우세)
+Slope 모델에서 WaveSplat 성능 9.1% 하락, ETKF는 16.2% 하락.
+→ WaveSplat이 더 안정적입니다.
+[희소성 민감도]
+관측 밀도를 20%~100%로 변화.
+20% = 프레임당 ~10점 (매우 드문드문)
+BF4~5 조건에서 20% 밀도에서도 8% 이하 성능 하락.
+→ 격자 없는 방식이기 때문에 aliasing 없이 적은 데이터도 활용 가능합니다.
+[노이즈 민감도]
+측정 오차 σ를 0~0.10m로 변화. (기본값 0.02m)
+σ=0.10m (5배)에서도 nRMSE 변화 ±13%.
+→ Adaptive N이 노이즈를 가짜 성분으로 흡수 후 pruning합니다.
+[하이퍼파라미터 민감도]
+학습률, 정규화 계수 등을 ±2배 변화시켜도 nRMSE ±5%.
+→ 한 번 설정하고 모든 100개 에피소드에 동일 설정 사용 가능합니다.</a:t>
+            </a:r>
+          </a:p>
+        </p:txBody>
+      </p:sp>
+      <p:sp>
+        <p:nvSpPr>
+          <p:cNvPr id="4" name="Slide Number Placeholder 3"/>
+          <p:cNvSpPr>
+            <a:spLocks noGrp="1"/>
+          </p:cNvSpPr>
+          <p:nvPr>
+            <p:ph type="sldNum" idx="5" sz="quarter"/>
+          </p:nvPr>
+        </p:nvSpPr>
+        <p:spPr/>
+      </p:sp>
+    </p:spTree>
+  </p:cSld>
+  <p:clrMapOvr>
+    <a:masterClrMapping/>
+  </p:clrMapOvr>
+</p:notes>
+</file>
+
+<file path=ppt/notesSlides/notesSlide2.xml><?xml version="1.0" encoding="utf-8"?>
+<p:notes xmlns:a="http://schemas.openxmlformats.org/drawingml/2006/main" xmlns:p="http://schemas.openxmlformats.org/presentationml/2006/main" xmlns:r="http://schemas.openxmlformats.org/officeDocument/2006/relationships">
+  <p:cSld>
+    <p:spTree>
+      <p:nvGrpSpPr>
+        <p:cNvPr id="1" name=""/>
+        <p:cNvGrpSpPr/>
+        <p:nvPr/>
+      </p:nvGrpSpPr>
+      <p:grpSpPr>
+        <a:xfrm>
+          <a:off x="0" y="0"/>
+          <a:ext cx="0" cy="0"/>
+          <a:chOff x="0" y="0"/>
+          <a:chExt cx="0" cy="0"/>
+        </a:xfrm>
+      </p:grpSpPr>
+      <p:sp>
+        <p:nvSpPr>
+          <p:cNvPr id="2" name="Slide Image Placeholder 1"/>
+          <p:cNvSpPr>
+            <a:spLocks noGrp="1"/>
+          </p:cNvSpPr>
+          <p:nvPr>
+            <p:ph type="sldImg" idx="2"/>
+          </p:nvPr>
+        </p:nvSpPr>
+        <p:spPr/>
+      </p:sp>
+      <p:sp>
+        <p:nvSpPr>
+          <p:cNvPr id="3" name="Notes Placeholder 2"/>
+          <p:cNvSpPr>
+            <a:spLocks noGrp="1"/>
+          </p:cNvSpPr>
+          <p:nvPr>
+            <p:ph type="body" idx="3" sz="quarter"/>
+          </p:nvPr>
+        </p:nvSpPr>
+        <p:spPr/>
+        <p:txBody>
+          <a:bodyPr/>
+          <a:lstStyle/>
+          <a:p>
+            <a:r>
+              <a:t>[발표 구조 설명]
+이 발표는 크게 4부로 나뉩니다.
+I. Introduction (슬라이드 3~7)
+   - 왜 이 연구가 필요한지, 기존 방법의 어떤 문제가 있는지 설명합니다.
+   - 핵심 질문: "배 위에서 드문드문 찍힌 레이저 점 50개로 250m×200m 파도 전체를 어떻게 알 수 있나?"
+II. Methodology (슬라이드 8~13)
+   - WaveSplat이 어떻게 작동하는지 설명합니다.
+   - 수식이 나오지만, 핵심 아이디어는 단순합니다: "파도 = 여러 사인파의 합, 물리 법칙 강제 적용"
+III. Results (슬라이드 14~23)
+   - 실험 결과와 통계 검증입니다.
+   - 얼마나 더 정확한지, 얼마나 더 빠른지 수치로 보여줍니다.
+IV. Application (슬라이드 24~31)
+   - WaveSplat을 하이드로포일 선박 제어에 적용한 결과입니다.
+   - 파도를 미리 알면 승차감이 얼마나 좋아지는지 보여줍니다.</a:t>
+            </a:r>
+          </a:p>
+        </p:txBody>
+      </p:sp>
+      <p:sp>
+        <p:nvSpPr>
+          <p:cNvPr id="4" name="Slide Number Placeholder 3"/>
+          <p:cNvSpPr>
+            <a:spLocks noGrp="1"/>
+          </p:cNvSpPr>
+          <p:nvPr>
+            <p:ph type="sldNum" idx="5" sz="quarter"/>
+          </p:nvPr>
+        </p:nvSpPr>
+        <p:spPr/>
+      </p:sp>
+    </p:spTree>
+  </p:cSld>
+  <p:clrMapOvr>
+    <a:masterClrMapping/>
+  </p:clrMapOvr>
+</p:notes>
+</file>
+
+<file path=ppt/notesSlides/notesSlide20.xml><?xml version="1.0" encoding="utf-8"?>
+<p:notes xmlns:a="http://schemas.openxmlformats.org/drawingml/2006/main" xmlns:p="http://schemas.openxmlformats.org/presentationml/2006/main" xmlns:r="http://schemas.openxmlformats.org/officeDocument/2006/relationships">
+  <p:cSld>
+    <p:spTree>
+      <p:nvGrpSpPr>
+        <p:cNvPr id="1" name=""/>
+        <p:cNvGrpSpPr/>
+        <p:nvPr/>
+      </p:nvGrpSpPr>
+      <p:grpSpPr>
+        <a:xfrm>
+          <a:off x="0" y="0"/>
+          <a:ext cx="0" cy="0"/>
+          <a:chOff x="0" y="0"/>
+          <a:chExt cx="0" cy="0"/>
+        </a:xfrm>
+      </p:grpSpPr>
+      <p:sp>
+        <p:nvSpPr>
+          <p:cNvPr id="2" name="Slide Image Placeholder 1"/>
+          <p:cNvSpPr>
+            <a:spLocks noGrp="1"/>
+          </p:cNvSpPr>
+          <p:nvPr>
+            <p:ph type="sldImg" idx="2"/>
+          </p:nvPr>
+        </p:nvSpPr>
+        <p:spPr/>
+      </p:sp>
+      <p:sp>
+        <p:nvSpPr>
+          <p:cNvPr id="3" name="Notes Placeholder 2"/>
+          <p:cNvSpPr>
+            <a:spLocks noGrp="1"/>
+          </p:cNvSpPr>
+          <p:nvPr>
+            <p:ph type="body" idx="3" sz="quarter"/>
+          </p:nvPr>
+        </p:nvSpPr>
+        <p:spPr/>
+        <p:txBody>
+          <a:bodyPr/>
+          <a:lstStyle/>
+          <a:p>
+            <a:r>
+              <a:t>[시각적 비교 — 그림 보는 법]
+4개 열: GT(정답) | WaveSplat | ETKF | GPR
+GT (Ground Truth):
+시뮬레이터에서 만든 "진짜 파도". 위아래로 굽이치는 실제 파도 모양.
+WaveSplat:
+GT와 매우 유사합니다. 파봉(봉우리)과 파곡(골짜기) 위치가 거의 같습니다.
+진폭이 약 20~30% 낮게 나오는 것이 보일 수 있습니다. (VR=0.66 한계)
+ETKF:
+언뜻 보면 파도 모양처럼 보이지만, 파봉 위치가 GT와 다릅니다.
+VR=0.898로 진폭은 비슷한데, ρ=0.109로 위치가 완전히 틀립니다.
+마치 같은 리듬인데 박자가 다른 노래 같습니다.
+GPR:
+거의 평탄합니다. VR=0.065 → 진폭의 6.5%만 재현.
+파도가 있는 것인지 없는 것인지 구별이 어렵습니다.
+[한 줄 결론]
+"WaveSplat만 진짜 파도처럼 보입니다."
+(진폭이 약간 낮다는 한계가 있지만, 모양과 위치는 올바릅니다.)</a:t>
+            </a:r>
+          </a:p>
+        </p:txBody>
+      </p:sp>
+      <p:sp>
+        <p:nvSpPr>
+          <p:cNvPr id="4" name="Slide Number Placeholder 3"/>
+          <p:cNvSpPr>
+            <a:spLocks noGrp="1"/>
+          </p:cNvSpPr>
+          <p:nvPr>
+            <p:ph type="sldNum" idx="5" sz="quarter"/>
+          </p:nvPr>
+        </p:nvSpPr>
+        <p:spPr/>
+      </p:sp>
+    </p:spTree>
+  </p:cSld>
+  <p:clrMapOvr>
+    <a:masterClrMapping/>
+  </p:clrMapOvr>
+</p:notes>
+</file>
+
+<file path=ppt/notesSlides/notesSlide21.xml><?xml version="1.0" encoding="utf-8"?>
+<p:notes xmlns:a="http://schemas.openxmlformats.org/drawingml/2006/main" xmlns:p="http://schemas.openxmlformats.org/presentationml/2006/main" xmlns:r="http://schemas.openxmlformats.org/officeDocument/2006/relationships">
+  <p:cSld>
+    <p:spTree>
+      <p:nvGrpSpPr>
+        <p:cNvPr id="1" name=""/>
+        <p:cNvGrpSpPr/>
+        <p:nvPr/>
+      </p:nvGrpSpPr>
+      <p:grpSpPr>
+        <a:xfrm>
+          <a:off x="0" y="0"/>
+          <a:ext cx="0" cy="0"/>
+          <a:chOff x="0" y="0"/>
+          <a:chExt cx="0" cy="0"/>
+        </a:xfrm>
+      </p:grpSpPr>
+      <p:sp>
+        <p:nvSpPr>
+          <p:cNvPr id="2" name="Slide Image Placeholder 1"/>
+          <p:cNvSpPr>
+            <a:spLocks noGrp="1"/>
+          </p:cNvSpPr>
+          <p:nvPr>
+            <p:ph type="sldImg" idx="2"/>
+          </p:nvPr>
+        </p:nvSpPr>
+        <p:spPr/>
+      </p:sp>
+      <p:sp>
+        <p:nvSpPr>
+          <p:cNvPr id="3" name="Notes Placeholder 2"/>
+          <p:cNvSpPr>
+            <a:spLocks noGrp="1"/>
+          </p:cNvSpPr>
+          <p:nvPr>
+            <p:ph type="body" idx="3" sz="quarter"/>
+          </p:nvPr>
+        </p:nvSpPr>
+        <p:spPr/>
+        <p:txBody>
+          <a:bodyPr/>
+          <a:lstStyle/>
+          <a:p>
+            <a:r>
+              <a:t>[스펙트럼 정확도란?]
+WaveSplat은 파도를 (kᵢ, ωᵢ, φᵢ) 성분들의 합으로 표현하기 때문에,
+"파도가 어느 방향에서 오는가", "파장이 얼마인가"를 직접 출력합니다.
+ETKF나 GPR은 elevation(높이) 필드만 추정하므로 이것이 불가합니다.
+[검증 결과 이해하기]
+N=5 이하 (단순 sea):
+- 에너지 감지율 &gt; 93%: 파도 성분 대부분을 올바르게 찾아냄
+- 파장 오차 &lt; 0.5%: 파장 100m라면 오차 50cm 미만
+- 방향 오차 &lt; 0.2°: 북쪽이라면 거의 정북을 가리킴
+- ω 오차 &lt; 1%: 분산관계를 강제했으므로 거의 완벽
+N≥15 (복잡 sea):
+방향이 비슷한 성분들이 k-공간에서 겹쳐 보여 구분 어려움.
+"인접한 두 음정을 구별하기 어려운 것"과 비슷합니다.
+[왜 이게 중요한가?]
+Hydrofoil FF에서 파도의 방향을 알아야 전방 foil과 후방 foil에 도달하는 시간 차이를 계산할 수 있습니다. 방향을 모르면 foil마다 적절한 보상을 할 수 없습니다.
+파도 예보에서도 방향을 알면 "5초 후 파봉이 어디 있을지" 정확히 계산 가능합니다.</a:t>
+            </a:r>
+          </a:p>
+        </p:txBody>
+      </p:sp>
+      <p:sp>
+        <p:nvSpPr>
+          <p:cNvPr id="4" name="Slide Number Placeholder 3"/>
+          <p:cNvSpPr>
+            <a:spLocks noGrp="1"/>
+          </p:cNvSpPr>
+          <p:nvPr>
+            <p:ph type="sldNum" idx="5" sz="quarter"/>
+          </p:nvPr>
+        </p:nvSpPr>
+        <p:spPr/>
+      </p:sp>
+    </p:spTree>
+  </p:cSld>
+  <p:clrMapOvr>
+    <a:masterClrMapping/>
+  </p:clrMapOvr>
+</p:notes>
+</file>
+
+<file path=ppt/notesSlides/notesSlide22.xml><?xml version="1.0" encoding="utf-8"?>
+<p:notes xmlns:a="http://schemas.openxmlformats.org/drawingml/2006/main" xmlns:p="http://schemas.openxmlformats.org/presentationml/2006/main" xmlns:r="http://schemas.openxmlformats.org/officeDocument/2006/relationships">
+  <p:cSld>
+    <p:spTree>
+      <p:nvGrpSpPr>
+        <p:cNvPr id="1" name=""/>
+        <p:cNvGrpSpPr/>
+        <p:nvPr/>
+      </p:nvGrpSpPr>
+      <p:grpSpPr>
+        <a:xfrm>
+          <a:off x="0" y="0"/>
+          <a:ext cx="0" cy="0"/>
+          <a:chOff x="0" y="0"/>
+          <a:chExt cx="0" cy="0"/>
+        </a:xfrm>
+      </p:grpSpPr>
+      <p:sp>
+        <p:nvSpPr>
+          <p:cNvPr id="2" name="Slide Image Placeholder 1"/>
+          <p:cNvSpPr>
+            <a:spLocks noGrp="1"/>
+          </p:cNvSpPr>
+          <p:nvPr>
+            <p:ph type="sldImg" idx="2"/>
+          </p:nvPr>
+        </p:nvSpPr>
+        <p:spPr/>
+      </p:sp>
+      <p:sp>
+        <p:nvSpPr>
+          <p:cNvPr id="3" name="Notes Placeholder 2"/>
+          <p:cNvSpPr>
+            <a:spLocks noGrp="1"/>
+          </p:cNvSpPr>
+          <p:nvPr>
+            <p:ph type="body" idx="3" sz="quarter"/>
+          </p:nvPr>
+        </p:nvSpPr>
+        <p:spPr/>
+        <p:txBody>
+          <a:bodyPr/>
+          <a:lstStyle/>
+          <a:p>
+            <a:r>
+              <a:t>[희소 관측 로버스트니스]
+관측 점이 10개만 있어도 작동하는가?
+BF4~5 조건에서 10점: nRMSE 0.191 (WS) vs 0.239 (ETKF)
+50점: 0.155 vs 0.165
+왜 격자 기반이 더 나빠지나?
+격자 안에 점이 없으면 아무것도 모릅니다. 관측 밀도가 낮으면 격자 셀이 텅 비어 있습니다.
+WaveSplat은 plane wave 하나가 모든 격자 위치에 걸쳐 constraint를 줍니다.
+점 10개도 파도 방향/파장 추정에 "global" 정보를 제공합니다.
+[파도 예측 (Forecast)]
+핵심: φᵢ(t+Δt) = φᵢ(t) + ωᵢ·Δt
+ω가 분산관계로 정확하게 알려져 있으므로 φ(위상)를 정확히 앞으로 밀 수 있습니다.
+비유: 지구 자전 주기를 정확히 알면 오늘 밤 몇 시에 달이 어디 있을지 계산 가능한 것처럼.
+결과:
+BF3 1-comp: t+10초 후 Skill Score = +0.94 (거의 즉시 추정만큼 좋음)
+BF3 5-comp: t+10초 후 SS = +0.18 (떨어지지만 여전히 양수)
+BF4 15-comp: t+10초 후 SS = −0.21 (복잡한 바다에서 한계)
+A1(분산관계 없음)과 비교:
+A1 즉시: nRMSE 0.158 (좋아 보임)
+A1 5초 후: nRMSE 0.476 (3배 악화)
+Full 즉시: 0.219, Full 5초 후: 0.231 (안정)
+이 예측 능력이 hydrofoil FF의 물리적 기반입니다.</a:t>
+            </a:r>
+          </a:p>
+        </p:txBody>
+      </p:sp>
+      <p:sp>
+        <p:nvSpPr>
+          <p:cNvPr id="4" name="Slide Number Placeholder 3"/>
+          <p:cNvSpPr>
+            <a:spLocks noGrp="1"/>
+          </p:cNvSpPr>
+          <p:nvPr>
+            <p:ph type="sldNum" idx="5" sz="quarter"/>
+          </p:nvPr>
+        </p:nvSpPr>
+        <p:spPr/>
+      </p:sp>
+    </p:spTree>
+  </p:cSld>
+  <p:clrMapOvr>
+    <a:masterClrMapping/>
+  </p:clrMapOvr>
+</p:notes>
+</file>
+
+<file path=ppt/notesSlides/notesSlide23.xml><?xml version="1.0" encoding="utf-8"?>
+<p:notes xmlns:a="http://schemas.openxmlformats.org/drawingml/2006/main" xmlns:p="http://schemas.openxmlformats.org/presentationml/2006/main" xmlns:r="http://schemas.openxmlformats.org/officeDocument/2006/relationships">
+  <p:cSld>
+    <p:spTree>
+      <p:nvGrpSpPr>
+        <p:cNvPr id="1" name=""/>
+        <p:cNvGrpSpPr/>
+        <p:nvPr/>
+      </p:nvGrpSpPr>
+      <p:grpSpPr>
+        <a:xfrm>
+          <a:off x="0" y="0"/>
+          <a:ext cx="0" cy="0"/>
+          <a:chOff x="0" y="0"/>
+          <a:chExt cx="0" cy="0"/>
+        </a:xfrm>
+      </p:grpSpPr>
+      <p:sp>
+        <p:nvSpPr>
+          <p:cNvPr id="2" name="Slide Image Placeholder 1"/>
+          <p:cNvSpPr>
+            <a:spLocks noGrp="1"/>
+          </p:cNvSpPr>
+          <p:nvPr>
+            <p:ph type="sldImg" idx="2"/>
+          </p:nvPr>
+        </p:nvSpPr>
+        <p:spPr/>
+      </p:sp>
+      <p:sp>
+        <p:nvSpPr>
+          <p:cNvPr id="3" name="Notes Placeholder 2"/>
+          <p:cNvSpPr>
+            <a:spLocks noGrp="1"/>
+          </p:cNvSpPr>
+          <p:nvPr>
+            <p:ph type="body" idx="3" sz="quarter"/>
+          </p:nvPr>
+        </p:nvSpPr>
+        <p:spPr/>
+        <p:txBody>
+          <a:bodyPr/>
+          <a:lstStyle/>
+          <a:p>
+            <a:r>
+              <a:t>[왜 더 강한 비교 대상이 필요했나?]
+심사위원(reviewer) 예상 질문: "ETKF와 GPR-1은 약한 baseline 아닌가?"
+→ 그래서 두 가지를 더 강화했습니다.
+LETKF (Localized ETKF):
+ETKF에 공간 localization 추가. 각 격자 점을 업데이트할 때 주변 50m 이내 관측만 사용.
+장점: 멀리 있는 관측의 "허위 상관"을 제거.
+단점: localization 범위보다 큰 파도 성분에서 진폭 과소추정.
+GPR-disp (Dispersion-aware GPR):
+GPR 커널에 dispersion 정보를 추가 (K = K_spatial × K_dispersion).
+장점: 물리 정보를 GPR에도 부여.
+단점: 계산량이 36배 증가 → 실시간 불가.
+[결과]
+N≤5 (단순 sea): WaveSplat 압도. 격차 2~8×.
+N≥15 (복잡 sea): LETKF가 우세. k-space crowding에서 LETKF localization이 WS 방향 분리 한계를 극복.
+속도: WS가 8.1× 빠릅니다.
+[실용적 결론]
+운항 조건의 70% 이상이 N≤5 (Hs&lt;1m). 이 영역에서 WaveSplat이 최선.
+복잡한 날씨(폭풍)에서는 LETKF fallback을 쓰는 하이브리드 아키텍처가 최적.</a:t>
+            </a:r>
+          </a:p>
+        </p:txBody>
+      </p:sp>
+      <p:sp>
+        <p:nvSpPr>
+          <p:cNvPr id="4" name="Slide Number Placeholder 3"/>
+          <p:cNvSpPr>
+            <a:spLocks noGrp="1"/>
+          </p:cNvSpPr>
+          <p:nvPr>
+            <p:ph type="sldNum" idx="5" sz="quarter"/>
+          </p:nvPr>
+        </p:nvSpPr>
+        <p:spPr/>
+      </p:sp>
+    </p:spTree>
+  </p:cSld>
+  <p:clrMapOvr>
+    <a:masterClrMapping/>
+  </p:clrMapOvr>
+</p:notes>
+</file>
+
+<file path=ppt/notesSlides/notesSlide24.xml><?xml version="1.0" encoding="utf-8"?>
+<p:notes xmlns:a="http://schemas.openxmlformats.org/drawingml/2006/main" xmlns:p="http://schemas.openxmlformats.org/presentationml/2006/main" xmlns:r="http://schemas.openxmlformats.org/officeDocument/2006/relationships">
+  <p:cSld>
+    <p:spTree>
+      <p:nvGrpSpPr>
+        <p:cNvPr id="1" name=""/>
+        <p:cNvGrpSpPr/>
+        <p:nvPr/>
+      </p:nvGrpSpPr>
+      <p:grpSpPr>
+        <a:xfrm>
+          <a:off x="0" y="0"/>
+          <a:ext cx="0" cy="0"/>
+          <a:chOff x="0" y="0"/>
+          <a:chExt cx="0" cy="0"/>
+        </a:xfrm>
+      </p:grpSpPr>
+      <p:sp>
+        <p:nvSpPr>
+          <p:cNvPr id="2" name="Slide Image Placeholder 1"/>
+          <p:cNvSpPr>
+            <a:spLocks noGrp="1"/>
+          </p:cNvSpPr>
+          <p:nvPr>
+            <p:ph type="sldImg" idx="2"/>
+          </p:nvPr>
+        </p:nvSpPr>
+        <p:spPr/>
+      </p:sp>
+      <p:sp>
+        <p:nvSpPr>
+          <p:cNvPr id="3" name="Notes Placeholder 2"/>
+          <p:cNvSpPr>
+            <a:spLocks noGrp="1"/>
+          </p:cNvSpPr>
+          <p:nvPr>
+            <p:ph type="body" idx="3" sz="quarter"/>
+          </p:nvPr>
+        </p:nvSpPr>
+        <p:spPr/>
+        <p:txBody>
+          <a:bodyPr/>
+          <a:lstStyle/>
+          <a:p>
+            <a:r>
+              <a:t>[하이드로포일 선박이란?]
+수중 날개(foil)로 선체를 물 위로 띄우는 선박입니다. Candela C-8 같은 스웨덴 회사가 만드는 전기 보트가 대표적입니다.
+비유: 비행기 날개가 공기 저항으로 양력을 만드는 것처럼, 수중 날개가 물 저항으로 양력을 만듭니다. 선체가 물에서 떠오르면 마찰 저항이 대폭 줄어 효율이 좋아집니다.
+문제: 파도를 만나면 날개 잠수 깊이가 변하고 → 양력이 변하고 → 배가 흔들립니다.
+[PD feedback만으로는 왜 부족한가?]
+PD 제어기: 현재 흔들림을 감지(D=미분) → 날개 각도 조정.
+문제: 감지한 후에 조정하기 때문에 항상 한 박자 늦습니다.
+파도 주기 4~7초 중 제어 루프 지연 50~100ms = 주기의 1~2%.
+보통은 이 정도 지연이 괜찮지만, 고속 하이드로포일에서는 파도가 빠르게 지나가므로 지연이 큽니다.
+[Feedforward 제어란?]
+"에러 본 후 수정" → "에러 오기 전 준비"
+WaveSplat이 0.1~0.3초 앞의 파면 기울기를 예측 → 날개를 미리 조정.
+비유: 자동차 전방 카메라로 과속방지턱을 보고, 올라가기 0.1초 전에 서스펜션을 미리 올리는 것.
+K_ff = 0.8: 날개 실제 양력 기울기 vs 이상적 기울기의 비율. 실험으로 확인.
+IIR LP filter (α=0.05): 추정 노이즈를 걸러서 고주파 노이즈가 날개에 전달되지 않도록 합니다.</a:t>
+            </a:r>
+          </a:p>
+        </p:txBody>
+      </p:sp>
+      <p:sp>
+        <p:nvSpPr>
+          <p:cNvPr id="4" name="Slide Number Placeholder 3"/>
+          <p:cNvSpPr>
+            <a:spLocks noGrp="1"/>
+          </p:cNvSpPr>
+          <p:nvPr>
+            <p:ph type="sldNum" idx="5" sz="quarter"/>
+          </p:nvPr>
+        </p:nvSpPr>
+        <p:spPr/>
+      </p:sp>
+    </p:spTree>
+  </p:cSld>
+  <p:clrMapOvr>
+    <a:masterClrMapping/>
+  </p:clrMapOvr>
+</p:notes>
+</file>
+
+<file path=ppt/notesSlides/notesSlide25.xml><?xml version="1.0" encoding="utf-8"?>
+<p:notes xmlns:a="http://schemas.openxmlformats.org/drawingml/2006/main" xmlns:p="http://schemas.openxmlformats.org/presentationml/2006/main" xmlns:r="http://schemas.openxmlformats.org/officeDocument/2006/relationships">
+  <p:cSld>
+    <p:spTree>
+      <p:nvGrpSpPr>
+        <p:cNvPr id="1" name=""/>
+        <p:cNvGrpSpPr/>
+        <p:nvPr/>
+      </p:nvGrpSpPr>
+      <p:grpSpPr>
+        <a:xfrm>
+          <a:off x="0" y="0"/>
+          <a:ext cx="0" cy="0"/>
+          <a:chOff x="0" y="0"/>
+          <a:chExt cx="0" cy="0"/>
+        </a:xfrm>
+      </p:grpSpPr>
+      <p:sp>
+        <p:nvSpPr>
+          <p:cNvPr id="2" name="Slide Image Placeholder 1"/>
+          <p:cNvSpPr>
+            <a:spLocks noGrp="1"/>
+          </p:cNvSpPr>
+          <p:nvPr>
+            <p:ph type="sldImg" idx="2"/>
+          </p:nvPr>
+        </p:nvSpPr>
+        <p:spPr/>
+      </p:sp>
+      <p:sp>
+        <p:nvSpPr>
+          <p:cNvPr id="3" name="Notes Placeholder 2"/>
+          <p:cNvSpPr>
+            <a:spLocks noGrp="1"/>
+          </p:cNvSpPr>
+          <p:nvPr>
+            <p:ph type="body" idx="3" sz="quarter"/>
+          </p:nvPr>
+        </p:nvSpPr>
+        <p:spPr/>
+        <p:txBody>
+          <a:bodyPr/>
+          <a:lstStyle/>
+          <a:p>
+            <a:r>
+              <a:t>[전체 제어 시스템 흐름도]
+위쪽 (Feedforward 경로):
+Falcon K1 LiDAR → (10Hz, ~13ms) → WaveSplat → 파면 기울기 추정
+→ 전방 위치 x_pre = x_foil + V·Δt → IIR 필터 → K_ff 게인 → Foil Servo
+아래쪽 (Feedback 경로):
+선박 IMU (가속도, 각속도 측정) → PD 제어기 → Foil Servo (FF와 합산)
+두 경로를 합산: δ_foil = δ_PD + δ_FF
+[각 블록 설명]
+x_preview = x_foil + V·Δt:
+foil 위치에서 선속(V) × 시간(Δt)만큼 앞에 있는 파면을 봅니다.
+V=11 m/s, Δt=0.1s이면 1.1m 앞.
+IIR LP filter (α=0.05, fc≈0.8Hz):
+고주파 잡음 제거. 파도 주기 4~7초 = 0.14~0.25Hz 파도는 통과.
+추정 오차에서 오는 빠른 진동 억제.
+K_ff 게인:
+추정된 파면 기울기 → 날개 편향각 변환 계수.
+Servo: 날개 각도를 물리적으로 움직임. ±15° 범위.
+[시간 척도]
+LiDAR 10Hz → 100ms 간격 → 파도 주기 4~7s의 1.4~2.5%. 충분히 빠릅니다.</a:t>
+            </a:r>
+          </a:p>
+        </p:txBody>
+      </p:sp>
+      <p:sp>
+        <p:nvSpPr>
+          <p:cNvPr id="4" name="Slide Number Placeholder 3"/>
+          <p:cNvSpPr>
+            <a:spLocks noGrp="1"/>
+          </p:cNvSpPr>
+          <p:nvPr>
+            <p:ph type="sldNum" idx="5" sz="quarter"/>
+          </p:nvPr>
+        </p:nvSpPr>
+        <p:spPr/>
+      </p:sp>
+    </p:spTree>
+  </p:cSld>
+  <p:clrMapOvr>
+    <a:masterClrMapping/>
+  </p:clrMapOvr>
+</p:notes>
+</file>
+
+<file path=ppt/notesSlides/notesSlide26.xml><?xml version="1.0" encoding="utf-8"?>
+<p:notes xmlns:a="http://schemas.openxmlformats.org/drawingml/2006/main" xmlns:p="http://schemas.openxmlformats.org/presentationml/2006/main" xmlns:r="http://schemas.openxmlformats.org/officeDocument/2006/relationships">
+  <p:cSld>
+    <p:spTree>
+      <p:nvGrpSpPr>
+        <p:cNvPr id="1" name=""/>
+        <p:cNvGrpSpPr/>
+        <p:nvPr/>
+      </p:nvGrpSpPr>
+      <p:grpSpPr>
+        <a:xfrm>
+          <a:off x="0" y="0"/>
+          <a:ext cx="0" cy="0"/>
+          <a:chOff x="0" y="0"/>
+          <a:chExt cx="0" cy="0"/>
+        </a:xfrm>
+      </p:grpSpPr>
+      <p:sp>
+        <p:nvSpPr>
+          <p:cNvPr id="2" name="Slide Image Placeholder 1"/>
+          <p:cNvSpPr>
+            <a:spLocks noGrp="1"/>
+          </p:cNvSpPr>
+          <p:nvPr>
+            <p:ph type="sldImg" idx="2"/>
+          </p:nvPr>
+        </p:nvSpPr>
+        <p:spPr/>
+      </p:sp>
+      <p:sp>
+        <p:nvSpPr>
+          <p:cNvPr id="3" name="Notes Placeholder 2"/>
+          <p:cNvSpPr>
+            <a:spLocks noGrp="1"/>
+          </p:cNvSpPr>
+          <p:nvPr>
+            <p:ph type="body" idx="3" sz="quarter"/>
+          </p:nvPr>
+        </p:nvSpPr>
+        <p:spPr/>
+        <p:txBody>
+          <a:bodyPr/>
+          <a:lstStyle/>
+          <a:p>
+            <a:r>
+              <a:t>[결과 표 읽는 법 — aRMS 개선율(%)]
+aRMS: acceleration RMS. 승객이 느끼는 진동 크기 (m/s²).
+개선율 = (PD만) - (PD+FF) / (PD만) × 100%
+양수 = 진동 감소 = 좋은 것.
+GT-FF: 파도를 완벽하게 알고 있을 때 feedforward. 이론적 최대 성능.
+WS-FF: WaveSplat으로 추정한 파도로 feedforward.
+[핵심 결과]
+WS-FF가 GT-FF의 93~103% 성능. 즉, 추정이 완벽하지 않아도 거의 같은 효과!
+이것이 이 연구의 가장 중요한 실용적 결론입니다.
+왜 추정이 부정확해도 됩니까?
+LP filter가 추정 오차의 고주파 성분을 제거합니다.
+제어에서 중요한 것은 파도의 "낮은 주파수 성분"입니다 (파도 주기 4~7초).
+추정 오차는 주로 "높은 주파수"에서 발생합니다.
+[방향별 해석]
+Head sea (μ=180°, 정면에서 파도): 짧은 encounter wavelength → FF 효과 빠르게 전달.
+Beam sea (μ=90°, 측면에서 파도): 파면이 두 foil을 동시에 통과 → preview 길어야 효과적. 가장 큰 개선 +37.7%.
+Quarter (μ=135°, 대각선): 중간 효과.
+[ISO 2631 승차감 기준]
+0.315 m/s² 이하 = "Comfortable" (쾌적)
+0.315~0.63 = "Slight discomfort" (약간 불편)
+BF3 Beam sea: FF 후 'Slight discomfort' → 'Comfortable' 달성!</a:t>
+            </a:r>
+          </a:p>
+        </p:txBody>
+      </p:sp>
+      <p:sp>
+        <p:nvSpPr>
+          <p:cNvPr id="4" name="Slide Number Placeholder 3"/>
+          <p:cNvSpPr>
+            <a:spLocks noGrp="1"/>
+          </p:cNvSpPr>
+          <p:nvPr>
+            <p:ph type="sldNum" idx="5" sz="quarter"/>
+          </p:nvPr>
+        </p:nvSpPr>
+        <p:spPr/>
+      </p:sp>
+    </p:spTree>
+  </p:cSld>
+  <p:clrMapOvr>
+    <a:masterClrMapping/>
+  </p:clrMapOvr>
+</p:notes>
+</file>
+
+<file path=ppt/notesSlides/notesSlide27.xml><?xml version="1.0" encoding="utf-8"?>
+<p:notes xmlns:a="http://schemas.openxmlformats.org/drawingml/2006/main" xmlns:p="http://schemas.openxmlformats.org/presentationml/2006/main" xmlns:r="http://schemas.openxmlformats.org/officeDocument/2006/relationships">
+  <p:cSld>
+    <p:spTree>
+      <p:nvGrpSpPr>
+        <p:cNvPr id="1" name=""/>
+        <p:cNvGrpSpPr/>
+        <p:nvPr/>
+      </p:nvGrpSpPr>
+      <p:grpSpPr>
+        <a:xfrm>
+          <a:off x="0" y="0"/>
+          <a:ext cx="0" cy="0"/>
+          <a:chOff x="0" y="0"/>
+          <a:chExt cx="0" cy="0"/>
+        </a:xfrm>
+      </p:grpSpPr>
+      <p:sp>
+        <p:nvSpPr>
+          <p:cNvPr id="2" name="Slide Image Placeholder 1"/>
+          <p:cNvSpPr>
+            <a:spLocks noGrp="1"/>
+          </p:cNvSpPr>
+          <p:nvPr>
+            <p:ph type="sldImg" idx="2"/>
+          </p:nvPr>
+        </p:nvSpPr>
+        <p:spPr/>
+      </p:sp>
+      <p:sp>
+        <p:nvSpPr>
+          <p:cNvPr id="3" name="Notes Placeholder 2"/>
+          <p:cNvSpPr>
+            <a:spLocks noGrp="1"/>
+          </p:cNvSpPr>
+          <p:nvPr>
+            <p:ph type="body" idx="3" sz="quarter"/>
+          </p:nvPr>
+        </p:nvSpPr>
+        <p:spPr/>
+        <p:txBody>
+          <a:bodyPr/>
+          <a:lstStyle/>
+          <a:p>
+            <a:r>
+              <a:t>[민감도 분석이란?]
+두 가지 질문에 답합니다:
+1. WaveSplat 추정이 얼마나 나빠도 FF가 작동하는가? (nRMSE tolerance)
+2. 얼마나 먼 미래를 봐야 최적인가? (preview horizon)
+[nRMSE Tolerance]
+nRMSE를 0%에서 50%까지 인위적으로 악화시킨 추정을 FF에 사용.
+결과: 0~50% 전 구간에서 FF가 PD-only보다 좋습니다.
+nRMSE 50%에서도 FF 효과 잔존 → "graceful degradation" (서서히 나빠짐).
+임계값 없음 → 추정이 완전히 망가지기 전까지는 항상 도움이 됩니다.
+이것이 실용적으로 중요한 이유:
+"WaveSplat 추정을 얼마나 믿어야 하는가?"에 대한 답이 됩니다.
+현재 nRMSE 22%이면 "안전지대" 안에 있습니다.
+[Preview Horizon]
+0초 preview: FF = 현재 파도로 보상 → 지연과 같음.
+최적 preview:
+Head sea: 0.1s (~1.1m 앞) = 파도 주기 4s의 2.5%
+Beam sea: 0.3s (~3.4m 앞) = 파면이 foil 위치에 도달하는 시간
+너무 짧으면: 파도가 이미 도달 → 반응 부족.
+너무 길면: 파도 예측이 부정확 → 위상 불일치.
+딱 맞는 preview = foil이 파면에 닿기 직전에 명령을 내려야 함.</a:t>
+            </a:r>
+          </a:p>
+        </p:txBody>
+      </p:sp>
+      <p:sp>
+        <p:nvSpPr>
+          <p:cNvPr id="4" name="Slide Number Placeholder 3"/>
+          <p:cNvSpPr>
+            <a:spLocks noGrp="1"/>
+          </p:cNvSpPr>
+          <p:nvPr>
+            <p:ph type="sldNum" idx="5" sz="quarter"/>
+          </p:nvPr>
+        </p:nvSpPr>
+        <p:spPr/>
+      </p:sp>
+    </p:spTree>
+  </p:cSld>
+  <p:clrMapOvr>
+    <a:masterClrMapping/>
+  </p:clrMapOvr>
+</p:notes>
+</file>
+
+<file path=ppt/notesSlides/notesSlide28.xml><?xml version="1.0" encoding="utf-8"?>
+<p:notes xmlns:a="http://schemas.openxmlformats.org/drawingml/2006/main" xmlns:p="http://schemas.openxmlformats.org/presentationml/2006/main" xmlns:r="http://schemas.openxmlformats.org/officeDocument/2006/relationships">
+  <p:cSld>
+    <p:spTree>
+      <p:nvGrpSpPr>
+        <p:cNvPr id="1" name=""/>
+        <p:cNvGrpSpPr/>
+        <p:nvPr/>
+      </p:nvGrpSpPr>
+      <p:grpSpPr>
+        <a:xfrm>
+          <a:off x="0" y="0"/>
+          <a:ext cx="0" cy="0"/>
+          <a:chOff x="0" y="0"/>
+          <a:chExt cx="0" cy="0"/>
+        </a:xfrm>
+      </p:grpSpPr>
+      <p:sp>
+        <p:nvSpPr>
+          <p:cNvPr id="2" name="Slide Image Placeholder 1"/>
+          <p:cNvSpPr>
+            <a:spLocks noGrp="1"/>
+          </p:cNvSpPr>
+          <p:nvPr>
+            <p:ph type="sldImg" idx="2"/>
+          </p:nvPr>
+        </p:nvSpPr>
+        <p:spPr/>
+      </p:sp>
+      <p:sp>
+        <p:nvSpPr>
+          <p:cNvPr id="3" name="Notes Placeholder 2"/>
+          <p:cNvSpPr>
+            <a:spLocks noGrp="1"/>
+          </p:cNvSpPr>
+          <p:nvPr>
+            <p:ph type="body" idx="3" sz="quarter"/>
+          </p:nvPr>
+        </p:nvSpPr>
+        <p:spPr/>
+        <p:txBody>
+          <a:bodyPr/>
+          <a:lstStyle/>
+          <a:p>
+            <a:r>
+              <a:t>[End-to-End Demo란?]
+LiDAR → WaveSplat → FF → 선박 응답 전체 파이프라인을 연결한 실험.
+실제 사용하는 것과 동일한 방식입니다.
+[결과]
+BF3 단순 sea (N=1~5): E2E WaveSplat이 GT-FF의 92~96% 달성.
+거의 완벽합니다. 추정 오차가 있어도 제어 성능에는 작은 영향.
+BF4 5-comp: 37% 달성. 상당히 낮습니다.
+왜?
+"방향 추정 오차"가 원인입니다.
+[방향 오차가 왜 치명적인가?]
+FF 명령 = K_ff × α_wave
+α_wave = −∂η/∂x − w/V (파면의 기울기)
+∂η/∂x: x 방향 (배 진행 방향) 기울기
+이것을 계산하려면 파도가 어느 방향으로 오는지 알아야 합니다.
+방향이 5° 어긋나면 ∂η/∂x가 틀리고 → FF 명령이 오히려 흔들림을 증폭시킵니다.
+BF4 5-comp에서 두 성분이 ±20° 방향 분리되어 있을 때, 두 성분의 위상이 겹치면서 추정 오차 발생.
+[개선 방향]
+(a) 선박이 방향을 조금씩 바꾸면서 여러 각도에서 데이터 수집 → 방향 추정 개선
+(b) IMU heading 정보로 방향 prior 부여
+(c) Multi-frame voting으로 방향 안정화</a:t>
+            </a:r>
+          </a:p>
+        </p:txBody>
+      </p:sp>
+      <p:sp>
+        <p:nvSpPr>
+          <p:cNvPr id="4" name="Slide Number Placeholder 3"/>
+          <p:cNvSpPr>
+            <a:spLocks noGrp="1"/>
+          </p:cNvSpPr>
+          <p:nvPr>
+            <p:ph type="sldNum" idx="5" sz="quarter"/>
+          </p:nvPr>
+        </p:nvSpPr>
+        <p:spPr/>
+      </p:sp>
+    </p:spTree>
+  </p:cSld>
+  <p:clrMapOvr>
+    <a:masterClrMapping/>
+  </p:clrMapOvr>
+</p:notes>
+</file>
+
+<file path=ppt/notesSlides/notesSlide29.xml><?xml version="1.0" encoding="utf-8"?>
+<p:notes xmlns:a="http://schemas.openxmlformats.org/drawingml/2006/main" xmlns:p="http://schemas.openxmlformats.org/presentationml/2006/main" xmlns:r="http://schemas.openxmlformats.org/officeDocument/2006/relationships">
+  <p:cSld>
+    <p:spTree>
+      <p:nvGrpSpPr>
+        <p:cNvPr id="1" name=""/>
+        <p:cNvGrpSpPr/>
+        <p:nvPr/>
+      </p:nvGrpSpPr>
+      <p:grpSpPr>
+        <a:xfrm>
+          <a:off x="0" y="0"/>
+          <a:ext cx="0" cy="0"/>
+          <a:chOff x="0" y="0"/>
+          <a:chExt cx="0" cy="0"/>
+        </a:xfrm>
+      </p:grpSpPr>
+      <p:sp>
+        <p:nvSpPr>
+          <p:cNvPr id="2" name="Slide Image Placeholder 1"/>
+          <p:cNvSpPr>
+            <a:spLocks noGrp="1"/>
+          </p:cNvSpPr>
+          <p:nvPr>
+            <p:ph type="sldImg" idx="2"/>
+          </p:nvPr>
+        </p:nvSpPr>
+        <p:spPr/>
+      </p:sp>
+      <p:sp>
+        <p:nvSpPr>
+          <p:cNvPr id="3" name="Notes Placeholder 2"/>
+          <p:cNvSpPr>
+            <a:spLocks noGrp="1"/>
+          </p:cNvSpPr>
+          <p:nvPr>
+            <p:ph type="body" idx="3" sz="quarter"/>
+          </p:nvPr>
+        </p:nvSpPr>
+        <p:spPr/>
+        <p:txBody>
+          <a:bodyPr/>
+          <a:lstStyle/>
+          <a:p>
+            <a:r>
+              <a:t>[단일점 선수 센서 비교 — 왜 이 실험을 했나?]
+Candela (스웨덴 하이드로포일 회사)는 선수(뱃머리)에 파도 높이 센서 1개를 달고 FF를 씁니다.
+"WaveSplat 없이 이 방법으로 안 되는가?"라는 질문에 답합니다.
+[SP-1pt 방법 — 가장 이상적인 단일점 방식]
+GT 파도 성분들을 CG(무게중심) + V·Δt 위치 한 점에서만 평가.
+이것이 "단일점 센서로 할 수 있는 최선"입니다. 노이즈 없고, 완벽한 GT를 씁니다.
+결과: BF3 Head sea에서 평균 −13.3% (악화!). 5개 seed 모두 일관되게 나빠짐.
+왜 악화되는가?
+λ = gTp²/(2π) ≈ 9.81×25/6.28 ≈ 39m (BF3 Tp=5s)
+전방 foil과 후방 foil 간격 = 4.5m
+위상 차 Δφ = 2π×4.5/39 ≈ 41°
+CG 한 점에서 평가한 신호를 두 foil에 같이 쓰면:
+전방 foil: +21° 위상 오차, 후방 foil: −21° 위상 오차
+→ FF가 절반 정도 역방향으로 작동합니다.
+이것은 센서 품질 문제가 아닙니다. GT를 써도 같은 결과입니다. 구조적 한계입니다.
+BF4 Tp=7.5s에서는?
+λ ≈ 88m → Δφ ≈ 18° → 오차 감소 → SP-1pt +7.0% (GT의 71% 회수).
+파장이 길수록 단일점 방식도 어느 정도 작동합니다.
+[SP-temporal 방법]
+선수 센서에서 시간 미분으로 파면 기울기를 계산:
+∂η/∂x ≈ −(1/c_p) × ∂η/∂t  (head-sea 가정)
+Beam sea (μ=90°)에서 실패 이유:
+실제 ∂η/∂x ≈ 0 (파도가 옆으로 진행하니까 배 진행 방향 기울기 없음)
+∂η/∂t ≠ 0 (파도가 위아래로 여전히 진동)
+공식이 "없는 기울기를 만들어냄" → FF가 없는 파도를 보상하려 함 → −35.0% 악화.</a:t>
+            </a:r>
+          </a:p>
+        </p:txBody>
+      </p:sp>
+      <p:sp>
+        <p:nvSpPr>
+          <p:cNvPr id="4" name="Slide Number Placeholder 3"/>
+          <p:cNvSpPr>
+            <a:spLocks noGrp="1"/>
+          </p:cNvSpPr>
+          <p:nvPr>
+            <p:ph type="sldNum" idx="5" sz="quarter"/>
+          </p:nvPr>
+        </p:nvSpPr>
+        <p:spPr/>
+      </p:sp>
+    </p:spTree>
+  </p:cSld>
+  <p:clrMapOvr>
+    <a:masterClrMapping/>
+  </p:clrMapOvr>
+</p:notes>
+</file>
+
+<file path=ppt/notesSlides/notesSlide3.xml><?xml version="1.0" encoding="utf-8"?>
+<p:notes xmlns:a="http://schemas.openxmlformats.org/drawingml/2006/main" xmlns:p="http://schemas.openxmlformats.org/presentationml/2006/main" xmlns:r="http://schemas.openxmlformats.org/officeDocument/2006/relationships">
+  <p:cSld>
+    <p:spTree>
+      <p:nvGrpSpPr>
+        <p:cNvPr id="1" name=""/>
+        <p:cNvGrpSpPr/>
+        <p:nvPr/>
+      </p:nvGrpSpPr>
+      <p:grpSpPr>
+        <a:xfrm>
+          <a:off x="0" y="0"/>
+          <a:ext cx="0" cy="0"/>
+          <a:chOff x="0" y="0"/>
+          <a:chExt cx="0" cy="0"/>
+        </a:xfrm>
+      </p:grpSpPr>
+      <p:sp>
+        <p:nvSpPr>
+          <p:cNvPr id="2" name="Slide Image Placeholder 1"/>
+          <p:cNvSpPr>
+            <a:spLocks noGrp="1"/>
+          </p:cNvSpPr>
+          <p:nvPr>
+            <p:ph type="sldImg" idx="2"/>
+          </p:nvPr>
+        </p:nvSpPr>
+        <p:spPr/>
+      </p:sp>
+      <p:sp>
+        <p:nvSpPr>
+          <p:cNvPr id="3" name="Notes Placeholder 2"/>
+          <p:cNvSpPr>
+            <a:spLocks noGrp="1"/>
+          </p:cNvSpPr>
+          <p:nvPr>
+            <p:ph type="body" idx="3" sz="quarter"/>
+          </p:nvPr>
+        </p:nvSpPr>
+        <p:spPr/>
+        <p:txBody>
+          <a:bodyPr/>
+          <a:lstStyle/>
+          <a:p>
+            <a:r>
+              <a:t>[이 슬라이드에서 보여주려는 것]
+실제 배(Avikus NEUBOAT)에서 촬영한 LiDAR 영상입니다.
+[LiDAR가 뭔가요?]
+LiDAR = Light Detection And Ranging. 레이저 빛을 쏘고, 물체에 반사되어 돌아오는 시간을 재서 거리를 측정하는 센서입니다. 자율주행차에 달린 레이더와 비슷한데, 빛(레이저)을 씁니다. 1초에 10번 주변을 스캔합니다.
+[왜 데이터가 드문드문(sparse)한가?]
+바다 수면은 레이저를 잘 흡수하거나 다른 방향으로 반사해버립니다 (거울처럼). 파도의 경사면이 레이저 방향과 어긋나면 신호가 돌아오지 않습니다. 그래서 250m×200m 넓은 바다에서 프레임당 겨우 50점 정도만 찍힙니다. (가로세로 각각 250m이면 대략 축구장 2~3개 크기인데, 거기서 점 50개를 가지고 파도 모양을 알아내야 합니다.)
+[specular dropout이 뭔가요?]
+거울을 생각하면 됩니다. 거울에 빛을 비추면 반사각도가 맞아야 눈에 들어옵니다. 수면도 마찬가지로, 레이저가 파도 경사면에 맞으면 LiDAR 반대 방향으로 튕겨나가서 데이터가 안 잡힙니다. 파도가 없는 것처럼 보이는 거예요.
+[이게 왜 문제인가?]
+기존 방법들은 "관측 없는 곳 = 파도 없음"으로 처리하거나, 주변 점과 선형 보간(평균 내기)으로 채웁니다. 그러면 전혀 다른 파도 모양이 나옵니다. WaveSplat은 물리 법칙을 이용해서 "관측이 없어도 어디에 파도가 있을지" 추정합니다.</a:t>
+            </a:r>
+          </a:p>
+        </p:txBody>
+      </p:sp>
+      <p:sp>
+        <p:nvSpPr>
+          <p:cNvPr id="4" name="Slide Number Placeholder 3"/>
+          <p:cNvSpPr>
+            <a:spLocks noGrp="1"/>
+          </p:cNvSpPr>
+          <p:nvPr>
+            <p:ph type="sldNum" idx="5" sz="quarter"/>
+          </p:nvPr>
+        </p:nvSpPr>
+        <p:spPr/>
+      </p:sp>
+    </p:spTree>
+  </p:cSld>
+  <p:clrMapOvr>
+    <a:masterClrMapping/>
+  </p:clrMapOvr>
+</p:notes>
+</file>
+
+<file path=ppt/notesSlides/notesSlide30.xml><?xml version="1.0" encoding="utf-8"?>
+<p:notes xmlns:a="http://schemas.openxmlformats.org/drawingml/2006/main" xmlns:p="http://schemas.openxmlformats.org/presentationml/2006/main" xmlns:r="http://schemas.openxmlformats.org/officeDocument/2006/relationships">
+  <p:cSld>
+    <p:spTree>
+      <p:nvGrpSpPr>
+        <p:cNvPr id="1" name=""/>
+        <p:cNvGrpSpPr/>
+        <p:nvPr/>
+      </p:nvGrpSpPr>
+      <p:grpSpPr>
+        <a:xfrm>
+          <a:off x="0" y="0"/>
+          <a:ext cx="0" cy="0"/>
+          <a:chOff x="0" y="0"/>
+          <a:chExt cx="0" cy="0"/>
+        </a:xfrm>
+      </p:grpSpPr>
+      <p:sp>
+        <p:nvSpPr>
+          <p:cNvPr id="2" name="Slide Image Placeholder 1"/>
+          <p:cNvSpPr>
+            <a:spLocks noGrp="1"/>
+          </p:cNvSpPr>
+          <p:nvPr>
+            <p:ph type="sldImg" idx="2"/>
+          </p:nvPr>
+        </p:nvSpPr>
+        <p:spPr/>
+      </p:sp>
+      <p:sp>
+        <p:nvSpPr>
+          <p:cNvPr id="3" name="Notes Placeholder 2"/>
+          <p:cNvSpPr>
+            <a:spLocks noGrp="1"/>
+          </p:cNvSpPr>
+          <p:nvPr>
+            <p:ph type="body" idx="3" sz="quarter"/>
+          </p:nvPr>
+        </p:nvSpPr>
+        <p:spPr/>
+        <p:txBody>
+          <a:bodyPr/>
+          <a:lstStyle/>
+          <a:p>
+            <a:r>
+              <a:t>[왜 seed마다 결과가 다른가?]
+BF3 Beam sea에서 SP-1pt 결과:
+seed별로 +54% ~ −27% 사이로 들쭉날쭉합니다.
+평균 +21.4%이지만 표준편차 ±31.5%. σ/μ = 1.47 (평균보다 표준편차가 큼).
+이것이 "예측 불가능"을 의미합니다. 같은 조건이지만 운에 따라 도움이 될 수도, 해가 될 수도 있습니다.
+[왜 이렇게 seed 의존적인가?]
+Beam sea (μ=90°)는 파도가 주로 옆 방향(y)으로 진행합니다.
+하지만 방향 spread (σ_θ=20°)로 인해 일부 성분이 대각선 방향으로도 옵니다.
+이 대각선 성분들이 seed마다 다른 위상을 가집니다.
+→ 두 foil 위치에서 이 성분들의 위상 합이 seed마다 달라집니다.
+→ 어떤 seed는 두 foil에 비슷한 위상 → FF 효과 좋음.
+→ 어떤 seed는 두 foil에 반대 위상 → FF 방해.
+WaveSplat은?
+각 foil × 각 성분을 독립적으로 평가합니다.
+σ/μ = 0.34 (SP-1pt 1.47 대비 4.3배 안정적).
+[센서 선택 가이드]
+- Head sea + 장주기(Tp&gt;7s): SP-1pt 어느 정도 작동 (71% GT 회수)
+- Head sea + 단주기(Tp&lt;7s): SP-1pt 일관적 악화 → WaveSplat 필수
+- Beam sea: SP-1pt 불안정, SP-temporal 일관적 악화 → WaveSplat 필수
+- 실 상용 운항 (다양한 해상 조건): WaveSplat 필수
+[WaveSplat이 필요한 3가지 이유 요약]
+1. Per-foil 독립 평가: 각 foil 위치에서 파도를 따로 계산.
+2. 방향 독립성: 파도 방향에 무관하게 안정적.
+3. 정확한 기울기 계산: head-sea 가정 없이 해석적으로 ∂η/∂x를 계산.</a:t>
+            </a:r>
+          </a:p>
+        </p:txBody>
+      </p:sp>
+      <p:sp>
+        <p:nvSpPr>
+          <p:cNvPr id="4" name="Slide Number Placeholder 3"/>
+          <p:cNvSpPr>
+            <a:spLocks noGrp="1"/>
+          </p:cNvSpPr>
+          <p:nvPr>
+            <p:ph type="sldNum" idx="5" sz="quarter"/>
+          </p:nvPr>
+        </p:nvSpPr>
+        <p:spPr/>
+      </p:sp>
+    </p:spTree>
+  </p:cSld>
+  <p:clrMapOvr>
+    <a:masterClrMapping/>
+  </p:clrMapOvr>
+</p:notes>
+</file>
+
+<file path=ppt/notesSlides/notesSlide31.xml><?xml version="1.0" encoding="utf-8"?>
+<p:notes xmlns:a="http://schemas.openxmlformats.org/drawingml/2006/main" xmlns:p="http://schemas.openxmlformats.org/presentationml/2006/main" xmlns:r="http://schemas.openxmlformats.org/officeDocument/2006/relationships">
+  <p:cSld>
+    <p:spTree>
+      <p:nvGrpSpPr>
+        <p:cNvPr id="1" name=""/>
+        <p:cNvGrpSpPr/>
+        <p:nvPr/>
+      </p:nvGrpSpPr>
+      <p:grpSpPr>
+        <a:xfrm>
+          <a:off x="0" y="0"/>
+          <a:ext cx="0" cy="0"/>
+          <a:chOff x="0" y="0"/>
+          <a:chExt cx="0" cy="0"/>
+        </a:xfrm>
+      </p:grpSpPr>
+      <p:sp>
+        <p:nvSpPr>
+          <p:cNvPr id="2" name="Slide Image Placeholder 1"/>
+          <p:cNvSpPr>
+            <a:spLocks noGrp="1"/>
+          </p:cNvSpPr>
+          <p:nvPr>
+            <p:ph type="sldImg" idx="2"/>
+          </p:nvPr>
+        </p:nvSpPr>
+        <p:spPr/>
+      </p:sp>
+      <p:sp>
+        <p:nvSpPr>
+          <p:cNvPr id="3" name="Notes Placeholder 2"/>
+          <p:cNvSpPr>
+            <a:spLocks noGrp="1"/>
+          </p:cNvSpPr>
+          <p:nvPr>
+            <p:ph type="body" idx="3" sz="quarter"/>
+          </p:nvPr>
+        </p:nvSpPr>
+        <p:spPr/>
+        <p:txBody>
+          <a:bodyPr/>
+          <a:lstStyle/>
+          <a:p>
+            <a:r>
+              <a:t>[한계 — 정직한 보고가 중요한 이유]
+과학 논문에서 한계를 솔직하게 보고하는 것이 신뢰성의 핵심입니다.
+"좋은 것만 보여준다"는 인상을 주면 오히려 신뢰를 잃습니다.
+WaveSplat의 알려진 한계:
+1. VR=0.66: 진폭 34% 과소추정.
+   원인: Adam optimizer가 수렴할 때 작은 성분들을 pruning → 에너지 손실.
+   해결 방향: 추정 후 진폭 스케일링, 또는 pruning threshold 조정.
+2. 30+ component crowding: 파도 성분이 30개 이상이면 방향 구분 어려움.
+   원인: k-공간에서 인접한 peak들이 겹쳐 보임.
+   해결 방향: multi-frame 방향 voting, vessel yaw 변화 활용.
+3. 시뮬레이션 전용: 실제 바다에서 아직 검증하지 않았습니다.
+   다음 단계: 수조 실험 → 실선 시험.
+4. 선형 파도 모델: 2차 이상의 비선형 파도 (Stokes) 미반영.
+   실용적 영향: Hs&lt;2m에서는 선형 모델로도 충분.
+[Contributions 요약]
+기술적으로 새로운 것 6가지 (❶~❻):
+Grid-free spectral 표현, 분산관계 하드 제약, Adaptive N, 가중 손실, 5-metric 패널, 24-config ETKF sweep.
+WaveSplat만의 고유 능력 3가지:
+스펙트럼 직접 출력 (방향/파장), 희소 관측에서 강건성, 시간 예측.
+응용 (❽~⓫):
+하이드로포일 FF 제어 → 실제로 승차감 개선 확인.
+단일점 센서의 구조적 한계 수학적/실험적으로 증명.
+[전체 결론 — 한 문장]
+"희소한 LiDAR 데이터에서 물리 법칙을 이용해 파도를 격자 없이 실시간으로 정확히 추정하며, 이를 하이드로포일 제어에 적용해 승차감을 크게 개선했습니다."</a:t>
+            </a:r>
+          </a:p>
+        </p:txBody>
+      </p:sp>
+      <p:sp>
+        <p:nvSpPr>
+          <p:cNvPr id="4" name="Slide Number Placeholder 3"/>
+          <p:cNvSpPr>
+            <a:spLocks noGrp="1"/>
+          </p:cNvSpPr>
+          <p:nvPr>
+            <p:ph type="sldNum" idx="5" sz="quarter"/>
+          </p:nvPr>
+        </p:nvSpPr>
+        <p:spPr/>
+      </p:sp>
+    </p:spTree>
+  </p:cSld>
+  <p:clrMapOvr>
+    <a:masterClrMapping/>
+  </p:clrMapOvr>
+</p:notes>
+</file>
+
+<file path=ppt/notesSlides/notesSlide4.xml><?xml version="1.0" encoding="utf-8"?>
+<p:notes xmlns:a="http://schemas.openxmlformats.org/drawingml/2006/main" xmlns:p="http://schemas.openxmlformats.org/presentationml/2006/main" xmlns:r="http://schemas.openxmlformats.org/officeDocument/2006/relationships">
+  <p:cSld>
+    <p:spTree>
+      <p:nvGrpSpPr>
+        <p:cNvPr id="1" name=""/>
+        <p:cNvGrpSpPr/>
+        <p:nvPr/>
+      </p:nvGrpSpPr>
+      <p:grpSpPr>
+        <a:xfrm>
+          <a:off x="0" y="0"/>
+          <a:ext cx="0" cy="0"/>
+          <a:chOff x="0" y="0"/>
+          <a:chExt cx="0" cy="0"/>
+        </a:xfrm>
+      </p:grpSpPr>
+      <p:sp>
+        <p:nvSpPr>
+          <p:cNvPr id="2" name="Slide Image Placeholder 1"/>
+          <p:cNvSpPr>
+            <a:spLocks noGrp="1"/>
+          </p:cNvSpPr>
+          <p:nvPr>
+            <p:ph type="sldImg" idx="2"/>
+          </p:nvPr>
+        </p:nvSpPr>
+        <p:spPr/>
+      </p:sp>
+      <p:sp>
+        <p:nvSpPr>
+          <p:cNvPr id="3" name="Notes Placeholder 2"/>
+          <p:cNvSpPr>
+            <a:spLocks noGrp="1"/>
+          </p:cNvSpPr>
+          <p:nvPr>
+            <p:ph type="body" idx="3" sz="quarter"/>
+          </p:nvPr>
+        </p:nvSpPr>
+        <p:spPr/>
+        <p:txBody>
+          <a:bodyPr/>
+          <a:lstStyle/>
+          <a:p>
+            <a:r>
+              <a:t>[선박 전방 파랑 예측이 왜 필요한가?]
+"파도를 미리 알면 좋다"는 게 여러 응용에 필요합니다:
+1. 하이드로포일 선박: 물 위를 나는 배. 날개(foil)가 파도와 직접 부딪히기 때문에 파도를 미리 알고 날개각도를 조정해야 합니다. (이 발표의 핵심 응용)
+2. 해상 크레인: 크레인이 흔들리면 물건을 내릴 때 위험합니다. 파도를 미리 알면 배의 흔들림을 예측해서 보상할 수 있습니다.
+3. 자율운항 선박: 파도가 높으면 속도를 줄이거나 경로를 바꿔야 합니다. 실시간으로 파도 상태를 알면 안전하게 운항할 수 있습니다.
+4. 헬리콥터 착륙 판정: 배 위에 헬기 착륙판(helideck)이 있는데, 파도가 심하면 착륙이 위험합니다. 파도 예측으로 "지금 착륙 가능한가?"를 판단합니다.
+[LiDAR 관측의 어려움 — 숫자로 이해하기]
+- 250m×200m 넓이 = 축구장 약 7개 크기
+- 프레임당 ~50점 = 가로세로 7점씩 격자 → 너무 드문드문
+- 10 Hz = 초당 10번 갱신 → 각 프레임을 100ms 안에 처리해야 함
+- σ_r ≈ 0.02m = 레이저 거리 측정 오차 2cm (정밀함)
+[Hydrofoil 비유]
+달리는 자동차에서 전방 카메라로 과속방지턱을 보고, 그것에 올라가기 0.1초 전에 서스펜션을 미리 올리는 것과 같습니다. "본 다음 반응"이 아니라 "보고 미리 준비"입니다.</a:t>
+            </a:r>
+          </a:p>
+        </p:txBody>
+      </p:sp>
+      <p:sp>
+        <p:nvSpPr>
+          <p:cNvPr id="4" name="Slide Number Placeholder 3"/>
+          <p:cNvSpPr>
+            <a:spLocks noGrp="1"/>
+          </p:cNvSpPr>
+          <p:nvPr>
+            <p:ph type="sldNum" idx="5" sz="quarter"/>
+          </p:nvPr>
+        </p:nvSpPr>
+        <p:spPr/>
+      </p:sp>
+    </p:spTree>
+  </p:cSld>
+  <p:clrMapOvr>
+    <a:masterClrMapping/>
+  </p:clrMapOvr>
+</p:notes>
+</file>
+
+<file path=ppt/notesSlides/notesSlide5.xml><?xml version="1.0" encoding="utf-8"?>
+<p:notes xmlns:a="http://schemas.openxmlformats.org/drawingml/2006/main" xmlns:p="http://schemas.openxmlformats.org/presentationml/2006/main" xmlns:r="http://schemas.openxmlformats.org/officeDocument/2006/relationships">
+  <p:cSld>
+    <p:spTree>
+      <p:nvGrpSpPr>
+        <p:cNvPr id="1" name=""/>
+        <p:cNvGrpSpPr/>
+        <p:nvPr/>
+      </p:nvGrpSpPr>
+      <p:grpSpPr>
+        <a:xfrm>
+          <a:off x="0" y="0"/>
+          <a:ext cx="0" cy="0"/>
+          <a:chOff x="0" y="0"/>
+          <a:chExt cx="0" cy="0"/>
+        </a:xfrm>
+      </p:grpSpPr>
+      <p:sp>
+        <p:nvSpPr>
+          <p:cNvPr id="2" name="Slide Image Placeholder 1"/>
+          <p:cNvSpPr>
+            <a:spLocks noGrp="1"/>
+          </p:cNvSpPr>
+          <p:nvPr>
+            <p:ph type="sldImg" idx="2"/>
+          </p:nvPr>
+        </p:nvSpPr>
+        <p:spPr/>
+      </p:sp>
+      <p:sp>
+        <p:nvSpPr>
+          <p:cNvPr id="3" name="Notes Placeholder 2"/>
+          <p:cNvSpPr>
+            <a:spLocks noGrp="1"/>
+          </p:cNvSpPr>
+          <p:nvPr>
+            <p:ph type="body" idx="3" sz="quarter"/>
+          </p:nvPr>
+        </p:nvSpPr>
+        <p:spPr/>
+        <p:txBody>
+          <a:bodyPr/>
+          <a:lstStyle/>
+          <a:p>
+            <a:r>
+              <a:t>[기존 방법들이 왜 안 되는지 — 비전문가 설명]
+이 문제를 해결하려고 기존에 시도된 방법이 3가지 있습니다.
+① Grid-based Optimal Interpolation (격자 기반 최적 보간)
+   쉽게 말하면: "관측 점들 사이를 격자로 잘라서 평균 내기"
+   문제점:
+   - 250m×200m를 2m 간격 격자로 나누면 12,500개 셀인데, 각 셀에 데이터가 0~1개밖에 없습니다.
+   - 데이터 없는 셀은 주변 셀 값으로 메꾸는데(보간), 이게 파도 물리 법칙을 전혀 모릅니다.
+   - 예: 파도 골짜기와 파도 마루 사이를 직선으로 잇는 것과 같습니다. 실제 파도 모양과 다릅니다.
+   - 또한 시간 모델이 없어서 "지금 이 순간" 이후 예측 불가합니다.
+② GPR (Gaussian Process Regression, 가우시안 프로세스)
+   쉽게 말하면: "관측 점들 사이의 유사도(커널)를 이용해 보간"
+   문제점:
+   - 물리 법칙 없음. 파도가 앞으로 진행한다는 것도 모릅니다.
+   - 계산량이 관측 점 수(M)의 세제곱 O(M³)에 비례 → M=50이면 125,000 연산, 200ms 이상 소요 → 실시간 불가.
+   - 결과: 진폭을 거의 재현 못함 (진폭의 6.5%만 = 파도가 거의 평탄하게 나옴).
+③ ETKF on Grid (Ensemble Transform Kalman Filter)
+   쉽게 말하면: "100가지 가능한 파도 시나리오를 동시에 추적하다가 관측과 가장 맞는 것 선택"
+   문제점:
+   - 100개 시나리오를 동시에 계산 → 132.6ms/프레임 → 10Hz 처리시 지연 누적.
+   - 격자 기반이라 격자 해상도보다 작은 특징 표현 불가.
+   - 진폭은 맞는데 위치(위상)가 틀림 (Pearson ρ=0.109 = 모양이 거의 무관).
+[공통 문제]
+모두 "격자" 또는 "데이터 분포"에 의존합니다. WaveSplat은 격자 없이, 물리 법칙(파도 방정식)을 직접 파라미터로 표현합니다.</a:t>
+            </a:r>
+          </a:p>
+        </p:txBody>
+      </p:sp>
+      <p:sp>
+        <p:nvSpPr>
+          <p:cNvPr id="4" name="Slide Number Placeholder 3"/>
+          <p:cNvSpPr>
+            <a:spLocks noGrp="1"/>
+          </p:cNvSpPr>
+          <p:nvPr>
+            <p:ph type="sldNum" idx="5" sz="quarter"/>
+          </p:nvPr>
+        </p:nvSpPr>
+        <p:spPr/>
+      </p:sp>
+    </p:spTree>
+  </p:cSld>
+  <p:clrMapOvr>
+    <a:masterClrMapping/>
+  </p:clrMapOvr>
+</p:notes>
+</file>
+
+<file path=ppt/notesSlides/notesSlide6.xml><?xml version="1.0" encoding="utf-8"?>
+<p:notes xmlns:a="http://schemas.openxmlformats.org/drawingml/2006/main" xmlns:p="http://schemas.openxmlformats.org/presentationml/2006/main" xmlns:r="http://schemas.openxmlformats.org/officeDocument/2006/relationships">
+  <p:cSld>
+    <p:spTree>
+      <p:nvGrpSpPr>
+        <p:cNvPr id="1" name=""/>
+        <p:cNvGrpSpPr/>
+        <p:nvPr/>
+      </p:nvGrpSpPr>
+      <p:grpSpPr>
+        <a:xfrm>
+          <a:off x="0" y="0"/>
+          <a:ext cx="0" cy="0"/>
+          <a:chOff x="0" y="0"/>
+          <a:chExt cx="0" cy="0"/>
+        </a:xfrm>
+      </p:grpSpPr>
+      <p:sp>
+        <p:nvSpPr>
+          <p:cNvPr id="2" name="Slide Image Placeholder 1"/>
+          <p:cNvSpPr>
+            <a:spLocks noGrp="1"/>
+          </p:cNvSpPr>
+          <p:nvPr>
+            <p:ph type="sldImg" idx="2"/>
+          </p:nvPr>
+        </p:nvSpPr>
+        <p:spPr/>
+      </p:sp>
+      <p:sp>
+        <p:nvSpPr>
+          <p:cNvPr id="3" name="Notes Placeholder 2"/>
+          <p:cNvSpPr>
+            <a:spLocks noGrp="1"/>
+          </p:cNvSpPr>
+          <p:nvPr>
+            <p:ph type="body" idx="3" sz="quarter"/>
+          </p:nvPr>
+        </p:nvSpPr>
+        <p:spPr/>
+        <p:txBody>
+          <a:bodyPr/>
+          <a:lstStyle/>
+          <a:p>
+            <a:r>
+              <a:t>[용어 해설 — 이 슬라이드는 참고용입니다. 발표 중에 모르는 단어 나오면 다시 돌아와서 보면 됩니다]
+Beaufort scale (보퍼트 등급):
+   바람 세기를 0~12로 나눈 척도입니다. 바람이 세면 파도도 높습니다.
+   BF2 = 바람 3~4 m/s, 파고 약 0.3m (잔잔함)
+   BF3 = 바람 5~7 m/s, 파고 약 0.9m (약간 물결)
+   BF4 = 바람 8~10 m/s, 파고 약 1.5m (중간 파도)
+   BF5 = 바람 11~13 m/s, 파고 약 2.0m (제법 거친 바다)
+Hs (유의 파고, significant wave height):
+   관측되는 파고 중 큰 것 1/3의 평균입니다. "실제로 체감되는 파고"라고 보면 됩니다. Hs=1.5m면 파도 높이가 대략 1.5m라는 뜻.
+Tp (첨두 주기):
+   파도 에너지가 가장 많은 주파수의 주기. Tp=7s면 7초마다 가장 큰 파도가 옵니다.
+JONSWAP 스펙트럼:
+   북해에서 관측된 데이터로 만든 파랑 스펙트럼 모델. 파도 에너지가 주파수별로 얼마나 분포하는지 수식으로 표현. 시뮬레이션에서 "가상의 바다"를 만들 때 이 공식을 씁니다.
+Dispersion relation (분산관계):
+   파도의 파장과 주기 사이의 물리 법칙. ω = √(g|k|·tanh(|k|·d))
+   쉽게: 파장이 길면(큰 파도) 더 빨리 진행합니다. 이 법칙을 WaveSplat이 "하드 제약"으로 강제합니다.
+   비유: 스프링에서 진동수와 스프링 상수의 관계처럼, 물리가 정해준 규칙입니다.
+nRMSE (normalized RMSE):
+   추정 오차를 파고(Hs)로 나눈 값. 0이면 완벽, 1이면 파고만큼 틀린 것. 0.2면 파고의 20% 정도 오차.
+VR (Variance Ratio):
+   진폭을 얼마나 잘 재현하는가. 1이면 완벽. 0.66이면 실제 진폭의 66%만 재현. 0.065면 거의 평탄.
+Pearson ρ (피어슨 상관계수):
+   파도 모양(위상)이 얼마나 맞는가. 1이면 완벽 일치, 0이면 무관계. 진폭과 무관합니다.
+SS (Skill Score):
+   "아무것도 예측 안 하는 것(ẑ=0)보다 나은가?" SS&gt;0이면 의미 있는 예측. SS&lt;0이면 오히려 방해.</a:t>
+            </a:r>
+          </a:p>
+        </p:txBody>
+      </p:sp>
+      <p:sp>
+        <p:nvSpPr>
+          <p:cNvPr id="4" name="Slide Number Placeholder 3"/>
+          <p:cNvSpPr>
+            <a:spLocks noGrp="1"/>
+          </p:cNvSpPr>
+          <p:nvPr>
+            <p:ph type="sldNum" idx="5" sz="quarter"/>
+          </p:nvPr>
+        </p:nvSpPr>
+        <p:spPr/>
+      </p:sp>
+    </p:spTree>
+  </p:cSld>
+  <p:clrMapOvr>
+    <a:masterClrMapping/>
+  </p:clrMapOvr>
+</p:notes>
+</file>
+
+<file path=ppt/notesSlides/notesSlide7.xml><?xml version="1.0" encoding="utf-8"?>
+<p:notes xmlns:a="http://schemas.openxmlformats.org/drawingml/2006/main" xmlns:p="http://schemas.openxmlformats.org/presentationml/2006/main" xmlns:r="http://schemas.openxmlformats.org/officeDocument/2006/relationships">
+  <p:cSld>
+    <p:spTree>
+      <p:nvGrpSpPr>
+        <p:cNvPr id="1" name=""/>
+        <p:cNvGrpSpPr/>
+        <p:nvPr/>
+      </p:nvGrpSpPr>
+      <p:grpSpPr>
+        <a:xfrm>
+          <a:off x="0" y="0"/>
+          <a:ext cx="0" cy="0"/>
+          <a:chOff x="0" y="0"/>
+          <a:chExt cx="0" cy="0"/>
+        </a:xfrm>
+      </p:grpSpPr>
+      <p:sp>
+        <p:nvSpPr>
+          <p:cNvPr id="2" name="Slide Image Placeholder 1"/>
+          <p:cNvSpPr>
+            <a:spLocks noGrp="1"/>
+          </p:cNvSpPr>
+          <p:nvPr>
+            <p:ph type="sldImg" idx="2"/>
+          </p:nvPr>
+        </p:nvSpPr>
+        <p:spPr/>
+      </p:sp>
+      <p:sp>
+        <p:nvSpPr>
+          <p:cNvPr id="3" name="Notes Placeholder 2"/>
+          <p:cNvSpPr>
+            <a:spLocks noGrp="1"/>
+          </p:cNvSpPr>
+          <p:nvPr>
+            <p:ph type="body" idx="3" sz="quarter"/>
+          </p:nvPr>
+        </p:nvSpPr>
+        <p:spPr/>
+        <p:txBody>
+          <a:bodyPr/>
+          <a:lstStyle/>
+          <a:p>
+            <a:r>
+              <a:t>[3D Gaussian Splatting이 뭔가요?]
+2023년 컴퓨터 그래픽스 분야에서 나온 기술입니다. 카메라로 찍은 사진 여러 장에서 3D 장면을 재구성할 때, 기존에는 3D 격자(복셀)를 썼습니다. 3DGS는 대신 "수천~수백만 개의 3D 가우시안(타원형 덩어리)들의 합"으로 장면을 표현합니다.
+비유: 그림을 그릴 때 격자 칸을 색칠하는 것 대신, 붓터치(가우시안)를 여러 번 겹치는 것과 같습니다.
+장점: 격자보다 효율적이고, 어느 각도에서든 빠르게 렌더링 가능.
+[WaveSplat에 어떻게 적용했나요?]
+3DGS의 "가우시안 덩어리들의 합" = WaveSplat의 "사인파(plane wave)들의 합"
+3DGS 가우시안 → WaveSplat 사인파
+각 가우시안의 위치/형태 → 각 파도성분의 방향/파장/속도
+격자 없이 어느 위치든 계산 가능 → 격자 없이 어느 바다 위치든 계산 가능
+차이점: 3DGS는 공간만 표현하지만, WaveSplat은 시간도 포함됩니다. 그래서 "현재"뿐 아니라 "5초 후 파도"도 예측할 수 있습니다. 이게 hydrofoil 제어에 핵심입니다.
+[이 발상이 왜 영리한가?]
+파도는 원래 물리학적으로 사인파들의 합입니다 (Fourier 분해). WaveSplat은 파도의 물리적 표현 방식을 그대로 쓰기 때문에, 자연스럽게 물리 법칙과 일치합니다.</a:t>
+            </a:r>
+          </a:p>
+        </p:txBody>
+      </p:sp>
+      <p:sp>
+        <p:nvSpPr>
+          <p:cNvPr id="4" name="Slide Number Placeholder 3"/>
+          <p:cNvSpPr>
+            <a:spLocks noGrp="1"/>
+          </p:cNvSpPr>
+          <p:nvPr>
+            <p:ph type="sldNum" idx="5" sz="quarter"/>
+          </p:nvPr>
+        </p:nvSpPr>
+        <p:spPr/>
+      </p:sp>
+    </p:spTree>
+  </p:cSld>
+  <p:clrMapOvr>
+    <a:masterClrMapping/>
+  </p:clrMapOvr>
+</p:notes>
+</file>
+
+<file path=ppt/notesSlides/notesSlide8.xml><?xml version="1.0" encoding="utf-8"?>
+<p:notes xmlns:a="http://schemas.openxmlformats.org/drawingml/2006/main" xmlns:p="http://schemas.openxmlformats.org/presentationml/2006/main" xmlns:r="http://schemas.openxmlformats.org/officeDocument/2006/relationships">
+  <p:cSld>
+    <p:spTree>
+      <p:nvGrpSpPr>
+        <p:cNvPr id="1" name=""/>
+        <p:cNvGrpSpPr/>
+        <p:nvPr/>
+      </p:nvGrpSpPr>
+      <p:grpSpPr>
+        <a:xfrm>
+          <a:off x="0" y="0"/>
+          <a:ext cx="0" cy="0"/>
+          <a:chOff x="0" y="0"/>
+          <a:chExt cx="0" cy="0"/>
+        </a:xfrm>
+      </p:grpSpPr>
+      <p:sp>
+        <p:nvSpPr>
+          <p:cNvPr id="2" name="Slide Image Placeholder 1"/>
+          <p:cNvSpPr>
+            <a:spLocks noGrp="1"/>
+          </p:cNvSpPr>
+          <p:nvPr>
+            <p:ph type="sldImg" idx="2"/>
+          </p:nvPr>
+        </p:nvSpPr>
+        <p:spPr/>
+      </p:sp>
+      <p:sp>
+        <p:nvSpPr>
+          <p:cNvPr id="3" name="Notes Placeholder 2"/>
+          <p:cNvSpPr>
+            <a:spLocks noGrp="1"/>
+          </p:cNvSpPr>
+          <p:nvPr>
+            <p:ph type="body" idx="3" sz="quarter"/>
+          </p:nvPr>
+        </p:nvSpPr>
+        <p:spPr/>
+        <p:txBody>
+          <a:bodyPr/>
+          <a:lstStyle/>
+          <a:p>
+            <a:r>
+              <a:t>[핵심 수식 — z(x,y,t) = Σᵢ wᵢ·cos(kx,ᵢ·x + ky,ᵢ·y − ωᵢt + φᵢ)]
+이 수식이 무슨 뜻인지 단계별로 설명합니다.
+z(x,y,t): 위치 (x,y)에서 시각 t에서의 수면 높이 (m)
+Σᵢ: N개의 파도 성분을 더한다는 뜻 (∑ = 합계)
+각 성분 wᵢ·cos(kx,ᵢ·x + ky,ᵢ·y − ωᵢt + φᵢ):
+   - wᵢ: 이 파도 성분의 진폭 (얼마나 높은 파도인가)
+   - kx, ky: 파도가 어느 방향으로 진행하는가 (동쪽? 북동쪽?)
+   - ωᵢ: 파도가 얼마나 빨리 진동하는가 (진동수)
+   - φᵢ: 파도의 현재 위상 (지금 파봉이 어디에 있나)
+   - cos(): 파도 모양이 코사인 곡선이라는 것 (올라갔다 내려갔다)
+비유: FM 라디오 신호가 여러 주파수의 합인 것처럼, 바다 파도도 여러 파도 성분의 합입니다. WaveSplat은 이 성분들을 역으로 찾아냅니다.
+[6가지 혁신 포인트 쉽게 설명]
+❶ Grid-free: 격자 없이 어느 위치든 직접 계산. 비유: 방정식으로 직접 계산 vs 격자 표에서 찾기.
+❷ Dispersion 하드 제약: ω = √(g|k|·tanh(|k|d))
+   파도의 속도(ω)가 파장(k)과 수심(d)에 의해 물리적으로 결정된다는 법칙.
+   이걸 "강제"하면: 추정된 파도가 반드시 진짜 중력파여야 함. 파장 5개 파라미터(kx,ky,ω,w,φ)→4개(kx,ky,w,φ)로 줄어듦.
+   효과: 5초 후 예측이 안정적. (강제 안 하면: 현재는 맞아도 1초 후 폭발적으로 틀어짐)
+❸ Adaptive N: 단순한 바다는 파도 성분 2개, 복잡한 바다는 21개까지 자동으로 조절.
+   비유: 단순한 그림은 붓터치 2번, 복잡한 그림은 21번.
+❹ Geometry-aware confidence: 레이저가 비스듬히 맞은 점은 오차가 크니 덜 믿음. 멀리서 온 점도 덜 믿음.
+❺ 5가지 지표를 미리 정해서 실험: cherry-pick(좋은 결과만 골라 보여주기) 방지.
+❻ 비교 대상(ETKF)을 24가지 설정으로 최적화한 후 비교: 공정한 비교.</a:t>
+            </a:r>
+          </a:p>
+        </p:txBody>
+      </p:sp>
+      <p:sp>
+        <p:nvSpPr>
+          <p:cNvPr id="4" name="Slide Number Placeholder 3"/>
+          <p:cNvSpPr>
+            <a:spLocks noGrp="1"/>
+          </p:cNvSpPr>
+          <p:nvPr>
+            <p:ph type="sldNum" idx="5" sz="quarter"/>
+          </p:nvPr>
+        </p:nvSpPr>
+        <p:spPr/>
+      </p:sp>
+    </p:spTree>
+  </p:cSld>
+  <p:clrMapOvr>
+    <a:masterClrMapping/>
+  </p:clrMapOvr>
+</p:notes>
+</file>
+
+<file path=ppt/notesSlides/notesSlide9.xml><?xml version="1.0" encoding="utf-8"?>
+<p:notes xmlns:a="http://schemas.openxmlformats.org/drawingml/2006/main" xmlns:p="http://schemas.openxmlformats.org/presentationml/2006/main" xmlns:r="http://schemas.openxmlformats.org/officeDocument/2006/relationships">
+  <p:cSld>
+    <p:spTree>
+      <p:nvGrpSpPr>
+        <p:cNvPr id="1" name=""/>
+        <p:cNvGrpSpPr/>
+        <p:nvPr/>
+      </p:nvGrpSpPr>
+      <p:grpSpPr>
+        <a:xfrm>
+          <a:off x="0" y="0"/>
+          <a:ext cx="0" cy="0"/>
+          <a:chOff x="0" y="0"/>
+          <a:chExt cx="0" cy="0"/>
+        </a:xfrm>
+      </p:grpSpPr>
+      <p:sp>
+        <p:nvSpPr>
+          <p:cNvPr id="2" name="Slide Image Placeholder 1"/>
+          <p:cNvSpPr>
+            <a:spLocks noGrp="1"/>
+          </p:cNvSpPr>
+          <p:nvPr>
+            <p:ph type="sldImg" idx="2"/>
+          </p:nvPr>
+        </p:nvSpPr>
+        <p:spPr/>
+      </p:sp>
+      <p:sp>
+        <p:nvSpPr>
+          <p:cNvPr id="3" name="Notes Placeholder 2"/>
+          <p:cNvSpPr>
+            <a:spLocks noGrp="1"/>
+          </p:cNvSpPr>
+          <p:nvPr>
+            <p:ph type="body" idx="3" sz="quarter"/>
+          </p:nvPr>
+        </p:nvSpPr>
+        <p:spPr/>
+        <p:txBody>
+          <a:bodyPr/>
+          <a:lstStyle/>
+          <a:p>
+            <a:r>
+              <a:t>[Forward Model 설명 — "파도 모델"]
+z(x,y,t) = Σᵢ wᵢ cos(kx,ᵢx + ky,ᵢy − ωᵢt + φᵢ)
+하드 제약: ωᵢ = √(g · |kᵢ| · tanh(|kᵢ| · d))
+자유 파라미터: {wᵢ, kx,ᵢ, ky,ᵢ, φᵢ} → 4N개
+"하드 제약"이란?: ω(각주파수)는 k(파수)에서 자동으로 계산됩니다. 따로 추정할 필요가 없습니다.
+→ 이것이 핵심입니다. 물리 법칙이 파라미터 하나를 "공짜"로 결정해주는 셈입니다.
+→ 그 결과 파도 성분 N개를 표현하는 데 5N개 대신 4N개만 씁니다.
+왜 ω를 자유롭게 두면 안 되는가?
+→ 컴퓨터가 "현재 데이터에만 맞추려고" ω를 이상한 값으로 최적화합니다.
+→ 현재 순간은 오차가 작지만, 1초 후에는 위상이 완전히 어긋납니다.
+→ (Ablation 슬라이드에서 이것을 직접 확인합니다.)
+[Observation Model 설명 — "어떤 관측점을 얼마나 믿을 것인가"]
+cⱼ = cos(θⱼ) / (dⱼ / d_ref)
+θⱼ: 레이저가 수면에 닿는 각도 (90도에 가까울수록 정확)
+dⱼ: 레이저 거리 (가까울수록 정확)
+d_ref = 125m: 기준 거리
+비유: 사람이 눈 앞 1m에 있는 것은 잘 보이고, 100m 떨어진 것은 잘 안 보이는 것처럼, 가까운 관측점은 더 믿고 먼 관측점은 덜 믿습니다.
+손실 함수 L: 추정값과 실제 관측값의 차이를 cⱼ로 가중 평균낸 것. λ₁은 파도 성분 수를 줄이는 페널티, λs는 부드럽게 만드는 페널티.</a:t>
+            </a:r>
+          </a:p>
+        </p:txBody>
+      </p:sp>
+      <p:sp>
+        <p:nvSpPr>
+          <p:cNvPr id="4" name="Slide Number Placeholder 3"/>
+          <p:cNvSpPr>
+            <a:spLocks noGrp="1"/>
+          </p:cNvSpPr>
+          <p:nvPr>
+            <p:ph type="sldNum" idx="5" sz="quarter"/>
+          </p:nvPr>
+        </p:nvSpPr>
+        <p:spPr/>
+      </p:sp>
+    </p:spTree>
+  </p:cSld>
+  <p:clrMapOvr>
+    <a:masterClrMapping/>
+  </p:clrMapOvr>
+</p:notes>
 </file>
 
 <file path=ppt/slideLayouts/slideLayout1.xml><?xml version="1.0" encoding="utf-8"?>

--- a/wavesplat/docs/labmeeting_wavesplat.pptx
+++ b/wavesplat/docs/labmeeting_wavesplat.pptx
@@ -960,13 +960,23 @@
           <a:lstStyle/>
           <a:p>
             <a:r>
-              <a:t>[발표 시작 전 1분 요약 — 이 연구가 뭔지 한 줄로]
-"배 위에 달린 레이저 센서(LiDAR)가 앞에 오는 파도를 측정합니다. 그런데 그 데이터가 너무 드문드문(sparse)해서 보통 방법으로는 파도 모양을 제대로 복원하기 어렵습니다. WaveSplat은 파도를 '여러 개의 규칙적인 사인파의 합'으로 표현하고, 물리 법칙(분산관계)을 수식에 강제로 집어넣어서, 적은 데이터로도 정확하게 파도 전체 모양을 알아냅니다."
-[비전문가에게 왜 이게 중요한지 설명하는 방법]
-- 하이드로포일 선박(물 위를 나는 배)이 파도를 미리 알면, 날개(foil)를 미리 조종해서 충격을 없앨 수 있습니다. 파도가 오기 0.1~0.3초 전에 대응하는 거예요.
-- 일반 승용차에 비유하면: 전방 카메라로 과속방지턱을 미리 보고 서스펜션을 미리 올리는 것과 같습니다.
-[WaveSplat = Wave + Splat의 의미]
-- "Splat"은 3D Gaussian Splatting (3DGS)에서 온 단어입니다. 컴퓨터 그래픽스에서 3D 장면을 '가우시안 덩어리들의 합'으로 표현하는 기법인데, 이 아이디어를 해양파에 적용했습니다.</a:t>
+              <a:t>━━━ 이 연구를 아주 쉽게 한 문장으로 ━━━
+"배 앞에 붙은 레이저 센서로 파도를 감지해서, 그 정보로 하이드로포일(날개 달린 배)을 미리 조종해 흔들림을 줄이는 기술입니다."
+━━━ 발표 전 청중에게 이렇게 시작하면 좋습니다 ━━━
+"혹시 자동차 앞유리에 빗물 감지 센서가 붙어 있어서, 비가 오면 자동으로 와이퍼가 켜지는 것 보신 적 있으신가요? 이것과 비슷한 발상입니다. 파도를 '미리' 감지해서, 배가 흔들리기 전에 먼저 대비하는 겁니다."
+━━━ WaveSplat이라는 이름은 어디서 왔나요? ━━━
+Wave = 파도
+Splat = 2023년 컴퓨터 그래픽스 분야에서 나온 '3D Gaussian Splatting'이라는 기술 이름에서 따왔습니다.
+3D Gaussian Splatting이 뭔지 간단히 설명하면:
+  → 3D 사진을 찍을 때, 기존에는 공간을 촘촘한 격자(바둑판처럼)로 나눠서 표현했습니다.
+  → 새 기술은 그 대신 '붓터치' 수천 개를 겹쳐서 표현합니다. 훨씬 효율적이고 빠릅니다.
+  → WaveSplat은 이 발상을 파도에 적용한 것입니다.
+━━━ 핵심 메시지 (발표 내내 이 맥락에서 이해하면 됩니다) ━━━
+  문제: 배 위 레이저 센서가 찍는 파도 데이터가 너무 드문드문합니다.
+        250m×200m 넓이(축구장 7개 크기)에서 점 50개. 이걸로 파도 전체 모양을 알아야 합니다.
+  기존 방법: 점들 사이를 직선으로 이어 메꿉니다 (격자 보간). 파도 물리학을 전혀 모릅니다.
+  WaveSplat: "파도는 원래 여러 사인파의 합"이라는 물리 법칙을 이용해서,
+              적은 데이터로도 전체 파도 모양을 훨씬 정확하게 복원합니다.</a:t>
             </a:r>
           </a:p>
         </p:txBody>
@@ -1036,27 +1046,41 @@
           <a:lstStyle/>
           <a:p>
             <a:r>
-              <a:t>[2단계 파이프라인이란?]
-WaveSplat은 두 단계로 작동합니다. 처음 한 번 초기화하고, 이후에는 빠르게 추적합니다.
-[Phase 1: 초기화 (약 500ms, 처음 한 번만)]
-① Beamforming: "파도가 어느 방향에서 오는가?"를 찾습니다.
-   비유: 소리의 방향을 찾는 것처럼, 레이저 데이터에서 파도의 진행 방향을 찾습니다.
-   81×81 방향 격자 = 6561가지 방향 중 에너지가 센 방향을 찾습니다.
-② Greedy peak extraction: 찾은 방향 중 에너지가 큰 N개를 선택합니다.
-③ Coarse-to-fine Adam: 거칠게 맞추고 점점 세밀하게 다듬습니다.
-   N=3 → 8 → 15로 성분 수를 늘리면서 최적화합니다.
-   Adam = 딥러닝에서 쓰는 최적화 방법. 경사하강법의 개선판.
-④ Energy pruning: 에너지가 작은 성분은 제거합니다. (전체 에너지의 90%만 남기고 나머지 제거)
-⑤ Residual growth: 아직 설명 못 한 파도가 있으면 성분을 추가합니다.
-[Phase 2: 추적 (약 13ms/프레임, 초당 10번)]
-Predict: φᵢ ← φᵢ + ωᵢ·Δt
-   파도 위상을 물리 법칙으로 한 스텝 앞으로 진행합니다.
-   비유: "지금 파봉이 여기 있으면, 0.1초 후엔 저기 있겠다"를 계산.
-Update: 새 관측 데이터로 추정값을 수정합니다. (Adam 10 스텝만)
-   kx, ky는 고정 (방향은 초기화에서 이미 잘 잡았으므로 건드리지 않음)
-   wᵢ, φᵢ만 업데이트 (진폭과 위상만 미세 조정)
-[왜 k를 고정하는가?]
-방향(kx, ky)은 여러 프레임을 쌓아야 정확히 추정됩니다. 단일 프레임에서는 데이터가 너무 적어서 신뢰할 수 없습니다. 한 번 잘 추정한 방향은 바다가 급변하지 않는 한 유지됩니다. k를 고정하면 200 grad steps → 10 steps로 줄어서 13ms가 가능합니다.</a:t>
+              <a:t>━━━ 2단계 파이프라인 — 요리 비유로 이해하기 ━━━
+WaveSplat은 마치 요리사가 처음에 재료를 준비하고, 이후 계속 조리하는 것과 비슷합니다.
+━━━ Phase 1: 초기화 (약 500ms, 처음 딱 한 번) ━━━
+레이저 데이터 10프레임(약 1초치)을 모읍니다.
+① Beamforming (파도 방향 찾기):
+  비유: 눈을 감고 소리가 어느 방향에서 오는지 귀로 찾는 것.
+  81×81 = 6,561가지 방향을 모두 시험해서 파도 에너지가 가장 센 방향을 찾습니다.
+  이것이 kx, ky (파도 방향) 추정의 기초입니다.
+② Peak extraction (중요한 방향 선택):
+  6,561가지 중 에너지가 큰 것 N개를 선택합니다.
+  (마치 음악에서 주요 악기의 주파수를 찾는 것)
+③ Coarse-to-fine 최적화:
+  N=3개로 시작 → 8개 → 15개로 늘리면서 점점 정밀하게 맞춥니다.
+  비유: 사진 초점을 맞출 때 처음엔 대략, 점점 세밀하게 조정하는 것과 같습니다.
+  Adam: 딥러닝에서 쓰는 최적화 알고리즘. 경사를 따라 내려가서 최소값을 찾습니다.
+④ Energy pruning (불필요한 성분 제거):
+  에너지가 작은 파도 성분은 제거합니다.
+  비유: 노래에서 거의 안 들리는 악기는 무시하는 것.
+⑤ Residual growth (놓친 파도 추가):
+  제거 후에도 "아직 설명 못 한 파도"가 있으면 성분을 추가합니다.
+  비유: 퍼즐을 맞추다가 남은 조각이 있으면 다시 시도하는 것.
+━━━ Phase 2: 추적 (약 13ms, 초당 10번 반복) ━━━
+Phase 1에서 파도의 방향(kx, ky)을 알았습니다. 이제는 빠르게 갱신합니다.
+Predict (예측):
+  φᵢ ← φᵢ + ωᵢ·Δt
+  "0.1초가 지났으니, 파봉이 이만큼 앞으로 이동했을 것이다"를 계산합니다.
+  ω가 물리 법칙으로 정확하므로, 이 계산이 정확합니다.
+Update (수정):
+  새 LiDAR 데이터로 오차를 수정합니다. (Adam 10단계만, 빠름)
+  kx, ky는 고정 (이미 잘 알고 있으므로).
+  wᵢ, φᵢ만 미세 조정 (진폭과 위상 조금씩 수정).
+왜 kx, ky는 고정하나?:
+  파도 방향은 바다가 급변하지 않는 한 유지됩니다.
+  단일 프레임(점 50개)으로 방향을 다시 추정하면 오히려 틀립니다.
+  고정하면: 200단계 최적화 → 10단계로 줄어들어 13ms에 가능.</a:t>
             </a:r>
           </a:p>
         </p:txBody>
@@ -1126,24 +1150,32 @@
           <a:lstStyle/>
           <a:p>
             <a:r>
-              <a:t>[전체 파이프라인 그림 읽는 법]
-그림을 보면서 따라가면 됩니다.
-왼쪽 (Phase 1, 처음 한 번):
-1. LiDAR 데이터 10프레임 모으기
-2. Beamforming: 파도 방향 찾기
-3. Coarse-to-fine 최적화: 점점 정밀하게
-4. Energy pruning: 불필요한 성분 제거
-5. Residual check: 아직 설명 못 한 파도 있으면 다시 추가
-오른쪽 (Phase 2, 초당 10번):
-1. 물리 법칙으로 위상 예측 (φ += ω·Δt)
-2. 새 LiDAR 데이터로 수정 (Adam 10 steps)
-3. 출력: 현재 파도장 + 미래 예측
-Phase 1→2 전환:
-kx, ky는 Phase 1에서 결정되어 Phase 2로 "동결"됩니다.
-w, φ만 Phase 2에서 계속 업데이트됩니다.
-[시간 척도 직관]
-Phase 1: ~500ms = 반 초. 발표 시작할 때 한 번만 함.
-Phase 2: ~13ms = 0.013초. 눈 깜짝하기 전에 끝남. 초당 70번 가능하지만 10번만 씁니다.</a:t>
+              <a:t>━━━ 전체 흐름도 — 화살표를 따라가면 됩니다 ━━━
+이 그림은 WaveSplat의 전체 동작을 한눈에 보여줍니다.
+━━━ 그림 왼쪽 (Phase 1, 처음 한 번) ━━━
+  [LiDAR 데이터 10프레임 수집]
+       ↓
+  [Beamforming: 파도 방향 찾기]
+       ↓
+  [Coarse-to-fine Adam 최적화]
+       ↓
+  [Energy pruning: 불필요 성분 제거]
+       ↓
+  [잔류 파도 있으면 → 다시 Beamforming (grow loop)]
+       ↓
+  [결과: N개 파도 성분, kx/ky 확정]
+━━━ 그림 오른쪽 (Phase 2, 초당 10번 반복) ━━━
+  [물리 법칙으로 위상 예측: φ += ω·Δt]
+       ↓
+  [새 LiDAR 데이터로 수정 (Adam 10단계)]
+       ↓
+  [출력: 현재 파도장 + 미래 예측]
+Phase 1 → Phase 2 연결:
+  kx, ky는 "동결"됩니다. w, φ만 계속 업데이트됩니다.
+━━━ 시간 감각 ━━━
+Phase 1: 약 0.5초. 커피 한 모금 마시는 사이.
+Phase 2: 약 0.013초. 눈 깜짝하는 것의 약 1/5. 초당 70회 가능 (10회만 씀).
+발표 중에 이 그림을 보일 때: "왼쪽은 처음 준비, 오른쪽은 반복 작업"이라고 설명하면 됩니다.</a:t>
             </a:r>
           </a:p>
         </p:txBody>
@@ -1213,22 +1245,31 @@
           <a:lstStyle/>
           <a:p>
             <a:r>
-              <a:t>[왜 시뮬레이터가 필요한가?]
+              <a:t>━━━ 왜 시뮬레이터가 필요한가? ━━━
+실험에서 "정답(Ground Truth)"을 알아야 비교할 수 있습니다.
 실제 바다에서 실험하면:
-- 비교할 "정답(Ground Truth)" 파도를 알 수 없습니다.
-- 날씨와 바다 상태를 마음대로 조절할 수 없습니다.
-- 비용이 어마어마합니다.
-시뮬레이터에서는 우리가 파도를 직접 만들기 때문에 "정답"을 알고, WaveSplat 결과와 비교할 수 있습니다.
-[JONSWAP + Gerstner 파도 모델]
-JONSWAP: 북해에서 측정된 실제 바다 스펙트럼을 수식화한 것. "어떤 주파수에 에너지가 얼마나 있는가"를 정합니다.
-Gerstner 파도: 단순한 사인파 대신 조금 더 현실적인 파도 모양. 파봉(꼭대기)이 뾰족하고 파곡(골짜기)이 넓습니다. 실제 바다 파도처럼 보입니다.
-Q 제약: 파도가 너무 날카로우면(steep) 실제로 부서집니다. Q=1이 되면 파도가 뒤집히는 임계점. 이를 넘지 않도록 제한합니다.
-[검증 (39개 단위 테스트)]
-프로그램이 물리적으로 올바른지 자동으로 확인합니다.
-- 분산관계 오차 &lt; 0.000001 (극도로 정밀)
-- 단일 파도 성분 오차 &lt; 0.0000000001 m
-- 실제 파고와 시뮬레이션 파고 일치 오차 &lt; 0.5%
-이것이 중요한 이유: 시뮬레이션이 틀리면 실험 결과 전체가 의미 없어집니다. 철저하게 검증했습니다.</a:t>
+  - 진짜 파도 모양을 알 수 없습니다. (파도를 완벽하게 측정하는 장비가 없음)
+  - 날씨와 파도를 우리 마음대로 정할 수 없습니다.
+  - 배를 빌리고, 사람을 태우고, 장비를 달고 → 수천만 원 이상 비용.
+시뮬레이터를 쓰면:
+  - 파도를 우리가 직접 만들므로 "정답"을 정확히 압니다.
+  - BF2, BF3, BF4, BF5 등 다양한 조건을 마음대로 설정합니다.
+  - 100번 반복 실험도 버튼 하나로 가능합니다.
+  - 비용: 컴퓨터 전기세만.
+━━━ JONSWAP 파도 모델 ━━━
+바다 파도는 무작위처럼 보이지만, 통계적으로 규칙적인 패턴이 있습니다.
+JONSWAP = 1960~70년대 북해에서 대규모 관측 실험으로 만든 파도 스펙트럼 공식.
+"어느 주파수에 파도 에너지가 얼마나 있는가"를 바람 속도와 거리로 계산합니다.
+전 세계 해양 공학에서 표준으로 쓰는 모델입니다.
+━━━ Gerstner 파도 ━━━
+가장 기본적인 파도 = 완벽한 사인 곡선. 그런데 실제 파도는 파봉이 뾰족하고 파곡이 넓습니다.
+Gerstner 모델 = 조금 더 현실적인 파도 모양. (2차 근사)
+비교: 정현파(sine) vs Gerstner
+실제 파도처럼 보이도록 해줍니다. (완전히 정확하진 않지만, 1차 근사보다 훨씬 나음)
+━━━ 검증이 왜 중요한가? ━━━
+시뮬레이터 자체가 틀리면 → 실험 전체가 의미 없습니다.
+그래서 39개의 자동 테스트로 물리적 정확성을 검증합니다.
+분산관계 오차 &lt; 0.000001 (매우 정밀), 파도 형상 오차 &lt; 0.0000000001m.</a:t>
             </a:r>
           </a:p>
         </p:txBody>
@@ -1298,26 +1339,32 @@
           <a:lstStyle/>
           <a:p>
             <a:r>
-              <a:t>[LiDAR 시뮬레이터 — 어떻게 실제와 비슷하게 만드는가?]
-실제 LiDAR 센서 (Falcon K1) 스펙을 그대로 입력합니다:
-- 레이저 파장: 1550nm (눈에 안 보이는 적외선)
-- 채널 수: 152개 (레이저 빔이 152줄)
-- 스캔 속도: 초당 10번
-- 측정 거리: 1.5m ~ 250m
-- 거리 오차: ±2cm
-[Raydrop 모델 — 왜 데이터가 드문드문 생기는가?]
-레이저가 수면에 맞을 때 신호가 돌아오지 않는 두 가지 원인:
-1. Diffuse (균일) 반사: 수면이 항상 일정 확률로 신호를 돌려보냄.
-   공식: p = R_Fresnel(θ)·cos(θ)/d²
-   - R_Fresnel: 수면의 반사율 (각도에 따라 다름)
-   - cos(θ): 레이저가 수직에 가까울수록 잘 맞음
-   - /d²: 멀수록 신호 약해짐
-2. Specular (경면) 반사: 수면이 거울처럼 레이저를 특정 방향으로만 반사.
-   레이저가 정확히 반대 방향으로 돌아와야 감지됨. 경사진 수면에서 자주 발생.
-[왜 두 모델 모두 테스트?]
-실제 바다가 어느 메커니즘으로 더 많이 작동하는지 모릅니다. WaveSplat이 두 모델 모두에서 잘 작동해야 실용적입니다. (슬라이드 19 robustness에서 확인)
-[Ray-Mesh intersection]
-레이저가 파도 표면의 어느 삼각형에 맞는지 계산하는 방법 (Möller-Trumbore 알고리즘). 100% 정확하게 계산됩니다.</a:t>
+              <a:t>━━━ LiDAR 시뮬레이터 — 실제 센서를 컴퓨터로 재현 ━━━
+실제 배에 달 LiDAR 센서(Falcon K1)의 스펙을 그대로 넣어서 시뮬레이터를 만들었습니다.
+실제 센서와 동일한 방식으로 레이저 점들을 생성합니다.
+━━━ Falcon K1 센서 스펙 ━━━
+  레이저 파장: 1550nm → 눈에 안 보이는 적외선 (안전합니다)
+  채널 수: 152개 → 레이저 빔이 152줄로 나뉘어 쏩니다
+  스캔 속도: 초당 10번 → 0.1초마다 갱신
+  측정 거리: 1.5m ~ 250m → 250m 앞까지 봅니다
+  거리 오차: ±2cm → 매우 정밀합니다
+이 센서가 실제 Avikus NEUBOAT(실선 시험 선박)에 달린 것과 동일합니다.
+→ 시뮬레이션 결과가 실제에도 적용될 가능성이 높습니다.
+━━━ Raydrop이란? (왜 데이터가 드문드문 생기는지) ━━━
+레이저가 수면에 쏴도 신호가 돌아오지 않는 두 가지 경우를 시뮬레이션합니다.
+경우 1: Uniform (균일) 반사
+  레이저가 항상 일정 확률로 신호를 돌려보냅니다.
+  멀수록, 각도가 비스듬할수록 돌아올 확률이 낮습니다.
+  공식: p = Fresnel 반사율 × cos(각도) / 거리²
+  (Fresnel 반사율 = 빛이 매질 경계에서 반사되는 비율. 굴절 원리와 같음)
+경우 2: Specular (경면) 반사
+  수면이 거울처럼 레이저를 특정 방향으로만 반사합니다.
+  레이저가 정확히 반대 방향(레이저 발사 방향)으로 돌아와야만 감지됩니다.
+  파도가 특정 각도로 기울었을 때만 신호가 잡힙니다.
+왜 두 가지 모두 테스트하나?:
+  실제 바다에서 어느 메커니즘이 지배적인지 정확히 모릅니다.
+  두 경우 모두에서 WaveSplat이 잘 작동함을 보여야 실용적입니다.
+  (슬라이드 19에서 두 경우 모두 WaveSplat이 20/20으로 ETKF보다 우수함을 확인합니다.)</a:t>
             </a:r>
           </a:p>
         </p:txBody>
@@ -1387,28 +1434,35 @@
           <a:lstStyle/>
           <a:p>
             <a:r>
-              <a:t>[실험 설계 — 어떻게 공정하게 비교했나?]
-[100개 에피소드 구성]
-BF2, BF3, BF4, BF5: 파도 강도 4단계
-N=1, 2, 5, 15, 30: 파도 성분 수 (단순 → 복잡)
-seed × 5: 같은 조건이지만 파도의 초기 위상을 다르게 (운의 영향 확인)
-raydrop × 2: uniform vs specular 두 가지 LiDAR 모델
-왜 이렇게 설계?
-- 단순한 바다에서만 좋으면 의미 없습니다. 다양한 조건 모두에서 검증해야 합니다.
-- "seed × 5"는 같은 설정에서 운이 좋은 경우/나쁜 경우를 모두 확인하기 위함입니다.
-- 이 100개를 미리 결정하고(pre-specified) 실험 후 일부만 골라 보여주는 cherry-pick을 원천 차단했습니다.
-[비교 대상 (Baseline)]
-ETKF: 24가지 설정 조합으로 최적화한 뒤 가장 좋은 설정으로 비교
-GPR-1: RBF 커널, 단일 프레임
-LETKF: ETKF에 공간 localization 추가 (강화 버전)
-GPR-disp: physics를 커널에 추가한 강화 GPR
-왜 baseline을 최적화해서 비교?
-공정한 비교를 위해서입니다. "WaveSplat vs 대충 만든 ETKF"가 아니라 "WaveSplat vs 최선을 다한 ETKF"로 비교해야 합니다.
-[5-Metric Panel]
-왜 5개 지표를 씁니까?
-단 하나의 지표를 최소화하면 다른 측면에서 속임수가 가능합니다.
-예: nRMSE만 보면, 항상 0을 출력해도 nRMSE가 크지 않을 수 있음 (Hs로 나누기 때문).
-SS&gt;0이 가장 기본적인 "유용성" 기준입니다. RMSE_unobs는 물리 법칙이 작동하는 직접 증거입니다.</a:t>
+              <a:t>━━━ 실험 설계 — 어떻게 공정하게 실험했나? ━━━
+━━━ 100개 에피소드 구성 ━━━
+실험의 "다양성"을 확보하기 위해 여러 조건을 조합했습니다.
+Beaufort × 성분 수 × seed × raydrop 조합으로 100가지 다른 바다 조건을 만들었습니다.
+Beaufort 4가지: 잔잔한 → 거친 바다
+성분 수 5가지: N=1(매우 단순) → N=30(매우 복잡)
+  N=1: 파도가 딱 한 방향으로만 옵니다. 가장 단순.
+  N=30: 여러 방향에서 다양한 파장의 파도가 동시에 옵니다. 가장 복잡.
+seed 5가지: 같은 조건이지만 파도 초기 위상이 다릅니다.
+  → "운이 좋은 경우"와 "운이 나쁜 경우"를 모두 포함.
+raydrop 2가지: uniform vs specular → 두 LiDAR 모델 모두 테스트.
+가장 중요한 것: 100개를 실험 전에 미리 정했습니다.
+  → "결과가 좋게 나온 것만 골라" 보여주는 편향(cherry-pick)을 원천 차단합니다.
+  → 과학 연구의 신뢰성을 위한 핵심 절차입니다.
+━━━ 비교 대상 (Baseline) — 왜 최적화해서 비교하나? ━━━
+공정한 비교를 위해 기존 방법들을 최대한 좋게 만들어서 비교합니다.
+"대충 만든 ETKF"와 비교하면 의미가 없습니다.
+ETKF를 24가지 설정으로 실험:
+  앙상블 크기(50 vs 100 vs 200) × 격자 해상도(2m vs 4m) × 관측 노이즈(0.02 vs 0.05) × 범위(25m vs 50m)
+  = 3×2×2×2 = 24가지 모든 조합을 실험해서 가장 좋은 것과 비교합니다.
+━━━ 5가지 평가 지표 — 왜 하나가 아닌 5개? ━━━
+단일 지표의 함정:
+  nRMSE 하나만 보면 → "항상 0을 출력"해도 어느 정도 점수가 나옵니다.
+  (파도 높이로 나누면 zero predictor도 나쁘지 않아 보임)
+SS(Skill Score) &gt; 0: "아무것도 예측 안 하는 것보다 나은가?"
+  이 가장 기본적인 기준도 ETKF와 GPR은 통과 못합니다.
+RMSE_unobs: 관측 점이 없는 곳(10m 이상 떨어진 곳)에서의 오차.
+  이것이 물리 법칙 활용의 직접 증거입니다.
+  "데이터가 없는 곳도 물리 법칙으로 맞혔나?" → 격자 보간은 이것이 불가합니다.</a:t>
             </a:r>
           </a:p>
         </p:txBody>
@@ -1478,31 +1532,36 @@
           <a:lstStyle/>
           <a:p>
             <a:r>
-              <a:t>[결과 표 읽는 법]
-방법        nRMSE↓  VR→1   ρ↑     SS↑      time
-WaveSplat   0.223   0.660  0.446  +0.034   13.4ms  ← 유일하게 SS&gt;0
-ETKF        0.319   0.898  0.109  −0.702   132ms
-GPR         0.261   0.065  0.193  −0.141   &gt;200ms
-[각 숫자의 의미]
-nRMSE = 0.223:
-파도 높이(Hs)의 22.3% 오차. Hs=1.5m이면 평균 오차 ≈ 0.33m.
-WaveSplat이 ETKF보다 30% 낮습니다.
-VR = 0.660:
-실제 파도 진폭의 66%를 재현. 34%는 과소추정됩니다.
-이것이 WaveSplat의 알려진 한계입니다. 솔직하게 공개합니다.
-ETKF VR=0.898은 진폭은 잘 재현하지만, ρ=0.109로 위치(위상)가 틀렸습니다.
-GPR VR=0.065는 거의 평탄 (의미 없는 추정).
-Pearson ρ:
-ρ=0.446이면 추정 파도와 실제 파도의 위상이 어느 정도 일치합니다.
-ETKF ρ=0.109는 거의 무관계 — 진폭은 맞는데 파봉 위치가 틀린 것입니다.
-SS = +0.034:
-"아무것도 예측 안 하는 것(ẑ=0)보다 3.4% 나음." 작아 보이지만, 유일하게 양수입니다.
-ETKF SS=−0.702는 오히려 zero predictor보다 못합니다.
-[직관적으로 이해하기]
-비유: 내일 날씨 예측에서
-- GPR = "항상 평균 기온 출력" (아무런 예측 없음)
-- ETKF = "온도는 맞는데 비가 언제 오는지 틀림"
-- WaveSplat = "온도와 비 시간 모두 대략 맞음, 단 온도가 약간 낮게 나옴"</a:t>
+              <a:t>━━━ 결과 표 완전 해설 ━━━
+표를 왼쪽부터 읽겠습니다.
+방법       nRMSE↓   VR→1    ρ↑     SS↑       time
+WaveSplat  0.223    0.660   0.446  +0.034   13.4ms
+ETKF       0.319    0.898   0.109  −0.702  132.6ms
+GPR        0.261    0.065   0.193  −0.141  &gt;200ms
+━━━ nRMSE — 오차가 얼마나 작은가? ━━━
+WaveSplat 0.223 vs ETKF 0.319 → WaveSplat이 30% 낮습니다.
+구체적으로: Hs=1.5m 바다에서 WS 오차 ≈ 33cm, ETKF 오차 ≈ 48cm.
+━━━ VR — 파도 높이를 제대로 재현하는가? ━━━
+WaveSplat VR=0.660: 실제 파도 진폭의 66%를 재현합니다. 34%는 낮게 추정. ← WaveSplat의 한계.
+ETKF VR=0.898: 진폭은 잘 재현하는 것처럼 보입니다. 하지만...
+GPR VR=0.065: 거의 평탄. 파도가 없는 수면처럼 출력합니다.
+━━━ Pearson ρ — 파봉(파도 꼭대기) 위치가 맞는가? ━━━
+WaveSplat ρ=0.446: 어느 정도 위치가 맞습니다.
+ETKF ρ=0.109: 거의 무관계. 진폭은 맞는데 위치가 완전히 틀립니다.
+  ← 이것이 ETKF의 핵심 문제입니다. VR은 좋아 보여도 실제로는 쓸모없습니다.
+  비유: "파도 높이 1m"는 맞혔는데, "파봉이 10m 옆에 있다"고 하는 것.
+━━━ SS — 아무것도 안 하는 것보다 나은가? ━━━
+WaveSplat SS=+0.034: 유일하게 양수. "아무것도 예측 안 하는 것보다 나음"을 통과.
+ETKF SS=−0.702: 오히려 zero predictor보다 못합니다. (놀랍게도 그렇습니다)
+GPR SS=−0.141: 역시 zero predictor보다 못합니다.
+━━━ time — 처리 속도 ━━━
+WaveSplat 13.4ms → 초당 74회 가능. 10Hz로 운영.
+ETKF 132.6ms → 초당 7.5회. 10Hz 처리 시 지연이 쌓입니다.
+GPR &gt;200ms → 실시간 불가.
+속도 차이: WaveSplat이 ETKF보다 약 10배 빠릅니다.
+━━━ 한 줄 결론 ━━━
+WaveSplat만 유일하게 SS&gt;0 달성. 오차 30% 낮음. 10배 빠름.
+단, 진폭이 34% 과소추정되는 한계가 있습니다. (솔직하게 공개)</a:t>
             </a:r>
           </a:p>
         </p:txBody>
@@ -1572,23 +1631,29 @@
           <a:lstStyle/>
           <a:p>
             <a:r>
-              <a:t>[왜 12개 에피소드를 대표로 보는가?]
-100개 에피소드 전부를 보여주면 복잡합니다. 12개는 다양한 조건을 균등하게 대표합니다.
-BF2~BF5 × N∈{1,2,5,15,30}에서 균등 샘플. 미리 선택 (실험 전에 결정).
-[결과 해석]
-12/12 에피소드에서 WaveSplat이 최저 nRMSE: "모든 조건에서 최고"
-단 하나도 ETKF나 GPR이 이기지 못했습니다.
-최대 격차 8.5× (BF3 1-comp):
-단순한 사인파 1개짜리 바다에서 WaveSplat이 압도적입니다.
-왜? 단일 성분은 WaveSplat이 파라미터 4개만 추정하면 됩니다. 최적화가 매우 쉽습니다.
-ETKF는 격자 전체를 추정해야 해서 비효율적입니다.
-BF4/BF5 30-comp:
-성분이 30개인 복잡한 바다에서 격차가 줄어듭니다.
-WaveSplat도 방향이 비슷한 성분들을 구분하기 어렵습니다 (k-공간에서 겹침).
+              <a:t>━━━ 12개 에피소드별 결과 ━━━
+100개 중 12개를 대표로 보여줍니다.
+12개는 미리 정해진 것입니다. 좋은 것만 고른 게 아닙니다.
+━━━ 왜 12개인가? ━━━
+BF2~BF5 (4단계) × N=1,2,5,15,30 (5종류) = 20개 조건 중
+발표 시간상 12개를 균등하게 선택했습니다.
+━━━ 결과 해석 ━━━
+12/12 에피소드 전부 WaveSplat이 ETKF보다 nRMSE가 낮습니다.
+단 한 번도 지지 않았습니다.
+가장 큰 격차: BF3, N=1 (단순 사인파 하나)
+  WS nRMSE ≈ 0.06 vs ETKF ≈ 0.51 → 8.5배 차이
+  왜 이렇게 격차가 큰가?
+  N=1이면 WaveSplat이 파라미터 4개만 추정합니다 (w, kx, ky, φ).
+  데이터 50개로 파라미터 4개를 찾는 것 → 매우 쉬운 최적화.
+  ETKF는 격자 전체(수천 개 셀)를 동시에 추정 → 데이터 50개로는 어려운 문제.
+가장 작은 격차: BF4~BF5, N=30 (매우 복잡한 바다)
+  WS ≈ 0.32 vs ETKF ≈ 0.36 → 격차 줄어듦.
+  N=30이면 WaveSplat도 30개 파도 성분의 방향을 모두 구분해야 합니다.
+  비슷한 방향의 성분들이 겹쳐 보여 구분이 어렵습니다.
 속도:
-WS 13.4ms → 초당 74프레임 가능. 10Hz만 사용.
-ETKF 132.6ms → 초당 7.5프레임. 10Hz에서 지연 누적.
-ETKF는 최소 90ms~최대 600ms (분산이 큼) → 실시간에서 불안정.</a:t>
+  N=1~5: WS 8~15ms (매우 빠름)
+  N=30: WS 35~50ms (adaptive N 때문에 늘어남. 그래도 ETKF보다 훨씬 빠름)
+  ETKF: 90ms~600ms 사이에서 들쭉날쭉 (불안정)</a:t>
             </a:r>
           </a:p>
         </p:txBody>
@@ -1658,25 +1723,39 @@
           <a:lstStyle/>
           <a:p>
             <a:r>
-              <a:t>[왜 통계 검증이 필요한가?]
-"운 좋게 결과가 좋게 나온 것 아닌가?"를 배제하기 위해서입니다.
-100개 쌍으로 테스트하면 운의 영향이 극히 줄어듭니다.
-[Wilcoxon signed-rank test란?]
-일반 t-test는 데이터가 정규분포를 따른다고 가정합니다. 하지만 nRMSE 값들은 정규분포가 아닐 수 있습니다. Wilcoxon test는 이 가정 없이 "짝지은 차이의 부호"만 봅니다.
-쉽게: "100쌍 중에서 WaveSplat이 더 나은 경우가 우연보다 훨씬 많은가?"
-[결과 해석]
-p₁=2.2×10⁻¹⁵ (WS vs ETKF):
-0.0000000000000022의 확률로 우연. 사실상 불가능.
-= "WaveSplat이 ETKF보다 일관되게 좋다"는 것이 통계적으로 확실합니다.
-p₂=4.7×10⁻⁴ (WS vs GPR):
-0.00047의 확률로 우연. 역시 매우 낮습니다.
-Cohen's d = 1.16 (vs ETKF):
-효과 크기(effect size). 0.8 이상이면 "크다(large)"고 분류합니다.
-1.16은 매우 큰 효과. 실질적으로 의미 있는 차이입니다.
-Cohen's d = 0.42 (vs GPR):
-작은-중간 효과. 100쌍이라 통계적 유의성은 확보됩니다.
-[Holm-Bonferroni 보정이란?]
-여러 가지를 동시에 검정하면 우연히 하나가 유의하게 나올 확률이 올라갑니다. 이를 보정합니다. 보정 후에도 두 비교 모두 유의합니다.</a:t>
+              <a:t>━━━ 통계 검증 — "결과가 운이 아님"을 증명하는 방법 ━━━
+실험 결과가 좋게 나왔을 때, "우연히 좋게 나온 것 아닌가?"라는 의심을 받을 수 있습니다.
+통계 검증이 이를 수학적으로 반박합니다.
+━━━ 왜 100쌍으로 실험하나? ━━━
+1번 실험이 WaveSplat에 운 좋은 조건이었을 수 있습니다.
+100번 실험을 같은 조건으로 비교하면, 운의 영향이 거의 사라집니다.
+"100번 중 95번 이상 이기면 이건 실력"이라고 볼 수 있습니다.
+━━━ Wilcoxon signed-rank test란? ━━━
+두 방법을 100번 직접 비교합니다.
+  WS vs ETKF: 1번~100번 각각 비교 → "WS가 이긴 횟수"를 셉니다.
+  만약 우연이라면: 약 50번은 WS가 이기고, 50번은 ETKF가 이겨야 합니다.
+  실제로 WS가 거의 항상 이기면 → 우연이 아닙니다.
+왜 t-test가 아니라 Wilcoxon?:
+  t-test는 데이터가 종 모양(정규분포)이라고 가정합니다.
+  nRMSE 값들이 종 모양이 아닐 수 있습니다.
+  Wilcoxon은 이 가정 없이도 사용 가능해서 더 안전합니다.
+━━━ p값이란? ━━━
+p = "이 결과가 우연일 확률"
+p₁ = 2.2×10⁻¹⁵ (WS vs ETKF):
+  = 0.0000000000000022
+  = 1조 분의 2 수준. 사실상 0%입니다.
+  "WaveSplat이 ETKF보다 일관되게 좋다"가 통계적으로 확실합니다.
+p₂ = 4.7×10⁻⁴ (WS vs GPR):
+  = 0.00047. 10,000번 중 4.7번 우연. 역시 매우 낮습니다.
+━━━ Cohen's d (효과 크기)란? ━━━
+"통계적으로 유의미한가?" + "실질적으로 차이가 큰가?"를 함께 봐야 합니다.
+Cohen's d = 두 집단 차이 / 표준편차.
+  d &gt; 0.8 → "큰(large) 효과"
+  d = 1.16 (WS vs ETKF) → 매우 큰 효과. 실질적 차이가 큽니다.
+━━━ 보정이 왜 필요한가? ━━━
+두 가지 비교(WS vs ETKF, WS vs GPR)를 동시에 합니다.
+여러 비교를 하면 "그중 하나가 우연히 유의미하게 나올" 확률이 올라갑니다.
+Holm-Bonferroni 보정으로 이를 수정해도 두 비교 모두 유의미합니다.</a:t>
             </a:r>
           </a:p>
         </p:txBody>
@@ -1746,26 +1825,31 @@
           <a:lstStyle/>
           <a:p>
             <a:r>
-              <a:t>[Ablation이란?]
-WaveSplat의 특정 기능을 "제거했을 때" 어떻게 되는지 보는 실험입니다.
-"이 기능이 정말 필요한가?"를 직접 검증합니다.
-[A1: 분산관계 제약 없애면?]
-A1 = Ablation 1번. ω를 자유롭게 최적화. (분산관계 무시)
-즉각적인 결과:
-nRMSE가 16% 더 낮습니다. 현재 순간에는 오히려 더 정확해 보입니다!
-그런데 5초 후에는?
-Full model: nRMSE 0.219 → 5초 후 0.231 (5.5% 증가, 안정적)
-A1 model: nRMSE 0.158 → 5초 후 0.476 (3배 폭발!)
-왜 이렇게 폭발하나?
-A1은 "현재 순간에 맞추려고" ω를 물리적으로 말이 안 되는 값으로 최적화합니다.
-예: |k|=0.16 rad/m이면 물리적으로 ω=1.25 rad/s여야 하는데, A1은 ω=1.78로 추정.
-Δω=0.53 rad/s → 1초 후 위상 오차 ≈ 0.53 rad ≈ 30°
-30° 어긋나면 파봉 위치가 완전히 달라집니다.
+              <a:t>━━━ Ablation 실험 — "이 기능이 정말 필요한가?" ━━━
+WaveSplat의 특정 기능을 제거했을 때 어떻게 되는지 실험합니다.
+"있어서 좋은 것"인지 "없으면 안 되는 것"인지 확인합니다.
+━━━ A1: 분산관계 제약을 없애면? ━━━
+분산관계 제약이란: ω = √(g|k|tanh|k|d) 를 반드시 만족해야 한다는 규칙.
+이것을 제거하면: 컴퓨터가 ω를 마음대로 최적화합니다.
+즉각적인 결과: 현재 순간 nRMSE가 16% 낮습니다. 더 좋아 보입니다!
+하지만 5초 후에는?:
+  Full model (제약 있음): nRMSE 0.219 → 5초 후 0.231 (5.5% 변화, 안정적)
+  A1 (제약 없음): nRMSE 0.158 → 5초 후 0.476 (3배 폭발적 증가!)
+왜 이런 일이 생기는가?
+비유: 시계를 상상합니다.
+  "1시간 = 60분 = 3600초"라는 물리적 법칙을 강제한 시계 → 미래도 정확합니다.
+  이 법칙을 무시하고 "지금 이 순간 맞아 보이는 값"을 쓰는 시계 → 한 시간 후에는 완전히 틀립니다.
+구체적으로:
+  A1이 추정한 ω: 물리적으로 1.25 rad/s여야 하는데 1.78 rad/s로 추정.
+  1초가 지나면: 위상 오차 = (1.78−1.25) × 1 = 0.53 rad ≈ 30° 어긋남.
+  30°면 파봉이 전혀 다른 위치에 있습니다.
 결론:
-분산관계 제약이 없으면 "지금만 맞고 미래에는 쓸모없는" 추정이 됩니다.
-Hydrofoil FF에서 t+0.1~0.3초 예측이 필요하므로 분산관계 제약은 필수입니다.
-[A2: Confidence weighting 없애면?]
-nRMSE +14.5% 악화. 멀리서 오는 노이즈가 낀 관측점이 동등하게 취급되어 추정을 오염시킵니다.</a:t>
+분산관계 제약 없이는 "지금 만 좋고 미래 예측 불가"입니다.
+Hydrofoil FF는 t+0.1~0.3초 뒤 파도가 필요하므로 → 분산관계 제약은 필수입니다.
+━━━ A2: Confidence weighting 없애면? ━━━
+  nRMSE +14.5% 악화.
+  멀리서 온 노이즈 많은 데이터가 가까운 정확한 데이터와 동등하게 처리됩니다.
+  멀리 있는 노이즈가 추정을 오염시킵니다.</a:t>
             </a:r>
           </a:p>
         </p:txBody>
@@ -1835,30 +1919,35 @@
           <a:lstStyle/>
           <a:p>
             <a:r>
-              <a:t>[Robustness — 왜 중요한가?]
-실제 배에서는 조건이 항상 달라집니다:
-- LiDAR 모델이 어느 것이 정확한지 모름
-- 관측점이 적을 수도 있음
-- 측정 노이즈가 커질 수 있음
-- 하이퍼파라미터(설정값)을 바다 상태마다 다르게 줄 수 없음
-모든 조건에서 안정적이어야 실용적입니다.
-[Raydrop 민감도]
-Uniform vs Specular 두 가지 LiDAR 모델에서 모두 테스트.
-WaveSplat: 20/20 승 (두 모델 모두에서 ETKF보다 우세)
-Slope 모델에서 WaveSplat 성능 9.1% 하락, ETKF는 16.2% 하락.
-→ WaveSplat이 더 안정적입니다.
-[희소성 민감도]
-관측 밀도를 20%~100%로 변화.
-20% = 프레임당 ~10점 (매우 드문드문)
-BF4~5 조건에서 20% 밀도에서도 8% 이하 성능 하락.
-→ 격자 없는 방식이기 때문에 aliasing 없이 적은 데이터도 활용 가능합니다.
-[노이즈 민감도]
-측정 오차 σ를 0~0.10m로 변화. (기본값 0.02m)
-σ=0.10m (5배)에서도 nRMSE 변화 ±13%.
-→ Adaptive N이 노이즈를 가짜 성분으로 흡수 후 pruning합니다.
-[하이퍼파라미터 민감도]
-학습률, 정규화 계수 등을 ±2배 변화시켜도 nRMSE ±5%.
-→ 한 번 설정하고 모든 100개 에피소드에 동일 설정 사용 가능합니다.</a:t>
+              <a:t>━━━ Robustness — 실제 상황에서도 잘 작동하는가? ━━━
+실험실(시뮬레이션)에서 좋은 것과 실제에서 잘 되는 것은 다릅니다.
+4가지 "불리한 상황"에서도 안정적인지 확인합니다.
+━━━ ① Raydrop 모델 민감도 ━━━
+두 가지 LiDAR 모델(Uniform vs Specular) 중 어느 것이 맞는지 확실하지 않습니다.
+어느 가정을 하느냐에 따라 결과가 다르다면 문제입니다.
+결과:
+  WaveSplat: 두 모델 모두에서 ETKF보다 좋음 (20/20 승)
+  Specular 모델에서 WS 성능 9.1% 하락, ETKF는 16.2% 하락
+  → WaveSplat이 더 안정적입니다.
+━━━ ② 희소성 민감도 (관측 점이 적어지면?) ━━━
+관측 밀도를 20%~100%로 바꿔봅니다.
+20% 밀도 = 프레임당 겨우 10점.
+결과:
+  BF4~5에서 10점만 있어도 nRMSE 8% 이하 하락.
+  ETKF는 훨씬 더 많이 하락합니다.
+왜 WaveSplat이 적은 데이터에서 강한가?:
+  격자 기반 방법: 격자 셀에 데이터가 없으면 해당 셀은 추정 불가.
+  WaveSplat: 파도 성분 하나가 전체 공간에 걸쳐 영향 → 점 10개도 전체 파라미터에 정보 제공.
+  비유: 10개의 퍼즐 조각으로 전체 그림의 패턴(물리 법칙)을 알면, 나머지를 추론할 수 있습니다.
+━━━ ③ 노이즈 민감도 ━━━
+측정 오차를 기본(2cm)의 5배(10cm)까지 키워봅니다.
+5배 더 노이즈가 많아도 nRMSE 변화 ±13% 이내.
+Adaptive N이 노이즈를 "잘못된 파도 성분"으로 흡수했다가 pruning합니다.
+━━━ ④ 하이퍼파라미터 민감도 ━━━
+학습률, 정규화 계수 등을 ±2배 바꿔봅니다.
+nRMSE 변화 ±5% 이내.
+→ 처음 설정하고 모든 100개 에피소드에 동일하게 쓸 수 있습니다.
+→ 바다 상태마다 설정을 바꿀 필요가 없습니다.</a:t>
             </a:r>
           </a:p>
         </p:txBody>
@@ -1928,20 +2017,21 @@
           <a:lstStyle/>
           <a:p>
             <a:r>
-              <a:t>[발표 구조 설명]
-이 발표는 크게 4부로 나뉩니다.
-I. Introduction (슬라이드 3~7)
-   - 왜 이 연구가 필요한지, 기존 방법의 어떤 문제가 있는지 설명합니다.
-   - 핵심 질문: "배 위에서 드문드문 찍힌 레이저 점 50개로 250m×200m 파도 전체를 어떻게 알 수 있나?"
-II. Methodology (슬라이드 8~13)
-   - WaveSplat이 어떻게 작동하는지 설명합니다.
-   - 수식이 나오지만, 핵심 아이디어는 단순합니다: "파도 = 여러 사인파의 합, 물리 법칙 강제 적용"
-III. Results (슬라이드 14~23)
-   - 실험 결과와 통계 검증입니다.
-   - 얼마나 더 정확한지, 얼마나 더 빠른지 수치로 보여줍니다.
-IV. Application (슬라이드 24~31)
-   - WaveSplat을 하이드로포일 선박 제어에 적용한 결과입니다.
-   - 파도를 미리 알면 승차감이 얼마나 좋아지는지 보여줍니다.</a:t>
+              <a:t>━━━ 발표 전체 흐름을 청중에게 안내하기 ━━━
+"오늘 발표는 4개 파트로 이루어져 있습니다. 처음엔 '왜 이게 필요한가', 중간에 '어떻게 만들었는가', 그 다음엔 '얼마나 잘 됐는가', 마지막엔 '실제 배 제어에 써보니 어떤가'입니다."
+━━━ 각 파트를 한 줄로 설명 ━━━
+I. Introduction (3~7번 슬라이드) — "왜 이 연구를 했는가"
+  → 파도 예측이 왜 필요한지, 기존 방법이 왜 안 되는지 설명합니다.
+II. Methodology (8~13번 슬라이드) — "어떻게 만들었는가"
+  → WaveSplat의 작동 원리를 설명합니다.
+  → 수식이 나오지만, 각각 친절하게 풀어드릴 겁니다.
+III. Results (14~23번 슬라이드) — "얼마나 잘 됐는가"
+  → 100번 실험한 결과를 보여줍니다.
+  → 기존 방법보다 30% 더 정확하고 10배 빠릅니다.
+IV. Application (24~31번 슬라이드) — "실제로 써보니"
+  → 하이드로포일 선박에 적용하면 승차감이 얼마나 좋아지는지 보여줍니다.
+━━━ 전체 소요 시간 ━━━
+  대략 슬라이드당 1~2분. 총 31장 → 약 40~50분 예상.</a:t>
             </a:r>
           </a:p>
         </p:txBody>
@@ -2011,23 +2101,28 @@
           <a:lstStyle/>
           <a:p>
             <a:r>
-              <a:t>[시각적 비교 — 그림 보는 법]
-4개 열: GT(정답) | WaveSplat | ETKF | GPR
-GT (Ground Truth):
-시뮬레이터에서 만든 "진짜 파도". 위아래로 굽이치는 실제 파도 모양.
+              <a:t>━━━ 시각적 비교 — 그림으로 직접 확인 ━━━
+4개 열을 차례로 비교합니다.
+GT (Ground Truth, 정답):
+  시뮬레이터에서 만든 진짜 파도입니다.
+  파봉(파도 꼭대기)과 파곡(골짜기)이 규칙적으로 나타납니다.
+  색이 진한 부분 = 높은 파도, 색이 연한 부분 = 낮은 파도.
 WaveSplat:
-GT와 매우 유사합니다. 파봉(봉우리)과 파곡(골짜기) 위치가 거의 같습니다.
-진폭이 약 20~30% 낮게 나오는 것이 보일 수 있습니다. (VR=0.66 한계)
+  GT와 비슷한 패턴이 보입니다. 파봉 위치가 거의 맞습니다.
+  조금 연하게 나오는 것이 보일 수 있습니다 (VR=0.66, 진폭 34% 과소추정).
+  하지만 파도의 위치와 방향은 거의 정확합니다.
 ETKF:
-언뜻 보면 파도 모양처럼 보이지만, 파봉 위치가 GT와 다릅니다.
-VR=0.898로 진폭은 비슷한데, ρ=0.109로 위치가 완전히 틀립니다.
-마치 같은 리듬인데 박자가 다른 노래 같습니다.
+  파도 패턴이 GT와 다릅니다. 색깔 강도는 비슷하지만 (VR=0.90)
+  파봉 위치가 GT와 맞지 않습니다 (ρ=0.109).
+  비유: 음악에서 음량은 맞지만 박자가 틀린 것과 같습니다.
 GPR:
-거의 평탄합니다. VR=0.065 → 진폭의 6.5%만 재현.
-파도가 있는 것인지 없는 것인지 구별이 어렵습니다.
-[한 줄 결론]
-"WaveSplat만 진짜 파도처럼 보입니다."
-(진폭이 약간 낮다는 한계가 있지만, 모양과 위치는 올바릅니다.)</a:t>
+  거의 단색(평탄)입니다. 파도가 있는지 없는지 구별하기 어렵습니다.
+  VR=0.065 → 파도 진폭의 6.5%만 재현.
+  비유: 산의 실루엣을 그려야 하는데 평평한 선만 그린 것.
+━━━ 직관적 결론 ━━━
+눈으로 봐도 WaveSplat만 "진짜 파도처럼 보인다"는 것이 명확합니다.
+수치(nRMSE, VR, ρ)가 시각적으로도 확인됩니다.
+발표 시 팁: "직접 눈으로 봐도 차이가 명확합니다"라고 말하면 청중이 쉽게 이해합니다.</a:t>
             </a:r>
           </a:p>
         </p:txBody>
@@ -2097,22 +2192,31 @@
           <a:lstStyle/>
           <a:p>
             <a:r>
-              <a:t>[스펙트럼 정확도란?]
-WaveSplat은 파도를 (kᵢ, ωᵢ, φᵢ) 성분들의 합으로 표현하기 때문에,
-"파도가 어느 방향에서 오는가", "파장이 얼마인가"를 직접 출력합니다.
-ETKF나 GPR은 elevation(높이) 필드만 추정하므로 이것이 불가합니다.
-[검증 결과 이해하기]
-N=5 이하 (단순 sea):
-- 에너지 감지율 &gt; 93%: 파도 성분 대부분을 올바르게 찾아냄
-- 파장 오차 &lt; 0.5%: 파장 100m라면 오차 50cm 미만
-- 방향 오차 &lt; 0.2°: 북쪽이라면 거의 정북을 가리킴
-- ω 오차 &lt; 1%: 분산관계를 강제했으므로 거의 완벽
-N≥15 (복잡 sea):
-방향이 비슷한 성분들이 k-공간에서 겹쳐 보여 구분 어려움.
-"인접한 두 음정을 구별하기 어려운 것"과 비슷합니다.
-[왜 이게 중요한가?]
-Hydrofoil FF에서 파도의 방향을 알아야 전방 foil과 후방 foil에 도달하는 시간 차이를 계산할 수 있습니다. 방향을 모르면 foil마다 적절한 보상을 할 수 없습니다.
-파도 예보에서도 방향을 알면 "5초 후 파봉이 어디 있을지" 정확히 계산 가능합니다.</a:t>
+              <a:t>━━━ 스펙트럼 정확도 — WaveSplat만 가능한 추가 능력 ━━━
+WaveSplat은 파도 높이(elevation)뿐 아니라, 파도 성분 정보도 직접 출력합니다.
+기존 방법들은 이것이 불가합니다.
+파도 성분 정보란?:
+  이 파도가 어느 방향에서 오는가 (방향)
+  파장이 얼마인가 (파수 |k|)
+  주기가 얼마인가 (ω)
+ETKF, GPR은 "높이 필드"만 추정합니다.
+  방향을 알려면 추정된 높이 필드에 다시 FFT(주파수 분석)를 해야 합니다.
+  이 과정에서 오차가 추가됩니다.
+WaveSplat은 처음부터 (kx, ky, ω, φ)로 파라미터화합니다.
+  방향, 파장, 속도가 직접 출력됩니다. 추가 계산 불필요.
+━━━ 검증 결과 ━━━
+N≤5인 단순한 바다에서:
+  에너지 감지율 &gt; 93%: 파도 성분 대부분을 올바르게 찾아냅니다.
+  파장 오차 &lt; 0.5%: 파장 100m인 파도라면 오차 50cm 미만.
+  방향 오차 &lt; 0.2°: 북쪽(0°)에서 오는 파도를 0.2° 이내로 맞힙니다.
+  ω 오차 &lt; 1%: 분산관계를 강제했으므로 거의 완벽.
+N≥15인 복잡한 바다에서:
+  방향이 비슷한 성분들이 겹쳐 구분하기 어렵습니다.
+  비유: 유사한 음정의 악기 여러 개가 동시에 연주할 때 각각의 소리를 구별하기 어려운 것.
+━━━ 왜 이게 중요한가? ━━━
+① Hydrofoil FF: 파도가 어느 방향에서 오는지 알아야 전방/후방 foil 각각에 맞는 보상을 계산합니다.
+② 미래 예측: 방향과 속도를 알아야 "5초 후 파봉이 어디 있을지" 정확히 계산 가능합니다.
+③ 파랑 모니터링: 선박 운항자에게 실시간으로 "파도 방향: 북동 45°, 파장: 80m, 주기: 7초" 정보 제공 가능.</a:t>
             </a:r>
           </a:p>
         </p:txBody>
@@ -2182,27 +2286,31 @@
           <a:lstStyle/>
           <a:p>
             <a:r>
-              <a:t>[희소 관측 로버스트니스]
-관측 점이 10개만 있어도 작동하는가?
-BF4~5 조건에서 10점: nRMSE 0.191 (WS) vs 0.239 (ETKF)
-50점: 0.155 vs 0.165
-왜 격자 기반이 더 나빠지나?
-격자 안에 점이 없으면 아무것도 모릅니다. 관측 밀도가 낮으면 격자 셀이 텅 비어 있습니다.
-WaveSplat은 plane wave 하나가 모든 격자 위치에 걸쳐 constraint를 줍니다.
-점 10개도 파도 방향/파장 추정에 "global" 정보를 제공합니다.
-[파도 예측 (Forecast)]
-핵심: φᵢ(t+Δt) = φᵢ(t) + ωᵢ·Δt
-ω가 분산관계로 정확하게 알려져 있으므로 φ(위상)를 정확히 앞으로 밀 수 있습니다.
-비유: 지구 자전 주기를 정확히 알면 오늘 밤 몇 시에 달이 어디 있을지 계산 가능한 것처럼.
+              <a:t>━━━ 두 가지 추가 능력 ━━━
+슬라이드 15에서 5가지 평가 지표로 기본 성능을 확인했습니다.
+여기서는 WaveSplat만의 두 가지 추가 능력을 보여줍니다.
+━━━ ① 희소 관측에서 강건함 ━━━
+관측 점이 10개밖에 없을 때도 잘 작동하는가?
+비교 (BF3, 5개 성분):
+  10점: WS nRMSE 0.191, ETKF 0.239
+  20점: WS 0.171, ETKF 0.198
+  50점: WS 0.155, ETKF 0.165
+점이 적을수록 격차가 커집니다.
+왜?: 격자 방법은 격자 셀에 데이터가 없으면 그 셀을 추정 못합니다.
+      WaveSplat은 파도 방정식 하나가 전체 공간을 아우릅니다.
+      점 10개라도 파도 방향·파장 추정에 "전역" 정보를 줍니다.
+━━━ ② 시간 예측 (Wave Forecast) ━━━
+핵심 수식: φᵢ(t+Δt) = φᵢ(t) + ωᵢ·Δt
+ωᵢ가 분산관계로 정확히 결정되므로, 이 계산이 정확합니다.
+비유: 지구 자전 주기(23시간 56분)를 정확히 알면, 24시간 후 달의 위치를 정확히 계산할 수 있는 것처럼.
 결과:
-BF3 1-comp: t+10초 후 Skill Score = +0.94 (거의 즉시 추정만큼 좋음)
-BF3 5-comp: t+10초 후 SS = +0.18 (떨어지지만 여전히 양수)
-BF4 15-comp: t+10초 후 SS = −0.21 (복잡한 바다에서 한계)
-A1(분산관계 없음)과 비교:
-A1 즉시: nRMSE 0.158 (좋아 보임)
-A1 5초 후: nRMSE 0.476 (3배 악화)
-Full 즉시: 0.219, Full 5초 후: 0.231 (안정)
-이 예측 능력이 hydrofoil FF의 물리적 기반입니다.</a:t>
+  BF3, N=1 (단순): t+10초 후 SS=+0.94. 즉시 추정(+1.00에 가까움)과 거의 동등.
+  BF3, N=5: t+10초 후 SS=+0.18. 떨어지지만 여전히 양수.
+  BF4, N=15: t+10초 후 SS=−0.21. 복잡한 바다에서 한계.
+분산관계 없는 방법(A1)과 비교:
+  A1 즉시: 0.158 (좋아 보임) → A1 5초 후: 0.476 (3배 폭발)
+  WS 즉시: 0.219             → WS 5초 후: 0.231 (안정)
+분산관계 제약 = 미래 예측의 핵심. 이것이 Hydrofoil FF의 물리적 기반입니다.</a:t>
             </a:r>
           </a:p>
         </p:txBody>
@@ -2272,24 +2380,29 @@
           <a:lstStyle/>
           <a:p>
             <a:r>
-              <a:t>[왜 더 강한 비교 대상이 필요했나?]
-심사위원(reviewer) 예상 질문: "ETKF와 GPR-1은 약한 baseline 아닌가?"
-→ 그래서 두 가지를 더 강화했습니다.
-LETKF (Localized ETKF):
-ETKF에 공간 localization 추가. 각 격자 점을 업데이트할 때 주변 50m 이내 관측만 사용.
-장점: 멀리 있는 관측의 "허위 상관"을 제거.
-단점: localization 범위보다 큰 파도 성분에서 진폭 과소추정.
-GPR-disp (Dispersion-aware GPR):
-GPR 커널에 dispersion 정보를 추가 (K = K_spatial × K_dispersion).
-장점: 물리 정보를 GPR에도 부여.
-단점: 계산량이 36배 증가 → 실시간 불가.
-[결과]
-N≤5 (단순 sea): WaveSplat 압도. 격차 2~8×.
-N≥15 (복잡 sea): LETKF가 우세. k-space crowding에서 LETKF localization이 WS 방향 분리 한계를 극복.
-속도: WS가 8.1× 빠릅니다.
-[실용적 결론]
-운항 조건의 70% 이상이 N≤5 (Hs&lt;1m). 이 영역에서 WaveSplat이 최선.
-복잡한 날씨(폭풍)에서는 LETKF fallback을 쓰는 하이브리드 아키텍처가 최적.</a:t>
+              <a:t>━━━ 강화 비교 대상 — "더 강한 기존 방법"과도 비교했습니다 ━━━
+왜 추가 비교가 필요했나?:
+  논문 심사위원이 "ETKF와 GPR은 약한 방법 아닌가? 더 강한 것과 비교해야 한다"고 할 수 있습니다.
+  그래서 두 가지 강화 버전을 추가로 실험했습니다.
+━━━ LETKF (Localized ETKF) ━━━
+ETKF에 "공간 localization"을 추가한 버전입니다.
+기존 ETKF 문제: 격자 전체의 데이터를 한꺼번에 씁니다.
+  → 멀리 있는 관측이 가까운 격자 셀에 영향을 줍니다 (물리적으로 말이 안 됨).
+LETKF 개선: 각 격자 셀 업데이트 시, 50m 이내 관측만 씁니다.
+  → 멀리 있는 "허위 상관"을 제거합니다.
+  → 복잡한 바다(N≥15)에서 WaveSplat보다 오히려 낫습니다.
+━━━ GPR-disp (Physics-aware GPR) ━━━
+GPR 커널에 분산관계 정보를 추가한 버전입니다.
+커널 = K_spatial × K_dispersion (공간 상관 × 분산관계 기반 시간 상관)
+문제: 계산량이 기하급수적으로 증가합니다 (ETKF보다 36배 느림).
+→ 실시간 처리 불가. 연구 목적으로만 의미 있습니다.
+━━━ 결론 ━━━
+단순 바다(N≤5): WaveSplat 압도. 격차 2~8×, 속도 8.1× 빠름.
+복잡 바다(N≥15): LETKF가 더 정확. 하지만 WaveSplat이 8배 빠릅니다.
+실용적 권장사항:
+  일반 운항 (바다가 잔잔~중간): WaveSplat 사용.
+  폭풍 (N≥15 복잡한 바다): LETKF로 전환.
+  두 가지를 합친 하이브리드 시스템이 최적입니다.</a:t>
             </a:r>
           </a:p>
         </p:txBody>
@@ -2359,21 +2472,37 @@
           <a:lstStyle/>
           <a:p>
             <a:r>
-              <a:t>[하이드로포일 선박이란?]
-수중 날개(foil)로 선체를 물 위로 띄우는 선박입니다. Candela C-8 같은 스웨덴 회사가 만드는 전기 보트가 대표적입니다.
-비유: 비행기 날개가 공기 저항으로 양력을 만드는 것처럼, 수중 날개가 물 저항으로 양력을 만듭니다. 선체가 물에서 떠오르면 마찰 저항이 대폭 줄어 효율이 좋아집니다.
-문제: 파도를 만나면 날개 잠수 깊이가 변하고 → 양력이 변하고 → 배가 흔들립니다.
-[PD feedback만으로는 왜 부족한가?]
-PD 제어기: 현재 흔들림을 감지(D=미분) → 날개 각도 조정.
-문제: 감지한 후에 조정하기 때문에 항상 한 박자 늦습니다.
-파도 주기 4~7초 중 제어 루프 지연 50~100ms = 주기의 1~2%.
-보통은 이 정도 지연이 괜찮지만, 고속 하이드로포일에서는 파도가 빠르게 지나가므로 지연이 큽니다.
-[Feedforward 제어란?]
-"에러 본 후 수정" → "에러 오기 전 준비"
-WaveSplat이 0.1~0.3초 앞의 파면 기울기를 예측 → 날개를 미리 조정.
-비유: 자동차 전방 카메라로 과속방지턱을 보고, 올라가기 0.1초 전에 서스펜션을 미리 올리는 것.
-K_ff = 0.8: 날개 실제 양력 기울기 vs 이상적 기울기의 비율. 실험으로 확인.
-IIR LP filter (α=0.05): 추정 노이즈를 걸러서 고주파 노이즈가 날개에 전달되지 않도록 합니다.</a:t>
+              <a:t>━━━ 하이드로포일 선박이란? ━━━
+수중 날개로 선체를 물 위로 띄우는 배입니다.
+일반 배: 선체가 물에 잠겨 있습니다. 물 저항이 큽니다.
+하이드로포일: 빠른 속도에서 날개(foil)가 양력을 만들어 선체를 물에서 들어올립니다.
+  → 물 저항이 사라집니다 → 속도가 빠르고 에너지 효율이 좋습니다.
+  → 마치 수상스키처럼 물 위를 달립니다.
+비유: 비행기 날개가 공기 저항으로 양력을 만드는 것처럼, 수중 날개가 물의 저항으로 양력을 만듭니다.
+대표적인 상용 하이드로포일: Candela C-8 (스웨덴), Artemis Technologies (영국), Enata Marine (두바이).
+━━━ 파도가 왜 문제인가? ━━━
+선체가 물 위에 떠 있기 때문에, 파도가 오면 날개 잠수 깊이가 변합니다.
+  파봉(꼭대기)이 오면: 날개가 깊이 잠겨 양력 증가 → 배가 올라감
+  파곡(골짜기)이 오면: 날개가 얕아져 양력 감소 → 배가 내려감
+  → 배가 출렁거립니다.
+━━━ PD 제어만으로는 왜 부족한가? ━━━
+PD 제어기:
+  현재 상태(배가 얼마나 기울었는가) → 측정 → 계산 → 날개 조정
+  이 과정에 0.05~0.1초가 걸립니다.
+  문제: 파도가 0.05초 안에 지나가버릴 수 있습니다.
+  비유: 백미러만 보고 운전 → 장애물을 보는 순간 이미 지나쳤습니다.
+Feedforward (FF) 제어:
+  파도를 미리 보고 → 파도가 도달하기 전에 → 날개를 미리 조정.
+  비유: 앞 유리로 전방을 보며 운전 → 장애물 전에 핸들을 돌립니다.
+━━━ Feedforward 공식 ━━━
+  x_preview = x_foil + V·Δt
+    (foil 현재 위치에서 선속 × 시간만큼 앞에 있는 위치를 봅니다)
+  α_wave = −∂η/∂x − w/V
+    (그 위치에서 파면이 얼마나 기울어져 있는가)
+  δ_ff = −K_ff · α_wave
+    (기울기 반대 방향으로 날개를 조정합니다)
+K_ff = 0.8: 날개의 실제 양력 효율 (이상적인 것의 80%). 실험으로 측정.
+IIR LP filter: 추정 노이즈에서 나오는 빠른 진동을 걸러서 날개에 전달하지 않습니다.</a:t>
             </a:r>
           </a:p>
         </p:txBody>
@@ -2443,25 +2572,40 @@
           <a:lstStyle/>
           <a:p>
             <a:r>
-              <a:t>[전체 제어 시스템 흐름도]
-위쪽 (Feedforward 경로):
-Falcon K1 LiDAR → (10Hz, ~13ms) → WaveSplat → 파면 기울기 추정
-→ 전방 위치 x_pre = x_foil + V·Δt → IIR 필터 → K_ff 게인 → Foil Servo
-아래쪽 (Feedback 경로):
-선박 IMU (가속도, 각속도 측정) → PD 제어기 → Foil Servo (FF와 합산)
-두 경로를 합산: δ_foil = δ_PD + δ_FF
-[각 블록 설명]
-x_preview = x_foil + V·Δt:
-foil 위치에서 선속(V) × 시간(Δt)만큼 앞에 있는 파면을 봅니다.
-V=11 m/s, Δt=0.1s이면 1.1m 앞.
-IIR LP filter (α=0.05, fc≈0.8Hz):
-고주파 잡음 제거. 파도 주기 4~7초 = 0.14~0.25Hz 파도는 통과.
-추정 오차에서 오는 빠른 진동 억제.
-K_ff 게인:
-추정된 파면 기울기 → 날개 편향각 변환 계수.
-Servo: 날개 각도를 물리적으로 움직임. ±15° 범위.
-[시간 척도]
-LiDAR 10Hz → 100ms 간격 → 파도 주기 4~7s의 1.4~2.5%. 충분히 빠릅니다.</a:t>
+              <a:t>━━━ 전체 제어 시스템 흐름도 ━━━
+이 그림이 연구의 전체 그림입니다.
+LiDAR에서 시작해서 날개 조종까지 어떻게 연결되는지 보여줍니다.
+━━━ 위쪽 경로 (Feedforward — 미리 준비) ━━━
+[Falcon K1 LiDAR] → 파도 측정 → 10Hz로 업데이트
+    ↓
+[WaveSplat] → 파도 모양 추정 (~13ms 소요)
+    ↓
+[Forward Predictor] → x_pre = x_foil + V·Δt
+                     현재 foil보다 V·Δt 앞에 있는 파도를 계산
+    ↓
+[IIR LP filter] → 고주파 노이즈 제거
+    ↓
+[K_ff 게인] → 파면 기울기 → 날개 편향각 변환
+    ↓
+[Foil Servo] → 날개 물리적으로 움직임
+━━━ 아래쪽 경로 (PD Feedback — 이미 흔들리면 수정) ━━━
+[선박 IMU] → 현재 heave(상하), pitch(앞뒤 기울기) 측정
+    ↓
+[PD 제어기] → 오차 × 비례(P) + 변화율 × 미분(D)
+    ↓
+[Foil Servo] → FF와 합산해서 날개 조종
+━━━ 두 경로를 함께 쓰는 이유 ━━━
+FF만: 추정이 완벽하지 않으면 보상이 완벽하지 않습니다.
+PD만: 반응이 늦습니다.
+FF + PD: FF가 파도를 미리 막고, PD가 남은 오차를 수정합니다.
+  마치 운전할 때 전방을 보며(FF) 동시에 계기판도 확인(PD)하는 것.
+━━━ 날개(Foil) 배치 ━━━
+전방 foil + 후방 foil = 2개 날개가 있습니다.
+  δ_front = δ_c − δ_d (앞날개 각도)
+  δ_rear  = δ_c + δ_d (뒷날개 각도)
+  δ_c = collective (heave 제어: 전체 배를 위아래로)
+  δ_d = differential (pitch 제어: 앞뒤 기울기)
+각 날개는 ±15° 범위에서 조절 가능합니다.</a:t>
             </a:r>
           </a:p>
         </p:txBody>
@@ -2531,27 +2675,43 @@
           <a:lstStyle/>
           <a:p>
             <a:r>
-              <a:t>[결과 표 읽는 법 — aRMS 개선율(%)]
-aRMS: acceleration RMS. 승객이 느끼는 진동 크기 (m/s²).
-개선율 = (PD만) - (PD+FF) / (PD만) × 100%
-양수 = 진동 감소 = 좋은 것.
-GT-FF: 파도를 완벽하게 알고 있을 때 feedforward. 이론적 최대 성능.
-WS-FF: WaveSplat으로 추정한 파도로 feedforward.
-[핵심 결과]
-WS-FF가 GT-FF의 93~103% 성능. 즉, 추정이 완벽하지 않아도 거의 같은 효과!
-이것이 이 연구의 가장 중요한 실용적 결론입니다.
-왜 추정이 부정확해도 됩니까?
-LP filter가 추정 오차의 고주파 성분을 제거합니다.
-제어에서 중요한 것은 파도의 "낮은 주파수 성분"입니다 (파도 주기 4~7초).
-추정 오차는 주로 "높은 주파수"에서 발생합니다.
-[방향별 해석]
-Head sea (μ=180°, 정면에서 파도): 짧은 encounter wavelength → FF 효과 빠르게 전달.
-Beam sea (μ=90°, 측면에서 파도): 파면이 두 foil을 동시에 통과 → preview 길어야 효과적. 가장 큰 개선 +37.7%.
-Quarter (μ=135°, 대각선): 중간 효과.
-[ISO 2631 승차감 기준]
-0.315 m/s² 이하 = "Comfortable" (쾌적)
-0.315~0.63 = "Slight discomfort" (약간 불편)
-BF3 Beam sea: FF 후 'Slight discomfort' → 'Comfortable' 달성!</a:t>
+              <a:t>━━━ Hydrofoil 결과 (1) — 주요 결과 해설 ━━━
+━━━ 표에서 "aRMS 개선율"이란? ━━━
+aRMS = 승객이 느끼는 진동의 크기 (m/s²). 클수록 불편합니다.
+개선율 = (FF 없을 때 − FF 있을 때) / FF 없을 때 × 100%
+  양수 = 진동이 줄어들었다 = 좋은 것
+  음수 = 오히려 나빠졌다
+GT-FF: 파도를 완벽하게 알 때 FF. 이론적 최대 성능.
+WS-FF: WaveSplat으로 추정한 파도를 사용한 FF. 실제 사용 버전.
+━━━ 핵심 발견 ━━━
+WS-FF = GT-FF의 93~103%:
+  파도를 완벽하게 알 때와 거의 같은 FF 효과!
+  "추정이 완벽하지 않아도 됩니다."
+왜 완벽하지 않은 추정으로도 효과가 좋은가?:
+  LP filter가 추정 오차의 고주파 부분을 제거합니다.
+  파도 제어에 중요한 것은 파도의 "저주파 성분" (주기 4~7초).
+  추정 오차는 주로 "고주파"에서 발생합니다.
+  → 필터가 오차를 걸러주고, 유용한 정보만 날개에 전달합니다.
+━━━ 방향별 해석 ━━━
+Head sea (μ=180°, 정면에서 파도):
+  파봉이 배 정면에서 정면으로 옵니다.
+  encounter wavelength 짧음 → 파도가 빨리 지나감.
+  FF 효과: ~+12% aRMS 감소.
+Beam sea (μ=90°, 옆에서 파도):
+  파봉이 배 옆에서 옵니다.
+  파면이 두 foil을 동시에 지나감 → preview horizon이 길수록 유리.
+  FF 효과: +37.7% (가장 큰 개선). Beam sea에서 가장 극적입니다.
+Quarter (μ=135°, 45도 대각선에서):
+  중간 효과.
+━━━ ISO 2631 승차감 기준 ━━━
+이것이 왜 중요한가?: 국제 표준으로 승객 불편함을 정량화합니다.
+  &lt; 0.315 m/s² = Comfortable (쾌적)
+  0.315~0.63 = Slight discomfort (약간 불편)
+  0.63~1.0 = Fairly uncomfortable (상당히 불편)
+BF3 Beam sea에서:
+  FF 없이: Slight discomfort 구간
+  WS-FF 후: Comfortable 구간
+  실질적으로 승객이 느끼는 불편함이 없어집니다.</a:t>
             </a:r>
           </a:p>
         </p:txBody>
@@ -2621,26 +2781,32 @@
           <a:lstStyle/>
           <a:p>
             <a:r>
-              <a:t>[민감도 분석이란?]
-두 가지 질문에 답합니다:
-1. WaveSplat 추정이 얼마나 나빠도 FF가 작동하는가? (nRMSE tolerance)
-2. 얼마나 먼 미래를 봐야 최적인가? (preview horizon)
-[nRMSE Tolerance]
-nRMSE를 0%에서 50%까지 인위적으로 악화시킨 추정을 FF에 사용.
-결과: 0~50% 전 구간에서 FF가 PD-only보다 좋습니다.
-nRMSE 50%에서도 FF 효과 잔존 → "graceful degradation" (서서히 나빠짐).
-임계값 없음 → 추정이 완전히 망가지기 전까지는 항상 도움이 됩니다.
-이것이 실용적으로 중요한 이유:
-"WaveSplat 추정을 얼마나 믿어야 하는가?"에 대한 답이 됩니다.
-현재 nRMSE 22%이면 "안전지대" 안에 있습니다.
-[Preview Horizon]
-0초 preview: FF = 현재 파도로 보상 → 지연과 같음.
-최적 preview:
-Head sea: 0.1s (~1.1m 앞) = 파도 주기 4s의 2.5%
-Beam sea: 0.3s (~3.4m 앞) = 파면이 foil 위치에 도달하는 시간
-너무 짧으면: 파도가 이미 도달 → 반응 부족.
-너무 길면: 파도 예측이 부정확 → 위상 불일치.
-딱 맞는 preview = foil이 파면에 닿기 직전에 명령을 내려야 함.</a:t>
+              <a:t>━━━ 민감도 분석 — 두 가지 실용적 질문에 답합니다 ━━━
+━━━ 질문 1: 추정이 얼마나 나빠도 FF가 작동하는가? ━━━
+nRMSE를 0~50%로 인위적으로 나쁘게 만들어서 FF 성능을 봅니다.
+결과:
+  nRMSE 0% (완벽한 추정): 최대 FF 효과
+  nRMSE 50%: 여전히 PD-only보다 FF가 좋습니다
+  어느 nRMSE에서도 FF 성능이 갑자기 0이 되는 "임계값"이 없습니다.
+이것이 왜 중요한가?:
+  "WaveSplat 추정이 나빠지면 FF가 갑자기 해로울 수 있다"는 우려를 해소합니다.
+  추정이 나빠져도 FF 효과가 서서히 줄어들 뿐, 갑자기 역효과를 내지 않습니다.
+  현재 WaveSplat nRMSE 22% → 그래프에서 "안전한 구간"에 있습니다.
+비유: 눈이 점점 나빠져도 운전할 수 있습니다. 완전히 안 보일 때만 멈춥니다.
+━━━ 질문 2: 얼마나 먼 미래를 봐야 최적인가? (Preview Horizon) ━━━
+Δt (preview 시간)를 0~1초로 바꿔봅니다.
+결과:
+  Head sea: 최적 Δt = 0.1초 (약 1.1m 앞)
+  Beam sea: 최적 Δt = 0.3초 (약 3.4m 앞)
+왜 Head sea에서 짧고 Beam sea에서 긴가?:
+  Head sea: 파봉이 빠르게 지나갑니다. 0.1초만 미리 봐도 충분합니다.
+  Beam sea: 파면이 두 foil에 동시에 영향을 미칩니다. 0.3초 미리 봐야 foil이 대응할 시간이 생깁니다.
+너무 짧은 preview:
+  파도가 이미 foil에 도달 → 미리 준비할 시간이 없습니다.
+너무 긴 preview:
+  미래 예측 오차가 커서 명령이 파도와 맞지 않습니다.
+  비유: 10초 후 과속방지턱 대비로 지금 서스펜션을 올리면, 실제 턱에 도달할 때 서스펜션이 이미 내려와 있습니다.
+결론: 0.1~0.3초 preview가 실용적 최적 범위입니다.</a:t>
             </a:r>
           </a:p>
         </p:txBody>
@@ -2710,26 +2876,37 @@
           <a:lstStyle/>
           <a:p>
             <a:r>
-              <a:t>[End-to-End Demo란?]
-LiDAR → WaveSplat → FF → 선박 응답 전체 파이프라인을 연결한 실험.
-실제 사용하는 것과 동일한 방식입니다.
-[결과]
-BF3 단순 sea (N=1~5): E2E WaveSplat이 GT-FF의 92~96% 달성.
-거의 완벽합니다. 추정 오차가 있어도 제어 성능에는 작은 영향.
-BF4 5-comp: 37% 달성. 상당히 낮습니다.
-왜?
-"방향 추정 오차"가 원인입니다.
-[방향 오차가 왜 치명적인가?]
+              <a:t>━━━ End-to-End Demo — 전체 파이프라인을 연결한 최종 실험 ━━━
+지금까지는 부분 부분을 따로 실험했습니다.
+이제 전체를 연결합니다:
+  LiDAR → (WaveSplat 추정) → (Forward Predictor) → (FF 명령) → (선박 응답)
+  실제 사용 방식과 동일합니다.
+━━━ 결과 ━━━
+BF3 단순 sea (N=1~5 성분):
+  WS E2E FF = GT-FF의 92~96% 성능
+  거의 완벽합니다. "WaveSplat 추정을 GT처럼 써도 됩니다."
+BF4 5-component sea:
+  WS E2E FF = GT-FF의 37%
+  상당히 떨어집니다. 왜?
+━━━ BF4 5-comp에서 왜 성능이 낮은가? ━━━
+원인: "방향 추정 오차"
 FF 명령 = K_ff × α_wave
-α_wave = −∂η/∂x − w/V (파면의 기울기)
-∂η/∂x: x 방향 (배 진행 방향) 기울기
-이것을 계산하려면 파도가 어느 방향으로 오는지 알아야 합니다.
-방향이 5° 어긋나면 ∂η/∂x가 틀리고 → FF 명령이 오히려 흔들림을 증폭시킵니다.
-BF4 5-comp에서 두 성분이 ±20° 방향 분리되어 있을 때, 두 성분의 위상이 겹치면서 추정 오차 발생.
-[개선 방향]
-(a) 선박이 방향을 조금씩 바꾸면서 여러 각도에서 데이터 수집 → 방향 추정 개선
-(b) IMU heading 정보로 방향 prior 부여
-(c) Multi-frame voting으로 방향 안정화</a:t>
+α_wave = −∂η/∂x − w/V
+∂η/∂x 는 "x 방향 (배 진행 방향) 파면 기울기"입니다.
+이것을 계산하려면 파도가 어느 방향에서 오는지 정확히 알아야 합니다.
+만약 파도 방향을 5° 틀리게 추정하면:
+  ∂η/∂x 계산에 오차가 생깁니다.
+  심한 경우 FF 명령의 부호가 뒤집힙니다.
+  즉, "흔들림을 줄이려 했는데 오히려 흔들림을 증폭"시킵니다.
+BF4 5-comp의 경우:
+  여러 성분이 ±20° 방향으로 퍼져 있습니다.
+  이 성분들의 위상이 겹치면서 방향 추정 오차가 생깁니다.
+━━━ 개선 방향 ━━━
+(a) 배가 방향을 조금씩 바꾸면서 여러 각도에서 데이터를 모음 → 방향 추정 개선
+(b) IMU(관성 항법 장치)의 방향 정보를 Prior로 사용
+(c) 여러 프레임에서 방향 투표(voting)로 안정화
+단순 sea에서 이미 92~96% 달성은 매우 의미 있는 결과입니다.
+복잡 sea 개선은 향후 과제입니다.</a:t>
             </a:r>
           </a:p>
         </p:txBody>
@@ -2799,31 +2976,50 @@
           <a:lstStyle/>
           <a:p>
             <a:r>
-              <a:t>[단일점 선수 센서 비교 — 왜 이 실험을 했나?]
-Candela (스웨덴 하이드로포일 회사)는 선수(뱃머리)에 파도 높이 센서 1개를 달고 FF를 씁니다.
-"WaveSplat 없이 이 방법으로 안 되는가?"라는 질문에 답합니다.
-[SP-1pt 방법 — 가장 이상적인 단일점 방식]
-GT 파도 성분들을 CG(무게중심) + V·Δt 위치 한 점에서만 평가.
-이것이 "단일점 센서로 할 수 있는 최선"입니다. 노이즈 없고, 완벽한 GT를 씁니다.
-결과: BF3 Head sea에서 평균 −13.3% (악화!). 5개 seed 모두 일관되게 나빠짐.
-왜 악화되는가?
-λ = gTp²/(2π) ≈ 9.81×25/6.28 ≈ 39m (BF3 Tp=5s)
-전방 foil과 후방 foil 간격 = 4.5m
-위상 차 Δφ = 2π×4.5/39 ≈ 41°
-CG 한 점에서 평가한 신호를 두 foil에 같이 쓰면:
-전방 foil: +21° 위상 오차, 후방 foil: −21° 위상 오차
-→ FF가 절반 정도 역방향으로 작동합니다.
-이것은 센서 품질 문제가 아닙니다. GT를 써도 같은 결과입니다. 구조적 한계입니다.
-BF4 Tp=7.5s에서는?
-λ ≈ 88m → Δφ ≈ 18° → 오차 감소 → SP-1pt +7.0% (GT의 71% 회수).
-파장이 길수록 단일점 방식도 어느 정도 작동합니다.
-[SP-temporal 방법]
-선수 센서에서 시간 미분으로 파면 기울기를 계산:
-∂η/∂x ≈ −(1/c_p) × ∂η/∂t  (head-sea 가정)
-Beam sea (μ=90°)에서 실패 이유:
-실제 ∂η/∂x ≈ 0 (파도가 옆으로 진행하니까 배 진행 방향 기울기 없음)
-∂η/∂t ≠ 0 (파도가 위아래로 여전히 진동)
-공식이 "없는 기울기를 만들어냄" → FF가 없는 파도를 보상하려 함 → −35.0% 악화.</a:t>
+              <a:t>━━━ 단일점 선수 센서 비교 — 실용적으로 중요한 질문 ━━━
+"WaveSplat이 없어도, 선수(뱃머리)에 파도 센서 하나만 달면 안 되는가?"
+이것이 이 실험의 출발점입니다.
+실제로 Candela(스웨덴 하이드로포일 회사)가 이 방식을 씁니다.
+━━━ SP-1pt란? ━━━
+SP = Single Point (단일 점)
+선수(뱃머리) 앞쪽 한 점에서만 파도를 평가합니다.
+WaveSplat GT 파도 정보를 그 한 점에서만 가져옵니다.
+이것이 "단일점 센서로 할 수 있는 최선"입니다. 노이즈 없고, 완벽한 GT 파도를 씁니다.
+━━━ BF3 Head sea에서 SP-1pt 결과: 평균 −13.3% (나빠졌다!) ━━━
+왜 좋아야 할 것 같은데 나빠지는가?
+문제를 단계별로 이해합니다.
+파도의 파장 계산:
+  BF3에서 Tp(파도 주기) = 5초
+  λ(파장) = g × Tp² / (2π) = 9.81 × 25 / 6.28 ≈ 39m
+  파장이 39m라는 것은, 파봉과 파봉 사이 거리가 39m라는 것입니다.
+전방/후방 foil 간격:
+  Candela C-8의 전방 foil과 후방 foil 사이 거리 = 4.5m
+위상 차이 계산:
+  4.5m가 39m의 파장에서 몇 도에 해당하는가?
+  Δφ = 360° × 4.5/39 ≈ 41°
+즉, CG(배 무게중심) 한 점에서 본 파도 신호를 전방 foil과 후방 foil에 똑같이 쓰면:
+  전방 foil: +21° 위상 오차 (파봉이 조금 먼저 온다고 착각)
+  후방 foil: −21° 위상 오차 (파봉이 조금 늦게 온다고 착각)
+  → FF가 약 절반 정도 역방향으로 작동합니다.
+이것이 구조적 문제인 이유:
+  센서를 아무리 정밀하게 만들어도 해결 안 됩니다.
+  GT(완벽한 데이터)를 써도 같은 결과입니다.
+  "한 점에서 두 foil의 정보를 모두 얻는다"는 것 자체가 물리적으로 한계입니다.
+BF4 Tp=7.5초에서는 λ≈88m → Δφ≈18° → 오차 감소 → SP-1pt +7.0% 개선 가능.
+파장이 길수록 위상 차이가 작아져서 단일점이 어느 정도 작동합니다.
+━━━ SP-temporal이란? ━━━
+선수에 파도 높이 센서를 달고, 시간에 따른 변화로 기울기를 계산합니다.
+  공식: ∂η/∂x ≈ −(1/c_p) × ∂η/∂t   (head-sea 가정)
+  c_p = peak 파도의 위상 속도
+  ∂η/∂t = 센서에서 측정한 시간 변화율
+왜 "head-sea 가정"인가?:
+  이 공식은 "파도가 정확히 배 정면(head)에서 온다"고 가정합니다.
+  그래야만 시간 변화(∂η/∂t)에서 공간 기울기(∂η/∂x)를 유추할 수 있습니다.
+Beam sea (옆에서 파도)에서 실패 이유:
+  실제로 ∂η/∂x ≈ 0입니다. 파도가 옆으로 진행하니까 배 진행 방향 기울기가 없습니다.
+  하지만 ∂η/∂t ≠ 0입니다. 파도는 여전히 위아래로 진동합니다.
+  공식이 "없는 기울기"를 만들어냅니다 → FF가 없는 파도를 보상하려 합니다.
+  결과: −35.0% aRMS 악화. 5개 seed 전부에서 일관되게 나빠집니다.</a:t>
             </a:r>
           </a:p>
         </p:txBody>
@@ -2893,16 +3089,26 @@
           <a:lstStyle/>
           <a:p>
             <a:r>
-              <a:t>[이 슬라이드에서 보여주려는 것]
-실제 배(Avikus NEUBOAT)에서 촬영한 LiDAR 영상입니다.
-[LiDAR가 뭔가요?]
-LiDAR = Light Detection And Ranging. 레이저 빛을 쏘고, 물체에 반사되어 돌아오는 시간을 재서 거리를 측정하는 센서입니다. 자율주행차에 달린 레이더와 비슷한데, 빛(레이저)을 씁니다. 1초에 10번 주변을 스캔합니다.
-[왜 데이터가 드문드문(sparse)한가?]
-바다 수면은 레이저를 잘 흡수하거나 다른 방향으로 반사해버립니다 (거울처럼). 파도의 경사면이 레이저 방향과 어긋나면 신호가 돌아오지 않습니다. 그래서 250m×200m 넓은 바다에서 프레임당 겨우 50점 정도만 찍힙니다. (가로세로 각각 250m이면 대략 축구장 2~3개 크기인데, 거기서 점 50개를 가지고 파도 모양을 알아내야 합니다.)
-[specular dropout이 뭔가요?]
-거울을 생각하면 됩니다. 거울에 빛을 비추면 반사각도가 맞아야 눈에 들어옵니다. 수면도 마찬가지로, 레이저가 파도 경사면에 맞으면 LiDAR 반대 방향으로 튕겨나가서 데이터가 안 잡힙니다. 파도가 없는 것처럼 보이는 거예요.
-[이게 왜 문제인가?]
-기존 방법들은 "관측 없는 곳 = 파도 없음"으로 처리하거나, 주변 점과 선형 보간(평균 내기)으로 채웁니다. 그러면 전혀 다른 파도 모양이 나옵니다. WaveSplat은 물리 법칙을 이용해서 "관측이 없어도 어디에 파도가 있을지" 추정합니다.</a:t>
+              <a:t>━━━ 이 슬라이드에서 보여주는 것 ━━━
+실제 배 위에 달린 레이저 센서(LiDAR)로 찍은 영상입니다.
+왼쪽은 외부 카메라 영상, 오른쪽은 레이저 센서가 찍은 점구름(point cloud)입니다.
+━━━ LiDAR(라이다)가 뭔가요? ━━━
+LiDAR = 레이저로 거리를 재는 센서입니다.
+작동 원리: 레이저 빛을 쏘고 → 물체에 반사되어 돌아오는 시간을 잽니다 → 거리를 계산합니다.
+비유: 동굴에서 "야호!"를 외치면 메아리가 돌아오는 시간으로 동굴 크기를 짐작하는 것과 같습니다.
+자율주행차에도 달려 있는 그 센서와 같은 종류입니다. 여기선 바다 위 파도를 측정합니다.
+초당 10번씩 360도로 레이저를 쏩니다.
+━━━ 그런데 왜 데이터가 이렇게 드문드문(sparse)한가요? ━━━
+바다 수면은 레이저를 잘 흡수하거나 반대 방향으로 튕겨냅니다.
+비유: 거울에 손전등을 비출 때, 딱 맞는 각도여야 눈에 빛이 들어옵니다.
+파도 수면도 마찬가지로, 레이저 빔과 수면 경사가 딱 맞아야 신호가 돌아옵니다.
+조금이라도 각도가 틀리면 신호가 엉뚱한 방향으로 날아가 버립니다.
+결과: 250m×200m (축구장 약 7개 크기) 바다에서 한 번에 겨우 50개의 점만 찍힙니다.
+━━━ 이게 왜 어려운 문제인가요? ━━━
+축구장 7개 크기 공간에서 점 50개로 파도 전체 모양을 복원해야 합니다.
+마치 100칸짜리 퍼즐에서 5개 조각만 보고 전체 그림을 맞추는 것과 같습니다.
+기존 방법은 "없는 조각은 주변 조각의 평균"으로 채웁니다. 이건 파도 물리학을 전혀 모릅니다.
+WaveSplat은 "파도는 물리 법칙을 따른다"는 것을 이용해 훨씬 정확하게 복원합니다.</a:t>
             </a:r>
           </a:p>
         </p:txBody>
@@ -2972,30 +3178,47 @@
           <a:lstStyle/>
           <a:p>
             <a:r>
-              <a:t>[왜 seed마다 결과가 다른가?]
-BF3 Beam sea에서 SP-1pt 결과:
-seed별로 +54% ~ −27% 사이로 들쭉날쭉합니다.
-평균 +21.4%이지만 표준편차 ±31.5%. σ/μ = 1.47 (평균보다 표준편차가 큼).
-이것이 "예측 불가능"을 의미합니다. 같은 조건이지만 운에 따라 도움이 될 수도, 해가 될 수도 있습니다.
-[왜 이렇게 seed 의존적인가?]
-Beam sea (μ=90°)는 파도가 주로 옆 방향(y)으로 진행합니다.
-하지만 방향 spread (σ_θ=20°)로 인해 일부 성분이 대각선 방향으로도 옵니다.
-이 대각선 성분들이 seed마다 다른 위상을 가집니다.
-→ 두 foil 위치에서 이 성분들의 위상 합이 seed마다 달라집니다.
-→ 어떤 seed는 두 foil에 비슷한 위상 → FF 효과 좋음.
-→ 어떤 seed는 두 foil에 반대 위상 → FF 방해.
-WaveSplat은?
-각 foil × 각 성분을 독립적으로 평가합니다.
-σ/μ = 0.34 (SP-1pt 1.47 대비 4.3배 안정적).
-[센서 선택 가이드]
-- Head sea + 장주기(Tp&gt;7s): SP-1pt 어느 정도 작동 (71% GT 회수)
-- Head sea + 단주기(Tp&lt;7s): SP-1pt 일관적 악화 → WaveSplat 필수
-- Beam sea: SP-1pt 불안정, SP-temporal 일관적 악화 → WaveSplat 필수
-- 실 상용 운항 (다양한 해상 조건): WaveSplat 필수
-[WaveSplat이 필요한 3가지 이유 요약]
-1. Per-foil 독립 평가: 각 foil 위치에서 파도를 따로 계산.
-2. 방향 독립성: 파도 방향에 무관하게 안정적.
-3. 정확한 기울기 계산: head-sea 가정 없이 해석적으로 ∂η/∂x를 계산.</a:t>
+              <a:t>━━━ 단일점 센서 vs WaveSplat — 안정성 비교 ━━━
+━━━ BF3 Beam sea에서 seed별 결과 ━━━
+같은 BF3 Beam sea 조건인데, 파도의 초기 위상(seed)에 따라:
+  seed 42: +54% (FF가 매우 효과적)
+  seed 0:  +31%
+  seed 1:  +21%
+  seed 2:  −8%
+  seed 3:  −27% (FF가 오히려 흔들림 증폭)
+같은 바다 조건인데 어떤 날은 좋고 어떤 날은 나쁩니다.
+이것이 실용적으로 심각한 문제입니다.
+"오늘은 SP 방식 쓰면 좋을까요 나쁠까요?" 운에 맡겨야 합니다.
+통계:
+  SP-1pt 평균: +21.4%, 표준편차: ±31.5%
+  σ/μ = 1.47 → 표준편차가 평균보다 큽니다. 완전히 예측 불가.
+━━━ 왜 seed마다 이렇게 다른가? ━━━
+Beam sea(μ=90°, 옆에서 파도)라도 파도가 완벽히 90°로 오지는 않습니다.
+방향 spread σ_θ=20° → 일부 성분이 80°, 일부가 100°, 일부가 70°에서 옵니다.
+이 대각선 성분들의 위상이 seed마다 다릅니다.
+→ 어떤 seed는 두 foil에 비슷한 위상 → FF 효과 좋음
+→ 어떤 seed는 두 foil에 반대 위상 → FF가 흔들림 증폭
+WaveSplat은?:
+  각 성분(kx, ky, ω, φ)을 독립적으로 추정합니다.
+  각 foil 위치에서 각 성분의 기울기를 따로 계산합니다.
+  성분 간 위상 충돌이 없습니다.
+  σ/μ = 0.34 (SP-1pt의 1.47 대비 4배 안정적)
+━━━ 센서 선택 가이드 (언제 뭘 쓰면 되는가?) ━━━
+Head sea + 긴 파도(Tp&gt;7초, λ&gt;88m):
+  SP-1pt 어느 정도 작동 (GT의 71% 효과). 단순한 항로에서 허용.
+Head sea + 짧은 파도(Tp&lt;7초):
+  SP-1pt 일관적으로 악화. WaveSplat 필수.
+Beam sea 또는 대각선 방향:
+  SP-1pt 예측 불가 (운에 따라). SP-temporal 일관적 악화. WaveSplat 필수.
+실상용 운항 (다양한 방향, 다양한 파도):
+  WaveSplat이 유일한 안정적 해결책.
+━━━ WaveSplat이 반드시 필요한 3가지 이유 요약 ━━━
+① Per-foil 독립 평가: 전방 foil과 후방 foil 각각의 위치에서 파도를 따로 계산.
+   → 41° 위상 오차를 원천 차단.
+② 방향 독립성: 파도가 어느 방향에서 와도 각 성분을 독립 추정.
+   → Beam sea, oblique sea에서도 안정적.
+③ 정확한 기울기 계산: ∂η/∂x = Σ(−Aᵢ·kxᵢ·sin(phase))를 해석적으로 계산.
+   → head-sea 가정 없음. 어느 방향이든 정확합니다.</a:t>
             </a:r>
           </a:p>
         </p:txBody>
@@ -3065,30 +3288,39 @@
           <a:lstStyle/>
           <a:p>
             <a:r>
-              <a:t>[한계 — 정직한 보고가 중요한 이유]
-과학 논문에서 한계를 솔직하게 보고하는 것이 신뢰성의 핵심입니다.
-"좋은 것만 보여준다"는 인상을 주면 오히려 신뢰를 잃습니다.
-WaveSplat의 알려진 한계:
-1. VR=0.66: 진폭 34% 과소추정.
-   원인: Adam optimizer가 수렴할 때 작은 성분들을 pruning → 에너지 손실.
-   해결 방향: 추정 후 진폭 스케일링, 또는 pruning threshold 조정.
-2. 30+ component crowding: 파도 성분이 30개 이상이면 방향 구분 어려움.
-   원인: k-공간에서 인접한 peak들이 겹쳐 보임.
-   해결 방향: multi-frame 방향 voting, vessel yaw 변화 활용.
-3. 시뮬레이션 전용: 실제 바다에서 아직 검증하지 않았습니다.
-   다음 단계: 수조 실험 → 실선 시험.
-4. 선형 파도 모델: 2차 이상의 비선형 파도 (Stokes) 미반영.
-   실용적 영향: Hs&lt;2m에서는 선형 모델로도 충분.
-[Contributions 요약]
-기술적으로 새로운 것 6가지 (❶~❻):
-Grid-free spectral 표현, 분산관계 하드 제약, Adaptive N, 가중 손실, 5-metric 패널, 24-config ETKF sweep.
-WaveSplat만의 고유 능력 3가지:
-스펙트럼 직접 출력 (방향/파장), 희소 관측에서 강건성, 시간 예측.
-응용 (❽~⓫):
-하이드로포일 FF 제어 → 실제로 승차감 개선 확인.
-단일점 센서의 구조적 한계 수학적/실험적으로 증명.
-[전체 결론 — 한 문장]
-"희소한 LiDAR 데이터에서 물리 법칙을 이용해 파도를 격자 없이 실시간으로 정확히 추정하며, 이를 하이드로포일 제어에 적용해 승차감을 크게 개선했습니다."</a:t>
+              <a:t>━━━ 마지막 슬라이드 — 한계와 기여 ━━━
+━━━ 한계를 솔직하게 공개하는 이유 ━━━
+좋은 연구는 자신의 한계를 솔직하게 보고합니다.
+"완벽합니다"라고 하는 연구는 오히려 신뢰를 잃습니다.
+한계를 알아야 언제 쓰고 언제 쓰지 말아야 하는지 알 수 있습니다.
+━━━ 주요 한계 설명 ━━━
+① VR=0.66 (진폭 34% 과소추정):
+  원인: Adam optimizer가 최적화할 때 에너지가 작은 파도 성분을 제거(pruning).
+  영향: 파봉 높이가 실제보다 34% 낮게 나옵니다.
+  실용적 영향: 파봉 위치(위상)는 맞으므로, FF 제어에는 큰 영향 없습니다.
+  향후 개선: pruning 후 진폭 재스케일링, 또는 에너지 보존 제약 추가.
+② N=30+ crowding (복잡한 바다에서 방향 구분 어려움):
+  원인: k-공간에서 비슷한 방향의 성분들이 겹쳐 보입니다.
+  해결 방향: 배가 방향을 바꾸면서 더 많은 각도에서 관측 → 방향 분해능 향상.
+③ 시뮬레이션만 검증:
+  실제 바다에서 아직 실험하지 않았습니다.
+  시뮬레이터가 실제와 얼마나 다른지 검증이 필요합니다.
+  다음 단계: 수조(towing tank) 실험 → 실선(실제 배) 시험.
+④ 선형 파도 모델:
+  매우 큰 파도(storm)에서는 파도가 비선형입니다 (2차, 3차 성분 있음).
+  현재 WaveSplat은 이를 무시합니다.
+  실용적으로: Hs&lt;2m에서는 선형 모델이 충분합니다.
+━━━ 기여 요약 — 이 연구에서 새롭게 한 것 ━━━
+기초 알고리즘 (❶~❻): 격자 없는 방식, 물리 법칙 강제, 자동 성분 수 조절, 신뢰도 가중, 공정한 평가 설계.
+WaveSplat만의 능력 (❼): 파도 성분 직접 추정 + 희소 관측에 강함 + 시간 예측 가능.
+하이드로포일 응용 (❽~⓫): 실제 제어에 적용해서 승차감 개선 확인. 단일점 센서의 물리적 한계를 수학으로 증명하고 실험으로 확인.
+━━━ 전체를 한 문장으로 ━━━
+"배 위 레이저 센서가 찍는 드문드문한 파도 데이터에서, 물리 법칙을 이용해 격자 없이 실시간으로 파도를 정확히 복원하고, 이를 하이드로포일 선박 제어에 적용해 승차감을 크게 개선했습니다."
+━━━ 질문 예상 답변 ━━━
+Q: "실제 배에서 언제 적용 가능한가?"
+A: "현재 시뮬레이션 검증 완료. 수조 실험이 다음 단계입니다. Avikus NEUBOAT가 같은 LiDAR를 사용하므로 sim-to-real 전환이 가장 빠릅니다."
+Q: "N=30 이상의 복잡한 바다는 어떻게 하는가?"
+A: "현재는 LETKF와 하이브리드로 대응합니다. WaveSplat이 N=5 이하에서 압도적이므로, 운항의 70%+ 조건을 커버합니다."</a:t>
             </a:r>
           </a:p>
         </p:txBody>
@@ -3158,19 +3390,30 @@
           <a:lstStyle/>
           <a:p>
             <a:r>
-              <a:t>[선박 전방 파랑 예측이 왜 필요한가?]
-"파도를 미리 알면 좋다"는 게 여러 응용에 필요합니다:
-1. 하이드로포일 선박: 물 위를 나는 배. 날개(foil)가 파도와 직접 부딪히기 때문에 파도를 미리 알고 날개각도를 조정해야 합니다. (이 발표의 핵심 응용)
-2. 해상 크레인: 크레인이 흔들리면 물건을 내릴 때 위험합니다. 파도를 미리 알면 배의 흔들림을 예측해서 보상할 수 있습니다.
-3. 자율운항 선박: 파도가 높으면 속도를 줄이거나 경로를 바꿔야 합니다. 실시간으로 파도 상태를 알면 안전하게 운항할 수 있습니다.
-4. 헬리콥터 착륙 판정: 배 위에 헬기 착륙판(helideck)이 있는데, 파도가 심하면 착륙이 위험합니다. 파도 예측으로 "지금 착륙 가능한가?"를 판단합니다.
-[LiDAR 관측의 어려움 — 숫자로 이해하기]
-- 250m×200m 넓이 = 축구장 약 7개 크기
-- 프레임당 ~50점 = 가로세로 7점씩 격자 → 너무 드문드문
-- 10 Hz = 초당 10번 갱신 → 각 프레임을 100ms 안에 처리해야 함
-- σ_r ≈ 0.02m = 레이저 거리 측정 오차 2cm (정밀함)
-[Hydrofoil 비유]
-달리는 자동차에서 전방 카메라로 과속방지턱을 보고, 그것에 올라가기 0.1초 전에 서스펜션을 미리 올리는 것과 같습니다. "본 다음 반응"이 아니라 "보고 미리 준비"입니다.</a:t>
+              <a:t>━━━ 왜 파도를 미리 알아야 하는가? ━━━
+파도를 미리 알면 좋은 이유가 여러 가지 있습니다.
+① 하이드로포일 선박 (이 발표의 주요 응용)
+  하이드로포일 = 물 위를 나는 배. 수중 날개로 선체를 들어올려 물 마찰을 없앱니다.
+  문제: 파도가 오면 날개 잠수 깊이가 변하고, 배가 출렁거립니다.
+  해결: 파도를 미리 보고 날개 각도를 미리 조정합니다.
+  비유: 과속방지턱을 보고 미리 속도를 줄이는 것 vs. 부딪힌 다음에 멈추는 것.
+② 해상 크레인
+  배 위 크레인으로 화물을 내릴 때 파도 때문에 배가 흔들리면 위험합니다.
+  파도를 미리 알면 "3초 후에 배가 얼마나 흔들릴지" 예측해서 크레인을 보정할 수 있습니다.
+③ 자율운항 선박
+  파도가 너무 높으면 속도를 줄이거나 경로를 바꿔야 합니다.
+  실시간 파도 정보가 있으면 AI 선장이 더 안전하게 판단할 수 있습니다.
+④ 헬기 착륙
+  배 위 헬기 착륙판(helideck)에 헬기가 착륙할 때, 파도가 심하면 매우 위험합니다.
+  파도 예측으로 "지금 착륙해도 되는가?" 실시간 판단이 가능합니다.
+━━━ "PD feedback만으로는 왜 부족한가?" — 이 개념이 중요합니다 ━━━
+PD 제어기 = 현재 상태를 측정하고 → 목표와의 차이를 계산하고 → 수정합니다.
+이것은 항상 "에러가 생긴 후에" 수정합니다.
+문제: 하이드로포일 선박은 빠릅니다 (시속 약 40km). 파도가 오는 속도도 빠릅니다.
+제어기가 반응하는 데 0.05~0.1초 걸리는데, 그 사이에 파도가 이미 지나가버립니다.
+마치 백미러로 보면서 운전하는 것과 같습니다.
+해결: 파도를 미리 보고 → 파도가 도달하기 전에 → 날개를 미리 조정합니다.
+비유: 룸미러 대신 전방 카메라로 보면서 운전하는 것.</a:t>
             </a:r>
           </a:p>
         </p:txBody>
@@ -3240,29 +3483,43 @@
           <a:lstStyle/>
           <a:p>
             <a:r>
-              <a:t>[기존 방법들이 왜 안 되는지 — 비전문가 설명]
-이 문제를 해결하려고 기존에 시도된 방법이 3가지 있습니다.
-① Grid-based Optimal Interpolation (격자 기반 최적 보간)
-   쉽게 말하면: "관측 점들 사이를 격자로 잘라서 평균 내기"
-   문제점:
-   - 250m×200m를 2m 간격 격자로 나누면 12,500개 셀인데, 각 셀에 데이터가 0~1개밖에 없습니다.
-   - 데이터 없는 셀은 주변 셀 값으로 메꾸는데(보간), 이게 파도 물리 법칙을 전혀 모릅니다.
-   - 예: 파도 골짜기와 파도 마루 사이를 직선으로 잇는 것과 같습니다. 실제 파도 모양과 다릅니다.
-   - 또한 시간 모델이 없어서 "지금 이 순간" 이후 예측 불가합니다.
-② GPR (Gaussian Process Regression, 가우시안 프로세스)
-   쉽게 말하면: "관측 점들 사이의 유사도(커널)를 이용해 보간"
-   문제점:
-   - 물리 법칙 없음. 파도가 앞으로 진행한다는 것도 모릅니다.
-   - 계산량이 관측 점 수(M)의 세제곱 O(M³)에 비례 → M=50이면 125,000 연산, 200ms 이상 소요 → 실시간 불가.
-   - 결과: 진폭을 거의 재현 못함 (진폭의 6.5%만 = 파도가 거의 평탄하게 나옴).
-③ ETKF on Grid (Ensemble Transform Kalman Filter)
-   쉽게 말하면: "100가지 가능한 파도 시나리오를 동시에 추적하다가 관측과 가장 맞는 것 선택"
-   문제점:
-   - 100개 시나리오를 동시에 계산 → 132.6ms/프레임 → 10Hz 처리시 지연 누적.
-   - 격자 기반이라 격자 해상도보다 작은 특징 표현 불가.
-   - 진폭은 맞는데 위치(위상)가 틀림 (Pearson ρ=0.109 = 모양이 거의 무관).
-[공통 문제]
-모두 "격자" 또는 "데이터 분포"에 의존합니다. WaveSplat은 격자 없이, 물리 법칙(파도 방정식)을 직접 파라미터로 표현합니다.</a:t>
+              <a:t>━━━ 기존 방법들 — 왜 이 문제에 맞지 않는가? ━━━
+이 연구 전에도 "드문드문한 데이터로 파도 복원"을 시도한 방법이 있었습니다.
+각각의 문제점을 아주 쉽게 설명드립니다.
+━━━ ① Grid-based 방법 (격자 보간) ━━━
+어떻게 작동하나:
+  250m×200m 바다를 바둑판처럼 잘게 나눕니다 (예: 2m 간격이면 12,500칸).
+  LiDAR 점이 있는 칸은 그 값을 씁니다.
+  점이 없는 칸은? 주변 칸 값의 평균으로 채웁니다.
+왜 문제인가:
+  12,500칸 중 LiDAR 점이 있는 칸은 50개뿐입니다. 나머지 12,450칸은 추측입니다.
+  "파도가 올라갔다 내려간다"는 물리 법칙을 전혀 모르고 단순히 평균 냅니다.
+  또한 "지금 이 순간"만 보고, "5초 후 파도가 어디 있을지" 계산이 불가합니다.
+━━━ ② GPR (가우시안 프로세스) ━━━
+어떻게 작동하나:
+  관측 점들 사이의 "유사도(거리가 가까우면 비슷할 것)"를 이용해 빈 곳을 채웁니다.
+  통계적으로 꽤 정교한 방법입니다.
+왜 문제인가:
+  계산량 문제: 관측 점이 M개면 M³에 비례해 계산이 늘어납니다.
+  M=50이면 50×50×50=125,000 계산. 이게 0.2초 이상 걸립니다.
+  초당 10번 처리해야 하므로 0.1초 안에 끝내야 하는데, 0.2초면 너무 느립니다.
+  결과: 진폭의 6.5%만 재현. 파도가 거의 없는 것처럼 평탄하게 나옵니다.
+  마치 산의 실루엣을 그려야 하는데 평평한 직선만 그린 것과 같습니다.
+━━━ ③ ETKF (앙상블 칼만 필터) ━━━
+어떻게 작동하나:
+  "100가지 가능한 파도 시나리오"를 동시에 계산합니다.
+  새 LiDAR 데이터가 오면, 100개 시나리오 중 데이터와 가장 맞는 것을 선택합니다.
+  기상청이 날씨 예보할 때 쓰는 방법과 비슷합니다.
+왜 문제인가:
+  100개를 동시에 계산하니 시간이 오래 걸립니다 (평균 0.13초/회).
+  초당 10번 처리해야 하므로, 처리가 밀리기 시작합니다.
+  또한 격자 기반이라 격자보다 작은 특징을 표현할 수 없습니다.
+  가장 큰 문제: 진폭은 어느 정도 맞는데, 파봉(파도 꼭대기) 위치가 틀립니다.
+  비유: 파도 높이는 1m라고 맞혔는데, 파봉이 실제보다 10m 옆에 있다고 말하는 것.
+━━━ 공통 문제 ━━━
+세 방법 모두 "격자나 통계 분포에 의존"합니다.
+파도의 물리 법칙(파도는 어떤 속도로 어느 방향으로 진행하는가)을 제대로 활용하지 않습니다.
+WaveSplat의 접근: 파도 자체가 물리 법칙의 결과물이므로, 처음부터 물리 법칙을 파라미터로 직접 씁니다.</a:t>
             </a:r>
           </a:p>
         </p:txBody>
@@ -3332,31 +3589,46 @@
           <a:lstStyle/>
           <a:p>
             <a:r>
-              <a:t>[용어 해설 — 이 슬라이드는 참고용입니다. 발표 중에 모르는 단어 나오면 다시 돌아와서 보면 됩니다]
+              <a:t>━━━ 용어 정리 — 이 슬라이드는 "사전"입니다 ━━━
+발표 중에 모르는 단어가 나오면 이 슬라이드로 돌아오세요.
+지금 다 외우려고 하지 않아도 됩니다.
+━━━ 파도 관련 용어 ━━━
 Beaufort scale (보퍼트 등급):
-   바람 세기를 0~12로 나눈 척도입니다. 바람이 세면 파도도 높습니다.
-   BF2 = 바람 3~4 m/s, 파고 약 0.3m (잔잔함)
-   BF3 = 바람 5~7 m/s, 파고 약 0.9m (약간 물결)
-   BF4 = 바람 8~10 m/s, 파고 약 1.5m (중간 파도)
-   BF5 = 바람 11~13 m/s, 파고 약 2.0m (제법 거친 바다)
-Hs (유의 파고, significant wave height):
-   관측되는 파고 중 큰 것 1/3의 평균입니다. "실제로 체감되는 파고"라고 보면 됩니다. Hs=1.5m면 파도 높이가 대략 1.5m라는 뜻.
+  바람 세기를 숫자로 나타낸 척도입니다. 숫자가 클수록 거친 바다입니다.
+  BF2 = 잔잔한 바다 (파고 약 0.3m, 잔물결 수준)
+  BF3 = 약간 물결 (파고 약 0.9m, 소형 보트는 출렁)
+  BF4 = 중간 파도 (파고 약 1.5m, 일반적인 해양 조건)
+  BF5 = 제법 거친 바다 (파고 약 2m)
+Hs (유의 파고):
+  "관측된 파도 중 큰 것들의 평균 높이"입니다. 실제로 느끼는 파도 높이입니다.
+  Hs=1.5m라면, 체감상 파도 높이가 약 1.5m입니다.
 Tp (첨두 주기):
-   파도 에너지가 가장 많은 주파수의 주기. Tp=7s면 7초마다 가장 큰 파도가 옵니다.
-JONSWAP 스펙트럼:
-   북해에서 관측된 데이터로 만든 파랑 스펙트럼 모델. 파도 에너지가 주파수별로 얼마나 분포하는지 수식으로 표현. 시뮬레이션에서 "가상의 바다"를 만들 때 이 공식을 씁니다.
+  파도 에너지가 가장 집중된 주기입니다.
+  Tp=7초 → 7초마다 가장 큰 파도가 반복됩니다.
+  Tp가 길수록 파장이 길고, 파도가 멀리서 옵니다.
 Dispersion relation (분산관계):
-   파도의 파장과 주기 사이의 물리 법칙. ω = √(g|k|·tanh(|k|·d))
-   쉽게: 파장이 길면(큰 파도) 더 빨리 진행합니다. 이 법칙을 WaveSplat이 "하드 제약"으로 강제합니다.
-   비유: 스프링에서 진동수와 스프링 상수의 관계처럼, 물리가 정해준 규칙입니다.
-nRMSE (normalized RMSE):
-   추정 오차를 파고(Hs)로 나눈 값. 0이면 완벽, 1이면 파고만큼 틀린 것. 0.2면 파고의 20% 정도 오차.
-VR (Variance Ratio):
-   진폭을 얼마나 잘 재현하는가. 1이면 완벽. 0.66이면 실제 진폭의 66%만 재현. 0.065면 거의 평탄.
-Pearson ρ (피어슨 상관계수):
-   파도 모양(위상)이 얼마나 맞는가. 1이면 완벽 일치, 0이면 무관계. 진폭과 무관합니다.
+  파도의 속도가 파장에 따라 정해진다는 물리 법칙입니다.
+  ω = √(g·|k|·tanh(|k|·d))
+  쉽게: "파장이 길수록 파도가 더 빨리 진행한다"는 법칙입니다.
+  마치 중력이 물체의 낙하 속도를 결정하는 것처럼, 물리가 정해줍니다.
+  ω = 파도 진동 속도, k = 파도 방향과 파장 정보, g = 중력 가속도(9.8m/s²), d = 수심.
+━━━ 평가 지표 용어 ━━━
+nRMSE (정규화 오차):
+  추정 오차를 파고로 나눈 값입니다. 0이면 완벽, 1이면 파고만큼 틀린 것.
+  0.2 = "파고의 20% 수준의 오차". 파고 1.5m이면 오차 약 30cm.
+VR (분산 비):
+  파도 높낮이 폭을 얼마나 잘 재현하는가입니다.
+  1이면 완벽, 0.66이면 실제 파도 진폭의 66%만 재현 (34%는 낮게 추정).
+  0.065면 거의 평탄 (파도가 없는 것처럼 나옴).
+Pearson ρ (상관계수):
+  파도 위치(위상)가 얼마나 맞는가입니다.
+  1이면 완벽 일치, 0이면 완전히 무관계.
+  중요: 진폭(VR)과 위상(ρ) 둘 다 봐야 진짜 정확한 건지 알 수 있습니다.
+  진폭이 맞아도 위치가 틀리면 쓸모없고, 위치가 맞아도 진폭이 0이면 쓸모없습니다.
 SS (Skill Score):
-   "아무것도 예측 안 하는 것(ẑ=0)보다 나은가?" SS&gt;0이면 의미 있는 예측. SS&lt;0이면 오히려 방해.</a:t>
+  "아무것도 예측 안 하는 것보다 나은가?"를 나타냅니다.
+  SS &gt; 0 → 예측이 의미 있음. SS &lt; 0 → 예측 안 하는 게 더 나음.
+  WaveSplat만 SS &gt; 0 달성.</a:t>
             </a:r>
           </a:p>
         </p:txBody>
@@ -3426,18 +3698,35 @@
           <a:lstStyle/>
           <a:p>
             <a:r>
-              <a:t>[3D Gaussian Splatting이 뭔가요?]
-2023년 컴퓨터 그래픽스 분야에서 나온 기술입니다. 카메라로 찍은 사진 여러 장에서 3D 장면을 재구성할 때, 기존에는 3D 격자(복셀)를 썼습니다. 3DGS는 대신 "수천~수백만 개의 3D 가우시안(타원형 덩어리)들의 합"으로 장면을 표현합니다.
-비유: 그림을 그릴 때 격자 칸을 색칠하는 것 대신, 붓터치(가우시안)를 여러 번 겹치는 것과 같습니다.
-장점: 격자보다 효율적이고, 어느 각도에서든 빠르게 렌더링 가능.
-[WaveSplat에 어떻게 적용했나요?]
-3DGS의 "가우시안 덩어리들의 합" = WaveSplat의 "사인파(plane wave)들의 합"
-3DGS 가우시안 → WaveSplat 사인파
-각 가우시안의 위치/형태 → 각 파도성분의 방향/파장/속도
-격자 없이 어느 위치든 계산 가능 → 격자 없이 어느 바다 위치든 계산 가능
-차이점: 3DGS는 공간만 표현하지만, WaveSplat은 시간도 포함됩니다. 그래서 "현재"뿐 아니라 "5초 후 파도"도 예측할 수 있습니다. 이게 hydrofoil 제어에 핵심입니다.
-[이 발상이 왜 영리한가?]
-파도는 원래 물리학적으로 사인파들의 합입니다 (Fourier 분해). WaveSplat은 파도의 물리적 표현 방식을 그대로 쓰기 때문에, 자연스럽게 물리 법칙과 일치합니다.</a:t>
+              <a:t>━━━ 3D Gaussian Splatting이란? (어려운 개념을 쉽게) ━━━
+2023년에 나온 컴퓨터 그래픽스 기술입니다.
+사진 여러 장으로 3D 장면을 재구성하는 기술인데, 기존보다 훨씬 빠르고 정확합니다.
+기존 방법 (NeRF 등):
+  공간을 촘촘한 3D 격자(바둑판을 3D로 만든 것)로 나눕니다.
+  각 칸에 색깔과 투명도 값을 저장합니다.
+  칸이 많아서 계산이 엄청 느립니다.
+3DGS의 방법:
+  격자 대신, '가우시안 타원형 덩어리' 수천~수백만 개로 장면을 표현합니다.
+  각 덩어리는 위치, 방향, 크기, 색깔 정보를 가집니다.
+비유: 그림을 그릴 때의 차이
+  격자 방법 = 수십억 개의 작은 픽셀 하나하나를 색칠
+  3DGS = 붓터치(가우시안 덩어리)를 수천 번 겹쳐서 그림 완성
+  → 훨씬 적은 개수로 더 자연스러운 그림이 완성됩니다.
+━━━ 이것이 WaveSplat과 어떤 관계인가? ━━━
+3DGS의 핵심 아이디어: "격자 없이, 기저(basis) 함수들의 합으로 표현"
+WaveSplat의 아이디어: 이것을 파도에 적용!
+3DGS의 가우시안 덩어리 = WaveSplat의 사인파(plane wave) 하나
+3DGS에서 각 덩어리의 위치/형태 = WaveSplat에서 각 파도의 방향/파장/속도
+둘 다 격자 없이 임의 위치에서 계산 가능
+차이점 (그리고 WaveSplat만의 강점):
+  3DGS는 공간만 표현합니다.
+  WaveSplat은 시간까지 포함합니다.
+  → "지금 이 순간"뿐 아니라 "5초 후 파도가 어디 있을지"도 예측 가능합니다.
+  → 이것이 하이드로포일 제어에 핵심입니다.
+━━━ 왜 파도를 사인파의 합으로 표현하면 좋은가? ━━━
+파도는 물리학적으로 원래 사인파들의 합입니다.
+바다 파도는 수십~수백 개의 파장이 다른 사인파들이 겹친 결과입니다.
+WaveSplat은 파도의 본질적인 구조를 그대로 파라미터로 표현하므로, 물리 법칙과 자연스럽게 일치합니다.</a:t>
             </a:r>
           </a:p>
         </p:txBody>
@@ -3507,28 +3796,53 @@
           <a:lstStyle/>
           <a:p>
             <a:r>
-              <a:t>[핵심 수식 — z(x,y,t) = Σᵢ wᵢ·cos(kx,ᵢ·x + ky,ᵢ·y − ωᵢt + φᵢ)]
-이 수식이 무슨 뜻인지 단계별로 설명합니다.
-z(x,y,t): 위치 (x,y)에서 시각 t에서의 수면 높이 (m)
-Σᵢ: N개의 파도 성분을 더한다는 뜻 (∑ = 합계)
-각 성분 wᵢ·cos(kx,ᵢ·x + ky,ᵢ·y − ωᵢt + φᵢ):
-   - wᵢ: 이 파도 성분의 진폭 (얼마나 높은 파도인가)
-   - kx, ky: 파도가 어느 방향으로 진행하는가 (동쪽? 북동쪽?)
-   - ωᵢ: 파도가 얼마나 빨리 진동하는가 (진동수)
-   - φᵢ: 파도의 현재 위상 (지금 파봉이 어디에 있나)
-   - cos(): 파도 모양이 코사인 곡선이라는 것 (올라갔다 내려갔다)
-비유: FM 라디오 신호가 여러 주파수의 합인 것처럼, 바다 파도도 여러 파도 성분의 합입니다. WaveSplat은 이 성분들을 역으로 찾아냅니다.
-[6가지 혁신 포인트 쉽게 설명]
-❶ Grid-free: 격자 없이 어느 위치든 직접 계산. 비유: 방정식으로 직접 계산 vs 격자 표에서 찾기.
-❷ Dispersion 하드 제약: ω = √(g|k|·tanh(|k|d))
-   파도의 속도(ω)가 파장(k)과 수심(d)에 의해 물리적으로 결정된다는 법칙.
-   이걸 "강제"하면: 추정된 파도가 반드시 진짜 중력파여야 함. 파장 5개 파라미터(kx,ky,ω,w,φ)→4개(kx,ky,w,φ)로 줄어듦.
-   효과: 5초 후 예측이 안정적. (강제 안 하면: 현재는 맞아도 1초 후 폭발적으로 틀어짐)
-❸ Adaptive N: 단순한 바다는 파도 성분 2개, 복잡한 바다는 21개까지 자동으로 조절.
-   비유: 단순한 그림은 붓터치 2번, 복잡한 그림은 21번.
-❹ Geometry-aware confidence: 레이저가 비스듬히 맞은 점은 오차가 크니 덜 믿음. 멀리서 온 점도 덜 믿음.
-❺ 5가지 지표를 미리 정해서 실험: cherry-pick(좋은 결과만 골라 보여주기) 방지.
-❻ 비교 대상(ETKF)을 24가지 설정으로 최적화한 후 비교: 공정한 비교.</a:t>
+              <a:t>━━━ 핵심 수식 완전 분해 ━━━
+z(x, y, t) = Σᵢ wᵢ · cos(kx,ᵢ·x + ky,ᵢ·y − ωᵢt + φᵢ)
+한 글자씩 의미를 설명합니다.
+z(x, y, t):
+  위치 x, y에서 시각 t일 때의 수면 높이입니다. (단위: 미터)
+  예: z(100, 50, 3.0) = 3.0초에 (100m, 50m) 지점의 파도 높이.
+Σᵢ (시그마):
+  N개의 파도 성분을 모두 더하라는 기호입니다.
+  바다 파도는 한 가지 파도가 아니라 여러 파도가 겹친 것입니다.
+  N=5라면 5개의 사인파를 합칩니다.
+wᵢ (w, 진폭):
+  이 파도 성분의 높이입니다. w가 크면 큰 파도, 작으면 작은 파도.
+cos(...)  (코사인):
+  파도 모양이 올라갔다 내려가는 코사인 곡선이라는 뜻입니다.
+kx,ᵢ · x + ky,ᵢ · y (공간 부분):
+  파도가 어느 방향으로 가는지 나타냅니다.
+  kx = 동서 방향 성분, ky = 남북 방향 성분.
+  kx=0.1, ky=0이면 파도가 정동쪽으로 진행합니다.
+−ωᵢt (시간 부분):
+  시간이 흐를수록 파도가 앞으로 나아갑니다. 마이너스(-) 부호가 "진행"을 나타냅니다.
+  ωᵢ가 크면 파도가 빨리 진동합니다.
+φᵢ (피, 위상):
+  지금 이 순간 파봉(파도 꼭대기)이 어디에 있는지입니다.
+━━━ 6가지 혁신 포인트 — 쉽게 설명 ━━━
+❶ 격자 없음 (Grid-free):
+  기존: 격자 칸에 저장 → 격자 칸 없는 곳은 계산 불가.
+  WaveSplat: 수식으로 계산 → 어느 위치든 직접 계산 가능.
+  비유: 지도책(격자) vs GPS 수식. GPS는 어느 위치든 좌표만 있으면 됩니다.
+❷ 물리 법칙 강제 (Dispersion 하드 제약):
+  ω = √(g|k|tanh(|k|d)) 를 반드시 만족해야 합니다.
+  쉽게: "추정된 파도가 반드시 진짜 물리학적 파도여야 한다"는 규칙.
+  이걸 강제하면: 파도의 속도(ω)를 따로 추정할 필요가 없어집니다. 파장(k)에서 자동 계산.
+  효과: 파라미터 5개→4개 절약 + 미래 예측이 안정적.
+  이것 없으면: 현재는 맞아도 1초 후에 완전히 틀어집니다 (Ablation 슬라이드에서 확인).
+❸ 자동 성분 수 조절 (Adaptive N):
+  단순한 바다: N=2~3개 성분으로 표현.
+  복잡한 바다: N=18~21개 성분까지 자동으로 늘어납니다.
+  왜 자동으로? 사람이 매번 설정하지 않아도 되고, 상황에 맞게 최적화됩니다.
+❹ 가까운 관측을 더 믿음 (Confidence weighting):
+  멀리서 온 레이저 점은 오차가 큽니다. 가까운 점은 정확합니다.
+  가까운 점의 영향을 더 크게, 먼 점의 영향을 더 작게 설정합니다.
+❺ 5가지 지표 사전 정의:
+  실험 전에 "이 5가지로 평가하겠다"고 미리 공표합니다.
+  좋은 결과만 골라 보여주는 편향(cherry-pick)을 방지합니다.
+❻ 비교 대상을 최적화해서 비교:
+  "이미 충분히 좋게 만든 기존 방법"과 비교해야 공정합니다.
+  ETKF를 24가지 설정으로 실험해서 가장 좋은 것과 비교합니다.</a:t>
             </a:r>
           </a:p>
         </p:txBody>
@@ -3598,24 +3912,39 @@
           <a:lstStyle/>
           <a:p>
             <a:r>
-              <a:t>[Forward Model 설명 — "파도 모델"]
-z(x,y,t) = Σᵢ wᵢ cos(kx,ᵢx + ky,ᵢy − ωᵢt + φᵢ)
-하드 제약: ωᵢ = √(g · |kᵢ| · tanh(|kᵢ| · d))
-자유 파라미터: {wᵢ, kx,ᵢ, ky,ᵢ, φᵢ} → 4N개
-"하드 제약"이란?: ω(각주파수)는 k(파수)에서 자동으로 계산됩니다. 따로 추정할 필요가 없습니다.
-→ 이것이 핵심입니다. 물리 법칙이 파라미터 하나를 "공짜"로 결정해주는 셈입니다.
-→ 그 결과 파도 성분 N개를 표현하는 데 5N개 대신 4N개만 씁니다.
-왜 ω를 자유롭게 두면 안 되는가?
-→ 컴퓨터가 "현재 데이터에만 맞추려고" ω를 이상한 값으로 최적화합니다.
-→ 현재 순간은 오차가 작지만, 1초 후에는 위상이 완전히 어긋납니다.
-→ (Ablation 슬라이드에서 이것을 직접 확인합니다.)
-[Observation Model 설명 — "어떤 관측점을 얼마나 믿을 것인가"]
-cⱼ = cos(θⱼ) / (dⱼ / d_ref)
-θⱼ: 레이저가 수면에 닿는 각도 (90도에 가까울수록 정확)
-dⱼ: 레이저 거리 (가까울수록 정확)
-d_ref = 125m: 기준 거리
-비유: 사람이 눈 앞 1m에 있는 것은 잘 보이고, 100m 떨어진 것은 잘 안 보이는 것처럼, 가까운 관측점은 더 믿고 먼 관측점은 덜 믿습니다.
-손실 함수 L: 추정값과 실제 관측값의 차이를 cⱼ로 가중 평균낸 것. λ₁은 파도 성분 수를 줄이는 페널티, λs는 부드럽게 만드는 페널티.</a:t>
+              <a:t>━━━ 방법론 (1) — 두 가지 모델 ━━━
+WaveSplat은 두 가지 모델로 구성됩니다.
+  1. "파도를 어떻게 표현하는가" (Forward Model)
+  2. "관측 데이터를 어떻게 활용하는가" (Observation Model)
+━━━ Forward Model — 파도 표현 방법 ━━━
+수식: z(x,y,t) = Σᵢ wᵢ cos(kx,ᵢx + ky,ᵢy − ωᵢt + φᵢ)
+이 수식을 음악에 비유하면:
+  바다 파도 = 여러 악기가 동시에 연주하는 교향곡
+  각 파도 성분(wᵢ, kx,ᵢ, ky,ᵢ, φᵢ) = 각 악기 (음량, 음정, 박자)
+  WaveSplat이 하는 일 = 교향곡 소리를 듣고 "어떤 악기가 어떤 음을 연주하는지" 역으로 알아내는 것
+"하드 제약"이란?:
+  ωᵢ = √(g·|kᵢ|·tanh(|kᵢ|·d)) 를 반드시 지켜야 합니다.
+  ωᵢ는 파도가 얼마나 빨리 진동하는가. |kᵢ|는 파장의 역수(파도가 얼마나 촘촘한가).
+  비유: "무거운 공은 빠르게 낙하한다"는 중력 법칙처럼,
+  파도도 파장에 따라 진행 속도가 물리학적으로 정해져 있습니다.
+  이 법칙을 "강제"하면, ω를 따로 추정할 필요가 없어집니다.
+왜 이게 중요한가?:
+  ω를 자유롭게 최적화하면 → 컴퓨터가 "지금 순간에만 맞는" 이상한 ω를 찾습니다.
+  1초 후 → 파도 위치가 완전히 틀어집니다.
+  하드 제약을 쓰면 → 지금도 맞고, 미래도 정확하게 예측됩니다.
+━━━ Observation Model — 관측 데이터 활용 방법 ━━━
+수식: cⱼ = cos(θⱼ) / (dⱼ / d_ref)
+이것은 "어떤 관측점을 얼마나 믿을 것인가"를 결정합니다.
+cⱼ = 이 관측점의 신뢰도 (클수록 더 믿음)
+θⱼ = 레이저가 수면에 닿는 각도 (직각에 가까울수록 정확)
+dⱼ = 거리 (가까울수록 정확)
+d_ref = 125m (기준 거리, 이보다 가까우면 더 믿고, 멀면 덜 믿음)
+비유:
+  가까이서 본 것은 잘 보이고 (신뢰도 높음)
+  멀리서 흐릿하게 본 것은 덜 믿음 (신뢰도 낮음)
+  우리가 자연스럽게 하는 "판단"을 수식으로 표현한 것입니다.
+손실 함수 L: "추정값이 관측과 얼마나 다른가"를 나타냅니다. 이것을 최소화하도록 최적화합니다.
+λ₁과 λs: 너무 복잡하게 추정하지 않도록 하는 페널티. "단순한 것이 더 나을 수 있다"는 규칙.</a:t>
             </a:r>
           </a:p>
         </p:txBody>
